--- a/指導課訪問_みらい青空学園/指導課訪問_５校時指導助言資料_みらい青空学園.pptx
+++ b/指導課訪問_みらい青空学園/指導課訪問_５校時指導助言資料_みらい青空学園.pptx
@@ -2051,13 +2051,15 @@
         </p:nvSpPr>
         <p:spPr>
           <a:xfrm>
-            <a:off x="548640" y="566928"/>
-            <a:ext cx="8046720" cy="457200"/>
-          </a:xfrm>
-          <a:prstGeom prst="rect">
-            <a:avLst/>
-          </a:prstGeom>
-          <a:noFill/>
+            <a:off x="0" y="0"/>
+            <a:ext cx="9144000" cy="2862072"/>
+          </a:xfrm>
+          <a:prstGeom prst="rect">
+            <a:avLst/>
+          </a:prstGeom>
+          <a:solidFill>
+            <a:srgbClr val="44C1A3"/>
+          </a:solidFill>
           <a:ln/>
         </p:spPr>
         <p:txBody>
@@ -2065,20 +2067,43 @@
           <a:lstStyle/>
           <a:p>
             <a:pPr algn="l" indent="0" marL="0">
-              <a:buNone/>
-            </a:pPr>
-            <a:r>
-              <a:rPr lang="en-US" sz="2200" b="1" dirty="0">
-                <a:solidFill>
-                  <a:srgbClr val="00B0F0"/>
-                </a:solidFill>
-                <a:latin typeface="Meiryo" pitchFamily="34" charset="0"/>
-                <a:ea typeface="Meiryo" pitchFamily="34" charset="-122"/>
-                <a:cs typeface="Meiryo" pitchFamily="34" charset="-120"/>
-              </a:rPr>
-              <a:t>令和８年度　教育指導課訪問</a:t>
-            </a:r>
-            <a:endParaRPr lang="en-US" sz="2200" dirty="0"/>
+              <a:lnSpc>
+                <a:spcPct val="120000"/>
+              </a:lnSpc>
+              <a:buNone/>
+            </a:pPr>
+            <a:r>
+              <a:rPr lang="en-US" sz="4000" b="1" dirty="0">
+                <a:solidFill>
+                  <a:srgbClr val="FFFFFF"/>
+                </a:solidFill>
+                <a:latin typeface="游ゴシック" pitchFamily="34" charset="0"/>
+                <a:ea typeface="游ゴシック" pitchFamily="34" charset="-122"/>
+                <a:cs typeface="游ゴシック" pitchFamily="34" charset="-120"/>
+              </a:rPr>
+              <a:t>　練馬区立みらい青空学園</a:t>
+            </a:r>
+            <a:endParaRPr lang="en-US" sz="4000" dirty="0"/>
+          </a:p>
+          <a:p>
+            <a:pPr algn="l" indent="0" marL="0">
+              <a:lnSpc>
+                <a:spcPct val="120000"/>
+              </a:lnSpc>
+              <a:buNone/>
+            </a:pPr>
+            <a:r>
+              <a:rPr lang="en-US" sz="4000" b="1" dirty="0">
+                <a:solidFill>
+                  <a:srgbClr val="FFFFFF"/>
+                </a:solidFill>
+                <a:latin typeface="游ゴシック" pitchFamily="34" charset="0"/>
+                <a:ea typeface="游ゴシック" pitchFamily="34" charset="-122"/>
+                <a:cs typeface="游ゴシック" pitchFamily="34" charset="-120"/>
+              </a:rPr>
+              <a:t>　教育指導課訪問（５校時）</a:t>
+            </a:r>
+            <a:endParaRPr lang="en-US" sz="4000" dirty="0"/>
           </a:p>
         </p:txBody>
       </p:sp>
@@ -2090,8 +2115,8 @@
         </p:nvSpPr>
         <p:spPr>
           <a:xfrm>
-            <a:off x="548640" y="1060704"/>
-            <a:ext cx="8046720" cy="777240"/>
+            <a:off x="475488" y="3154680"/>
+            <a:ext cx="4754880" cy="1188720"/>
           </a:xfrm>
           <a:prstGeom prst="rect">
             <a:avLst/>
@@ -2100,24 +2125,67 @@
           <a:ln/>
         </p:spPr>
         <p:txBody>
-          <a:bodyPr wrap="square" lIns="0" tIns="0" rIns="0" bIns="0" rtlCol="0" anchor="ctr"/>
-          <a:lstStyle/>
-          <a:p>
-            <a:pPr algn="l" indent="0" marL="0">
-              <a:buNone/>
-            </a:pPr>
-            <a:r>
-              <a:rPr lang="en-US" sz="4000" b="1" dirty="0">
-                <a:solidFill>
-                  <a:srgbClr val="1A1A1A"/>
-                </a:solidFill>
-                <a:latin typeface="Meiryo" pitchFamily="34" charset="0"/>
-                <a:ea typeface="Meiryo" pitchFamily="34" charset="-122"/>
-                <a:cs typeface="Meiryo" pitchFamily="34" charset="-120"/>
-              </a:rPr>
-              <a:t>練馬区立みらい青空学園</a:t>
-            </a:r>
-            <a:endParaRPr lang="en-US" sz="4000" dirty="0"/>
+          <a:bodyPr wrap="square" lIns="0" tIns="0" rIns="0" bIns="0" rtlCol="0" anchor="t"/>
+          <a:lstStyle/>
+          <a:p>
+            <a:pPr algn="l" indent="0" marL="0">
+              <a:lnSpc>
+                <a:spcPct val="135000"/>
+              </a:lnSpc>
+              <a:buNone/>
+            </a:pPr>
+            <a:r>
+              <a:rPr lang="en-US" sz="1350" b="1" dirty="0">
+                <a:solidFill>
+                  <a:srgbClr val="595959"/>
+                </a:solidFill>
+                <a:latin typeface="メイリオ" pitchFamily="34" charset="0"/>
+                <a:ea typeface="メイリオ" pitchFamily="34" charset="-122"/>
+                <a:cs typeface="メイリオ" pitchFamily="34" charset="-120"/>
+              </a:rPr>
+              <a:t>授業者　塚本　瑞穂　先生（外国語・７年Ｂ組）</a:t>
+            </a:r>
+            <a:endParaRPr lang="en-US" sz="1350" dirty="0"/>
+          </a:p>
+          <a:p>
+            <a:pPr algn="l" indent="0" marL="0">
+              <a:lnSpc>
+                <a:spcPct val="135000"/>
+              </a:lnSpc>
+              <a:buNone/>
+            </a:pPr>
+            <a:r>
+              <a:rPr lang="en-US" sz="1350" b="1" dirty="0">
+                <a:solidFill>
+                  <a:srgbClr val="595959"/>
+                </a:solidFill>
+                <a:latin typeface="メイリオ" pitchFamily="34" charset="0"/>
+                <a:ea typeface="メイリオ" pitchFamily="34" charset="-122"/>
+                <a:cs typeface="メイリオ" pitchFamily="34" charset="-120"/>
+              </a:rPr>
+              <a:t>　　　　田口　和磨　先生（保健体育・９年ＡＢ組）</a:t>
+            </a:r>
+            <a:endParaRPr lang="en-US" sz="1350" dirty="0"/>
+          </a:p>
+          <a:p>
+            <a:pPr algn="l" indent="0" marL="0">
+              <a:lnSpc>
+                <a:spcPct val="135000"/>
+              </a:lnSpc>
+              <a:buNone/>
+            </a:pPr>
+            <a:r>
+              <a:rPr lang="en-US" sz="1350" b="1" dirty="0">
+                <a:solidFill>
+                  <a:srgbClr val="595959"/>
+                </a:solidFill>
+                <a:latin typeface="メイリオ" pitchFamily="34" charset="0"/>
+                <a:ea typeface="メイリオ" pitchFamily="34" charset="-122"/>
+                <a:cs typeface="メイリオ" pitchFamily="34" charset="-120"/>
+              </a:rPr>
+              <a:t>　　　　東海林　静江　先生（道徳・特別支援学級Ｄ組）</a:t>
+            </a:r>
+            <a:endParaRPr lang="en-US" sz="1350" dirty="0"/>
           </a:p>
         </p:txBody>
       </p:sp>
@@ -2129,8 +2197,8 @@
         </p:nvSpPr>
         <p:spPr>
           <a:xfrm>
-            <a:off x="548640" y="1847088"/>
-            <a:ext cx="8046720" cy="566928"/>
+            <a:off x="5349240" y="3154680"/>
+            <a:ext cx="3319272" cy="1280160"/>
           </a:xfrm>
           <a:prstGeom prst="rect">
             <a:avLst/>
@@ -2139,188 +2207,67 @@
           <a:ln/>
         </p:spPr>
         <p:txBody>
-          <a:bodyPr wrap="square" lIns="0" tIns="0" rIns="0" bIns="0" rtlCol="0" anchor="ctr"/>
-          <a:lstStyle/>
-          <a:p>
-            <a:pPr algn="l" indent="0" marL="0">
-              <a:buNone/>
-            </a:pPr>
-            <a:r>
-              <a:rPr lang="en-US" sz="3000" b="1" dirty="0">
-                <a:solidFill>
-                  <a:srgbClr val="1A1A1A"/>
-                </a:solidFill>
-                <a:latin typeface="Meiryo" pitchFamily="34" charset="0"/>
-                <a:ea typeface="Meiryo" pitchFamily="34" charset="-122"/>
-                <a:cs typeface="Meiryo" pitchFamily="34" charset="-120"/>
-              </a:rPr>
-              <a:t>５校時　指導・講評</a:t>
-            </a:r>
-            <a:endParaRPr lang="en-US" sz="3000" dirty="0"/>
-          </a:p>
-        </p:txBody>
-      </p:sp>
-      <p:sp>
-        <p:nvSpPr>
-          <p:cNvPr id="5" name="Text 3"/>
-          <p:cNvSpPr txBox="1"/>
-          <p:nvPr/>
-        </p:nvSpPr>
-        <p:spPr>
-          <a:xfrm>
-            <a:off x="548640" y="2615184"/>
-            <a:ext cx="5120640" cy="1188720"/>
-          </a:xfrm>
-          <a:prstGeom prst="rect">
-            <a:avLst/>
-          </a:prstGeom>
-          <a:noFill/>
-          <a:ln/>
-        </p:spPr>
-        <p:txBody>
           <a:bodyPr wrap="square" lIns="0" tIns="0" rIns="0" bIns="0" rtlCol="0" anchor="t"/>
           <a:lstStyle/>
           <a:p>
-            <a:pPr algn="l" indent="0" marL="0">
+            <a:pPr algn="r" indent="0" marL="0">
               <a:lnSpc>
                 <a:spcPct val="135000"/>
               </a:lnSpc>
               <a:buNone/>
             </a:pPr>
             <a:r>
-              <a:rPr lang="en-US" sz="1400" b="1" dirty="0">
-                <a:solidFill>
-                  <a:srgbClr val="595959"/>
-                </a:solidFill>
-                <a:latin typeface="Meiryo" pitchFamily="34" charset="0"/>
-                <a:ea typeface="Meiryo" pitchFamily="34" charset="-122"/>
-                <a:cs typeface="Meiryo" pitchFamily="34" charset="-120"/>
-              </a:rPr>
-              <a:t>授業者　塚本　瑞穂　先生（外国語・７年Ｂ組）</a:t>
-            </a:r>
-            <a:endParaRPr lang="en-US" sz="1400" dirty="0"/>
-          </a:p>
-          <a:p>
-            <a:pPr algn="l" indent="0" marL="0">
+              <a:rPr lang="en-US" sz="1800" b="1" dirty="0">
+                <a:solidFill>
+                  <a:srgbClr val="595959"/>
+                </a:solidFill>
+                <a:latin typeface="ＭＳ Ｐゴシック" pitchFamily="34" charset="0"/>
+                <a:ea typeface="ＭＳ Ｐゴシック" pitchFamily="34" charset="-122"/>
+                <a:cs typeface="ＭＳ Ｐゴシック" pitchFamily="34" charset="-120"/>
+              </a:rPr>
+              <a:t>令和８年９月９日（水）</a:t>
+            </a:r>
+            <a:endParaRPr lang="en-US" sz="1800" dirty="0"/>
+          </a:p>
+          <a:p>
+            <a:pPr algn="r" indent="0" marL="0">
               <a:lnSpc>
                 <a:spcPct val="135000"/>
               </a:lnSpc>
               <a:buNone/>
             </a:pPr>
             <a:r>
-              <a:rPr lang="en-US" sz="1400" b="1" dirty="0">
-                <a:solidFill>
-                  <a:srgbClr val="595959"/>
-                </a:solidFill>
-                <a:latin typeface="Meiryo" pitchFamily="34" charset="0"/>
-                <a:ea typeface="Meiryo" pitchFamily="34" charset="-122"/>
-                <a:cs typeface="Meiryo" pitchFamily="34" charset="-120"/>
-              </a:rPr>
-              <a:t>　　　　田口　和磨　先生（保健体育・９年ＡＢ組）</a:t>
-            </a:r>
-            <a:endParaRPr lang="en-US" sz="1400" dirty="0"/>
-          </a:p>
-          <a:p>
-            <a:pPr algn="l" indent="0" marL="0">
+              <a:rPr lang="en-US" sz="1800" b="1" dirty="0">
+                <a:solidFill>
+                  <a:srgbClr val="595959"/>
+                </a:solidFill>
+                <a:latin typeface="ＭＳ Ｐゴシック" pitchFamily="34" charset="0"/>
+                <a:ea typeface="ＭＳ Ｐゴシック" pitchFamily="34" charset="-122"/>
+                <a:cs typeface="ＭＳ Ｐゴシック" pitchFamily="34" charset="-120"/>
+              </a:rPr>
+              <a:t>練馬区教育委員会</a:t>
+            </a:r>
+            <a:endParaRPr lang="en-US" sz="1800" dirty="0"/>
+          </a:p>
+          <a:p>
+            <a:pPr algn="r" indent="0" marL="0">
               <a:lnSpc>
                 <a:spcPct val="135000"/>
               </a:lnSpc>
               <a:buNone/>
             </a:pPr>
             <a:r>
-              <a:rPr lang="en-US" sz="1400" b="1" dirty="0">
-                <a:solidFill>
-                  <a:srgbClr val="595959"/>
-                </a:solidFill>
-                <a:latin typeface="Meiryo" pitchFamily="34" charset="0"/>
-                <a:ea typeface="Meiryo" pitchFamily="34" charset="-122"/>
-                <a:cs typeface="Meiryo" pitchFamily="34" charset="-120"/>
-              </a:rPr>
-              <a:t>　　　　東海林　静江　先生（道徳・特別支援学級Ｄ組）</a:t>
-            </a:r>
-            <a:endParaRPr lang="en-US" sz="1400" dirty="0"/>
-          </a:p>
-        </p:txBody>
-      </p:sp>
-      <p:sp>
-        <p:nvSpPr>
-          <p:cNvPr id="6" name="Text 4"/>
-          <p:cNvSpPr txBox="1"/>
-          <p:nvPr/>
-        </p:nvSpPr>
-        <p:spPr>
-          <a:xfrm>
-            <a:off x="5852160" y="3246120"/>
-            <a:ext cx="2834640" cy="1280160"/>
-          </a:xfrm>
-          <a:prstGeom prst="rect">
-            <a:avLst/>
-          </a:prstGeom>
-          <a:noFill/>
-          <a:ln/>
-        </p:spPr>
-        <p:txBody>
-          <a:bodyPr wrap="square" lIns="0" tIns="0" rIns="0" bIns="0" rtlCol="0" anchor="ctr"/>
-          <a:lstStyle/>
-          <a:p>
-            <a:pPr algn="r" indent="0" marL="0">
-              <a:lnSpc>
-                <a:spcPct val="135000"/>
-              </a:lnSpc>
-              <a:buNone/>
-            </a:pPr>
-            <a:r>
-              <a:rPr lang="en-US" sz="1500" b="1" dirty="0">
-                <a:solidFill>
-                  <a:srgbClr val="595959"/>
-                </a:solidFill>
-                <a:latin typeface="Meiryo" pitchFamily="34" charset="0"/>
-                <a:ea typeface="Meiryo" pitchFamily="34" charset="-122"/>
-                <a:cs typeface="Meiryo" pitchFamily="34" charset="-120"/>
-              </a:rPr>
-              <a:t>令和８年９月９日（水）</a:t>
-            </a:r>
-            <a:endParaRPr lang="en-US" sz="1500" dirty="0"/>
-          </a:p>
-          <a:p>
-            <a:pPr algn="r" indent="0" marL="0">
-              <a:lnSpc>
-                <a:spcPct val="135000"/>
-              </a:lnSpc>
-              <a:buNone/>
-            </a:pPr>
-            <a:r>
-              <a:rPr lang="en-US" sz="1500" b="1" dirty="0">
-                <a:solidFill>
-                  <a:srgbClr val="595959"/>
-                </a:solidFill>
-                <a:latin typeface="Meiryo" pitchFamily="34" charset="0"/>
-                <a:ea typeface="Meiryo" pitchFamily="34" charset="-122"/>
-                <a:cs typeface="Meiryo" pitchFamily="34" charset="-120"/>
-              </a:rPr>
-              <a:t>練馬区教育委員会</a:t>
-            </a:r>
-            <a:endParaRPr lang="en-US" sz="1500" dirty="0"/>
-          </a:p>
-          <a:p>
-            <a:pPr algn="r" indent="0" marL="0">
-              <a:lnSpc>
-                <a:spcPct val="135000"/>
-              </a:lnSpc>
-              <a:buNone/>
-            </a:pPr>
-            <a:r>
-              <a:rPr lang="en-US" sz="1500" b="1" dirty="0">
-                <a:solidFill>
-                  <a:srgbClr val="595959"/>
-                </a:solidFill>
-                <a:latin typeface="Meiryo" pitchFamily="34" charset="0"/>
-                <a:ea typeface="Meiryo" pitchFamily="34" charset="-122"/>
-                <a:cs typeface="Meiryo" pitchFamily="34" charset="-120"/>
-              </a:rPr>
-              <a:t>指導主事　田口　暁之</a:t>
-            </a:r>
-            <a:endParaRPr lang="en-US" sz="1500" dirty="0"/>
+              <a:rPr lang="en-US" sz="1800" b="1" dirty="0">
+                <a:solidFill>
+                  <a:srgbClr val="595959"/>
+                </a:solidFill>
+                <a:latin typeface="ＭＳ Ｐゴシック" pitchFamily="34" charset="0"/>
+                <a:ea typeface="ＭＳ Ｐゴシック" pitchFamily="34" charset="-122"/>
+                <a:cs typeface="ＭＳ Ｐゴシック" pitchFamily="34" charset="-120"/>
+              </a:rPr>
+              <a:t>指導主事　紺多　章一郎</a:t>
+            </a:r>
+            <a:endParaRPr lang="en-US" sz="1800" dirty="0"/>
           </a:p>
         </p:txBody>
       </p:sp>
@@ -2357,14 +2304,14 @@
         </p:nvSpPr>
         <p:spPr>
           <a:xfrm>
-            <a:off x="0" y="0"/>
-            <a:ext cx="9144000" cy="576072"/>
+            <a:off x="0" y="-9144"/>
+            <a:ext cx="9144000" cy="1161288"/>
           </a:xfrm>
           <a:prstGeom prst="rect">
             <a:avLst/>
           </a:prstGeom>
           <a:solidFill>
-            <a:srgbClr val="00B0F0"/>
+            <a:srgbClr val="44C1A3"/>
           </a:solidFill>
           <a:ln/>
         </p:spPr>
@@ -2373,6 +2320,29 @@
           <a:lstStyle/>
           <a:p>
             <a:pPr algn="l" indent="0" marL="0">
+              <a:lnSpc>
+                <a:spcPct val="120000"/>
+              </a:lnSpc>
+              <a:buNone/>
+            </a:pPr>
+            <a:r>
+              <a:rPr lang="en-US" sz="3000" b="1" dirty="0">
+                <a:solidFill>
+                  <a:srgbClr val="FFFFFF"/>
+                </a:solidFill>
+                <a:latin typeface="メイリオ" pitchFamily="34" charset="0"/>
+                <a:ea typeface="メイリオ" pitchFamily="34" charset="-122"/>
+                <a:cs typeface="メイリオ" pitchFamily="34" charset="-120"/>
+              </a:rPr>
+              <a:t>　２　５校時の授業について</a:t>
+            </a:r>
+            <a:endParaRPr lang="en-US" sz="3000" dirty="0"/>
+          </a:p>
+          <a:p>
+            <a:pPr algn="l" indent="0" marL="0">
+              <a:lnSpc>
+                <a:spcPct val="120000"/>
+              </a:lnSpc>
               <a:buNone/>
             </a:pPr>
             <a:r>
@@ -2380,77 +2350,38 @@
                 <a:solidFill>
                   <a:srgbClr val="FFFFFF"/>
                 </a:solidFill>
-                <a:latin typeface="Meiryo" pitchFamily="34" charset="0"/>
-                <a:ea typeface="Meiryo" pitchFamily="34" charset="-122"/>
-                <a:cs typeface="Meiryo" pitchFamily="34" charset="-120"/>
-              </a:rPr>
-              <a:t>　２　５校時の授業について</a:t>
-            </a:r>
-            <a:endParaRPr lang="en-US" sz="2800" dirty="0"/>
-          </a:p>
-        </p:txBody>
-      </p:sp>
-      <p:sp>
-        <p:nvSpPr>
-          <p:cNvPr id="3" name="Text 1"/>
-          <p:cNvSpPr txBox="1"/>
-          <p:nvPr/>
-        </p:nvSpPr>
-        <p:spPr>
-          <a:xfrm>
-            <a:off x="640080" y="713232"/>
-            <a:ext cx="8046720" cy="411480"/>
-          </a:xfrm>
-          <a:prstGeom prst="rect">
-            <a:avLst/>
-          </a:prstGeom>
-          <a:noFill/>
-          <a:ln/>
-        </p:spPr>
-        <p:txBody>
-          <a:bodyPr wrap="square" lIns="0" tIns="0" rIns="0" bIns="0" rtlCol="0" anchor="ctr"/>
-          <a:lstStyle/>
-          <a:p>
-            <a:pPr algn="l" indent="0" marL="0">
-              <a:buNone/>
-            </a:pPr>
-            <a:r>
-              <a:rPr lang="en-US" sz="2100" b="1" dirty="0">
-                <a:solidFill>
-                  <a:srgbClr val="00B0F0"/>
-                </a:solidFill>
-                <a:latin typeface="Meiryo" pitchFamily="34" charset="0"/>
-                <a:ea typeface="Meiryo" pitchFamily="34" charset="-122"/>
-                <a:cs typeface="Meiryo" pitchFamily="34" charset="-120"/>
-              </a:rPr>
-              <a:t>② 対話によって学びは深まる</a:t>
-            </a:r>
-            <a:endParaRPr lang="en-US" sz="2100" dirty="0"/>
-          </a:p>
-        </p:txBody>
-      </p:sp>
-      <p:sp>
-        <p:nvSpPr>
-          <p:cNvPr id="4" name="Shape 2"/>
+                <a:latin typeface="メイリオ" pitchFamily="34" charset="0"/>
+                <a:ea typeface="メイリオ" pitchFamily="34" charset="-122"/>
+                <a:cs typeface="メイリオ" pitchFamily="34" charset="-120"/>
+              </a:rPr>
+              <a:t>　②　対話によって学びは深まる</a:t>
+            </a:r>
+            <a:endParaRPr lang="en-US" sz="3000" dirty="0"/>
+          </a:p>
+        </p:txBody>
+      </p:sp>
+      <p:sp>
+        <p:nvSpPr>
+          <p:cNvPr id="3" name="Shape 1"/>
           <p:cNvSpPr/>
           <p:nvPr/>
         </p:nvSpPr>
         <p:spPr>
           <a:xfrm>
-            <a:off x="320040" y="1207008"/>
-            <a:ext cx="2651760" cy="2377440"/>
+            <a:off x="320040" y="1417320"/>
+            <a:ext cx="2697480" cy="2395728"/>
           </a:xfrm>
           <a:prstGeom prst="roundRect">
             <a:avLst>
-              <a:gd name="adj" fmla="val 3077"/>
+              <a:gd name="adj" fmla="val 2290"/>
             </a:avLst>
           </a:prstGeom>
           <a:solidFill>
-            <a:srgbClr val="EAF6FD"/>
+            <a:srgbClr val="E9F7F3"/>
           </a:solidFill>
           <a:ln w="12700">
             <a:solidFill>
-              <a:srgbClr val="C9E6F5"/>
+              <a:srgbClr val="B9E5DA"/>
             </a:solidFill>
             <a:prstDash val="solid"/>
           </a:ln>
@@ -2458,14 +2389,53 @@
       </p:sp>
       <p:sp>
         <p:nvSpPr>
+          <p:cNvPr id="4" name="Text 2"/>
+          <p:cNvSpPr txBox="1"/>
+          <p:nvPr/>
+        </p:nvSpPr>
+        <p:spPr>
+          <a:xfrm>
+            <a:off x="466344" y="1527048"/>
+            <a:ext cx="2404872" cy="274320"/>
+          </a:xfrm>
+          <a:prstGeom prst="rect">
+            <a:avLst/>
+          </a:prstGeom>
+          <a:noFill/>
+          <a:ln/>
+        </p:spPr>
+        <p:txBody>
+          <a:bodyPr wrap="square" lIns="0" tIns="0" rIns="0" bIns="0" rtlCol="0" anchor="ctr"/>
+          <a:lstStyle/>
+          <a:p>
+            <a:pPr algn="l" indent="0" marL="0">
+              <a:buNone/>
+            </a:pPr>
+            <a:r>
+              <a:rPr lang="en-US" sz="1600" b="1" dirty="0">
+                <a:solidFill>
+                  <a:srgbClr val="44C1A3"/>
+                </a:solidFill>
+                <a:latin typeface="メイリオ" pitchFamily="34" charset="0"/>
+                <a:ea typeface="メイリオ" pitchFamily="34" charset="-122"/>
+                <a:cs typeface="メイリオ" pitchFamily="34" charset="-120"/>
+              </a:rPr>
+              <a:t>保健体育</a:t>
+            </a:r>
+            <a:endParaRPr lang="en-US" sz="1600" dirty="0"/>
+          </a:p>
+        </p:txBody>
+      </p:sp>
+      <p:sp>
+        <p:nvSpPr>
           <p:cNvPr id="5" name="Text 3"/>
           <p:cNvSpPr txBox="1"/>
           <p:nvPr/>
         </p:nvSpPr>
         <p:spPr>
           <a:xfrm>
-            <a:off x="466344" y="1325880"/>
-            <a:ext cx="2359152" cy="274320"/>
+            <a:off x="466344" y="1801368"/>
+            <a:ext cx="2404872" cy="237744"/>
           </a:xfrm>
           <a:prstGeom prst="rect">
             <a:avLst/>
@@ -2481,17 +2451,17 @@
               <a:buNone/>
             </a:pPr>
             <a:r>
-              <a:rPr lang="en-US" sz="1600" b="1" dirty="0">
-                <a:solidFill>
-                  <a:srgbClr val="00B0F0"/>
-                </a:solidFill>
-                <a:latin typeface="Meiryo" pitchFamily="34" charset="0"/>
-                <a:ea typeface="Meiryo" pitchFamily="34" charset="-122"/>
-                <a:cs typeface="Meiryo" pitchFamily="34" charset="-120"/>
-              </a:rPr>
-              <a:t>保健体育</a:t>
-            </a:r>
-            <a:endParaRPr lang="en-US" sz="1600" dirty="0"/>
+              <a:rPr lang="en-US" sz="1100" b="1" dirty="0">
+                <a:solidFill>
+                  <a:srgbClr val="808080"/>
+                </a:solidFill>
+                <a:latin typeface="メイリオ" pitchFamily="34" charset="0"/>
+                <a:ea typeface="メイリオ" pitchFamily="34" charset="-122"/>
+                <a:cs typeface="メイリオ" pitchFamily="34" charset="-120"/>
+              </a:rPr>
+              <a:t>田口　和磨　先生</a:t>
+            </a:r>
+            <a:endParaRPr lang="en-US" sz="1100" dirty="0"/>
           </a:p>
         </p:txBody>
       </p:sp>
@@ -2503,8 +2473,8 @@
         </p:nvSpPr>
         <p:spPr>
           <a:xfrm>
-            <a:off x="466344" y="1600200"/>
-            <a:ext cx="2359152" cy="237744"/>
+            <a:off x="466344" y="2075688"/>
+            <a:ext cx="2404872" cy="1609344"/>
           </a:xfrm>
           <a:prstGeom prst="rect">
             <a:avLst/>
@@ -2513,45 +2483,6 @@
           <a:ln/>
         </p:spPr>
         <p:txBody>
-          <a:bodyPr wrap="square" lIns="0" tIns="0" rIns="0" bIns="0" rtlCol="0" anchor="ctr"/>
-          <a:lstStyle/>
-          <a:p>
-            <a:pPr algn="l" indent="0" marL="0">
-              <a:buNone/>
-            </a:pPr>
-            <a:r>
-              <a:rPr lang="en-US" sz="1100" b="1" dirty="0">
-                <a:solidFill>
-                  <a:srgbClr val="595959"/>
-                </a:solidFill>
-                <a:latin typeface="Meiryo" pitchFamily="34" charset="0"/>
-                <a:ea typeface="Meiryo" pitchFamily="34" charset="-122"/>
-                <a:cs typeface="Meiryo" pitchFamily="34" charset="-120"/>
-              </a:rPr>
-              <a:t>田口　和磨　先生</a:t>
-            </a:r>
-            <a:endParaRPr lang="en-US" sz="1100" dirty="0"/>
-          </a:p>
-        </p:txBody>
-      </p:sp>
-      <p:sp>
-        <p:nvSpPr>
-          <p:cNvPr id="7" name="Text 5"/>
-          <p:cNvSpPr txBox="1"/>
-          <p:nvPr/>
-        </p:nvSpPr>
-        <p:spPr>
-          <a:xfrm>
-            <a:off x="466344" y="1883664"/>
-            <a:ext cx="2359152" cy="1572768"/>
-          </a:xfrm>
-          <a:prstGeom prst="rect">
-            <a:avLst/>
-          </a:prstGeom>
-          <a:noFill/>
-          <a:ln/>
-        </p:spPr>
-        <p:txBody>
           <a:bodyPr wrap="square" lIns="0" tIns="0" rIns="0" bIns="0" rtlCol="0" anchor="t"/>
           <a:lstStyle/>
           <a:p>
@@ -2564,11 +2495,11 @@
             <a:r>
               <a:rPr lang="en-US" sz="1350" b="1" dirty="0">
                 <a:solidFill>
-                  <a:srgbClr val="1A1A1A"/>
-                </a:solidFill>
-                <a:latin typeface="Meiryo" pitchFamily="34" charset="0"/>
-                <a:ea typeface="Meiryo" pitchFamily="34" charset="-122"/>
-                <a:cs typeface="Meiryo" pitchFamily="34" charset="-120"/>
+                  <a:srgbClr val="595959"/>
+                </a:solidFill>
+                <a:latin typeface="メイリオ" pitchFamily="34" charset="0"/>
+                <a:ea typeface="メイリオ" pitchFamily="34" charset="-122"/>
+                <a:cs typeface="メイリオ" pitchFamily="34" charset="-120"/>
               </a:rPr>
               <a:t>バディ同士で</a:t>
             </a:r>
@@ -2584,11 +2515,11 @@
             <a:r>
               <a:rPr lang="en-US" sz="1350" b="1" dirty="0">
                 <a:solidFill>
-                  <a:srgbClr val="EB6C15"/>
-                </a:solidFill>
-                <a:latin typeface="Meiryo" pitchFamily="34" charset="0"/>
-                <a:ea typeface="Meiryo" pitchFamily="34" charset="-122"/>
-                <a:cs typeface="Meiryo" pitchFamily="34" charset="-120"/>
+                  <a:srgbClr val="EE7B08"/>
+                </a:solidFill>
+                <a:latin typeface="メイリオ" pitchFamily="34" charset="0"/>
+                <a:ea typeface="メイリオ" pitchFamily="34" charset="-122"/>
+                <a:cs typeface="メイリオ" pitchFamily="34" charset="-120"/>
               </a:rPr>
               <a:t>互いの泳ぎを見て</a:t>
             </a:r>
@@ -2604,11 +2535,11 @@
             <a:r>
               <a:rPr lang="en-US" sz="1350" b="1" dirty="0">
                 <a:solidFill>
-                  <a:srgbClr val="EB6C15"/>
-                </a:solidFill>
-                <a:latin typeface="Meiryo" pitchFamily="34" charset="0"/>
-                <a:ea typeface="Meiryo" pitchFamily="34" charset="-122"/>
-                <a:cs typeface="Meiryo" pitchFamily="34" charset="-120"/>
+                  <a:srgbClr val="EE7B08"/>
+                </a:solidFill>
+                <a:latin typeface="メイリオ" pitchFamily="34" charset="0"/>
+                <a:ea typeface="メイリオ" pitchFamily="34" charset="-122"/>
+                <a:cs typeface="メイリオ" pitchFamily="34" charset="-120"/>
               </a:rPr>
               <a:t>改善点を考えていた。</a:t>
             </a:r>
@@ -2624,11 +2555,11 @@
             <a:r>
               <a:rPr lang="en-US" sz="1350" b="1" dirty="0">
                 <a:solidFill>
-                  <a:srgbClr val="1A1A1A"/>
-                </a:solidFill>
-                <a:latin typeface="Meiryo" pitchFamily="34" charset="0"/>
-                <a:ea typeface="Meiryo" pitchFamily="34" charset="-122"/>
-                <a:cs typeface="Meiryo" pitchFamily="34" charset="-120"/>
+                  <a:srgbClr val="595959"/>
+                </a:solidFill>
+                <a:latin typeface="メイリオ" pitchFamily="34" charset="0"/>
+                <a:ea typeface="メイリオ" pitchFamily="34" charset="-122"/>
+                <a:cs typeface="メイリオ" pitchFamily="34" charset="-120"/>
               </a:rPr>
               <a:t>得意な生徒が助言役を</a:t>
             </a:r>
@@ -2644,11 +2575,11 @@
             <a:r>
               <a:rPr lang="en-US" sz="1350" b="1" dirty="0">
                 <a:solidFill>
-                  <a:srgbClr val="1A1A1A"/>
-                </a:solidFill>
-                <a:latin typeface="Meiryo" pitchFamily="34" charset="0"/>
-                <a:ea typeface="Meiryo" pitchFamily="34" charset="-122"/>
-                <a:cs typeface="Meiryo" pitchFamily="34" charset="-120"/>
+                  <a:srgbClr val="595959"/>
+                </a:solidFill>
+                <a:latin typeface="メイリオ" pitchFamily="34" charset="0"/>
+                <a:ea typeface="メイリオ" pitchFamily="34" charset="-122"/>
+                <a:cs typeface="メイリオ" pitchFamily="34" charset="-120"/>
               </a:rPr>
               <a:t>担い、全員に役割が</a:t>
             </a:r>
@@ -2664,11 +2595,11 @@
             <a:r>
               <a:rPr lang="en-US" sz="1350" b="1" dirty="0">
                 <a:solidFill>
-                  <a:srgbClr val="1A1A1A"/>
-                </a:solidFill>
-                <a:latin typeface="Meiryo" pitchFamily="34" charset="0"/>
-                <a:ea typeface="Meiryo" pitchFamily="34" charset="-122"/>
-                <a:cs typeface="Meiryo" pitchFamily="34" charset="-120"/>
+                  <a:srgbClr val="595959"/>
+                </a:solidFill>
+                <a:latin typeface="メイリオ" pitchFamily="34" charset="0"/>
+                <a:ea typeface="メイリオ" pitchFamily="34" charset="-122"/>
+                <a:cs typeface="メイリオ" pitchFamily="34" charset="-120"/>
               </a:rPr>
               <a:t>あった。</a:t>
             </a:r>
@@ -2678,26 +2609,26 @@
       </p:sp>
       <p:sp>
         <p:nvSpPr>
-          <p:cNvPr id="8" name="Shape 6"/>
+          <p:cNvPr id="7" name="Shape 5"/>
           <p:cNvSpPr/>
           <p:nvPr/>
         </p:nvSpPr>
         <p:spPr>
           <a:xfrm>
-            <a:off x="3246120" y="1207008"/>
-            <a:ext cx="2651760" cy="2377440"/>
+            <a:off x="3227832" y="1417320"/>
+            <a:ext cx="2697480" cy="2395728"/>
           </a:xfrm>
           <a:prstGeom prst="roundRect">
             <a:avLst>
-              <a:gd name="adj" fmla="val 3077"/>
+              <a:gd name="adj" fmla="val 2290"/>
             </a:avLst>
           </a:prstGeom>
           <a:solidFill>
-            <a:srgbClr val="EAF6FD"/>
+            <a:srgbClr val="E9F7F3"/>
           </a:solidFill>
           <a:ln w="12700">
             <a:solidFill>
-              <a:srgbClr val="C9E6F5"/>
+              <a:srgbClr val="B9E5DA"/>
             </a:solidFill>
             <a:prstDash val="solid"/>
           </a:ln>
@@ -2705,14 +2636,53 @@
       </p:sp>
       <p:sp>
         <p:nvSpPr>
+          <p:cNvPr id="8" name="Text 6"/>
+          <p:cNvSpPr txBox="1"/>
+          <p:nvPr/>
+        </p:nvSpPr>
+        <p:spPr>
+          <a:xfrm>
+            <a:off x="3374136" y="1527048"/>
+            <a:ext cx="2404872" cy="274320"/>
+          </a:xfrm>
+          <a:prstGeom prst="rect">
+            <a:avLst/>
+          </a:prstGeom>
+          <a:noFill/>
+          <a:ln/>
+        </p:spPr>
+        <p:txBody>
+          <a:bodyPr wrap="square" lIns="0" tIns="0" rIns="0" bIns="0" rtlCol="0" anchor="ctr"/>
+          <a:lstStyle/>
+          <a:p>
+            <a:pPr algn="l" indent="0" marL="0">
+              <a:buNone/>
+            </a:pPr>
+            <a:r>
+              <a:rPr lang="en-US" sz="1600" b="1" dirty="0">
+                <a:solidFill>
+                  <a:srgbClr val="44C1A3"/>
+                </a:solidFill>
+                <a:latin typeface="メイリオ" pitchFamily="34" charset="0"/>
+                <a:ea typeface="メイリオ" pitchFamily="34" charset="-122"/>
+                <a:cs typeface="メイリオ" pitchFamily="34" charset="-120"/>
+              </a:rPr>
+              <a:t>道徳</a:t>
+            </a:r>
+            <a:endParaRPr lang="en-US" sz="1600" dirty="0"/>
+          </a:p>
+        </p:txBody>
+      </p:sp>
+      <p:sp>
+        <p:nvSpPr>
           <p:cNvPr id="9" name="Text 7"/>
           <p:cNvSpPr txBox="1"/>
           <p:nvPr/>
         </p:nvSpPr>
         <p:spPr>
           <a:xfrm>
-            <a:off x="3392424" y="1325880"/>
-            <a:ext cx="2359152" cy="274320"/>
+            <a:off x="3374136" y="1801368"/>
+            <a:ext cx="2404872" cy="237744"/>
           </a:xfrm>
           <a:prstGeom prst="rect">
             <a:avLst/>
@@ -2728,17 +2698,17 @@
               <a:buNone/>
             </a:pPr>
             <a:r>
-              <a:rPr lang="en-US" sz="1600" b="1" dirty="0">
-                <a:solidFill>
-                  <a:srgbClr val="00B0F0"/>
-                </a:solidFill>
-                <a:latin typeface="Meiryo" pitchFamily="34" charset="0"/>
-                <a:ea typeface="Meiryo" pitchFamily="34" charset="-122"/>
-                <a:cs typeface="Meiryo" pitchFamily="34" charset="-120"/>
-              </a:rPr>
-              <a:t>道徳</a:t>
-            </a:r>
-            <a:endParaRPr lang="en-US" sz="1600" dirty="0"/>
+              <a:rPr lang="en-US" sz="1100" b="1" dirty="0">
+                <a:solidFill>
+                  <a:srgbClr val="808080"/>
+                </a:solidFill>
+                <a:latin typeface="メイリオ" pitchFamily="34" charset="0"/>
+                <a:ea typeface="メイリオ" pitchFamily="34" charset="-122"/>
+                <a:cs typeface="メイリオ" pitchFamily="34" charset="-120"/>
+              </a:rPr>
+              <a:t>東海林　静江　先生</a:t>
+            </a:r>
+            <a:endParaRPr lang="en-US" sz="1100" dirty="0"/>
           </a:p>
         </p:txBody>
       </p:sp>
@@ -2750,8 +2720,8 @@
         </p:nvSpPr>
         <p:spPr>
           <a:xfrm>
-            <a:off x="3392424" y="1600200"/>
-            <a:ext cx="2359152" cy="237744"/>
+            <a:off x="3374136" y="2075688"/>
+            <a:ext cx="2404872" cy="1609344"/>
           </a:xfrm>
           <a:prstGeom prst="rect">
             <a:avLst/>
@@ -2760,45 +2730,6 @@
           <a:ln/>
         </p:spPr>
         <p:txBody>
-          <a:bodyPr wrap="square" lIns="0" tIns="0" rIns="0" bIns="0" rtlCol="0" anchor="ctr"/>
-          <a:lstStyle/>
-          <a:p>
-            <a:pPr algn="l" indent="0" marL="0">
-              <a:buNone/>
-            </a:pPr>
-            <a:r>
-              <a:rPr lang="en-US" sz="1100" b="1" dirty="0">
-                <a:solidFill>
-                  <a:srgbClr val="595959"/>
-                </a:solidFill>
-                <a:latin typeface="Meiryo" pitchFamily="34" charset="0"/>
-                <a:ea typeface="Meiryo" pitchFamily="34" charset="-122"/>
-                <a:cs typeface="Meiryo" pitchFamily="34" charset="-120"/>
-              </a:rPr>
-              <a:t>東海林　静江　先生</a:t>
-            </a:r>
-            <a:endParaRPr lang="en-US" sz="1100" dirty="0"/>
-          </a:p>
-        </p:txBody>
-      </p:sp>
-      <p:sp>
-        <p:nvSpPr>
-          <p:cNvPr id="11" name="Text 9"/>
-          <p:cNvSpPr txBox="1"/>
-          <p:nvPr/>
-        </p:nvSpPr>
-        <p:spPr>
-          <a:xfrm>
-            <a:off x="3392424" y="1883664"/>
-            <a:ext cx="2359152" cy="1572768"/>
-          </a:xfrm>
-          <a:prstGeom prst="rect">
-            <a:avLst/>
-          </a:prstGeom>
-          <a:noFill/>
-          <a:ln/>
-        </p:spPr>
-        <p:txBody>
           <a:bodyPr wrap="square" lIns="0" tIns="0" rIns="0" bIns="0" rtlCol="0" anchor="t"/>
           <a:lstStyle/>
           <a:p>
@@ -2811,11 +2742,11 @@
             <a:r>
               <a:rPr lang="en-US" sz="1350" b="1" dirty="0">
                 <a:solidFill>
-                  <a:srgbClr val="1A1A1A"/>
-                </a:solidFill>
-                <a:latin typeface="Meiryo" pitchFamily="34" charset="0"/>
-                <a:ea typeface="Meiryo" pitchFamily="34" charset="-122"/>
-                <a:cs typeface="Meiryo" pitchFamily="34" charset="-120"/>
+                  <a:srgbClr val="595959"/>
+                </a:solidFill>
+                <a:latin typeface="メイリオ" pitchFamily="34" charset="0"/>
+                <a:ea typeface="メイリオ" pitchFamily="34" charset="-122"/>
+                <a:cs typeface="メイリオ" pitchFamily="34" charset="-120"/>
               </a:rPr>
               <a:t>「嘘」をテーマに、</a:t>
             </a:r>
@@ -2831,11 +2762,11 @@
             <a:r>
               <a:rPr lang="en-US" sz="1350" b="1" dirty="0">
                 <a:solidFill>
-                  <a:srgbClr val="EB6C15"/>
-                </a:solidFill>
-                <a:latin typeface="Meiryo" pitchFamily="34" charset="0"/>
-                <a:ea typeface="Meiryo" pitchFamily="34" charset="-122"/>
-                <a:cs typeface="Meiryo" pitchFamily="34" charset="-120"/>
+                  <a:srgbClr val="EE7B08"/>
+                </a:solidFill>
+                <a:latin typeface="メイリオ" pitchFamily="34" charset="0"/>
+                <a:ea typeface="メイリオ" pitchFamily="34" charset="-122"/>
+                <a:cs typeface="メイリオ" pitchFamily="34" charset="-120"/>
               </a:rPr>
               <a:t>価値観の違いについて</a:t>
             </a:r>
@@ -2851,11 +2782,11 @@
             <a:r>
               <a:rPr lang="en-US" sz="1350" b="1" dirty="0">
                 <a:solidFill>
-                  <a:srgbClr val="EB6C15"/>
-                </a:solidFill>
-                <a:latin typeface="Meiryo" pitchFamily="34" charset="0"/>
-                <a:ea typeface="Meiryo" pitchFamily="34" charset="-122"/>
-                <a:cs typeface="Meiryo" pitchFamily="34" charset="-120"/>
+                  <a:srgbClr val="EE7B08"/>
+                </a:solidFill>
+                <a:latin typeface="メイリオ" pitchFamily="34" charset="0"/>
+                <a:ea typeface="メイリオ" pitchFamily="34" charset="-122"/>
+                <a:cs typeface="メイリオ" pitchFamily="34" charset="-120"/>
               </a:rPr>
               <a:t>議論していた。</a:t>
             </a:r>
@@ -2871,11 +2802,11 @@
             <a:r>
               <a:rPr lang="en-US" sz="1350" b="1" dirty="0">
                 <a:solidFill>
-                  <a:srgbClr val="1A1A1A"/>
-                </a:solidFill>
-                <a:latin typeface="Meiryo" pitchFamily="34" charset="0"/>
-                <a:ea typeface="Meiryo" pitchFamily="34" charset="-122"/>
-                <a:cs typeface="Meiryo" pitchFamily="34" charset="-120"/>
+                  <a:srgbClr val="595959"/>
+                </a:solidFill>
+                <a:latin typeface="メイリオ" pitchFamily="34" charset="0"/>
+                <a:ea typeface="メイリオ" pitchFamily="34" charset="-122"/>
+                <a:cs typeface="メイリオ" pitchFamily="34" charset="-120"/>
               </a:rPr>
               <a:t>発表より議論の時間を</a:t>
             </a:r>
@@ -2891,11 +2822,11 @@
             <a:r>
               <a:rPr lang="en-US" sz="1350" b="1" dirty="0">
                 <a:solidFill>
-                  <a:srgbClr val="1A1A1A"/>
-                </a:solidFill>
-                <a:latin typeface="Meiryo" pitchFamily="34" charset="0"/>
-                <a:ea typeface="Meiryo" pitchFamily="34" charset="-122"/>
-                <a:cs typeface="Meiryo" pitchFamily="34" charset="-120"/>
+                  <a:srgbClr val="595959"/>
+                </a:solidFill>
+                <a:latin typeface="メイリオ" pitchFamily="34" charset="0"/>
+                <a:ea typeface="メイリオ" pitchFamily="34" charset="-122"/>
+                <a:cs typeface="メイリオ" pitchFamily="34" charset="-120"/>
               </a:rPr>
               <a:t>重視した構成だった。</a:t>
             </a:r>
@@ -2905,26 +2836,26 @@
       </p:sp>
       <p:sp>
         <p:nvSpPr>
-          <p:cNvPr id="12" name="Shape 10"/>
+          <p:cNvPr id="11" name="Shape 9"/>
           <p:cNvSpPr/>
           <p:nvPr/>
         </p:nvSpPr>
         <p:spPr>
           <a:xfrm>
-            <a:off x="6172200" y="1207008"/>
-            <a:ext cx="2651760" cy="2377440"/>
+            <a:off x="6135624" y="1417320"/>
+            <a:ext cx="2697480" cy="2395728"/>
           </a:xfrm>
           <a:prstGeom prst="roundRect">
             <a:avLst>
-              <a:gd name="adj" fmla="val 3077"/>
+              <a:gd name="adj" fmla="val 2290"/>
             </a:avLst>
           </a:prstGeom>
           <a:solidFill>
-            <a:srgbClr val="EAF6FD"/>
+            <a:srgbClr val="E9F7F3"/>
           </a:solidFill>
           <a:ln w="12700">
             <a:solidFill>
-              <a:srgbClr val="C9E6F5"/>
+              <a:srgbClr val="B9E5DA"/>
             </a:solidFill>
             <a:prstDash val="solid"/>
           </a:ln>
@@ -2932,14 +2863,53 @@
       </p:sp>
       <p:sp>
         <p:nvSpPr>
+          <p:cNvPr id="12" name="Text 10"/>
+          <p:cNvSpPr txBox="1"/>
+          <p:nvPr/>
+        </p:nvSpPr>
+        <p:spPr>
+          <a:xfrm>
+            <a:off x="6281928" y="1527048"/>
+            <a:ext cx="2404872" cy="274320"/>
+          </a:xfrm>
+          <a:prstGeom prst="rect">
+            <a:avLst/>
+          </a:prstGeom>
+          <a:noFill/>
+          <a:ln/>
+        </p:spPr>
+        <p:txBody>
+          <a:bodyPr wrap="square" lIns="0" tIns="0" rIns="0" bIns="0" rtlCol="0" anchor="ctr"/>
+          <a:lstStyle/>
+          <a:p>
+            <a:pPr algn="l" indent="0" marL="0">
+              <a:buNone/>
+            </a:pPr>
+            <a:r>
+              <a:rPr lang="en-US" sz="1600" b="1" dirty="0">
+                <a:solidFill>
+                  <a:srgbClr val="44C1A3"/>
+                </a:solidFill>
+                <a:latin typeface="メイリオ" pitchFamily="34" charset="0"/>
+                <a:ea typeface="メイリオ" pitchFamily="34" charset="-122"/>
+                <a:cs typeface="メイリオ" pitchFamily="34" charset="-120"/>
+              </a:rPr>
+              <a:t>外国語</a:t>
+            </a:r>
+            <a:endParaRPr lang="en-US" sz="1600" dirty="0"/>
+          </a:p>
+        </p:txBody>
+      </p:sp>
+      <p:sp>
+        <p:nvSpPr>
           <p:cNvPr id="13" name="Text 11"/>
           <p:cNvSpPr txBox="1"/>
           <p:nvPr/>
         </p:nvSpPr>
         <p:spPr>
           <a:xfrm>
-            <a:off x="6318504" y="1325880"/>
-            <a:ext cx="2359152" cy="274320"/>
+            <a:off x="6281928" y="1801368"/>
+            <a:ext cx="2404872" cy="237744"/>
           </a:xfrm>
           <a:prstGeom prst="rect">
             <a:avLst/>
@@ -2955,17 +2925,17 @@
               <a:buNone/>
             </a:pPr>
             <a:r>
-              <a:rPr lang="en-US" sz="1600" b="1" dirty="0">
-                <a:solidFill>
-                  <a:srgbClr val="00B0F0"/>
-                </a:solidFill>
-                <a:latin typeface="Meiryo" pitchFamily="34" charset="0"/>
-                <a:ea typeface="Meiryo" pitchFamily="34" charset="-122"/>
-                <a:cs typeface="Meiryo" pitchFamily="34" charset="-120"/>
-              </a:rPr>
-              <a:t>外国語</a:t>
-            </a:r>
-            <a:endParaRPr lang="en-US" sz="1600" dirty="0"/>
+              <a:rPr lang="en-US" sz="1100" b="1" dirty="0">
+                <a:solidFill>
+                  <a:srgbClr val="808080"/>
+                </a:solidFill>
+                <a:latin typeface="メイリオ" pitchFamily="34" charset="0"/>
+                <a:ea typeface="メイリオ" pitchFamily="34" charset="-122"/>
+                <a:cs typeface="メイリオ" pitchFamily="34" charset="-120"/>
+              </a:rPr>
+              <a:t>塚本　瑞穂　先生</a:t>
+            </a:r>
+            <a:endParaRPr lang="en-US" sz="1100" dirty="0"/>
           </a:p>
         </p:txBody>
       </p:sp>
@@ -2977,8 +2947,8 @@
         </p:nvSpPr>
         <p:spPr>
           <a:xfrm>
-            <a:off x="6318504" y="1600200"/>
-            <a:ext cx="2359152" cy="237744"/>
+            <a:off x="6281928" y="2075688"/>
+            <a:ext cx="2404872" cy="1609344"/>
           </a:xfrm>
           <a:prstGeom prst="rect">
             <a:avLst/>
@@ -2987,24 +2957,127 @@
           <a:ln/>
         </p:spPr>
         <p:txBody>
-          <a:bodyPr wrap="square" lIns="0" tIns="0" rIns="0" bIns="0" rtlCol="0" anchor="ctr"/>
-          <a:lstStyle/>
-          <a:p>
-            <a:pPr algn="l" indent="0" marL="0">
-              <a:buNone/>
-            </a:pPr>
-            <a:r>
-              <a:rPr lang="en-US" sz="1100" b="1" dirty="0">
-                <a:solidFill>
-                  <a:srgbClr val="595959"/>
-                </a:solidFill>
-                <a:latin typeface="Meiryo" pitchFamily="34" charset="0"/>
-                <a:ea typeface="Meiryo" pitchFamily="34" charset="-122"/>
-                <a:cs typeface="Meiryo" pitchFamily="34" charset="-120"/>
-              </a:rPr>
-              <a:t>塚本　瑞穂　先生</a:t>
-            </a:r>
-            <a:endParaRPr lang="en-US" sz="1100" dirty="0"/>
+          <a:bodyPr wrap="square" lIns="0" tIns="0" rIns="0" bIns="0" rtlCol="0" anchor="t"/>
+          <a:lstStyle/>
+          <a:p>
+            <a:pPr algn="l" indent="0" marL="0">
+              <a:lnSpc>
+                <a:spcPct val="125000"/>
+              </a:lnSpc>
+              <a:buNone/>
+            </a:pPr>
+            <a:r>
+              <a:rPr lang="en-US" sz="1350" b="1" dirty="0">
+                <a:solidFill>
+                  <a:srgbClr val="595959"/>
+                </a:solidFill>
+                <a:latin typeface="メイリオ" pitchFamily="34" charset="0"/>
+                <a:ea typeface="メイリオ" pitchFamily="34" charset="-122"/>
+                <a:cs typeface="メイリオ" pitchFamily="34" charset="-120"/>
+              </a:rPr>
+              <a:t>ペアでのやり取りから</a:t>
+            </a:r>
+            <a:endParaRPr lang="en-US" sz="1350" dirty="0"/>
+          </a:p>
+          <a:p>
+            <a:pPr algn="l" indent="0" marL="0">
+              <a:lnSpc>
+                <a:spcPct val="125000"/>
+              </a:lnSpc>
+              <a:buNone/>
+            </a:pPr>
+            <a:r>
+              <a:rPr lang="en-US" sz="1350" b="1" dirty="0">
+                <a:solidFill>
+                  <a:srgbClr val="EE7B08"/>
+                </a:solidFill>
+                <a:latin typeface="メイリオ" pitchFamily="34" charset="0"/>
+                <a:ea typeface="メイリオ" pitchFamily="34" charset="-122"/>
+                <a:cs typeface="メイリオ" pitchFamily="34" charset="-120"/>
+              </a:rPr>
+              <a:t>全体の学びへつなぐ。</a:t>
+            </a:r>
+            <a:endParaRPr lang="en-US" sz="1350" dirty="0"/>
+          </a:p>
+          <a:p>
+            <a:pPr algn="l" indent="0" marL="0">
+              <a:lnSpc>
+                <a:spcPct val="125000"/>
+              </a:lnSpc>
+              <a:buNone/>
+            </a:pPr>
+            <a:r>
+              <a:rPr lang="en-US" sz="1350" b="1" dirty="0">
+                <a:solidFill>
+                  <a:srgbClr val="595959"/>
+                </a:solidFill>
+                <a:latin typeface="メイリオ" pitchFamily="34" charset="0"/>
+                <a:ea typeface="メイリオ" pitchFamily="34" charset="-122"/>
+                <a:cs typeface="メイリオ" pitchFamily="34" charset="-120"/>
+              </a:rPr>
+              <a:t>音読も一人ではなく</a:t>
+            </a:r>
+            <a:endParaRPr lang="en-US" sz="1350" dirty="0"/>
+          </a:p>
+          <a:p>
+            <a:pPr algn="l" indent="0" marL="0">
+              <a:lnSpc>
+                <a:spcPct val="125000"/>
+              </a:lnSpc>
+              <a:buNone/>
+            </a:pPr>
+            <a:r>
+              <a:rPr lang="en-US" sz="1350" b="1" dirty="0">
+                <a:solidFill>
+                  <a:srgbClr val="EE7B08"/>
+                </a:solidFill>
+                <a:latin typeface="メイリオ" pitchFamily="34" charset="0"/>
+                <a:ea typeface="メイリオ" pitchFamily="34" charset="-122"/>
+                <a:cs typeface="メイリオ" pitchFamily="34" charset="-120"/>
+              </a:rPr>
+              <a:t>相手とともに行い、</a:t>
+            </a:r>
+            <a:endParaRPr lang="en-US" sz="1350" dirty="0"/>
+          </a:p>
+          <a:p>
+            <a:pPr algn="l" indent="0" marL="0">
+              <a:lnSpc>
+                <a:spcPct val="125000"/>
+              </a:lnSpc>
+              <a:buNone/>
+            </a:pPr>
+            <a:r>
+              <a:rPr lang="en-US" sz="1350" b="1" dirty="0">
+                <a:solidFill>
+                  <a:srgbClr val="595959"/>
+                </a:solidFill>
+                <a:latin typeface="メイリオ" pitchFamily="34" charset="0"/>
+                <a:ea typeface="メイリオ" pitchFamily="34" charset="-122"/>
+                <a:cs typeface="メイリオ" pitchFamily="34" charset="-120"/>
+              </a:rPr>
+              <a:t>表現を確かなものに</a:t>
+            </a:r>
+            <a:endParaRPr lang="en-US" sz="1350" dirty="0"/>
+          </a:p>
+          <a:p>
+            <a:pPr algn="l" indent="0" marL="0">
+              <a:lnSpc>
+                <a:spcPct val="125000"/>
+              </a:lnSpc>
+              <a:buNone/>
+            </a:pPr>
+            <a:r>
+              <a:rPr lang="en-US" sz="1350" b="1" dirty="0">
+                <a:solidFill>
+                  <a:srgbClr val="595959"/>
+                </a:solidFill>
+                <a:latin typeface="メイリオ" pitchFamily="34" charset="0"/>
+                <a:ea typeface="メイリオ" pitchFamily="34" charset="-122"/>
+                <a:cs typeface="メイリオ" pitchFamily="34" charset="-120"/>
+              </a:rPr>
+              <a:t>していた。</a:t>
+            </a:r>
+            <a:endParaRPr lang="en-US" sz="1350" dirty="0"/>
           </a:p>
         </p:txBody>
       </p:sp>
@@ -3016,8 +3089,8 @@
         </p:nvSpPr>
         <p:spPr>
           <a:xfrm>
-            <a:off x="6318504" y="1883664"/>
-            <a:ext cx="2359152" cy="1572768"/>
+            <a:off x="320040" y="3977640"/>
+            <a:ext cx="8503920" cy="822960"/>
           </a:xfrm>
           <a:prstGeom prst="rect">
             <a:avLst/>
@@ -3031,201 +3104,59 @@
           <a:p>
             <a:pPr algn="l" indent="0" marL="0">
               <a:lnSpc>
-                <a:spcPct val="125000"/>
-              </a:lnSpc>
-              <a:buNone/>
-            </a:pPr>
-            <a:r>
-              <a:rPr lang="en-US" sz="1350" b="1" dirty="0">
-                <a:solidFill>
-                  <a:srgbClr val="1A1A1A"/>
-                </a:solidFill>
-                <a:latin typeface="Meiryo" pitchFamily="34" charset="0"/>
-                <a:ea typeface="Meiryo" pitchFamily="34" charset="-122"/>
-                <a:cs typeface="Meiryo" pitchFamily="34" charset="-120"/>
-              </a:rPr>
-              <a:t>ペアでのやり取りから</a:t>
-            </a:r>
-            <a:endParaRPr lang="en-US" sz="1350" dirty="0"/>
-          </a:p>
-          <a:p>
-            <a:pPr algn="l" indent="0" marL="0">
-              <a:lnSpc>
-                <a:spcPct val="125000"/>
-              </a:lnSpc>
-              <a:buNone/>
-            </a:pPr>
-            <a:r>
-              <a:rPr lang="en-US" sz="1350" b="1" dirty="0">
-                <a:solidFill>
-                  <a:srgbClr val="EB6C15"/>
-                </a:solidFill>
-                <a:latin typeface="Meiryo" pitchFamily="34" charset="0"/>
-                <a:ea typeface="Meiryo" pitchFamily="34" charset="-122"/>
-                <a:cs typeface="Meiryo" pitchFamily="34" charset="-120"/>
-              </a:rPr>
-              <a:t>全体の学びへつなぐ。</a:t>
-            </a:r>
-            <a:endParaRPr lang="en-US" sz="1350" dirty="0"/>
-          </a:p>
-          <a:p>
-            <a:pPr algn="l" indent="0" marL="0">
-              <a:lnSpc>
-                <a:spcPct val="125000"/>
-              </a:lnSpc>
-              <a:buNone/>
-            </a:pPr>
-            <a:r>
-              <a:rPr lang="en-US" sz="1350" b="1" dirty="0">
-                <a:solidFill>
-                  <a:srgbClr val="1A1A1A"/>
-                </a:solidFill>
-                <a:latin typeface="Meiryo" pitchFamily="34" charset="0"/>
-                <a:ea typeface="Meiryo" pitchFamily="34" charset="-122"/>
-                <a:cs typeface="Meiryo" pitchFamily="34" charset="-120"/>
-              </a:rPr>
-              <a:t>音読も一人ではなく</a:t>
-            </a:r>
-            <a:endParaRPr lang="en-US" sz="1350" dirty="0"/>
-          </a:p>
-          <a:p>
-            <a:pPr algn="l" indent="0" marL="0">
-              <a:lnSpc>
-                <a:spcPct val="125000"/>
-              </a:lnSpc>
-              <a:buNone/>
-            </a:pPr>
-            <a:r>
-              <a:rPr lang="en-US" sz="1350" b="1" dirty="0">
-                <a:solidFill>
-                  <a:srgbClr val="EB6C15"/>
-                </a:solidFill>
-                <a:latin typeface="Meiryo" pitchFamily="34" charset="0"/>
-                <a:ea typeface="Meiryo" pitchFamily="34" charset="-122"/>
-                <a:cs typeface="Meiryo" pitchFamily="34" charset="-120"/>
-              </a:rPr>
-              <a:t>相手とともに行い、</a:t>
-            </a:r>
-            <a:endParaRPr lang="en-US" sz="1350" dirty="0"/>
-          </a:p>
-          <a:p>
-            <a:pPr algn="l" indent="0" marL="0">
-              <a:lnSpc>
-                <a:spcPct val="125000"/>
-              </a:lnSpc>
-              <a:buNone/>
-            </a:pPr>
-            <a:r>
-              <a:rPr lang="en-US" sz="1350" b="1" dirty="0">
-                <a:solidFill>
-                  <a:srgbClr val="1A1A1A"/>
-                </a:solidFill>
-                <a:latin typeface="Meiryo" pitchFamily="34" charset="0"/>
-                <a:ea typeface="Meiryo" pitchFamily="34" charset="-122"/>
-                <a:cs typeface="Meiryo" pitchFamily="34" charset="-120"/>
-              </a:rPr>
-              <a:t>表現を確かなものに</a:t>
-            </a:r>
-            <a:endParaRPr lang="en-US" sz="1350" dirty="0"/>
-          </a:p>
-          <a:p>
-            <a:pPr algn="l" indent="0" marL="0">
-              <a:lnSpc>
-                <a:spcPct val="125000"/>
-              </a:lnSpc>
-              <a:buNone/>
-            </a:pPr>
-            <a:r>
-              <a:rPr lang="en-US" sz="1350" b="1" dirty="0">
-                <a:solidFill>
-                  <a:srgbClr val="1A1A1A"/>
-                </a:solidFill>
-                <a:latin typeface="Meiryo" pitchFamily="34" charset="0"/>
-                <a:ea typeface="Meiryo" pitchFamily="34" charset="-122"/>
-                <a:cs typeface="Meiryo" pitchFamily="34" charset="-120"/>
-              </a:rPr>
-              <a:t>していた。</a:t>
-            </a:r>
-            <a:endParaRPr lang="en-US" sz="1350" dirty="0"/>
-          </a:p>
-        </p:txBody>
-      </p:sp>
-      <p:sp>
-        <p:nvSpPr>
-          <p:cNvPr id="16" name="Text 14"/>
-          <p:cNvSpPr txBox="1"/>
-          <p:nvPr/>
-        </p:nvSpPr>
-        <p:spPr>
-          <a:xfrm>
-            <a:off x="320040" y="3822192"/>
-            <a:ext cx="8503920" cy="914400"/>
-          </a:xfrm>
-          <a:prstGeom prst="rect">
-            <a:avLst/>
-          </a:prstGeom>
-          <a:noFill/>
-          <a:ln/>
-        </p:spPr>
-        <p:txBody>
-          <a:bodyPr wrap="square" lIns="0" tIns="0" rIns="0" bIns="0" rtlCol="0" anchor="t"/>
-          <a:lstStyle/>
-          <a:p>
-            <a:pPr algn="l" indent="0" marL="0">
-              <a:lnSpc>
-                <a:spcPct val="130000"/>
-              </a:lnSpc>
-              <a:buNone/>
-            </a:pPr>
-            <a:r>
-              <a:rPr lang="en-US" sz="1700" b="1" dirty="0">
-                <a:solidFill>
-                  <a:srgbClr val="1A1A1A"/>
-                </a:solidFill>
-                <a:latin typeface="Meiryo" pitchFamily="34" charset="0"/>
-                <a:ea typeface="Meiryo" pitchFamily="34" charset="-122"/>
-                <a:cs typeface="Meiryo" pitchFamily="34" charset="-120"/>
+                <a:spcPct val="120000"/>
+              </a:lnSpc>
+              <a:buNone/>
+            </a:pPr>
+            <a:r>
+              <a:rPr lang="en-US" sz="1600" b="1" dirty="0">
+                <a:solidFill>
+                  <a:srgbClr val="595959"/>
+                </a:solidFill>
+                <a:latin typeface="メイリオ" pitchFamily="34" charset="0"/>
+                <a:ea typeface="メイリオ" pitchFamily="34" charset="-122"/>
+                <a:cs typeface="メイリオ" pitchFamily="34" charset="-120"/>
               </a:rPr>
               <a:t>教科は異なっても、共通していたのは</a:t>
             </a:r>
-            <a:endParaRPr lang="en-US" sz="1700" dirty="0"/>
-          </a:p>
-          <a:p>
-            <a:pPr algn="l" indent="0" marL="0">
-              <a:lnSpc>
-                <a:spcPct val="130000"/>
-              </a:lnSpc>
-              <a:buNone/>
-            </a:pPr>
-            <a:r>
-              <a:rPr lang="en-US" sz="1700" b="1" dirty="0">
-                <a:solidFill>
-                  <a:srgbClr val="EB6C15"/>
-                </a:solidFill>
-                <a:latin typeface="Meiryo" pitchFamily="34" charset="0"/>
-                <a:ea typeface="Meiryo" pitchFamily="34" charset="-122"/>
-                <a:cs typeface="Meiryo" pitchFamily="34" charset="-120"/>
+            <a:endParaRPr lang="en-US" sz="1600" dirty="0"/>
+          </a:p>
+          <a:p>
+            <a:pPr algn="l" indent="0" marL="0">
+              <a:lnSpc>
+                <a:spcPct val="120000"/>
+              </a:lnSpc>
+              <a:buNone/>
+            </a:pPr>
+            <a:r>
+              <a:rPr lang="en-US" sz="1600" b="1" dirty="0">
+                <a:solidFill>
+                  <a:srgbClr val="EE7B08"/>
+                </a:solidFill>
+                <a:latin typeface="メイリオ" pitchFamily="34" charset="0"/>
+                <a:ea typeface="メイリオ" pitchFamily="34" charset="-122"/>
+                <a:cs typeface="メイリオ" pitchFamily="34" charset="-120"/>
               </a:rPr>
               <a:t>「相手を通して自分を見つめる学び」</a:t>
             </a:r>
             <a:pPr algn="l" indent="0" marL="0">
               <a:lnSpc>
-                <a:spcPct val="130000"/>
-              </a:lnSpc>
-              <a:buNone/>
-            </a:pPr>
-            <a:r>
-              <a:rPr lang="en-US" sz="1700" b="1" dirty="0">
-                <a:solidFill>
-                  <a:srgbClr val="1A1A1A"/>
-                </a:solidFill>
-                <a:latin typeface="Meiryo" pitchFamily="34" charset="0"/>
-                <a:ea typeface="Meiryo" pitchFamily="34" charset="-122"/>
-                <a:cs typeface="Meiryo" pitchFamily="34" charset="-120"/>
+                <a:spcPct val="120000"/>
+              </a:lnSpc>
+              <a:buNone/>
+            </a:pPr>
+            <a:r>
+              <a:rPr lang="en-US" sz="1600" b="1" dirty="0">
+                <a:solidFill>
+                  <a:srgbClr val="595959"/>
+                </a:solidFill>
+                <a:latin typeface="メイリオ" pitchFamily="34" charset="0"/>
+                <a:ea typeface="メイリオ" pitchFamily="34" charset="-122"/>
+                <a:cs typeface="メイリオ" pitchFamily="34" charset="-120"/>
               </a:rPr>
               <a:t>であった。</a:t>
             </a:r>
-            <a:endParaRPr lang="en-US" sz="1700" dirty="0"/>
+            <a:endParaRPr lang="en-US" sz="1600" dirty="0"/>
           </a:p>
         </p:txBody>
       </p:sp>
@@ -3262,14 +3193,14 @@
         </p:nvSpPr>
         <p:spPr>
           <a:xfrm>
-            <a:off x="0" y="0"/>
-            <a:ext cx="9144000" cy="576072"/>
+            <a:off x="0" y="-9144"/>
+            <a:ext cx="9144000" cy="1161288"/>
           </a:xfrm>
           <a:prstGeom prst="rect">
             <a:avLst/>
           </a:prstGeom>
           <a:solidFill>
-            <a:srgbClr val="00B0F0"/>
+            <a:srgbClr val="44C1A3"/>
           </a:solidFill>
           <a:ln/>
         </p:spPr>
@@ -3278,6 +3209,29 @@
           <a:lstStyle/>
           <a:p>
             <a:pPr algn="l" indent="0" marL="0">
+              <a:lnSpc>
+                <a:spcPct val="120000"/>
+              </a:lnSpc>
+              <a:buNone/>
+            </a:pPr>
+            <a:r>
+              <a:rPr lang="en-US" sz="3000" b="1" dirty="0">
+                <a:solidFill>
+                  <a:srgbClr val="FFFFFF"/>
+                </a:solidFill>
+                <a:latin typeface="メイリオ" pitchFamily="34" charset="0"/>
+                <a:ea typeface="メイリオ" pitchFamily="34" charset="-122"/>
+                <a:cs typeface="メイリオ" pitchFamily="34" charset="-120"/>
+              </a:rPr>
+              <a:t>　２　５校時の授業について</a:t>
+            </a:r>
+            <a:endParaRPr lang="en-US" sz="3000" dirty="0"/>
+          </a:p>
+          <a:p>
+            <a:pPr algn="l" indent="0" marL="0">
+              <a:lnSpc>
+                <a:spcPct val="120000"/>
+              </a:lnSpc>
               <a:buNone/>
             </a:pPr>
             <a:r>
@@ -3285,35 +3239,131 @@
                 <a:solidFill>
                   <a:srgbClr val="FFFFFF"/>
                 </a:solidFill>
-                <a:latin typeface="Meiryo" pitchFamily="34" charset="0"/>
-                <a:ea typeface="Meiryo" pitchFamily="34" charset="-122"/>
-                <a:cs typeface="Meiryo" pitchFamily="34" charset="-120"/>
-              </a:rPr>
-              <a:t>　２　５校時の授業について</a:t>
-            </a:r>
-            <a:endParaRPr lang="en-US" sz="2800" dirty="0"/>
-          </a:p>
-        </p:txBody>
-      </p:sp>
-      <p:sp>
-        <p:nvSpPr>
-          <p:cNvPr id="3" name="Shape 1"/>
-          <p:cNvSpPr/>
-          <p:nvPr/>
-        </p:nvSpPr>
-        <p:spPr>
-          <a:xfrm>
-            <a:off x="640080" y="822960"/>
-            <a:ext cx="548640" cy="548640"/>
-          </a:xfrm>
-          <a:prstGeom prst="ellipse">
-            <a:avLst/>
-          </a:prstGeom>
-          <a:solidFill>
-            <a:srgbClr val="EB6C15"/>
-          </a:solidFill>
-          <a:ln/>
-        </p:spPr>
+                <a:latin typeface="メイリオ" pitchFamily="34" charset="0"/>
+                <a:ea typeface="メイリオ" pitchFamily="34" charset="-122"/>
+                <a:cs typeface="メイリオ" pitchFamily="34" charset="-120"/>
+              </a:rPr>
+              <a:t>　③　学習の自己調整</a:t>
+            </a:r>
+            <a:endParaRPr lang="en-US" sz="3000" dirty="0"/>
+          </a:p>
+        </p:txBody>
+      </p:sp>
+      <p:sp>
+        <p:nvSpPr>
+          <p:cNvPr id="3" name="Text 1"/>
+          <p:cNvSpPr txBox="1"/>
+          <p:nvPr/>
+        </p:nvSpPr>
+        <p:spPr>
+          <a:xfrm>
+            <a:off x="475488" y="1444752"/>
+            <a:ext cx="8193024" cy="1280160"/>
+          </a:xfrm>
+          <a:prstGeom prst="rect">
+            <a:avLst/>
+          </a:prstGeom>
+          <a:noFill/>
+          <a:ln/>
+        </p:spPr>
+        <p:txBody>
+          <a:bodyPr wrap="square" lIns="0" tIns="0" rIns="0" bIns="0" rtlCol="0" anchor="t"/>
+          <a:lstStyle/>
+          <a:p>
+            <a:pPr algn="l" indent="0" marL="0">
+              <a:lnSpc>
+                <a:spcPct val="120000"/>
+              </a:lnSpc>
+              <a:buNone/>
+            </a:pPr>
+            <a:r>
+              <a:rPr lang="en-US" sz="2100" b="1" dirty="0">
+                <a:solidFill>
+                  <a:srgbClr val="595959"/>
+                </a:solidFill>
+                <a:latin typeface="メイリオ" pitchFamily="34" charset="0"/>
+                <a:ea typeface="メイリオ" pitchFamily="34" charset="-122"/>
+                <a:cs typeface="メイリオ" pitchFamily="34" charset="-120"/>
+              </a:rPr>
+              <a:t>これから求められる子どもは、</a:t>
+            </a:r>
+            <a:endParaRPr lang="en-US" sz="2100" dirty="0"/>
+          </a:p>
+          <a:p>
+            <a:pPr algn="l" indent="0" marL="0">
+              <a:lnSpc>
+                <a:spcPct val="120000"/>
+              </a:lnSpc>
+              <a:buNone/>
+            </a:pPr>
+            <a:r>
+              <a:rPr lang="en-US" sz="2100" b="1" dirty="0">
+                <a:solidFill>
+                  <a:srgbClr val="595959"/>
+                </a:solidFill>
+                <a:latin typeface="メイリオ" pitchFamily="34" charset="0"/>
+                <a:ea typeface="メイリオ" pitchFamily="34" charset="-122"/>
+                <a:cs typeface="メイリオ" pitchFamily="34" charset="-120"/>
+              </a:rPr>
+              <a:t>　教えられたことを学ぶ子どもではなく、</a:t>
+            </a:r>
+            <a:endParaRPr lang="en-US" sz="2100" dirty="0"/>
+          </a:p>
+          <a:p>
+            <a:pPr algn="l" indent="0" marL="0">
+              <a:lnSpc>
+                <a:spcPct val="120000"/>
+              </a:lnSpc>
+              <a:buNone/>
+            </a:pPr>
+            <a:r>
+              <a:rPr lang="en-US" sz="2100" b="1" dirty="0">
+                <a:solidFill>
+                  <a:srgbClr val="595959"/>
+                </a:solidFill>
+                <a:latin typeface="メイリオ" pitchFamily="34" charset="0"/>
+                <a:ea typeface="メイリオ" pitchFamily="34" charset="-122"/>
+                <a:cs typeface="メイリオ" pitchFamily="34" charset="-120"/>
+              </a:rPr>
+              <a:t>　</a:t>
+            </a:r>
+            <a:pPr algn="l" indent="0" marL="0">
+              <a:lnSpc>
+                <a:spcPct val="120000"/>
+              </a:lnSpc>
+              <a:buNone/>
+            </a:pPr>
+            <a:r>
+              <a:rPr lang="en-US" sz="2100" b="1" dirty="0">
+                <a:solidFill>
+                  <a:srgbClr val="EE7B08"/>
+                </a:solidFill>
+                <a:latin typeface="メイリオ" pitchFamily="34" charset="0"/>
+                <a:ea typeface="メイリオ" pitchFamily="34" charset="-122"/>
+                <a:cs typeface="メイリオ" pitchFamily="34" charset="-120"/>
+              </a:rPr>
+              <a:t>自分で学び続ける子ども</a:t>
+            </a:r>
+            <a:pPr algn="l" indent="0" marL="0">
+              <a:lnSpc>
+                <a:spcPct val="120000"/>
+              </a:lnSpc>
+              <a:buNone/>
+            </a:pPr>
+            <a:r>
+              <a:rPr lang="en-US" sz="2100" b="1" dirty="0">
+                <a:solidFill>
+                  <a:srgbClr val="595959"/>
+                </a:solidFill>
+                <a:latin typeface="メイリオ" pitchFamily="34" charset="0"/>
+                <a:ea typeface="メイリオ" pitchFamily="34" charset="-122"/>
+                <a:cs typeface="メイリオ" pitchFamily="34" charset="-120"/>
+              </a:rPr>
+              <a:t>である。</a:t>
+            </a:r>
+            <a:endParaRPr lang="en-US" sz="2100" dirty="0"/>
+          </a:p>
+        </p:txBody>
       </p:sp>
       <p:sp>
         <p:nvSpPr>
@@ -3323,8 +3373,8 @@
         </p:nvSpPr>
         <p:spPr>
           <a:xfrm>
-            <a:off x="640080" y="822960"/>
-            <a:ext cx="548640" cy="548640"/>
+            <a:off x="475488" y="2880360"/>
+            <a:ext cx="8193024" cy="502920"/>
           </a:xfrm>
           <a:prstGeom prst="rect">
             <a:avLst/>
@@ -3333,280 +3383,86 @@
           <a:ln/>
         </p:spPr>
         <p:txBody>
-          <a:bodyPr wrap="square" lIns="0" tIns="0" rIns="0" bIns="0" rtlCol="0" anchor="ctr"/>
-          <a:lstStyle/>
-          <a:p>
-            <a:pPr algn="ctr" indent="0" marL="0">
-              <a:buNone/>
-            </a:pPr>
-            <a:r>
-              <a:rPr lang="en-US" sz="2800" b="1" dirty="0">
-                <a:solidFill>
-                  <a:srgbClr val="FFFFFF"/>
-                </a:solidFill>
-                <a:latin typeface="Meiryo" pitchFamily="34" charset="0"/>
-                <a:ea typeface="Meiryo" pitchFamily="34" charset="-122"/>
-                <a:cs typeface="Meiryo" pitchFamily="34" charset="-120"/>
-              </a:rPr>
-              <a:t>③</a:t>
-            </a:r>
-            <a:endParaRPr lang="en-US" sz="2800" dirty="0"/>
-          </a:p>
-        </p:txBody>
-      </p:sp>
-      <p:sp>
-        <p:nvSpPr>
-          <p:cNvPr id="5" name="Text 3"/>
-          <p:cNvSpPr txBox="1"/>
-          <p:nvPr/>
-        </p:nvSpPr>
-        <p:spPr>
-          <a:xfrm>
-            <a:off x="1325880" y="822960"/>
-            <a:ext cx="7406640" cy="548640"/>
-          </a:xfrm>
-          <a:prstGeom prst="rect">
-            <a:avLst/>
-          </a:prstGeom>
-          <a:noFill/>
-          <a:ln/>
-        </p:spPr>
-        <p:txBody>
-          <a:bodyPr wrap="square" lIns="0" tIns="0" rIns="0" bIns="0" rtlCol="0" anchor="ctr"/>
-          <a:lstStyle/>
-          <a:p>
-            <a:pPr algn="l" indent="0" marL="0">
-              <a:buNone/>
-            </a:pPr>
-            <a:r>
-              <a:rPr lang="en-US" sz="2400" b="1" dirty="0">
-                <a:solidFill>
-                  <a:srgbClr val="00B0F0"/>
-                </a:solidFill>
-                <a:latin typeface="Meiryo" pitchFamily="34" charset="0"/>
-                <a:ea typeface="Meiryo" pitchFamily="34" charset="-122"/>
-                <a:cs typeface="Meiryo" pitchFamily="34" charset="-120"/>
-              </a:rPr>
-              <a:t>今日の授業から見えたもの　学習の自己調整</a:t>
-            </a:r>
-            <a:endParaRPr lang="en-US" sz="2400" dirty="0"/>
-          </a:p>
-        </p:txBody>
-      </p:sp>
-      <p:sp>
-        <p:nvSpPr>
-          <p:cNvPr id="6" name="Text 4"/>
-          <p:cNvSpPr txBox="1"/>
-          <p:nvPr/>
-        </p:nvSpPr>
-        <p:spPr>
-          <a:xfrm>
-            <a:off x="640080" y="1554480"/>
-            <a:ext cx="8046720" cy="1234440"/>
-          </a:xfrm>
-          <a:prstGeom prst="rect">
-            <a:avLst/>
-          </a:prstGeom>
-          <a:noFill/>
-          <a:ln/>
-        </p:spPr>
-        <p:txBody>
           <a:bodyPr wrap="square" lIns="0" tIns="0" rIns="0" bIns="0" rtlCol="0" anchor="t"/>
           <a:lstStyle/>
           <a:p>
             <a:pPr algn="l" indent="0" marL="0">
               <a:lnSpc>
-                <a:spcPct val="140000"/>
-              </a:lnSpc>
-              <a:buNone/>
-            </a:pPr>
-            <a:r>
-              <a:rPr lang="en-US" sz="2200" b="1" dirty="0">
-                <a:solidFill>
-                  <a:srgbClr val="1A1A1A"/>
-                </a:solidFill>
-                <a:latin typeface="Meiryo" pitchFamily="34" charset="0"/>
-                <a:ea typeface="Meiryo" pitchFamily="34" charset="-122"/>
-                <a:cs typeface="Meiryo" pitchFamily="34" charset="-120"/>
-              </a:rPr>
-              <a:t>これから求められる子どもは、</a:t>
-            </a:r>
-            <a:endParaRPr lang="en-US" sz="2200" dirty="0"/>
-          </a:p>
-          <a:p>
-            <a:pPr algn="l" indent="0" marL="0">
-              <a:lnSpc>
-                <a:spcPct val="140000"/>
-              </a:lnSpc>
-              <a:buNone/>
-            </a:pPr>
-            <a:r>
-              <a:rPr lang="en-US" sz="2200" b="1" dirty="0">
-                <a:solidFill>
-                  <a:srgbClr val="1A1A1A"/>
-                </a:solidFill>
-                <a:latin typeface="Meiryo" pitchFamily="34" charset="0"/>
-                <a:ea typeface="Meiryo" pitchFamily="34" charset="-122"/>
-                <a:cs typeface="Meiryo" pitchFamily="34" charset="-120"/>
-              </a:rPr>
-              <a:t>　教えられたことを学ぶ子どもではなく、</a:t>
-            </a:r>
-            <a:endParaRPr lang="en-US" sz="2200" dirty="0"/>
-          </a:p>
-          <a:p>
-            <a:pPr algn="l" indent="0" marL="0">
-              <a:lnSpc>
-                <a:spcPct val="140000"/>
-              </a:lnSpc>
-              <a:buNone/>
-            </a:pPr>
-            <a:r>
-              <a:rPr lang="en-US" sz="2200" b="1" dirty="0">
-                <a:solidFill>
-                  <a:srgbClr val="1A1A1A"/>
-                </a:solidFill>
-                <a:latin typeface="Meiryo" pitchFamily="34" charset="0"/>
-                <a:ea typeface="Meiryo" pitchFamily="34" charset="-122"/>
-                <a:cs typeface="Meiryo" pitchFamily="34" charset="-120"/>
-              </a:rPr>
-              <a:t>　</a:t>
-            </a:r>
-            <a:pPr algn="l" indent="0" marL="0">
-              <a:lnSpc>
-                <a:spcPct val="140000"/>
-              </a:lnSpc>
-              <a:buNone/>
-            </a:pPr>
-            <a:r>
-              <a:rPr lang="en-US" sz="2200" b="1" dirty="0">
-                <a:solidFill>
-                  <a:srgbClr val="EB6C15"/>
-                </a:solidFill>
-                <a:latin typeface="Meiryo" pitchFamily="34" charset="0"/>
-                <a:ea typeface="Meiryo" pitchFamily="34" charset="-122"/>
-                <a:cs typeface="Meiryo" pitchFamily="34" charset="-120"/>
-              </a:rPr>
-              <a:t>自分で学び続ける子ども</a:t>
-            </a:r>
-            <a:pPr algn="l" indent="0" marL="0">
-              <a:lnSpc>
-                <a:spcPct val="140000"/>
-              </a:lnSpc>
-              <a:buNone/>
-            </a:pPr>
-            <a:r>
-              <a:rPr lang="en-US" sz="2200" b="1" dirty="0">
-                <a:solidFill>
-                  <a:srgbClr val="1A1A1A"/>
-                </a:solidFill>
-                <a:latin typeface="Meiryo" pitchFamily="34" charset="0"/>
-                <a:ea typeface="Meiryo" pitchFamily="34" charset="-122"/>
-                <a:cs typeface="Meiryo" pitchFamily="34" charset="-120"/>
+                <a:spcPct val="120000"/>
+              </a:lnSpc>
+              <a:buNone/>
+            </a:pPr>
+            <a:r>
+              <a:rPr lang="en-US" sz="2100" b="1" dirty="0">
+                <a:solidFill>
+                  <a:srgbClr val="595959"/>
+                </a:solidFill>
+                <a:latin typeface="メイリオ" pitchFamily="34" charset="0"/>
+                <a:ea typeface="メイリオ" pitchFamily="34" charset="-122"/>
+                <a:cs typeface="メイリオ" pitchFamily="34" charset="-120"/>
+              </a:rPr>
+              <a:t>そのために必要なのが</a:t>
+            </a:r>
+            <a:pPr algn="l" indent="0" marL="0">
+              <a:lnSpc>
+                <a:spcPct val="120000"/>
+              </a:lnSpc>
+              <a:buNone/>
+            </a:pPr>
+            <a:r>
+              <a:rPr lang="en-US" sz="2100" b="1" dirty="0">
+                <a:solidFill>
+                  <a:srgbClr val="EE7B08"/>
+                </a:solidFill>
+                <a:latin typeface="メイリオ" pitchFamily="34" charset="0"/>
+                <a:ea typeface="メイリオ" pitchFamily="34" charset="-122"/>
+                <a:cs typeface="メイリオ" pitchFamily="34" charset="-120"/>
+              </a:rPr>
+              <a:t>学習の自己調整</a:t>
+            </a:r>
+            <a:pPr algn="l" indent="0" marL="0">
+              <a:lnSpc>
+                <a:spcPct val="120000"/>
+              </a:lnSpc>
+              <a:buNone/>
+            </a:pPr>
+            <a:r>
+              <a:rPr lang="en-US" sz="2100" b="1" dirty="0">
+                <a:solidFill>
+                  <a:srgbClr val="595959"/>
+                </a:solidFill>
+                <a:latin typeface="メイリオ" pitchFamily="34" charset="0"/>
+                <a:ea typeface="メイリオ" pitchFamily="34" charset="-122"/>
+                <a:cs typeface="メイリオ" pitchFamily="34" charset="-120"/>
               </a:rPr>
               <a:t>である。</a:t>
             </a:r>
-            <a:endParaRPr lang="en-US" sz="2200" dirty="0"/>
-          </a:p>
-        </p:txBody>
-      </p:sp>
-      <p:sp>
-        <p:nvSpPr>
-          <p:cNvPr id="7" name="Text 5"/>
-          <p:cNvSpPr txBox="1"/>
-          <p:nvPr/>
-        </p:nvSpPr>
-        <p:spPr>
-          <a:xfrm>
-            <a:off x="640080" y="3154680"/>
-            <a:ext cx="8046720" cy="548640"/>
-          </a:xfrm>
-          <a:prstGeom prst="rect">
-            <a:avLst/>
-          </a:prstGeom>
-          <a:noFill/>
-          <a:ln/>
-        </p:spPr>
-        <p:txBody>
-          <a:bodyPr wrap="square" lIns="0" tIns="0" rIns="0" bIns="0" rtlCol="0" anchor="t"/>
-          <a:lstStyle/>
-          <a:p>
-            <a:pPr algn="l" indent="0" marL="0">
-              <a:lnSpc>
-                <a:spcPct val="135000"/>
-              </a:lnSpc>
-              <a:buNone/>
-            </a:pPr>
-            <a:r>
-              <a:rPr lang="en-US" sz="2200" b="1" dirty="0">
-                <a:solidFill>
-                  <a:srgbClr val="1A1A1A"/>
-                </a:solidFill>
-                <a:latin typeface="Meiryo" pitchFamily="34" charset="0"/>
-                <a:ea typeface="Meiryo" pitchFamily="34" charset="-122"/>
-                <a:cs typeface="Meiryo" pitchFamily="34" charset="-120"/>
-              </a:rPr>
-              <a:t>そのために必要なのが</a:t>
-            </a:r>
-            <a:pPr algn="l" indent="0" marL="0">
-              <a:lnSpc>
-                <a:spcPct val="135000"/>
-              </a:lnSpc>
-              <a:buNone/>
-            </a:pPr>
-            <a:r>
-              <a:rPr lang="en-US" sz="2200" b="1" dirty="0">
-                <a:solidFill>
-                  <a:srgbClr val="EB6C15"/>
-                </a:solidFill>
-                <a:latin typeface="Meiryo" pitchFamily="34" charset="0"/>
-                <a:ea typeface="Meiryo" pitchFamily="34" charset="-122"/>
-                <a:cs typeface="Meiryo" pitchFamily="34" charset="-120"/>
-              </a:rPr>
-              <a:t>学習の自己調整</a:t>
-            </a:r>
-            <a:pPr algn="l" indent="0" marL="0">
-              <a:lnSpc>
-                <a:spcPct val="135000"/>
-              </a:lnSpc>
-              <a:buNone/>
-            </a:pPr>
-            <a:r>
-              <a:rPr lang="en-US" sz="2200" b="1" dirty="0">
-                <a:solidFill>
-                  <a:srgbClr val="1A1A1A"/>
-                </a:solidFill>
-                <a:latin typeface="Meiryo" pitchFamily="34" charset="0"/>
-                <a:ea typeface="Meiryo" pitchFamily="34" charset="-122"/>
-                <a:cs typeface="Meiryo" pitchFamily="34" charset="-120"/>
-              </a:rPr>
-              <a:t>である。</a:t>
-            </a:r>
-            <a:endParaRPr lang="en-US" sz="2200" dirty="0"/>
-          </a:p>
-        </p:txBody>
-      </p:sp>
-      <p:sp>
-        <p:nvSpPr>
-          <p:cNvPr id="8" name="Shape 6"/>
+            <a:endParaRPr lang="en-US" sz="2100" dirty="0"/>
+          </a:p>
+        </p:txBody>
+      </p:sp>
+      <p:sp>
+        <p:nvSpPr>
+          <p:cNvPr id="5" name="Shape 3"/>
           <p:cNvSpPr/>
           <p:nvPr/>
         </p:nvSpPr>
         <p:spPr>
           <a:xfrm>
-            <a:off x="640080" y="3840480"/>
-            <a:ext cx="7863840" cy="822960"/>
+            <a:off x="475488" y="3611880"/>
+            <a:ext cx="8193024" cy="822960"/>
           </a:xfrm>
           <a:prstGeom prst="roundRect">
             <a:avLst>
-              <a:gd name="adj" fmla="val 8889"/>
+              <a:gd name="adj" fmla="val 6667"/>
             </a:avLst>
           </a:prstGeom>
           <a:solidFill>
-            <a:srgbClr val="EAF6FD"/>
+            <a:srgbClr val="E9F7F3"/>
           </a:solidFill>
           <a:ln w="12700">
             <a:solidFill>
-              <a:srgbClr val="C9E6F5"/>
+              <a:srgbClr val="B9E5DA"/>
             </a:solidFill>
             <a:prstDash val="solid"/>
           </a:ln>
@@ -3614,14 +3470,14 @@
       </p:sp>
       <p:sp>
         <p:nvSpPr>
-          <p:cNvPr id="9" name="Text 7"/>
+          <p:cNvPr id="6" name="Text 4"/>
           <p:cNvSpPr txBox="1"/>
           <p:nvPr/>
         </p:nvSpPr>
         <p:spPr>
           <a:xfrm>
-            <a:off x="868680" y="3840480"/>
-            <a:ext cx="7406640" cy="822960"/>
+            <a:off x="731520" y="3611880"/>
+            <a:ext cx="7680960" cy="822960"/>
           </a:xfrm>
           <a:prstGeom prst="rect">
             <a:avLst/>
@@ -3637,17 +3493,17 @@
               <a:buNone/>
             </a:pPr>
             <a:r>
-              <a:rPr lang="en-US" sz="1700" b="1" dirty="0">
-                <a:solidFill>
-                  <a:srgbClr val="1A1A1A"/>
-                </a:solidFill>
-                <a:latin typeface="Meiryo" pitchFamily="34" charset="0"/>
-                <a:ea typeface="Meiryo" pitchFamily="34" charset="-122"/>
-                <a:cs typeface="Meiryo" pitchFamily="34" charset="-120"/>
+              <a:rPr lang="en-US" sz="1600" b="1" dirty="0">
+                <a:solidFill>
+                  <a:srgbClr val="595959"/>
+                </a:solidFill>
+                <a:latin typeface="メイリオ" pitchFamily="34" charset="0"/>
+                <a:ea typeface="メイリオ" pitchFamily="34" charset="-122"/>
+                <a:cs typeface="メイリオ" pitchFamily="34" charset="-120"/>
               </a:rPr>
               <a:t>学習指導要領が示す「学びに向かう力」の中核をなす力である。</a:t>
             </a:r>
-            <a:endParaRPr lang="en-US" sz="1700" dirty="0"/>
+            <a:endParaRPr lang="en-US" sz="1600" dirty="0"/>
           </a:p>
         </p:txBody>
       </p:sp>
@@ -3684,14 +3540,14 @@
         </p:nvSpPr>
         <p:spPr>
           <a:xfrm>
-            <a:off x="0" y="0"/>
-            <a:ext cx="9144000" cy="576072"/>
+            <a:off x="0" y="-9144"/>
+            <a:ext cx="9144000" cy="1161288"/>
           </a:xfrm>
           <a:prstGeom prst="rect">
             <a:avLst/>
           </a:prstGeom>
           <a:solidFill>
-            <a:srgbClr val="00B0F0"/>
+            <a:srgbClr val="44C1A3"/>
           </a:solidFill>
           <a:ln/>
         </p:spPr>
@@ -3700,6 +3556,29 @@
           <a:lstStyle/>
           <a:p>
             <a:pPr algn="l" indent="0" marL="0">
+              <a:lnSpc>
+                <a:spcPct val="120000"/>
+              </a:lnSpc>
+              <a:buNone/>
+            </a:pPr>
+            <a:r>
+              <a:rPr lang="en-US" sz="3000" b="1" dirty="0">
+                <a:solidFill>
+                  <a:srgbClr val="FFFFFF"/>
+                </a:solidFill>
+                <a:latin typeface="メイリオ" pitchFamily="34" charset="0"/>
+                <a:ea typeface="メイリオ" pitchFamily="34" charset="-122"/>
+                <a:cs typeface="メイリオ" pitchFamily="34" charset="-120"/>
+              </a:rPr>
+              <a:t>　２　５校時の授業について</a:t>
+            </a:r>
+            <a:endParaRPr lang="en-US" sz="3000" dirty="0"/>
+          </a:p>
+          <a:p>
+            <a:pPr algn="l" indent="0" marL="0">
+              <a:lnSpc>
+                <a:spcPct val="120000"/>
+              </a:lnSpc>
               <a:buNone/>
             </a:pPr>
             <a:r>
@@ -3707,87 +3586,48 @@
                 <a:solidFill>
                   <a:srgbClr val="FFFFFF"/>
                 </a:solidFill>
-                <a:latin typeface="Meiryo" pitchFamily="34" charset="0"/>
-                <a:ea typeface="Meiryo" pitchFamily="34" charset="-122"/>
-                <a:cs typeface="Meiryo" pitchFamily="34" charset="-120"/>
-              </a:rPr>
-              <a:t>　２　５校時の授業について</a:t>
-            </a:r>
-            <a:endParaRPr lang="en-US" sz="2800" dirty="0"/>
-          </a:p>
-        </p:txBody>
-      </p:sp>
-      <p:sp>
-        <p:nvSpPr>
-          <p:cNvPr id="3" name="Text 1"/>
-          <p:cNvSpPr txBox="1"/>
-          <p:nvPr/>
-        </p:nvSpPr>
-        <p:spPr>
-          <a:xfrm>
-            <a:off x="640080" y="713232"/>
-            <a:ext cx="8046720" cy="411480"/>
-          </a:xfrm>
-          <a:prstGeom prst="rect">
-            <a:avLst/>
-          </a:prstGeom>
-          <a:noFill/>
-          <a:ln/>
-        </p:spPr>
-        <p:txBody>
-          <a:bodyPr wrap="square" lIns="0" tIns="0" rIns="0" bIns="0" rtlCol="0" anchor="ctr"/>
-          <a:lstStyle/>
-          <a:p>
-            <a:pPr algn="l" indent="0" marL="0">
-              <a:buNone/>
-            </a:pPr>
-            <a:r>
-              <a:rPr lang="en-US" sz="2100" b="1" dirty="0">
-                <a:solidFill>
-                  <a:srgbClr val="00B0F0"/>
-                </a:solidFill>
-                <a:latin typeface="Meiryo" pitchFamily="34" charset="0"/>
-                <a:ea typeface="Meiryo" pitchFamily="34" charset="-122"/>
-                <a:cs typeface="Meiryo" pitchFamily="34" charset="-120"/>
-              </a:rPr>
-              <a:t>③ 自己調整が行われていた授業</a:t>
-            </a:r>
-            <a:endParaRPr lang="en-US" sz="2100" dirty="0"/>
-          </a:p>
-        </p:txBody>
-      </p:sp>
-      <p:sp>
-        <p:nvSpPr>
-          <p:cNvPr id="4" name="Shape 2"/>
+                <a:latin typeface="メイリオ" pitchFamily="34" charset="0"/>
+                <a:ea typeface="メイリオ" pitchFamily="34" charset="-122"/>
+                <a:cs typeface="メイリオ" pitchFamily="34" charset="-120"/>
+              </a:rPr>
+              <a:t>　③　自己調整が行われていた授業</a:t>
+            </a:r>
+            <a:endParaRPr lang="en-US" sz="3000" dirty="0"/>
+          </a:p>
+        </p:txBody>
+      </p:sp>
+      <p:sp>
+        <p:nvSpPr>
+          <p:cNvPr id="3" name="Shape 1"/>
           <p:cNvSpPr/>
           <p:nvPr/>
         </p:nvSpPr>
         <p:spPr>
           <a:xfrm>
-            <a:off x="320040" y="1188720"/>
-            <a:ext cx="2011680" cy="548640"/>
+            <a:off x="320040" y="1444752"/>
+            <a:ext cx="2011680" cy="530352"/>
           </a:xfrm>
           <a:prstGeom prst="roundRect">
             <a:avLst>
-              <a:gd name="adj" fmla="val 16667"/>
+              <a:gd name="adj" fmla="val 12069"/>
             </a:avLst>
           </a:prstGeom>
           <a:solidFill>
-            <a:srgbClr val="EB6C15"/>
+            <a:srgbClr val="44C1A3"/>
           </a:solidFill>
           <a:ln/>
         </p:spPr>
       </p:sp>
       <p:sp>
         <p:nvSpPr>
-          <p:cNvPr id="5" name="Text 3"/>
+          <p:cNvPr id="4" name="Text 2"/>
           <p:cNvSpPr txBox="1"/>
           <p:nvPr/>
         </p:nvSpPr>
         <p:spPr>
           <a:xfrm>
-            <a:off x="320040" y="1188720"/>
-            <a:ext cx="2011680" cy="548640"/>
+            <a:off x="320040" y="1444752"/>
+            <a:ext cx="2011680" cy="530352"/>
           </a:xfrm>
           <a:prstGeom prst="rect">
             <a:avLst/>
@@ -3800,6 +3640,9 @@
           <a:lstStyle/>
           <a:p>
             <a:pPr algn="ctr" indent="0" marL="0">
+              <a:lnSpc>
+                <a:spcPct val="115000"/>
+              </a:lnSpc>
               <a:buNone/>
             </a:pPr>
             <a:r>
@@ -3807,9 +3650,9 @@
                 <a:solidFill>
                   <a:srgbClr val="FFFFFF"/>
                 </a:solidFill>
-                <a:latin typeface="Meiryo" pitchFamily="34" charset="0"/>
-                <a:ea typeface="Meiryo" pitchFamily="34" charset="-122"/>
-                <a:cs typeface="Meiryo" pitchFamily="34" charset="-120"/>
+                <a:latin typeface="メイリオ" pitchFamily="34" charset="0"/>
+                <a:ea typeface="メイリオ" pitchFamily="34" charset="-122"/>
+                <a:cs typeface="メイリオ" pitchFamily="34" charset="-120"/>
               </a:rPr>
               <a:t>本時の目標</a:t>
             </a:r>
@@ -3819,36 +3662,36 @@
       </p:sp>
       <p:sp>
         <p:nvSpPr>
-          <p:cNvPr id="6" name="Shape 4"/>
+          <p:cNvPr id="5" name="Shape 3"/>
           <p:cNvSpPr/>
           <p:nvPr/>
         </p:nvSpPr>
         <p:spPr>
           <a:xfrm>
-            <a:off x="2514600" y="1188720"/>
-            <a:ext cx="2011680" cy="548640"/>
+            <a:off x="2514600" y="1444752"/>
+            <a:ext cx="2011680" cy="530352"/>
           </a:xfrm>
           <a:prstGeom prst="roundRect">
             <a:avLst>
-              <a:gd name="adj" fmla="val 16667"/>
+              <a:gd name="adj" fmla="val 12069"/>
             </a:avLst>
           </a:prstGeom>
           <a:solidFill>
-            <a:srgbClr val="EB6C15"/>
+            <a:srgbClr val="44C1A3"/>
           </a:solidFill>
           <a:ln/>
         </p:spPr>
       </p:sp>
       <p:sp>
         <p:nvSpPr>
-          <p:cNvPr id="7" name="Text 5"/>
+          <p:cNvPr id="6" name="Text 4"/>
           <p:cNvSpPr txBox="1"/>
           <p:nvPr/>
         </p:nvSpPr>
         <p:spPr>
           <a:xfrm>
-            <a:off x="2514600" y="1188720"/>
-            <a:ext cx="2011680" cy="548640"/>
+            <a:off x="2514600" y="1444752"/>
+            <a:ext cx="2011680" cy="530352"/>
           </a:xfrm>
           <a:prstGeom prst="rect">
             <a:avLst/>
@@ -3861,6 +3704,9 @@
           <a:lstStyle/>
           <a:p>
             <a:pPr algn="ctr" indent="0" marL="0">
+              <a:lnSpc>
+                <a:spcPct val="115000"/>
+              </a:lnSpc>
               <a:buNone/>
             </a:pPr>
             <a:r>
@@ -3868,9 +3714,9 @@
                 <a:solidFill>
                   <a:srgbClr val="FFFFFF"/>
                 </a:solidFill>
-                <a:latin typeface="Meiryo" pitchFamily="34" charset="0"/>
-                <a:ea typeface="Meiryo" pitchFamily="34" charset="-122"/>
-                <a:cs typeface="Meiryo" pitchFamily="34" charset="-120"/>
+                <a:latin typeface="メイリオ" pitchFamily="34" charset="0"/>
+                <a:ea typeface="メイリオ" pitchFamily="34" charset="-122"/>
+                <a:cs typeface="メイリオ" pitchFamily="34" charset="-120"/>
               </a:rPr>
               <a:t>振り返り</a:t>
             </a:r>
@@ -3880,36 +3726,36 @@
       </p:sp>
       <p:sp>
         <p:nvSpPr>
-          <p:cNvPr id="8" name="Shape 6"/>
+          <p:cNvPr id="7" name="Shape 5"/>
           <p:cNvSpPr/>
           <p:nvPr/>
         </p:nvSpPr>
         <p:spPr>
           <a:xfrm>
-            <a:off x="4709160" y="1188720"/>
-            <a:ext cx="2011680" cy="548640"/>
+            <a:off x="4709160" y="1444752"/>
+            <a:ext cx="2011680" cy="530352"/>
           </a:xfrm>
           <a:prstGeom prst="roundRect">
             <a:avLst>
-              <a:gd name="adj" fmla="val 16667"/>
+              <a:gd name="adj" fmla="val 12069"/>
             </a:avLst>
           </a:prstGeom>
           <a:solidFill>
-            <a:srgbClr val="EB6C15"/>
+            <a:srgbClr val="44C1A3"/>
           </a:solidFill>
           <a:ln/>
         </p:spPr>
       </p:sp>
       <p:sp>
         <p:nvSpPr>
-          <p:cNvPr id="9" name="Text 7"/>
+          <p:cNvPr id="8" name="Text 6"/>
           <p:cNvSpPr txBox="1"/>
           <p:nvPr/>
         </p:nvSpPr>
         <p:spPr>
           <a:xfrm>
-            <a:off x="4709160" y="1188720"/>
-            <a:ext cx="2011680" cy="548640"/>
+            <a:off x="4709160" y="1444752"/>
+            <a:ext cx="2011680" cy="530352"/>
           </a:xfrm>
           <a:prstGeom prst="rect">
             <a:avLst/>
@@ -3922,6 +3768,9 @@
           <a:lstStyle/>
           <a:p>
             <a:pPr algn="ctr" indent="0" marL="0">
+              <a:lnSpc>
+                <a:spcPct val="115000"/>
+              </a:lnSpc>
               <a:buNone/>
             </a:pPr>
             <a:r>
@@ -3929,9 +3778,9 @@
                 <a:solidFill>
                   <a:srgbClr val="FFFFFF"/>
                 </a:solidFill>
-                <a:latin typeface="Meiryo" pitchFamily="34" charset="0"/>
-                <a:ea typeface="Meiryo" pitchFamily="34" charset="-122"/>
-                <a:cs typeface="Meiryo" pitchFamily="34" charset="-120"/>
+                <a:latin typeface="メイリオ" pitchFamily="34" charset="0"/>
+                <a:ea typeface="メイリオ" pitchFamily="34" charset="-122"/>
+                <a:cs typeface="メイリオ" pitchFamily="34" charset="-120"/>
               </a:rPr>
               <a:t>自己評価</a:t>
             </a:r>
@@ -3941,25 +3790,67 @@
       </p:sp>
       <p:sp>
         <p:nvSpPr>
-          <p:cNvPr id="10" name="Shape 8"/>
+          <p:cNvPr id="9" name="Shape 7"/>
           <p:cNvSpPr/>
           <p:nvPr/>
         </p:nvSpPr>
         <p:spPr>
           <a:xfrm>
-            <a:off x="6903720" y="1188720"/>
-            <a:ext cx="2011680" cy="548640"/>
+            <a:off x="6903720" y="1444752"/>
+            <a:ext cx="2011680" cy="530352"/>
           </a:xfrm>
           <a:prstGeom prst="roundRect">
             <a:avLst>
-              <a:gd name="adj" fmla="val 16667"/>
+              <a:gd name="adj" fmla="val 12069"/>
             </a:avLst>
           </a:prstGeom>
           <a:solidFill>
-            <a:srgbClr val="EB6C15"/>
+            <a:srgbClr val="44C1A3"/>
           </a:solidFill>
           <a:ln/>
         </p:spPr>
+      </p:sp>
+      <p:sp>
+        <p:nvSpPr>
+          <p:cNvPr id="10" name="Text 8"/>
+          <p:cNvSpPr txBox="1"/>
+          <p:nvPr/>
+        </p:nvSpPr>
+        <p:spPr>
+          <a:xfrm>
+            <a:off x="6903720" y="1444752"/>
+            <a:ext cx="2011680" cy="530352"/>
+          </a:xfrm>
+          <a:prstGeom prst="rect">
+            <a:avLst/>
+          </a:prstGeom>
+          <a:noFill/>
+          <a:ln/>
+        </p:spPr>
+        <p:txBody>
+          <a:bodyPr wrap="square" lIns="0" tIns="0" rIns="0" bIns="0" rtlCol="0" anchor="ctr"/>
+          <a:lstStyle/>
+          <a:p>
+            <a:pPr algn="ctr" indent="0" marL="0">
+              <a:lnSpc>
+                <a:spcPct val="115000"/>
+              </a:lnSpc>
+              <a:buNone/>
+            </a:pPr>
+            <a:r>
+              <a:rPr lang="en-US" sz="1500" b="1" dirty="0">
+                <a:solidFill>
+                  <a:srgbClr val="FFFFFF"/>
+                </a:solidFill>
+                <a:latin typeface="メイリオ" pitchFamily="34" charset="0"/>
+                <a:ea typeface="メイリオ" pitchFamily="34" charset="-122"/>
+                <a:cs typeface="メイリオ" pitchFamily="34" charset="-120"/>
+              </a:rPr>
+              <a:t>次時への見通し</a:t>
+            </a:r>
+            <a:endParaRPr lang="en-US" sz="1500" dirty="0"/>
+          </a:p>
+        </p:txBody>
       </p:sp>
       <p:sp>
         <p:nvSpPr>
@@ -3969,8 +3860,8 @@
         </p:nvSpPr>
         <p:spPr>
           <a:xfrm>
-            <a:off x="6903720" y="1188720"/>
-            <a:ext cx="2011680" cy="548640"/>
+            <a:off x="320040" y="2066544"/>
+            <a:ext cx="8503920" cy="320040"/>
           </a:xfrm>
           <a:prstGeom prst="rect">
             <a:avLst/>
@@ -3982,21 +3873,21 @@
           <a:bodyPr wrap="square" lIns="0" tIns="0" rIns="0" bIns="0" rtlCol="0" anchor="ctr"/>
           <a:lstStyle/>
           <a:p>
-            <a:pPr algn="ctr" indent="0" marL="0">
-              <a:buNone/>
-            </a:pPr>
-            <a:r>
-              <a:rPr lang="en-US" sz="1500" b="1" dirty="0">
-                <a:solidFill>
-                  <a:srgbClr val="FFFFFF"/>
-                </a:solidFill>
-                <a:latin typeface="Meiryo" pitchFamily="34" charset="0"/>
-                <a:ea typeface="Meiryo" pitchFamily="34" charset="-122"/>
-                <a:cs typeface="Meiryo" pitchFamily="34" charset="-120"/>
-              </a:rPr>
-              <a:t>次時への見通し</a:t>
-            </a:r>
-            <a:endParaRPr lang="en-US" sz="1500" dirty="0"/>
+            <a:pPr algn="l" indent="0" marL="0">
+              <a:buNone/>
+            </a:pPr>
+            <a:r>
+              <a:rPr lang="en-US" sz="1400" b="1" dirty="0">
+                <a:solidFill>
+                  <a:srgbClr val="808080"/>
+                </a:solidFill>
+                <a:latin typeface="メイリオ" pitchFamily="34" charset="0"/>
+                <a:ea typeface="メイリオ" pitchFamily="34" charset="-122"/>
+                <a:cs typeface="メイリオ" pitchFamily="34" charset="-120"/>
+              </a:rPr>
+              <a:t>本日の授業では、この４点が大切にされていた。</a:t>
+            </a:r>
+            <a:endParaRPr lang="en-US" sz="1400" dirty="0"/>
           </a:p>
         </p:txBody>
       </p:sp>
@@ -4008,8 +3899,8 @@
         </p:nvSpPr>
         <p:spPr>
           <a:xfrm>
-            <a:off x="320040" y="1847088"/>
-            <a:ext cx="8503920" cy="347472"/>
+            <a:off x="320040" y="2468880"/>
+            <a:ext cx="8503920" cy="1188720"/>
           </a:xfrm>
           <a:prstGeom prst="rect">
             <a:avLst/>
@@ -4018,199 +3909,160 @@
           <a:ln/>
         </p:spPr>
         <p:txBody>
-          <a:bodyPr wrap="square" lIns="0" tIns="0" rIns="0" bIns="0" rtlCol="0" anchor="ctr"/>
-          <a:lstStyle/>
-          <a:p>
-            <a:pPr algn="l" indent="0" marL="0">
-              <a:buNone/>
-            </a:pPr>
-            <a:r>
-              <a:rPr lang="en-US" sz="1400" b="1" dirty="0">
-                <a:solidFill>
-                  <a:srgbClr val="595959"/>
-                </a:solidFill>
-                <a:latin typeface="Meiryo" pitchFamily="34" charset="0"/>
-                <a:ea typeface="Meiryo" pitchFamily="34" charset="-122"/>
-                <a:cs typeface="Meiryo" pitchFamily="34" charset="-120"/>
-              </a:rPr>
-              <a:t>本日の授業では、この４点が大切にされていた。</a:t>
-            </a:r>
-            <a:endParaRPr lang="en-US" sz="1400" dirty="0"/>
-          </a:p>
-        </p:txBody>
-      </p:sp>
-      <p:sp>
-        <p:nvSpPr>
-          <p:cNvPr id="13" name="Text 11"/>
-          <p:cNvSpPr txBox="1"/>
-          <p:nvPr/>
-        </p:nvSpPr>
-        <p:spPr>
-          <a:xfrm>
-            <a:off x="320040" y="2286000"/>
-            <a:ext cx="8503920" cy="1600200"/>
-          </a:xfrm>
-          <a:prstGeom prst="rect">
-            <a:avLst/>
-          </a:prstGeom>
-          <a:noFill/>
-          <a:ln/>
-        </p:spPr>
-        <p:txBody>
           <a:bodyPr wrap="square" lIns="0" tIns="0" rIns="0" bIns="0" rtlCol="0" anchor="t"/>
           <a:lstStyle/>
           <a:p>
             <a:pPr algn="l" indent="0" marL="0">
               <a:lnSpc>
-                <a:spcPct val="155000"/>
-              </a:lnSpc>
-              <a:buNone/>
-            </a:pPr>
-            <a:r>
-              <a:rPr lang="en-US" sz="1600" b="1" dirty="0">
-                <a:solidFill>
-                  <a:srgbClr val="1A1A1A"/>
-                </a:solidFill>
-                <a:latin typeface="Meiryo" pitchFamily="34" charset="0"/>
-                <a:ea typeface="Meiryo" pitchFamily="34" charset="-122"/>
-                <a:cs typeface="Meiryo" pitchFamily="34" charset="-120"/>
+                <a:spcPct val="150000"/>
+              </a:lnSpc>
+              <a:buNone/>
+            </a:pPr>
+            <a:r>
+              <a:rPr lang="en-US" sz="1500" b="1" dirty="0">
+                <a:solidFill>
+                  <a:srgbClr val="595959"/>
+                </a:solidFill>
+                <a:latin typeface="メイリオ" pitchFamily="34" charset="0"/>
+                <a:ea typeface="メイリオ" pitchFamily="34" charset="-122"/>
+                <a:cs typeface="メイリオ" pitchFamily="34" charset="-120"/>
               </a:rPr>
               <a:t>・田口　先生　　着替えの前に目標と流れを確認し、</a:t>
             </a:r>
             <a:pPr algn="l" indent="0" marL="0">
               <a:lnSpc>
-                <a:spcPct val="155000"/>
-              </a:lnSpc>
-              <a:buNone/>
-            </a:pPr>
-            <a:r>
-              <a:rPr lang="en-US" sz="1600" b="1" dirty="0">
-                <a:solidFill>
-                  <a:srgbClr val="EB6C15"/>
-                </a:solidFill>
-                <a:latin typeface="Meiryo" pitchFamily="34" charset="0"/>
-                <a:ea typeface="Meiryo" pitchFamily="34" charset="-122"/>
-                <a:cs typeface="Meiryo" pitchFamily="34" charset="-120"/>
+                <a:spcPct val="150000"/>
+              </a:lnSpc>
+              <a:buNone/>
+            </a:pPr>
+            <a:r>
+              <a:rPr lang="en-US" sz="1500" b="1" dirty="0">
+                <a:solidFill>
+                  <a:srgbClr val="EE7B08"/>
+                </a:solidFill>
+                <a:latin typeface="メイリオ" pitchFamily="34" charset="0"/>
+                <a:ea typeface="メイリオ" pitchFamily="34" charset="-122"/>
+                <a:cs typeface="メイリオ" pitchFamily="34" charset="-120"/>
               </a:rPr>
               <a:t>学習カードで要点を振り返る</a:t>
             </a:r>
-            <a:endParaRPr lang="en-US" sz="1600" dirty="0"/>
-          </a:p>
-          <a:p>
-            <a:pPr algn="l" indent="0" marL="0">
-              <a:lnSpc>
-                <a:spcPct val="155000"/>
-              </a:lnSpc>
-              <a:buNone/>
-            </a:pPr>
-            <a:r>
-              <a:rPr lang="en-US" sz="1600" b="1" dirty="0">
-                <a:solidFill>
-                  <a:srgbClr val="1A1A1A"/>
-                </a:solidFill>
-                <a:latin typeface="Meiryo" pitchFamily="34" charset="0"/>
-                <a:ea typeface="Meiryo" pitchFamily="34" charset="-122"/>
-                <a:cs typeface="Meiryo" pitchFamily="34" charset="-120"/>
+            <a:endParaRPr lang="en-US" sz="1500" dirty="0"/>
+          </a:p>
+          <a:p>
+            <a:pPr algn="l" indent="0" marL="0">
+              <a:lnSpc>
+                <a:spcPct val="150000"/>
+              </a:lnSpc>
+              <a:buNone/>
+            </a:pPr>
+            <a:r>
+              <a:rPr lang="en-US" sz="1500" b="1" dirty="0">
+                <a:solidFill>
+                  <a:srgbClr val="595959"/>
+                </a:solidFill>
+                <a:latin typeface="メイリオ" pitchFamily="34" charset="0"/>
+                <a:ea typeface="メイリオ" pitchFamily="34" charset="-122"/>
+                <a:cs typeface="メイリオ" pitchFamily="34" charset="-120"/>
               </a:rPr>
               <a:t>・塚本　先生　　Today’s Goal と Plan を提示し、</a:t>
             </a:r>
             <a:pPr algn="l" indent="0" marL="0">
               <a:lnSpc>
-                <a:spcPct val="155000"/>
-              </a:lnSpc>
-              <a:buNone/>
-            </a:pPr>
-            <a:r>
-              <a:rPr lang="en-US" sz="1600" b="1" dirty="0">
-                <a:solidFill>
-                  <a:srgbClr val="EB6C15"/>
-                </a:solidFill>
-                <a:latin typeface="Meiryo" pitchFamily="34" charset="0"/>
-                <a:ea typeface="Meiryo" pitchFamily="34" charset="-122"/>
-                <a:cs typeface="Meiryo" pitchFamily="34" charset="-120"/>
+                <a:spcPct val="150000"/>
+              </a:lnSpc>
+              <a:buNone/>
+            </a:pPr>
+            <a:r>
+              <a:rPr lang="en-US" sz="1500" b="1" dirty="0">
+                <a:solidFill>
+                  <a:srgbClr val="EE7B08"/>
+                </a:solidFill>
+                <a:latin typeface="メイリオ" pitchFamily="34" charset="0"/>
+                <a:ea typeface="メイリオ" pitchFamily="34" charset="-122"/>
+                <a:cs typeface="メイリオ" pitchFamily="34" charset="-120"/>
               </a:rPr>
               <a:t>振り返りをワークシートに記入</a:t>
             </a:r>
-            <a:endParaRPr lang="en-US" sz="1600" dirty="0"/>
-          </a:p>
-          <a:p>
-            <a:pPr algn="l" indent="0" marL="0">
-              <a:lnSpc>
-                <a:spcPct val="155000"/>
-              </a:lnSpc>
-              <a:buNone/>
-            </a:pPr>
-            <a:r>
-              <a:rPr lang="en-US" sz="1600" b="1" dirty="0">
-                <a:solidFill>
-                  <a:srgbClr val="1A1A1A"/>
-                </a:solidFill>
-                <a:latin typeface="Meiryo" pitchFamily="34" charset="0"/>
-                <a:ea typeface="Meiryo" pitchFamily="34" charset="-122"/>
-                <a:cs typeface="Meiryo" pitchFamily="34" charset="-120"/>
+            <a:endParaRPr lang="en-US" sz="1500" dirty="0"/>
+          </a:p>
+          <a:p>
+            <a:pPr algn="l" indent="0" marL="0">
+              <a:lnSpc>
+                <a:spcPct val="150000"/>
+              </a:lnSpc>
+              <a:buNone/>
+            </a:pPr>
+            <a:r>
+              <a:rPr lang="en-US" sz="1500" b="1" dirty="0">
+                <a:solidFill>
+                  <a:srgbClr val="595959"/>
+                </a:solidFill>
+                <a:latin typeface="メイリオ" pitchFamily="34" charset="0"/>
+                <a:ea typeface="メイリオ" pitchFamily="34" charset="-122"/>
+                <a:cs typeface="メイリオ" pitchFamily="34" charset="-120"/>
               </a:rPr>
               <a:t>・東海林　先生　</a:t>
             </a:r>
             <a:pPr algn="l" indent="0" marL="0">
               <a:lnSpc>
-                <a:spcPct val="155000"/>
-              </a:lnSpc>
-              <a:buNone/>
-            </a:pPr>
-            <a:r>
-              <a:rPr lang="en-US" sz="1600" b="1" dirty="0">
-                <a:solidFill>
-                  <a:srgbClr val="EB6C15"/>
-                </a:solidFill>
-                <a:latin typeface="Meiryo" pitchFamily="34" charset="0"/>
-                <a:ea typeface="Meiryo" pitchFamily="34" charset="-122"/>
-                <a:cs typeface="Meiryo" pitchFamily="34" charset="-120"/>
+                <a:spcPct val="150000"/>
+              </a:lnSpc>
+              <a:buNone/>
+            </a:pPr>
+            <a:r>
+              <a:rPr lang="en-US" sz="1500" b="1" dirty="0">
+                <a:solidFill>
+                  <a:srgbClr val="EE7B08"/>
+                </a:solidFill>
+                <a:latin typeface="メイリオ" pitchFamily="34" charset="0"/>
+                <a:ea typeface="メイリオ" pitchFamily="34" charset="-122"/>
+                <a:cs typeface="メイリオ" pitchFamily="34" charset="-120"/>
               </a:rPr>
               <a:t>前時のワークシート</a:t>
             </a:r>
             <a:pPr algn="l" indent="0" marL="0">
               <a:lnSpc>
-                <a:spcPct val="155000"/>
-              </a:lnSpc>
-              <a:buNone/>
-            </a:pPr>
-            <a:r>
-              <a:rPr lang="en-US" sz="1600" b="1" dirty="0">
-                <a:solidFill>
-                  <a:srgbClr val="1A1A1A"/>
-                </a:solidFill>
-                <a:latin typeface="Meiryo" pitchFamily="34" charset="0"/>
-                <a:ea typeface="Meiryo" pitchFamily="34" charset="-122"/>
-                <a:cs typeface="Meiryo" pitchFamily="34" charset="-120"/>
+                <a:spcPct val="150000"/>
+              </a:lnSpc>
+              <a:buNone/>
+            </a:pPr>
+            <a:r>
+              <a:rPr lang="en-US" sz="1500" b="1" dirty="0">
+                <a:solidFill>
+                  <a:srgbClr val="595959"/>
+                </a:solidFill>
+                <a:latin typeface="メイリオ" pitchFamily="34" charset="0"/>
+                <a:ea typeface="メイリオ" pitchFamily="34" charset="-122"/>
+                <a:cs typeface="メイリオ" pitchFamily="34" charset="-120"/>
               </a:rPr>
               <a:t>で自分の考えを確かめてから議論へ</a:t>
             </a:r>
-            <a:endParaRPr lang="en-US" sz="1600" dirty="0"/>
-          </a:p>
-        </p:txBody>
-      </p:sp>
-      <p:sp>
-        <p:nvSpPr>
-          <p:cNvPr id="14" name="Shape 12"/>
+            <a:endParaRPr lang="en-US" sz="1500" dirty="0"/>
+          </a:p>
+        </p:txBody>
+      </p:sp>
+      <p:sp>
+        <p:nvSpPr>
+          <p:cNvPr id="13" name="Shape 11"/>
           <p:cNvSpPr/>
           <p:nvPr/>
         </p:nvSpPr>
         <p:spPr>
           <a:xfrm>
-            <a:off x="320040" y="3950208"/>
-            <a:ext cx="8503920" cy="786384"/>
+            <a:off x="320040" y="3794760"/>
+            <a:ext cx="8503920" cy="777240"/>
           </a:xfrm>
           <a:prstGeom prst="roundRect">
             <a:avLst>
-              <a:gd name="adj" fmla="val 9302"/>
+              <a:gd name="adj" fmla="val 7059"/>
             </a:avLst>
           </a:prstGeom>
           <a:solidFill>
-            <a:srgbClr val="EAF6FD"/>
+            <a:srgbClr val="E9F7F3"/>
           </a:solidFill>
           <a:ln w="12700">
             <a:solidFill>
-              <a:srgbClr val="C9E6F5"/>
+              <a:srgbClr val="B9E5DA"/>
             </a:solidFill>
             <a:prstDash val="solid"/>
           </a:ln>
@@ -4218,14 +4070,14 @@
       </p:sp>
       <p:sp>
         <p:nvSpPr>
-          <p:cNvPr id="15" name="Text 13"/>
+          <p:cNvPr id="14" name="Text 12"/>
           <p:cNvSpPr txBox="1"/>
           <p:nvPr/>
         </p:nvSpPr>
         <p:spPr>
           <a:xfrm>
-            <a:off x="502920" y="3950208"/>
-            <a:ext cx="8138160" cy="786384"/>
+            <a:off x="576072" y="3794760"/>
+            <a:ext cx="7991856" cy="777240"/>
           </a:xfrm>
           <a:prstGeom prst="rect">
             <a:avLst/>
@@ -4241,13 +4093,13 @@
               <a:buNone/>
             </a:pPr>
             <a:r>
-              <a:rPr lang="en-US" sz="1800" b="1" dirty="0">
-                <a:solidFill>
-                  <a:srgbClr val="1A1A1A"/>
-                </a:solidFill>
-                <a:latin typeface="Meiryo" pitchFamily="34" charset="0"/>
-                <a:ea typeface="Meiryo" pitchFamily="34" charset="-122"/>
-                <a:cs typeface="Meiryo" pitchFamily="34" charset="-120"/>
+              <a:rPr lang="en-US" sz="1700" b="1" dirty="0">
+                <a:solidFill>
+                  <a:srgbClr val="595959"/>
+                </a:solidFill>
+                <a:latin typeface="メイリオ" pitchFamily="34" charset="0"/>
+                <a:ea typeface="メイリオ" pitchFamily="34" charset="-122"/>
+                <a:cs typeface="メイリオ" pitchFamily="34" charset="-120"/>
               </a:rPr>
               <a:t>教師が管理する学習から　</a:t>
             </a:r>
@@ -4255,13 +4107,13 @@
               <a:buNone/>
             </a:pPr>
             <a:r>
-              <a:rPr lang="en-US" sz="1800" b="1" dirty="0">
-                <a:solidFill>
-                  <a:srgbClr val="EB6C15"/>
-                </a:solidFill>
-                <a:latin typeface="Meiryo" pitchFamily="34" charset="0"/>
-                <a:ea typeface="Meiryo" pitchFamily="34" charset="-122"/>
-                <a:cs typeface="Meiryo" pitchFamily="34" charset="-120"/>
+              <a:rPr lang="en-US" sz="1700" b="1" dirty="0">
+                <a:solidFill>
+                  <a:srgbClr val="EE7B08"/>
+                </a:solidFill>
+                <a:latin typeface="メイリオ" pitchFamily="34" charset="0"/>
+                <a:ea typeface="メイリオ" pitchFamily="34" charset="-122"/>
+                <a:cs typeface="メイリオ" pitchFamily="34" charset="-120"/>
               </a:rPr>
               <a:t>子どもが管理する学習へ</a:t>
             </a:r>
@@ -4269,17 +4121,17 @@
               <a:buNone/>
             </a:pPr>
             <a:r>
-              <a:rPr lang="en-US" sz="1800" b="1" dirty="0">
-                <a:solidFill>
-                  <a:srgbClr val="1A1A1A"/>
-                </a:solidFill>
-                <a:latin typeface="Meiryo" pitchFamily="34" charset="0"/>
-                <a:ea typeface="Meiryo" pitchFamily="34" charset="-122"/>
-                <a:cs typeface="Meiryo" pitchFamily="34" charset="-120"/>
+              <a:rPr lang="en-US" sz="1700" b="1" dirty="0">
+                <a:solidFill>
+                  <a:srgbClr val="595959"/>
+                </a:solidFill>
+                <a:latin typeface="メイリオ" pitchFamily="34" charset="0"/>
+                <a:ea typeface="メイリオ" pitchFamily="34" charset="-122"/>
+                <a:cs typeface="メイリオ" pitchFamily="34" charset="-120"/>
               </a:rPr>
               <a:t>　着実に転換が進んでいる。</a:t>
             </a:r>
-            <a:endParaRPr lang="en-US" sz="1800" dirty="0"/>
+            <a:endParaRPr lang="en-US" sz="1700" dirty="0"/>
           </a:p>
         </p:txBody>
       </p:sp>
@@ -4316,14 +4168,14 @@
         </p:nvSpPr>
         <p:spPr>
           <a:xfrm>
-            <a:off x="0" y="0"/>
-            <a:ext cx="9144000" cy="576072"/>
+            <a:off x="0" y="-9144"/>
+            <a:ext cx="9144000" cy="612648"/>
           </a:xfrm>
           <a:prstGeom prst="rect">
             <a:avLst/>
           </a:prstGeom>
           <a:solidFill>
-            <a:srgbClr val="00B0F0"/>
+            <a:srgbClr val="44C1A3"/>
           </a:solidFill>
           <a:ln/>
         </p:spPr>
@@ -4332,20 +4184,23 @@
           <a:lstStyle/>
           <a:p>
             <a:pPr algn="l" indent="0" marL="0">
-              <a:buNone/>
-            </a:pPr>
-            <a:r>
-              <a:rPr lang="en-US" sz="2800" b="1" dirty="0">
+              <a:lnSpc>
+                <a:spcPct val="120000"/>
+              </a:lnSpc>
+              <a:buNone/>
+            </a:pPr>
+            <a:r>
+              <a:rPr lang="en-US" sz="3000" b="1" dirty="0">
                 <a:solidFill>
                   <a:srgbClr val="FFFFFF"/>
                 </a:solidFill>
-                <a:latin typeface="Meiryo" pitchFamily="34" charset="0"/>
-                <a:ea typeface="Meiryo" pitchFamily="34" charset="-122"/>
-                <a:cs typeface="Meiryo" pitchFamily="34" charset="-120"/>
+                <a:latin typeface="メイリオ" pitchFamily="34" charset="0"/>
+                <a:ea typeface="メイリオ" pitchFamily="34" charset="-122"/>
+                <a:cs typeface="メイリオ" pitchFamily="34" charset="-120"/>
               </a:rPr>
               <a:t>　今後に向けて</a:t>
             </a:r>
-            <a:endParaRPr lang="en-US" sz="2800" dirty="0"/>
+            <a:endParaRPr lang="en-US" sz="3000" dirty="0"/>
           </a:p>
         </p:txBody>
       </p:sp>
@@ -4357,8 +4212,8 @@
         </p:nvSpPr>
         <p:spPr>
           <a:xfrm>
-            <a:off x="640080" y="841248"/>
-            <a:ext cx="8046720" cy="1143000"/>
+            <a:off x="475488" y="896112"/>
+            <a:ext cx="8193024" cy="777240"/>
           </a:xfrm>
           <a:prstGeom prst="rect">
             <a:avLst/>
@@ -4372,93 +4227,93 @@
           <a:p>
             <a:pPr algn="l" indent="0" marL="0">
               <a:lnSpc>
-                <a:spcPct val="135000"/>
-              </a:lnSpc>
-              <a:buNone/>
-            </a:pPr>
-            <a:r>
-              <a:rPr lang="en-US" sz="1900" b="1" dirty="0">
-                <a:solidFill>
-                  <a:srgbClr val="EB6C15"/>
-                </a:solidFill>
-                <a:latin typeface="Meiryo" pitchFamily="34" charset="0"/>
-                <a:ea typeface="Meiryo" pitchFamily="34" charset="-122"/>
-                <a:cs typeface="Meiryo" pitchFamily="34" charset="-120"/>
+                <a:spcPct val="120000"/>
+              </a:lnSpc>
+              <a:buNone/>
+            </a:pPr>
+            <a:r>
+              <a:rPr lang="en-US" sz="1800" b="1" dirty="0">
+                <a:solidFill>
+                  <a:srgbClr val="EE7B08"/>
+                </a:solidFill>
+                <a:latin typeface="メイリオ" pitchFamily="34" charset="0"/>
+                <a:ea typeface="メイリオ" pitchFamily="34" charset="-122"/>
+                <a:cs typeface="メイリオ" pitchFamily="34" charset="-120"/>
               </a:rPr>
               <a:t>学力調査結果</a:t>
             </a:r>
             <a:pPr algn="l" indent="0" marL="0">
               <a:lnSpc>
-                <a:spcPct val="135000"/>
-              </a:lnSpc>
-              <a:buNone/>
-            </a:pPr>
-            <a:r>
-              <a:rPr lang="en-US" sz="1900" b="1" dirty="0">
-                <a:solidFill>
-                  <a:srgbClr val="1A1A1A"/>
-                </a:solidFill>
-                <a:latin typeface="Meiryo" pitchFamily="34" charset="0"/>
-                <a:ea typeface="Meiryo" pitchFamily="34" charset="-122"/>
-                <a:cs typeface="Meiryo" pitchFamily="34" charset="-120"/>
+                <a:spcPct val="120000"/>
+              </a:lnSpc>
+              <a:buNone/>
+            </a:pPr>
+            <a:r>
+              <a:rPr lang="en-US" sz="1800" b="1" dirty="0">
+                <a:solidFill>
+                  <a:srgbClr val="595959"/>
+                </a:solidFill>
+                <a:latin typeface="メイリオ" pitchFamily="34" charset="0"/>
+                <a:ea typeface="メイリオ" pitchFamily="34" charset="-122"/>
+                <a:cs typeface="メイリオ" pitchFamily="34" charset="-120"/>
               </a:rPr>
               <a:t>　と　</a:t>
             </a:r>
             <a:pPr algn="l" indent="0" marL="0">
               <a:lnSpc>
-                <a:spcPct val="135000"/>
-              </a:lnSpc>
-              <a:buNone/>
-            </a:pPr>
-            <a:r>
-              <a:rPr lang="en-US" sz="1900" b="1" dirty="0">
-                <a:solidFill>
-                  <a:srgbClr val="EB6C15"/>
-                </a:solidFill>
-                <a:latin typeface="Meiryo" pitchFamily="34" charset="0"/>
-                <a:ea typeface="Meiryo" pitchFamily="34" charset="-122"/>
-                <a:cs typeface="Meiryo" pitchFamily="34" charset="-120"/>
+                <a:spcPct val="120000"/>
+              </a:lnSpc>
+              <a:buNone/>
+            </a:pPr>
+            <a:r>
+              <a:rPr lang="en-US" sz="1800" b="1" dirty="0">
+                <a:solidFill>
+                  <a:srgbClr val="EE7B08"/>
+                </a:solidFill>
+                <a:latin typeface="メイリオ" pitchFamily="34" charset="0"/>
+                <a:ea typeface="メイリオ" pitchFamily="34" charset="-122"/>
+                <a:cs typeface="メイリオ" pitchFamily="34" charset="-120"/>
               </a:rPr>
               <a:t>今日の授業</a:t>
             </a:r>
             <a:pPr algn="l" indent="0" marL="0">
               <a:lnSpc>
-                <a:spcPct val="135000"/>
-              </a:lnSpc>
-              <a:buNone/>
-            </a:pPr>
-            <a:r>
-              <a:rPr lang="en-US" sz="1900" b="1" dirty="0">
-                <a:solidFill>
-                  <a:srgbClr val="1A1A1A"/>
-                </a:solidFill>
-                <a:latin typeface="Meiryo" pitchFamily="34" charset="0"/>
-                <a:ea typeface="Meiryo" pitchFamily="34" charset="-122"/>
-                <a:cs typeface="Meiryo" pitchFamily="34" charset="-120"/>
+                <a:spcPct val="120000"/>
+              </a:lnSpc>
+              <a:buNone/>
+            </a:pPr>
+            <a:r>
+              <a:rPr lang="en-US" sz="1800" b="1" dirty="0">
+                <a:solidFill>
+                  <a:srgbClr val="595959"/>
+                </a:solidFill>
+                <a:latin typeface="メイリオ" pitchFamily="34" charset="0"/>
+                <a:ea typeface="メイリオ" pitchFamily="34" charset="-122"/>
+                <a:cs typeface="メイリオ" pitchFamily="34" charset="-120"/>
               </a:rPr>
               <a:t>　をつなげて考えると、</a:t>
             </a:r>
-            <a:endParaRPr lang="en-US" sz="1900" dirty="0"/>
-          </a:p>
-          <a:p>
-            <a:pPr algn="l" indent="0" marL="0">
-              <a:lnSpc>
-                <a:spcPct val="135000"/>
-              </a:lnSpc>
-              <a:buNone/>
-            </a:pPr>
-            <a:r>
-              <a:rPr lang="en-US" sz="1900" b="1" dirty="0">
-                <a:solidFill>
-                  <a:srgbClr val="1A1A1A"/>
-                </a:solidFill>
-                <a:latin typeface="Meiryo" pitchFamily="34" charset="0"/>
-                <a:ea typeface="Meiryo" pitchFamily="34" charset="-122"/>
-                <a:cs typeface="Meiryo" pitchFamily="34" charset="-120"/>
+            <a:endParaRPr lang="en-US" sz="1800" dirty="0"/>
+          </a:p>
+          <a:p>
+            <a:pPr algn="l" indent="0" marL="0">
+              <a:lnSpc>
+                <a:spcPct val="120000"/>
+              </a:lnSpc>
+              <a:buNone/>
+            </a:pPr>
+            <a:r>
+              <a:rPr lang="en-US" sz="1800" b="1" dirty="0">
+                <a:solidFill>
+                  <a:srgbClr val="595959"/>
+                </a:solidFill>
+                <a:latin typeface="メイリオ" pitchFamily="34" charset="0"/>
+                <a:ea typeface="メイリオ" pitchFamily="34" charset="-122"/>
+                <a:cs typeface="メイリオ" pitchFamily="34" charset="-120"/>
               </a:rPr>
               <a:t>今後さらに伸ばしたいのは</a:t>
             </a:r>
-            <a:endParaRPr lang="en-US" sz="1900" dirty="0"/>
+            <a:endParaRPr lang="en-US" sz="1800" dirty="0"/>
           </a:p>
         </p:txBody>
       </p:sp>
@@ -4470,20 +4325,20 @@
         </p:nvSpPr>
         <p:spPr>
           <a:xfrm>
-            <a:off x="640080" y="1883664"/>
-            <a:ext cx="7863840" cy="822960"/>
+            <a:off x="475488" y="1755648"/>
+            <a:ext cx="8193024" cy="777240"/>
           </a:xfrm>
           <a:prstGeom prst="roundRect">
             <a:avLst>
-              <a:gd name="adj" fmla="val 8889"/>
+              <a:gd name="adj" fmla="val 7059"/>
             </a:avLst>
           </a:prstGeom>
           <a:solidFill>
-            <a:srgbClr val="EAF6FD"/>
+            <a:srgbClr val="E9F7F3"/>
           </a:solidFill>
           <a:ln w="12700">
             <a:solidFill>
-              <a:srgbClr val="C9E6F5"/>
+              <a:srgbClr val="B9E5DA"/>
             </a:solidFill>
             <a:prstDash val="solid"/>
           </a:ln>
@@ -4497,8 +4352,8 @@
         </p:nvSpPr>
         <p:spPr>
           <a:xfrm>
-            <a:off x="822960" y="1883664"/>
-            <a:ext cx="7498080" cy="822960"/>
+            <a:off x="731520" y="1755648"/>
+            <a:ext cx="7680960" cy="777240"/>
           </a:xfrm>
           <a:prstGeom prst="rect">
             <a:avLst/>
@@ -4514,17 +4369,17 @@
               <a:buNone/>
             </a:pPr>
             <a:r>
-              <a:rPr lang="en-US" sz="2400" b="1" dirty="0">
-                <a:solidFill>
-                  <a:srgbClr val="EB6C15"/>
-                </a:solidFill>
-                <a:latin typeface="Meiryo" pitchFamily="34" charset="0"/>
-                <a:ea typeface="Meiryo" pitchFamily="34" charset="-122"/>
-                <a:cs typeface="Meiryo" pitchFamily="34" charset="-120"/>
+              <a:rPr lang="en-US" sz="2300" b="1" dirty="0">
+                <a:solidFill>
+                  <a:srgbClr val="EE7B08"/>
+                </a:solidFill>
+                <a:latin typeface="メイリオ" pitchFamily="34" charset="0"/>
+                <a:ea typeface="メイリオ" pitchFamily="34" charset="-122"/>
+                <a:cs typeface="メイリオ" pitchFamily="34" charset="-120"/>
               </a:rPr>
               <a:t>「学びを自分事として捉える子ども」である。</a:t>
             </a:r>
-            <a:endParaRPr lang="en-US" sz="2400" dirty="0"/>
+            <a:endParaRPr lang="en-US" sz="2300" dirty="0"/>
           </a:p>
         </p:txBody>
       </p:sp>
@@ -4536,8 +4391,8 @@
         </p:nvSpPr>
         <p:spPr>
           <a:xfrm>
-            <a:off x="640080" y="2852928"/>
-            <a:ext cx="8046720" cy="347472"/>
+            <a:off x="475488" y="2670048"/>
+            <a:ext cx="8193024" cy="320040"/>
           </a:xfrm>
           <a:prstGeom prst="rect">
             <a:avLst/>
@@ -4553,17 +4408,17 @@
               <a:buNone/>
             </a:pPr>
             <a:r>
-              <a:rPr lang="en-US" sz="1600" b="1" dirty="0">
-                <a:solidFill>
-                  <a:srgbClr val="1A1A1A"/>
-                </a:solidFill>
-                <a:latin typeface="Meiryo" pitchFamily="34" charset="0"/>
-                <a:ea typeface="Meiryo" pitchFamily="34" charset="-122"/>
-                <a:cs typeface="Meiryo" pitchFamily="34" charset="-120"/>
+              <a:rPr lang="en-US" sz="1500" b="1" dirty="0">
+                <a:solidFill>
+                  <a:srgbClr val="808080"/>
+                </a:solidFill>
+                <a:latin typeface="メイリオ" pitchFamily="34" charset="0"/>
+                <a:ea typeface="メイリオ" pitchFamily="34" charset="-122"/>
+                <a:cs typeface="メイリオ" pitchFamily="34" charset="-120"/>
               </a:rPr>
               <a:t>そのためには</a:t>
             </a:r>
-            <a:endParaRPr lang="en-US" sz="1600" dirty="0"/>
+            <a:endParaRPr lang="en-US" sz="1500" dirty="0"/>
           </a:p>
         </p:txBody>
       </p:sp>
@@ -4575,20 +4430,20 @@
         </p:nvSpPr>
         <p:spPr>
           <a:xfrm>
-            <a:off x="640080" y="3255264"/>
-            <a:ext cx="2423160" cy="603504"/>
+            <a:off x="475488" y="3054096"/>
+            <a:ext cx="2468880" cy="585216"/>
           </a:xfrm>
           <a:prstGeom prst="roundRect">
             <a:avLst>
-              <a:gd name="adj" fmla="val 12121"/>
+              <a:gd name="adj" fmla="val 10938"/>
             </a:avLst>
           </a:prstGeom>
           <a:solidFill>
-            <a:srgbClr val="EAF6FD"/>
+            <a:srgbClr val="E9F7F3"/>
           </a:solidFill>
           <a:ln w="12700">
             <a:solidFill>
-              <a:srgbClr val="C9E6F5"/>
+              <a:srgbClr val="B9E5DA"/>
             </a:solidFill>
             <a:prstDash val="solid"/>
           </a:ln>
@@ -4602,8 +4457,8 @@
         </p:nvSpPr>
         <p:spPr>
           <a:xfrm>
-            <a:off x="640080" y="3255264"/>
-            <a:ext cx="2423160" cy="603504"/>
+            <a:off x="475488" y="3054096"/>
+            <a:ext cx="2468880" cy="585216"/>
           </a:xfrm>
           <a:prstGeom prst="rect">
             <a:avLst/>
@@ -4616,20 +4471,23 @@
           <a:lstStyle/>
           <a:p>
             <a:pPr algn="ctr" indent="0" marL="0">
-              <a:buNone/>
-            </a:pPr>
-            <a:r>
-              <a:rPr lang="en-US" sz="1700" b="1" dirty="0">
-                <a:solidFill>
-                  <a:srgbClr val="EB6C15"/>
-                </a:solidFill>
-                <a:latin typeface="Meiryo" pitchFamily="34" charset="0"/>
-                <a:ea typeface="Meiryo" pitchFamily="34" charset="-122"/>
-                <a:cs typeface="Meiryo" pitchFamily="34" charset="-120"/>
+              <a:lnSpc>
+                <a:spcPct val="115000"/>
+              </a:lnSpc>
+              <a:buNone/>
+            </a:pPr>
+            <a:r>
+              <a:rPr lang="en-US" sz="1600" b="1" dirty="0">
+                <a:solidFill>
+                  <a:srgbClr val="595959"/>
+                </a:solidFill>
+                <a:latin typeface="メイリオ" pitchFamily="34" charset="0"/>
+                <a:ea typeface="メイリオ" pitchFamily="34" charset="-122"/>
+                <a:cs typeface="メイリオ" pitchFamily="34" charset="-120"/>
               </a:rPr>
               <a:t>自己肯定感</a:t>
             </a:r>
-            <a:endParaRPr lang="en-US" sz="1700" dirty="0"/>
+            <a:endParaRPr lang="en-US" sz="1600" dirty="0"/>
           </a:p>
         </p:txBody>
       </p:sp>
@@ -4641,20 +4499,20 @@
         </p:nvSpPr>
         <p:spPr>
           <a:xfrm>
-            <a:off x="3337560" y="3255264"/>
-            <a:ext cx="2423160" cy="603504"/>
+            <a:off x="3218688" y="3054096"/>
+            <a:ext cx="2468880" cy="585216"/>
           </a:xfrm>
           <a:prstGeom prst="roundRect">
             <a:avLst>
-              <a:gd name="adj" fmla="val 12121"/>
+              <a:gd name="adj" fmla="val 10938"/>
             </a:avLst>
           </a:prstGeom>
           <a:solidFill>
-            <a:srgbClr val="EAF6FD"/>
+            <a:srgbClr val="E9F7F3"/>
           </a:solidFill>
           <a:ln w="12700">
             <a:solidFill>
-              <a:srgbClr val="C9E6F5"/>
+              <a:srgbClr val="B9E5DA"/>
             </a:solidFill>
             <a:prstDash val="solid"/>
           </a:ln>
@@ -4668,8 +4526,8 @@
         </p:nvSpPr>
         <p:spPr>
           <a:xfrm>
-            <a:off x="3337560" y="3255264"/>
-            <a:ext cx="2423160" cy="603504"/>
+            <a:off x="3218688" y="3054096"/>
+            <a:ext cx="2468880" cy="585216"/>
           </a:xfrm>
           <a:prstGeom prst="rect">
             <a:avLst/>
@@ -4682,20 +4540,23 @@
           <a:lstStyle/>
           <a:p>
             <a:pPr algn="ctr" indent="0" marL="0">
-              <a:buNone/>
-            </a:pPr>
-            <a:r>
-              <a:rPr lang="en-US" sz="1700" b="1" dirty="0">
-                <a:solidFill>
-                  <a:srgbClr val="EB6C15"/>
-                </a:solidFill>
-                <a:latin typeface="Meiryo" pitchFamily="34" charset="0"/>
-                <a:ea typeface="Meiryo" pitchFamily="34" charset="-122"/>
-                <a:cs typeface="Meiryo" pitchFamily="34" charset="-120"/>
+              <a:lnSpc>
+                <a:spcPct val="115000"/>
+              </a:lnSpc>
+              <a:buNone/>
+            </a:pPr>
+            <a:r>
+              <a:rPr lang="en-US" sz="1600" b="1" dirty="0">
+                <a:solidFill>
+                  <a:srgbClr val="595959"/>
+                </a:solidFill>
+                <a:latin typeface="メイリオ" pitchFamily="34" charset="0"/>
+                <a:ea typeface="メイリオ" pitchFamily="34" charset="-122"/>
+                <a:cs typeface="メイリオ" pitchFamily="34" charset="-120"/>
               </a:rPr>
               <a:t>対話・協働</a:t>
             </a:r>
-            <a:endParaRPr lang="en-US" sz="1700" dirty="0"/>
+            <a:endParaRPr lang="en-US" sz="1600" dirty="0"/>
           </a:p>
         </p:txBody>
       </p:sp>
@@ -4707,20 +4568,20 @@
         </p:nvSpPr>
         <p:spPr>
           <a:xfrm>
-            <a:off x="6035040" y="3255264"/>
-            <a:ext cx="2423160" cy="603504"/>
+            <a:off x="5961888" y="3054096"/>
+            <a:ext cx="2468880" cy="585216"/>
           </a:xfrm>
           <a:prstGeom prst="roundRect">
             <a:avLst>
-              <a:gd name="adj" fmla="val 12121"/>
+              <a:gd name="adj" fmla="val 10938"/>
             </a:avLst>
           </a:prstGeom>
           <a:solidFill>
-            <a:srgbClr val="EAF6FD"/>
+            <a:srgbClr val="E9F7F3"/>
           </a:solidFill>
           <a:ln w="12700">
             <a:solidFill>
-              <a:srgbClr val="C9E6F5"/>
+              <a:srgbClr val="B9E5DA"/>
             </a:solidFill>
             <a:prstDash val="solid"/>
           </a:ln>
@@ -4734,8 +4595,8 @@
         </p:nvSpPr>
         <p:spPr>
           <a:xfrm>
-            <a:off x="6035040" y="3255264"/>
-            <a:ext cx="2423160" cy="603504"/>
+            <a:off x="5961888" y="3054096"/>
+            <a:ext cx="2468880" cy="585216"/>
           </a:xfrm>
           <a:prstGeom prst="rect">
             <a:avLst/>
@@ -4748,20 +4609,23 @@
           <a:lstStyle/>
           <a:p>
             <a:pPr algn="ctr" indent="0" marL="0">
-              <a:buNone/>
-            </a:pPr>
-            <a:r>
-              <a:rPr lang="en-US" sz="1700" b="1" dirty="0">
-                <a:solidFill>
-                  <a:srgbClr val="EB6C15"/>
-                </a:solidFill>
-                <a:latin typeface="Meiryo" pitchFamily="34" charset="0"/>
-                <a:ea typeface="Meiryo" pitchFamily="34" charset="-122"/>
-                <a:cs typeface="Meiryo" pitchFamily="34" charset="-120"/>
+              <a:lnSpc>
+                <a:spcPct val="115000"/>
+              </a:lnSpc>
+              <a:buNone/>
+            </a:pPr>
+            <a:r>
+              <a:rPr lang="en-US" sz="1600" b="1" dirty="0">
+                <a:solidFill>
+                  <a:srgbClr val="595959"/>
+                </a:solidFill>
+                <a:latin typeface="メイリオ" pitchFamily="34" charset="0"/>
+                <a:ea typeface="メイリオ" pitchFamily="34" charset="-122"/>
+                <a:cs typeface="メイリオ" pitchFamily="34" charset="-120"/>
               </a:rPr>
               <a:t>学習の自己調整</a:t>
             </a:r>
-            <a:endParaRPr lang="en-US" sz="1700" dirty="0"/>
+            <a:endParaRPr lang="en-US" sz="1600" dirty="0"/>
           </a:p>
         </p:txBody>
       </p:sp>
@@ -4773,8 +4637,8 @@
         </p:nvSpPr>
         <p:spPr>
           <a:xfrm>
-            <a:off x="640080" y="4041648"/>
-            <a:ext cx="8046720" cy="548640"/>
+            <a:off x="475488" y="3840480"/>
+            <a:ext cx="8193024" cy="502920"/>
           </a:xfrm>
           <a:prstGeom prst="rect">
             <a:avLst/>
@@ -4790,13 +4654,13 @@
               <a:buNone/>
             </a:pPr>
             <a:r>
-              <a:rPr lang="en-US" sz="1900" b="1" dirty="0">
-                <a:solidFill>
-                  <a:srgbClr val="1A1A1A"/>
-                </a:solidFill>
-                <a:latin typeface="Meiryo" pitchFamily="34" charset="0"/>
-                <a:ea typeface="Meiryo" pitchFamily="34" charset="-122"/>
-                <a:cs typeface="Meiryo" pitchFamily="34" charset="-120"/>
+              <a:rPr lang="en-US" sz="1800" b="1" dirty="0">
+                <a:solidFill>
+                  <a:srgbClr val="595959"/>
+                </a:solidFill>
+                <a:latin typeface="メイリオ" pitchFamily="34" charset="0"/>
+                <a:ea typeface="メイリオ" pitchFamily="34" charset="-122"/>
+                <a:cs typeface="メイリオ" pitchFamily="34" charset="-120"/>
               </a:rPr>
               <a:t>を　</a:t>
             </a:r>
@@ -4804,13 +4668,13 @@
               <a:buNone/>
             </a:pPr>
             <a:r>
-              <a:rPr lang="en-US" sz="1900" b="1" dirty="0">
-                <a:solidFill>
-                  <a:srgbClr val="EB6C15"/>
-                </a:solidFill>
-                <a:latin typeface="Meiryo" pitchFamily="34" charset="0"/>
-                <a:ea typeface="Meiryo" pitchFamily="34" charset="-122"/>
-                <a:cs typeface="Meiryo" pitchFamily="34" charset="-120"/>
+              <a:rPr lang="en-US" sz="1800" b="1" dirty="0">
+                <a:solidFill>
+                  <a:srgbClr val="EE7B08"/>
+                </a:solidFill>
+                <a:latin typeface="メイリオ" pitchFamily="34" charset="0"/>
+                <a:ea typeface="メイリオ" pitchFamily="34" charset="-122"/>
+                <a:cs typeface="メイリオ" pitchFamily="34" charset="-120"/>
               </a:rPr>
               <a:t>９年間で系統的に</a:t>
             </a:r>
@@ -4818,17 +4682,17 @@
               <a:buNone/>
             </a:pPr>
             <a:r>
-              <a:rPr lang="en-US" sz="1900" b="1" dirty="0">
-                <a:solidFill>
-                  <a:srgbClr val="1A1A1A"/>
-                </a:solidFill>
-                <a:latin typeface="Meiryo" pitchFamily="34" charset="0"/>
-                <a:ea typeface="Meiryo" pitchFamily="34" charset="-122"/>
-                <a:cs typeface="Meiryo" pitchFamily="34" charset="-120"/>
+              <a:rPr lang="en-US" sz="1800" b="1" dirty="0">
+                <a:solidFill>
+                  <a:srgbClr val="595959"/>
+                </a:solidFill>
+                <a:latin typeface="メイリオ" pitchFamily="34" charset="0"/>
+                <a:ea typeface="メイリオ" pitchFamily="34" charset="-122"/>
+                <a:cs typeface="メイリオ" pitchFamily="34" charset="-120"/>
               </a:rPr>
               <a:t>　育てていくことが重要である。</a:t>
             </a:r>
-            <a:endParaRPr lang="en-US" sz="1900" dirty="0"/>
+            <a:endParaRPr lang="en-US" sz="1800" dirty="0"/>
           </a:p>
         </p:txBody>
       </p:sp>
@@ -4865,14 +4729,14 @@
         </p:nvSpPr>
         <p:spPr>
           <a:xfrm>
-            <a:off x="0" y="0"/>
-            <a:ext cx="9144000" cy="576072"/>
+            <a:off x="0" y="-9144"/>
+            <a:ext cx="9144000" cy="612648"/>
           </a:xfrm>
           <a:prstGeom prst="rect">
             <a:avLst/>
           </a:prstGeom>
           <a:solidFill>
-            <a:srgbClr val="00B0F0"/>
+            <a:srgbClr val="44C1A3"/>
           </a:solidFill>
           <a:ln/>
         </p:spPr>
@@ -4881,20 +4745,23 @@
           <a:lstStyle/>
           <a:p>
             <a:pPr algn="l" indent="0" marL="0">
-              <a:buNone/>
-            </a:pPr>
-            <a:r>
-              <a:rPr lang="en-US" sz="2800" b="1" dirty="0">
+              <a:lnSpc>
+                <a:spcPct val="120000"/>
+              </a:lnSpc>
+              <a:buNone/>
+            </a:pPr>
+            <a:r>
+              <a:rPr lang="en-US" sz="3000" b="1" dirty="0">
                 <a:solidFill>
                   <a:srgbClr val="FFFFFF"/>
                 </a:solidFill>
-                <a:latin typeface="Meiryo" pitchFamily="34" charset="0"/>
-                <a:ea typeface="Meiryo" pitchFamily="34" charset="-122"/>
-                <a:cs typeface="Meiryo" pitchFamily="34" charset="-120"/>
+                <a:latin typeface="メイリオ" pitchFamily="34" charset="0"/>
+                <a:ea typeface="メイリオ" pitchFamily="34" charset="-122"/>
+                <a:cs typeface="メイリオ" pitchFamily="34" charset="-120"/>
               </a:rPr>
               <a:t>　まとめ</a:t>
             </a:r>
-            <a:endParaRPr lang="en-US" sz="2800" dirty="0"/>
+            <a:endParaRPr lang="en-US" sz="3000" dirty="0"/>
           </a:p>
         </p:txBody>
       </p:sp>
@@ -4906,8 +4773,8 @@
         </p:nvSpPr>
         <p:spPr>
           <a:xfrm>
-            <a:off x="640080" y="841248"/>
-            <a:ext cx="8046720" cy="731520"/>
+            <a:off x="475488" y="896112"/>
+            <a:ext cx="8193024" cy="457200"/>
           </a:xfrm>
           <a:prstGeom prst="rect">
             <a:avLst/>
@@ -4921,56 +4788,56 @@
           <a:p>
             <a:pPr algn="l" indent="0" marL="0">
               <a:lnSpc>
-                <a:spcPct val="130000"/>
-              </a:lnSpc>
-              <a:buNone/>
-            </a:pPr>
-            <a:r>
-              <a:rPr lang="en-US" sz="1900" b="1" dirty="0">
-                <a:solidFill>
-                  <a:srgbClr val="1A1A1A"/>
-                </a:solidFill>
-                <a:latin typeface="Meiryo" pitchFamily="34" charset="0"/>
-                <a:ea typeface="Meiryo" pitchFamily="34" charset="-122"/>
-                <a:cs typeface="Meiryo" pitchFamily="34" charset="-120"/>
+                <a:spcPct val="120000"/>
+              </a:lnSpc>
+              <a:buNone/>
+            </a:pPr>
+            <a:r>
+              <a:rPr lang="en-US" sz="1800" b="1" dirty="0">
+                <a:solidFill>
+                  <a:srgbClr val="595959"/>
+                </a:solidFill>
+                <a:latin typeface="メイリオ" pitchFamily="34" charset="0"/>
+                <a:ea typeface="メイリオ" pitchFamily="34" charset="-122"/>
+                <a:cs typeface="メイリオ" pitchFamily="34" charset="-120"/>
               </a:rPr>
               <a:t>学力向上は、</a:t>
             </a:r>
             <a:pPr algn="l" indent="0" marL="0">
               <a:lnSpc>
-                <a:spcPct val="130000"/>
-              </a:lnSpc>
-              <a:buNone/>
-            </a:pPr>
-            <a:r>
-              <a:rPr lang="en-US" sz="1900" b="1" dirty="0">
-                <a:solidFill>
-                  <a:srgbClr val="EB6C15"/>
-                </a:solidFill>
-                <a:latin typeface="Meiryo" pitchFamily="34" charset="0"/>
-                <a:ea typeface="Meiryo" pitchFamily="34" charset="-122"/>
-                <a:cs typeface="Meiryo" pitchFamily="34" charset="-120"/>
+                <a:spcPct val="120000"/>
+              </a:lnSpc>
+              <a:buNone/>
+            </a:pPr>
+            <a:r>
+              <a:rPr lang="en-US" sz="1800" b="1" dirty="0">
+                <a:solidFill>
+                  <a:srgbClr val="EE7B08"/>
+                </a:solidFill>
+                <a:latin typeface="メイリオ" pitchFamily="34" charset="0"/>
+                <a:ea typeface="メイリオ" pitchFamily="34" charset="-122"/>
+                <a:cs typeface="メイリオ" pitchFamily="34" charset="-120"/>
               </a:rPr>
               <a:t>知識の積み上げだけ</a:t>
             </a:r>
             <a:pPr algn="l" indent="0" marL="0">
               <a:lnSpc>
-                <a:spcPct val="130000"/>
-              </a:lnSpc>
-              <a:buNone/>
-            </a:pPr>
-            <a:r>
-              <a:rPr lang="en-US" sz="1900" b="1" dirty="0">
-                <a:solidFill>
-                  <a:srgbClr val="1A1A1A"/>
-                </a:solidFill>
-                <a:latin typeface="Meiryo" pitchFamily="34" charset="0"/>
-                <a:ea typeface="Meiryo" pitchFamily="34" charset="-122"/>
-                <a:cs typeface="Meiryo" pitchFamily="34" charset="-120"/>
+                <a:spcPct val="120000"/>
+              </a:lnSpc>
+              <a:buNone/>
+            </a:pPr>
+            <a:r>
+              <a:rPr lang="en-US" sz="1800" b="1" dirty="0">
+                <a:solidFill>
+                  <a:srgbClr val="595959"/>
+                </a:solidFill>
+                <a:latin typeface="メイリオ" pitchFamily="34" charset="0"/>
+                <a:ea typeface="メイリオ" pitchFamily="34" charset="-122"/>
+                <a:cs typeface="メイリオ" pitchFamily="34" charset="-120"/>
               </a:rPr>
               <a:t>で実現するものではない。</a:t>
             </a:r>
-            <a:endParaRPr lang="en-US" sz="1900" dirty="0"/>
+            <a:endParaRPr lang="en-US" sz="1800" dirty="0"/>
           </a:p>
         </p:txBody>
       </p:sp>
@@ -4982,8 +4849,8 @@
         </p:nvSpPr>
         <p:spPr>
           <a:xfrm>
-            <a:off x="640080" y="1517904"/>
-            <a:ext cx="8046720" cy="347472"/>
+            <a:off x="475488" y="1444752"/>
+            <a:ext cx="8193024" cy="320040"/>
           </a:xfrm>
           <a:prstGeom prst="rect">
             <a:avLst/>
@@ -5001,11 +4868,11 @@
             <a:r>
               <a:rPr lang="en-US" sz="1500" b="1" dirty="0">
                 <a:solidFill>
-                  <a:srgbClr val="595959"/>
-                </a:solidFill>
-                <a:latin typeface="Meiryo" pitchFamily="34" charset="0"/>
-                <a:ea typeface="Meiryo" pitchFamily="34" charset="-122"/>
-                <a:cs typeface="Meiryo" pitchFamily="34" charset="-120"/>
+                  <a:srgbClr val="808080"/>
+                </a:solidFill>
+                <a:latin typeface="メイリオ" pitchFamily="34" charset="0"/>
+                <a:ea typeface="メイリオ" pitchFamily="34" charset="-122"/>
+                <a:cs typeface="メイリオ" pitchFamily="34" charset="-120"/>
               </a:rPr>
               <a:t>みらい青空学園では</a:t>
             </a:r>
@@ -5021,16 +4888,16 @@
         </p:nvSpPr>
         <p:spPr>
           <a:xfrm>
-            <a:off x="640080" y="1901952"/>
-            <a:ext cx="2423160" cy="640080"/>
+            <a:off x="475488" y="1828800"/>
+            <a:ext cx="2468880" cy="621792"/>
           </a:xfrm>
           <a:prstGeom prst="roundRect">
             <a:avLst>
-              <a:gd name="adj" fmla="val 11429"/>
+              <a:gd name="adj" fmla="val 10294"/>
             </a:avLst>
           </a:prstGeom>
           <a:solidFill>
-            <a:srgbClr val="EB6C15"/>
+            <a:srgbClr val="44C1A3"/>
           </a:solidFill>
           <a:ln/>
         </p:spPr>
@@ -5043,8 +4910,8 @@
         </p:nvSpPr>
         <p:spPr>
           <a:xfrm>
-            <a:off x="640080" y="1901952"/>
-            <a:ext cx="2423160" cy="640080"/>
+            <a:off x="475488" y="1828800"/>
+            <a:ext cx="2468880" cy="621792"/>
           </a:xfrm>
           <a:prstGeom prst="rect">
             <a:avLst/>
@@ -5057,6 +4924,9 @@
           <a:lstStyle/>
           <a:p>
             <a:pPr algn="ctr" indent="0" marL="0">
+              <a:lnSpc>
+                <a:spcPct val="115000"/>
+              </a:lnSpc>
               <a:buNone/>
             </a:pPr>
             <a:r>
@@ -5064,9 +4934,9 @@
                 <a:solidFill>
                   <a:srgbClr val="FFFFFF"/>
                 </a:solidFill>
-                <a:latin typeface="Meiryo" pitchFamily="34" charset="0"/>
-                <a:ea typeface="Meiryo" pitchFamily="34" charset="-122"/>
-                <a:cs typeface="Meiryo" pitchFamily="34" charset="-120"/>
+                <a:latin typeface="メイリオ" pitchFamily="34" charset="0"/>
+                <a:ea typeface="メイリオ" pitchFamily="34" charset="-122"/>
+                <a:cs typeface="メイリオ" pitchFamily="34" charset="-120"/>
               </a:rPr>
               <a:t>自己肯定感</a:t>
             </a:r>
@@ -5082,16 +4952,16 @@
         </p:nvSpPr>
         <p:spPr>
           <a:xfrm>
-            <a:off x="3337560" y="1901952"/>
-            <a:ext cx="2423160" cy="640080"/>
+            <a:off x="3218688" y="1828800"/>
+            <a:ext cx="2468880" cy="621792"/>
           </a:xfrm>
           <a:prstGeom prst="roundRect">
             <a:avLst>
-              <a:gd name="adj" fmla="val 11429"/>
+              <a:gd name="adj" fmla="val 10294"/>
             </a:avLst>
           </a:prstGeom>
           <a:solidFill>
-            <a:srgbClr val="EB6C15"/>
+            <a:srgbClr val="44C1A3"/>
           </a:solidFill>
           <a:ln/>
         </p:spPr>
@@ -5104,8 +4974,8 @@
         </p:nvSpPr>
         <p:spPr>
           <a:xfrm>
-            <a:off x="3337560" y="1901952"/>
-            <a:ext cx="2423160" cy="640080"/>
+            <a:off x="3218688" y="1828800"/>
+            <a:ext cx="2468880" cy="621792"/>
           </a:xfrm>
           <a:prstGeom prst="rect">
             <a:avLst/>
@@ -5118,6 +4988,9 @@
           <a:lstStyle/>
           <a:p>
             <a:pPr algn="ctr" indent="0" marL="0">
+              <a:lnSpc>
+                <a:spcPct val="115000"/>
+              </a:lnSpc>
               <a:buNone/>
             </a:pPr>
             <a:r>
@@ -5125,9 +4998,9 @@
                 <a:solidFill>
                   <a:srgbClr val="FFFFFF"/>
                 </a:solidFill>
-                <a:latin typeface="Meiryo" pitchFamily="34" charset="0"/>
-                <a:ea typeface="Meiryo" pitchFamily="34" charset="-122"/>
-                <a:cs typeface="Meiryo" pitchFamily="34" charset="-120"/>
+                <a:latin typeface="メイリオ" pitchFamily="34" charset="0"/>
+                <a:ea typeface="メイリオ" pitchFamily="34" charset="-122"/>
+                <a:cs typeface="メイリオ" pitchFamily="34" charset="-120"/>
               </a:rPr>
               <a:t>対話・協働</a:t>
             </a:r>
@@ -5143,16 +5016,16 @@
         </p:nvSpPr>
         <p:spPr>
           <a:xfrm>
-            <a:off x="6035040" y="1901952"/>
-            <a:ext cx="2423160" cy="640080"/>
+            <a:off x="5961888" y="1828800"/>
+            <a:ext cx="2468880" cy="621792"/>
           </a:xfrm>
           <a:prstGeom prst="roundRect">
             <a:avLst>
-              <a:gd name="adj" fmla="val 11429"/>
+              <a:gd name="adj" fmla="val 10294"/>
             </a:avLst>
           </a:prstGeom>
           <a:solidFill>
-            <a:srgbClr val="EB6C15"/>
+            <a:srgbClr val="44C1A3"/>
           </a:solidFill>
           <a:ln/>
         </p:spPr>
@@ -5165,8 +5038,8 @@
         </p:nvSpPr>
         <p:spPr>
           <a:xfrm>
-            <a:off x="6035040" y="1901952"/>
-            <a:ext cx="2423160" cy="640080"/>
+            <a:off x="5961888" y="1828800"/>
+            <a:ext cx="2468880" cy="621792"/>
           </a:xfrm>
           <a:prstGeom prst="rect">
             <a:avLst/>
@@ -5179,6 +5052,9 @@
           <a:lstStyle/>
           <a:p>
             <a:pPr algn="ctr" indent="0" marL="0">
+              <a:lnSpc>
+                <a:spcPct val="115000"/>
+              </a:lnSpc>
               <a:buNone/>
             </a:pPr>
             <a:r>
@@ -5186,9 +5062,9 @@
                 <a:solidFill>
                   <a:srgbClr val="FFFFFF"/>
                 </a:solidFill>
-                <a:latin typeface="Meiryo" pitchFamily="34" charset="0"/>
-                <a:ea typeface="Meiryo" pitchFamily="34" charset="-122"/>
-                <a:cs typeface="Meiryo" pitchFamily="34" charset="-120"/>
+                <a:latin typeface="メイリオ" pitchFamily="34" charset="0"/>
+                <a:ea typeface="メイリオ" pitchFamily="34" charset="-122"/>
+                <a:cs typeface="メイリオ" pitchFamily="34" charset="-120"/>
               </a:rPr>
               <a:t>学習の自己調整</a:t>
             </a:r>
@@ -5204,8 +5080,8 @@
         </p:nvSpPr>
         <p:spPr>
           <a:xfrm>
-            <a:off x="640080" y="2651760"/>
-            <a:ext cx="8046720" cy="365760"/>
+            <a:off x="475488" y="2560320"/>
+            <a:ext cx="8193024" cy="365760"/>
           </a:xfrm>
           <a:prstGeom prst="rect">
             <a:avLst/>
@@ -5223,11 +5099,11 @@
             <a:r>
               <a:rPr lang="en-US" sz="1700" b="1" dirty="0">
                 <a:solidFill>
-                  <a:srgbClr val="1A1A1A"/>
-                </a:solidFill>
-                <a:latin typeface="Meiryo" pitchFamily="34" charset="0"/>
-                <a:ea typeface="Meiryo" pitchFamily="34" charset="-122"/>
-                <a:cs typeface="Meiryo" pitchFamily="34" charset="-120"/>
+                  <a:srgbClr val="595959"/>
+                </a:solidFill>
+                <a:latin typeface="メイリオ" pitchFamily="34" charset="0"/>
+                <a:ea typeface="メイリオ" pitchFamily="34" charset="-122"/>
+                <a:cs typeface="メイリオ" pitchFamily="34" charset="-120"/>
               </a:rPr>
               <a:t>が着実に育成されている。</a:t>
             </a:r>
@@ -5243,20 +5119,20 @@
         </p:nvSpPr>
         <p:spPr>
           <a:xfrm>
-            <a:off x="640080" y="3127248"/>
-            <a:ext cx="7863840" cy="932688"/>
+            <a:off x="475488" y="3035808"/>
+            <a:ext cx="8193024" cy="914400"/>
           </a:xfrm>
           <a:prstGeom prst="roundRect">
             <a:avLst>
-              <a:gd name="adj" fmla="val 7843"/>
+              <a:gd name="adj" fmla="val 6000"/>
             </a:avLst>
           </a:prstGeom>
           <a:solidFill>
-            <a:srgbClr val="EAF6FD"/>
+            <a:srgbClr val="E9F7F3"/>
           </a:solidFill>
           <a:ln w="12700">
             <a:solidFill>
-              <a:srgbClr val="C9E6F5"/>
+              <a:srgbClr val="B9E5DA"/>
             </a:solidFill>
             <a:prstDash val="solid"/>
           </a:ln>
@@ -5270,8 +5146,8 @@
         </p:nvSpPr>
         <p:spPr>
           <a:xfrm>
-            <a:off x="822960" y="3127248"/>
-            <a:ext cx="7498080" cy="932688"/>
+            <a:off x="731520" y="3035808"/>
+            <a:ext cx="7680960" cy="914400"/>
           </a:xfrm>
           <a:prstGeom prst="rect">
             <a:avLst/>
@@ -5290,17 +5166,17 @@
               <a:buNone/>
             </a:pPr>
             <a:r>
-              <a:rPr lang="en-US" sz="1800" b="1" dirty="0">
-                <a:solidFill>
-                  <a:srgbClr val="1A1A1A"/>
-                </a:solidFill>
-                <a:latin typeface="Meiryo" pitchFamily="34" charset="0"/>
-                <a:ea typeface="Meiryo" pitchFamily="34" charset="-122"/>
-                <a:cs typeface="Meiryo" pitchFamily="34" charset="-120"/>
+              <a:rPr lang="en-US" sz="1700" b="1" dirty="0">
+                <a:solidFill>
+                  <a:srgbClr val="595959"/>
+                </a:solidFill>
+                <a:latin typeface="メイリオ" pitchFamily="34" charset="0"/>
+                <a:ea typeface="メイリオ" pitchFamily="34" charset="-122"/>
+                <a:cs typeface="メイリオ" pitchFamily="34" charset="-120"/>
               </a:rPr>
               <a:t>これこそが、</a:t>
             </a:r>
-            <a:endParaRPr lang="en-US" sz="1800" dirty="0"/>
+            <a:endParaRPr lang="en-US" sz="1700" dirty="0"/>
           </a:p>
           <a:p>
             <a:pPr algn="l" indent="0" marL="0">
@@ -5310,13 +5186,13 @@
               <a:buNone/>
             </a:pPr>
             <a:r>
-              <a:rPr lang="en-US" sz="1800" b="1" dirty="0">
-                <a:solidFill>
-                  <a:srgbClr val="EB6C15"/>
-                </a:solidFill>
-                <a:latin typeface="Meiryo" pitchFamily="34" charset="0"/>
-                <a:ea typeface="Meiryo" pitchFamily="34" charset="-122"/>
-                <a:cs typeface="Meiryo" pitchFamily="34" charset="-120"/>
+              <a:rPr lang="en-US" sz="1700" b="1" dirty="0">
+                <a:solidFill>
+                  <a:srgbClr val="EE7B08"/>
+                </a:solidFill>
+                <a:latin typeface="メイリオ" pitchFamily="34" charset="0"/>
+                <a:ea typeface="メイリオ" pitchFamily="34" charset="-122"/>
+                <a:cs typeface="メイリオ" pitchFamily="34" charset="-120"/>
               </a:rPr>
               <a:t>施設一体型小中一貫教育校としての最大の強み</a:t>
             </a:r>
@@ -5327,17 +5203,17 @@
               <a:buNone/>
             </a:pPr>
             <a:r>
-              <a:rPr lang="en-US" sz="1800" b="1" dirty="0">
-                <a:solidFill>
-                  <a:srgbClr val="1A1A1A"/>
-                </a:solidFill>
-                <a:latin typeface="Meiryo" pitchFamily="34" charset="0"/>
-                <a:ea typeface="Meiryo" pitchFamily="34" charset="-122"/>
-                <a:cs typeface="Meiryo" pitchFamily="34" charset="-120"/>
+              <a:rPr lang="en-US" sz="1700" b="1" dirty="0">
+                <a:solidFill>
+                  <a:srgbClr val="595959"/>
+                </a:solidFill>
+                <a:latin typeface="メイリオ" pitchFamily="34" charset="0"/>
+                <a:ea typeface="メイリオ" pitchFamily="34" charset="-122"/>
+                <a:cs typeface="メイリオ" pitchFamily="34" charset="-120"/>
               </a:rPr>
               <a:t>である。</a:t>
             </a:r>
-            <a:endParaRPr lang="en-US" sz="1800" dirty="0"/>
+            <a:endParaRPr lang="en-US" sz="1700" dirty="0"/>
           </a:p>
         </p:txBody>
       </p:sp>
@@ -5349,8 +5225,8 @@
         </p:nvSpPr>
         <p:spPr>
           <a:xfrm>
-            <a:off x="640080" y="4206240"/>
-            <a:ext cx="8046720" cy="457200"/>
+            <a:off x="475488" y="4114800"/>
+            <a:ext cx="8193024" cy="457200"/>
           </a:xfrm>
           <a:prstGeom prst="rect">
             <a:avLst/>
@@ -5366,17 +5242,17 @@
               <a:buNone/>
             </a:pPr>
             <a:r>
-              <a:rPr lang="en-US" sz="1900" b="1" dirty="0">
-                <a:solidFill>
-                  <a:srgbClr val="1A1A1A"/>
-                </a:solidFill>
-                <a:latin typeface="Meiryo" pitchFamily="34" charset="0"/>
-                <a:ea typeface="Meiryo" pitchFamily="34" charset="-122"/>
-                <a:cs typeface="Meiryo" pitchFamily="34" charset="-120"/>
+              <a:rPr lang="en-US" sz="1800" b="1" dirty="0">
+                <a:solidFill>
+                  <a:srgbClr val="595959"/>
+                </a:solidFill>
+                <a:latin typeface="メイリオ" pitchFamily="34" charset="0"/>
+                <a:ea typeface="メイリオ" pitchFamily="34" charset="-122"/>
+                <a:cs typeface="メイリオ" pitchFamily="34" charset="-120"/>
               </a:rPr>
               <a:t>今後も、９年間を見通した学びの充実に期待している。</a:t>
             </a:r>
-            <a:endParaRPr lang="en-US" sz="1900" dirty="0"/>
+            <a:endParaRPr lang="en-US" sz="1800" dirty="0"/>
           </a:p>
         </p:txBody>
       </p:sp>
@@ -5413,14 +5289,14 @@
         </p:nvSpPr>
         <p:spPr>
           <a:xfrm>
-            <a:off x="0" y="0"/>
-            <a:ext cx="9144000" cy="576072"/>
+            <a:off x="0" y="-9144"/>
+            <a:ext cx="9144000" cy="612648"/>
           </a:xfrm>
           <a:prstGeom prst="rect">
             <a:avLst/>
           </a:prstGeom>
           <a:solidFill>
-            <a:srgbClr val="00B0F0"/>
+            <a:srgbClr val="44C1A3"/>
           </a:solidFill>
           <a:ln/>
         </p:spPr>
@@ -5429,20 +5305,23 @@
           <a:lstStyle/>
           <a:p>
             <a:pPr algn="l" indent="0" marL="0">
-              <a:buNone/>
-            </a:pPr>
-            <a:r>
-              <a:rPr lang="en-US" sz="2800" b="1" dirty="0">
+              <a:lnSpc>
+                <a:spcPct val="120000"/>
+              </a:lnSpc>
+              <a:buNone/>
+            </a:pPr>
+            <a:r>
+              <a:rPr lang="en-US" sz="3000" b="1" dirty="0">
                 <a:solidFill>
                   <a:srgbClr val="FFFFFF"/>
                 </a:solidFill>
-                <a:latin typeface="Meiryo" pitchFamily="34" charset="0"/>
-                <a:ea typeface="Meiryo" pitchFamily="34" charset="-122"/>
-                <a:cs typeface="Meiryo" pitchFamily="34" charset="-120"/>
+                <a:latin typeface="メイリオ" pitchFamily="34" charset="0"/>
+                <a:ea typeface="メイリオ" pitchFamily="34" charset="-122"/>
+                <a:cs typeface="メイリオ" pitchFamily="34" charset="-120"/>
               </a:rPr>
               <a:t>　本日の講評</a:t>
             </a:r>
-            <a:endParaRPr lang="en-US" sz="2800" dirty="0"/>
+            <a:endParaRPr lang="en-US" sz="3000" dirty="0"/>
           </a:p>
         </p:txBody>
       </p:sp>
@@ -5454,14 +5333,14 @@
         </p:nvSpPr>
         <p:spPr>
           <a:xfrm>
-            <a:off x="640080" y="1115568"/>
-            <a:ext cx="566928" cy="566928"/>
+            <a:off x="658368" y="1188720"/>
+            <a:ext cx="512064" cy="512064"/>
           </a:xfrm>
           <a:prstGeom prst="ellipse">
             <a:avLst/>
           </a:prstGeom>
           <a:solidFill>
-            <a:srgbClr val="EB6C15"/>
+            <a:srgbClr val="44C1A3"/>
           </a:solidFill>
           <a:ln/>
         </p:spPr>
@@ -5474,8 +5353,8 @@
         </p:nvSpPr>
         <p:spPr>
           <a:xfrm>
-            <a:off x="640080" y="1115568"/>
-            <a:ext cx="566928" cy="566928"/>
+            <a:off x="658368" y="1188720"/>
+            <a:ext cx="512064" cy="512064"/>
           </a:xfrm>
           <a:prstGeom prst="rect">
             <a:avLst/>
@@ -5491,17 +5370,17 @@
               <a:buNone/>
             </a:pPr>
             <a:r>
-              <a:rPr lang="en-US" sz="2900" b="1" dirty="0">
+              <a:rPr lang="en-US" sz="2600" b="1" dirty="0">
                 <a:solidFill>
                   <a:srgbClr val="FFFFFF"/>
                 </a:solidFill>
-                <a:latin typeface="Meiryo" pitchFamily="34" charset="0"/>
-                <a:ea typeface="Meiryo" pitchFamily="34" charset="-122"/>
-                <a:cs typeface="Meiryo" pitchFamily="34" charset="-120"/>
-              </a:rPr>
-              <a:t>１</a:t>
-            </a:r>
-            <a:endParaRPr lang="en-US" sz="2900" dirty="0"/>
+                <a:latin typeface="メイリオ" pitchFamily="34" charset="0"/>
+                <a:ea typeface="メイリオ" pitchFamily="34" charset="-122"/>
+                <a:cs typeface="メイリオ" pitchFamily="34" charset="-120"/>
+              </a:rPr>
+              <a:t>①</a:t>
+            </a:r>
+            <a:endParaRPr lang="en-US" sz="2600" dirty="0"/>
           </a:p>
         </p:txBody>
       </p:sp>
@@ -5513,8 +5392,8 @@
         </p:nvSpPr>
         <p:spPr>
           <a:xfrm>
-            <a:off x="1371600" y="1115568"/>
-            <a:ext cx="7315200" cy="566928"/>
+            <a:off x="1344168" y="1188720"/>
+            <a:ext cx="7315200" cy="512064"/>
           </a:xfrm>
           <a:prstGeom prst="rect">
             <a:avLst/>
@@ -5530,17 +5409,17 @@
               <a:buNone/>
             </a:pPr>
             <a:r>
-              <a:rPr lang="en-US" sz="3000" b="1" dirty="0">
-                <a:solidFill>
-                  <a:srgbClr val="1A1A1A"/>
-                </a:solidFill>
-                <a:latin typeface="Meiryo" pitchFamily="34" charset="0"/>
-                <a:ea typeface="Meiryo" pitchFamily="34" charset="-122"/>
-                <a:cs typeface="Meiryo" pitchFamily="34" charset="-120"/>
+              <a:rPr lang="en-US" sz="2600" b="1" dirty="0">
+                <a:solidFill>
+                  <a:srgbClr val="595959"/>
+                </a:solidFill>
+                <a:latin typeface="メイリオ" pitchFamily="34" charset="0"/>
+                <a:ea typeface="メイリオ" pitchFamily="34" charset="-122"/>
+                <a:cs typeface="メイリオ" pitchFamily="34" charset="-120"/>
               </a:rPr>
               <a:t>練馬区の小中一貫教育について</a:t>
             </a:r>
-            <a:endParaRPr lang="en-US" sz="3000" dirty="0"/>
+            <a:endParaRPr lang="en-US" sz="2600" dirty="0"/>
           </a:p>
         </p:txBody>
       </p:sp>
@@ -5552,14 +5431,14 @@
         </p:nvSpPr>
         <p:spPr>
           <a:xfrm>
-            <a:off x="640080" y="2212848"/>
-            <a:ext cx="566928" cy="566928"/>
+            <a:off x="658368" y="2148840"/>
+            <a:ext cx="512064" cy="512064"/>
           </a:xfrm>
           <a:prstGeom prst="ellipse">
             <a:avLst/>
           </a:prstGeom>
           <a:solidFill>
-            <a:srgbClr val="EB6C15"/>
+            <a:srgbClr val="44C1A3"/>
           </a:solidFill>
           <a:ln/>
         </p:spPr>
@@ -5572,8 +5451,8 @@
         </p:nvSpPr>
         <p:spPr>
           <a:xfrm>
-            <a:off x="640080" y="2212848"/>
-            <a:ext cx="566928" cy="566928"/>
+            <a:off x="658368" y="2148840"/>
+            <a:ext cx="512064" cy="512064"/>
           </a:xfrm>
           <a:prstGeom prst="rect">
             <a:avLst/>
@@ -5589,17 +5468,17 @@
               <a:buNone/>
             </a:pPr>
             <a:r>
-              <a:rPr lang="en-US" sz="2900" b="1" dirty="0">
+              <a:rPr lang="en-US" sz="2600" b="1" dirty="0">
                 <a:solidFill>
                   <a:srgbClr val="FFFFFF"/>
                 </a:solidFill>
-                <a:latin typeface="Meiryo" pitchFamily="34" charset="0"/>
-                <a:ea typeface="Meiryo" pitchFamily="34" charset="-122"/>
-                <a:cs typeface="Meiryo" pitchFamily="34" charset="-120"/>
-              </a:rPr>
-              <a:t>２</a:t>
-            </a:r>
-            <a:endParaRPr lang="en-US" sz="2900" dirty="0"/>
+                <a:latin typeface="メイリオ" pitchFamily="34" charset="0"/>
+                <a:ea typeface="メイリオ" pitchFamily="34" charset="-122"/>
+                <a:cs typeface="メイリオ" pitchFamily="34" charset="-120"/>
+              </a:rPr>
+              <a:t>②</a:t>
+            </a:r>
+            <a:endParaRPr lang="en-US" sz="2600" dirty="0"/>
           </a:p>
         </p:txBody>
       </p:sp>
@@ -5611,8 +5490,8 @@
         </p:nvSpPr>
         <p:spPr>
           <a:xfrm>
-            <a:off x="1371600" y="2212848"/>
-            <a:ext cx="7315200" cy="566928"/>
+            <a:off x="1344168" y="2148840"/>
+            <a:ext cx="7315200" cy="512064"/>
           </a:xfrm>
           <a:prstGeom prst="rect">
             <a:avLst/>
@@ -5628,17 +5507,17 @@
               <a:buNone/>
             </a:pPr>
             <a:r>
-              <a:rPr lang="en-US" sz="3000" b="1" dirty="0">
-                <a:solidFill>
-                  <a:srgbClr val="1A1A1A"/>
-                </a:solidFill>
-                <a:latin typeface="Meiryo" pitchFamily="34" charset="0"/>
-                <a:ea typeface="Meiryo" pitchFamily="34" charset="-122"/>
-                <a:cs typeface="Meiryo" pitchFamily="34" charset="-120"/>
+              <a:rPr lang="en-US" sz="2600" b="1" dirty="0">
+                <a:solidFill>
+                  <a:srgbClr val="595959"/>
+                </a:solidFill>
+                <a:latin typeface="メイリオ" pitchFamily="34" charset="0"/>
+                <a:ea typeface="メイリオ" pitchFamily="34" charset="-122"/>
+                <a:cs typeface="メイリオ" pitchFamily="34" charset="-120"/>
               </a:rPr>
               <a:t>本時の授業について</a:t>
             </a:r>
-            <a:endParaRPr lang="en-US" sz="3000" dirty="0"/>
+            <a:endParaRPr lang="en-US" sz="2600" dirty="0"/>
           </a:p>
         </p:txBody>
       </p:sp>
@@ -5650,8 +5529,8 @@
         </p:nvSpPr>
         <p:spPr>
           <a:xfrm>
-            <a:off x="1371600" y="2871216"/>
-            <a:ext cx="7315200" cy="457200"/>
+            <a:off x="1344168" y="2761488"/>
+            <a:ext cx="7315200" cy="411480"/>
           </a:xfrm>
           <a:prstGeom prst="rect">
             <a:avLst/>
@@ -5667,30 +5546,57 @@
               <a:buNone/>
             </a:pPr>
             <a:r>
-              <a:rPr lang="en-US" sz="2200" b="1" dirty="0">
-                <a:solidFill>
-                  <a:srgbClr val="EB6C15"/>
-                </a:solidFill>
-                <a:latin typeface="Meiryo" pitchFamily="34" charset="0"/>
-                <a:ea typeface="Meiryo" pitchFamily="34" charset="-122"/>
-                <a:cs typeface="Meiryo" pitchFamily="34" charset="-120"/>
+              <a:rPr lang="en-US" sz="1900" b="1" dirty="0">
+                <a:solidFill>
+                  <a:srgbClr val="EE7B08"/>
+                </a:solidFill>
+                <a:latin typeface="メイリオ" pitchFamily="34" charset="0"/>
+                <a:ea typeface="メイリオ" pitchFamily="34" charset="-122"/>
+                <a:cs typeface="メイリオ" pitchFamily="34" charset="-120"/>
               </a:rPr>
               <a:t>主体的・対話的で深い学びの視点からの授業改善</a:t>
             </a:r>
-            <a:endParaRPr lang="en-US" sz="2200" dirty="0"/>
-          </a:p>
-        </p:txBody>
-      </p:sp>
-      <p:sp>
-        <p:nvSpPr>
-          <p:cNvPr id="10" name="Text 8"/>
+            <a:endParaRPr lang="en-US" sz="1900" dirty="0"/>
+          </a:p>
+        </p:txBody>
+      </p:sp>
+      <p:sp>
+        <p:nvSpPr>
+          <p:cNvPr id="10" name="Shape 8"/>
+          <p:cNvSpPr/>
+          <p:nvPr/>
+        </p:nvSpPr>
+        <p:spPr>
+          <a:xfrm>
+            <a:off x="475488" y="3611880"/>
+            <a:ext cx="8193024" cy="914400"/>
+          </a:xfrm>
+          <a:prstGeom prst="roundRect">
+            <a:avLst>
+              <a:gd name="adj" fmla="val 6000"/>
+            </a:avLst>
+          </a:prstGeom>
+          <a:solidFill>
+            <a:srgbClr val="E9F7F3"/>
+          </a:solidFill>
+          <a:ln w="12700">
+            <a:solidFill>
+              <a:srgbClr val="B9E5DA"/>
+            </a:solidFill>
+            <a:prstDash val="solid"/>
+          </a:ln>
+        </p:spPr>
+      </p:sp>
+      <p:sp>
+        <p:nvSpPr>
+          <p:cNvPr id="11" name="Text 9"/>
           <p:cNvSpPr txBox="1"/>
           <p:nvPr/>
         </p:nvSpPr>
         <p:spPr>
           <a:xfrm>
-            <a:off x="640080" y="3675888"/>
-            <a:ext cx="8046720" cy="914400"/>
+            <a:off x="731520" y="3611880"/>
+            <a:ext cx="7680960" cy="914400"/>
           </a:xfrm>
           <a:prstGeom prst="rect">
             <a:avLst/>
@@ -5699,64 +5605,64 @@
           <a:ln/>
         </p:spPr>
         <p:txBody>
-          <a:bodyPr wrap="square" lIns="0" tIns="0" rIns="0" bIns="0" rtlCol="0" anchor="t"/>
-          <a:lstStyle/>
-          <a:p>
-            <a:pPr algn="l" indent="0" marL="0">
-              <a:lnSpc>
-                <a:spcPct val="135000"/>
-              </a:lnSpc>
-              <a:buNone/>
-            </a:pPr>
-            <a:r>
-              <a:rPr lang="en-US" sz="1800" b="1" dirty="0">
-                <a:solidFill>
-                  <a:srgbClr val="1A1A1A"/>
-                </a:solidFill>
-                <a:latin typeface="Meiryo" pitchFamily="34" charset="0"/>
-                <a:ea typeface="Meiryo" pitchFamily="34" charset="-122"/>
-                <a:cs typeface="Meiryo" pitchFamily="34" charset="-120"/>
+          <a:bodyPr wrap="square" lIns="0" tIns="0" rIns="0" bIns="0" rtlCol="0" anchor="ctr"/>
+          <a:lstStyle/>
+          <a:p>
+            <a:pPr algn="l" indent="0" marL="0">
+              <a:lnSpc>
+                <a:spcPct val="125000"/>
+              </a:lnSpc>
+              <a:buNone/>
+            </a:pPr>
+            <a:r>
+              <a:rPr lang="en-US" sz="1700" b="1" dirty="0">
+                <a:solidFill>
+                  <a:srgbClr val="595959"/>
+                </a:solidFill>
+                <a:latin typeface="メイリオ" pitchFamily="34" charset="0"/>
+                <a:ea typeface="メイリオ" pitchFamily="34" charset="-122"/>
+                <a:cs typeface="メイリオ" pitchFamily="34" charset="-120"/>
               </a:rPr>
               <a:t>まず授業そのものではなく、</a:t>
             </a:r>
-            <a:endParaRPr lang="en-US" sz="1800" dirty="0"/>
-          </a:p>
-          <a:p>
-            <a:pPr algn="l" indent="0" marL="0">
-              <a:lnSpc>
-                <a:spcPct val="135000"/>
-              </a:lnSpc>
-              <a:buNone/>
-            </a:pPr>
-            <a:r>
-              <a:rPr lang="en-US" sz="1800" b="1" dirty="0">
-                <a:solidFill>
-                  <a:srgbClr val="EB6C15"/>
-                </a:solidFill>
-                <a:latin typeface="Meiryo" pitchFamily="34" charset="0"/>
-                <a:ea typeface="Meiryo" pitchFamily="34" charset="-122"/>
-                <a:cs typeface="Meiryo" pitchFamily="34" charset="-120"/>
+            <a:endParaRPr lang="en-US" sz="1700" dirty="0"/>
+          </a:p>
+          <a:p>
+            <a:pPr algn="l" indent="0" marL="0">
+              <a:lnSpc>
+                <a:spcPct val="125000"/>
+              </a:lnSpc>
+              <a:buNone/>
+            </a:pPr>
+            <a:r>
+              <a:rPr lang="en-US" sz="1700" b="1" dirty="0">
+                <a:solidFill>
+                  <a:srgbClr val="EE7B08"/>
+                </a:solidFill>
+                <a:latin typeface="メイリオ" pitchFamily="34" charset="0"/>
+                <a:ea typeface="メイリオ" pitchFamily="34" charset="-122"/>
+                <a:cs typeface="メイリオ" pitchFamily="34" charset="-120"/>
               </a:rPr>
               <a:t>「学力調査結果から見える子どもの姿」</a:t>
             </a:r>
             <a:pPr algn="l" indent="0" marL="0">
               <a:lnSpc>
-                <a:spcPct val="135000"/>
-              </a:lnSpc>
-              <a:buNone/>
-            </a:pPr>
-            <a:r>
-              <a:rPr lang="en-US" sz="1800" b="1" dirty="0">
-                <a:solidFill>
-                  <a:srgbClr val="1A1A1A"/>
-                </a:solidFill>
-                <a:latin typeface="Meiryo" pitchFamily="34" charset="0"/>
-                <a:ea typeface="Meiryo" pitchFamily="34" charset="-122"/>
-                <a:cs typeface="Meiryo" pitchFamily="34" charset="-120"/>
+                <a:spcPct val="125000"/>
+              </a:lnSpc>
+              <a:buNone/>
+            </a:pPr>
+            <a:r>
+              <a:rPr lang="en-US" sz="1700" b="1" dirty="0">
+                <a:solidFill>
+                  <a:srgbClr val="595959"/>
+                </a:solidFill>
+                <a:latin typeface="メイリオ" pitchFamily="34" charset="0"/>
+                <a:ea typeface="メイリオ" pitchFamily="34" charset="-122"/>
+                <a:cs typeface="メイリオ" pitchFamily="34" charset="-120"/>
               </a:rPr>
               <a:t>から考えたい。</a:t>
             </a:r>
-            <a:endParaRPr lang="en-US" sz="1800" dirty="0"/>
+            <a:endParaRPr lang="en-US" sz="1700" dirty="0"/>
           </a:p>
         </p:txBody>
       </p:sp>
@@ -5793,14 +5699,14 @@
         </p:nvSpPr>
         <p:spPr>
           <a:xfrm>
-            <a:off x="0" y="0"/>
-            <a:ext cx="9144000" cy="576072"/>
+            <a:off x="0" y="-9144"/>
+            <a:ext cx="9144000" cy="1161288"/>
           </a:xfrm>
           <a:prstGeom prst="rect">
             <a:avLst/>
           </a:prstGeom>
           <a:solidFill>
-            <a:srgbClr val="00B0F0"/>
+            <a:srgbClr val="44C1A3"/>
           </a:solidFill>
           <a:ln/>
         </p:spPr>
@@ -5809,6 +5715,29 @@
           <a:lstStyle/>
           <a:p>
             <a:pPr algn="l" indent="0" marL="0">
+              <a:lnSpc>
+                <a:spcPct val="120000"/>
+              </a:lnSpc>
+              <a:buNone/>
+            </a:pPr>
+            <a:r>
+              <a:rPr lang="en-US" sz="3000" b="1" dirty="0">
+                <a:solidFill>
+                  <a:srgbClr val="FFFFFF"/>
+                </a:solidFill>
+                <a:latin typeface="メイリオ" pitchFamily="34" charset="0"/>
+                <a:ea typeface="メイリオ" pitchFamily="34" charset="-122"/>
+                <a:cs typeface="メイリオ" pitchFamily="34" charset="-120"/>
+              </a:rPr>
+              <a:t>　指導・講評</a:t>
+            </a:r>
+            <a:endParaRPr lang="en-US" sz="3000" dirty="0"/>
+          </a:p>
+          <a:p>
+            <a:pPr algn="l" indent="0" marL="0">
+              <a:lnSpc>
+                <a:spcPct val="120000"/>
+              </a:lnSpc>
               <a:buNone/>
             </a:pPr>
             <a:r>
@@ -5816,13 +5745,13 @@
                 <a:solidFill>
                   <a:srgbClr val="FFFFFF"/>
                 </a:solidFill>
-                <a:latin typeface="Meiryo" pitchFamily="34" charset="0"/>
-                <a:ea typeface="Meiryo" pitchFamily="34" charset="-122"/>
-                <a:cs typeface="Meiryo" pitchFamily="34" charset="-120"/>
+                <a:latin typeface="メイリオ" pitchFamily="34" charset="0"/>
+                <a:ea typeface="メイリオ" pitchFamily="34" charset="-122"/>
+                <a:cs typeface="メイリオ" pitchFamily="34" charset="-120"/>
               </a:rPr>
               <a:t>　１　練馬区の小中一貫教育</a:t>
             </a:r>
-            <a:endParaRPr lang="en-US" sz="2800" dirty="0"/>
+            <a:endParaRPr lang="en-US" sz="3000" dirty="0"/>
           </a:p>
         </p:txBody>
       </p:sp>
@@ -5834,8 +5763,8 @@
         </p:nvSpPr>
         <p:spPr>
           <a:xfrm>
-            <a:off x="640080" y="868680"/>
-            <a:ext cx="8046720" cy="914400"/>
+            <a:off x="475488" y="1463040"/>
+            <a:ext cx="8193024" cy="822960"/>
           </a:xfrm>
           <a:prstGeom prst="rect">
             <a:avLst/>
@@ -5849,18 +5778,18 @@
           <a:p>
             <a:pPr algn="l" indent="0" marL="0">
               <a:lnSpc>
-                <a:spcPct val="135000"/>
+                <a:spcPct val="120000"/>
               </a:lnSpc>
               <a:buNone/>
             </a:pPr>
             <a:r>
               <a:rPr lang="en-US" sz="2000" b="1" dirty="0">
                 <a:solidFill>
-                  <a:srgbClr val="1A1A1A"/>
-                </a:solidFill>
-                <a:latin typeface="Meiryo" pitchFamily="34" charset="0"/>
-                <a:ea typeface="Meiryo" pitchFamily="34" charset="-122"/>
-                <a:cs typeface="Meiryo" pitchFamily="34" charset="-120"/>
+                  <a:srgbClr val="595959"/>
+                </a:solidFill>
+                <a:latin typeface="メイリオ" pitchFamily="34" charset="0"/>
+                <a:ea typeface="メイリオ" pitchFamily="34" charset="-122"/>
+                <a:cs typeface="メイリオ" pitchFamily="34" charset="-120"/>
               </a:rPr>
               <a:t>練馬区教育委員会の目標</a:t>
             </a:r>
@@ -5869,52 +5798,52 @@
           <a:p>
             <a:pPr algn="l" indent="0" marL="0">
               <a:lnSpc>
-                <a:spcPct val="135000"/>
+                <a:spcPct val="120000"/>
               </a:lnSpc>
               <a:buNone/>
             </a:pPr>
             <a:r>
               <a:rPr lang="en-US" sz="2000" b="1" dirty="0">
                 <a:solidFill>
-                  <a:srgbClr val="1A1A1A"/>
-                </a:solidFill>
-                <a:latin typeface="Meiryo" pitchFamily="34" charset="0"/>
-                <a:ea typeface="Meiryo" pitchFamily="34" charset="-122"/>
-                <a:cs typeface="Meiryo" pitchFamily="34" charset="-120"/>
+                  <a:srgbClr val="595959"/>
+                </a:solidFill>
+                <a:latin typeface="メイリオ" pitchFamily="34" charset="0"/>
+                <a:ea typeface="メイリオ" pitchFamily="34" charset="-122"/>
+                <a:cs typeface="メイリオ" pitchFamily="34" charset="-120"/>
               </a:rPr>
               <a:t>　</a:t>
             </a:r>
             <a:pPr algn="l" indent="0" marL="0">
               <a:lnSpc>
-                <a:spcPct val="135000"/>
+                <a:spcPct val="120000"/>
               </a:lnSpc>
               <a:buNone/>
             </a:pPr>
             <a:r>
               <a:rPr lang="en-US" sz="2000" b="1" dirty="0">
                 <a:solidFill>
-                  <a:srgbClr val="EB6C15"/>
-                </a:solidFill>
-                <a:latin typeface="Meiryo" pitchFamily="34" charset="0"/>
-                <a:ea typeface="Meiryo" pitchFamily="34" charset="-122"/>
-                <a:cs typeface="Meiryo" pitchFamily="34" charset="-120"/>
+                  <a:srgbClr val="EE7B08"/>
+                </a:solidFill>
+                <a:latin typeface="メイリオ" pitchFamily="34" charset="0"/>
+                <a:ea typeface="メイリオ" pitchFamily="34" charset="-122"/>
+                <a:cs typeface="メイリオ" pitchFamily="34" charset="-120"/>
               </a:rPr>
               <a:t>夢や希望をもち、困難を乗り越える力</a:t>
             </a:r>
             <a:pPr algn="l" indent="0" marL="0">
               <a:lnSpc>
-                <a:spcPct val="135000"/>
+                <a:spcPct val="120000"/>
               </a:lnSpc>
               <a:buNone/>
             </a:pPr>
             <a:r>
               <a:rPr lang="en-US" sz="2000" b="1" dirty="0">
                 <a:solidFill>
-                  <a:srgbClr val="1A1A1A"/>
-                </a:solidFill>
-                <a:latin typeface="Meiryo" pitchFamily="34" charset="0"/>
-                <a:ea typeface="Meiryo" pitchFamily="34" charset="-122"/>
-                <a:cs typeface="Meiryo" pitchFamily="34" charset="-120"/>
+                  <a:srgbClr val="595959"/>
+                </a:solidFill>
+                <a:latin typeface="メイリオ" pitchFamily="34" charset="0"/>
+                <a:ea typeface="メイリオ" pitchFamily="34" charset="-122"/>
+                <a:cs typeface="メイリオ" pitchFamily="34" charset="-120"/>
               </a:rPr>
               <a:t>の育成</a:t>
             </a:r>
@@ -5930,8 +5859,8 @@
         </p:nvSpPr>
         <p:spPr>
           <a:xfrm>
-            <a:off x="640080" y="1965960"/>
-            <a:ext cx="8046720" cy="914400"/>
+            <a:off x="475488" y="2423160"/>
+            <a:ext cx="8193024" cy="822960"/>
           </a:xfrm>
           <a:prstGeom prst="rect">
             <a:avLst/>
@@ -5945,18 +5874,18 @@
           <a:p>
             <a:pPr algn="l" indent="0" marL="0">
               <a:lnSpc>
-                <a:spcPct val="135000"/>
+                <a:spcPct val="120000"/>
               </a:lnSpc>
               <a:buNone/>
             </a:pPr>
             <a:r>
               <a:rPr lang="en-US" sz="1900" b="1" dirty="0">
                 <a:solidFill>
-                  <a:srgbClr val="1A1A1A"/>
-                </a:solidFill>
-                <a:latin typeface="Meiryo" pitchFamily="34" charset="0"/>
-                <a:ea typeface="Meiryo" pitchFamily="34" charset="-122"/>
-                <a:cs typeface="Meiryo" pitchFamily="34" charset="-120"/>
+                  <a:srgbClr val="595959"/>
+                </a:solidFill>
+                <a:latin typeface="メイリオ" pitchFamily="34" charset="0"/>
+                <a:ea typeface="メイリオ" pitchFamily="34" charset="-122"/>
+                <a:cs typeface="メイリオ" pitchFamily="34" charset="-120"/>
               </a:rPr>
               <a:t>その実現のための施策が</a:t>
             </a:r>
@@ -5965,52 +5894,52 @@
           <a:p>
             <a:pPr algn="l" indent="0" marL="0">
               <a:lnSpc>
-                <a:spcPct val="135000"/>
+                <a:spcPct val="120000"/>
               </a:lnSpc>
               <a:buNone/>
             </a:pPr>
             <a:r>
               <a:rPr lang="en-US" sz="1900" b="1" dirty="0">
                 <a:solidFill>
-                  <a:srgbClr val="1A1A1A"/>
-                </a:solidFill>
-                <a:latin typeface="Meiryo" pitchFamily="34" charset="0"/>
-                <a:ea typeface="Meiryo" pitchFamily="34" charset="-122"/>
-                <a:cs typeface="Meiryo" pitchFamily="34" charset="-120"/>
+                  <a:srgbClr val="595959"/>
+                </a:solidFill>
+                <a:latin typeface="メイリオ" pitchFamily="34" charset="0"/>
+                <a:ea typeface="メイリオ" pitchFamily="34" charset="-122"/>
+                <a:cs typeface="メイリオ" pitchFamily="34" charset="-120"/>
               </a:rPr>
               <a:t>　</a:t>
             </a:r>
             <a:pPr algn="l" indent="0" marL="0">
               <a:lnSpc>
-                <a:spcPct val="135000"/>
+                <a:spcPct val="120000"/>
               </a:lnSpc>
               <a:buNone/>
             </a:pPr>
             <a:r>
               <a:rPr lang="en-US" sz="1900" b="1" dirty="0">
                 <a:solidFill>
-                  <a:srgbClr val="EB6C15"/>
-                </a:solidFill>
-                <a:latin typeface="Meiryo" pitchFamily="34" charset="0"/>
-                <a:ea typeface="Meiryo" pitchFamily="34" charset="-122"/>
-                <a:cs typeface="Meiryo" pitchFamily="34" charset="-120"/>
+                  <a:srgbClr val="EE7B08"/>
+                </a:solidFill>
+                <a:latin typeface="メイリオ" pitchFamily="34" charset="0"/>
+                <a:ea typeface="メイリオ" pitchFamily="34" charset="-122"/>
+                <a:cs typeface="メイリオ" pitchFamily="34" charset="-120"/>
               </a:rPr>
               <a:t>９年間を見通した教育</a:t>
             </a:r>
             <a:pPr algn="l" indent="0" marL="0">
               <a:lnSpc>
-                <a:spcPct val="135000"/>
+                <a:spcPct val="120000"/>
               </a:lnSpc>
               <a:buNone/>
             </a:pPr>
             <a:r>
               <a:rPr lang="en-US" sz="1900" b="1" dirty="0">
                 <a:solidFill>
-                  <a:srgbClr val="1A1A1A"/>
-                </a:solidFill>
-                <a:latin typeface="Meiryo" pitchFamily="34" charset="0"/>
-                <a:ea typeface="Meiryo" pitchFamily="34" charset="-122"/>
-                <a:cs typeface="Meiryo" pitchFamily="34" charset="-120"/>
+                  <a:srgbClr val="595959"/>
+                </a:solidFill>
+                <a:latin typeface="メイリオ" pitchFamily="34" charset="0"/>
+                <a:ea typeface="メイリオ" pitchFamily="34" charset="-122"/>
+                <a:cs typeface="メイリオ" pitchFamily="34" charset="-120"/>
               </a:rPr>
               <a:t>（小学校６年間＋中学校３年間）</a:t>
             </a:r>
@@ -6026,20 +5955,20 @@
         </p:nvSpPr>
         <p:spPr>
           <a:xfrm>
-            <a:off x="640080" y="3063240"/>
-            <a:ext cx="7863840" cy="1371600"/>
+            <a:off x="475488" y="3401568"/>
+            <a:ext cx="8193024" cy="1234440"/>
           </a:xfrm>
           <a:prstGeom prst="roundRect">
             <a:avLst>
-              <a:gd name="adj" fmla="val 5333"/>
+              <a:gd name="adj" fmla="val 4444"/>
             </a:avLst>
           </a:prstGeom>
           <a:solidFill>
-            <a:srgbClr val="EAF6FD"/>
+            <a:srgbClr val="E9F7F3"/>
           </a:solidFill>
           <a:ln w="12700">
             <a:solidFill>
-              <a:srgbClr val="C9E6F5"/>
+              <a:srgbClr val="B9E5DA"/>
             </a:solidFill>
             <a:prstDash val="solid"/>
           </a:ln>
@@ -6053,8 +5982,8 @@
         </p:nvSpPr>
         <p:spPr>
           <a:xfrm>
-            <a:off x="822960" y="3200400"/>
-            <a:ext cx="7498080" cy="1097280"/>
+            <a:off x="658368" y="3529584"/>
+            <a:ext cx="7827264" cy="1005840"/>
           </a:xfrm>
           <a:prstGeom prst="rect">
             <a:avLst/>
@@ -6073,17 +6002,17 @@
               <a:buNone/>
             </a:pPr>
             <a:r>
-              <a:rPr lang="en-US" sz="1700" b="1" dirty="0">
-                <a:solidFill>
-                  <a:srgbClr val="00B0F0"/>
-                </a:solidFill>
-                <a:latin typeface="Meiryo" pitchFamily="34" charset="0"/>
-                <a:ea typeface="Meiryo" pitchFamily="34" charset="-122"/>
-                <a:cs typeface="Meiryo" pitchFamily="34" charset="-120"/>
+              <a:rPr lang="en-US" sz="1600" b="1" dirty="0">
+                <a:solidFill>
+                  <a:srgbClr val="44C1A3"/>
+                </a:solidFill>
+                <a:latin typeface="メイリオ" pitchFamily="34" charset="0"/>
+                <a:ea typeface="メイリオ" pitchFamily="34" charset="-122"/>
+                <a:cs typeface="メイリオ" pitchFamily="34" charset="-120"/>
               </a:rPr>
               <a:t>期待される効果</a:t>
             </a:r>
-            <a:endParaRPr lang="en-US" sz="1700" dirty="0"/>
+            <a:endParaRPr lang="en-US" sz="1600" dirty="0"/>
           </a:p>
           <a:p>
             <a:pPr algn="l" indent="0" marL="0">
@@ -6093,17 +6022,17 @@
               <a:buNone/>
             </a:pPr>
             <a:r>
-              <a:rPr lang="en-US" sz="1700" b="1" dirty="0">
-                <a:solidFill>
-                  <a:srgbClr val="1A1A1A"/>
-                </a:solidFill>
-                <a:latin typeface="Meiryo" pitchFamily="34" charset="0"/>
-                <a:ea typeface="Meiryo" pitchFamily="34" charset="-122"/>
-                <a:cs typeface="Meiryo" pitchFamily="34" charset="-120"/>
+              <a:rPr lang="en-US" sz="1600" b="1" dirty="0">
+                <a:solidFill>
+                  <a:srgbClr val="595959"/>
+                </a:solidFill>
+                <a:latin typeface="メイリオ" pitchFamily="34" charset="0"/>
+                <a:ea typeface="メイリオ" pitchFamily="34" charset="-122"/>
+                <a:cs typeface="メイリオ" pitchFamily="34" charset="-120"/>
               </a:rPr>
               <a:t>　授業改善による学力・体力の向上　／　豊かな人間性・社会性の育成</a:t>
             </a:r>
-            <a:endParaRPr lang="en-US" sz="1700" dirty="0"/>
+            <a:endParaRPr lang="en-US" sz="1600" dirty="0"/>
           </a:p>
           <a:p>
             <a:pPr algn="l" indent="0" marL="0">
@@ -6113,17 +6042,17 @@
               <a:buNone/>
             </a:pPr>
             <a:r>
-              <a:rPr lang="en-US" sz="1700" b="1" dirty="0">
-                <a:solidFill>
-                  <a:srgbClr val="1A1A1A"/>
-                </a:solidFill>
-                <a:latin typeface="Meiryo" pitchFamily="34" charset="0"/>
-                <a:ea typeface="Meiryo" pitchFamily="34" charset="-122"/>
-                <a:cs typeface="Meiryo" pitchFamily="34" charset="-120"/>
+              <a:rPr lang="en-US" sz="1600" b="1" dirty="0">
+                <a:solidFill>
+                  <a:srgbClr val="595959"/>
+                </a:solidFill>
+                <a:latin typeface="メイリオ" pitchFamily="34" charset="0"/>
+                <a:ea typeface="メイリオ" pitchFamily="34" charset="-122"/>
+                <a:cs typeface="メイリオ" pitchFamily="34" charset="-120"/>
               </a:rPr>
               <a:t>　滑らかな接続による安定した学校生活の実現</a:t>
             </a:r>
-            <a:endParaRPr lang="en-US" sz="1700" dirty="0"/>
+            <a:endParaRPr lang="en-US" sz="1600" dirty="0"/>
           </a:p>
         </p:txBody>
       </p:sp>
@@ -6160,14 +6089,14 @@
         </p:nvSpPr>
         <p:spPr>
           <a:xfrm>
-            <a:off x="0" y="0"/>
-            <a:ext cx="9144000" cy="576072"/>
+            <a:off x="0" y="-9144"/>
+            <a:ext cx="9144000" cy="1161288"/>
           </a:xfrm>
           <a:prstGeom prst="rect">
             <a:avLst/>
           </a:prstGeom>
           <a:solidFill>
-            <a:srgbClr val="00B0F0"/>
+            <a:srgbClr val="44C1A3"/>
           </a:solidFill>
           <a:ln/>
         </p:spPr>
@@ -6176,6 +6105,29 @@
           <a:lstStyle/>
           <a:p>
             <a:pPr algn="l" indent="0" marL="0">
+              <a:lnSpc>
+                <a:spcPct val="120000"/>
+              </a:lnSpc>
+              <a:buNone/>
+            </a:pPr>
+            <a:r>
+              <a:rPr lang="en-US" sz="3000" b="1" dirty="0">
+                <a:solidFill>
+                  <a:srgbClr val="FFFFFF"/>
+                </a:solidFill>
+                <a:latin typeface="メイリオ" pitchFamily="34" charset="0"/>
+                <a:ea typeface="メイリオ" pitchFamily="34" charset="-122"/>
+                <a:cs typeface="メイリオ" pitchFamily="34" charset="-120"/>
+              </a:rPr>
+              <a:t>　指導・講評</a:t>
+            </a:r>
+            <a:endParaRPr lang="en-US" sz="3000" dirty="0"/>
+          </a:p>
+          <a:p>
+            <a:pPr algn="l" indent="0" marL="0">
+              <a:lnSpc>
+                <a:spcPct val="120000"/>
+              </a:lnSpc>
               <a:buNone/>
             </a:pPr>
             <a:r>
@@ -6183,13 +6135,13 @@
                 <a:solidFill>
                   <a:srgbClr val="FFFFFF"/>
                 </a:solidFill>
-                <a:latin typeface="Meiryo" pitchFamily="34" charset="0"/>
-                <a:ea typeface="Meiryo" pitchFamily="34" charset="-122"/>
-                <a:cs typeface="Meiryo" pitchFamily="34" charset="-120"/>
+                <a:latin typeface="メイリオ" pitchFamily="34" charset="0"/>
+                <a:ea typeface="メイリオ" pitchFamily="34" charset="-122"/>
+                <a:cs typeface="メイリオ" pitchFamily="34" charset="-120"/>
               </a:rPr>
               <a:t>　１　練馬区の小中一貫教育</a:t>
             </a:r>
-            <a:endParaRPr lang="en-US" sz="2800" dirty="0"/>
+            <a:endParaRPr lang="en-US" sz="3000" dirty="0"/>
           </a:p>
         </p:txBody>
       </p:sp>
@@ -6201,8 +6153,8 @@
         </p:nvSpPr>
         <p:spPr>
           <a:xfrm>
-            <a:off x="640080" y="841248"/>
-            <a:ext cx="8046720" cy="502920"/>
+            <a:off x="475488" y="1444752"/>
+            <a:ext cx="8193024" cy="457200"/>
           </a:xfrm>
           <a:prstGeom prst="rect">
             <a:avLst/>
@@ -6218,17 +6170,17 @@
               <a:buNone/>
             </a:pPr>
             <a:r>
-              <a:rPr lang="en-US" sz="2400" b="1" dirty="0">
-                <a:solidFill>
-                  <a:srgbClr val="00B0F0"/>
-                </a:solidFill>
-                <a:latin typeface="Meiryo" pitchFamily="34" charset="0"/>
-                <a:ea typeface="Meiryo" pitchFamily="34" charset="-122"/>
-                <a:cs typeface="Meiryo" pitchFamily="34" charset="-120"/>
+              <a:rPr lang="en-US" sz="2200" b="1" dirty="0">
+                <a:solidFill>
+                  <a:srgbClr val="44C1A3"/>
+                </a:solidFill>
+                <a:latin typeface="メイリオ" pitchFamily="34" charset="0"/>
+                <a:ea typeface="メイリオ" pitchFamily="34" charset="-122"/>
+                <a:cs typeface="メイリオ" pitchFamily="34" charset="-120"/>
               </a:rPr>
               <a:t>施設一体型だからこそ高まる教育効果</a:t>
             </a:r>
-            <a:endParaRPr lang="en-US" sz="2400" dirty="0"/>
+            <a:endParaRPr lang="en-US" sz="2200" dirty="0"/>
           </a:p>
         </p:txBody>
       </p:sp>
@@ -6240,20 +6192,20 @@
         </p:nvSpPr>
         <p:spPr>
           <a:xfrm>
-            <a:off x="640080" y="1481328"/>
-            <a:ext cx="2423160" cy="1170432"/>
+            <a:off x="475488" y="1993392"/>
+            <a:ext cx="2468880" cy="1051560"/>
           </a:xfrm>
           <a:prstGeom prst="roundRect">
             <a:avLst>
-              <a:gd name="adj" fmla="val 6250"/>
+              <a:gd name="adj" fmla="val 6087"/>
             </a:avLst>
           </a:prstGeom>
           <a:solidFill>
-            <a:srgbClr val="EAF6FD"/>
+            <a:srgbClr val="E9F7F3"/>
           </a:solidFill>
           <a:ln w="12700">
             <a:solidFill>
-              <a:srgbClr val="C9E6F5"/>
+              <a:srgbClr val="B9E5DA"/>
             </a:solidFill>
             <a:prstDash val="solid"/>
           </a:ln>
@@ -6267,8 +6219,8 @@
         </p:nvSpPr>
         <p:spPr>
           <a:xfrm>
-            <a:off x="640080" y="1481328"/>
-            <a:ext cx="2423160" cy="1170432"/>
+            <a:off x="475488" y="1993392"/>
+            <a:ext cx="2468880" cy="1051560"/>
           </a:xfrm>
           <a:prstGeom prst="rect">
             <a:avLst/>
@@ -6282,42 +6234,42 @@
           <a:p>
             <a:pPr algn="ctr" indent="0" marL="0">
               <a:lnSpc>
-                <a:spcPct val="120000"/>
-              </a:lnSpc>
-              <a:buNone/>
-            </a:pPr>
-            <a:r>
-              <a:rPr lang="en-US" sz="1800" b="1" dirty="0">
-                <a:solidFill>
-                  <a:srgbClr val="1A1A1A"/>
-                </a:solidFill>
-                <a:latin typeface="Meiryo" pitchFamily="34" charset="0"/>
-                <a:ea typeface="Meiryo" pitchFamily="34" charset="-122"/>
-                <a:cs typeface="Meiryo" pitchFamily="34" charset="-120"/>
+                <a:spcPct val="115000"/>
+              </a:lnSpc>
+              <a:buNone/>
+            </a:pPr>
+            <a:r>
+              <a:rPr lang="en-US" sz="1700" b="1" dirty="0">
+                <a:solidFill>
+                  <a:srgbClr val="595959"/>
+                </a:solidFill>
+                <a:latin typeface="メイリオ" pitchFamily="34" charset="0"/>
+                <a:ea typeface="メイリオ" pitchFamily="34" charset="-122"/>
+                <a:cs typeface="メイリオ" pitchFamily="34" charset="-120"/>
               </a:rPr>
               <a:t>教員間の</a:t>
             </a:r>
-            <a:endParaRPr lang="en-US" sz="1800" dirty="0"/>
+            <a:endParaRPr lang="en-US" sz="1700" dirty="0"/>
           </a:p>
           <a:p>
             <a:pPr algn="ctr" indent="0" marL="0">
               <a:lnSpc>
-                <a:spcPct val="120000"/>
-              </a:lnSpc>
-              <a:buNone/>
-            </a:pPr>
-            <a:r>
-              <a:rPr lang="en-US" sz="1800" b="1" dirty="0">
-                <a:solidFill>
-                  <a:srgbClr val="1A1A1A"/>
-                </a:solidFill>
-                <a:latin typeface="Meiryo" pitchFamily="34" charset="0"/>
-                <a:ea typeface="Meiryo" pitchFamily="34" charset="-122"/>
-                <a:cs typeface="Meiryo" pitchFamily="34" charset="-120"/>
+                <a:spcPct val="115000"/>
+              </a:lnSpc>
+              <a:buNone/>
+            </a:pPr>
+            <a:r>
+              <a:rPr lang="en-US" sz="1700" b="1" dirty="0">
+                <a:solidFill>
+                  <a:srgbClr val="595959"/>
+                </a:solidFill>
+                <a:latin typeface="メイリオ" pitchFamily="34" charset="0"/>
+                <a:ea typeface="メイリオ" pitchFamily="34" charset="-122"/>
+                <a:cs typeface="メイリオ" pitchFamily="34" charset="-120"/>
               </a:rPr>
               <a:t>連携強化</a:t>
             </a:r>
-            <a:endParaRPr lang="en-US" sz="1800" dirty="0"/>
+            <a:endParaRPr lang="en-US" sz="1700" dirty="0"/>
           </a:p>
         </p:txBody>
       </p:sp>
@@ -6329,20 +6281,20 @@
         </p:nvSpPr>
         <p:spPr>
           <a:xfrm>
-            <a:off x="3337560" y="1481328"/>
-            <a:ext cx="2423160" cy="1170432"/>
+            <a:off x="3218688" y="1993392"/>
+            <a:ext cx="2468880" cy="1051560"/>
           </a:xfrm>
           <a:prstGeom prst="roundRect">
             <a:avLst>
-              <a:gd name="adj" fmla="val 6250"/>
+              <a:gd name="adj" fmla="val 6087"/>
             </a:avLst>
           </a:prstGeom>
           <a:solidFill>
-            <a:srgbClr val="EAF6FD"/>
+            <a:srgbClr val="E9F7F3"/>
           </a:solidFill>
           <a:ln w="12700">
             <a:solidFill>
-              <a:srgbClr val="C9E6F5"/>
+              <a:srgbClr val="B9E5DA"/>
             </a:solidFill>
             <a:prstDash val="solid"/>
           </a:ln>
@@ -6356,8 +6308,8 @@
         </p:nvSpPr>
         <p:spPr>
           <a:xfrm>
-            <a:off x="3337560" y="1481328"/>
-            <a:ext cx="2423160" cy="1170432"/>
+            <a:off x="3218688" y="1993392"/>
+            <a:ext cx="2468880" cy="1051560"/>
           </a:xfrm>
           <a:prstGeom prst="rect">
             <a:avLst/>
@@ -6371,42 +6323,42 @@
           <a:p>
             <a:pPr algn="ctr" indent="0" marL="0">
               <a:lnSpc>
-                <a:spcPct val="120000"/>
-              </a:lnSpc>
-              <a:buNone/>
-            </a:pPr>
-            <a:r>
-              <a:rPr lang="en-US" sz="1800" b="1" dirty="0">
-                <a:solidFill>
-                  <a:srgbClr val="1A1A1A"/>
-                </a:solidFill>
-                <a:latin typeface="Meiryo" pitchFamily="34" charset="0"/>
-                <a:ea typeface="Meiryo" pitchFamily="34" charset="-122"/>
-                <a:cs typeface="Meiryo" pitchFamily="34" charset="-120"/>
+                <a:spcPct val="115000"/>
+              </a:lnSpc>
+              <a:buNone/>
+            </a:pPr>
+            <a:r>
+              <a:rPr lang="en-US" sz="1700" b="1" dirty="0">
+                <a:solidFill>
+                  <a:srgbClr val="595959"/>
+                </a:solidFill>
+                <a:latin typeface="メイリオ" pitchFamily="34" charset="0"/>
+                <a:ea typeface="メイリオ" pitchFamily="34" charset="-122"/>
+                <a:cs typeface="メイリオ" pitchFamily="34" charset="-120"/>
               </a:rPr>
               <a:t>異学年交流の</a:t>
             </a:r>
-            <a:endParaRPr lang="en-US" sz="1800" dirty="0"/>
+            <a:endParaRPr lang="en-US" sz="1700" dirty="0"/>
           </a:p>
           <a:p>
             <a:pPr algn="ctr" indent="0" marL="0">
               <a:lnSpc>
-                <a:spcPct val="120000"/>
-              </a:lnSpc>
-              <a:buNone/>
-            </a:pPr>
-            <a:r>
-              <a:rPr lang="en-US" sz="1800" b="1" dirty="0">
-                <a:solidFill>
-                  <a:srgbClr val="1A1A1A"/>
-                </a:solidFill>
-                <a:latin typeface="Meiryo" pitchFamily="34" charset="0"/>
-                <a:ea typeface="Meiryo" pitchFamily="34" charset="-122"/>
-                <a:cs typeface="Meiryo" pitchFamily="34" charset="-120"/>
+                <a:spcPct val="115000"/>
+              </a:lnSpc>
+              <a:buNone/>
+            </a:pPr>
+            <a:r>
+              <a:rPr lang="en-US" sz="1700" b="1" dirty="0">
+                <a:solidFill>
+                  <a:srgbClr val="595959"/>
+                </a:solidFill>
+                <a:latin typeface="メイリオ" pitchFamily="34" charset="0"/>
+                <a:ea typeface="メイリオ" pitchFamily="34" charset="-122"/>
+                <a:cs typeface="メイリオ" pitchFamily="34" charset="-120"/>
               </a:rPr>
               <a:t>活性化</a:t>
             </a:r>
-            <a:endParaRPr lang="en-US" sz="1800" dirty="0"/>
+            <a:endParaRPr lang="en-US" sz="1700" dirty="0"/>
           </a:p>
         </p:txBody>
       </p:sp>
@@ -6418,20 +6370,20 @@
         </p:nvSpPr>
         <p:spPr>
           <a:xfrm>
-            <a:off x="6035040" y="1481328"/>
-            <a:ext cx="2423160" cy="1170432"/>
+            <a:off x="5961888" y="1993392"/>
+            <a:ext cx="2468880" cy="1051560"/>
           </a:xfrm>
           <a:prstGeom prst="roundRect">
             <a:avLst>
-              <a:gd name="adj" fmla="val 6250"/>
+              <a:gd name="adj" fmla="val 6087"/>
             </a:avLst>
           </a:prstGeom>
           <a:solidFill>
-            <a:srgbClr val="EAF6FD"/>
+            <a:srgbClr val="E9F7F3"/>
           </a:solidFill>
           <a:ln w="12700">
             <a:solidFill>
-              <a:srgbClr val="C9E6F5"/>
+              <a:srgbClr val="B9E5DA"/>
             </a:solidFill>
             <a:prstDash val="solid"/>
           </a:ln>
@@ -6445,8 +6397,8 @@
         </p:nvSpPr>
         <p:spPr>
           <a:xfrm>
-            <a:off x="6035040" y="1481328"/>
-            <a:ext cx="2423160" cy="1170432"/>
+            <a:off x="5961888" y="1993392"/>
+            <a:ext cx="2468880" cy="1051560"/>
           </a:xfrm>
           <a:prstGeom prst="rect">
             <a:avLst/>
@@ -6460,42 +6412,42 @@
           <a:p>
             <a:pPr algn="ctr" indent="0" marL="0">
               <a:lnSpc>
-                <a:spcPct val="120000"/>
-              </a:lnSpc>
-              <a:buNone/>
-            </a:pPr>
-            <a:r>
-              <a:rPr lang="en-US" sz="1800" b="1" dirty="0">
-                <a:solidFill>
-                  <a:srgbClr val="1A1A1A"/>
-                </a:solidFill>
-                <a:latin typeface="Meiryo" pitchFamily="34" charset="0"/>
-                <a:ea typeface="Meiryo" pitchFamily="34" charset="-122"/>
-                <a:cs typeface="Meiryo" pitchFamily="34" charset="-120"/>
+                <a:spcPct val="115000"/>
+              </a:lnSpc>
+              <a:buNone/>
+            </a:pPr>
+            <a:r>
+              <a:rPr lang="en-US" sz="1700" b="1" dirty="0">
+                <a:solidFill>
+                  <a:srgbClr val="595959"/>
+                </a:solidFill>
+                <a:latin typeface="メイリオ" pitchFamily="34" charset="0"/>
+                <a:ea typeface="メイリオ" pitchFamily="34" charset="-122"/>
+                <a:cs typeface="メイリオ" pitchFamily="34" charset="-120"/>
               </a:rPr>
               <a:t>小中学校間の</a:t>
             </a:r>
-            <a:endParaRPr lang="en-US" sz="1800" dirty="0"/>
+            <a:endParaRPr lang="en-US" sz="1700" dirty="0"/>
           </a:p>
           <a:p>
             <a:pPr algn="ctr" indent="0" marL="0">
               <a:lnSpc>
-                <a:spcPct val="120000"/>
-              </a:lnSpc>
-              <a:buNone/>
-            </a:pPr>
-            <a:r>
-              <a:rPr lang="en-US" sz="1800" b="1" dirty="0">
-                <a:solidFill>
-                  <a:srgbClr val="1A1A1A"/>
-                </a:solidFill>
-                <a:latin typeface="Meiryo" pitchFamily="34" charset="0"/>
-                <a:ea typeface="Meiryo" pitchFamily="34" charset="-122"/>
-                <a:cs typeface="Meiryo" pitchFamily="34" charset="-120"/>
+                <a:spcPct val="115000"/>
+              </a:lnSpc>
+              <a:buNone/>
+            </a:pPr>
+            <a:r>
+              <a:rPr lang="en-US" sz="1700" b="1" dirty="0">
+                <a:solidFill>
+                  <a:srgbClr val="595959"/>
+                </a:solidFill>
+                <a:latin typeface="メイリオ" pitchFamily="34" charset="0"/>
+                <a:ea typeface="メイリオ" pitchFamily="34" charset="-122"/>
+                <a:cs typeface="メイリオ" pitchFamily="34" charset="-120"/>
               </a:rPr>
               <a:t>指導の統一化</a:t>
             </a:r>
-            <a:endParaRPr lang="en-US" sz="1800" dirty="0"/>
+            <a:endParaRPr lang="en-US" sz="1700" dirty="0"/>
           </a:p>
         </p:txBody>
       </p:sp>
@@ -6507,8 +6459,8 @@
         </p:nvSpPr>
         <p:spPr>
           <a:xfrm>
-            <a:off x="640080" y="2871216"/>
-            <a:ext cx="8046720" cy="1828800"/>
+            <a:off x="475488" y="3273552"/>
+            <a:ext cx="8193024" cy="1371600"/>
           </a:xfrm>
           <a:prstGeom prst="rect">
             <a:avLst/>
@@ -6522,133 +6474,133 @@
           <a:p>
             <a:pPr algn="l" indent="0" marL="0">
               <a:lnSpc>
-                <a:spcPct val="140000"/>
-              </a:lnSpc>
-              <a:buNone/>
-            </a:pPr>
-            <a:r>
-              <a:rPr lang="en-US" sz="1900" b="1" dirty="0">
-                <a:solidFill>
-                  <a:srgbClr val="1A1A1A"/>
-                </a:solidFill>
-                <a:latin typeface="Meiryo" pitchFamily="34" charset="0"/>
-                <a:ea typeface="Meiryo" pitchFamily="34" charset="-122"/>
-                <a:cs typeface="Meiryo" pitchFamily="34" charset="-120"/>
+                <a:spcPct val="120000"/>
+              </a:lnSpc>
+              <a:buNone/>
+            </a:pPr>
+            <a:r>
+              <a:rPr lang="en-US" sz="1700" b="1" dirty="0">
+                <a:solidFill>
+                  <a:srgbClr val="595959"/>
+                </a:solidFill>
+                <a:latin typeface="メイリオ" pitchFamily="34" charset="0"/>
+                <a:ea typeface="メイリオ" pitchFamily="34" charset="-122"/>
+                <a:cs typeface="メイリオ" pitchFamily="34" charset="-120"/>
               </a:rPr>
               <a:t>みらい青空学園は、区内２校目の施設一体型として</a:t>
             </a:r>
-            <a:endParaRPr lang="en-US" sz="1900" dirty="0"/>
-          </a:p>
-          <a:p>
-            <a:pPr algn="l" indent="0" marL="0">
-              <a:lnSpc>
-                <a:spcPct val="140000"/>
-              </a:lnSpc>
-              <a:buNone/>
-            </a:pPr>
-            <a:r>
-              <a:rPr lang="en-US" sz="1900" b="1" dirty="0">
-                <a:solidFill>
-                  <a:srgbClr val="1A1A1A"/>
-                </a:solidFill>
-                <a:latin typeface="Meiryo" pitchFamily="34" charset="0"/>
-                <a:ea typeface="Meiryo" pitchFamily="34" charset="-122"/>
-                <a:cs typeface="Meiryo" pitchFamily="34" charset="-120"/>
+            <a:endParaRPr lang="en-US" sz="1700" dirty="0"/>
+          </a:p>
+          <a:p>
+            <a:pPr algn="l" indent="0" marL="0">
+              <a:lnSpc>
+                <a:spcPct val="120000"/>
+              </a:lnSpc>
+              <a:buNone/>
+            </a:pPr>
+            <a:r>
+              <a:rPr lang="en-US" sz="1700" b="1" dirty="0">
+                <a:solidFill>
+                  <a:srgbClr val="595959"/>
+                </a:solidFill>
+                <a:latin typeface="メイリオ" pitchFamily="34" charset="0"/>
+                <a:ea typeface="メイリオ" pitchFamily="34" charset="-122"/>
+                <a:cs typeface="メイリオ" pitchFamily="34" charset="-120"/>
               </a:rPr>
               <a:t>令和８年４月に開校した</a:t>
             </a:r>
             <a:pPr algn="l" indent="0" marL="0">
               <a:lnSpc>
-                <a:spcPct val="140000"/>
-              </a:lnSpc>
-              <a:buNone/>
-            </a:pPr>
-            <a:r>
-              <a:rPr lang="en-US" sz="1900" b="1" dirty="0">
-                <a:solidFill>
-                  <a:srgbClr val="EB6C15"/>
-                </a:solidFill>
-                <a:latin typeface="Meiryo" pitchFamily="34" charset="0"/>
-                <a:ea typeface="Meiryo" pitchFamily="34" charset="-122"/>
-                <a:cs typeface="Meiryo" pitchFamily="34" charset="-120"/>
+                <a:spcPct val="120000"/>
+              </a:lnSpc>
+              <a:buNone/>
+            </a:pPr>
+            <a:r>
+              <a:rPr lang="en-US" sz="1700" b="1" dirty="0">
+                <a:solidFill>
+                  <a:srgbClr val="EE7B08"/>
+                </a:solidFill>
+                <a:latin typeface="メイリオ" pitchFamily="34" charset="0"/>
+                <a:ea typeface="メイリオ" pitchFamily="34" charset="-122"/>
+                <a:cs typeface="メイリオ" pitchFamily="34" charset="-120"/>
               </a:rPr>
               <a:t>開校１年目</a:t>
             </a:r>
             <a:pPr algn="l" indent="0" marL="0">
               <a:lnSpc>
-                <a:spcPct val="140000"/>
-              </a:lnSpc>
-              <a:buNone/>
-            </a:pPr>
-            <a:r>
-              <a:rPr lang="en-US" sz="1900" b="1" dirty="0">
-                <a:solidFill>
-                  <a:srgbClr val="1A1A1A"/>
-                </a:solidFill>
-                <a:latin typeface="Meiryo" pitchFamily="34" charset="0"/>
-                <a:ea typeface="Meiryo" pitchFamily="34" charset="-122"/>
-                <a:cs typeface="Meiryo" pitchFamily="34" charset="-120"/>
+                <a:spcPct val="120000"/>
+              </a:lnSpc>
+              <a:buNone/>
+            </a:pPr>
+            <a:r>
+              <a:rPr lang="en-US" sz="1700" b="1" dirty="0">
+                <a:solidFill>
+                  <a:srgbClr val="595959"/>
+                </a:solidFill>
+                <a:latin typeface="メイリオ" pitchFamily="34" charset="0"/>
+                <a:ea typeface="メイリオ" pitchFamily="34" charset="-122"/>
+                <a:cs typeface="メイリオ" pitchFamily="34" charset="-120"/>
               </a:rPr>
               <a:t>の学校である。</a:t>
             </a:r>
-            <a:endParaRPr lang="en-US" sz="1900" dirty="0"/>
-          </a:p>
-          <a:p>
-            <a:pPr algn="l" indent="0" marL="0">
-              <a:lnSpc>
-                <a:spcPct val="140000"/>
-              </a:lnSpc>
-              <a:buNone/>
-            </a:pPr>
-            <a:r>
-              <a:rPr lang="en-US" sz="1900" b="1" dirty="0">
-                <a:solidFill>
-                  <a:srgbClr val="1A1A1A"/>
-                </a:solidFill>
-                <a:latin typeface="Meiryo" pitchFamily="34" charset="0"/>
-                <a:ea typeface="Meiryo" pitchFamily="34" charset="-122"/>
-                <a:cs typeface="Meiryo" pitchFamily="34" charset="-120"/>
+            <a:endParaRPr lang="en-US" sz="1700" dirty="0"/>
+          </a:p>
+          <a:p>
+            <a:pPr algn="l" indent="0" marL="0">
+              <a:lnSpc>
+                <a:spcPct val="120000"/>
+              </a:lnSpc>
+              <a:buNone/>
+            </a:pPr>
+            <a:r>
+              <a:rPr lang="en-US" sz="1700" b="1" dirty="0">
+                <a:solidFill>
+                  <a:srgbClr val="595959"/>
+                </a:solidFill>
+                <a:latin typeface="メイリオ" pitchFamily="34" charset="0"/>
+                <a:ea typeface="メイリオ" pitchFamily="34" charset="-122"/>
+                <a:cs typeface="メイリオ" pitchFamily="34" charset="-120"/>
               </a:rPr>
               <a:t>１年生から９年生までが同じ学び舎で学ぶ強みを生かし、</a:t>
             </a:r>
-            <a:endParaRPr lang="en-US" sz="1900" dirty="0"/>
-          </a:p>
-          <a:p>
-            <a:pPr algn="l" indent="0" marL="0">
-              <a:lnSpc>
-                <a:spcPct val="140000"/>
-              </a:lnSpc>
-              <a:buNone/>
-            </a:pPr>
-            <a:r>
-              <a:rPr lang="en-US" sz="1900" b="1" dirty="0">
-                <a:solidFill>
-                  <a:srgbClr val="EB6C15"/>
-                </a:solidFill>
-                <a:latin typeface="Meiryo" pitchFamily="34" charset="0"/>
-                <a:ea typeface="Meiryo" pitchFamily="34" charset="-122"/>
-                <a:cs typeface="Meiryo" pitchFamily="34" charset="-120"/>
+            <a:endParaRPr lang="en-US" sz="1700" dirty="0"/>
+          </a:p>
+          <a:p>
+            <a:pPr algn="l" indent="0" marL="0">
+              <a:lnSpc>
+                <a:spcPct val="120000"/>
+              </a:lnSpc>
+              <a:buNone/>
+            </a:pPr>
+            <a:r>
+              <a:rPr lang="en-US" sz="1700" b="1" dirty="0">
+                <a:solidFill>
+                  <a:srgbClr val="EE7B08"/>
+                </a:solidFill>
+                <a:latin typeface="メイリオ" pitchFamily="34" charset="0"/>
+                <a:ea typeface="メイリオ" pitchFamily="34" charset="-122"/>
+                <a:cs typeface="メイリオ" pitchFamily="34" charset="-120"/>
               </a:rPr>
               <a:t>「目指す１５歳の姿」</a:t>
             </a:r>
             <a:pPr algn="l" indent="0" marL="0">
               <a:lnSpc>
-                <a:spcPct val="140000"/>
-              </a:lnSpc>
-              <a:buNone/>
-            </a:pPr>
-            <a:r>
-              <a:rPr lang="en-US" sz="1900" b="1" dirty="0">
-                <a:solidFill>
-                  <a:srgbClr val="1A1A1A"/>
-                </a:solidFill>
-                <a:latin typeface="Meiryo" pitchFamily="34" charset="0"/>
-                <a:ea typeface="Meiryo" pitchFamily="34" charset="-122"/>
-                <a:cs typeface="Meiryo" pitchFamily="34" charset="-120"/>
+                <a:spcPct val="120000"/>
+              </a:lnSpc>
+              <a:buNone/>
+            </a:pPr>
+            <a:r>
+              <a:rPr lang="en-US" sz="1700" b="1" dirty="0">
+                <a:solidFill>
+                  <a:srgbClr val="595959"/>
+                </a:solidFill>
+                <a:latin typeface="メイリオ" pitchFamily="34" charset="0"/>
+                <a:ea typeface="メイリオ" pitchFamily="34" charset="-122"/>
+                <a:cs typeface="メイリオ" pitchFamily="34" charset="-120"/>
               </a:rPr>
               <a:t>を９年間で描いていくことに期待している。</a:t>
             </a:r>
-            <a:endParaRPr lang="en-US" sz="1900" dirty="0"/>
+            <a:endParaRPr lang="en-US" sz="1700" dirty="0"/>
           </a:p>
         </p:txBody>
       </p:sp>
@@ -6685,14 +6637,14 @@
         </p:nvSpPr>
         <p:spPr>
           <a:xfrm>
-            <a:off x="0" y="0"/>
-            <a:ext cx="9144000" cy="576072"/>
+            <a:off x="0" y="-9144"/>
+            <a:ext cx="9144000" cy="1161288"/>
           </a:xfrm>
           <a:prstGeom prst="rect">
             <a:avLst/>
           </a:prstGeom>
           <a:solidFill>
-            <a:srgbClr val="00B0F0"/>
+            <a:srgbClr val="44C1A3"/>
           </a:solidFill>
           <a:ln/>
         </p:spPr>
@@ -6701,6 +6653,29 @@
           <a:lstStyle/>
           <a:p>
             <a:pPr algn="l" indent="0" marL="0">
+              <a:lnSpc>
+                <a:spcPct val="120000"/>
+              </a:lnSpc>
+              <a:buNone/>
+            </a:pPr>
+            <a:r>
+              <a:rPr lang="en-US" sz="3000" b="1" dirty="0">
+                <a:solidFill>
+                  <a:srgbClr val="FFFFFF"/>
+                </a:solidFill>
+                <a:latin typeface="メイリオ" pitchFamily="34" charset="0"/>
+                <a:ea typeface="メイリオ" pitchFamily="34" charset="-122"/>
+                <a:cs typeface="メイリオ" pitchFamily="34" charset="-120"/>
+              </a:rPr>
+              <a:t>　指導・講評</a:t>
+            </a:r>
+            <a:endParaRPr lang="en-US" sz="3000" dirty="0"/>
+          </a:p>
+          <a:p>
+            <a:pPr algn="l" indent="0" marL="0">
+              <a:lnSpc>
+                <a:spcPct val="120000"/>
+              </a:lnSpc>
               <a:buNone/>
             </a:pPr>
             <a:r>
@@ -6708,13 +6683,13 @@
                 <a:solidFill>
                   <a:srgbClr val="FFFFFF"/>
                 </a:solidFill>
-                <a:latin typeface="Meiryo" pitchFamily="34" charset="0"/>
-                <a:ea typeface="Meiryo" pitchFamily="34" charset="-122"/>
-                <a:cs typeface="Meiryo" pitchFamily="34" charset="-120"/>
+                <a:latin typeface="メイリオ" pitchFamily="34" charset="0"/>
+                <a:ea typeface="メイリオ" pitchFamily="34" charset="-122"/>
+                <a:cs typeface="メイリオ" pitchFamily="34" charset="-120"/>
               </a:rPr>
               <a:t>　学力調査結果から見える強み</a:t>
             </a:r>
-            <a:endParaRPr lang="en-US" sz="2800" dirty="0"/>
+            <a:endParaRPr lang="en-US" sz="3000" dirty="0"/>
           </a:p>
         </p:txBody>
       </p:sp>
@@ -6726,8 +6701,8 @@
         </p:nvSpPr>
         <p:spPr>
           <a:xfrm>
-            <a:off x="640080" y="868680"/>
-            <a:ext cx="4480560" cy="822960"/>
+            <a:off x="475488" y="1444752"/>
+            <a:ext cx="4206240" cy="731520"/>
           </a:xfrm>
           <a:prstGeom prst="rect">
             <a:avLst/>
@@ -6741,42 +6716,42 @@
           <a:p>
             <a:pPr algn="l" indent="0" marL="0">
               <a:lnSpc>
-                <a:spcPct val="130000"/>
-              </a:lnSpc>
-              <a:buNone/>
-            </a:pPr>
-            <a:r>
-              <a:rPr lang="en-US" sz="2000" b="1" dirty="0">
-                <a:solidFill>
-                  <a:srgbClr val="1A1A1A"/>
-                </a:solidFill>
-                <a:latin typeface="Meiryo" pitchFamily="34" charset="0"/>
-                <a:ea typeface="Meiryo" pitchFamily="34" charset="-122"/>
-                <a:cs typeface="Meiryo" pitchFamily="34" charset="-120"/>
+                <a:spcPct val="120000"/>
+              </a:lnSpc>
+              <a:buNone/>
+            </a:pPr>
+            <a:r>
+              <a:rPr lang="en-US" sz="1800" b="1" dirty="0">
+                <a:solidFill>
+                  <a:srgbClr val="595959"/>
+                </a:solidFill>
+                <a:latin typeface="メイリオ" pitchFamily="34" charset="0"/>
+                <a:ea typeface="メイリオ" pitchFamily="34" charset="-122"/>
+                <a:cs typeface="メイリオ" pitchFamily="34" charset="-120"/>
               </a:rPr>
               <a:t>本校では、次の３点が</a:t>
             </a:r>
-            <a:endParaRPr lang="en-US" sz="2000" dirty="0"/>
-          </a:p>
-          <a:p>
-            <a:pPr algn="l" indent="0" marL="0">
-              <a:lnSpc>
-                <a:spcPct val="130000"/>
-              </a:lnSpc>
-              <a:buNone/>
-            </a:pPr>
-            <a:r>
-              <a:rPr lang="en-US" sz="2000" b="1" dirty="0">
-                <a:solidFill>
-                  <a:srgbClr val="1A1A1A"/>
-                </a:solidFill>
-                <a:latin typeface="Meiryo" pitchFamily="34" charset="0"/>
-                <a:ea typeface="Meiryo" pitchFamily="34" charset="-122"/>
-                <a:cs typeface="Meiryo" pitchFamily="34" charset="-120"/>
+            <a:endParaRPr lang="en-US" sz="1800" dirty="0"/>
+          </a:p>
+          <a:p>
+            <a:pPr algn="l" indent="0" marL="0">
+              <a:lnSpc>
+                <a:spcPct val="120000"/>
+              </a:lnSpc>
+              <a:buNone/>
+            </a:pPr>
+            <a:r>
+              <a:rPr lang="en-US" sz="1800" b="1" dirty="0">
+                <a:solidFill>
+                  <a:srgbClr val="595959"/>
+                </a:solidFill>
+                <a:latin typeface="メイリオ" pitchFamily="34" charset="0"/>
+                <a:ea typeface="メイリオ" pitchFamily="34" charset="-122"/>
+                <a:cs typeface="メイリオ" pitchFamily="34" charset="-120"/>
               </a:rPr>
               <a:t>着実に育っている。</a:t>
             </a:r>
-            <a:endParaRPr lang="en-US" sz="2000" dirty="0"/>
+            <a:endParaRPr lang="en-US" sz="1800" dirty="0"/>
           </a:p>
         </p:txBody>
       </p:sp>
@@ -6788,20 +6763,20 @@
         </p:nvSpPr>
         <p:spPr>
           <a:xfrm>
-            <a:off x="640080" y="1874520"/>
-            <a:ext cx="4160520" cy="676656"/>
+            <a:off x="475488" y="2304288"/>
+            <a:ext cx="4023360" cy="621792"/>
           </a:xfrm>
           <a:prstGeom prst="roundRect">
             <a:avLst>
-              <a:gd name="adj" fmla="val 10811"/>
+              <a:gd name="adj" fmla="val 10294"/>
             </a:avLst>
           </a:prstGeom>
           <a:solidFill>
-            <a:srgbClr val="EAF6FD"/>
+            <a:srgbClr val="E9F7F3"/>
           </a:solidFill>
           <a:ln w="12700">
             <a:solidFill>
-              <a:srgbClr val="C9E6F5"/>
+              <a:srgbClr val="B9E5DA"/>
             </a:solidFill>
             <a:prstDash val="solid"/>
           </a:ln>
@@ -6815,8 +6790,8 @@
         </p:nvSpPr>
         <p:spPr>
           <a:xfrm>
-            <a:off x="640080" y="1874520"/>
-            <a:ext cx="4160520" cy="676656"/>
+            <a:off x="475488" y="2304288"/>
+            <a:ext cx="4023360" cy="621792"/>
           </a:xfrm>
           <a:prstGeom prst="rect">
             <a:avLst/>
@@ -6829,20 +6804,23 @@
           <a:lstStyle/>
           <a:p>
             <a:pPr algn="ctr" indent="0" marL="0">
-              <a:buNone/>
-            </a:pPr>
-            <a:r>
-              <a:rPr lang="en-US" sz="2400" b="1" dirty="0">
-                <a:solidFill>
-                  <a:srgbClr val="EB6C15"/>
-                </a:solidFill>
-                <a:latin typeface="Meiryo" pitchFamily="34" charset="0"/>
-                <a:ea typeface="Meiryo" pitchFamily="34" charset="-122"/>
-                <a:cs typeface="Meiryo" pitchFamily="34" charset="-120"/>
+              <a:lnSpc>
+                <a:spcPct val="115000"/>
+              </a:lnSpc>
+              <a:buNone/>
+            </a:pPr>
+            <a:r>
+              <a:rPr lang="en-US" sz="2100" b="1" dirty="0">
+                <a:solidFill>
+                  <a:srgbClr val="595959"/>
+                </a:solidFill>
+                <a:latin typeface="メイリオ" pitchFamily="34" charset="0"/>
+                <a:ea typeface="メイリオ" pitchFamily="34" charset="-122"/>
+                <a:cs typeface="メイリオ" pitchFamily="34" charset="-120"/>
               </a:rPr>
               <a:t>学習規律</a:t>
             </a:r>
-            <a:endParaRPr lang="en-US" sz="2400" dirty="0"/>
+            <a:endParaRPr lang="en-US" sz="2100" dirty="0"/>
           </a:p>
         </p:txBody>
       </p:sp>
@@ -6854,20 +6832,20 @@
         </p:nvSpPr>
         <p:spPr>
           <a:xfrm>
-            <a:off x="640080" y="2715768"/>
-            <a:ext cx="4160520" cy="676656"/>
+            <a:off x="475488" y="3072384"/>
+            <a:ext cx="4023360" cy="621792"/>
           </a:xfrm>
           <a:prstGeom prst="roundRect">
             <a:avLst>
-              <a:gd name="adj" fmla="val 10811"/>
+              <a:gd name="adj" fmla="val 10294"/>
             </a:avLst>
           </a:prstGeom>
           <a:solidFill>
-            <a:srgbClr val="EAF6FD"/>
+            <a:srgbClr val="E9F7F3"/>
           </a:solidFill>
           <a:ln w="12700">
             <a:solidFill>
-              <a:srgbClr val="C9E6F5"/>
+              <a:srgbClr val="B9E5DA"/>
             </a:solidFill>
             <a:prstDash val="solid"/>
           </a:ln>
@@ -6881,8 +6859,8 @@
         </p:nvSpPr>
         <p:spPr>
           <a:xfrm>
-            <a:off x="640080" y="2715768"/>
-            <a:ext cx="4160520" cy="676656"/>
+            <a:off x="475488" y="3072384"/>
+            <a:ext cx="4023360" cy="621792"/>
           </a:xfrm>
           <a:prstGeom prst="rect">
             <a:avLst/>
@@ -6895,20 +6873,23 @@
           <a:lstStyle/>
           <a:p>
             <a:pPr algn="ctr" indent="0" marL="0">
-              <a:buNone/>
-            </a:pPr>
-            <a:r>
-              <a:rPr lang="en-US" sz="2400" b="1" dirty="0">
-                <a:solidFill>
-                  <a:srgbClr val="EB6C15"/>
-                </a:solidFill>
-                <a:latin typeface="Meiryo" pitchFamily="34" charset="0"/>
-                <a:ea typeface="Meiryo" pitchFamily="34" charset="-122"/>
-                <a:cs typeface="Meiryo" pitchFamily="34" charset="-120"/>
+              <a:lnSpc>
+                <a:spcPct val="115000"/>
+              </a:lnSpc>
+              <a:buNone/>
+            </a:pPr>
+            <a:r>
+              <a:rPr lang="en-US" sz="2100" b="1" dirty="0">
+                <a:solidFill>
+                  <a:srgbClr val="595959"/>
+                </a:solidFill>
+                <a:latin typeface="メイリオ" pitchFamily="34" charset="0"/>
+                <a:ea typeface="メイリオ" pitchFamily="34" charset="-122"/>
+                <a:cs typeface="メイリオ" pitchFamily="34" charset="-120"/>
               </a:rPr>
               <a:t>学習習慣</a:t>
             </a:r>
-            <a:endParaRPr lang="en-US" sz="2400" dirty="0"/>
+            <a:endParaRPr lang="en-US" sz="2100" dirty="0"/>
           </a:p>
         </p:txBody>
       </p:sp>
@@ -6920,20 +6901,20 @@
         </p:nvSpPr>
         <p:spPr>
           <a:xfrm>
-            <a:off x="640080" y="3557016"/>
-            <a:ext cx="4160520" cy="676656"/>
+            <a:off x="475488" y="3840480"/>
+            <a:ext cx="4023360" cy="621792"/>
           </a:xfrm>
           <a:prstGeom prst="roundRect">
             <a:avLst>
-              <a:gd name="adj" fmla="val 10811"/>
+              <a:gd name="adj" fmla="val 10294"/>
             </a:avLst>
           </a:prstGeom>
           <a:solidFill>
-            <a:srgbClr val="EAF6FD"/>
+            <a:srgbClr val="E9F7F3"/>
           </a:solidFill>
           <a:ln w="12700">
             <a:solidFill>
-              <a:srgbClr val="C9E6F5"/>
+              <a:srgbClr val="B9E5DA"/>
             </a:solidFill>
             <a:prstDash val="solid"/>
           </a:ln>
@@ -6947,8 +6928,8 @@
         </p:nvSpPr>
         <p:spPr>
           <a:xfrm>
-            <a:off x="640080" y="3557016"/>
-            <a:ext cx="4160520" cy="676656"/>
+            <a:off x="475488" y="3840480"/>
+            <a:ext cx="4023360" cy="621792"/>
           </a:xfrm>
           <a:prstGeom prst="rect">
             <a:avLst/>
@@ -6961,20 +6942,23 @@
           <a:lstStyle/>
           <a:p>
             <a:pPr algn="ctr" indent="0" marL="0">
-              <a:buNone/>
-            </a:pPr>
-            <a:r>
-              <a:rPr lang="en-US" sz="2400" b="1" dirty="0">
-                <a:solidFill>
-                  <a:srgbClr val="EB6C15"/>
-                </a:solidFill>
-                <a:latin typeface="Meiryo" pitchFamily="34" charset="0"/>
-                <a:ea typeface="Meiryo" pitchFamily="34" charset="-122"/>
-                <a:cs typeface="Meiryo" pitchFamily="34" charset="-120"/>
+              <a:lnSpc>
+                <a:spcPct val="115000"/>
+              </a:lnSpc>
+              <a:buNone/>
+            </a:pPr>
+            <a:r>
+              <a:rPr lang="en-US" sz="2100" b="1" dirty="0">
+                <a:solidFill>
+                  <a:srgbClr val="595959"/>
+                </a:solidFill>
+                <a:latin typeface="メイリオ" pitchFamily="34" charset="0"/>
+                <a:ea typeface="メイリオ" pitchFamily="34" charset="-122"/>
+                <a:cs typeface="メイリオ" pitchFamily="34" charset="-120"/>
               </a:rPr>
               <a:t>学びへの主体性</a:t>
             </a:r>
-            <a:endParaRPr lang="en-US" sz="2400" dirty="0"/>
+            <a:endParaRPr lang="en-US" sz="2100" dirty="0"/>
           </a:p>
         </p:txBody>
       </p:sp>
@@ -6986,18 +6970,18 @@
         </p:nvSpPr>
         <p:spPr>
           <a:xfrm>
-            <a:off x="5257800" y="914400"/>
-            <a:ext cx="3291840" cy="3246120"/>
+            <a:off x="5074920" y="1444752"/>
+            <a:ext cx="3593592" cy="3017520"/>
           </a:xfrm>
           <a:prstGeom prst="rect">
             <a:avLst/>
           </a:prstGeom>
           <a:solidFill>
-            <a:srgbClr val="FAFCFE"/>
+            <a:srgbClr val="FBFEFD"/>
           </a:solidFill>
           <a:ln w="19050">
             <a:solidFill>
-              <a:srgbClr val="00B0F0"/>
+              <a:srgbClr val="44C1A3"/>
             </a:solidFill>
             <a:prstDash val="dash"/>
           </a:ln>
@@ -7011,8 +6995,8 @@
         </p:nvSpPr>
         <p:spPr>
           <a:xfrm>
-            <a:off x="5394960" y="1051560"/>
-            <a:ext cx="3017520" cy="2971800"/>
+            <a:off x="5212080" y="1581912"/>
+            <a:ext cx="3319272" cy="2743200"/>
           </a:xfrm>
           <a:prstGeom prst="rect">
             <a:avLst/>
@@ -7031,17 +7015,17 @@
               <a:buNone/>
             </a:pPr>
             <a:r>
-              <a:rPr lang="en-US" sz="1700" b="1" dirty="0">
-                <a:solidFill>
-                  <a:srgbClr val="00B0F0"/>
-                </a:solidFill>
-                <a:latin typeface="Meiryo" pitchFamily="34" charset="0"/>
-                <a:ea typeface="Meiryo" pitchFamily="34" charset="-122"/>
-                <a:cs typeface="Meiryo" pitchFamily="34" charset="-120"/>
+              <a:rPr lang="en-US" sz="1600" b="1" dirty="0">
+                <a:solidFill>
+                  <a:srgbClr val="44C1A3"/>
+                </a:solidFill>
+                <a:latin typeface="メイリオ" pitchFamily="34" charset="0"/>
+                <a:ea typeface="メイリオ" pitchFamily="34" charset="-122"/>
+                <a:cs typeface="メイリオ" pitchFamily="34" charset="-120"/>
               </a:rPr>
               <a:t>学力調査・意識調査グラフ</a:t>
             </a:r>
-            <a:endParaRPr lang="en-US" sz="1700" dirty="0"/>
+            <a:endParaRPr lang="en-US" sz="1600" dirty="0"/>
           </a:p>
           <a:p>
             <a:pPr algn="ctr" indent="0" marL="0">
@@ -7051,17 +7035,17 @@
               <a:buNone/>
             </a:pPr>
             <a:r>
-              <a:rPr lang="en-US" sz="1700" b="1" dirty="0">
-                <a:solidFill>
-                  <a:srgbClr val="00B0F0"/>
-                </a:solidFill>
-                <a:latin typeface="Meiryo" pitchFamily="34" charset="0"/>
-                <a:ea typeface="Meiryo" pitchFamily="34" charset="-122"/>
-                <a:cs typeface="Meiryo" pitchFamily="34" charset="-120"/>
+              <a:rPr lang="en-US" sz="1600" b="1" dirty="0">
+                <a:solidFill>
+                  <a:srgbClr val="44C1A3"/>
+                </a:solidFill>
+                <a:latin typeface="メイリオ" pitchFamily="34" charset="0"/>
+                <a:ea typeface="メイリオ" pitchFamily="34" charset="-122"/>
+                <a:cs typeface="メイリオ" pitchFamily="34" charset="-120"/>
               </a:rPr>
               <a:t>（貼付欄）</a:t>
             </a:r>
-            <a:endParaRPr lang="en-US" sz="1700" dirty="0"/>
+            <a:endParaRPr lang="en-US" sz="1600" dirty="0"/>
           </a:p>
           <a:p>
             <a:pPr algn="ctr" indent="0" marL="0">
@@ -7075,13 +7059,13 @@
                 <a:solidFill>
                   <a:srgbClr val="000000"/>
                 </a:solidFill>
-                <a:latin typeface="Meiryo" pitchFamily="34" charset="0"/>
-                <a:ea typeface="Meiryo" pitchFamily="34" charset="-122"/>
-                <a:cs typeface="Meiryo" pitchFamily="34" charset="-120"/>
+                <a:latin typeface="メイリオ" pitchFamily="34" charset="0"/>
+                <a:ea typeface="メイリオ" pitchFamily="34" charset="-122"/>
+                <a:cs typeface="メイリオ" pitchFamily="34" charset="-120"/>
               </a:rPr>
               <a:t> </a:t>
             </a:r>
-            <a:endParaRPr lang="en-US" sz="1700" dirty="0"/>
+            <a:endParaRPr lang="en-US" sz="1600" dirty="0"/>
           </a:p>
           <a:p>
             <a:pPr algn="ctr" indent="0" marL="0">
@@ -7093,15 +7077,15 @@
             <a:r>
               <a:rPr lang="en-US" sz="1200" b="1" dirty="0">
                 <a:solidFill>
-                  <a:srgbClr val="595959"/>
-                </a:solidFill>
-                <a:latin typeface="Meiryo" pitchFamily="34" charset="0"/>
-                <a:ea typeface="Meiryo" pitchFamily="34" charset="-122"/>
-                <a:cs typeface="Meiryo" pitchFamily="34" charset="-120"/>
+                  <a:srgbClr val="808080"/>
+                </a:solidFill>
+                <a:latin typeface="メイリオ" pitchFamily="34" charset="0"/>
+                <a:ea typeface="メイリオ" pitchFamily="34" charset="-122"/>
+                <a:cs typeface="メイリオ" pitchFamily="34" charset="-120"/>
               </a:rPr>
               <a:t>全国学力・学習状況調査</a:t>
             </a:r>
-            <a:endParaRPr lang="en-US" sz="1700" dirty="0"/>
+            <a:endParaRPr lang="en-US" sz="1600" dirty="0"/>
           </a:p>
           <a:p>
             <a:pPr algn="ctr" indent="0" marL="0">
@@ -7113,15 +7097,15 @@
             <a:r>
               <a:rPr lang="en-US" sz="1200" b="1" dirty="0">
                 <a:solidFill>
-                  <a:srgbClr val="595959"/>
-                </a:solidFill>
-                <a:latin typeface="Meiryo" pitchFamily="34" charset="0"/>
-                <a:ea typeface="Meiryo" pitchFamily="34" charset="-122"/>
-                <a:cs typeface="Meiryo" pitchFamily="34" charset="-120"/>
+                  <a:srgbClr val="808080"/>
+                </a:solidFill>
+                <a:latin typeface="メイリオ" pitchFamily="34" charset="0"/>
+                <a:ea typeface="メイリオ" pitchFamily="34" charset="-122"/>
+                <a:cs typeface="メイリオ" pitchFamily="34" charset="-120"/>
               </a:rPr>
               <a:t>児童・生徒質問紙調査　ほか</a:t>
             </a:r>
-            <a:endParaRPr lang="en-US" sz="1700" dirty="0"/>
+            <a:endParaRPr lang="en-US" sz="1600" dirty="0"/>
           </a:p>
         </p:txBody>
       </p:sp>
@@ -7133,8 +7117,8 @@
         </p:nvSpPr>
         <p:spPr>
           <a:xfrm>
-            <a:off x="5257800" y="4224528"/>
-            <a:ext cx="3291840" cy="292608"/>
+            <a:off x="5074920" y="4526280"/>
+            <a:ext cx="3593592" cy="274320"/>
           </a:xfrm>
           <a:prstGeom prst="rect">
             <a:avLst/>
@@ -7152,11 +7136,11 @@
             <a:r>
               <a:rPr lang="en-US" sz="1000" b="1" dirty="0">
                 <a:solidFill>
-                  <a:srgbClr val="595959"/>
-                </a:solidFill>
-                <a:latin typeface="Meiryo" pitchFamily="34" charset="0"/>
-                <a:ea typeface="Meiryo" pitchFamily="34" charset="-122"/>
-                <a:cs typeface="Meiryo" pitchFamily="34" charset="-120"/>
+                  <a:srgbClr val="808080"/>
+                </a:solidFill>
+                <a:latin typeface="メイリオ" pitchFamily="34" charset="0"/>
+                <a:ea typeface="メイリオ" pitchFamily="34" charset="-122"/>
+                <a:cs typeface="メイリオ" pitchFamily="34" charset="-120"/>
               </a:rPr>
               <a:t>※ 本校の調査結果グラフを貼り付けてご使用ください。</a:t>
             </a:r>
@@ -7197,14 +7181,14 @@
         </p:nvSpPr>
         <p:spPr>
           <a:xfrm>
-            <a:off x="0" y="0"/>
-            <a:ext cx="9144000" cy="576072"/>
+            <a:off x="0" y="-9144"/>
+            <a:ext cx="9144000" cy="1161288"/>
           </a:xfrm>
           <a:prstGeom prst="rect">
             <a:avLst/>
           </a:prstGeom>
           <a:solidFill>
-            <a:srgbClr val="00B0F0"/>
+            <a:srgbClr val="44C1A3"/>
           </a:solidFill>
           <a:ln/>
         </p:spPr>
@@ -7213,6 +7197,29 @@
           <a:lstStyle/>
           <a:p>
             <a:pPr algn="l" indent="0" marL="0">
+              <a:lnSpc>
+                <a:spcPct val="120000"/>
+              </a:lnSpc>
+              <a:buNone/>
+            </a:pPr>
+            <a:r>
+              <a:rPr lang="en-US" sz="3000" b="1" dirty="0">
+                <a:solidFill>
+                  <a:srgbClr val="FFFFFF"/>
+                </a:solidFill>
+                <a:latin typeface="メイリオ" pitchFamily="34" charset="0"/>
+                <a:ea typeface="メイリオ" pitchFamily="34" charset="-122"/>
+                <a:cs typeface="メイリオ" pitchFamily="34" charset="-120"/>
+              </a:rPr>
+              <a:t>　指導・講評</a:t>
+            </a:r>
+            <a:endParaRPr lang="en-US" sz="3000" dirty="0"/>
+          </a:p>
+          <a:p>
+            <a:pPr algn="l" indent="0" marL="0">
+              <a:lnSpc>
+                <a:spcPct val="120000"/>
+              </a:lnSpc>
               <a:buNone/>
             </a:pPr>
             <a:r>
@@ -7220,13 +7227,13 @@
                 <a:solidFill>
                   <a:srgbClr val="FFFFFF"/>
                 </a:solidFill>
-                <a:latin typeface="Meiryo" pitchFamily="34" charset="0"/>
-                <a:ea typeface="Meiryo" pitchFamily="34" charset="-122"/>
-                <a:cs typeface="Meiryo" pitchFamily="34" charset="-120"/>
+                <a:latin typeface="メイリオ" pitchFamily="34" charset="0"/>
+                <a:ea typeface="メイリオ" pitchFamily="34" charset="-122"/>
+                <a:cs typeface="メイリオ" pitchFamily="34" charset="-120"/>
               </a:rPr>
               <a:t>　学力調査結果から見える強み</a:t>
             </a:r>
-            <a:endParaRPr lang="en-US" sz="2800" dirty="0"/>
+            <a:endParaRPr lang="en-US" sz="3000" dirty="0"/>
           </a:p>
         </p:txBody>
       </p:sp>
@@ -7238,8 +7245,8 @@
         </p:nvSpPr>
         <p:spPr>
           <a:xfrm>
-            <a:off x="640080" y="841248"/>
-            <a:ext cx="8046720" cy="1051560"/>
+            <a:off x="475488" y="1417320"/>
+            <a:ext cx="8193024" cy="868680"/>
           </a:xfrm>
           <a:prstGeom prst="rect">
             <a:avLst/>
@@ -7253,76 +7260,76 @@
           <a:p>
             <a:pPr algn="l" indent="0" marL="0">
               <a:lnSpc>
-                <a:spcPct val="135000"/>
-              </a:lnSpc>
-              <a:buNone/>
-            </a:pPr>
-            <a:r>
-              <a:rPr lang="en-US" sz="2200" b="1" dirty="0">
-                <a:solidFill>
-                  <a:srgbClr val="1A1A1A"/>
-                </a:solidFill>
-                <a:latin typeface="Meiryo" pitchFamily="34" charset="0"/>
-                <a:ea typeface="Meiryo" pitchFamily="34" charset="-122"/>
-                <a:cs typeface="Meiryo" pitchFamily="34" charset="-120"/>
+                <a:spcPct val="120000"/>
+              </a:lnSpc>
+              <a:buNone/>
+            </a:pPr>
+            <a:r>
+              <a:rPr lang="en-US" sz="2000" b="1" dirty="0">
+                <a:solidFill>
+                  <a:srgbClr val="595959"/>
+                </a:solidFill>
+                <a:latin typeface="メイリオ" pitchFamily="34" charset="0"/>
+                <a:ea typeface="メイリオ" pitchFamily="34" charset="-122"/>
+                <a:cs typeface="メイリオ" pitchFamily="34" charset="-120"/>
               </a:rPr>
               <a:t>学力調査結果は「結果」である。</a:t>
             </a:r>
-            <a:endParaRPr lang="en-US" sz="2200" dirty="0"/>
-          </a:p>
-          <a:p>
-            <a:pPr algn="l" indent="0" marL="0">
-              <a:lnSpc>
-                <a:spcPct val="135000"/>
-              </a:lnSpc>
-              <a:buNone/>
-            </a:pPr>
-            <a:r>
-              <a:rPr lang="en-US" sz="2200" b="1" dirty="0">
-                <a:solidFill>
-                  <a:srgbClr val="1A1A1A"/>
-                </a:solidFill>
-                <a:latin typeface="Meiryo" pitchFamily="34" charset="0"/>
-                <a:ea typeface="Meiryo" pitchFamily="34" charset="-122"/>
-                <a:cs typeface="Meiryo" pitchFamily="34" charset="-120"/>
+            <a:endParaRPr lang="en-US" sz="2000" dirty="0"/>
+          </a:p>
+          <a:p>
+            <a:pPr algn="l" indent="0" marL="0">
+              <a:lnSpc>
+                <a:spcPct val="120000"/>
+              </a:lnSpc>
+              <a:buNone/>
+            </a:pPr>
+            <a:r>
+              <a:rPr lang="en-US" sz="2000" b="1" dirty="0">
+                <a:solidFill>
+                  <a:srgbClr val="595959"/>
+                </a:solidFill>
+                <a:latin typeface="メイリオ" pitchFamily="34" charset="0"/>
+                <a:ea typeface="メイリオ" pitchFamily="34" charset="-122"/>
+                <a:cs typeface="メイリオ" pitchFamily="34" charset="-120"/>
               </a:rPr>
               <a:t>では、</a:t>
             </a:r>
             <a:pPr algn="l" indent="0" marL="0">
               <a:lnSpc>
-                <a:spcPct val="135000"/>
-              </a:lnSpc>
-              <a:buNone/>
-            </a:pPr>
-            <a:r>
-              <a:rPr lang="en-US" sz="2200" b="1" dirty="0">
-                <a:solidFill>
-                  <a:srgbClr val="EB6C15"/>
-                </a:solidFill>
-                <a:latin typeface="Meiryo" pitchFamily="34" charset="0"/>
-                <a:ea typeface="Meiryo" pitchFamily="34" charset="-122"/>
-                <a:cs typeface="Meiryo" pitchFamily="34" charset="-120"/>
+                <a:spcPct val="120000"/>
+              </a:lnSpc>
+              <a:buNone/>
+            </a:pPr>
+            <a:r>
+              <a:rPr lang="en-US" sz="2000" b="1" dirty="0">
+                <a:solidFill>
+                  <a:srgbClr val="EE7B08"/>
+                </a:solidFill>
+                <a:latin typeface="メイリオ" pitchFamily="34" charset="0"/>
+                <a:ea typeface="メイリオ" pitchFamily="34" charset="-122"/>
+                <a:cs typeface="メイリオ" pitchFamily="34" charset="-120"/>
               </a:rPr>
               <a:t>その結果を生み出した要因は何か</a:t>
             </a:r>
             <a:pPr algn="l" indent="0" marL="0">
               <a:lnSpc>
-                <a:spcPct val="135000"/>
-              </a:lnSpc>
-              <a:buNone/>
-            </a:pPr>
-            <a:r>
-              <a:rPr lang="en-US" sz="2200" b="1" dirty="0">
-                <a:solidFill>
-                  <a:srgbClr val="1A1A1A"/>
-                </a:solidFill>
-                <a:latin typeface="Meiryo" pitchFamily="34" charset="0"/>
-                <a:ea typeface="Meiryo" pitchFamily="34" charset="-122"/>
-                <a:cs typeface="Meiryo" pitchFamily="34" charset="-120"/>
+                <a:spcPct val="120000"/>
+              </a:lnSpc>
+              <a:buNone/>
+            </a:pPr>
+            <a:r>
+              <a:rPr lang="en-US" sz="2000" b="1" dirty="0">
+                <a:solidFill>
+                  <a:srgbClr val="595959"/>
+                </a:solidFill>
+                <a:latin typeface="メイリオ" pitchFamily="34" charset="0"/>
+                <a:ea typeface="メイリオ" pitchFamily="34" charset="-122"/>
+                <a:cs typeface="メイリオ" pitchFamily="34" charset="-120"/>
               </a:rPr>
               <a:t>。</a:t>
             </a:r>
-            <a:endParaRPr lang="en-US" sz="2200" dirty="0"/>
+            <a:endParaRPr lang="en-US" sz="2000" dirty="0"/>
           </a:p>
         </p:txBody>
       </p:sp>
@@ -7334,8 +7341,8 @@
         </p:nvSpPr>
         <p:spPr>
           <a:xfrm>
-            <a:off x="640080" y="1938528"/>
-            <a:ext cx="8046720" cy="384048"/>
+            <a:off x="475488" y="2286000"/>
+            <a:ext cx="8193024" cy="347472"/>
           </a:xfrm>
           <a:prstGeom prst="rect">
             <a:avLst/>
@@ -7351,17 +7358,17 @@
               <a:buNone/>
             </a:pPr>
             <a:r>
-              <a:rPr lang="en-US" sz="1600" b="1" dirty="0">
-                <a:solidFill>
-                  <a:srgbClr val="595959"/>
-                </a:solidFill>
-                <a:latin typeface="Meiryo" pitchFamily="34" charset="0"/>
-                <a:ea typeface="Meiryo" pitchFamily="34" charset="-122"/>
-                <a:cs typeface="Meiryo" pitchFamily="34" charset="-120"/>
+              <a:rPr lang="en-US" sz="1500" b="1" dirty="0">
+                <a:solidFill>
+                  <a:srgbClr val="808080"/>
+                </a:solidFill>
+                <a:latin typeface="メイリオ" pitchFamily="34" charset="0"/>
+                <a:ea typeface="メイリオ" pitchFamily="34" charset="-122"/>
+                <a:cs typeface="メイリオ" pitchFamily="34" charset="-120"/>
               </a:rPr>
               <a:t>本日の授業から、次の３つが見えてきた。</a:t>
             </a:r>
-            <a:endParaRPr lang="en-US" sz="1600" dirty="0"/>
+            <a:endParaRPr lang="en-US" sz="1500" dirty="0"/>
           </a:p>
         </p:txBody>
       </p:sp>
@@ -7373,20 +7380,20 @@
         </p:nvSpPr>
         <p:spPr>
           <a:xfrm>
-            <a:off x="640080" y="2487168"/>
-            <a:ext cx="2423160" cy="1572768"/>
+            <a:off x="475488" y="2724912"/>
+            <a:ext cx="2468880" cy="1417320"/>
           </a:xfrm>
           <a:prstGeom prst="roundRect">
             <a:avLst>
-              <a:gd name="adj" fmla="val 4651"/>
+              <a:gd name="adj" fmla="val 3871"/>
             </a:avLst>
           </a:prstGeom>
           <a:solidFill>
-            <a:srgbClr val="EAF6FD"/>
+            <a:srgbClr val="E9F7F3"/>
           </a:solidFill>
           <a:ln w="12700">
             <a:solidFill>
-              <a:srgbClr val="C9E6F5"/>
+              <a:srgbClr val="B9E5DA"/>
             </a:solidFill>
             <a:prstDash val="solid"/>
           </a:ln>
@@ -7400,14 +7407,14 @@
         </p:nvSpPr>
         <p:spPr>
           <a:xfrm>
-            <a:off x="1604772" y="2697480"/>
-            <a:ext cx="493776" cy="493776"/>
+            <a:off x="1481328" y="2889504"/>
+            <a:ext cx="457200" cy="457200"/>
           </a:xfrm>
           <a:prstGeom prst="ellipse">
             <a:avLst/>
           </a:prstGeom>
           <a:solidFill>
-            <a:srgbClr val="EB6C15"/>
+            <a:srgbClr val="44C1A3"/>
           </a:solidFill>
           <a:ln/>
         </p:spPr>
@@ -7420,8 +7427,8 @@
         </p:nvSpPr>
         <p:spPr>
           <a:xfrm>
-            <a:off x="1604772" y="2697480"/>
-            <a:ext cx="493776" cy="493776"/>
+            <a:off x="1481328" y="2889504"/>
+            <a:ext cx="457200" cy="457200"/>
           </a:xfrm>
           <a:prstGeom prst="rect">
             <a:avLst/>
@@ -7437,17 +7444,17 @@
               <a:buNone/>
             </a:pPr>
             <a:r>
-              <a:rPr lang="en-US" sz="2500" b="1" dirty="0">
+              <a:rPr lang="en-US" sz="2300" b="1" dirty="0">
                 <a:solidFill>
                   <a:srgbClr val="FFFFFF"/>
                 </a:solidFill>
-                <a:latin typeface="Meiryo" pitchFamily="34" charset="0"/>
-                <a:ea typeface="Meiryo" pitchFamily="34" charset="-122"/>
-                <a:cs typeface="Meiryo" pitchFamily="34" charset="-120"/>
+                <a:latin typeface="メイリオ" pitchFamily="34" charset="0"/>
+                <a:ea typeface="メイリオ" pitchFamily="34" charset="-122"/>
+                <a:cs typeface="メイリオ" pitchFamily="34" charset="-120"/>
               </a:rPr>
               <a:t>①</a:t>
             </a:r>
-            <a:endParaRPr lang="en-US" sz="2500" dirty="0"/>
+            <a:endParaRPr lang="en-US" sz="2300" dirty="0"/>
           </a:p>
         </p:txBody>
       </p:sp>
@@ -7459,8 +7466,8 @@
         </p:nvSpPr>
         <p:spPr>
           <a:xfrm>
-            <a:off x="731520" y="3310128"/>
-            <a:ext cx="2240280" cy="548640"/>
+            <a:off x="566928" y="3438144"/>
+            <a:ext cx="2286000" cy="502920"/>
           </a:xfrm>
           <a:prstGeom prst="rect">
             <a:avLst/>
@@ -7476,17 +7483,17 @@
               <a:buNone/>
             </a:pPr>
             <a:r>
-              <a:rPr lang="en-US" sz="1900" b="1" dirty="0">
-                <a:solidFill>
-                  <a:srgbClr val="EB6C15"/>
-                </a:solidFill>
-                <a:latin typeface="Meiryo" pitchFamily="34" charset="0"/>
-                <a:ea typeface="Meiryo" pitchFamily="34" charset="-122"/>
-                <a:cs typeface="Meiryo" pitchFamily="34" charset="-120"/>
+              <a:rPr lang="en-US" sz="1800" b="1" dirty="0">
+                <a:solidFill>
+                  <a:srgbClr val="EE7B08"/>
+                </a:solidFill>
+                <a:latin typeface="メイリオ" pitchFamily="34" charset="0"/>
+                <a:ea typeface="メイリオ" pitchFamily="34" charset="-122"/>
+                <a:cs typeface="メイリオ" pitchFamily="34" charset="-120"/>
               </a:rPr>
               <a:t>自己肯定感</a:t>
             </a:r>
-            <a:endParaRPr lang="en-US" sz="1900" dirty="0"/>
+            <a:endParaRPr lang="en-US" sz="1800" dirty="0"/>
           </a:p>
         </p:txBody>
       </p:sp>
@@ -7498,20 +7505,20 @@
         </p:nvSpPr>
         <p:spPr>
           <a:xfrm>
-            <a:off x="3337560" y="2487168"/>
-            <a:ext cx="2423160" cy="1572768"/>
+            <a:off x="3218688" y="2724912"/>
+            <a:ext cx="2468880" cy="1417320"/>
           </a:xfrm>
           <a:prstGeom prst="roundRect">
             <a:avLst>
-              <a:gd name="adj" fmla="val 4651"/>
+              <a:gd name="adj" fmla="val 3871"/>
             </a:avLst>
           </a:prstGeom>
           <a:solidFill>
-            <a:srgbClr val="EAF6FD"/>
+            <a:srgbClr val="E9F7F3"/>
           </a:solidFill>
           <a:ln w="12700">
             <a:solidFill>
-              <a:srgbClr val="C9E6F5"/>
+              <a:srgbClr val="B9E5DA"/>
             </a:solidFill>
             <a:prstDash val="solid"/>
           </a:ln>
@@ -7525,14 +7532,14 @@
         </p:nvSpPr>
         <p:spPr>
           <a:xfrm>
-            <a:off x="4302252" y="2697480"/>
-            <a:ext cx="493776" cy="493776"/>
+            <a:off x="4224528" y="2889504"/>
+            <a:ext cx="457200" cy="457200"/>
           </a:xfrm>
           <a:prstGeom prst="ellipse">
             <a:avLst/>
           </a:prstGeom>
           <a:solidFill>
-            <a:srgbClr val="EB6C15"/>
+            <a:srgbClr val="44C1A3"/>
           </a:solidFill>
           <a:ln/>
         </p:spPr>
@@ -7545,8 +7552,8 @@
         </p:nvSpPr>
         <p:spPr>
           <a:xfrm>
-            <a:off x="4302252" y="2697480"/>
-            <a:ext cx="493776" cy="493776"/>
+            <a:off x="4224528" y="2889504"/>
+            <a:ext cx="457200" cy="457200"/>
           </a:xfrm>
           <a:prstGeom prst="rect">
             <a:avLst/>
@@ -7562,17 +7569,17 @@
               <a:buNone/>
             </a:pPr>
             <a:r>
-              <a:rPr lang="en-US" sz="2500" b="1" dirty="0">
+              <a:rPr lang="en-US" sz="2300" b="1" dirty="0">
                 <a:solidFill>
                   <a:srgbClr val="FFFFFF"/>
                 </a:solidFill>
-                <a:latin typeface="Meiryo" pitchFamily="34" charset="0"/>
-                <a:ea typeface="Meiryo" pitchFamily="34" charset="-122"/>
-                <a:cs typeface="Meiryo" pitchFamily="34" charset="-120"/>
+                <a:latin typeface="メイリオ" pitchFamily="34" charset="0"/>
+                <a:ea typeface="メイリオ" pitchFamily="34" charset="-122"/>
+                <a:cs typeface="メイリオ" pitchFamily="34" charset="-120"/>
               </a:rPr>
               <a:t>②</a:t>
             </a:r>
-            <a:endParaRPr lang="en-US" sz="2500" dirty="0"/>
+            <a:endParaRPr lang="en-US" sz="2300" dirty="0"/>
           </a:p>
         </p:txBody>
       </p:sp>
@@ -7584,8 +7591,8 @@
         </p:nvSpPr>
         <p:spPr>
           <a:xfrm>
-            <a:off x="3429000" y="3310128"/>
-            <a:ext cx="2240280" cy="548640"/>
+            <a:off x="3310128" y="3438144"/>
+            <a:ext cx="2286000" cy="502920"/>
           </a:xfrm>
           <a:prstGeom prst="rect">
             <a:avLst/>
@@ -7601,17 +7608,17 @@
               <a:buNone/>
             </a:pPr>
             <a:r>
-              <a:rPr lang="en-US" sz="1900" b="1" dirty="0">
-                <a:solidFill>
-                  <a:srgbClr val="EB6C15"/>
-                </a:solidFill>
-                <a:latin typeface="Meiryo" pitchFamily="34" charset="0"/>
-                <a:ea typeface="Meiryo" pitchFamily="34" charset="-122"/>
-                <a:cs typeface="Meiryo" pitchFamily="34" charset="-120"/>
+              <a:rPr lang="en-US" sz="1800" b="1" dirty="0">
+                <a:solidFill>
+                  <a:srgbClr val="EE7B08"/>
+                </a:solidFill>
+                <a:latin typeface="メイリオ" pitchFamily="34" charset="0"/>
+                <a:ea typeface="メイリオ" pitchFamily="34" charset="-122"/>
+                <a:cs typeface="メイリオ" pitchFamily="34" charset="-120"/>
               </a:rPr>
               <a:t>対話・協働</a:t>
             </a:r>
-            <a:endParaRPr lang="en-US" sz="1900" dirty="0"/>
+            <a:endParaRPr lang="en-US" sz="1800" dirty="0"/>
           </a:p>
         </p:txBody>
       </p:sp>
@@ -7623,20 +7630,20 @@
         </p:nvSpPr>
         <p:spPr>
           <a:xfrm>
-            <a:off x="6035040" y="2487168"/>
-            <a:ext cx="2423160" cy="1572768"/>
+            <a:off x="5961888" y="2724912"/>
+            <a:ext cx="2468880" cy="1417320"/>
           </a:xfrm>
           <a:prstGeom prst="roundRect">
             <a:avLst>
-              <a:gd name="adj" fmla="val 4651"/>
+              <a:gd name="adj" fmla="val 3871"/>
             </a:avLst>
           </a:prstGeom>
           <a:solidFill>
-            <a:srgbClr val="EAF6FD"/>
+            <a:srgbClr val="E9F7F3"/>
           </a:solidFill>
           <a:ln w="12700">
             <a:solidFill>
-              <a:srgbClr val="C9E6F5"/>
+              <a:srgbClr val="B9E5DA"/>
             </a:solidFill>
             <a:prstDash val="solid"/>
           </a:ln>
@@ -7650,14 +7657,14 @@
         </p:nvSpPr>
         <p:spPr>
           <a:xfrm>
-            <a:off x="6999732" y="2697480"/>
-            <a:ext cx="493776" cy="493776"/>
+            <a:off x="6967728" y="2889504"/>
+            <a:ext cx="457200" cy="457200"/>
           </a:xfrm>
           <a:prstGeom prst="ellipse">
             <a:avLst/>
           </a:prstGeom>
           <a:solidFill>
-            <a:srgbClr val="EB6C15"/>
+            <a:srgbClr val="44C1A3"/>
           </a:solidFill>
           <a:ln/>
         </p:spPr>
@@ -7670,8 +7677,8 @@
         </p:nvSpPr>
         <p:spPr>
           <a:xfrm>
-            <a:off x="6999732" y="2697480"/>
-            <a:ext cx="493776" cy="493776"/>
+            <a:off x="6967728" y="2889504"/>
+            <a:ext cx="457200" cy="457200"/>
           </a:xfrm>
           <a:prstGeom prst="rect">
             <a:avLst/>
@@ -7687,17 +7694,17 @@
               <a:buNone/>
             </a:pPr>
             <a:r>
-              <a:rPr lang="en-US" sz="2500" b="1" dirty="0">
+              <a:rPr lang="en-US" sz="2300" b="1" dirty="0">
                 <a:solidFill>
                   <a:srgbClr val="FFFFFF"/>
                 </a:solidFill>
-                <a:latin typeface="Meiryo" pitchFamily="34" charset="0"/>
-                <a:ea typeface="Meiryo" pitchFamily="34" charset="-122"/>
-                <a:cs typeface="Meiryo" pitchFamily="34" charset="-120"/>
+                <a:latin typeface="メイリオ" pitchFamily="34" charset="0"/>
+                <a:ea typeface="メイリオ" pitchFamily="34" charset="-122"/>
+                <a:cs typeface="メイリオ" pitchFamily="34" charset="-120"/>
               </a:rPr>
               <a:t>③</a:t>
             </a:r>
-            <a:endParaRPr lang="en-US" sz="2500" dirty="0"/>
+            <a:endParaRPr lang="en-US" sz="2300" dirty="0"/>
           </a:p>
         </p:txBody>
       </p:sp>
@@ -7709,8 +7716,8 @@
         </p:nvSpPr>
         <p:spPr>
           <a:xfrm>
-            <a:off x="6126480" y="3310128"/>
-            <a:ext cx="2240280" cy="548640"/>
+            <a:off x="6053328" y="3438144"/>
+            <a:ext cx="2286000" cy="502920"/>
           </a:xfrm>
           <a:prstGeom prst="rect">
             <a:avLst/>
@@ -7726,17 +7733,17 @@
               <a:buNone/>
             </a:pPr>
             <a:r>
-              <a:rPr lang="en-US" sz="1900" b="1" dirty="0">
-                <a:solidFill>
-                  <a:srgbClr val="EB6C15"/>
-                </a:solidFill>
-                <a:latin typeface="Meiryo" pitchFamily="34" charset="0"/>
-                <a:ea typeface="Meiryo" pitchFamily="34" charset="-122"/>
-                <a:cs typeface="Meiryo" pitchFamily="34" charset="-120"/>
+              <a:rPr lang="en-US" sz="1800" b="1" dirty="0">
+                <a:solidFill>
+                  <a:srgbClr val="EE7B08"/>
+                </a:solidFill>
+                <a:latin typeface="メイリオ" pitchFamily="34" charset="0"/>
+                <a:ea typeface="メイリオ" pitchFamily="34" charset="-122"/>
+                <a:cs typeface="メイリオ" pitchFamily="34" charset="-120"/>
               </a:rPr>
               <a:t>学習の自己調整</a:t>
             </a:r>
-            <a:endParaRPr lang="en-US" sz="1900" dirty="0"/>
+            <a:endParaRPr lang="en-US" sz="1800" dirty="0"/>
           </a:p>
         </p:txBody>
       </p:sp>
@@ -7748,8 +7755,8 @@
         </p:nvSpPr>
         <p:spPr>
           <a:xfrm>
-            <a:off x="640080" y="4206240"/>
-            <a:ext cx="8046720" cy="384048"/>
+            <a:off x="475488" y="4261104"/>
+            <a:ext cx="8193024" cy="347472"/>
           </a:xfrm>
           <a:prstGeom prst="rect">
             <a:avLst/>
@@ -7765,17 +7772,17 @@
               <a:buNone/>
             </a:pPr>
             <a:r>
-              <a:rPr lang="en-US" sz="1600" b="1" dirty="0">
-                <a:solidFill>
-                  <a:srgbClr val="1A1A1A"/>
-                </a:solidFill>
-                <a:latin typeface="Meiryo" pitchFamily="34" charset="0"/>
-                <a:ea typeface="Meiryo" pitchFamily="34" charset="-122"/>
-                <a:cs typeface="Meiryo" pitchFamily="34" charset="-120"/>
+              <a:rPr lang="en-US" sz="1500" b="1" dirty="0">
+                <a:solidFill>
+                  <a:srgbClr val="595959"/>
+                </a:solidFill>
+                <a:latin typeface="メイリオ" pitchFamily="34" charset="0"/>
+                <a:ea typeface="メイリオ" pitchFamily="34" charset="-122"/>
+                <a:cs typeface="メイリオ" pitchFamily="34" charset="-120"/>
               </a:rPr>
               <a:t>この３つが、学力調査結果を支える土台になっている。</a:t>
             </a:r>
-            <a:endParaRPr lang="en-US" sz="1600" dirty="0"/>
+            <a:endParaRPr lang="en-US" sz="1500" dirty="0"/>
           </a:p>
         </p:txBody>
       </p:sp>
@@ -7812,14 +7819,14 @@
         </p:nvSpPr>
         <p:spPr>
           <a:xfrm>
-            <a:off x="0" y="0"/>
-            <a:ext cx="9144000" cy="576072"/>
+            <a:off x="0" y="-9144"/>
+            <a:ext cx="9144000" cy="1161288"/>
           </a:xfrm>
           <a:prstGeom prst="rect">
             <a:avLst/>
           </a:prstGeom>
           <a:solidFill>
-            <a:srgbClr val="00B0F0"/>
+            <a:srgbClr val="44C1A3"/>
           </a:solidFill>
           <a:ln/>
         </p:spPr>
@@ -7828,6 +7835,29 @@
           <a:lstStyle/>
           <a:p>
             <a:pPr algn="l" indent="0" marL="0">
+              <a:lnSpc>
+                <a:spcPct val="120000"/>
+              </a:lnSpc>
+              <a:buNone/>
+            </a:pPr>
+            <a:r>
+              <a:rPr lang="en-US" sz="3000" b="1" dirty="0">
+                <a:solidFill>
+                  <a:srgbClr val="FFFFFF"/>
+                </a:solidFill>
+                <a:latin typeface="メイリオ" pitchFamily="34" charset="0"/>
+                <a:ea typeface="メイリオ" pitchFamily="34" charset="-122"/>
+                <a:cs typeface="メイリオ" pitchFamily="34" charset="-120"/>
+              </a:rPr>
+              <a:t>　２　５校時の授業について</a:t>
+            </a:r>
+            <a:endParaRPr lang="en-US" sz="3000" dirty="0"/>
+          </a:p>
+          <a:p>
+            <a:pPr algn="l" indent="0" marL="0">
+              <a:lnSpc>
+                <a:spcPct val="120000"/>
+              </a:lnSpc>
               <a:buNone/>
             </a:pPr>
             <a:r>
@@ -7835,232 +7865,134 @@
                 <a:solidFill>
                   <a:srgbClr val="FFFFFF"/>
                 </a:solidFill>
-                <a:latin typeface="Meiryo" pitchFamily="34" charset="0"/>
-                <a:ea typeface="Meiryo" pitchFamily="34" charset="-122"/>
-                <a:cs typeface="Meiryo" pitchFamily="34" charset="-120"/>
-              </a:rPr>
-              <a:t>　２　５校時の授業について</a:t>
-            </a:r>
-            <a:endParaRPr lang="en-US" sz="2800" dirty="0"/>
-          </a:p>
-        </p:txBody>
-      </p:sp>
-      <p:sp>
-        <p:nvSpPr>
-          <p:cNvPr id="3" name="Shape 1"/>
+                <a:latin typeface="メイリオ" pitchFamily="34" charset="0"/>
+                <a:ea typeface="メイリオ" pitchFamily="34" charset="-122"/>
+                <a:cs typeface="メイリオ" pitchFamily="34" charset="-120"/>
+              </a:rPr>
+              <a:t>　①　自己肯定感</a:t>
+            </a:r>
+            <a:endParaRPr lang="en-US" sz="3000" dirty="0"/>
+          </a:p>
+        </p:txBody>
+      </p:sp>
+      <p:sp>
+        <p:nvSpPr>
+          <p:cNvPr id="3" name="Text 1"/>
+          <p:cNvSpPr txBox="1"/>
+          <p:nvPr/>
+        </p:nvSpPr>
+        <p:spPr>
+          <a:xfrm>
+            <a:off x="475488" y="1481328"/>
+            <a:ext cx="8193024" cy="1005840"/>
+          </a:xfrm>
+          <a:prstGeom prst="rect">
+            <a:avLst/>
+          </a:prstGeom>
+          <a:noFill/>
+          <a:ln/>
+        </p:spPr>
+        <p:txBody>
+          <a:bodyPr wrap="square" lIns="0" tIns="0" rIns="0" bIns="0" rtlCol="0" anchor="t"/>
+          <a:lstStyle/>
+          <a:p>
+            <a:pPr algn="l" indent="0" marL="0">
+              <a:lnSpc>
+                <a:spcPct val="120000"/>
+              </a:lnSpc>
+              <a:buNone/>
+            </a:pPr>
+            <a:r>
+              <a:rPr lang="en-US" sz="2400" b="1" dirty="0">
+                <a:solidFill>
+                  <a:srgbClr val="595959"/>
+                </a:solidFill>
+                <a:latin typeface="メイリオ" pitchFamily="34" charset="0"/>
+                <a:ea typeface="メイリオ" pitchFamily="34" charset="-122"/>
+                <a:cs typeface="メイリオ" pitchFamily="34" charset="-120"/>
+              </a:rPr>
+              <a:t>これからの時代、学力向上の基盤となるのは</a:t>
+            </a:r>
+            <a:endParaRPr lang="en-US" sz="2400" dirty="0"/>
+          </a:p>
+          <a:p>
+            <a:pPr algn="l" indent="0" marL="0">
+              <a:lnSpc>
+                <a:spcPct val="120000"/>
+              </a:lnSpc>
+              <a:buNone/>
+            </a:pPr>
+            <a:r>
+              <a:rPr lang="en-US" sz="2400" b="1" dirty="0">
+                <a:solidFill>
+                  <a:srgbClr val="595959"/>
+                </a:solidFill>
+                <a:latin typeface="メイリオ" pitchFamily="34" charset="0"/>
+                <a:ea typeface="メイリオ" pitchFamily="34" charset="-122"/>
+                <a:cs typeface="メイリオ" pitchFamily="34" charset="-120"/>
+              </a:rPr>
+              <a:t>　</a:t>
+            </a:r>
+            <a:pPr algn="l" indent="0" marL="0">
+              <a:lnSpc>
+                <a:spcPct val="120000"/>
+              </a:lnSpc>
+              <a:buNone/>
+            </a:pPr>
+            <a:r>
+              <a:rPr lang="en-US" sz="2400" b="1" dirty="0">
+                <a:solidFill>
+                  <a:srgbClr val="EE7B08"/>
+                </a:solidFill>
+                <a:latin typeface="メイリオ" pitchFamily="34" charset="0"/>
+                <a:ea typeface="メイリオ" pitchFamily="34" charset="-122"/>
+                <a:cs typeface="メイリオ" pitchFamily="34" charset="-120"/>
+              </a:rPr>
+              <a:t>自己肯定感</a:t>
+            </a:r>
+            <a:pPr algn="l" indent="0" marL="0">
+              <a:lnSpc>
+                <a:spcPct val="120000"/>
+              </a:lnSpc>
+              <a:buNone/>
+            </a:pPr>
+            <a:r>
+              <a:rPr lang="en-US" sz="2400" b="1" dirty="0">
+                <a:solidFill>
+                  <a:srgbClr val="595959"/>
+                </a:solidFill>
+                <a:latin typeface="メイリオ" pitchFamily="34" charset="0"/>
+                <a:ea typeface="メイリオ" pitchFamily="34" charset="-122"/>
+                <a:cs typeface="メイリオ" pitchFamily="34" charset="-120"/>
+              </a:rPr>
+              <a:t>である。</a:t>
+            </a:r>
+            <a:endParaRPr lang="en-US" sz="2400" dirty="0"/>
+          </a:p>
+        </p:txBody>
+      </p:sp>
+      <p:sp>
+        <p:nvSpPr>
+          <p:cNvPr id="4" name="Shape 2"/>
           <p:cNvSpPr/>
           <p:nvPr/>
         </p:nvSpPr>
         <p:spPr>
           <a:xfrm>
-            <a:off x="640080" y="822960"/>
-            <a:ext cx="548640" cy="548640"/>
-          </a:xfrm>
-          <a:prstGeom prst="ellipse">
-            <a:avLst/>
-          </a:prstGeom>
-          <a:solidFill>
-            <a:srgbClr val="EB6C15"/>
-          </a:solidFill>
-          <a:ln/>
-        </p:spPr>
-      </p:sp>
-      <p:sp>
-        <p:nvSpPr>
-          <p:cNvPr id="4" name="Text 2"/>
-          <p:cNvSpPr txBox="1"/>
-          <p:nvPr/>
-        </p:nvSpPr>
-        <p:spPr>
-          <a:xfrm>
-            <a:off x="640080" y="822960"/>
-            <a:ext cx="548640" cy="548640"/>
-          </a:xfrm>
-          <a:prstGeom prst="rect">
-            <a:avLst/>
-          </a:prstGeom>
-          <a:noFill/>
-          <a:ln/>
-        </p:spPr>
-        <p:txBody>
-          <a:bodyPr wrap="square" lIns="0" tIns="0" rIns="0" bIns="0" rtlCol="0" anchor="ctr"/>
-          <a:lstStyle/>
-          <a:p>
-            <a:pPr algn="ctr" indent="0" marL="0">
-              <a:buNone/>
-            </a:pPr>
-            <a:r>
-              <a:rPr lang="en-US" sz="2800" b="1" dirty="0">
-                <a:solidFill>
-                  <a:srgbClr val="FFFFFF"/>
-                </a:solidFill>
-                <a:latin typeface="Meiryo" pitchFamily="34" charset="0"/>
-                <a:ea typeface="Meiryo" pitchFamily="34" charset="-122"/>
-                <a:cs typeface="Meiryo" pitchFamily="34" charset="-120"/>
-              </a:rPr>
-              <a:t>①</a:t>
-            </a:r>
-            <a:endParaRPr lang="en-US" sz="2800" dirty="0"/>
-          </a:p>
-        </p:txBody>
-      </p:sp>
-      <p:sp>
-        <p:nvSpPr>
-          <p:cNvPr id="5" name="Text 3"/>
-          <p:cNvSpPr txBox="1"/>
-          <p:nvPr/>
-        </p:nvSpPr>
-        <p:spPr>
-          <a:xfrm>
-            <a:off x="1325880" y="822960"/>
-            <a:ext cx="7406640" cy="548640"/>
-          </a:xfrm>
-          <a:prstGeom prst="rect">
-            <a:avLst/>
-          </a:prstGeom>
-          <a:noFill/>
-          <a:ln/>
-        </p:spPr>
-        <p:txBody>
-          <a:bodyPr wrap="square" lIns="0" tIns="0" rIns="0" bIns="0" rtlCol="0" anchor="ctr"/>
-          <a:lstStyle/>
-          <a:p>
-            <a:pPr algn="l" indent="0" marL="0">
-              <a:buNone/>
-            </a:pPr>
-            <a:r>
-              <a:rPr lang="en-US" sz="2400" b="1" dirty="0">
-                <a:solidFill>
-                  <a:srgbClr val="00B0F0"/>
-                </a:solidFill>
-                <a:latin typeface="Meiryo" pitchFamily="34" charset="0"/>
-                <a:ea typeface="Meiryo" pitchFamily="34" charset="-122"/>
-                <a:cs typeface="Meiryo" pitchFamily="34" charset="-120"/>
-              </a:rPr>
-              <a:t>今日の授業から見えたもの　自己肯定感</a:t>
-            </a:r>
-            <a:endParaRPr lang="en-US" sz="2400" dirty="0"/>
-          </a:p>
-        </p:txBody>
-      </p:sp>
-      <p:sp>
-        <p:nvSpPr>
-          <p:cNvPr id="6" name="Text 4"/>
-          <p:cNvSpPr txBox="1"/>
-          <p:nvPr/>
-        </p:nvSpPr>
-        <p:spPr>
-          <a:xfrm>
-            <a:off x="640080" y="1627632"/>
-            <a:ext cx="8046720" cy="1005840"/>
-          </a:xfrm>
-          <a:prstGeom prst="rect">
-            <a:avLst/>
-          </a:prstGeom>
-          <a:noFill/>
-          <a:ln/>
-        </p:spPr>
-        <p:txBody>
-          <a:bodyPr wrap="square" lIns="0" tIns="0" rIns="0" bIns="0" rtlCol="0" anchor="t"/>
-          <a:lstStyle/>
-          <a:p>
-            <a:pPr algn="l" indent="0" marL="0">
-              <a:lnSpc>
-                <a:spcPct val="140000"/>
-              </a:lnSpc>
-              <a:buNone/>
-            </a:pPr>
-            <a:r>
-              <a:rPr lang="en-US" sz="2600" b="1" dirty="0">
-                <a:solidFill>
-                  <a:srgbClr val="1A1A1A"/>
-                </a:solidFill>
-                <a:latin typeface="Meiryo" pitchFamily="34" charset="0"/>
-                <a:ea typeface="Meiryo" pitchFamily="34" charset="-122"/>
-                <a:cs typeface="Meiryo" pitchFamily="34" charset="-120"/>
-              </a:rPr>
-              <a:t>これからの時代、学力向上の基盤となるのは</a:t>
-            </a:r>
-            <a:endParaRPr lang="en-US" sz="2600" dirty="0"/>
-          </a:p>
-          <a:p>
-            <a:pPr algn="l" indent="0" marL="0">
-              <a:lnSpc>
-                <a:spcPct val="140000"/>
-              </a:lnSpc>
-              <a:buNone/>
-            </a:pPr>
-            <a:r>
-              <a:rPr lang="en-US" sz="2600" b="1" dirty="0">
-                <a:solidFill>
-                  <a:srgbClr val="1A1A1A"/>
-                </a:solidFill>
-                <a:latin typeface="Meiryo" pitchFamily="34" charset="0"/>
-                <a:ea typeface="Meiryo" pitchFamily="34" charset="-122"/>
-                <a:cs typeface="Meiryo" pitchFamily="34" charset="-120"/>
-              </a:rPr>
-              <a:t>　</a:t>
-            </a:r>
-            <a:pPr algn="l" indent="0" marL="0">
-              <a:lnSpc>
-                <a:spcPct val="140000"/>
-              </a:lnSpc>
-              <a:buNone/>
-            </a:pPr>
-            <a:r>
-              <a:rPr lang="en-US" sz="2600" b="1" dirty="0">
-                <a:solidFill>
-                  <a:srgbClr val="EB6C15"/>
-                </a:solidFill>
-                <a:latin typeface="Meiryo" pitchFamily="34" charset="0"/>
-                <a:ea typeface="Meiryo" pitchFamily="34" charset="-122"/>
-                <a:cs typeface="Meiryo" pitchFamily="34" charset="-120"/>
-              </a:rPr>
-              <a:t>自己肯定感</a:t>
-            </a:r>
-            <a:pPr algn="l" indent="0" marL="0">
-              <a:lnSpc>
-                <a:spcPct val="140000"/>
-              </a:lnSpc>
-              <a:buNone/>
-            </a:pPr>
-            <a:r>
-              <a:rPr lang="en-US" sz="2600" b="1" dirty="0">
-                <a:solidFill>
-                  <a:srgbClr val="1A1A1A"/>
-                </a:solidFill>
-                <a:latin typeface="Meiryo" pitchFamily="34" charset="0"/>
-                <a:ea typeface="Meiryo" pitchFamily="34" charset="-122"/>
-                <a:cs typeface="Meiryo" pitchFamily="34" charset="-120"/>
-              </a:rPr>
-              <a:t>である。</a:t>
-            </a:r>
-            <a:endParaRPr lang="en-US" sz="2600" dirty="0"/>
-          </a:p>
-        </p:txBody>
-      </p:sp>
-      <p:sp>
-        <p:nvSpPr>
-          <p:cNvPr id="7" name="Shape 5"/>
-          <p:cNvSpPr/>
-          <p:nvPr/>
-        </p:nvSpPr>
-        <p:spPr>
-          <a:xfrm>
-            <a:off x="640080" y="2834640"/>
-            <a:ext cx="7863840" cy="1691640"/>
+            <a:off x="475488" y="2697480"/>
+            <a:ext cx="8193024" cy="1737360"/>
           </a:xfrm>
           <a:prstGeom prst="roundRect">
             <a:avLst>
-              <a:gd name="adj" fmla="val 4324"/>
+              <a:gd name="adj" fmla="val 3158"/>
             </a:avLst>
           </a:prstGeom>
           <a:solidFill>
-            <a:srgbClr val="EAF6FD"/>
+            <a:srgbClr val="E9F7F3"/>
           </a:solidFill>
           <a:ln w="12700">
             <a:solidFill>
-              <a:srgbClr val="C9E6F5"/>
+              <a:srgbClr val="B9E5DA"/>
             </a:solidFill>
             <a:prstDash val="solid"/>
           </a:ln>
@@ -8068,14 +8000,14 @@
       </p:sp>
       <p:sp>
         <p:nvSpPr>
-          <p:cNvPr id="8" name="Text 6"/>
+          <p:cNvPr id="5" name="Text 3"/>
           <p:cNvSpPr txBox="1"/>
           <p:nvPr/>
         </p:nvSpPr>
         <p:spPr>
           <a:xfrm>
-            <a:off x="914400" y="2999232"/>
-            <a:ext cx="7315200" cy="1371600"/>
+            <a:off x="731520" y="2852928"/>
+            <a:ext cx="7680960" cy="1417320"/>
           </a:xfrm>
           <a:prstGeom prst="rect">
             <a:avLst/>
@@ -8089,62 +8021,62 @@
           <a:p>
             <a:pPr algn="l" indent="0" marL="0">
               <a:lnSpc>
-                <a:spcPct val="135000"/>
-              </a:lnSpc>
-              <a:buNone/>
-            </a:pPr>
-            <a:r>
-              <a:rPr lang="en-US" sz="1800" b="1" dirty="0">
-                <a:solidFill>
-                  <a:srgbClr val="00B0F0"/>
-                </a:solidFill>
-                <a:latin typeface="Meiryo" pitchFamily="34" charset="0"/>
-                <a:ea typeface="Meiryo" pitchFamily="34" charset="-122"/>
-                <a:cs typeface="Meiryo" pitchFamily="34" charset="-120"/>
+                <a:spcPct val="130000"/>
+              </a:lnSpc>
+              <a:buNone/>
+            </a:pPr>
+            <a:r>
+              <a:rPr lang="en-US" sz="1700" b="1" dirty="0">
+                <a:solidFill>
+                  <a:srgbClr val="44C1A3"/>
+                </a:solidFill>
+                <a:latin typeface="メイリオ" pitchFamily="34" charset="0"/>
+                <a:ea typeface="メイリオ" pitchFamily="34" charset="-122"/>
+                <a:cs typeface="メイリオ" pitchFamily="34" charset="-120"/>
               </a:rPr>
               <a:t>自己肯定感とは</a:t>
             </a:r>
-            <a:endParaRPr lang="en-US" sz="1800" dirty="0"/>
-          </a:p>
-          <a:p>
-            <a:pPr algn="l" indent="0" marL="0">
-              <a:lnSpc>
-                <a:spcPct val="135000"/>
+            <a:endParaRPr lang="en-US" sz="1700" dirty="0"/>
+          </a:p>
+          <a:p>
+            <a:pPr algn="l" indent="0" marL="0">
+              <a:lnSpc>
+                <a:spcPct val="130000"/>
               </a:lnSpc>
               <a:buNone/>
             </a:pPr>
             <a:r>
               <a:rPr lang="en-US" sz="2200" b="1" dirty="0">
                 <a:solidFill>
-                  <a:srgbClr val="1A1A1A"/>
-                </a:solidFill>
-                <a:latin typeface="Meiryo" pitchFamily="34" charset="0"/>
-                <a:ea typeface="Meiryo" pitchFamily="34" charset="-122"/>
-                <a:cs typeface="Meiryo" pitchFamily="34" charset="-120"/>
+                  <a:srgbClr val="595959"/>
+                </a:solidFill>
+                <a:latin typeface="メイリオ" pitchFamily="34" charset="0"/>
+                <a:ea typeface="メイリオ" pitchFamily="34" charset="-122"/>
+                <a:cs typeface="メイリオ" pitchFamily="34" charset="-120"/>
               </a:rPr>
               <a:t>「できる子になる」ことではなく、</a:t>
             </a:r>
-            <a:endParaRPr lang="en-US" sz="1800" dirty="0"/>
-          </a:p>
-          <a:p>
-            <a:pPr algn="l" indent="0" marL="0">
-              <a:lnSpc>
-                <a:spcPct val="135000"/>
+            <a:endParaRPr lang="en-US" sz="1700" dirty="0"/>
+          </a:p>
+          <a:p>
+            <a:pPr algn="l" indent="0" marL="0">
+              <a:lnSpc>
+                <a:spcPct val="130000"/>
               </a:lnSpc>
               <a:buNone/>
             </a:pPr>
             <a:r>
               <a:rPr lang="en-US" sz="2200" b="1" dirty="0">
                 <a:solidFill>
-                  <a:srgbClr val="EB6C15"/>
-                </a:solidFill>
-                <a:latin typeface="Meiryo" pitchFamily="34" charset="0"/>
-                <a:ea typeface="Meiryo" pitchFamily="34" charset="-122"/>
-                <a:cs typeface="Meiryo" pitchFamily="34" charset="-120"/>
+                  <a:srgbClr val="EE7B08"/>
+                </a:solidFill>
+                <a:latin typeface="メイリオ" pitchFamily="34" charset="0"/>
+                <a:ea typeface="メイリオ" pitchFamily="34" charset="-122"/>
+                <a:cs typeface="メイリオ" pitchFamily="34" charset="-120"/>
               </a:rPr>
               <a:t>「成長できる自分を信じること」である。</a:t>
             </a:r>
-            <a:endParaRPr lang="en-US" sz="1800" dirty="0"/>
+            <a:endParaRPr lang="en-US" sz="1700" dirty="0"/>
           </a:p>
         </p:txBody>
       </p:sp>
@@ -8181,14 +8113,14 @@
         </p:nvSpPr>
         <p:spPr>
           <a:xfrm>
-            <a:off x="0" y="0"/>
-            <a:ext cx="9144000" cy="576072"/>
+            <a:off x="0" y="-9144"/>
+            <a:ext cx="9144000" cy="1161288"/>
           </a:xfrm>
           <a:prstGeom prst="rect">
             <a:avLst/>
           </a:prstGeom>
           <a:solidFill>
-            <a:srgbClr val="00B0F0"/>
+            <a:srgbClr val="44C1A3"/>
           </a:solidFill>
           <a:ln/>
         </p:spPr>
@@ -8197,6 +8129,29 @@
           <a:lstStyle/>
           <a:p>
             <a:pPr algn="l" indent="0" marL="0">
+              <a:lnSpc>
+                <a:spcPct val="120000"/>
+              </a:lnSpc>
+              <a:buNone/>
+            </a:pPr>
+            <a:r>
+              <a:rPr lang="en-US" sz="3000" b="1" dirty="0">
+                <a:solidFill>
+                  <a:srgbClr val="FFFFFF"/>
+                </a:solidFill>
+                <a:latin typeface="メイリオ" pitchFamily="34" charset="0"/>
+                <a:ea typeface="メイリオ" pitchFamily="34" charset="-122"/>
+                <a:cs typeface="メイリオ" pitchFamily="34" charset="-120"/>
+              </a:rPr>
+              <a:t>　２　５校時の授業について</a:t>
+            </a:r>
+            <a:endParaRPr lang="en-US" sz="3000" dirty="0"/>
+          </a:p>
+          <a:p>
+            <a:pPr algn="l" indent="0" marL="0">
+              <a:lnSpc>
+                <a:spcPct val="120000"/>
+              </a:lnSpc>
               <a:buNone/>
             </a:pPr>
             <a:r>
@@ -8204,77 +8159,38 @@
                 <a:solidFill>
                   <a:srgbClr val="FFFFFF"/>
                 </a:solidFill>
-                <a:latin typeface="Meiryo" pitchFamily="34" charset="0"/>
-                <a:ea typeface="Meiryo" pitchFamily="34" charset="-122"/>
-                <a:cs typeface="Meiryo" pitchFamily="34" charset="-120"/>
-              </a:rPr>
-              <a:t>　２　５校時の授業について</a:t>
-            </a:r>
-            <a:endParaRPr lang="en-US" sz="2800" dirty="0"/>
-          </a:p>
-        </p:txBody>
-      </p:sp>
-      <p:sp>
-        <p:nvSpPr>
-          <p:cNvPr id="3" name="Text 1"/>
-          <p:cNvSpPr txBox="1"/>
-          <p:nvPr/>
-        </p:nvSpPr>
-        <p:spPr>
-          <a:xfrm>
-            <a:off x="640080" y="713232"/>
-            <a:ext cx="8046720" cy="411480"/>
-          </a:xfrm>
-          <a:prstGeom prst="rect">
-            <a:avLst/>
-          </a:prstGeom>
-          <a:noFill/>
-          <a:ln/>
-        </p:spPr>
-        <p:txBody>
-          <a:bodyPr wrap="square" lIns="0" tIns="0" rIns="0" bIns="0" rtlCol="0" anchor="ctr"/>
-          <a:lstStyle/>
-          <a:p>
-            <a:pPr algn="l" indent="0" marL="0">
-              <a:buNone/>
-            </a:pPr>
-            <a:r>
-              <a:rPr lang="en-US" sz="2100" b="1" dirty="0">
-                <a:solidFill>
-                  <a:srgbClr val="00B0F0"/>
-                </a:solidFill>
-                <a:latin typeface="Meiryo" pitchFamily="34" charset="0"/>
-                <a:ea typeface="Meiryo" pitchFamily="34" charset="-122"/>
-                <a:cs typeface="Meiryo" pitchFamily="34" charset="-120"/>
-              </a:rPr>
-              <a:t>① 自己肯定感を育む授業</a:t>
-            </a:r>
-            <a:endParaRPr lang="en-US" sz="2100" dirty="0"/>
-          </a:p>
-        </p:txBody>
-      </p:sp>
-      <p:sp>
-        <p:nvSpPr>
-          <p:cNvPr id="4" name="Shape 2"/>
+                <a:latin typeface="メイリオ" pitchFamily="34" charset="0"/>
+                <a:ea typeface="メイリオ" pitchFamily="34" charset="-122"/>
+                <a:cs typeface="メイリオ" pitchFamily="34" charset="-120"/>
+              </a:rPr>
+              <a:t>　①　自己肯定感を育む授業</a:t>
+            </a:r>
+            <a:endParaRPr lang="en-US" sz="3000" dirty="0"/>
+          </a:p>
+        </p:txBody>
+      </p:sp>
+      <p:sp>
+        <p:nvSpPr>
+          <p:cNvPr id="3" name="Shape 1"/>
           <p:cNvSpPr/>
           <p:nvPr/>
         </p:nvSpPr>
         <p:spPr>
           <a:xfrm>
-            <a:off x="320040" y="1207008"/>
-            <a:ext cx="2651760" cy="2377440"/>
+            <a:off x="320040" y="1417320"/>
+            <a:ext cx="2697480" cy="2395728"/>
           </a:xfrm>
           <a:prstGeom prst="roundRect">
             <a:avLst>
-              <a:gd name="adj" fmla="val 3077"/>
+              <a:gd name="adj" fmla="val 2290"/>
             </a:avLst>
           </a:prstGeom>
           <a:solidFill>
-            <a:srgbClr val="EAF6FD"/>
+            <a:srgbClr val="E9F7F3"/>
           </a:solidFill>
           <a:ln w="12700">
             <a:solidFill>
-              <a:srgbClr val="C9E6F5"/>
+              <a:srgbClr val="B9E5DA"/>
             </a:solidFill>
             <a:prstDash val="solid"/>
           </a:ln>
@@ -8282,14 +8198,53 @@
       </p:sp>
       <p:sp>
         <p:nvSpPr>
+          <p:cNvPr id="4" name="Text 2"/>
+          <p:cNvSpPr txBox="1"/>
+          <p:nvPr/>
+        </p:nvSpPr>
+        <p:spPr>
+          <a:xfrm>
+            <a:off x="466344" y="1527048"/>
+            <a:ext cx="2404872" cy="274320"/>
+          </a:xfrm>
+          <a:prstGeom prst="rect">
+            <a:avLst/>
+          </a:prstGeom>
+          <a:noFill/>
+          <a:ln/>
+        </p:spPr>
+        <p:txBody>
+          <a:bodyPr wrap="square" lIns="0" tIns="0" rIns="0" bIns="0" rtlCol="0" anchor="ctr"/>
+          <a:lstStyle/>
+          <a:p>
+            <a:pPr algn="l" indent="0" marL="0">
+              <a:buNone/>
+            </a:pPr>
+            <a:r>
+              <a:rPr lang="en-US" sz="1600" b="1" dirty="0">
+                <a:solidFill>
+                  <a:srgbClr val="44C1A3"/>
+                </a:solidFill>
+                <a:latin typeface="メイリオ" pitchFamily="34" charset="0"/>
+                <a:ea typeface="メイリオ" pitchFamily="34" charset="-122"/>
+                <a:cs typeface="メイリオ" pitchFamily="34" charset="-120"/>
+              </a:rPr>
+              <a:t>田口　和磨　先生</a:t>
+            </a:r>
+            <a:endParaRPr lang="en-US" sz="1600" dirty="0"/>
+          </a:p>
+        </p:txBody>
+      </p:sp>
+      <p:sp>
+        <p:nvSpPr>
           <p:cNvPr id="5" name="Text 3"/>
           <p:cNvSpPr txBox="1"/>
           <p:nvPr/>
         </p:nvSpPr>
         <p:spPr>
           <a:xfrm>
-            <a:off x="466344" y="1325880"/>
-            <a:ext cx="2359152" cy="274320"/>
+            <a:off x="466344" y="1801368"/>
+            <a:ext cx="2404872" cy="237744"/>
           </a:xfrm>
           <a:prstGeom prst="rect">
             <a:avLst/>
@@ -8305,17 +8260,17 @@
               <a:buNone/>
             </a:pPr>
             <a:r>
-              <a:rPr lang="en-US" sz="1600" b="1" dirty="0">
-                <a:solidFill>
-                  <a:srgbClr val="00B0F0"/>
-                </a:solidFill>
-                <a:latin typeface="Meiryo" pitchFamily="34" charset="0"/>
-                <a:ea typeface="Meiryo" pitchFamily="34" charset="-122"/>
-                <a:cs typeface="Meiryo" pitchFamily="34" charset="-120"/>
-              </a:rPr>
-              <a:t>田口　和磨　先生</a:t>
-            </a:r>
-            <a:endParaRPr lang="en-US" sz="1600" dirty="0"/>
+              <a:rPr lang="en-US" sz="1100" b="1" dirty="0">
+                <a:solidFill>
+                  <a:srgbClr val="808080"/>
+                </a:solidFill>
+                <a:latin typeface="メイリオ" pitchFamily="34" charset="0"/>
+                <a:ea typeface="メイリオ" pitchFamily="34" charset="-122"/>
+                <a:cs typeface="メイリオ" pitchFamily="34" charset="-120"/>
+              </a:rPr>
+              <a:t>保健体育・９年ＡＢ組／水泳</a:t>
+            </a:r>
+            <a:endParaRPr lang="en-US" sz="1100" dirty="0"/>
           </a:p>
         </p:txBody>
       </p:sp>
@@ -8327,8 +8282,8 @@
         </p:nvSpPr>
         <p:spPr>
           <a:xfrm>
-            <a:off x="466344" y="1600200"/>
-            <a:ext cx="2359152" cy="237744"/>
+            <a:off x="466344" y="2075688"/>
+            <a:ext cx="2404872" cy="1609344"/>
           </a:xfrm>
           <a:prstGeom prst="rect">
             <a:avLst/>
@@ -8337,45 +8292,6 @@
           <a:ln/>
         </p:spPr>
         <p:txBody>
-          <a:bodyPr wrap="square" lIns="0" tIns="0" rIns="0" bIns="0" rtlCol="0" anchor="ctr"/>
-          <a:lstStyle/>
-          <a:p>
-            <a:pPr algn="l" indent="0" marL="0">
-              <a:buNone/>
-            </a:pPr>
-            <a:r>
-              <a:rPr lang="en-US" sz="1100" b="1" dirty="0">
-                <a:solidFill>
-                  <a:srgbClr val="595959"/>
-                </a:solidFill>
-                <a:latin typeface="Meiryo" pitchFamily="34" charset="0"/>
-                <a:ea typeface="Meiryo" pitchFamily="34" charset="-122"/>
-                <a:cs typeface="Meiryo" pitchFamily="34" charset="-120"/>
-              </a:rPr>
-              <a:t>保健体育・９年ＡＢ組／水泳</a:t>
-            </a:r>
-            <a:endParaRPr lang="en-US" sz="1100" dirty="0"/>
-          </a:p>
-        </p:txBody>
-      </p:sp>
-      <p:sp>
-        <p:nvSpPr>
-          <p:cNvPr id="7" name="Text 5"/>
-          <p:cNvSpPr txBox="1"/>
-          <p:nvPr/>
-        </p:nvSpPr>
-        <p:spPr>
-          <a:xfrm>
-            <a:off x="466344" y="1883664"/>
-            <a:ext cx="2359152" cy="1572768"/>
-          </a:xfrm>
-          <a:prstGeom prst="rect">
-            <a:avLst/>
-          </a:prstGeom>
-          <a:noFill/>
-          <a:ln/>
-        </p:spPr>
-        <p:txBody>
           <a:bodyPr wrap="square" lIns="0" tIns="0" rIns="0" bIns="0" rtlCol="0" anchor="t"/>
           <a:lstStyle/>
           <a:p>
@@ -8388,11 +8304,11 @@
             <a:r>
               <a:rPr lang="en-US" sz="1350" b="1" dirty="0">
                 <a:solidFill>
-                  <a:srgbClr val="1A1A1A"/>
-                </a:solidFill>
-                <a:latin typeface="Meiryo" pitchFamily="34" charset="0"/>
-                <a:ea typeface="Meiryo" pitchFamily="34" charset="-122"/>
-                <a:cs typeface="Meiryo" pitchFamily="34" charset="-120"/>
+                  <a:srgbClr val="595959"/>
+                </a:solidFill>
+                <a:latin typeface="メイリオ" pitchFamily="34" charset="0"/>
+                <a:ea typeface="メイリオ" pitchFamily="34" charset="-122"/>
+                <a:cs typeface="メイリオ" pitchFamily="34" charset="-120"/>
               </a:rPr>
               <a:t>泳力差の大きい集団に</a:t>
             </a:r>
@@ -8408,11 +8324,11 @@
             <a:r>
               <a:rPr lang="en-US" sz="1350" b="1" dirty="0">
                 <a:solidFill>
-                  <a:srgbClr val="EB6C15"/>
-                </a:solidFill>
-                <a:latin typeface="Meiryo" pitchFamily="34" charset="0"/>
-                <a:ea typeface="Meiryo" pitchFamily="34" charset="-122"/>
-                <a:cs typeface="Meiryo" pitchFamily="34" charset="-120"/>
+                  <a:srgbClr val="EE7B08"/>
+                </a:solidFill>
+                <a:latin typeface="メイリオ" pitchFamily="34" charset="0"/>
+                <a:ea typeface="メイリオ" pitchFamily="34" charset="-122"/>
+                <a:cs typeface="メイリオ" pitchFamily="34" charset="-120"/>
               </a:rPr>
               <a:t>・段階的な課題設定</a:t>
             </a:r>
@@ -8428,11 +8344,11 @@
             <a:r>
               <a:rPr lang="en-US" sz="1350" b="1" dirty="0">
                 <a:solidFill>
-                  <a:srgbClr val="EB6C15"/>
-                </a:solidFill>
-                <a:latin typeface="Meiryo" pitchFamily="34" charset="0"/>
-                <a:ea typeface="Meiryo" pitchFamily="34" charset="-122"/>
-                <a:cs typeface="Meiryo" pitchFamily="34" charset="-120"/>
+                  <a:srgbClr val="EE7B08"/>
+                </a:solidFill>
+                <a:latin typeface="メイリオ" pitchFamily="34" charset="0"/>
+                <a:ea typeface="メイリオ" pitchFamily="34" charset="-122"/>
+                <a:cs typeface="メイリオ" pitchFamily="34" charset="-120"/>
               </a:rPr>
               <a:t>・泳力別のコース編成</a:t>
             </a:r>
@@ -8448,11 +8364,11 @@
             <a:r>
               <a:rPr lang="en-US" sz="1350" b="1" dirty="0">
                 <a:solidFill>
-                  <a:srgbClr val="EB6C15"/>
-                </a:solidFill>
-                <a:latin typeface="Meiryo" pitchFamily="34" charset="0"/>
-                <a:ea typeface="Meiryo" pitchFamily="34" charset="-122"/>
-                <a:cs typeface="Meiryo" pitchFamily="34" charset="-120"/>
+                  <a:srgbClr val="EE7B08"/>
+                </a:solidFill>
+                <a:latin typeface="メイリオ" pitchFamily="34" charset="0"/>
+                <a:ea typeface="メイリオ" pitchFamily="34" charset="-122"/>
+                <a:cs typeface="メイリオ" pitchFamily="34" charset="-120"/>
               </a:rPr>
               <a:t>・バディでの確認活動</a:t>
             </a:r>
@@ -8468,11 +8384,11 @@
             <a:r>
               <a:rPr lang="en-US" sz="1350" b="1" dirty="0">
                 <a:solidFill>
-                  <a:srgbClr val="1A1A1A"/>
-                </a:solidFill>
-                <a:latin typeface="Meiryo" pitchFamily="34" charset="0"/>
-                <a:ea typeface="Meiryo" pitchFamily="34" charset="-122"/>
-                <a:cs typeface="Meiryo" pitchFamily="34" charset="-120"/>
+                  <a:srgbClr val="595959"/>
+                </a:solidFill>
+                <a:latin typeface="メイリオ" pitchFamily="34" charset="0"/>
+                <a:ea typeface="メイリオ" pitchFamily="34" charset="-122"/>
+                <a:cs typeface="メイリオ" pitchFamily="34" charset="-120"/>
               </a:rPr>
               <a:t>確認の視点を３点示し、</a:t>
             </a:r>
@@ -8488,11 +8404,11 @@
             <a:r>
               <a:rPr lang="en-US" sz="1350" b="1" dirty="0">
                 <a:solidFill>
-                  <a:srgbClr val="1A1A1A"/>
-                </a:solidFill>
-                <a:latin typeface="Meiryo" pitchFamily="34" charset="0"/>
-                <a:ea typeface="Meiryo" pitchFamily="34" charset="-122"/>
-                <a:cs typeface="Meiryo" pitchFamily="34" charset="-120"/>
+                  <a:srgbClr val="595959"/>
+                </a:solidFill>
+                <a:latin typeface="メイリオ" pitchFamily="34" charset="0"/>
+                <a:ea typeface="メイリオ" pitchFamily="34" charset="-122"/>
+                <a:cs typeface="メイリオ" pitchFamily="34" charset="-120"/>
               </a:rPr>
               <a:t>見る目を育てていた。</a:t>
             </a:r>
@@ -8502,26 +8418,26 @@
       </p:sp>
       <p:sp>
         <p:nvSpPr>
-          <p:cNvPr id="8" name="Shape 6"/>
+          <p:cNvPr id="7" name="Shape 5"/>
           <p:cNvSpPr/>
           <p:nvPr/>
         </p:nvSpPr>
         <p:spPr>
           <a:xfrm>
-            <a:off x="3246120" y="1207008"/>
-            <a:ext cx="2651760" cy="2377440"/>
+            <a:off x="3227832" y="1417320"/>
+            <a:ext cx="2697480" cy="2395728"/>
           </a:xfrm>
           <a:prstGeom prst="roundRect">
             <a:avLst>
-              <a:gd name="adj" fmla="val 3077"/>
+              <a:gd name="adj" fmla="val 2290"/>
             </a:avLst>
           </a:prstGeom>
           <a:solidFill>
-            <a:srgbClr val="EAF6FD"/>
+            <a:srgbClr val="E9F7F3"/>
           </a:solidFill>
           <a:ln w="12700">
             <a:solidFill>
-              <a:srgbClr val="C9E6F5"/>
+              <a:srgbClr val="B9E5DA"/>
             </a:solidFill>
             <a:prstDash val="solid"/>
           </a:ln>
@@ -8529,14 +8445,53 @@
       </p:sp>
       <p:sp>
         <p:nvSpPr>
+          <p:cNvPr id="8" name="Text 6"/>
+          <p:cNvSpPr txBox="1"/>
+          <p:nvPr/>
+        </p:nvSpPr>
+        <p:spPr>
+          <a:xfrm>
+            <a:off x="3374136" y="1527048"/>
+            <a:ext cx="2404872" cy="274320"/>
+          </a:xfrm>
+          <a:prstGeom prst="rect">
+            <a:avLst/>
+          </a:prstGeom>
+          <a:noFill/>
+          <a:ln/>
+        </p:spPr>
+        <p:txBody>
+          <a:bodyPr wrap="square" lIns="0" tIns="0" rIns="0" bIns="0" rtlCol="0" anchor="ctr"/>
+          <a:lstStyle/>
+          <a:p>
+            <a:pPr algn="l" indent="0" marL="0">
+              <a:buNone/>
+            </a:pPr>
+            <a:r>
+              <a:rPr lang="en-US" sz="1600" b="1" dirty="0">
+                <a:solidFill>
+                  <a:srgbClr val="44C1A3"/>
+                </a:solidFill>
+                <a:latin typeface="メイリオ" pitchFamily="34" charset="0"/>
+                <a:ea typeface="メイリオ" pitchFamily="34" charset="-122"/>
+                <a:cs typeface="メイリオ" pitchFamily="34" charset="-120"/>
+              </a:rPr>
+              <a:t>東海林　静江　先生</a:t>
+            </a:r>
+            <a:endParaRPr lang="en-US" sz="1600" dirty="0"/>
+          </a:p>
+        </p:txBody>
+      </p:sp>
+      <p:sp>
+        <p:nvSpPr>
           <p:cNvPr id="9" name="Text 7"/>
           <p:cNvSpPr txBox="1"/>
           <p:nvPr/>
         </p:nvSpPr>
         <p:spPr>
           <a:xfrm>
-            <a:off x="3392424" y="1325880"/>
-            <a:ext cx="2359152" cy="274320"/>
+            <a:off x="3374136" y="1801368"/>
+            <a:ext cx="2404872" cy="237744"/>
           </a:xfrm>
           <a:prstGeom prst="rect">
             <a:avLst/>
@@ -8552,17 +8507,17 @@
               <a:buNone/>
             </a:pPr>
             <a:r>
-              <a:rPr lang="en-US" sz="1600" b="1" dirty="0">
-                <a:solidFill>
-                  <a:srgbClr val="00B0F0"/>
-                </a:solidFill>
-                <a:latin typeface="Meiryo" pitchFamily="34" charset="0"/>
-                <a:ea typeface="Meiryo" pitchFamily="34" charset="-122"/>
-                <a:cs typeface="Meiryo" pitchFamily="34" charset="-120"/>
-              </a:rPr>
-              <a:t>東海林　静江　先生</a:t>
-            </a:r>
-            <a:endParaRPr lang="en-US" sz="1600" dirty="0"/>
+              <a:rPr lang="en-US" sz="1100" b="1" dirty="0">
+                <a:solidFill>
+                  <a:srgbClr val="808080"/>
+                </a:solidFill>
+                <a:latin typeface="メイリオ" pitchFamily="34" charset="0"/>
+                <a:ea typeface="メイリオ" pitchFamily="34" charset="-122"/>
+                <a:cs typeface="メイリオ" pitchFamily="34" charset="-120"/>
+              </a:rPr>
+              <a:t>道徳・特別支援学級Ｄ組／うそ</a:t>
+            </a:r>
+            <a:endParaRPr lang="en-US" sz="1100" dirty="0"/>
           </a:p>
         </p:txBody>
       </p:sp>
@@ -8574,8 +8529,8 @@
         </p:nvSpPr>
         <p:spPr>
           <a:xfrm>
-            <a:off x="3392424" y="1600200"/>
-            <a:ext cx="2359152" cy="237744"/>
+            <a:off x="3374136" y="2075688"/>
+            <a:ext cx="2404872" cy="1609344"/>
           </a:xfrm>
           <a:prstGeom prst="rect">
             <a:avLst/>
@@ -8584,45 +8539,6 @@
           <a:ln/>
         </p:spPr>
         <p:txBody>
-          <a:bodyPr wrap="square" lIns="0" tIns="0" rIns="0" bIns="0" rtlCol="0" anchor="ctr"/>
-          <a:lstStyle/>
-          <a:p>
-            <a:pPr algn="l" indent="0" marL="0">
-              <a:buNone/>
-            </a:pPr>
-            <a:r>
-              <a:rPr lang="en-US" sz="1100" b="1" dirty="0">
-                <a:solidFill>
-                  <a:srgbClr val="595959"/>
-                </a:solidFill>
-                <a:latin typeface="Meiryo" pitchFamily="34" charset="0"/>
-                <a:ea typeface="Meiryo" pitchFamily="34" charset="-122"/>
-                <a:cs typeface="Meiryo" pitchFamily="34" charset="-120"/>
-              </a:rPr>
-              <a:t>道徳・特別支援学級Ｄ組／うそ</a:t>
-            </a:r>
-            <a:endParaRPr lang="en-US" sz="1100" dirty="0"/>
-          </a:p>
-        </p:txBody>
-      </p:sp>
-      <p:sp>
-        <p:nvSpPr>
-          <p:cNvPr id="11" name="Text 9"/>
-          <p:cNvSpPr txBox="1"/>
-          <p:nvPr/>
-        </p:nvSpPr>
-        <p:spPr>
-          <a:xfrm>
-            <a:off x="3392424" y="1883664"/>
-            <a:ext cx="2359152" cy="1572768"/>
-          </a:xfrm>
-          <a:prstGeom prst="rect">
-            <a:avLst/>
-          </a:prstGeom>
-          <a:noFill/>
-          <a:ln/>
-        </p:spPr>
-        <p:txBody>
           <a:bodyPr wrap="square" lIns="0" tIns="0" rIns="0" bIns="0" rtlCol="0" anchor="t"/>
           <a:lstStyle/>
           <a:p>
@@ -8635,11 +8551,11 @@
             <a:r>
               <a:rPr lang="en-US" sz="1350" b="1" dirty="0">
                 <a:solidFill>
-                  <a:srgbClr val="1A1A1A"/>
-                </a:solidFill>
-                <a:latin typeface="Meiryo" pitchFamily="34" charset="0"/>
-                <a:ea typeface="Meiryo" pitchFamily="34" charset="-122"/>
-                <a:cs typeface="Meiryo" pitchFamily="34" charset="-120"/>
+                  <a:srgbClr val="595959"/>
+                </a:solidFill>
+                <a:latin typeface="メイリオ" pitchFamily="34" charset="0"/>
+                <a:ea typeface="メイリオ" pitchFamily="34" charset="-122"/>
+                <a:cs typeface="メイリオ" pitchFamily="34" charset="-120"/>
               </a:rPr>
               <a:t>安心して自分の考えを</a:t>
             </a:r>
@@ -8655,11 +8571,11 @@
             <a:r>
               <a:rPr lang="en-US" sz="1350" b="1" dirty="0">
                 <a:solidFill>
-                  <a:srgbClr val="EB6C15"/>
-                </a:solidFill>
-                <a:latin typeface="Meiryo" pitchFamily="34" charset="0"/>
-                <a:ea typeface="Meiryo" pitchFamily="34" charset="-122"/>
-                <a:cs typeface="Meiryo" pitchFamily="34" charset="-120"/>
+                  <a:srgbClr val="EE7B08"/>
+                </a:solidFill>
+                <a:latin typeface="メイリオ" pitchFamily="34" charset="0"/>
+                <a:ea typeface="メイリオ" pitchFamily="34" charset="-122"/>
+                <a:cs typeface="メイリオ" pitchFamily="34" charset="-120"/>
               </a:rPr>
               <a:t>表現できる環境</a:t>
             </a:r>
@@ -8675,11 +8591,11 @@
             <a:r>
               <a:rPr lang="en-US" sz="1350" b="1" dirty="0">
                 <a:solidFill>
-                  <a:srgbClr val="1A1A1A"/>
-                </a:solidFill>
-                <a:latin typeface="Meiryo" pitchFamily="34" charset="0"/>
-                <a:ea typeface="Meiryo" pitchFamily="34" charset="-122"/>
-                <a:cs typeface="Meiryo" pitchFamily="34" charset="-120"/>
+                  <a:srgbClr val="595959"/>
+                </a:solidFill>
+                <a:latin typeface="メイリオ" pitchFamily="34" charset="0"/>
+                <a:ea typeface="メイリオ" pitchFamily="34" charset="-122"/>
+                <a:cs typeface="メイリオ" pitchFamily="34" charset="-120"/>
               </a:rPr>
               <a:t>・前時の考えを尊重</a:t>
             </a:r>
@@ -8695,11 +8611,11 @@
             <a:r>
               <a:rPr lang="en-US" sz="1350" b="1" dirty="0">
                 <a:solidFill>
-                  <a:srgbClr val="EB6C15"/>
-                </a:solidFill>
-                <a:latin typeface="Meiryo" pitchFamily="34" charset="0"/>
-                <a:ea typeface="Meiryo" pitchFamily="34" charset="-122"/>
-                <a:cs typeface="Meiryo" pitchFamily="34" charset="-120"/>
+                  <a:srgbClr val="EE7B08"/>
+                </a:solidFill>
+                <a:latin typeface="メイリオ" pitchFamily="34" charset="0"/>
+                <a:ea typeface="メイリオ" pitchFamily="34" charset="-122"/>
+                <a:cs typeface="メイリオ" pitchFamily="34" charset="-120"/>
               </a:rPr>
               <a:t>・意見が変わってよい</a:t>
             </a:r>
@@ -8715,11 +8631,11 @@
             <a:r>
               <a:rPr lang="en-US" sz="1350" b="1" dirty="0">
                 <a:solidFill>
-                  <a:srgbClr val="1A1A1A"/>
-                </a:solidFill>
-                <a:latin typeface="Meiryo" pitchFamily="34" charset="0"/>
-                <a:ea typeface="Meiryo" pitchFamily="34" charset="-122"/>
-                <a:cs typeface="Meiryo" pitchFamily="34" charset="-120"/>
+                  <a:srgbClr val="595959"/>
+                </a:solidFill>
+                <a:latin typeface="メイリオ" pitchFamily="34" charset="0"/>
+                <a:ea typeface="メイリオ" pitchFamily="34" charset="-122"/>
+                <a:cs typeface="メイリオ" pitchFamily="34" charset="-120"/>
               </a:rPr>
               <a:t>答えは一つではないと</a:t>
             </a:r>
@@ -8735,11 +8651,11 @@
             <a:r>
               <a:rPr lang="en-US" sz="1350" b="1" dirty="0">
                 <a:solidFill>
-                  <a:srgbClr val="1A1A1A"/>
-                </a:solidFill>
-                <a:latin typeface="Meiryo" pitchFamily="34" charset="0"/>
-                <a:ea typeface="Meiryo" pitchFamily="34" charset="-122"/>
-                <a:cs typeface="Meiryo" pitchFamily="34" charset="-120"/>
+                  <a:srgbClr val="595959"/>
+                </a:solidFill>
+                <a:latin typeface="メイリオ" pitchFamily="34" charset="0"/>
+                <a:ea typeface="メイリオ" pitchFamily="34" charset="-122"/>
+                <a:cs typeface="メイリオ" pitchFamily="34" charset="-120"/>
               </a:rPr>
               <a:t>保障されていた。</a:t>
             </a:r>
@@ -8749,26 +8665,26 @@
       </p:sp>
       <p:sp>
         <p:nvSpPr>
-          <p:cNvPr id="12" name="Shape 10"/>
+          <p:cNvPr id="11" name="Shape 9"/>
           <p:cNvSpPr/>
           <p:nvPr/>
         </p:nvSpPr>
         <p:spPr>
           <a:xfrm>
-            <a:off x="6172200" y="1207008"/>
-            <a:ext cx="2651760" cy="2377440"/>
+            <a:off x="6135624" y="1417320"/>
+            <a:ext cx="2697480" cy="2395728"/>
           </a:xfrm>
           <a:prstGeom prst="roundRect">
             <a:avLst>
-              <a:gd name="adj" fmla="val 3077"/>
+              <a:gd name="adj" fmla="val 2290"/>
             </a:avLst>
           </a:prstGeom>
           <a:solidFill>
-            <a:srgbClr val="EAF6FD"/>
+            <a:srgbClr val="E9F7F3"/>
           </a:solidFill>
           <a:ln w="12700">
             <a:solidFill>
-              <a:srgbClr val="C9E6F5"/>
+              <a:srgbClr val="B9E5DA"/>
             </a:solidFill>
             <a:prstDash val="solid"/>
           </a:ln>
@@ -8776,14 +8692,53 @@
       </p:sp>
       <p:sp>
         <p:nvSpPr>
+          <p:cNvPr id="12" name="Text 10"/>
+          <p:cNvSpPr txBox="1"/>
+          <p:nvPr/>
+        </p:nvSpPr>
+        <p:spPr>
+          <a:xfrm>
+            <a:off x="6281928" y="1527048"/>
+            <a:ext cx="2404872" cy="274320"/>
+          </a:xfrm>
+          <a:prstGeom prst="rect">
+            <a:avLst/>
+          </a:prstGeom>
+          <a:noFill/>
+          <a:ln/>
+        </p:spPr>
+        <p:txBody>
+          <a:bodyPr wrap="square" lIns="0" tIns="0" rIns="0" bIns="0" rtlCol="0" anchor="ctr"/>
+          <a:lstStyle/>
+          <a:p>
+            <a:pPr algn="l" indent="0" marL="0">
+              <a:buNone/>
+            </a:pPr>
+            <a:r>
+              <a:rPr lang="en-US" sz="1600" b="1" dirty="0">
+                <a:solidFill>
+                  <a:srgbClr val="44C1A3"/>
+                </a:solidFill>
+                <a:latin typeface="メイリオ" pitchFamily="34" charset="0"/>
+                <a:ea typeface="メイリオ" pitchFamily="34" charset="-122"/>
+                <a:cs typeface="メイリオ" pitchFamily="34" charset="-120"/>
+              </a:rPr>
+              <a:t>塚本　瑞穂　先生</a:t>
+            </a:r>
+            <a:endParaRPr lang="en-US" sz="1600" dirty="0"/>
+          </a:p>
+        </p:txBody>
+      </p:sp>
+      <p:sp>
+        <p:nvSpPr>
           <p:cNvPr id="13" name="Text 11"/>
           <p:cNvSpPr txBox="1"/>
           <p:nvPr/>
         </p:nvSpPr>
         <p:spPr>
           <a:xfrm>
-            <a:off x="6318504" y="1325880"/>
-            <a:ext cx="2359152" cy="274320"/>
+            <a:off x="6281928" y="1801368"/>
+            <a:ext cx="2404872" cy="237744"/>
           </a:xfrm>
           <a:prstGeom prst="rect">
             <a:avLst/>
@@ -8799,17 +8754,17 @@
               <a:buNone/>
             </a:pPr>
             <a:r>
-              <a:rPr lang="en-US" sz="1600" b="1" dirty="0">
-                <a:solidFill>
-                  <a:srgbClr val="00B0F0"/>
-                </a:solidFill>
-                <a:latin typeface="Meiryo" pitchFamily="34" charset="0"/>
-                <a:ea typeface="Meiryo" pitchFamily="34" charset="-122"/>
-                <a:cs typeface="Meiryo" pitchFamily="34" charset="-120"/>
-              </a:rPr>
-              <a:t>塚本　瑞穂　先生</a:t>
-            </a:r>
-            <a:endParaRPr lang="en-US" sz="1600" dirty="0"/>
+              <a:rPr lang="en-US" sz="1100" b="1" dirty="0">
+                <a:solidFill>
+                  <a:srgbClr val="808080"/>
+                </a:solidFill>
+                <a:latin typeface="メイリオ" pitchFamily="34" charset="0"/>
+                <a:ea typeface="メイリオ" pitchFamily="34" charset="-122"/>
+                <a:cs typeface="メイリオ" pitchFamily="34" charset="-120"/>
+              </a:rPr>
+              <a:t>外国語・７年Ｂ組／Unit 4</a:t>
+            </a:r>
+            <a:endParaRPr lang="en-US" sz="1100" dirty="0"/>
           </a:p>
         </p:txBody>
       </p:sp>
@@ -8821,8 +8776,8 @@
         </p:nvSpPr>
         <p:spPr>
           <a:xfrm>
-            <a:off x="6318504" y="1600200"/>
-            <a:ext cx="2359152" cy="237744"/>
+            <a:off x="6281928" y="2075688"/>
+            <a:ext cx="2404872" cy="1609344"/>
           </a:xfrm>
           <a:prstGeom prst="rect">
             <a:avLst/>
@@ -8831,24 +8786,127 @@
           <a:ln/>
         </p:spPr>
         <p:txBody>
-          <a:bodyPr wrap="square" lIns="0" tIns="0" rIns="0" bIns="0" rtlCol="0" anchor="ctr"/>
-          <a:lstStyle/>
-          <a:p>
-            <a:pPr algn="l" indent="0" marL="0">
-              <a:buNone/>
-            </a:pPr>
-            <a:r>
-              <a:rPr lang="en-US" sz="1100" b="1" dirty="0">
-                <a:solidFill>
-                  <a:srgbClr val="595959"/>
-                </a:solidFill>
-                <a:latin typeface="Meiryo" pitchFamily="34" charset="0"/>
-                <a:ea typeface="Meiryo" pitchFamily="34" charset="-122"/>
-                <a:cs typeface="Meiryo" pitchFamily="34" charset="-120"/>
-              </a:rPr>
-              <a:t>外国語・７年Ｂ組／Unit 4</a:t>
-            </a:r>
-            <a:endParaRPr lang="en-US" sz="1100" dirty="0"/>
+          <a:bodyPr wrap="square" lIns="0" tIns="0" rIns="0" bIns="0" rtlCol="0" anchor="t"/>
+          <a:lstStyle/>
+          <a:p>
+            <a:pPr algn="l" indent="0" marL="0">
+              <a:lnSpc>
+                <a:spcPct val="125000"/>
+              </a:lnSpc>
+              <a:buNone/>
+            </a:pPr>
+            <a:r>
+              <a:rPr lang="en-US" sz="1350" b="1" dirty="0">
+                <a:solidFill>
+                  <a:srgbClr val="595959"/>
+                </a:solidFill>
+                <a:latin typeface="メイリオ" pitchFamily="34" charset="0"/>
+                <a:ea typeface="メイリオ" pitchFamily="34" charset="-122"/>
+                <a:cs typeface="メイリオ" pitchFamily="34" charset="-120"/>
+              </a:rPr>
+              <a:t>習熟度差の大きい学級で</a:t>
+            </a:r>
+            <a:endParaRPr lang="en-US" sz="1350" dirty="0"/>
+          </a:p>
+          <a:p>
+            <a:pPr algn="l" indent="0" marL="0">
+              <a:lnSpc>
+                <a:spcPct val="125000"/>
+              </a:lnSpc>
+              <a:buNone/>
+            </a:pPr>
+            <a:r>
+              <a:rPr lang="en-US" sz="1350" b="1" dirty="0">
+                <a:solidFill>
+                  <a:srgbClr val="EE7B08"/>
+                </a:solidFill>
+                <a:latin typeface="メイリオ" pitchFamily="34" charset="0"/>
+                <a:ea typeface="メイリオ" pitchFamily="34" charset="-122"/>
+                <a:cs typeface="メイリオ" pitchFamily="34" charset="-120"/>
+              </a:rPr>
+              <a:t>・発表前にペアで共有</a:t>
+            </a:r>
+            <a:endParaRPr lang="en-US" sz="1350" dirty="0"/>
+          </a:p>
+          <a:p>
+            <a:pPr algn="l" indent="0" marL="0">
+              <a:lnSpc>
+                <a:spcPct val="125000"/>
+              </a:lnSpc>
+              <a:buNone/>
+            </a:pPr>
+            <a:r>
+              <a:rPr lang="en-US" sz="1350" b="1" dirty="0">
+                <a:solidFill>
+                  <a:srgbClr val="EE7B08"/>
+                </a:solidFill>
+                <a:latin typeface="メイリオ" pitchFamily="34" charset="0"/>
+                <a:ea typeface="メイリオ" pitchFamily="34" charset="-122"/>
+                <a:cs typeface="メイリオ" pitchFamily="34" charset="-120"/>
+              </a:rPr>
+              <a:t>・全員に発話の機会</a:t>
+            </a:r>
+            <a:endParaRPr lang="en-US" sz="1350" dirty="0"/>
+          </a:p>
+          <a:p>
+            <a:pPr algn="l" indent="0" marL="0">
+              <a:lnSpc>
+                <a:spcPct val="125000"/>
+              </a:lnSpc>
+              <a:buNone/>
+            </a:pPr>
+            <a:r>
+              <a:rPr lang="en-US" sz="1350" b="1" dirty="0">
+                <a:solidFill>
+                  <a:srgbClr val="595959"/>
+                </a:solidFill>
+                <a:latin typeface="メイリオ" pitchFamily="34" charset="0"/>
+                <a:ea typeface="メイリオ" pitchFamily="34" charset="-122"/>
+                <a:cs typeface="メイリオ" pitchFamily="34" charset="-120"/>
+              </a:rPr>
+              <a:t>不安を減らし、誰もが</a:t>
+            </a:r>
+            <a:endParaRPr lang="en-US" sz="1350" dirty="0"/>
+          </a:p>
+          <a:p>
+            <a:pPr algn="l" indent="0" marL="0">
+              <a:lnSpc>
+                <a:spcPct val="125000"/>
+              </a:lnSpc>
+              <a:buNone/>
+            </a:pPr>
+            <a:r>
+              <a:rPr lang="en-US" sz="1350" b="1" dirty="0">
+                <a:solidFill>
+                  <a:srgbClr val="595959"/>
+                </a:solidFill>
+                <a:latin typeface="メイリオ" pitchFamily="34" charset="0"/>
+                <a:ea typeface="メイリオ" pitchFamily="34" charset="-122"/>
+                <a:cs typeface="メイリオ" pitchFamily="34" charset="-120"/>
+              </a:rPr>
+              <a:t>参加できる場をつくって</a:t>
+            </a:r>
+            <a:endParaRPr lang="en-US" sz="1350" dirty="0"/>
+          </a:p>
+          <a:p>
+            <a:pPr algn="l" indent="0" marL="0">
+              <a:lnSpc>
+                <a:spcPct val="125000"/>
+              </a:lnSpc>
+              <a:buNone/>
+            </a:pPr>
+            <a:r>
+              <a:rPr lang="en-US" sz="1350" b="1" dirty="0">
+                <a:solidFill>
+                  <a:srgbClr val="595959"/>
+                </a:solidFill>
+                <a:latin typeface="メイリオ" pitchFamily="34" charset="0"/>
+                <a:ea typeface="メイリオ" pitchFamily="34" charset="-122"/>
+                <a:cs typeface="メイリオ" pitchFamily="34" charset="-120"/>
+              </a:rPr>
+              <a:t>いた。</a:t>
+            </a:r>
+            <a:endParaRPr lang="en-US" sz="1350" dirty="0"/>
           </a:p>
         </p:txBody>
       </p:sp>
@@ -8860,8 +8918,8 @@
         </p:nvSpPr>
         <p:spPr>
           <a:xfrm>
-            <a:off x="6318504" y="1883664"/>
-            <a:ext cx="2359152" cy="1572768"/>
+            <a:off x="320040" y="3977640"/>
+            <a:ext cx="8503920" cy="822960"/>
           </a:xfrm>
           <a:prstGeom prst="rect">
             <a:avLst/>
@@ -8875,218 +8933,76 @@
           <a:p>
             <a:pPr algn="l" indent="0" marL="0">
               <a:lnSpc>
-                <a:spcPct val="125000"/>
-              </a:lnSpc>
-              <a:buNone/>
-            </a:pPr>
-            <a:r>
-              <a:rPr lang="en-US" sz="1350" b="1" dirty="0">
-                <a:solidFill>
-                  <a:srgbClr val="1A1A1A"/>
-                </a:solidFill>
-                <a:latin typeface="Meiryo" pitchFamily="34" charset="0"/>
-                <a:ea typeface="Meiryo" pitchFamily="34" charset="-122"/>
-                <a:cs typeface="Meiryo" pitchFamily="34" charset="-120"/>
-              </a:rPr>
-              <a:t>習熟度差の大きい学級で</a:t>
-            </a:r>
-            <a:endParaRPr lang="en-US" sz="1350" dirty="0"/>
-          </a:p>
-          <a:p>
-            <a:pPr algn="l" indent="0" marL="0">
-              <a:lnSpc>
-                <a:spcPct val="125000"/>
-              </a:lnSpc>
-              <a:buNone/>
-            </a:pPr>
-            <a:r>
-              <a:rPr lang="en-US" sz="1350" b="1" dirty="0">
-                <a:solidFill>
-                  <a:srgbClr val="EB6C15"/>
-                </a:solidFill>
-                <a:latin typeface="Meiryo" pitchFamily="34" charset="0"/>
-                <a:ea typeface="Meiryo" pitchFamily="34" charset="-122"/>
-                <a:cs typeface="Meiryo" pitchFamily="34" charset="-120"/>
-              </a:rPr>
-              <a:t>・発表前にペアで共有</a:t>
-            </a:r>
-            <a:endParaRPr lang="en-US" sz="1350" dirty="0"/>
-          </a:p>
-          <a:p>
-            <a:pPr algn="l" indent="0" marL="0">
-              <a:lnSpc>
-                <a:spcPct val="125000"/>
-              </a:lnSpc>
-              <a:buNone/>
-            </a:pPr>
-            <a:r>
-              <a:rPr lang="en-US" sz="1350" b="1" dirty="0">
-                <a:solidFill>
-                  <a:srgbClr val="EB6C15"/>
-                </a:solidFill>
-                <a:latin typeface="Meiryo" pitchFamily="34" charset="0"/>
-                <a:ea typeface="Meiryo" pitchFamily="34" charset="-122"/>
-                <a:cs typeface="Meiryo" pitchFamily="34" charset="-120"/>
-              </a:rPr>
-              <a:t>・全員に発話の機会</a:t>
-            </a:r>
-            <a:endParaRPr lang="en-US" sz="1350" dirty="0"/>
-          </a:p>
-          <a:p>
-            <a:pPr algn="l" indent="0" marL="0">
-              <a:lnSpc>
-                <a:spcPct val="125000"/>
-              </a:lnSpc>
-              <a:buNone/>
-            </a:pPr>
-            <a:r>
-              <a:rPr lang="en-US" sz="1350" b="1" dirty="0">
-                <a:solidFill>
-                  <a:srgbClr val="1A1A1A"/>
-                </a:solidFill>
-                <a:latin typeface="Meiryo" pitchFamily="34" charset="0"/>
-                <a:ea typeface="Meiryo" pitchFamily="34" charset="-122"/>
-                <a:cs typeface="Meiryo" pitchFamily="34" charset="-120"/>
-              </a:rPr>
-              <a:t>不安を減らし、誰もが</a:t>
-            </a:r>
-            <a:endParaRPr lang="en-US" sz="1350" dirty="0"/>
-          </a:p>
-          <a:p>
-            <a:pPr algn="l" indent="0" marL="0">
-              <a:lnSpc>
-                <a:spcPct val="125000"/>
-              </a:lnSpc>
-              <a:buNone/>
-            </a:pPr>
-            <a:r>
-              <a:rPr lang="en-US" sz="1350" b="1" dirty="0">
-                <a:solidFill>
-                  <a:srgbClr val="1A1A1A"/>
-                </a:solidFill>
-                <a:latin typeface="Meiryo" pitchFamily="34" charset="0"/>
-                <a:ea typeface="Meiryo" pitchFamily="34" charset="-122"/>
-                <a:cs typeface="Meiryo" pitchFamily="34" charset="-120"/>
-              </a:rPr>
-              <a:t>参加できる場をつくって</a:t>
-            </a:r>
-            <a:endParaRPr lang="en-US" sz="1350" dirty="0"/>
-          </a:p>
-          <a:p>
-            <a:pPr algn="l" indent="0" marL="0">
-              <a:lnSpc>
-                <a:spcPct val="125000"/>
-              </a:lnSpc>
-              <a:buNone/>
-            </a:pPr>
-            <a:r>
-              <a:rPr lang="en-US" sz="1350" b="1" dirty="0">
-                <a:solidFill>
-                  <a:srgbClr val="1A1A1A"/>
-                </a:solidFill>
-                <a:latin typeface="Meiryo" pitchFamily="34" charset="0"/>
-                <a:ea typeface="Meiryo" pitchFamily="34" charset="-122"/>
-                <a:cs typeface="Meiryo" pitchFamily="34" charset="-120"/>
-              </a:rPr>
-              <a:t>いた。</a:t>
-            </a:r>
-            <a:endParaRPr lang="en-US" sz="1350" dirty="0"/>
-          </a:p>
-        </p:txBody>
-      </p:sp>
-      <p:sp>
-        <p:nvSpPr>
-          <p:cNvPr id="16" name="Text 14"/>
-          <p:cNvSpPr txBox="1"/>
-          <p:nvPr/>
-        </p:nvSpPr>
-        <p:spPr>
-          <a:xfrm>
-            <a:off x="320040" y="3822192"/>
-            <a:ext cx="8503920" cy="914400"/>
-          </a:xfrm>
-          <a:prstGeom prst="rect">
-            <a:avLst/>
-          </a:prstGeom>
-          <a:noFill/>
-          <a:ln/>
-        </p:spPr>
-        <p:txBody>
-          <a:bodyPr wrap="square" lIns="0" tIns="0" rIns="0" bIns="0" rtlCol="0" anchor="t"/>
-          <a:lstStyle/>
-          <a:p>
-            <a:pPr algn="l" indent="0" marL="0">
-              <a:lnSpc>
-                <a:spcPct val="130000"/>
-              </a:lnSpc>
-              <a:buNone/>
-            </a:pPr>
-            <a:r>
-              <a:rPr lang="en-US" sz="1700" b="1" dirty="0">
-                <a:solidFill>
-                  <a:srgbClr val="1A1A1A"/>
-                </a:solidFill>
-                <a:latin typeface="Meiryo" pitchFamily="34" charset="0"/>
-                <a:ea typeface="Meiryo" pitchFamily="34" charset="-122"/>
-                <a:cs typeface="Meiryo" pitchFamily="34" charset="-120"/>
+                <a:spcPct val="120000"/>
+              </a:lnSpc>
+              <a:buNone/>
+            </a:pPr>
+            <a:r>
+              <a:rPr lang="en-US" sz="1600" b="1" dirty="0">
+                <a:solidFill>
+                  <a:srgbClr val="595959"/>
+                </a:solidFill>
+                <a:latin typeface="メイリオ" pitchFamily="34" charset="0"/>
+                <a:ea typeface="メイリオ" pitchFamily="34" charset="-122"/>
+                <a:cs typeface="メイリオ" pitchFamily="34" charset="-120"/>
               </a:rPr>
               <a:t>子どもたちは「認められる」よりも、</a:t>
             </a:r>
             <a:pPr algn="l" indent="0" marL="0">
               <a:lnSpc>
-                <a:spcPct val="130000"/>
-              </a:lnSpc>
-              <a:buNone/>
-            </a:pPr>
-            <a:r>
-              <a:rPr lang="en-US" sz="1700" b="1" dirty="0">
-                <a:solidFill>
-                  <a:srgbClr val="EB6C15"/>
-                </a:solidFill>
-                <a:latin typeface="Meiryo" pitchFamily="34" charset="0"/>
-                <a:ea typeface="Meiryo" pitchFamily="34" charset="-122"/>
-                <a:cs typeface="Meiryo" pitchFamily="34" charset="-120"/>
+                <a:spcPct val="120000"/>
+              </a:lnSpc>
+              <a:buNone/>
+            </a:pPr>
+            <a:r>
+              <a:rPr lang="en-US" sz="1600" b="1" dirty="0">
+                <a:solidFill>
+                  <a:srgbClr val="EE7B08"/>
+                </a:solidFill>
+                <a:latin typeface="メイリオ" pitchFamily="34" charset="0"/>
+                <a:ea typeface="メイリオ" pitchFamily="34" charset="-122"/>
+                <a:cs typeface="メイリオ" pitchFamily="34" charset="-120"/>
               </a:rPr>
               <a:t>「自分で成長を実感する」</a:t>
             </a:r>
             <a:pPr algn="l" indent="0" marL="0">
               <a:lnSpc>
-                <a:spcPct val="130000"/>
-              </a:lnSpc>
-              <a:buNone/>
-            </a:pPr>
-            <a:r>
-              <a:rPr lang="en-US" sz="1700" b="1" dirty="0">
-                <a:solidFill>
-                  <a:srgbClr val="1A1A1A"/>
-                </a:solidFill>
-                <a:latin typeface="Meiryo" pitchFamily="34" charset="0"/>
-                <a:ea typeface="Meiryo" pitchFamily="34" charset="-122"/>
-                <a:cs typeface="Meiryo" pitchFamily="34" charset="-120"/>
+                <a:spcPct val="120000"/>
+              </a:lnSpc>
+              <a:buNone/>
+            </a:pPr>
+            <a:r>
+              <a:rPr lang="en-US" sz="1600" b="1" dirty="0">
+                <a:solidFill>
+                  <a:srgbClr val="595959"/>
+                </a:solidFill>
+                <a:latin typeface="メイリオ" pitchFamily="34" charset="0"/>
+                <a:ea typeface="メイリオ" pitchFamily="34" charset="-122"/>
+                <a:cs typeface="メイリオ" pitchFamily="34" charset="-120"/>
               </a:rPr>
               <a:t>経験を</a:t>
             </a:r>
-            <a:endParaRPr lang="en-US" sz="1700" dirty="0"/>
-          </a:p>
-          <a:p>
-            <a:pPr algn="l" indent="0" marL="0">
-              <a:lnSpc>
-                <a:spcPct val="130000"/>
-              </a:lnSpc>
-              <a:buNone/>
-            </a:pPr>
-            <a:r>
-              <a:rPr lang="en-US" sz="1700" b="1" dirty="0">
-                <a:solidFill>
-                  <a:srgbClr val="1A1A1A"/>
-                </a:solidFill>
-                <a:latin typeface="Meiryo" pitchFamily="34" charset="0"/>
-                <a:ea typeface="Meiryo" pitchFamily="34" charset="-122"/>
-                <a:cs typeface="Meiryo" pitchFamily="34" charset="-120"/>
+            <a:endParaRPr lang="en-US" sz="1600" dirty="0"/>
+          </a:p>
+          <a:p>
+            <a:pPr algn="l" indent="0" marL="0">
+              <a:lnSpc>
+                <a:spcPct val="120000"/>
+              </a:lnSpc>
+              <a:buNone/>
+            </a:pPr>
+            <a:r>
+              <a:rPr lang="en-US" sz="1600" b="1" dirty="0">
+                <a:solidFill>
+                  <a:srgbClr val="595959"/>
+                </a:solidFill>
+                <a:latin typeface="メイリオ" pitchFamily="34" charset="0"/>
+                <a:ea typeface="メイリオ" pitchFamily="34" charset="-122"/>
+                <a:cs typeface="メイリオ" pitchFamily="34" charset="-120"/>
               </a:rPr>
               <a:t>積み重ねていた。</a:t>
             </a:r>
-            <a:endParaRPr lang="en-US" sz="1700" dirty="0"/>
+            <a:endParaRPr lang="en-US" sz="1600" dirty="0"/>
           </a:p>
         </p:txBody>
       </p:sp>
@@ -9123,14 +9039,14 @@
         </p:nvSpPr>
         <p:spPr>
           <a:xfrm>
-            <a:off x="0" y="0"/>
-            <a:ext cx="9144000" cy="576072"/>
+            <a:off x="0" y="-9144"/>
+            <a:ext cx="9144000" cy="1161288"/>
           </a:xfrm>
           <a:prstGeom prst="rect">
             <a:avLst/>
           </a:prstGeom>
           <a:solidFill>
-            <a:srgbClr val="00B0F0"/>
+            <a:srgbClr val="44C1A3"/>
           </a:solidFill>
           <a:ln/>
         </p:spPr>
@@ -9139,6 +9055,29 @@
           <a:lstStyle/>
           <a:p>
             <a:pPr algn="l" indent="0" marL="0">
+              <a:lnSpc>
+                <a:spcPct val="120000"/>
+              </a:lnSpc>
+              <a:buNone/>
+            </a:pPr>
+            <a:r>
+              <a:rPr lang="en-US" sz="3000" b="1" dirty="0">
+                <a:solidFill>
+                  <a:srgbClr val="FFFFFF"/>
+                </a:solidFill>
+                <a:latin typeface="メイリオ" pitchFamily="34" charset="0"/>
+                <a:ea typeface="メイリオ" pitchFamily="34" charset="-122"/>
+                <a:cs typeface="メイリオ" pitchFamily="34" charset="-120"/>
+              </a:rPr>
+              <a:t>　２　５校時の授業について</a:t>
+            </a:r>
+            <a:endParaRPr lang="en-US" sz="3000" dirty="0"/>
+          </a:p>
+          <a:p>
+            <a:pPr algn="l" indent="0" marL="0">
+              <a:lnSpc>
+                <a:spcPct val="120000"/>
+              </a:lnSpc>
               <a:buNone/>
             </a:pPr>
             <a:r>
@@ -9146,35 +9085,111 @@
                 <a:solidFill>
                   <a:srgbClr val="FFFFFF"/>
                 </a:solidFill>
-                <a:latin typeface="Meiryo" pitchFamily="34" charset="0"/>
-                <a:ea typeface="Meiryo" pitchFamily="34" charset="-122"/>
-                <a:cs typeface="Meiryo" pitchFamily="34" charset="-120"/>
-              </a:rPr>
-              <a:t>　２　５校時の授業について</a:t>
-            </a:r>
-            <a:endParaRPr lang="en-US" sz="2800" dirty="0"/>
-          </a:p>
-        </p:txBody>
-      </p:sp>
-      <p:sp>
-        <p:nvSpPr>
-          <p:cNvPr id="3" name="Shape 1"/>
-          <p:cNvSpPr/>
-          <p:nvPr/>
-        </p:nvSpPr>
-        <p:spPr>
-          <a:xfrm>
-            <a:off x="640080" y="822960"/>
-            <a:ext cx="548640" cy="548640"/>
-          </a:xfrm>
-          <a:prstGeom prst="ellipse">
-            <a:avLst/>
-          </a:prstGeom>
-          <a:solidFill>
-            <a:srgbClr val="EB6C15"/>
-          </a:solidFill>
-          <a:ln/>
-        </p:spPr>
+                <a:latin typeface="メイリオ" pitchFamily="34" charset="0"/>
+                <a:ea typeface="メイリオ" pitchFamily="34" charset="-122"/>
+                <a:cs typeface="メイリオ" pitchFamily="34" charset="-120"/>
+              </a:rPr>
+              <a:t>　②　対話・協働</a:t>
+            </a:r>
+            <a:endParaRPr lang="en-US" sz="3000" dirty="0"/>
+          </a:p>
+        </p:txBody>
+      </p:sp>
+      <p:sp>
+        <p:nvSpPr>
+          <p:cNvPr id="3" name="Text 1"/>
+          <p:cNvSpPr txBox="1"/>
+          <p:nvPr/>
+        </p:nvSpPr>
+        <p:spPr>
+          <a:xfrm>
+            <a:off x="475488" y="1444752"/>
+            <a:ext cx="8193024" cy="868680"/>
+          </a:xfrm>
+          <a:prstGeom prst="rect">
+            <a:avLst/>
+          </a:prstGeom>
+          <a:noFill/>
+          <a:ln/>
+        </p:spPr>
+        <p:txBody>
+          <a:bodyPr wrap="square" lIns="0" tIns="0" rIns="0" bIns="0" rtlCol="0" anchor="t"/>
+          <a:lstStyle/>
+          <a:p>
+            <a:pPr algn="l" indent="0" marL="0">
+              <a:lnSpc>
+                <a:spcPct val="120000"/>
+              </a:lnSpc>
+              <a:buNone/>
+            </a:pPr>
+            <a:r>
+              <a:rPr lang="en-US" sz="2200" b="1" dirty="0">
+                <a:solidFill>
+                  <a:srgbClr val="595959"/>
+                </a:solidFill>
+                <a:latin typeface="メイリオ" pitchFamily="34" charset="0"/>
+                <a:ea typeface="メイリオ" pitchFamily="34" charset="-122"/>
+                <a:cs typeface="メイリオ" pitchFamily="34" charset="-120"/>
+              </a:rPr>
+              <a:t>本校の学力調査結果からは、</a:t>
+            </a:r>
+            <a:endParaRPr lang="en-US" sz="2200" dirty="0"/>
+          </a:p>
+          <a:p>
+            <a:pPr algn="l" indent="0" marL="0">
+              <a:lnSpc>
+                <a:spcPct val="120000"/>
+              </a:lnSpc>
+              <a:buNone/>
+            </a:pPr>
+            <a:r>
+              <a:rPr lang="en-US" sz="2200" b="1" dirty="0">
+                <a:solidFill>
+                  <a:srgbClr val="595959"/>
+                </a:solidFill>
+                <a:latin typeface="メイリオ" pitchFamily="34" charset="0"/>
+                <a:ea typeface="メイリオ" pitchFamily="34" charset="-122"/>
+                <a:cs typeface="メイリオ" pitchFamily="34" charset="-120"/>
+              </a:rPr>
+              <a:t>　</a:t>
+            </a:r>
+            <a:pPr algn="l" indent="0" marL="0">
+              <a:lnSpc>
+                <a:spcPct val="120000"/>
+              </a:lnSpc>
+              <a:buNone/>
+            </a:pPr>
+            <a:r>
+              <a:rPr lang="en-US" sz="2200" b="1" dirty="0">
+                <a:solidFill>
+                  <a:srgbClr val="EE7B08"/>
+                </a:solidFill>
+                <a:latin typeface="メイリオ" pitchFamily="34" charset="0"/>
+                <a:ea typeface="メイリオ" pitchFamily="34" charset="-122"/>
+                <a:cs typeface="メイリオ" pitchFamily="34" charset="-120"/>
+              </a:rPr>
+              <a:t>主体的な学びの土台</a:t>
+            </a:r>
+            <a:pPr algn="l" indent="0" marL="0">
+              <a:lnSpc>
+                <a:spcPct val="120000"/>
+              </a:lnSpc>
+              <a:buNone/>
+            </a:pPr>
+            <a:r>
+              <a:rPr lang="en-US" sz="2200" b="1" dirty="0">
+                <a:solidFill>
+                  <a:srgbClr val="595959"/>
+                </a:solidFill>
+                <a:latin typeface="メイリオ" pitchFamily="34" charset="0"/>
+                <a:ea typeface="メイリオ" pitchFamily="34" charset="-122"/>
+                <a:cs typeface="メイリオ" pitchFamily="34" charset="-120"/>
+              </a:rPr>
+              <a:t>が形成されていることが分かる。</a:t>
+            </a:r>
+            <a:endParaRPr lang="en-US" sz="2200" dirty="0"/>
+          </a:p>
+        </p:txBody>
       </p:sp>
       <p:sp>
         <p:nvSpPr>
@@ -9184,8 +9199,8 @@
         </p:nvSpPr>
         <p:spPr>
           <a:xfrm>
-            <a:off x="640080" y="822960"/>
-            <a:ext cx="548640" cy="548640"/>
+            <a:off x="475488" y="2514600"/>
+            <a:ext cx="8193024" cy="868680"/>
           </a:xfrm>
           <a:prstGeom prst="rect">
             <a:avLst/>
@@ -9194,157 +9209,79 @@
           <a:ln/>
         </p:spPr>
         <p:txBody>
-          <a:bodyPr wrap="square" lIns="0" tIns="0" rIns="0" bIns="0" rtlCol="0" anchor="ctr"/>
-          <a:lstStyle/>
-          <a:p>
-            <a:pPr algn="ctr" indent="0" marL="0">
-              <a:buNone/>
-            </a:pPr>
-            <a:r>
-              <a:rPr lang="en-US" sz="2800" b="1" dirty="0">
-                <a:solidFill>
-                  <a:srgbClr val="FFFFFF"/>
-                </a:solidFill>
-                <a:latin typeface="Meiryo" pitchFamily="34" charset="0"/>
-                <a:ea typeface="Meiryo" pitchFamily="34" charset="-122"/>
-                <a:cs typeface="Meiryo" pitchFamily="34" charset="-120"/>
-              </a:rPr>
-              <a:t>②</a:t>
-            </a:r>
-            <a:endParaRPr lang="en-US" sz="2800" dirty="0"/>
-          </a:p>
-        </p:txBody>
-      </p:sp>
-      <p:sp>
-        <p:nvSpPr>
-          <p:cNvPr id="5" name="Text 3"/>
-          <p:cNvSpPr txBox="1"/>
-          <p:nvPr/>
-        </p:nvSpPr>
-        <p:spPr>
-          <a:xfrm>
-            <a:off x="1325880" y="822960"/>
-            <a:ext cx="7406640" cy="548640"/>
-          </a:xfrm>
-          <a:prstGeom prst="rect">
-            <a:avLst/>
-          </a:prstGeom>
-          <a:noFill/>
-          <a:ln/>
-        </p:spPr>
-        <p:txBody>
-          <a:bodyPr wrap="square" lIns="0" tIns="0" rIns="0" bIns="0" rtlCol="0" anchor="ctr"/>
-          <a:lstStyle/>
-          <a:p>
-            <a:pPr algn="l" indent="0" marL="0">
-              <a:buNone/>
-            </a:pPr>
-            <a:r>
-              <a:rPr lang="en-US" sz="2400" b="1" dirty="0">
-                <a:solidFill>
-                  <a:srgbClr val="00B0F0"/>
-                </a:solidFill>
-                <a:latin typeface="Meiryo" pitchFamily="34" charset="0"/>
-                <a:ea typeface="Meiryo" pitchFamily="34" charset="-122"/>
-                <a:cs typeface="Meiryo" pitchFamily="34" charset="-120"/>
-              </a:rPr>
-              <a:t>今日の授業から見えたもの　対話・協働</a:t>
-            </a:r>
-            <a:endParaRPr lang="en-US" sz="2400" dirty="0"/>
-          </a:p>
-        </p:txBody>
-      </p:sp>
-      <p:sp>
-        <p:nvSpPr>
-          <p:cNvPr id="6" name="Text 4"/>
-          <p:cNvSpPr txBox="1"/>
-          <p:nvPr/>
-        </p:nvSpPr>
-        <p:spPr>
-          <a:xfrm>
-            <a:off x="640080" y="1600200"/>
-            <a:ext cx="8046720" cy="914400"/>
-          </a:xfrm>
-          <a:prstGeom prst="rect">
-            <a:avLst/>
-          </a:prstGeom>
-          <a:noFill/>
-          <a:ln/>
-        </p:spPr>
-        <p:txBody>
           <a:bodyPr wrap="square" lIns="0" tIns="0" rIns="0" bIns="0" rtlCol="0" anchor="t"/>
           <a:lstStyle/>
           <a:p>
             <a:pPr algn="l" indent="0" marL="0">
               <a:lnSpc>
-                <a:spcPct val="140000"/>
+                <a:spcPct val="120000"/>
               </a:lnSpc>
               <a:buNone/>
             </a:pPr>
             <a:r>
               <a:rPr lang="en-US" sz="2200" b="1" dirty="0">
                 <a:solidFill>
-                  <a:srgbClr val="1A1A1A"/>
-                </a:solidFill>
-                <a:latin typeface="Meiryo" pitchFamily="34" charset="0"/>
-                <a:ea typeface="Meiryo" pitchFamily="34" charset="-122"/>
-                <a:cs typeface="Meiryo" pitchFamily="34" charset="-120"/>
-              </a:rPr>
-              <a:t>本校の学力調査結果からは、</a:t>
+                  <a:srgbClr val="595959"/>
+                </a:solidFill>
+                <a:latin typeface="メイリオ" pitchFamily="34" charset="0"/>
+                <a:ea typeface="メイリオ" pitchFamily="34" charset="-122"/>
+                <a:cs typeface="メイリオ" pitchFamily="34" charset="-120"/>
+              </a:rPr>
+              <a:t>その背景にあるのは、日常的に行われている</a:t>
             </a:r>
             <a:endParaRPr lang="en-US" sz="2200" dirty="0"/>
           </a:p>
           <a:p>
             <a:pPr algn="l" indent="0" marL="0">
               <a:lnSpc>
-                <a:spcPct val="140000"/>
+                <a:spcPct val="120000"/>
               </a:lnSpc>
               <a:buNone/>
             </a:pPr>
             <a:r>
               <a:rPr lang="en-US" sz="2200" b="1" dirty="0">
                 <a:solidFill>
-                  <a:srgbClr val="1A1A1A"/>
-                </a:solidFill>
-                <a:latin typeface="Meiryo" pitchFamily="34" charset="0"/>
-                <a:ea typeface="Meiryo" pitchFamily="34" charset="-122"/>
-                <a:cs typeface="Meiryo" pitchFamily="34" charset="-120"/>
+                  <a:srgbClr val="595959"/>
+                </a:solidFill>
+                <a:latin typeface="メイリオ" pitchFamily="34" charset="0"/>
+                <a:ea typeface="メイリオ" pitchFamily="34" charset="-122"/>
+                <a:cs typeface="メイリオ" pitchFamily="34" charset="-120"/>
               </a:rPr>
               <a:t>　</a:t>
             </a:r>
             <a:pPr algn="l" indent="0" marL="0">
               <a:lnSpc>
-                <a:spcPct val="140000"/>
+                <a:spcPct val="120000"/>
               </a:lnSpc>
               <a:buNone/>
             </a:pPr>
             <a:r>
               <a:rPr lang="en-US" sz="2200" b="1" dirty="0">
                 <a:solidFill>
-                  <a:srgbClr val="EB6C15"/>
-                </a:solidFill>
-                <a:latin typeface="Meiryo" pitchFamily="34" charset="0"/>
-                <a:ea typeface="Meiryo" pitchFamily="34" charset="-122"/>
-                <a:cs typeface="Meiryo" pitchFamily="34" charset="-120"/>
-              </a:rPr>
-              <a:t>主体的な学びの土台</a:t>
-            </a:r>
-            <a:pPr algn="l" indent="0" marL="0">
-              <a:lnSpc>
-                <a:spcPct val="140000"/>
+                  <a:srgbClr val="EE7B08"/>
+                </a:solidFill>
+                <a:latin typeface="メイリオ" pitchFamily="34" charset="0"/>
+                <a:ea typeface="メイリオ" pitchFamily="34" charset="-122"/>
+                <a:cs typeface="メイリオ" pitchFamily="34" charset="-120"/>
+              </a:rPr>
+              <a:t>「対話を通した学び」</a:t>
+            </a:r>
+            <a:pPr algn="l" indent="0" marL="0">
+              <a:lnSpc>
+                <a:spcPct val="120000"/>
               </a:lnSpc>
               <a:buNone/>
             </a:pPr>
             <a:r>
               <a:rPr lang="en-US" sz="2200" b="1" dirty="0">
                 <a:solidFill>
-                  <a:srgbClr val="1A1A1A"/>
-                </a:solidFill>
-                <a:latin typeface="Meiryo" pitchFamily="34" charset="0"/>
-                <a:ea typeface="Meiryo" pitchFamily="34" charset="-122"/>
-                <a:cs typeface="Meiryo" pitchFamily="34" charset="-120"/>
-              </a:rPr>
-              <a:t>が形成されていることが分かる。</a:t>
+                  <a:srgbClr val="595959"/>
+                </a:solidFill>
+                <a:latin typeface="メイリオ" pitchFamily="34" charset="0"/>
+                <a:ea typeface="メイリオ" pitchFamily="34" charset="-122"/>
+                <a:cs typeface="メイリオ" pitchFamily="34" charset="-120"/>
+              </a:rPr>
+              <a:t>である。</a:t>
             </a:r>
             <a:endParaRPr lang="en-US" sz="2200" dirty="0"/>
           </a:p>
@@ -9352,122 +9289,26 @@
       </p:sp>
       <p:sp>
         <p:nvSpPr>
-          <p:cNvPr id="7" name="Text 5"/>
-          <p:cNvSpPr txBox="1"/>
-          <p:nvPr/>
-        </p:nvSpPr>
-        <p:spPr>
-          <a:xfrm>
-            <a:off x="640080" y="2743200"/>
-            <a:ext cx="8046720" cy="914400"/>
-          </a:xfrm>
-          <a:prstGeom prst="rect">
-            <a:avLst/>
-          </a:prstGeom>
-          <a:noFill/>
-          <a:ln/>
-        </p:spPr>
-        <p:txBody>
-          <a:bodyPr wrap="square" lIns="0" tIns="0" rIns="0" bIns="0" rtlCol="0" anchor="t"/>
-          <a:lstStyle/>
-          <a:p>
-            <a:pPr algn="l" indent="0" marL="0">
-              <a:lnSpc>
-                <a:spcPct val="140000"/>
-              </a:lnSpc>
-              <a:buNone/>
-            </a:pPr>
-            <a:r>
-              <a:rPr lang="en-US" sz="2200" b="1" dirty="0">
-                <a:solidFill>
-                  <a:srgbClr val="1A1A1A"/>
-                </a:solidFill>
-                <a:latin typeface="Meiryo" pitchFamily="34" charset="0"/>
-                <a:ea typeface="Meiryo" pitchFamily="34" charset="-122"/>
-                <a:cs typeface="Meiryo" pitchFamily="34" charset="-120"/>
-              </a:rPr>
-              <a:t>その背景にあるのは、日常的に行われている</a:t>
-            </a:r>
-            <a:endParaRPr lang="en-US" sz="2200" dirty="0"/>
-          </a:p>
-          <a:p>
-            <a:pPr algn="l" indent="0" marL="0">
-              <a:lnSpc>
-                <a:spcPct val="140000"/>
-              </a:lnSpc>
-              <a:buNone/>
-            </a:pPr>
-            <a:r>
-              <a:rPr lang="en-US" sz="2200" b="1" dirty="0">
-                <a:solidFill>
-                  <a:srgbClr val="1A1A1A"/>
-                </a:solidFill>
-                <a:latin typeface="Meiryo" pitchFamily="34" charset="0"/>
-                <a:ea typeface="Meiryo" pitchFamily="34" charset="-122"/>
-                <a:cs typeface="Meiryo" pitchFamily="34" charset="-120"/>
-              </a:rPr>
-              <a:t>　</a:t>
-            </a:r>
-            <a:pPr algn="l" indent="0" marL="0">
-              <a:lnSpc>
-                <a:spcPct val="140000"/>
-              </a:lnSpc>
-              <a:buNone/>
-            </a:pPr>
-            <a:r>
-              <a:rPr lang="en-US" sz="2200" b="1" dirty="0">
-                <a:solidFill>
-                  <a:srgbClr val="EB6C15"/>
-                </a:solidFill>
-                <a:latin typeface="Meiryo" pitchFamily="34" charset="0"/>
-                <a:ea typeface="Meiryo" pitchFamily="34" charset="-122"/>
-                <a:cs typeface="Meiryo" pitchFamily="34" charset="-120"/>
-              </a:rPr>
-              <a:t>「対話を通した学び」</a:t>
-            </a:r>
-            <a:pPr algn="l" indent="0" marL="0">
-              <a:lnSpc>
-                <a:spcPct val="140000"/>
-              </a:lnSpc>
-              <a:buNone/>
-            </a:pPr>
-            <a:r>
-              <a:rPr lang="en-US" sz="2200" b="1" dirty="0">
-                <a:solidFill>
-                  <a:srgbClr val="1A1A1A"/>
-                </a:solidFill>
-                <a:latin typeface="Meiryo" pitchFamily="34" charset="0"/>
-                <a:ea typeface="Meiryo" pitchFamily="34" charset="-122"/>
-                <a:cs typeface="Meiryo" pitchFamily="34" charset="-120"/>
-              </a:rPr>
-              <a:t>である。</a:t>
-            </a:r>
-            <a:endParaRPr lang="en-US" sz="2200" dirty="0"/>
-          </a:p>
-        </p:txBody>
-      </p:sp>
-      <p:sp>
-        <p:nvSpPr>
-          <p:cNvPr id="8" name="Shape 6"/>
+          <p:cNvPr id="5" name="Shape 3"/>
           <p:cNvSpPr/>
           <p:nvPr/>
         </p:nvSpPr>
         <p:spPr>
           <a:xfrm>
-            <a:off x="640080" y="3840480"/>
-            <a:ext cx="7863840" cy="822960"/>
+            <a:off x="475488" y="3611880"/>
+            <a:ext cx="8193024" cy="822960"/>
           </a:xfrm>
           <a:prstGeom prst="roundRect">
             <a:avLst>
-              <a:gd name="adj" fmla="val 8889"/>
+              <a:gd name="adj" fmla="val 6667"/>
             </a:avLst>
           </a:prstGeom>
           <a:solidFill>
-            <a:srgbClr val="EAF6FD"/>
+            <a:srgbClr val="E9F7F3"/>
           </a:solidFill>
           <a:ln w="12700">
             <a:solidFill>
-              <a:srgbClr val="C9E6F5"/>
+              <a:srgbClr val="B9E5DA"/>
             </a:solidFill>
             <a:prstDash val="solid"/>
           </a:ln>
@@ -9475,14 +9316,14 @@
       </p:sp>
       <p:sp>
         <p:nvSpPr>
-          <p:cNvPr id="9" name="Text 7"/>
+          <p:cNvPr id="6" name="Text 4"/>
           <p:cNvSpPr txBox="1"/>
           <p:nvPr/>
         </p:nvSpPr>
         <p:spPr>
           <a:xfrm>
-            <a:off x="868680" y="3840480"/>
-            <a:ext cx="7406640" cy="822960"/>
+            <a:off x="731520" y="3611880"/>
+            <a:ext cx="7680960" cy="822960"/>
           </a:xfrm>
           <a:prstGeom prst="rect">
             <a:avLst/>
@@ -9498,17 +9339,17 @@
               <a:buNone/>
             </a:pPr>
             <a:r>
-              <a:rPr lang="en-US" sz="1700" b="1" dirty="0">
-                <a:solidFill>
-                  <a:srgbClr val="1A1A1A"/>
-                </a:solidFill>
-                <a:latin typeface="Meiryo" pitchFamily="34" charset="0"/>
-                <a:ea typeface="Meiryo" pitchFamily="34" charset="-122"/>
-                <a:cs typeface="Meiryo" pitchFamily="34" charset="-120"/>
+              <a:rPr lang="en-US" sz="1600" b="1" dirty="0">
+                <a:solidFill>
+                  <a:srgbClr val="595959"/>
+                </a:solidFill>
+                <a:latin typeface="メイリオ" pitchFamily="34" charset="0"/>
+                <a:ea typeface="メイリオ" pitchFamily="34" charset="-122"/>
+                <a:cs typeface="メイリオ" pitchFamily="34" charset="-120"/>
               </a:rPr>
               <a:t>本日の３つの授業にも、対話が学びを深める場面が表れていた。</a:t>
             </a:r>
-            <a:endParaRPr lang="en-US" sz="1700" dirty="0"/>
+            <a:endParaRPr lang="en-US" sz="1600" dirty="0"/>
           </a:p>
         </p:txBody>
       </p:sp>

--- a/指導課訪問_みらい青空学園/指導課訪問_５校時指導助言資料_みらい青空学園.pptx
+++ b/指導課訪問_みらい青空学園/指導課訪問_５校時指導助言資料_みらい青空学園.pptx
@@ -22,9 +22,10 @@
     <p:sldId id="270" r:id="rId16"/>
     <p:sldId id="271" r:id="rId17"/>
     <p:sldId id="272" r:id="rId18"/>
+    <p:sldId id="273" r:id="rId19"/>
   </p:sldIdLst>
   <p:notesMasterIdLst>
-    <p:notesMasterId r:id="rId19"/>
+    <p:notesMasterId r:id="rId20"/>
   </p:notesMasterIdLst>
   <p:sldSz cx="9144000" cy="5143500"/>
   <p:notesSz cx="5143500" cy="9144000"/>
@@ -607,8 +608,8 @@
           <a:p>
             <a:r>
               <a:rPr lang="en-US" dirty="0"/>
-              <a:t>１点目は自己肯定感です。これからの学力向上の基盤になるものだと考えています。
-ここでいう自己肯定感は「できる子になる」ことではありません。「成長できる自分を信じること」です。この違いが授業のつくり方を変えます。</a:t>
+              <a:t>調査結果はあくまで「結果」です。大切なのは、その結果を生み出している要因です。
+本日の３つの授業から、自己肯定感、対話・協働、学習の自己調整という３つが見えてきました。順にお話しします。</a:t>
             </a:r>
             <a:endParaRPr lang="en-US" dirty="0"/>
           </a:p>
@@ -696,10 +697,8 @@
           <a:p>
             <a:r>
               <a:rPr lang="en-US" dirty="0"/>
-              <a:t>田口先生は、泳力差の大きい集団に対して段階的な課題、泳力別のコース、バディでの確認活動を用意されていました。キックの確認の視点を３点示されたことで、子どもが自分の泳ぎを見る目をもてていました。
-東海林先生は、安心して自分の考えを表現できる環境をつくられていました。前時の考えを大切にしつつ、意見が変わってもよいと保障されていた点が印象的でした。
-塚本先生は、発表の前にペアで共有する時間を確保され、全員に発話の機会を用意されていました。
-いずれも、子どもが「認められる」よりも「自分で成長を実感する」経験を積み重ねる授業でした。</a:t>
+              <a:t>１点目は自己肯定感です。これからの学力向上の基盤になるものだと考えています。
+ここでいう自己肯定感は「できる子になる」ことではありません。「成長できる自分を信じること」です。この違いが授業のつくり方を変えます。</a:t>
             </a:r>
             <a:endParaRPr lang="en-US" dirty="0"/>
           </a:p>
@@ -787,8 +786,10 @@
           <a:p>
             <a:r>
               <a:rPr lang="en-US" dirty="0"/>
-              <a:t>２点目は対話・協働です。調査結果に表れた主体的な学びの土台は、一朝一夕にできるものではありません。
-その背景には、日常的に積み重ねられている対話を通した学びがあると受け止めました。</a:t>
+              <a:t>田口先生は、泳力差の大きい集団に対して段階的な課題、泳力別のコース、バディでの確認活動を用意されていました。キックの確認の視点を３点示されたことで、子どもが自分の泳ぎを見る目をもてていました。
+東海林先生は、安心して自分の考えを表現できる環境をつくられていました。前時の考えを大切にしつつ、意見が変わってもよいと保障されていた点が印象的でした。
+塚本先生は、発表の前にペアで共有する時間を確保され、全員に発話の機会を用意されていました。
+いずれも、子どもが「認められる」よりも「自分で成長を実感する」経験を積み重ねる授業でした。</a:t>
             </a:r>
             <a:endParaRPr lang="en-US" dirty="0"/>
           </a:p>
@@ -876,8 +877,8 @@
           <a:p>
             <a:r>
               <a:rPr lang="en-US" dirty="0"/>
-              <a:t>保健体育では、バディで互いの泳ぎを見合い、改善点を考えていました。道徳では「嘘」をテーマに価値観の違いを議論していました。外国語では、ペアでのやり取りを全体の学びにつないでいました。
-教科は異なりますが、共通していたのは「相手を通して自分を見つめる学び」です。これが対話・協働の本質だと考えます。</a:t>
+              <a:t>２点目は対話・協働です。調査結果に表れた主体的な学びの土台は、一朝一夕にできるものではありません。
+その背景には、日常的に積み重ねられている対話を通した学びがあると受け止めました。</a:t>
             </a:r>
             <a:endParaRPr lang="en-US" dirty="0"/>
           </a:p>
@@ -965,8 +966,8 @@
           <a:p>
             <a:r>
               <a:rPr lang="en-US" dirty="0"/>
-              <a:t>３点目は学習の自己調整です。これから求められる子どもは、教えられたことを学ぶ子どもではなく、自分で学び続ける子どもです。
-そのために必要なのが、学習を自分で調整する力です。</a:t>
+              <a:t>保健体育では、バディで互いの泳ぎを見合い、改善点を考えていました。道徳では「嘘」をテーマに価値観の違いを議論していました。外国語では、ペアでのやり取りを全体の学びにつないでいました。
+教科は異なりますが、共通していたのは「相手を通して自分を見つめる学び」です。これが対話・協働の本質だと考えます。</a:t>
             </a:r>
             <a:endParaRPr lang="en-US" dirty="0"/>
           </a:p>
@@ -1054,9 +1055,8 @@
           <a:p>
             <a:r>
               <a:rPr lang="en-US" dirty="0"/>
-              <a:t>本日の授業では、本時の目標、振り返り、自己評価、次時への見通しが大切にされていました。
-田口先生は着替えの前に目標と流れを確認され、学習カードで要点を振り返らせていました。塚本先生は Today’s Goal と Today’s Plan を示し、振り返りをワークシートに記入させていました。東海林先生は前時のワークシートで自分の考えを確かめてから議論に入っていました。
-教師が管理する学習から、子どもが管理する学習へ、着実に転換が進んでいます。</a:t>
+              <a:t>３点目は学習の自己調整です。これから求められる子どもは、教えられたことを学ぶ子どもではなく、自分で学び続ける子どもです。
+そのために必要なのが、学習を自分で調整する力です。</a:t>
             </a:r>
             <a:endParaRPr lang="en-US" dirty="0"/>
           </a:p>
@@ -1144,8 +1144,9 @@
           <a:p>
             <a:r>
               <a:rPr lang="en-US" dirty="0"/>
-              <a:t>学力調査結果と今日の授業をつなげて考えると、今後さらに伸ばしたいのは「学びを自分事として捉える子ども」です。
-そのためには、自己肯定感、対話・協働、学習の自己調整を、９年間で系統的に育てていくことが重要になります。学年や教科で終わらせず、９年間の系統として整理していただきたいと考えます。</a:t>
+              <a:t>本日の授業では、本時の目標、振り返り、自己評価、次時への見通しが大切にされていました。
+田口先生は着替えの前に目標と流れを確認され、学習カードで要点を振り返らせていました。塚本先生は Today’s Goal と Today’s Plan を示し、振り返りをワークシートに記入させていました。東海林先生は前時のワークシートで自分の考えを確かめてから議論に入っていました。
+教師が管理する学習から、子どもが管理する学習へ、着実に転換が進んでいます。</a:t>
             </a:r>
             <a:endParaRPr lang="en-US" dirty="0"/>
           </a:p>
@@ -1233,9 +1234,8 @@
           <a:p>
             <a:r>
               <a:rPr lang="en-US" dirty="0"/>
-              <a:t>まとめです。学力向上は、知識の積み上げだけで実現するものではありません。
-みらい青空学園では、自己肯定感、対話・協働、学習の自己調整が着実に育成されています。これこそが、施設一体型小中一貫教育校としての最大の強みであり、学力調査結果を支える土台です。
-今後も、９年間を見通した学びの充実に期待しています。本日はありがとうございました。</a:t>
+              <a:t>学力調査結果と今日の授業をつなげて考えると、今後さらに伸ばしたいのは「学びを自分事として捉える子ども」です。
+そのためには、自己肯定感、対話・協働、学習の自己調整を、９年間で系統的に育てていくことが重要になります。学年や教科で終わらせず、９年間の系統として整理していただきたいと考えます。</a:t>
             </a:r>
             <a:endParaRPr lang="en-US" dirty="0"/>
           </a:p>
@@ -1259,6 +1259,96 @@
             <a:fld id="{F7021451-1387-4CA6-816F-3879F97B5CBC}" type="slidenum">
               <a:rPr lang="en-US"/>
               <a:t>17</a:t>
+            </a:fld>
+            <a:endParaRPr lang="en-US"/>
+          </a:p>
+        </p:txBody>
+      </p:sp>
+    </p:spTree>
+    <p:extLst>
+      <p:ext uri="{BB962C8B-B14F-4D97-AF65-F5344CB8AC3E}">
+        <p14:creationId xmlns:p14="http://schemas.microsoft.com/office/powerpoint/2010/main" val="1024086991"/>
+      </p:ext>
+    </p:extLst>
+  </p:cSld>
+  <p:clrMapOvr>
+    <a:masterClrMapping/>
+  </p:clrMapOvr>
+</p:notes>
+</file>
+
+<file path=ppt/notesSlides/notesSlide18.xml><?xml version="1.0" encoding="utf-8"?>
+<p:notes xmlns:a="http://schemas.openxmlformats.org/drawingml/2006/main" xmlns:r="http://schemas.openxmlformats.org/officeDocument/2006/relationships" xmlns:p="http://schemas.openxmlformats.org/presentationml/2006/main">
+  <p:cSld>
+    <p:spTree>
+      <p:nvGrpSpPr>
+        <p:cNvPr id="1" name=""/>
+        <p:cNvGrpSpPr/>
+        <p:nvPr/>
+      </p:nvGrpSpPr>
+      <p:grpSpPr>
+        <a:xfrm>
+          <a:off x="0" y="0"/>
+          <a:ext cx="0" cy="0"/>
+          <a:chOff x="0" y="0"/>
+          <a:chExt cx="0" cy="0"/>
+        </a:xfrm>
+      </p:grpSpPr>
+      <p:sp>
+        <p:nvSpPr>
+          <p:cNvPr id="2" name="Slide Image Placeholder 1"/>
+          <p:cNvSpPr>
+            <a:spLocks noGrp="1" noRot="1" noChangeAspect="1"/>
+          </p:cNvSpPr>
+          <p:nvPr>
+            <p:ph type="sldImg"/>
+          </p:nvPr>
+        </p:nvSpPr>
+        <p:spPr/>
+      </p:sp>
+      <p:sp>
+        <p:nvSpPr>
+          <p:cNvPr id="3" name="Notes Placeholder 2"/>
+          <p:cNvSpPr>
+            <a:spLocks noGrp="1"/>
+          </p:cNvSpPr>
+          <p:nvPr>
+            <p:ph type="body" idx="1"/>
+          </p:nvPr>
+        </p:nvSpPr>
+        <p:spPr/>
+        <p:txBody>
+          <a:bodyPr/>
+          <a:lstStyle/>
+          <a:p>
+            <a:r>
+              <a:rPr lang="en-US" dirty="0"/>
+              <a:t>まとめです。学力向上は、知識の積み上げだけで実現するものではありません。
+みらい青空学園では、自己肯定感、対話・協働、学習の自己調整が着実に育成されています。これこそが、施設一体型小中一貫教育校としての最大の強みであり、学力調査結果を支える土台です。
+今後も、９年間を見通した学びの充実に期待しています。本日はありがとうございました。</a:t>
+            </a:r>
+            <a:endParaRPr lang="en-US" dirty="0"/>
+          </a:p>
+        </p:txBody>
+      </p:sp>
+      <p:sp>
+        <p:nvSpPr>
+          <p:cNvPr id="4" name="Slide Number Placeholder 3"/>
+          <p:cNvSpPr>
+            <a:spLocks noGrp="1"/>
+          </p:cNvSpPr>
+          <p:nvPr>
+            <p:ph type="sldNum" sz="quarter" idx="10"/>
+          </p:nvPr>
+        </p:nvSpPr>
+        <p:spPr/>
+        <p:txBody>
+          <a:bodyPr/>
+          <a:lstStyle/>
+          <a:p>
+            <a:fld id="{F7021451-1387-4CA6-816F-3879F97B5CBC}" type="slidenum">
+              <a:rPr lang="en-US"/>
+              <a:t>18</a:t>
             </a:fld>
             <a:endParaRPr lang="en-US"/>
           </a:p>
@@ -1950,8 +2040,9 @@
           <a:p>
             <a:r>
               <a:rPr lang="en-US" dirty="0"/>
-              <a:t>調査結果はあくまで「結果」です。大切なのは、その結果を生み出している要因です。
-本日の３つの授業から、自己肯定感、対話・協働、学習の自己調整という３つが見えてきました。順にお話しします。</a:t>
+              <a:t>こちらは、本校の数値と練馬区平均の比較です。
+自己肯定感、対話・協働、学習の自己調整。本日お話しする３つの視点に対応する質問項目を並べました。
+本校の数値は、練馬区平均を上回っています。これは調査の一時点の結果ですが、その背景には、本日の授業で拝見した先生方の手だての積み重ねがあると受け止めています。</a:t>
             </a:r>
             <a:endParaRPr lang="en-US" dirty="0"/>
           </a:p>
@@ -2608,7 +2699,7 @@
                 <a:ea typeface="メイリオ" pitchFamily="34" charset="-122"/>
                 <a:cs typeface="メイリオ" pitchFamily="34" charset="-120"/>
               </a:rPr>
-              <a:t>　２　５校時の授業について</a:t>
+              <a:t>　指導・講評</a:t>
             </a:r>
             <a:endParaRPr lang="en-US" sz="3000" dirty="0"/>
           </a:p>
@@ -2628,7 +2719,7 @@
                 <a:ea typeface="メイリオ" pitchFamily="34" charset="-122"/>
                 <a:cs typeface="メイリオ" pitchFamily="34" charset="-120"/>
               </a:rPr>
-              <a:t>　①　自己肯定感</a:t>
+              <a:t>　学力調査結果から見える強み</a:t>
             </a:r>
             <a:endParaRPr lang="en-US" sz="3000" dirty="0"/>
           </a:p>
@@ -2642,8 +2733,8 @@
         </p:nvSpPr>
         <p:spPr>
           <a:xfrm>
-            <a:off x="475488" y="1481328"/>
-            <a:ext cx="8193024" cy="1005840"/>
+            <a:off x="475488" y="1417320"/>
+            <a:ext cx="8193024" cy="868680"/>
           </a:xfrm>
           <a:prstGeom prst="rect">
             <a:avLst/>
@@ -2662,7 +2753,7 @@
               <a:buNone/>
             </a:pPr>
             <a:r>
-              <a:rPr lang="en-US" sz="2400" b="1" dirty="0">
+              <a:rPr lang="en-US" sz="2000" b="1" dirty="0">
                 <a:solidFill>
                   <a:srgbClr val="595959"/>
                 </a:solidFill>
@@ -2670,9 +2761,9 @@
                 <a:ea typeface="メイリオ" pitchFamily="34" charset="-122"/>
                 <a:cs typeface="メイリオ" pitchFamily="34" charset="-120"/>
               </a:rPr>
-              <a:t>これからの時代、学力向上の基盤となるのは</a:t>
-            </a:r>
-            <a:endParaRPr lang="en-US" sz="2400" dirty="0"/>
+              <a:t>学力調査結果は「結果」である。</a:t>
+            </a:r>
+            <a:endParaRPr lang="en-US" sz="2000" dirty="0"/>
           </a:p>
           <a:p>
             <a:pPr algn="l" indent="0" marL="0">
@@ -2682,7 +2773,7 @@
               <a:buNone/>
             </a:pPr>
             <a:r>
-              <a:rPr lang="en-US" sz="2400" b="1" dirty="0">
+              <a:rPr lang="en-US" sz="2000" b="1" dirty="0">
                 <a:solidFill>
                   <a:srgbClr val="595959"/>
                 </a:solidFill>
@@ -2690,7 +2781,7 @@
                 <a:ea typeface="メイリオ" pitchFamily="34" charset="-122"/>
                 <a:cs typeface="メイリオ" pitchFamily="34" charset="-120"/>
               </a:rPr>
-              <a:t>　</a:t>
+              <a:t>では、</a:t>
             </a:r>
             <a:pPr algn="l" indent="0" marL="0">
               <a:lnSpc>
@@ -2699,7 +2790,7 @@
               <a:buNone/>
             </a:pPr>
             <a:r>
-              <a:rPr lang="en-US" sz="2400" b="1" dirty="0">
+              <a:rPr lang="en-US" sz="2000" b="1" dirty="0">
                 <a:solidFill>
                   <a:srgbClr val="EE7B08"/>
                 </a:solidFill>
@@ -2707,7 +2798,7 @@
                 <a:ea typeface="メイリオ" pitchFamily="34" charset="-122"/>
                 <a:cs typeface="メイリオ" pitchFamily="34" charset="-120"/>
               </a:rPr>
-              <a:t>自己肯定感</a:t>
+              <a:t>その結果を生み出した要因は何か</a:t>
             </a:r>
             <a:pPr algn="l" indent="0" marL="0">
               <a:lnSpc>
@@ -2716,7 +2807,7 @@
               <a:buNone/>
             </a:pPr>
             <a:r>
-              <a:rPr lang="en-US" sz="2400" b="1" dirty="0">
+              <a:rPr lang="en-US" sz="2000" b="1" dirty="0">
                 <a:solidFill>
                   <a:srgbClr val="595959"/>
                 </a:solidFill>
@@ -2724,26 +2815,65 @@
                 <a:ea typeface="メイリオ" pitchFamily="34" charset="-122"/>
                 <a:cs typeface="メイリオ" pitchFamily="34" charset="-120"/>
               </a:rPr>
-              <a:t>である。</a:t>
-            </a:r>
-            <a:endParaRPr lang="en-US" sz="2400" dirty="0"/>
-          </a:p>
-        </p:txBody>
-      </p:sp>
-      <p:sp>
-        <p:nvSpPr>
-          <p:cNvPr id="4" name="Shape 2"/>
+              <a:t>。</a:t>
+            </a:r>
+            <a:endParaRPr lang="en-US" sz="2000" dirty="0"/>
+          </a:p>
+        </p:txBody>
+      </p:sp>
+      <p:sp>
+        <p:nvSpPr>
+          <p:cNvPr id="4" name="Text 2"/>
+          <p:cNvSpPr txBox="1"/>
+          <p:nvPr/>
+        </p:nvSpPr>
+        <p:spPr>
+          <a:xfrm>
+            <a:off x="475488" y="2286000"/>
+            <a:ext cx="8193024" cy="347472"/>
+          </a:xfrm>
+          <a:prstGeom prst="rect">
+            <a:avLst/>
+          </a:prstGeom>
+          <a:noFill/>
+          <a:ln/>
+        </p:spPr>
+        <p:txBody>
+          <a:bodyPr wrap="square" lIns="0" tIns="0" rIns="0" bIns="0" rtlCol="0" anchor="ctr"/>
+          <a:lstStyle/>
+          <a:p>
+            <a:pPr algn="l" indent="0" marL="0">
+              <a:buNone/>
+            </a:pPr>
+            <a:r>
+              <a:rPr lang="en-US" sz="1500" b="1" dirty="0">
+                <a:solidFill>
+                  <a:srgbClr val="808080"/>
+                </a:solidFill>
+                <a:latin typeface="メイリオ" pitchFamily="34" charset="0"/>
+                <a:ea typeface="メイリオ" pitchFamily="34" charset="-122"/>
+                <a:cs typeface="メイリオ" pitchFamily="34" charset="-120"/>
+              </a:rPr>
+              <a:t>本日の授業から、次の３つが見えてきた。</a:t>
+            </a:r>
+            <a:endParaRPr lang="en-US" sz="1500" dirty="0"/>
+          </a:p>
+        </p:txBody>
+      </p:sp>
+      <p:sp>
+        <p:nvSpPr>
+          <p:cNvPr id="5" name="Shape 3"/>
           <p:cNvSpPr/>
           <p:nvPr/>
         </p:nvSpPr>
         <p:spPr>
           <a:xfrm>
-            <a:off x="475488" y="2697480"/>
-            <a:ext cx="8193024" cy="1737360"/>
+            <a:off x="475488" y="2724912"/>
+            <a:ext cx="2468880" cy="1417320"/>
           </a:xfrm>
           <a:prstGeom prst="roundRect">
             <a:avLst>
-              <a:gd name="adj" fmla="val 3158"/>
+              <a:gd name="adj" fmla="val 3871"/>
             </a:avLst>
           </a:prstGeom>
           <a:solidFill>
@@ -2759,53 +2889,378 @@
       </p:sp>
       <p:sp>
         <p:nvSpPr>
-          <p:cNvPr id="5" name="Text 3"/>
-          <p:cNvSpPr txBox="1"/>
-          <p:nvPr/>
-        </p:nvSpPr>
-        <p:spPr>
-          <a:xfrm>
-            <a:off x="731520" y="2852928"/>
-            <a:ext cx="7680960" cy="1417320"/>
-          </a:xfrm>
-          <a:prstGeom prst="rect">
-            <a:avLst/>
-          </a:prstGeom>
-          <a:noFill/>
-          <a:ln/>
-        </p:spPr>
-        <p:txBody>
-          <a:bodyPr wrap="square" lIns="0" tIns="0" rIns="0" bIns="0" rtlCol="0" anchor="t"/>
-          <a:lstStyle/>
-          <a:p>
-            <a:pPr algn="l" indent="0" marL="0">
-              <a:lnSpc>
-                <a:spcPct val="130000"/>
-              </a:lnSpc>
-              <a:buNone/>
-            </a:pPr>
-            <a:r>
-              <a:rPr lang="en-US" sz="1700" b="1" dirty="0">
-                <a:solidFill>
-                  <a:srgbClr val="44C1A3"/>
-                </a:solidFill>
-                <a:latin typeface="メイリオ" pitchFamily="34" charset="0"/>
-                <a:ea typeface="メイリオ" pitchFamily="34" charset="-122"/>
-                <a:cs typeface="メイリオ" pitchFamily="34" charset="-120"/>
-              </a:rPr>
-              <a:t>自己肯定感とは</a:t>
-            </a:r>
-            <a:endParaRPr lang="en-US" sz="1700" dirty="0"/>
-          </a:p>
-          <a:p>
-            <a:pPr algn="l" indent="0" marL="0">
-              <a:lnSpc>
-                <a:spcPct val="130000"/>
-              </a:lnSpc>
-              <a:buNone/>
-            </a:pPr>
-            <a:r>
-              <a:rPr lang="en-US" sz="2200" b="1" dirty="0">
+          <p:cNvPr id="6" name="Shape 4"/>
+          <p:cNvSpPr/>
+          <p:nvPr/>
+        </p:nvSpPr>
+        <p:spPr>
+          <a:xfrm>
+            <a:off x="1481328" y="2889504"/>
+            <a:ext cx="457200" cy="457200"/>
+          </a:xfrm>
+          <a:prstGeom prst="ellipse">
+            <a:avLst/>
+          </a:prstGeom>
+          <a:solidFill>
+            <a:srgbClr val="44C1A3"/>
+          </a:solidFill>
+          <a:ln/>
+        </p:spPr>
+      </p:sp>
+      <p:sp>
+        <p:nvSpPr>
+          <p:cNvPr id="7" name="Text 5"/>
+          <p:cNvSpPr txBox="1"/>
+          <p:nvPr/>
+        </p:nvSpPr>
+        <p:spPr>
+          <a:xfrm>
+            <a:off x="1481328" y="2889504"/>
+            <a:ext cx="457200" cy="457200"/>
+          </a:xfrm>
+          <a:prstGeom prst="rect">
+            <a:avLst/>
+          </a:prstGeom>
+          <a:noFill/>
+          <a:ln/>
+        </p:spPr>
+        <p:txBody>
+          <a:bodyPr wrap="square" lIns="0" tIns="0" rIns="0" bIns="0" rtlCol="0" anchor="ctr"/>
+          <a:lstStyle/>
+          <a:p>
+            <a:pPr algn="ctr" indent="0" marL="0">
+              <a:buNone/>
+            </a:pPr>
+            <a:r>
+              <a:rPr lang="en-US" sz="2300" b="1" dirty="0">
+                <a:solidFill>
+                  <a:srgbClr val="FFFFFF"/>
+                </a:solidFill>
+                <a:latin typeface="メイリオ" pitchFamily="34" charset="0"/>
+                <a:ea typeface="メイリオ" pitchFamily="34" charset="-122"/>
+                <a:cs typeface="メイリオ" pitchFamily="34" charset="-120"/>
+              </a:rPr>
+              <a:t>①</a:t>
+            </a:r>
+            <a:endParaRPr lang="en-US" sz="2300" dirty="0"/>
+          </a:p>
+        </p:txBody>
+      </p:sp>
+      <p:sp>
+        <p:nvSpPr>
+          <p:cNvPr id="8" name="Text 6"/>
+          <p:cNvSpPr txBox="1"/>
+          <p:nvPr/>
+        </p:nvSpPr>
+        <p:spPr>
+          <a:xfrm>
+            <a:off x="566928" y="3438144"/>
+            <a:ext cx="2286000" cy="502920"/>
+          </a:xfrm>
+          <a:prstGeom prst="rect">
+            <a:avLst/>
+          </a:prstGeom>
+          <a:noFill/>
+          <a:ln/>
+        </p:spPr>
+        <p:txBody>
+          <a:bodyPr wrap="square" lIns="0" tIns="0" rIns="0" bIns="0" rtlCol="0" anchor="ctr"/>
+          <a:lstStyle/>
+          <a:p>
+            <a:pPr algn="ctr" indent="0" marL="0">
+              <a:buNone/>
+            </a:pPr>
+            <a:r>
+              <a:rPr lang="en-US" sz="1800" b="1" dirty="0">
+                <a:solidFill>
+                  <a:srgbClr val="EE7B08"/>
+                </a:solidFill>
+                <a:latin typeface="メイリオ" pitchFamily="34" charset="0"/>
+                <a:ea typeface="メイリオ" pitchFamily="34" charset="-122"/>
+                <a:cs typeface="メイリオ" pitchFamily="34" charset="-120"/>
+              </a:rPr>
+              <a:t>自己肯定感</a:t>
+            </a:r>
+            <a:endParaRPr lang="en-US" sz="1800" dirty="0"/>
+          </a:p>
+        </p:txBody>
+      </p:sp>
+      <p:sp>
+        <p:nvSpPr>
+          <p:cNvPr id="9" name="Shape 7"/>
+          <p:cNvSpPr/>
+          <p:nvPr/>
+        </p:nvSpPr>
+        <p:spPr>
+          <a:xfrm>
+            <a:off x="3218688" y="2724912"/>
+            <a:ext cx="2468880" cy="1417320"/>
+          </a:xfrm>
+          <a:prstGeom prst="roundRect">
+            <a:avLst>
+              <a:gd name="adj" fmla="val 3871"/>
+            </a:avLst>
+          </a:prstGeom>
+          <a:solidFill>
+            <a:srgbClr val="E9F7F3"/>
+          </a:solidFill>
+          <a:ln w="12700">
+            <a:solidFill>
+              <a:srgbClr val="B9E5DA"/>
+            </a:solidFill>
+            <a:prstDash val="solid"/>
+          </a:ln>
+        </p:spPr>
+      </p:sp>
+      <p:sp>
+        <p:nvSpPr>
+          <p:cNvPr id="10" name="Shape 8"/>
+          <p:cNvSpPr/>
+          <p:nvPr/>
+        </p:nvSpPr>
+        <p:spPr>
+          <a:xfrm>
+            <a:off x="4224528" y="2889504"/>
+            <a:ext cx="457200" cy="457200"/>
+          </a:xfrm>
+          <a:prstGeom prst="ellipse">
+            <a:avLst/>
+          </a:prstGeom>
+          <a:solidFill>
+            <a:srgbClr val="44C1A3"/>
+          </a:solidFill>
+          <a:ln/>
+        </p:spPr>
+      </p:sp>
+      <p:sp>
+        <p:nvSpPr>
+          <p:cNvPr id="11" name="Text 9"/>
+          <p:cNvSpPr txBox="1"/>
+          <p:nvPr/>
+        </p:nvSpPr>
+        <p:spPr>
+          <a:xfrm>
+            <a:off x="4224528" y="2889504"/>
+            <a:ext cx="457200" cy="457200"/>
+          </a:xfrm>
+          <a:prstGeom prst="rect">
+            <a:avLst/>
+          </a:prstGeom>
+          <a:noFill/>
+          <a:ln/>
+        </p:spPr>
+        <p:txBody>
+          <a:bodyPr wrap="square" lIns="0" tIns="0" rIns="0" bIns="0" rtlCol="0" anchor="ctr"/>
+          <a:lstStyle/>
+          <a:p>
+            <a:pPr algn="ctr" indent="0" marL="0">
+              <a:buNone/>
+            </a:pPr>
+            <a:r>
+              <a:rPr lang="en-US" sz="2300" b="1" dirty="0">
+                <a:solidFill>
+                  <a:srgbClr val="FFFFFF"/>
+                </a:solidFill>
+                <a:latin typeface="メイリオ" pitchFamily="34" charset="0"/>
+                <a:ea typeface="メイリオ" pitchFamily="34" charset="-122"/>
+                <a:cs typeface="メイリオ" pitchFamily="34" charset="-120"/>
+              </a:rPr>
+              <a:t>②</a:t>
+            </a:r>
+            <a:endParaRPr lang="en-US" sz="2300" dirty="0"/>
+          </a:p>
+        </p:txBody>
+      </p:sp>
+      <p:sp>
+        <p:nvSpPr>
+          <p:cNvPr id="12" name="Text 10"/>
+          <p:cNvSpPr txBox="1"/>
+          <p:nvPr/>
+        </p:nvSpPr>
+        <p:spPr>
+          <a:xfrm>
+            <a:off x="3310128" y="3438144"/>
+            <a:ext cx="2286000" cy="502920"/>
+          </a:xfrm>
+          <a:prstGeom prst="rect">
+            <a:avLst/>
+          </a:prstGeom>
+          <a:noFill/>
+          <a:ln/>
+        </p:spPr>
+        <p:txBody>
+          <a:bodyPr wrap="square" lIns="0" tIns="0" rIns="0" bIns="0" rtlCol="0" anchor="ctr"/>
+          <a:lstStyle/>
+          <a:p>
+            <a:pPr algn="ctr" indent="0" marL="0">
+              <a:buNone/>
+            </a:pPr>
+            <a:r>
+              <a:rPr lang="en-US" sz="1800" b="1" dirty="0">
+                <a:solidFill>
+                  <a:srgbClr val="EE7B08"/>
+                </a:solidFill>
+                <a:latin typeface="メイリオ" pitchFamily="34" charset="0"/>
+                <a:ea typeface="メイリオ" pitchFamily="34" charset="-122"/>
+                <a:cs typeface="メイリオ" pitchFamily="34" charset="-120"/>
+              </a:rPr>
+              <a:t>対話・協働</a:t>
+            </a:r>
+            <a:endParaRPr lang="en-US" sz="1800" dirty="0"/>
+          </a:p>
+        </p:txBody>
+      </p:sp>
+      <p:sp>
+        <p:nvSpPr>
+          <p:cNvPr id="13" name="Shape 11"/>
+          <p:cNvSpPr/>
+          <p:nvPr/>
+        </p:nvSpPr>
+        <p:spPr>
+          <a:xfrm>
+            <a:off x="5961888" y="2724912"/>
+            <a:ext cx="2468880" cy="1417320"/>
+          </a:xfrm>
+          <a:prstGeom prst="roundRect">
+            <a:avLst>
+              <a:gd name="adj" fmla="val 3871"/>
+            </a:avLst>
+          </a:prstGeom>
+          <a:solidFill>
+            <a:srgbClr val="E9F7F3"/>
+          </a:solidFill>
+          <a:ln w="12700">
+            <a:solidFill>
+              <a:srgbClr val="B9E5DA"/>
+            </a:solidFill>
+            <a:prstDash val="solid"/>
+          </a:ln>
+        </p:spPr>
+      </p:sp>
+      <p:sp>
+        <p:nvSpPr>
+          <p:cNvPr id="14" name="Shape 12"/>
+          <p:cNvSpPr/>
+          <p:nvPr/>
+        </p:nvSpPr>
+        <p:spPr>
+          <a:xfrm>
+            <a:off x="6967728" y="2889504"/>
+            <a:ext cx="457200" cy="457200"/>
+          </a:xfrm>
+          <a:prstGeom prst="ellipse">
+            <a:avLst/>
+          </a:prstGeom>
+          <a:solidFill>
+            <a:srgbClr val="44C1A3"/>
+          </a:solidFill>
+          <a:ln/>
+        </p:spPr>
+      </p:sp>
+      <p:sp>
+        <p:nvSpPr>
+          <p:cNvPr id="15" name="Text 13"/>
+          <p:cNvSpPr txBox="1"/>
+          <p:nvPr/>
+        </p:nvSpPr>
+        <p:spPr>
+          <a:xfrm>
+            <a:off x="6967728" y="2889504"/>
+            <a:ext cx="457200" cy="457200"/>
+          </a:xfrm>
+          <a:prstGeom prst="rect">
+            <a:avLst/>
+          </a:prstGeom>
+          <a:noFill/>
+          <a:ln/>
+        </p:spPr>
+        <p:txBody>
+          <a:bodyPr wrap="square" lIns="0" tIns="0" rIns="0" bIns="0" rtlCol="0" anchor="ctr"/>
+          <a:lstStyle/>
+          <a:p>
+            <a:pPr algn="ctr" indent="0" marL="0">
+              <a:buNone/>
+            </a:pPr>
+            <a:r>
+              <a:rPr lang="en-US" sz="2300" b="1" dirty="0">
+                <a:solidFill>
+                  <a:srgbClr val="FFFFFF"/>
+                </a:solidFill>
+                <a:latin typeface="メイリオ" pitchFamily="34" charset="0"/>
+                <a:ea typeface="メイリオ" pitchFamily="34" charset="-122"/>
+                <a:cs typeface="メイリオ" pitchFamily="34" charset="-120"/>
+              </a:rPr>
+              <a:t>③</a:t>
+            </a:r>
+            <a:endParaRPr lang="en-US" sz="2300" dirty="0"/>
+          </a:p>
+        </p:txBody>
+      </p:sp>
+      <p:sp>
+        <p:nvSpPr>
+          <p:cNvPr id="16" name="Text 14"/>
+          <p:cNvSpPr txBox="1"/>
+          <p:nvPr/>
+        </p:nvSpPr>
+        <p:spPr>
+          <a:xfrm>
+            <a:off x="6053328" y="3438144"/>
+            <a:ext cx="2286000" cy="502920"/>
+          </a:xfrm>
+          <a:prstGeom prst="rect">
+            <a:avLst/>
+          </a:prstGeom>
+          <a:noFill/>
+          <a:ln/>
+        </p:spPr>
+        <p:txBody>
+          <a:bodyPr wrap="square" lIns="0" tIns="0" rIns="0" bIns="0" rtlCol="0" anchor="ctr"/>
+          <a:lstStyle/>
+          <a:p>
+            <a:pPr algn="ctr" indent="0" marL="0">
+              <a:buNone/>
+            </a:pPr>
+            <a:r>
+              <a:rPr lang="en-US" sz="1800" b="1" dirty="0">
+                <a:solidFill>
+                  <a:srgbClr val="EE7B08"/>
+                </a:solidFill>
+                <a:latin typeface="メイリオ" pitchFamily="34" charset="0"/>
+                <a:ea typeface="メイリオ" pitchFamily="34" charset="-122"/>
+                <a:cs typeface="メイリオ" pitchFamily="34" charset="-120"/>
+              </a:rPr>
+              <a:t>学習の自己調整</a:t>
+            </a:r>
+            <a:endParaRPr lang="en-US" sz="1800" dirty="0"/>
+          </a:p>
+        </p:txBody>
+      </p:sp>
+      <p:sp>
+        <p:nvSpPr>
+          <p:cNvPr id="17" name="Text 15"/>
+          <p:cNvSpPr txBox="1"/>
+          <p:nvPr/>
+        </p:nvSpPr>
+        <p:spPr>
+          <a:xfrm>
+            <a:off x="475488" y="4261104"/>
+            <a:ext cx="8193024" cy="347472"/>
+          </a:xfrm>
+          <a:prstGeom prst="rect">
+            <a:avLst/>
+          </a:prstGeom>
+          <a:noFill/>
+          <a:ln/>
+        </p:spPr>
+        <p:txBody>
+          <a:bodyPr wrap="square" lIns="0" tIns="0" rIns="0" bIns="0" rtlCol="0" anchor="ctr"/>
+          <a:lstStyle/>
+          <a:p>
+            <a:pPr algn="l" indent="0" marL="0">
+              <a:buNone/>
+            </a:pPr>
+            <a:r>
+              <a:rPr lang="en-US" sz="1500" b="1" dirty="0">
                 <a:solidFill>
                   <a:srgbClr val="595959"/>
                 </a:solidFill>
@@ -2813,29 +3268,9 @@
                 <a:ea typeface="メイリオ" pitchFamily="34" charset="-122"/>
                 <a:cs typeface="メイリオ" pitchFamily="34" charset="-120"/>
               </a:rPr>
-              <a:t>「できる子になる」ことではなく、</a:t>
-            </a:r>
-            <a:endParaRPr lang="en-US" sz="1700" dirty="0"/>
-          </a:p>
-          <a:p>
-            <a:pPr algn="l" indent="0" marL="0">
-              <a:lnSpc>
-                <a:spcPct val="130000"/>
-              </a:lnSpc>
-              <a:buNone/>
-            </a:pPr>
-            <a:r>
-              <a:rPr lang="en-US" sz="2200" b="1" dirty="0">
-                <a:solidFill>
-                  <a:srgbClr val="EE7B08"/>
-                </a:solidFill>
-                <a:latin typeface="メイリオ" pitchFamily="34" charset="0"/>
-                <a:ea typeface="メイリオ" pitchFamily="34" charset="-122"/>
-                <a:cs typeface="メイリオ" pitchFamily="34" charset="-120"/>
-              </a:rPr>
-              <a:t>「成長できる自分を信じること」である。</a:t>
-            </a:r>
-            <a:endParaRPr lang="en-US" sz="1700" dirty="0"/>
+              <a:t>この３つが、学力調査結果を支える土台になっている。</a:t>
+            </a:r>
+            <a:endParaRPr lang="en-US" sz="1500" dirty="0"/>
           </a:p>
         </p:txBody>
       </p:sp>
@@ -2922,7 +3357,7 @@
                 <a:ea typeface="メイリオ" pitchFamily="34" charset="-122"/>
                 <a:cs typeface="メイリオ" pitchFamily="34" charset="-120"/>
               </a:rPr>
-              <a:t>　①　自己肯定感を育む授業</a:t>
+              <a:t>　①　自己肯定感</a:t>
             </a:r>
             <a:endParaRPr lang="en-US" sz="3000" dirty="0"/>
           </a:p>
@@ -2930,18 +3365,114 @@
       </p:sp>
       <p:sp>
         <p:nvSpPr>
-          <p:cNvPr id="3" name="Shape 1"/>
+          <p:cNvPr id="3" name="Text 1"/>
+          <p:cNvSpPr txBox="1"/>
+          <p:nvPr/>
+        </p:nvSpPr>
+        <p:spPr>
+          <a:xfrm>
+            <a:off x="475488" y="1481328"/>
+            <a:ext cx="8193024" cy="1005840"/>
+          </a:xfrm>
+          <a:prstGeom prst="rect">
+            <a:avLst/>
+          </a:prstGeom>
+          <a:noFill/>
+          <a:ln/>
+        </p:spPr>
+        <p:txBody>
+          <a:bodyPr wrap="square" lIns="0" tIns="0" rIns="0" bIns="0" rtlCol="0" anchor="t"/>
+          <a:lstStyle/>
+          <a:p>
+            <a:pPr algn="l" indent="0" marL="0">
+              <a:lnSpc>
+                <a:spcPct val="120000"/>
+              </a:lnSpc>
+              <a:buNone/>
+            </a:pPr>
+            <a:r>
+              <a:rPr lang="en-US" sz="2400" b="1" dirty="0">
+                <a:solidFill>
+                  <a:srgbClr val="595959"/>
+                </a:solidFill>
+                <a:latin typeface="メイリオ" pitchFamily="34" charset="0"/>
+                <a:ea typeface="メイリオ" pitchFamily="34" charset="-122"/>
+                <a:cs typeface="メイリオ" pitchFamily="34" charset="-120"/>
+              </a:rPr>
+              <a:t>これからの時代、学力向上の基盤となるのは</a:t>
+            </a:r>
+            <a:endParaRPr lang="en-US" sz="2400" dirty="0"/>
+          </a:p>
+          <a:p>
+            <a:pPr algn="l" indent="0" marL="0">
+              <a:lnSpc>
+                <a:spcPct val="120000"/>
+              </a:lnSpc>
+              <a:buNone/>
+            </a:pPr>
+            <a:r>
+              <a:rPr lang="en-US" sz="2400" b="1" dirty="0">
+                <a:solidFill>
+                  <a:srgbClr val="595959"/>
+                </a:solidFill>
+                <a:latin typeface="メイリオ" pitchFamily="34" charset="0"/>
+                <a:ea typeface="メイリオ" pitchFamily="34" charset="-122"/>
+                <a:cs typeface="メイリオ" pitchFamily="34" charset="-120"/>
+              </a:rPr>
+              <a:t>　</a:t>
+            </a:r>
+            <a:pPr algn="l" indent="0" marL="0">
+              <a:lnSpc>
+                <a:spcPct val="120000"/>
+              </a:lnSpc>
+              <a:buNone/>
+            </a:pPr>
+            <a:r>
+              <a:rPr lang="en-US" sz="2400" b="1" dirty="0">
+                <a:solidFill>
+                  <a:srgbClr val="EE7B08"/>
+                </a:solidFill>
+                <a:latin typeface="メイリオ" pitchFamily="34" charset="0"/>
+                <a:ea typeface="メイリオ" pitchFamily="34" charset="-122"/>
+                <a:cs typeface="メイリオ" pitchFamily="34" charset="-120"/>
+              </a:rPr>
+              <a:t>自己肯定感</a:t>
+            </a:r>
+            <a:pPr algn="l" indent="0" marL="0">
+              <a:lnSpc>
+                <a:spcPct val="120000"/>
+              </a:lnSpc>
+              <a:buNone/>
+            </a:pPr>
+            <a:r>
+              <a:rPr lang="en-US" sz="2400" b="1" dirty="0">
+                <a:solidFill>
+                  <a:srgbClr val="595959"/>
+                </a:solidFill>
+                <a:latin typeface="メイリオ" pitchFamily="34" charset="0"/>
+                <a:ea typeface="メイリオ" pitchFamily="34" charset="-122"/>
+                <a:cs typeface="メイリオ" pitchFamily="34" charset="-120"/>
+              </a:rPr>
+              <a:t>である。</a:t>
+            </a:r>
+            <a:endParaRPr lang="en-US" sz="2400" dirty="0"/>
+          </a:p>
+        </p:txBody>
+      </p:sp>
+      <p:sp>
+        <p:nvSpPr>
+          <p:cNvPr id="4" name="Shape 2"/>
           <p:cNvSpPr/>
           <p:nvPr/>
         </p:nvSpPr>
         <p:spPr>
           <a:xfrm>
-            <a:off x="320040" y="1417320"/>
-            <a:ext cx="2697480" cy="2395728"/>
+            <a:off x="475488" y="2697480"/>
+            <a:ext cx="8193024" cy="1737360"/>
           </a:xfrm>
           <a:prstGeom prst="roundRect">
             <a:avLst>
-              <a:gd name="adj" fmla="val 2290"/>
+              <a:gd name="adj" fmla="val 3158"/>
             </a:avLst>
           </a:prstGeom>
           <a:solidFill>
@@ -2957,30 +3488,33 @@
       </p:sp>
       <p:sp>
         <p:nvSpPr>
-          <p:cNvPr id="4" name="Text 2"/>
-          <p:cNvSpPr txBox="1"/>
-          <p:nvPr/>
-        </p:nvSpPr>
-        <p:spPr>
-          <a:xfrm>
-            <a:off x="466344" y="1527048"/>
-            <a:ext cx="2404872" cy="274320"/>
-          </a:xfrm>
-          <a:prstGeom prst="rect">
-            <a:avLst/>
-          </a:prstGeom>
-          <a:noFill/>
-          <a:ln/>
-        </p:spPr>
-        <p:txBody>
-          <a:bodyPr wrap="square" lIns="0" tIns="0" rIns="0" bIns="0" rtlCol="0" anchor="ctr"/>
-          <a:lstStyle/>
-          <a:p>
-            <a:pPr algn="l" indent="0" marL="0">
-              <a:buNone/>
-            </a:pPr>
-            <a:r>
-              <a:rPr lang="en-US" sz="1600" b="1" dirty="0">
+          <p:cNvPr id="5" name="Text 3"/>
+          <p:cNvSpPr txBox="1"/>
+          <p:nvPr/>
+        </p:nvSpPr>
+        <p:spPr>
+          <a:xfrm>
+            <a:off x="731520" y="2852928"/>
+            <a:ext cx="7680960" cy="1417320"/>
+          </a:xfrm>
+          <a:prstGeom prst="rect">
+            <a:avLst/>
+          </a:prstGeom>
+          <a:noFill/>
+          <a:ln/>
+        </p:spPr>
+        <p:txBody>
+          <a:bodyPr wrap="square" lIns="0" tIns="0" rIns="0" bIns="0" rtlCol="0" anchor="t"/>
+          <a:lstStyle/>
+          <a:p>
+            <a:pPr algn="l" indent="0" marL="0">
+              <a:lnSpc>
+                <a:spcPct val="130000"/>
+              </a:lnSpc>
+              <a:buNone/>
+            </a:pPr>
+            <a:r>
+              <a:rPr lang="en-US" sz="1700" b="1" dirty="0">
                 <a:solidFill>
                   <a:srgbClr val="44C1A3"/>
                 </a:solidFill>
@@ -2988,80 +3522,19 @@
                 <a:ea typeface="メイリオ" pitchFamily="34" charset="-122"/>
                 <a:cs typeface="メイリオ" pitchFamily="34" charset="-120"/>
               </a:rPr>
-              <a:t>田口　和磨　先生</a:t>
-            </a:r>
-            <a:endParaRPr lang="en-US" sz="1600" dirty="0"/>
-          </a:p>
-        </p:txBody>
-      </p:sp>
-      <p:sp>
-        <p:nvSpPr>
-          <p:cNvPr id="5" name="Text 3"/>
-          <p:cNvSpPr txBox="1"/>
-          <p:nvPr/>
-        </p:nvSpPr>
-        <p:spPr>
-          <a:xfrm>
-            <a:off x="466344" y="1801368"/>
-            <a:ext cx="2404872" cy="237744"/>
-          </a:xfrm>
-          <a:prstGeom prst="rect">
-            <a:avLst/>
-          </a:prstGeom>
-          <a:noFill/>
-          <a:ln/>
-        </p:spPr>
-        <p:txBody>
-          <a:bodyPr wrap="square" lIns="0" tIns="0" rIns="0" bIns="0" rtlCol="0" anchor="ctr"/>
-          <a:lstStyle/>
-          <a:p>
-            <a:pPr algn="l" indent="0" marL="0">
-              <a:buNone/>
-            </a:pPr>
-            <a:r>
-              <a:rPr lang="en-US" sz="1100" b="1" dirty="0">
-                <a:solidFill>
-                  <a:srgbClr val="808080"/>
-                </a:solidFill>
-                <a:latin typeface="メイリオ" pitchFamily="34" charset="0"/>
-                <a:ea typeface="メイリオ" pitchFamily="34" charset="-122"/>
-                <a:cs typeface="メイリオ" pitchFamily="34" charset="-120"/>
-              </a:rPr>
-              <a:t>保健体育・９年ＡＢ組／水泳</a:t>
-            </a:r>
-            <a:endParaRPr lang="en-US" sz="1100" dirty="0"/>
-          </a:p>
-        </p:txBody>
-      </p:sp>
-      <p:sp>
-        <p:nvSpPr>
-          <p:cNvPr id="6" name="Text 4"/>
-          <p:cNvSpPr txBox="1"/>
-          <p:nvPr/>
-        </p:nvSpPr>
-        <p:spPr>
-          <a:xfrm>
-            <a:off x="466344" y="2075688"/>
-            <a:ext cx="2404872" cy="1609344"/>
-          </a:xfrm>
-          <a:prstGeom prst="rect">
-            <a:avLst/>
-          </a:prstGeom>
-          <a:noFill/>
-          <a:ln/>
-        </p:spPr>
-        <p:txBody>
-          <a:bodyPr wrap="square" lIns="0" tIns="0" rIns="0" bIns="0" rtlCol="0" anchor="t"/>
-          <a:lstStyle/>
-          <a:p>
-            <a:pPr algn="l" indent="0" marL="0">
-              <a:lnSpc>
-                <a:spcPct val="125000"/>
-              </a:lnSpc>
-              <a:buNone/>
-            </a:pPr>
-            <a:r>
-              <a:rPr lang="en-US" sz="1350" b="1" dirty="0">
+              <a:t>自己肯定感とは</a:t>
+            </a:r>
+            <a:endParaRPr lang="en-US" sz="1700" dirty="0"/>
+          </a:p>
+          <a:p>
+            <a:pPr algn="l" indent="0" marL="0">
+              <a:lnSpc>
+                <a:spcPct val="130000"/>
+              </a:lnSpc>
+              <a:buNone/>
+            </a:pPr>
+            <a:r>
+              <a:rPr lang="en-US" sz="2200" b="1" dirty="0">
                 <a:solidFill>
                   <a:srgbClr val="595959"/>
                 </a:solidFill>
@@ -3069,19 +3542,19 @@
                 <a:ea typeface="メイリオ" pitchFamily="34" charset="-122"/>
                 <a:cs typeface="メイリオ" pitchFamily="34" charset="-120"/>
               </a:rPr>
-              <a:t>泳力差の大きい集団に</a:t>
-            </a:r>
-            <a:endParaRPr lang="en-US" sz="1350" dirty="0"/>
-          </a:p>
-          <a:p>
-            <a:pPr algn="l" indent="0" marL="0">
-              <a:lnSpc>
-                <a:spcPct val="125000"/>
-              </a:lnSpc>
-              <a:buNone/>
-            </a:pPr>
-            <a:r>
-              <a:rPr lang="en-US" sz="1350" b="1" dirty="0">
+              <a:t>「できる子になる」ことではなく、</a:t>
+            </a:r>
+            <a:endParaRPr lang="en-US" sz="1700" dirty="0"/>
+          </a:p>
+          <a:p>
+            <a:pPr algn="l" indent="0" marL="0">
+              <a:lnSpc>
+                <a:spcPct val="130000"/>
+              </a:lnSpc>
+              <a:buNone/>
+            </a:pPr>
+            <a:r>
+              <a:rPr lang="en-US" sz="2200" b="1" dirty="0">
                 <a:solidFill>
                   <a:srgbClr val="EE7B08"/>
                 </a:solidFill>
@@ -3089,679 +3562,9 @@
                 <a:ea typeface="メイリオ" pitchFamily="34" charset="-122"/>
                 <a:cs typeface="メイリオ" pitchFamily="34" charset="-120"/>
               </a:rPr>
-              <a:t>・段階的な課題設定</a:t>
-            </a:r>
-            <a:endParaRPr lang="en-US" sz="1350" dirty="0"/>
-          </a:p>
-          <a:p>
-            <a:pPr algn="l" indent="0" marL="0">
-              <a:lnSpc>
-                <a:spcPct val="125000"/>
-              </a:lnSpc>
-              <a:buNone/>
-            </a:pPr>
-            <a:r>
-              <a:rPr lang="en-US" sz="1350" b="1" dirty="0">
-                <a:solidFill>
-                  <a:srgbClr val="EE7B08"/>
-                </a:solidFill>
-                <a:latin typeface="メイリオ" pitchFamily="34" charset="0"/>
-                <a:ea typeface="メイリオ" pitchFamily="34" charset="-122"/>
-                <a:cs typeface="メイリオ" pitchFamily="34" charset="-120"/>
-              </a:rPr>
-              <a:t>・泳力別のコース編成</a:t>
-            </a:r>
-            <a:endParaRPr lang="en-US" sz="1350" dirty="0"/>
-          </a:p>
-          <a:p>
-            <a:pPr algn="l" indent="0" marL="0">
-              <a:lnSpc>
-                <a:spcPct val="125000"/>
-              </a:lnSpc>
-              <a:buNone/>
-            </a:pPr>
-            <a:r>
-              <a:rPr lang="en-US" sz="1350" b="1" dirty="0">
-                <a:solidFill>
-                  <a:srgbClr val="EE7B08"/>
-                </a:solidFill>
-                <a:latin typeface="メイリオ" pitchFamily="34" charset="0"/>
-                <a:ea typeface="メイリオ" pitchFamily="34" charset="-122"/>
-                <a:cs typeface="メイリオ" pitchFamily="34" charset="-120"/>
-              </a:rPr>
-              <a:t>・バディでの確認活動</a:t>
-            </a:r>
-            <a:endParaRPr lang="en-US" sz="1350" dirty="0"/>
-          </a:p>
-          <a:p>
-            <a:pPr algn="l" indent="0" marL="0">
-              <a:lnSpc>
-                <a:spcPct val="125000"/>
-              </a:lnSpc>
-              <a:buNone/>
-            </a:pPr>
-            <a:r>
-              <a:rPr lang="en-US" sz="1350" b="1" dirty="0">
-                <a:solidFill>
-                  <a:srgbClr val="595959"/>
-                </a:solidFill>
-                <a:latin typeface="メイリオ" pitchFamily="34" charset="0"/>
-                <a:ea typeface="メイリオ" pitchFamily="34" charset="-122"/>
-                <a:cs typeface="メイリオ" pitchFamily="34" charset="-120"/>
-              </a:rPr>
-              <a:t>確認の視点を３点示し、</a:t>
-            </a:r>
-            <a:endParaRPr lang="en-US" sz="1350" dirty="0"/>
-          </a:p>
-          <a:p>
-            <a:pPr algn="l" indent="0" marL="0">
-              <a:lnSpc>
-                <a:spcPct val="125000"/>
-              </a:lnSpc>
-              <a:buNone/>
-            </a:pPr>
-            <a:r>
-              <a:rPr lang="en-US" sz="1350" b="1" dirty="0">
-                <a:solidFill>
-                  <a:srgbClr val="595959"/>
-                </a:solidFill>
-                <a:latin typeface="メイリオ" pitchFamily="34" charset="0"/>
-                <a:ea typeface="メイリオ" pitchFamily="34" charset="-122"/>
-                <a:cs typeface="メイリオ" pitchFamily="34" charset="-120"/>
-              </a:rPr>
-              <a:t>見る目を育てていた。</a:t>
-            </a:r>
-            <a:endParaRPr lang="en-US" sz="1350" dirty="0"/>
-          </a:p>
-        </p:txBody>
-      </p:sp>
-      <p:sp>
-        <p:nvSpPr>
-          <p:cNvPr id="7" name="Shape 5"/>
-          <p:cNvSpPr/>
-          <p:nvPr/>
-        </p:nvSpPr>
-        <p:spPr>
-          <a:xfrm>
-            <a:off x="3227832" y="1417320"/>
-            <a:ext cx="2697480" cy="2395728"/>
-          </a:xfrm>
-          <a:prstGeom prst="roundRect">
-            <a:avLst>
-              <a:gd name="adj" fmla="val 2290"/>
-            </a:avLst>
-          </a:prstGeom>
-          <a:solidFill>
-            <a:srgbClr val="E9F7F3"/>
-          </a:solidFill>
-          <a:ln w="12700">
-            <a:solidFill>
-              <a:srgbClr val="B9E5DA"/>
-            </a:solidFill>
-            <a:prstDash val="solid"/>
-          </a:ln>
-        </p:spPr>
-      </p:sp>
-      <p:sp>
-        <p:nvSpPr>
-          <p:cNvPr id="8" name="Text 6"/>
-          <p:cNvSpPr txBox="1"/>
-          <p:nvPr/>
-        </p:nvSpPr>
-        <p:spPr>
-          <a:xfrm>
-            <a:off x="3374136" y="1527048"/>
-            <a:ext cx="2404872" cy="274320"/>
-          </a:xfrm>
-          <a:prstGeom prst="rect">
-            <a:avLst/>
-          </a:prstGeom>
-          <a:noFill/>
-          <a:ln/>
-        </p:spPr>
-        <p:txBody>
-          <a:bodyPr wrap="square" lIns="0" tIns="0" rIns="0" bIns="0" rtlCol="0" anchor="ctr"/>
-          <a:lstStyle/>
-          <a:p>
-            <a:pPr algn="l" indent="0" marL="0">
-              <a:buNone/>
-            </a:pPr>
-            <a:r>
-              <a:rPr lang="en-US" sz="1600" b="1" dirty="0">
-                <a:solidFill>
-                  <a:srgbClr val="44C1A3"/>
-                </a:solidFill>
-                <a:latin typeface="メイリオ" pitchFamily="34" charset="0"/>
-                <a:ea typeface="メイリオ" pitchFamily="34" charset="-122"/>
-                <a:cs typeface="メイリオ" pitchFamily="34" charset="-120"/>
-              </a:rPr>
-              <a:t>東海林　静江　先生</a:t>
-            </a:r>
-            <a:endParaRPr lang="en-US" sz="1600" dirty="0"/>
-          </a:p>
-        </p:txBody>
-      </p:sp>
-      <p:sp>
-        <p:nvSpPr>
-          <p:cNvPr id="9" name="Text 7"/>
-          <p:cNvSpPr txBox="1"/>
-          <p:nvPr/>
-        </p:nvSpPr>
-        <p:spPr>
-          <a:xfrm>
-            <a:off x="3374136" y="1801368"/>
-            <a:ext cx="2404872" cy="237744"/>
-          </a:xfrm>
-          <a:prstGeom prst="rect">
-            <a:avLst/>
-          </a:prstGeom>
-          <a:noFill/>
-          <a:ln/>
-        </p:spPr>
-        <p:txBody>
-          <a:bodyPr wrap="square" lIns="0" tIns="0" rIns="0" bIns="0" rtlCol="0" anchor="ctr"/>
-          <a:lstStyle/>
-          <a:p>
-            <a:pPr algn="l" indent="0" marL="0">
-              <a:buNone/>
-            </a:pPr>
-            <a:r>
-              <a:rPr lang="en-US" sz="1100" b="1" dirty="0">
-                <a:solidFill>
-                  <a:srgbClr val="808080"/>
-                </a:solidFill>
-                <a:latin typeface="メイリオ" pitchFamily="34" charset="0"/>
-                <a:ea typeface="メイリオ" pitchFamily="34" charset="-122"/>
-                <a:cs typeface="メイリオ" pitchFamily="34" charset="-120"/>
-              </a:rPr>
-              <a:t>道徳・特別支援学級Ｄ組／うそ</a:t>
-            </a:r>
-            <a:endParaRPr lang="en-US" sz="1100" dirty="0"/>
-          </a:p>
-        </p:txBody>
-      </p:sp>
-      <p:sp>
-        <p:nvSpPr>
-          <p:cNvPr id="10" name="Text 8"/>
-          <p:cNvSpPr txBox="1"/>
-          <p:nvPr/>
-        </p:nvSpPr>
-        <p:spPr>
-          <a:xfrm>
-            <a:off x="3374136" y="2075688"/>
-            <a:ext cx="2404872" cy="1609344"/>
-          </a:xfrm>
-          <a:prstGeom prst="rect">
-            <a:avLst/>
-          </a:prstGeom>
-          <a:noFill/>
-          <a:ln/>
-        </p:spPr>
-        <p:txBody>
-          <a:bodyPr wrap="square" lIns="0" tIns="0" rIns="0" bIns="0" rtlCol="0" anchor="t"/>
-          <a:lstStyle/>
-          <a:p>
-            <a:pPr algn="l" indent="0" marL="0">
-              <a:lnSpc>
-                <a:spcPct val="125000"/>
-              </a:lnSpc>
-              <a:buNone/>
-            </a:pPr>
-            <a:r>
-              <a:rPr lang="en-US" sz="1350" b="1" dirty="0">
-                <a:solidFill>
-                  <a:srgbClr val="595959"/>
-                </a:solidFill>
-                <a:latin typeface="メイリオ" pitchFamily="34" charset="0"/>
-                <a:ea typeface="メイリオ" pitchFamily="34" charset="-122"/>
-                <a:cs typeface="メイリオ" pitchFamily="34" charset="-120"/>
-              </a:rPr>
-              <a:t>安心して自分の考えを</a:t>
-            </a:r>
-            <a:endParaRPr lang="en-US" sz="1350" dirty="0"/>
-          </a:p>
-          <a:p>
-            <a:pPr algn="l" indent="0" marL="0">
-              <a:lnSpc>
-                <a:spcPct val="125000"/>
-              </a:lnSpc>
-              <a:buNone/>
-            </a:pPr>
-            <a:r>
-              <a:rPr lang="en-US" sz="1350" b="1" dirty="0">
-                <a:solidFill>
-                  <a:srgbClr val="EE7B08"/>
-                </a:solidFill>
-                <a:latin typeface="メイリオ" pitchFamily="34" charset="0"/>
-                <a:ea typeface="メイリオ" pitchFamily="34" charset="-122"/>
-                <a:cs typeface="メイリオ" pitchFamily="34" charset="-120"/>
-              </a:rPr>
-              <a:t>表現できる環境</a:t>
-            </a:r>
-            <a:endParaRPr lang="en-US" sz="1350" dirty="0"/>
-          </a:p>
-          <a:p>
-            <a:pPr algn="l" indent="0" marL="0">
-              <a:lnSpc>
-                <a:spcPct val="125000"/>
-              </a:lnSpc>
-              <a:buNone/>
-            </a:pPr>
-            <a:r>
-              <a:rPr lang="en-US" sz="1350" b="1" dirty="0">
-                <a:solidFill>
-                  <a:srgbClr val="595959"/>
-                </a:solidFill>
-                <a:latin typeface="メイリオ" pitchFamily="34" charset="0"/>
-                <a:ea typeface="メイリオ" pitchFamily="34" charset="-122"/>
-                <a:cs typeface="メイリオ" pitchFamily="34" charset="-120"/>
-              </a:rPr>
-              <a:t>・前時の考えを尊重</a:t>
-            </a:r>
-            <a:endParaRPr lang="en-US" sz="1350" dirty="0"/>
-          </a:p>
-          <a:p>
-            <a:pPr algn="l" indent="0" marL="0">
-              <a:lnSpc>
-                <a:spcPct val="125000"/>
-              </a:lnSpc>
-              <a:buNone/>
-            </a:pPr>
-            <a:r>
-              <a:rPr lang="en-US" sz="1350" b="1" dirty="0">
-                <a:solidFill>
-                  <a:srgbClr val="EE7B08"/>
-                </a:solidFill>
-                <a:latin typeface="メイリオ" pitchFamily="34" charset="0"/>
-                <a:ea typeface="メイリオ" pitchFamily="34" charset="-122"/>
-                <a:cs typeface="メイリオ" pitchFamily="34" charset="-120"/>
-              </a:rPr>
-              <a:t>・意見が変わってよい</a:t>
-            </a:r>
-            <a:endParaRPr lang="en-US" sz="1350" dirty="0"/>
-          </a:p>
-          <a:p>
-            <a:pPr algn="l" indent="0" marL="0">
-              <a:lnSpc>
-                <a:spcPct val="125000"/>
-              </a:lnSpc>
-              <a:buNone/>
-            </a:pPr>
-            <a:r>
-              <a:rPr lang="en-US" sz="1350" b="1" dirty="0">
-                <a:solidFill>
-                  <a:srgbClr val="595959"/>
-                </a:solidFill>
-                <a:latin typeface="メイリオ" pitchFamily="34" charset="0"/>
-                <a:ea typeface="メイリオ" pitchFamily="34" charset="-122"/>
-                <a:cs typeface="メイリオ" pitchFamily="34" charset="-120"/>
-              </a:rPr>
-              <a:t>答えは一つではないと</a:t>
-            </a:r>
-            <a:endParaRPr lang="en-US" sz="1350" dirty="0"/>
-          </a:p>
-          <a:p>
-            <a:pPr algn="l" indent="0" marL="0">
-              <a:lnSpc>
-                <a:spcPct val="125000"/>
-              </a:lnSpc>
-              <a:buNone/>
-            </a:pPr>
-            <a:r>
-              <a:rPr lang="en-US" sz="1350" b="1" dirty="0">
-                <a:solidFill>
-                  <a:srgbClr val="595959"/>
-                </a:solidFill>
-                <a:latin typeface="メイリオ" pitchFamily="34" charset="0"/>
-                <a:ea typeface="メイリオ" pitchFamily="34" charset="-122"/>
-                <a:cs typeface="メイリオ" pitchFamily="34" charset="-120"/>
-              </a:rPr>
-              <a:t>保障されていた。</a:t>
-            </a:r>
-            <a:endParaRPr lang="en-US" sz="1350" dirty="0"/>
-          </a:p>
-        </p:txBody>
-      </p:sp>
-      <p:sp>
-        <p:nvSpPr>
-          <p:cNvPr id="11" name="Shape 9"/>
-          <p:cNvSpPr/>
-          <p:nvPr/>
-        </p:nvSpPr>
-        <p:spPr>
-          <a:xfrm>
-            <a:off x="6135624" y="1417320"/>
-            <a:ext cx="2697480" cy="2395728"/>
-          </a:xfrm>
-          <a:prstGeom prst="roundRect">
-            <a:avLst>
-              <a:gd name="adj" fmla="val 2290"/>
-            </a:avLst>
-          </a:prstGeom>
-          <a:solidFill>
-            <a:srgbClr val="E9F7F3"/>
-          </a:solidFill>
-          <a:ln w="12700">
-            <a:solidFill>
-              <a:srgbClr val="B9E5DA"/>
-            </a:solidFill>
-            <a:prstDash val="solid"/>
-          </a:ln>
-        </p:spPr>
-      </p:sp>
-      <p:sp>
-        <p:nvSpPr>
-          <p:cNvPr id="12" name="Text 10"/>
-          <p:cNvSpPr txBox="1"/>
-          <p:nvPr/>
-        </p:nvSpPr>
-        <p:spPr>
-          <a:xfrm>
-            <a:off x="6281928" y="1527048"/>
-            <a:ext cx="2404872" cy="274320"/>
-          </a:xfrm>
-          <a:prstGeom prst="rect">
-            <a:avLst/>
-          </a:prstGeom>
-          <a:noFill/>
-          <a:ln/>
-        </p:spPr>
-        <p:txBody>
-          <a:bodyPr wrap="square" lIns="0" tIns="0" rIns="0" bIns="0" rtlCol="0" anchor="ctr"/>
-          <a:lstStyle/>
-          <a:p>
-            <a:pPr algn="l" indent="0" marL="0">
-              <a:buNone/>
-            </a:pPr>
-            <a:r>
-              <a:rPr lang="en-US" sz="1600" b="1" dirty="0">
-                <a:solidFill>
-                  <a:srgbClr val="44C1A3"/>
-                </a:solidFill>
-                <a:latin typeface="メイリオ" pitchFamily="34" charset="0"/>
-                <a:ea typeface="メイリオ" pitchFamily="34" charset="-122"/>
-                <a:cs typeface="メイリオ" pitchFamily="34" charset="-120"/>
-              </a:rPr>
-              <a:t>塚本　瑞穂　先生</a:t>
-            </a:r>
-            <a:endParaRPr lang="en-US" sz="1600" dirty="0"/>
-          </a:p>
-        </p:txBody>
-      </p:sp>
-      <p:sp>
-        <p:nvSpPr>
-          <p:cNvPr id="13" name="Text 11"/>
-          <p:cNvSpPr txBox="1"/>
-          <p:nvPr/>
-        </p:nvSpPr>
-        <p:spPr>
-          <a:xfrm>
-            <a:off x="6281928" y="1801368"/>
-            <a:ext cx="2404872" cy="237744"/>
-          </a:xfrm>
-          <a:prstGeom prst="rect">
-            <a:avLst/>
-          </a:prstGeom>
-          <a:noFill/>
-          <a:ln/>
-        </p:spPr>
-        <p:txBody>
-          <a:bodyPr wrap="square" lIns="0" tIns="0" rIns="0" bIns="0" rtlCol="0" anchor="ctr"/>
-          <a:lstStyle/>
-          <a:p>
-            <a:pPr algn="l" indent="0" marL="0">
-              <a:buNone/>
-            </a:pPr>
-            <a:r>
-              <a:rPr lang="en-US" sz="1100" b="1" dirty="0">
-                <a:solidFill>
-                  <a:srgbClr val="808080"/>
-                </a:solidFill>
-                <a:latin typeface="メイリオ" pitchFamily="34" charset="0"/>
-                <a:ea typeface="メイリオ" pitchFamily="34" charset="-122"/>
-                <a:cs typeface="メイリオ" pitchFamily="34" charset="-120"/>
-              </a:rPr>
-              <a:t>外国語・７年Ｂ組／Unit 4</a:t>
-            </a:r>
-            <a:endParaRPr lang="en-US" sz="1100" dirty="0"/>
-          </a:p>
-        </p:txBody>
-      </p:sp>
-      <p:sp>
-        <p:nvSpPr>
-          <p:cNvPr id="14" name="Text 12"/>
-          <p:cNvSpPr txBox="1"/>
-          <p:nvPr/>
-        </p:nvSpPr>
-        <p:spPr>
-          <a:xfrm>
-            <a:off x="6281928" y="2075688"/>
-            <a:ext cx="2404872" cy="1609344"/>
-          </a:xfrm>
-          <a:prstGeom prst="rect">
-            <a:avLst/>
-          </a:prstGeom>
-          <a:noFill/>
-          <a:ln/>
-        </p:spPr>
-        <p:txBody>
-          <a:bodyPr wrap="square" lIns="0" tIns="0" rIns="0" bIns="0" rtlCol="0" anchor="t"/>
-          <a:lstStyle/>
-          <a:p>
-            <a:pPr algn="l" indent="0" marL="0">
-              <a:lnSpc>
-                <a:spcPct val="125000"/>
-              </a:lnSpc>
-              <a:buNone/>
-            </a:pPr>
-            <a:r>
-              <a:rPr lang="en-US" sz="1350" b="1" dirty="0">
-                <a:solidFill>
-                  <a:srgbClr val="595959"/>
-                </a:solidFill>
-                <a:latin typeface="メイリオ" pitchFamily="34" charset="0"/>
-                <a:ea typeface="メイリオ" pitchFamily="34" charset="-122"/>
-                <a:cs typeface="メイリオ" pitchFamily="34" charset="-120"/>
-              </a:rPr>
-              <a:t>習熟度差の大きい学級で</a:t>
-            </a:r>
-            <a:endParaRPr lang="en-US" sz="1350" dirty="0"/>
-          </a:p>
-          <a:p>
-            <a:pPr algn="l" indent="0" marL="0">
-              <a:lnSpc>
-                <a:spcPct val="125000"/>
-              </a:lnSpc>
-              <a:buNone/>
-            </a:pPr>
-            <a:r>
-              <a:rPr lang="en-US" sz="1350" b="1" dirty="0">
-                <a:solidFill>
-                  <a:srgbClr val="EE7B08"/>
-                </a:solidFill>
-                <a:latin typeface="メイリオ" pitchFamily="34" charset="0"/>
-                <a:ea typeface="メイリオ" pitchFamily="34" charset="-122"/>
-                <a:cs typeface="メイリオ" pitchFamily="34" charset="-120"/>
-              </a:rPr>
-              <a:t>・発表前にペアで共有</a:t>
-            </a:r>
-            <a:endParaRPr lang="en-US" sz="1350" dirty="0"/>
-          </a:p>
-          <a:p>
-            <a:pPr algn="l" indent="0" marL="0">
-              <a:lnSpc>
-                <a:spcPct val="125000"/>
-              </a:lnSpc>
-              <a:buNone/>
-            </a:pPr>
-            <a:r>
-              <a:rPr lang="en-US" sz="1350" b="1" dirty="0">
-                <a:solidFill>
-                  <a:srgbClr val="EE7B08"/>
-                </a:solidFill>
-                <a:latin typeface="メイリオ" pitchFamily="34" charset="0"/>
-                <a:ea typeface="メイリオ" pitchFamily="34" charset="-122"/>
-                <a:cs typeface="メイリオ" pitchFamily="34" charset="-120"/>
-              </a:rPr>
-              <a:t>・全員に発話の機会</a:t>
-            </a:r>
-            <a:endParaRPr lang="en-US" sz="1350" dirty="0"/>
-          </a:p>
-          <a:p>
-            <a:pPr algn="l" indent="0" marL="0">
-              <a:lnSpc>
-                <a:spcPct val="125000"/>
-              </a:lnSpc>
-              <a:buNone/>
-            </a:pPr>
-            <a:r>
-              <a:rPr lang="en-US" sz="1350" b="1" dirty="0">
-                <a:solidFill>
-                  <a:srgbClr val="595959"/>
-                </a:solidFill>
-                <a:latin typeface="メイリオ" pitchFamily="34" charset="0"/>
-                <a:ea typeface="メイリオ" pitchFamily="34" charset="-122"/>
-                <a:cs typeface="メイリオ" pitchFamily="34" charset="-120"/>
-              </a:rPr>
-              <a:t>不安を減らし、誰もが</a:t>
-            </a:r>
-            <a:endParaRPr lang="en-US" sz="1350" dirty="0"/>
-          </a:p>
-          <a:p>
-            <a:pPr algn="l" indent="0" marL="0">
-              <a:lnSpc>
-                <a:spcPct val="125000"/>
-              </a:lnSpc>
-              <a:buNone/>
-            </a:pPr>
-            <a:r>
-              <a:rPr lang="en-US" sz="1350" b="1" dirty="0">
-                <a:solidFill>
-                  <a:srgbClr val="595959"/>
-                </a:solidFill>
-                <a:latin typeface="メイリオ" pitchFamily="34" charset="0"/>
-                <a:ea typeface="メイリオ" pitchFamily="34" charset="-122"/>
-                <a:cs typeface="メイリオ" pitchFamily="34" charset="-120"/>
-              </a:rPr>
-              <a:t>参加できる場をつくって</a:t>
-            </a:r>
-            <a:endParaRPr lang="en-US" sz="1350" dirty="0"/>
-          </a:p>
-          <a:p>
-            <a:pPr algn="l" indent="0" marL="0">
-              <a:lnSpc>
-                <a:spcPct val="125000"/>
-              </a:lnSpc>
-              <a:buNone/>
-            </a:pPr>
-            <a:r>
-              <a:rPr lang="en-US" sz="1350" b="1" dirty="0">
-                <a:solidFill>
-                  <a:srgbClr val="595959"/>
-                </a:solidFill>
-                <a:latin typeface="メイリオ" pitchFamily="34" charset="0"/>
-                <a:ea typeface="メイリオ" pitchFamily="34" charset="-122"/>
-                <a:cs typeface="メイリオ" pitchFamily="34" charset="-120"/>
-              </a:rPr>
-              <a:t>いた。</a:t>
-            </a:r>
-            <a:endParaRPr lang="en-US" sz="1350" dirty="0"/>
-          </a:p>
-        </p:txBody>
-      </p:sp>
-      <p:sp>
-        <p:nvSpPr>
-          <p:cNvPr id="15" name="Text 13"/>
-          <p:cNvSpPr txBox="1"/>
-          <p:nvPr/>
-        </p:nvSpPr>
-        <p:spPr>
-          <a:xfrm>
-            <a:off x="320040" y="3977640"/>
-            <a:ext cx="8503920" cy="822960"/>
-          </a:xfrm>
-          <a:prstGeom prst="rect">
-            <a:avLst/>
-          </a:prstGeom>
-          <a:noFill/>
-          <a:ln/>
-        </p:spPr>
-        <p:txBody>
-          <a:bodyPr wrap="square" lIns="0" tIns="0" rIns="0" bIns="0" rtlCol="0" anchor="t"/>
-          <a:lstStyle/>
-          <a:p>
-            <a:pPr algn="l" indent="0" marL="0">
-              <a:lnSpc>
-                <a:spcPct val="120000"/>
-              </a:lnSpc>
-              <a:buNone/>
-            </a:pPr>
-            <a:r>
-              <a:rPr lang="en-US" sz="1600" b="1" dirty="0">
-                <a:solidFill>
-                  <a:srgbClr val="595959"/>
-                </a:solidFill>
-                <a:latin typeface="メイリオ" pitchFamily="34" charset="0"/>
-                <a:ea typeface="メイリオ" pitchFamily="34" charset="-122"/>
-                <a:cs typeface="メイリオ" pitchFamily="34" charset="-120"/>
-              </a:rPr>
-              <a:t>子どもたちは「認められる」よりも、</a:t>
-            </a:r>
-            <a:pPr algn="l" indent="0" marL="0">
-              <a:lnSpc>
-                <a:spcPct val="120000"/>
-              </a:lnSpc>
-              <a:buNone/>
-            </a:pPr>
-            <a:r>
-              <a:rPr lang="en-US" sz="1600" b="1" dirty="0">
-                <a:solidFill>
-                  <a:srgbClr val="EE7B08"/>
-                </a:solidFill>
-                <a:latin typeface="メイリオ" pitchFamily="34" charset="0"/>
-                <a:ea typeface="メイリオ" pitchFamily="34" charset="-122"/>
-                <a:cs typeface="メイリオ" pitchFamily="34" charset="-120"/>
-              </a:rPr>
-              <a:t>「自分で成長を実感する」</a:t>
-            </a:r>
-            <a:pPr algn="l" indent="0" marL="0">
-              <a:lnSpc>
-                <a:spcPct val="120000"/>
-              </a:lnSpc>
-              <a:buNone/>
-            </a:pPr>
-            <a:r>
-              <a:rPr lang="en-US" sz="1600" b="1" dirty="0">
-                <a:solidFill>
-                  <a:srgbClr val="595959"/>
-                </a:solidFill>
-                <a:latin typeface="メイリオ" pitchFamily="34" charset="0"/>
-                <a:ea typeface="メイリオ" pitchFamily="34" charset="-122"/>
-                <a:cs typeface="メイリオ" pitchFamily="34" charset="-120"/>
-              </a:rPr>
-              <a:t>経験を</a:t>
-            </a:r>
-            <a:endParaRPr lang="en-US" sz="1600" dirty="0"/>
-          </a:p>
-          <a:p>
-            <a:pPr algn="l" indent="0" marL="0">
-              <a:lnSpc>
-                <a:spcPct val="120000"/>
-              </a:lnSpc>
-              <a:buNone/>
-            </a:pPr>
-            <a:r>
-              <a:rPr lang="en-US" sz="1600" b="1" dirty="0">
-                <a:solidFill>
-                  <a:srgbClr val="595959"/>
-                </a:solidFill>
-                <a:latin typeface="メイリオ" pitchFamily="34" charset="0"/>
-                <a:ea typeface="メイリオ" pitchFamily="34" charset="-122"/>
-                <a:cs typeface="メイリオ" pitchFamily="34" charset="-120"/>
-              </a:rPr>
-              <a:t>積み重ねていた。</a:t>
-            </a:r>
-            <a:endParaRPr lang="en-US" sz="1600" dirty="0"/>
+              <a:t>「成長できる自分を信じること」である。</a:t>
+            </a:r>
+            <a:endParaRPr lang="en-US" sz="1700" dirty="0"/>
           </a:p>
         </p:txBody>
       </p:sp>
@@ -3848,7 +3651,7 @@
                 <a:ea typeface="メイリオ" pitchFamily="34" charset="-122"/>
                 <a:cs typeface="メイリオ" pitchFamily="34" charset="-120"/>
               </a:rPr>
-              <a:t>　②　対話・協働</a:t>
+              <a:t>　①　自己肯定感を育む授業</a:t>
             </a:r>
             <a:endParaRPr lang="en-US" sz="3000" dirty="0"/>
           </a:p>
@@ -3856,210 +3659,18 @@
       </p:sp>
       <p:sp>
         <p:nvSpPr>
-          <p:cNvPr id="3" name="Text 1"/>
-          <p:cNvSpPr txBox="1"/>
-          <p:nvPr/>
-        </p:nvSpPr>
-        <p:spPr>
-          <a:xfrm>
-            <a:off x="475488" y="1444752"/>
-            <a:ext cx="8193024" cy="868680"/>
-          </a:xfrm>
-          <a:prstGeom prst="rect">
-            <a:avLst/>
-          </a:prstGeom>
-          <a:noFill/>
-          <a:ln/>
-        </p:spPr>
-        <p:txBody>
-          <a:bodyPr wrap="square" lIns="0" tIns="0" rIns="0" bIns="0" rtlCol="0" anchor="t"/>
-          <a:lstStyle/>
-          <a:p>
-            <a:pPr algn="l" indent="0" marL="0">
-              <a:lnSpc>
-                <a:spcPct val="120000"/>
-              </a:lnSpc>
-              <a:buNone/>
-            </a:pPr>
-            <a:r>
-              <a:rPr lang="en-US" sz="2200" b="1" dirty="0">
-                <a:solidFill>
-                  <a:srgbClr val="595959"/>
-                </a:solidFill>
-                <a:latin typeface="メイリオ" pitchFamily="34" charset="0"/>
-                <a:ea typeface="メイリオ" pitchFamily="34" charset="-122"/>
-                <a:cs typeface="メイリオ" pitchFamily="34" charset="-120"/>
-              </a:rPr>
-              <a:t>本校の学力調査結果からは、</a:t>
-            </a:r>
-            <a:endParaRPr lang="en-US" sz="2200" dirty="0"/>
-          </a:p>
-          <a:p>
-            <a:pPr algn="l" indent="0" marL="0">
-              <a:lnSpc>
-                <a:spcPct val="120000"/>
-              </a:lnSpc>
-              <a:buNone/>
-            </a:pPr>
-            <a:r>
-              <a:rPr lang="en-US" sz="2200" b="1" dirty="0">
-                <a:solidFill>
-                  <a:srgbClr val="595959"/>
-                </a:solidFill>
-                <a:latin typeface="メイリオ" pitchFamily="34" charset="0"/>
-                <a:ea typeface="メイリオ" pitchFamily="34" charset="-122"/>
-                <a:cs typeface="メイリオ" pitchFamily="34" charset="-120"/>
-              </a:rPr>
-              <a:t>　</a:t>
-            </a:r>
-            <a:pPr algn="l" indent="0" marL="0">
-              <a:lnSpc>
-                <a:spcPct val="120000"/>
-              </a:lnSpc>
-              <a:buNone/>
-            </a:pPr>
-            <a:r>
-              <a:rPr lang="en-US" sz="2200" b="1" dirty="0">
-                <a:solidFill>
-                  <a:srgbClr val="EE7B08"/>
-                </a:solidFill>
-                <a:latin typeface="メイリオ" pitchFamily="34" charset="0"/>
-                <a:ea typeface="メイリオ" pitchFamily="34" charset="-122"/>
-                <a:cs typeface="メイリオ" pitchFamily="34" charset="-120"/>
-              </a:rPr>
-              <a:t>主体的な学びの土台</a:t>
-            </a:r>
-            <a:pPr algn="l" indent="0" marL="0">
-              <a:lnSpc>
-                <a:spcPct val="120000"/>
-              </a:lnSpc>
-              <a:buNone/>
-            </a:pPr>
-            <a:r>
-              <a:rPr lang="en-US" sz="2200" b="1" dirty="0">
-                <a:solidFill>
-                  <a:srgbClr val="595959"/>
-                </a:solidFill>
-                <a:latin typeface="メイリオ" pitchFamily="34" charset="0"/>
-                <a:ea typeface="メイリオ" pitchFamily="34" charset="-122"/>
-                <a:cs typeface="メイリオ" pitchFamily="34" charset="-120"/>
-              </a:rPr>
-              <a:t>が形成されていることが分かる。</a:t>
-            </a:r>
-            <a:endParaRPr lang="en-US" sz="2200" dirty="0"/>
-          </a:p>
-        </p:txBody>
-      </p:sp>
-      <p:sp>
-        <p:nvSpPr>
-          <p:cNvPr id="4" name="Text 2"/>
-          <p:cNvSpPr txBox="1"/>
-          <p:nvPr/>
-        </p:nvSpPr>
-        <p:spPr>
-          <a:xfrm>
-            <a:off x="475488" y="2514600"/>
-            <a:ext cx="8193024" cy="868680"/>
-          </a:xfrm>
-          <a:prstGeom prst="rect">
-            <a:avLst/>
-          </a:prstGeom>
-          <a:noFill/>
-          <a:ln/>
-        </p:spPr>
-        <p:txBody>
-          <a:bodyPr wrap="square" lIns="0" tIns="0" rIns="0" bIns="0" rtlCol="0" anchor="t"/>
-          <a:lstStyle/>
-          <a:p>
-            <a:pPr algn="l" indent="0" marL="0">
-              <a:lnSpc>
-                <a:spcPct val="120000"/>
-              </a:lnSpc>
-              <a:buNone/>
-            </a:pPr>
-            <a:r>
-              <a:rPr lang="en-US" sz="2200" b="1" dirty="0">
-                <a:solidFill>
-                  <a:srgbClr val="595959"/>
-                </a:solidFill>
-                <a:latin typeface="メイリオ" pitchFamily="34" charset="0"/>
-                <a:ea typeface="メイリオ" pitchFamily="34" charset="-122"/>
-                <a:cs typeface="メイリオ" pitchFamily="34" charset="-120"/>
-              </a:rPr>
-              <a:t>その背景にあるのは、日常的に行われている</a:t>
-            </a:r>
-            <a:endParaRPr lang="en-US" sz="2200" dirty="0"/>
-          </a:p>
-          <a:p>
-            <a:pPr algn="l" indent="0" marL="0">
-              <a:lnSpc>
-                <a:spcPct val="120000"/>
-              </a:lnSpc>
-              <a:buNone/>
-            </a:pPr>
-            <a:r>
-              <a:rPr lang="en-US" sz="2200" b="1" dirty="0">
-                <a:solidFill>
-                  <a:srgbClr val="595959"/>
-                </a:solidFill>
-                <a:latin typeface="メイリオ" pitchFamily="34" charset="0"/>
-                <a:ea typeface="メイリオ" pitchFamily="34" charset="-122"/>
-                <a:cs typeface="メイリオ" pitchFamily="34" charset="-120"/>
-              </a:rPr>
-              <a:t>　</a:t>
-            </a:r>
-            <a:pPr algn="l" indent="0" marL="0">
-              <a:lnSpc>
-                <a:spcPct val="120000"/>
-              </a:lnSpc>
-              <a:buNone/>
-            </a:pPr>
-            <a:r>
-              <a:rPr lang="en-US" sz="2200" b="1" dirty="0">
-                <a:solidFill>
-                  <a:srgbClr val="EE7B08"/>
-                </a:solidFill>
-                <a:latin typeface="メイリオ" pitchFamily="34" charset="0"/>
-                <a:ea typeface="メイリオ" pitchFamily="34" charset="-122"/>
-                <a:cs typeface="メイリオ" pitchFamily="34" charset="-120"/>
-              </a:rPr>
-              <a:t>「対話を通した学び」</a:t>
-            </a:r>
-            <a:pPr algn="l" indent="0" marL="0">
-              <a:lnSpc>
-                <a:spcPct val="120000"/>
-              </a:lnSpc>
-              <a:buNone/>
-            </a:pPr>
-            <a:r>
-              <a:rPr lang="en-US" sz="2200" b="1" dirty="0">
-                <a:solidFill>
-                  <a:srgbClr val="595959"/>
-                </a:solidFill>
-                <a:latin typeface="メイリオ" pitchFamily="34" charset="0"/>
-                <a:ea typeface="メイリオ" pitchFamily="34" charset="-122"/>
-                <a:cs typeface="メイリオ" pitchFamily="34" charset="-120"/>
-              </a:rPr>
-              <a:t>である。</a:t>
-            </a:r>
-            <a:endParaRPr lang="en-US" sz="2200" dirty="0"/>
-          </a:p>
-        </p:txBody>
-      </p:sp>
-      <p:sp>
-        <p:nvSpPr>
-          <p:cNvPr id="5" name="Shape 3"/>
+          <p:cNvPr id="3" name="Shape 1"/>
           <p:cNvSpPr/>
           <p:nvPr/>
         </p:nvSpPr>
         <p:spPr>
           <a:xfrm>
-            <a:off x="475488" y="3611880"/>
-            <a:ext cx="8193024" cy="822960"/>
+            <a:off x="320040" y="1417320"/>
+            <a:ext cx="2697480" cy="2395728"/>
           </a:xfrm>
           <a:prstGeom prst="roundRect">
             <a:avLst>
-              <a:gd name="adj" fmla="val 6667"/>
+              <a:gd name="adj" fmla="val 2290"/>
             </a:avLst>
           </a:prstGeom>
           <a:solidFill>
@@ -4075,14 +3686,261 @@
       </p:sp>
       <p:sp>
         <p:nvSpPr>
+          <p:cNvPr id="4" name="Text 2"/>
+          <p:cNvSpPr txBox="1"/>
+          <p:nvPr/>
+        </p:nvSpPr>
+        <p:spPr>
+          <a:xfrm>
+            <a:off x="466344" y="1527048"/>
+            <a:ext cx="2404872" cy="274320"/>
+          </a:xfrm>
+          <a:prstGeom prst="rect">
+            <a:avLst/>
+          </a:prstGeom>
+          <a:noFill/>
+          <a:ln/>
+        </p:spPr>
+        <p:txBody>
+          <a:bodyPr wrap="square" lIns="0" tIns="0" rIns="0" bIns="0" rtlCol="0" anchor="ctr"/>
+          <a:lstStyle/>
+          <a:p>
+            <a:pPr algn="l" indent="0" marL="0">
+              <a:buNone/>
+            </a:pPr>
+            <a:r>
+              <a:rPr lang="en-US" sz="1600" b="1" dirty="0">
+                <a:solidFill>
+                  <a:srgbClr val="44C1A3"/>
+                </a:solidFill>
+                <a:latin typeface="メイリオ" pitchFamily="34" charset="0"/>
+                <a:ea typeface="メイリオ" pitchFamily="34" charset="-122"/>
+                <a:cs typeface="メイリオ" pitchFamily="34" charset="-120"/>
+              </a:rPr>
+              <a:t>田口　和磨　先生</a:t>
+            </a:r>
+            <a:endParaRPr lang="en-US" sz="1600" dirty="0"/>
+          </a:p>
+        </p:txBody>
+      </p:sp>
+      <p:sp>
+        <p:nvSpPr>
+          <p:cNvPr id="5" name="Text 3"/>
+          <p:cNvSpPr txBox="1"/>
+          <p:nvPr/>
+        </p:nvSpPr>
+        <p:spPr>
+          <a:xfrm>
+            <a:off x="466344" y="1801368"/>
+            <a:ext cx="2404872" cy="237744"/>
+          </a:xfrm>
+          <a:prstGeom prst="rect">
+            <a:avLst/>
+          </a:prstGeom>
+          <a:noFill/>
+          <a:ln/>
+        </p:spPr>
+        <p:txBody>
+          <a:bodyPr wrap="square" lIns="0" tIns="0" rIns="0" bIns="0" rtlCol="0" anchor="ctr"/>
+          <a:lstStyle/>
+          <a:p>
+            <a:pPr algn="l" indent="0" marL="0">
+              <a:buNone/>
+            </a:pPr>
+            <a:r>
+              <a:rPr lang="en-US" sz="1100" b="1" dirty="0">
+                <a:solidFill>
+                  <a:srgbClr val="808080"/>
+                </a:solidFill>
+                <a:latin typeface="メイリオ" pitchFamily="34" charset="0"/>
+                <a:ea typeface="メイリオ" pitchFamily="34" charset="-122"/>
+                <a:cs typeface="メイリオ" pitchFamily="34" charset="-120"/>
+              </a:rPr>
+              <a:t>保健体育・９年ＡＢ組／水泳</a:t>
+            </a:r>
+            <a:endParaRPr lang="en-US" sz="1100" dirty="0"/>
+          </a:p>
+        </p:txBody>
+      </p:sp>
+      <p:sp>
+        <p:nvSpPr>
           <p:cNvPr id="6" name="Text 4"/>
           <p:cNvSpPr txBox="1"/>
           <p:nvPr/>
         </p:nvSpPr>
         <p:spPr>
           <a:xfrm>
-            <a:off x="731520" y="3611880"/>
-            <a:ext cx="7680960" cy="822960"/>
+            <a:off x="466344" y="2075688"/>
+            <a:ext cx="2404872" cy="1609344"/>
+          </a:xfrm>
+          <a:prstGeom prst="rect">
+            <a:avLst/>
+          </a:prstGeom>
+          <a:noFill/>
+          <a:ln/>
+        </p:spPr>
+        <p:txBody>
+          <a:bodyPr wrap="square" lIns="0" tIns="0" rIns="0" bIns="0" rtlCol="0" anchor="t"/>
+          <a:lstStyle/>
+          <a:p>
+            <a:pPr algn="l" indent="0" marL="0">
+              <a:lnSpc>
+                <a:spcPct val="125000"/>
+              </a:lnSpc>
+              <a:buNone/>
+            </a:pPr>
+            <a:r>
+              <a:rPr lang="en-US" sz="1350" b="1" dirty="0">
+                <a:solidFill>
+                  <a:srgbClr val="595959"/>
+                </a:solidFill>
+                <a:latin typeface="メイリオ" pitchFamily="34" charset="0"/>
+                <a:ea typeface="メイリオ" pitchFamily="34" charset="-122"/>
+                <a:cs typeface="メイリオ" pitchFamily="34" charset="-120"/>
+              </a:rPr>
+              <a:t>泳力差の大きい集団に</a:t>
+            </a:r>
+            <a:endParaRPr lang="en-US" sz="1350" dirty="0"/>
+          </a:p>
+          <a:p>
+            <a:pPr algn="l" indent="0" marL="0">
+              <a:lnSpc>
+                <a:spcPct val="125000"/>
+              </a:lnSpc>
+              <a:buNone/>
+            </a:pPr>
+            <a:r>
+              <a:rPr lang="en-US" sz="1350" b="1" dirty="0">
+                <a:solidFill>
+                  <a:srgbClr val="EE7B08"/>
+                </a:solidFill>
+                <a:latin typeface="メイリオ" pitchFamily="34" charset="0"/>
+                <a:ea typeface="メイリオ" pitchFamily="34" charset="-122"/>
+                <a:cs typeface="メイリオ" pitchFamily="34" charset="-120"/>
+              </a:rPr>
+              <a:t>・段階的な課題設定</a:t>
+            </a:r>
+            <a:endParaRPr lang="en-US" sz="1350" dirty="0"/>
+          </a:p>
+          <a:p>
+            <a:pPr algn="l" indent="0" marL="0">
+              <a:lnSpc>
+                <a:spcPct val="125000"/>
+              </a:lnSpc>
+              <a:buNone/>
+            </a:pPr>
+            <a:r>
+              <a:rPr lang="en-US" sz="1350" b="1" dirty="0">
+                <a:solidFill>
+                  <a:srgbClr val="EE7B08"/>
+                </a:solidFill>
+                <a:latin typeface="メイリオ" pitchFamily="34" charset="0"/>
+                <a:ea typeface="メイリオ" pitchFamily="34" charset="-122"/>
+                <a:cs typeface="メイリオ" pitchFamily="34" charset="-120"/>
+              </a:rPr>
+              <a:t>・泳力別のコース編成</a:t>
+            </a:r>
+            <a:endParaRPr lang="en-US" sz="1350" dirty="0"/>
+          </a:p>
+          <a:p>
+            <a:pPr algn="l" indent="0" marL="0">
+              <a:lnSpc>
+                <a:spcPct val="125000"/>
+              </a:lnSpc>
+              <a:buNone/>
+            </a:pPr>
+            <a:r>
+              <a:rPr lang="en-US" sz="1350" b="1" dirty="0">
+                <a:solidFill>
+                  <a:srgbClr val="EE7B08"/>
+                </a:solidFill>
+                <a:latin typeface="メイリオ" pitchFamily="34" charset="0"/>
+                <a:ea typeface="メイリオ" pitchFamily="34" charset="-122"/>
+                <a:cs typeface="メイリオ" pitchFamily="34" charset="-120"/>
+              </a:rPr>
+              <a:t>・バディでの確認活動</a:t>
+            </a:r>
+            <a:endParaRPr lang="en-US" sz="1350" dirty="0"/>
+          </a:p>
+          <a:p>
+            <a:pPr algn="l" indent="0" marL="0">
+              <a:lnSpc>
+                <a:spcPct val="125000"/>
+              </a:lnSpc>
+              <a:buNone/>
+            </a:pPr>
+            <a:r>
+              <a:rPr lang="en-US" sz="1350" b="1" dirty="0">
+                <a:solidFill>
+                  <a:srgbClr val="595959"/>
+                </a:solidFill>
+                <a:latin typeface="メイリオ" pitchFamily="34" charset="0"/>
+                <a:ea typeface="メイリオ" pitchFamily="34" charset="-122"/>
+                <a:cs typeface="メイリオ" pitchFamily="34" charset="-120"/>
+              </a:rPr>
+              <a:t>確認の視点を３点示し、</a:t>
+            </a:r>
+            <a:endParaRPr lang="en-US" sz="1350" dirty="0"/>
+          </a:p>
+          <a:p>
+            <a:pPr algn="l" indent="0" marL="0">
+              <a:lnSpc>
+                <a:spcPct val="125000"/>
+              </a:lnSpc>
+              <a:buNone/>
+            </a:pPr>
+            <a:r>
+              <a:rPr lang="en-US" sz="1350" b="1" dirty="0">
+                <a:solidFill>
+                  <a:srgbClr val="595959"/>
+                </a:solidFill>
+                <a:latin typeface="メイリオ" pitchFamily="34" charset="0"/>
+                <a:ea typeface="メイリオ" pitchFamily="34" charset="-122"/>
+                <a:cs typeface="メイリオ" pitchFamily="34" charset="-120"/>
+              </a:rPr>
+              <a:t>見る目を育てていた。</a:t>
+            </a:r>
+            <a:endParaRPr lang="en-US" sz="1350" dirty="0"/>
+          </a:p>
+        </p:txBody>
+      </p:sp>
+      <p:sp>
+        <p:nvSpPr>
+          <p:cNvPr id="7" name="Shape 5"/>
+          <p:cNvSpPr/>
+          <p:nvPr/>
+        </p:nvSpPr>
+        <p:spPr>
+          <a:xfrm>
+            <a:off x="3227832" y="1417320"/>
+            <a:ext cx="2697480" cy="2395728"/>
+          </a:xfrm>
+          <a:prstGeom prst="roundRect">
+            <a:avLst>
+              <a:gd name="adj" fmla="val 2290"/>
+            </a:avLst>
+          </a:prstGeom>
+          <a:solidFill>
+            <a:srgbClr val="E9F7F3"/>
+          </a:solidFill>
+          <a:ln w="12700">
+            <a:solidFill>
+              <a:srgbClr val="B9E5DA"/>
+            </a:solidFill>
+            <a:prstDash val="solid"/>
+          </a:ln>
+        </p:spPr>
+      </p:sp>
+      <p:sp>
+        <p:nvSpPr>
+          <p:cNvPr id="8" name="Text 6"/>
+          <p:cNvSpPr txBox="1"/>
+          <p:nvPr/>
+        </p:nvSpPr>
+        <p:spPr>
+          <a:xfrm>
+            <a:off x="3374136" y="1527048"/>
+            <a:ext cx="2404872" cy="274320"/>
           </a:xfrm>
           <a:prstGeom prst="rect">
             <a:avLst/>
@@ -4100,13 +3958,537 @@
             <a:r>
               <a:rPr lang="en-US" sz="1600" b="1" dirty="0">
                 <a:solidFill>
+                  <a:srgbClr val="44C1A3"/>
+                </a:solidFill>
+                <a:latin typeface="メイリオ" pitchFamily="34" charset="0"/>
+                <a:ea typeface="メイリオ" pitchFamily="34" charset="-122"/>
+                <a:cs typeface="メイリオ" pitchFamily="34" charset="-120"/>
+              </a:rPr>
+              <a:t>東海林　静江　先生</a:t>
+            </a:r>
+            <a:endParaRPr lang="en-US" sz="1600" dirty="0"/>
+          </a:p>
+        </p:txBody>
+      </p:sp>
+      <p:sp>
+        <p:nvSpPr>
+          <p:cNvPr id="9" name="Text 7"/>
+          <p:cNvSpPr txBox="1"/>
+          <p:nvPr/>
+        </p:nvSpPr>
+        <p:spPr>
+          <a:xfrm>
+            <a:off x="3374136" y="1801368"/>
+            <a:ext cx="2404872" cy="237744"/>
+          </a:xfrm>
+          <a:prstGeom prst="rect">
+            <a:avLst/>
+          </a:prstGeom>
+          <a:noFill/>
+          <a:ln/>
+        </p:spPr>
+        <p:txBody>
+          <a:bodyPr wrap="square" lIns="0" tIns="0" rIns="0" bIns="0" rtlCol="0" anchor="ctr"/>
+          <a:lstStyle/>
+          <a:p>
+            <a:pPr algn="l" indent="0" marL="0">
+              <a:buNone/>
+            </a:pPr>
+            <a:r>
+              <a:rPr lang="en-US" sz="1100" b="1" dirty="0">
+                <a:solidFill>
+                  <a:srgbClr val="808080"/>
+                </a:solidFill>
+                <a:latin typeface="メイリオ" pitchFamily="34" charset="0"/>
+                <a:ea typeface="メイリオ" pitchFamily="34" charset="-122"/>
+                <a:cs typeface="メイリオ" pitchFamily="34" charset="-120"/>
+              </a:rPr>
+              <a:t>道徳・特別支援学級Ｄ組／うそ</a:t>
+            </a:r>
+            <a:endParaRPr lang="en-US" sz="1100" dirty="0"/>
+          </a:p>
+        </p:txBody>
+      </p:sp>
+      <p:sp>
+        <p:nvSpPr>
+          <p:cNvPr id="10" name="Text 8"/>
+          <p:cNvSpPr txBox="1"/>
+          <p:nvPr/>
+        </p:nvSpPr>
+        <p:spPr>
+          <a:xfrm>
+            <a:off x="3374136" y="2075688"/>
+            <a:ext cx="2404872" cy="1609344"/>
+          </a:xfrm>
+          <a:prstGeom prst="rect">
+            <a:avLst/>
+          </a:prstGeom>
+          <a:noFill/>
+          <a:ln/>
+        </p:spPr>
+        <p:txBody>
+          <a:bodyPr wrap="square" lIns="0" tIns="0" rIns="0" bIns="0" rtlCol="0" anchor="t"/>
+          <a:lstStyle/>
+          <a:p>
+            <a:pPr algn="l" indent="0" marL="0">
+              <a:lnSpc>
+                <a:spcPct val="125000"/>
+              </a:lnSpc>
+              <a:buNone/>
+            </a:pPr>
+            <a:r>
+              <a:rPr lang="en-US" sz="1350" b="1" dirty="0">
+                <a:solidFill>
                   <a:srgbClr val="595959"/>
                 </a:solidFill>
                 <a:latin typeface="メイリオ" pitchFamily="34" charset="0"/>
                 <a:ea typeface="メイリオ" pitchFamily="34" charset="-122"/>
                 <a:cs typeface="メイリオ" pitchFamily="34" charset="-120"/>
               </a:rPr>
-              <a:t>本日の３つの授業にも、対話が学びを深める場面が表れていた。</a:t>
+              <a:t>安心して自分の考えを</a:t>
+            </a:r>
+            <a:endParaRPr lang="en-US" sz="1350" dirty="0"/>
+          </a:p>
+          <a:p>
+            <a:pPr algn="l" indent="0" marL="0">
+              <a:lnSpc>
+                <a:spcPct val="125000"/>
+              </a:lnSpc>
+              <a:buNone/>
+            </a:pPr>
+            <a:r>
+              <a:rPr lang="en-US" sz="1350" b="1" dirty="0">
+                <a:solidFill>
+                  <a:srgbClr val="EE7B08"/>
+                </a:solidFill>
+                <a:latin typeface="メイリオ" pitchFamily="34" charset="0"/>
+                <a:ea typeface="メイリオ" pitchFamily="34" charset="-122"/>
+                <a:cs typeface="メイリオ" pitchFamily="34" charset="-120"/>
+              </a:rPr>
+              <a:t>表現できる環境</a:t>
+            </a:r>
+            <a:endParaRPr lang="en-US" sz="1350" dirty="0"/>
+          </a:p>
+          <a:p>
+            <a:pPr algn="l" indent="0" marL="0">
+              <a:lnSpc>
+                <a:spcPct val="125000"/>
+              </a:lnSpc>
+              <a:buNone/>
+            </a:pPr>
+            <a:r>
+              <a:rPr lang="en-US" sz="1350" b="1" dirty="0">
+                <a:solidFill>
+                  <a:srgbClr val="595959"/>
+                </a:solidFill>
+                <a:latin typeface="メイリオ" pitchFamily="34" charset="0"/>
+                <a:ea typeface="メイリオ" pitchFamily="34" charset="-122"/>
+                <a:cs typeface="メイリオ" pitchFamily="34" charset="-120"/>
+              </a:rPr>
+              <a:t>・前時の考えを尊重</a:t>
+            </a:r>
+            <a:endParaRPr lang="en-US" sz="1350" dirty="0"/>
+          </a:p>
+          <a:p>
+            <a:pPr algn="l" indent="0" marL="0">
+              <a:lnSpc>
+                <a:spcPct val="125000"/>
+              </a:lnSpc>
+              <a:buNone/>
+            </a:pPr>
+            <a:r>
+              <a:rPr lang="en-US" sz="1350" b="1" dirty="0">
+                <a:solidFill>
+                  <a:srgbClr val="EE7B08"/>
+                </a:solidFill>
+                <a:latin typeface="メイリオ" pitchFamily="34" charset="0"/>
+                <a:ea typeface="メイリオ" pitchFamily="34" charset="-122"/>
+                <a:cs typeface="メイリオ" pitchFamily="34" charset="-120"/>
+              </a:rPr>
+              <a:t>・意見が変わってよい</a:t>
+            </a:r>
+            <a:endParaRPr lang="en-US" sz="1350" dirty="0"/>
+          </a:p>
+          <a:p>
+            <a:pPr algn="l" indent="0" marL="0">
+              <a:lnSpc>
+                <a:spcPct val="125000"/>
+              </a:lnSpc>
+              <a:buNone/>
+            </a:pPr>
+            <a:r>
+              <a:rPr lang="en-US" sz="1350" b="1" dirty="0">
+                <a:solidFill>
+                  <a:srgbClr val="595959"/>
+                </a:solidFill>
+                <a:latin typeface="メイリオ" pitchFamily="34" charset="0"/>
+                <a:ea typeface="メイリオ" pitchFamily="34" charset="-122"/>
+                <a:cs typeface="メイリオ" pitchFamily="34" charset="-120"/>
+              </a:rPr>
+              <a:t>答えは一つではないと</a:t>
+            </a:r>
+            <a:endParaRPr lang="en-US" sz="1350" dirty="0"/>
+          </a:p>
+          <a:p>
+            <a:pPr algn="l" indent="0" marL="0">
+              <a:lnSpc>
+                <a:spcPct val="125000"/>
+              </a:lnSpc>
+              <a:buNone/>
+            </a:pPr>
+            <a:r>
+              <a:rPr lang="en-US" sz="1350" b="1" dirty="0">
+                <a:solidFill>
+                  <a:srgbClr val="595959"/>
+                </a:solidFill>
+                <a:latin typeface="メイリオ" pitchFamily="34" charset="0"/>
+                <a:ea typeface="メイリオ" pitchFamily="34" charset="-122"/>
+                <a:cs typeface="メイリオ" pitchFamily="34" charset="-120"/>
+              </a:rPr>
+              <a:t>保障されていた。</a:t>
+            </a:r>
+            <a:endParaRPr lang="en-US" sz="1350" dirty="0"/>
+          </a:p>
+        </p:txBody>
+      </p:sp>
+      <p:sp>
+        <p:nvSpPr>
+          <p:cNvPr id="11" name="Shape 9"/>
+          <p:cNvSpPr/>
+          <p:nvPr/>
+        </p:nvSpPr>
+        <p:spPr>
+          <a:xfrm>
+            <a:off x="6135624" y="1417320"/>
+            <a:ext cx="2697480" cy="2395728"/>
+          </a:xfrm>
+          <a:prstGeom prst="roundRect">
+            <a:avLst>
+              <a:gd name="adj" fmla="val 2290"/>
+            </a:avLst>
+          </a:prstGeom>
+          <a:solidFill>
+            <a:srgbClr val="E9F7F3"/>
+          </a:solidFill>
+          <a:ln w="12700">
+            <a:solidFill>
+              <a:srgbClr val="B9E5DA"/>
+            </a:solidFill>
+            <a:prstDash val="solid"/>
+          </a:ln>
+        </p:spPr>
+      </p:sp>
+      <p:sp>
+        <p:nvSpPr>
+          <p:cNvPr id="12" name="Text 10"/>
+          <p:cNvSpPr txBox="1"/>
+          <p:nvPr/>
+        </p:nvSpPr>
+        <p:spPr>
+          <a:xfrm>
+            <a:off x="6281928" y="1527048"/>
+            <a:ext cx="2404872" cy="274320"/>
+          </a:xfrm>
+          <a:prstGeom prst="rect">
+            <a:avLst/>
+          </a:prstGeom>
+          <a:noFill/>
+          <a:ln/>
+        </p:spPr>
+        <p:txBody>
+          <a:bodyPr wrap="square" lIns="0" tIns="0" rIns="0" bIns="0" rtlCol="0" anchor="ctr"/>
+          <a:lstStyle/>
+          <a:p>
+            <a:pPr algn="l" indent="0" marL="0">
+              <a:buNone/>
+            </a:pPr>
+            <a:r>
+              <a:rPr lang="en-US" sz="1600" b="1" dirty="0">
+                <a:solidFill>
+                  <a:srgbClr val="44C1A3"/>
+                </a:solidFill>
+                <a:latin typeface="メイリオ" pitchFamily="34" charset="0"/>
+                <a:ea typeface="メイリオ" pitchFamily="34" charset="-122"/>
+                <a:cs typeface="メイリオ" pitchFamily="34" charset="-120"/>
+              </a:rPr>
+              <a:t>塚本　瑞穂　先生</a:t>
+            </a:r>
+            <a:endParaRPr lang="en-US" sz="1600" dirty="0"/>
+          </a:p>
+        </p:txBody>
+      </p:sp>
+      <p:sp>
+        <p:nvSpPr>
+          <p:cNvPr id="13" name="Text 11"/>
+          <p:cNvSpPr txBox="1"/>
+          <p:nvPr/>
+        </p:nvSpPr>
+        <p:spPr>
+          <a:xfrm>
+            <a:off x="6281928" y="1801368"/>
+            <a:ext cx="2404872" cy="237744"/>
+          </a:xfrm>
+          <a:prstGeom prst="rect">
+            <a:avLst/>
+          </a:prstGeom>
+          <a:noFill/>
+          <a:ln/>
+        </p:spPr>
+        <p:txBody>
+          <a:bodyPr wrap="square" lIns="0" tIns="0" rIns="0" bIns="0" rtlCol="0" anchor="ctr"/>
+          <a:lstStyle/>
+          <a:p>
+            <a:pPr algn="l" indent="0" marL="0">
+              <a:buNone/>
+            </a:pPr>
+            <a:r>
+              <a:rPr lang="en-US" sz="1100" b="1" dirty="0">
+                <a:solidFill>
+                  <a:srgbClr val="808080"/>
+                </a:solidFill>
+                <a:latin typeface="メイリオ" pitchFamily="34" charset="0"/>
+                <a:ea typeface="メイリオ" pitchFamily="34" charset="-122"/>
+                <a:cs typeface="メイリオ" pitchFamily="34" charset="-120"/>
+              </a:rPr>
+              <a:t>外国語・７年Ｂ組／Unit 4</a:t>
+            </a:r>
+            <a:endParaRPr lang="en-US" sz="1100" dirty="0"/>
+          </a:p>
+        </p:txBody>
+      </p:sp>
+      <p:sp>
+        <p:nvSpPr>
+          <p:cNvPr id="14" name="Text 12"/>
+          <p:cNvSpPr txBox="1"/>
+          <p:nvPr/>
+        </p:nvSpPr>
+        <p:spPr>
+          <a:xfrm>
+            <a:off x="6281928" y="2075688"/>
+            <a:ext cx="2404872" cy="1609344"/>
+          </a:xfrm>
+          <a:prstGeom prst="rect">
+            <a:avLst/>
+          </a:prstGeom>
+          <a:noFill/>
+          <a:ln/>
+        </p:spPr>
+        <p:txBody>
+          <a:bodyPr wrap="square" lIns="0" tIns="0" rIns="0" bIns="0" rtlCol="0" anchor="t"/>
+          <a:lstStyle/>
+          <a:p>
+            <a:pPr algn="l" indent="0" marL="0">
+              <a:lnSpc>
+                <a:spcPct val="125000"/>
+              </a:lnSpc>
+              <a:buNone/>
+            </a:pPr>
+            <a:r>
+              <a:rPr lang="en-US" sz="1350" b="1" dirty="0">
+                <a:solidFill>
+                  <a:srgbClr val="595959"/>
+                </a:solidFill>
+                <a:latin typeface="メイリオ" pitchFamily="34" charset="0"/>
+                <a:ea typeface="メイリオ" pitchFamily="34" charset="-122"/>
+                <a:cs typeface="メイリオ" pitchFamily="34" charset="-120"/>
+              </a:rPr>
+              <a:t>習熟度差の大きい学級で</a:t>
+            </a:r>
+            <a:endParaRPr lang="en-US" sz="1350" dirty="0"/>
+          </a:p>
+          <a:p>
+            <a:pPr algn="l" indent="0" marL="0">
+              <a:lnSpc>
+                <a:spcPct val="125000"/>
+              </a:lnSpc>
+              <a:buNone/>
+            </a:pPr>
+            <a:r>
+              <a:rPr lang="en-US" sz="1350" b="1" dirty="0">
+                <a:solidFill>
+                  <a:srgbClr val="EE7B08"/>
+                </a:solidFill>
+                <a:latin typeface="メイリオ" pitchFamily="34" charset="0"/>
+                <a:ea typeface="メイリオ" pitchFamily="34" charset="-122"/>
+                <a:cs typeface="メイリオ" pitchFamily="34" charset="-120"/>
+              </a:rPr>
+              <a:t>・発表前にペアで共有</a:t>
+            </a:r>
+            <a:endParaRPr lang="en-US" sz="1350" dirty="0"/>
+          </a:p>
+          <a:p>
+            <a:pPr algn="l" indent="0" marL="0">
+              <a:lnSpc>
+                <a:spcPct val="125000"/>
+              </a:lnSpc>
+              <a:buNone/>
+            </a:pPr>
+            <a:r>
+              <a:rPr lang="en-US" sz="1350" b="1" dirty="0">
+                <a:solidFill>
+                  <a:srgbClr val="EE7B08"/>
+                </a:solidFill>
+                <a:latin typeface="メイリオ" pitchFamily="34" charset="0"/>
+                <a:ea typeface="メイリオ" pitchFamily="34" charset="-122"/>
+                <a:cs typeface="メイリオ" pitchFamily="34" charset="-120"/>
+              </a:rPr>
+              <a:t>・全員に発話の機会</a:t>
+            </a:r>
+            <a:endParaRPr lang="en-US" sz="1350" dirty="0"/>
+          </a:p>
+          <a:p>
+            <a:pPr algn="l" indent="0" marL="0">
+              <a:lnSpc>
+                <a:spcPct val="125000"/>
+              </a:lnSpc>
+              <a:buNone/>
+            </a:pPr>
+            <a:r>
+              <a:rPr lang="en-US" sz="1350" b="1" dirty="0">
+                <a:solidFill>
+                  <a:srgbClr val="595959"/>
+                </a:solidFill>
+                <a:latin typeface="メイリオ" pitchFamily="34" charset="0"/>
+                <a:ea typeface="メイリオ" pitchFamily="34" charset="-122"/>
+                <a:cs typeface="メイリオ" pitchFamily="34" charset="-120"/>
+              </a:rPr>
+              <a:t>不安を減らし、誰もが</a:t>
+            </a:r>
+            <a:endParaRPr lang="en-US" sz="1350" dirty="0"/>
+          </a:p>
+          <a:p>
+            <a:pPr algn="l" indent="0" marL="0">
+              <a:lnSpc>
+                <a:spcPct val="125000"/>
+              </a:lnSpc>
+              <a:buNone/>
+            </a:pPr>
+            <a:r>
+              <a:rPr lang="en-US" sz="1350" b="1" dirty="0">
+                <a:solidFill>
+                  <a:srgbClr val="595959"/>
+                </a:solidFill>
+                <a:latin typeface="メイリオ" pitchFamily="34" charset="0"/>
+                <a:ea typeface="メイリオ" pitchFamily="34" charset="-122"/>
+                <a:cs typeface="メイリオ" pitchFamily="34" charset="-120"/>
+              </a:rPr>
+              <a:t>参加できる場をつくって</a:t>
+            </a:r>
+            <a:endParaRPr lang="en-US" sz="1350" dirty="0"/>
+          </a:p>
+          <a:p>
+            <a:pPr algn="l" indent="0" marL="0">
+              <a:lnSpc>
+                <a:spcPct val="125000"/>
+              </a:lnSpc>
+              <a:buNone/>
+            </a:pPr>
+            <a:r>
+              <a:rPr lang="en-US" sz="1350" b="1" dirty="0">
+                <a:solidFill>
+                  <a:srgbClr val="595959"/>
+                </a:solidFill>
+                <a:latin typeface="メイリオ" pitchFamily="34" charset="0"/>
+                <a:ea typeface="メイリオ" pitchFamily="34" charset="-122"/>
+                <a:cs typeface="メイリオ" pitchFamily="34" charset="-120"/>
+              </a:rPr>
+              <a:t>いた。</a:t>
+            </a:r>
+            <a:endParaRPr lang="en-US" sz="1350" dirty="0"/>
+          </a:p>
+        </p:txBody>
+      </p:sp>
+      <p:sp>
+        <p:nvSpPr>
+          <p:cNvPr id="15" name="Text 13"/>
+          <p:cNvSpPr txBox="1"/>
+          <p:nvPr/>
+        </p:nvSpPr>
+        <p:spPr>
+          <a:xfrm>
+            <a:off x="320040" y="3977640"/>
+            <a:ext cx="8503920" cy="822960"/>
+          </a:xfrm>
+          <a:prstGeom prst="rect">
+            <a:avLst/>
+          </a:prstGeom>
+          <a:noFill/>
+          <a:ln/>
+        </p:spPr>
+        <p:txBody>
+          <a:bodyPr wrap="square" lIns="0" tIns="0" rIns="0" bIns="0" rtlCol="0" anchor="t"/>
+          <a:lstStyle/>
+          <a:p>
+            <a:pPr algn="l" indent="0" marL="0">
+              <a:lnSpc>
+                <a:spcPct val="120000"/>
+              </a:lnSpc>
+              <a:buNone/>
+            </a:pPr>
+            <a:r>
+              <a:rPr lang="en-US" sz="1600" b="1" dirty="0">
+                <a:solidFill>
+                  <a:srgbClr val="595959"/>
+                </a:solidFill>
+                <a:latin typeface="メイリオ" pitchFamily="34" charset="0"/>
+                <a:ea typeface="メイリオ" pitchFamily="34" charset="-122"/>
+                <a:cs typeface="メイリオ" pitchFamily="34" charset="-120"/>
+              </a:rPr>
+              <a:t>子どもたちは「認められる」よりも、</a:t>
+            </a:r>
+            <a:pPr algn="l" indent="0" marL="0">
+              <a:lnSpc>
+                <a:spcPct val="120000"/>
+              </a:lnSpc>
+              <a:buNone/>
+            </a:pPr>
+            <a:r>
+              <a:rPr lang="en-US" sz="1600" b="1" dirty="0">
+                <a:solidFill>
+                  <a:srgbClr val="EE7B08"/>
+                </a:solidFill>
+                <a:latin typeface="メイリオ" pitchFamily="34" charset="0"/>
+                <a:ea typeface="メイリオ" pitchFamily="34" charset="-122"/>
+                <a:cs typeface="メイリオ" pitchFamily="34" charset="-120"/>
+              </a:rPr>
+              <a:t>「自分で成長を実感する」</a:t>
+            </a:r>
+            <a:pPr algn="l" indent="0" marL="0">
+              <a:lnSpc>
+                <a:spcPct val="120000"/>
+              </a:lnSpc>
+              <a:buNone/>
+            </a:pPr>
+            <a:r>
+              <a:rPr lang="en-US" sz="1600" b="1" dirty="0">
+                <a:solidFill>
+                  <a:srgbClr val="595959"/>
+                </a:solidFill>
+                <a:latin typeface="メイリオ" pitchFamily="34" charset="0"/>
+                <a:ea typeface="メイリオ" pitchFamily="34" charset="-122"/>
+                <a:cs typeface="メイリオ" pitchFamily="34" charset="-120"/>
+              </a:rPr>
+              <a:t>経験を</a:t>
+            </a:r>
+            <a:endParaRPr lang="en-US" sz="1600" dirty="0"/>
+          </a:p>
+          <a:p>
+            <a:pPr algn="l" indent="0" marL="0">
+              <a:lnSpc>
+                <a:spcPct val="120000"/>
+              </a:lnSpc>
+              <a:buNone/>
+            </a:pPr>
+            <a:r>
+              <a:rPr lang="en-US" sz="1600" b="1" dirty="0">
+                <a:solidFill>
+                  <a:srgbClr val="595959"/>
+                </a:solidFill>
+                <a:latin typeface="メイリオ" pitchFamily="34" charset="0"/>
+                <a:ea typeface="メイリオ" pitchFamily="34" charset="-122"/>
+                <a:cs typeface="メイリオ" pitchFamily="34" charset="-120"/>
+              </a:rPr>
+              <a:t>積み重ねていた。</a:t>
             </a:r>
             <a:endParaRPr lang="en-US" sz="1600" dirty="0"/>
           </a:p>
@@ -4195,7 +4577,7 @@
                 <a:ea typeface="メイリオ" pitchFamily="34" charset="-122"/>
                 <a:cs typeface="メイリオ" pitchFamily="34" charset="-120"/>
               </a:rPr>
-              <a:t>　②　対話によって学びは深まる</a:t>
+              <a:t>　②　対話・協働</a:t>
             </a:r>
             <a:endParaRPr lang="en-US" sz="3000" dirty="0"/>
           </a:p>
@@ -4203,18 +4585,210 @@
       </p:sp>
       <p:sp>
         <p:nvSpPr>
-          <p:cNvPr id="3" name="Shape 1"/>
+          <p:cNvPr id="3" name="Text 1"/>
+          <p:cNvSpPr txBox="1"/>
+          <p:nvPr/>
+        </p:nvSpPr>
+        <p:spPr>
+          <a:xfrm>
+            <a:off x="475488" y="1444752"/>
+            <a:ext cx="8193024" cy="868680"/>
+          </a:xfrm>
+          <a:prstGeom prst="rect">
+            <a:avLst/>
+          </a:prstGeom>
+          <a:noFill/>
+          <a:ln/>
+        </p:spPr>
+        <p:txBody>
+          <a:bodyPr wrap="square" lIns="0" tIns="0" rIns="0" bIns="0" rtlCol="0" anchor="t"/>
+          <a:lstStyle/>
+          <a:p>
+            <a:pPr algn="l" indent="0" marL="0">
+              <a:lnSpc>
+                <a:spcPct val="120000"/>
+              </a:lnSpc>
+              <a:buNone/>
+            </a:pPr>
+            <a:r>
+              <a:rPr lang="en-US" sz="2200" b="1" dirty="0">
+                <a:solidFill>
+                  <a:srgbClr val="595959"/>
+                </a:solidFill>
+                <a:latin typeface="メイリオ" pitchFamily="34" charset="0"/>
+                <a:ea typeface="メイリオ" pitchFamily="34" charset="-122"/>
+                <a:cs typeface="メイリオ" pitchFamily="34" charset="-120"/>
+              </a:rPr>
+              <a:t>本校の学力調査結果からは、</a:t>
+            </a:r>
+            <a:endParaRPr lang="en-US" sz="2200" dirty="0"/>
+          </a:p>
+          <a:p>
+            <a:pPr algn="l" indent="0" marL="0">
+              <a:lnSpc>
+                <a:spcPct val="120000"/>
+              </a:lnSpc>
+              <a:buNone/>
+            </a:pPr>
+            <a:r>
+              <a:rPr lang="en-US" sz="2200" b="1" dirty="0">
+                <a:solidFill>
+                  <a:srgbClr val="595959"/>
+                </a:solidFill>
+                <a:latin typeface="メイリオ" pitchFamily="34" charset="0"/>
+                <a:ea typeface="メイリオ" pitchFamily="34" charset="-122"/>
+                <a:cs typeface="メイリオ" pitchFamily="34" charset="-120"/>
+              </a:rPr>
+              <a:t>　</a:t>
+            </a:r>
+            <a:pPr algn="l" indent="0" marL="0">
+              <a:lnSpc>
+                <a:spcPct val="120000"/>
+              </a:lnSpc>
+              <a:buNone/>
+            </a:pPr>
+            <a:r>
+              <a:rPr lang="en-US" sz="2200" b="1" dirty="0">
+                <a:solidFill>
+                  <a:srgbClr val="EE7B08"/>
+                </a:solidFill>
+                <a:latin typeface="メイリオ" pitchFamily="34" charset="0"/>
+                <a:ea typeface="メイリオ" pitchFamily="34" charset="-122"/>
+                <a:cs typeface="メイリオ" pitchFamily="34" charset="-120"/>
+              </a:rPr>
+              <a:t>主体的な学びの土台</a:t>
+            </a:r>
+            <a:pPr algn="l" indent="0" marL="0">
+              <a:lnSpc>
+                <a:spcPct val="120000"/>
+              </a:lnSpc>
+              <a:buNone/>
+            </a:pPr>
+            <a:r>
+              <a:rPr lang="en-US" sz="2200" b="1" dirty="0">
+                <a:solidFill>
+                  <a:srgbClr val="595959"/>
+                </a:solidFill>
+                <a:latin typeface="メイリオ" pitchFamily="34" charset="0"/>
+                <a:ea typeface="メイリオ" pitchFamily="34" charset="-122"/>
+                <a:cs typeface="メイリオ" pitchFamily="34" charset="-120"/>
+              </a:rPr>
+              <a:t>が形成されていることが分かる。</a:t>
+            </a:r>
+            <a:endParaRPr lang="en-US" sz="2200" dirty="0"/>
+          </a:p>
+        </p:txBody>
+      </p:sp>
+      <p:sp>
+        <p:nvSpPr>
+          <p:cNvPr id="4" name="Text 2"/>
+          <p:cNvSpPr txBox="1"/>
+          <p:nvPr/>
+        </p:nvSpPr>
+        <p:spPr>
+          <a:xfrm>
+            <a:off x="475488" y="2514600"/>
+            <a:ext cx="8193024" cy="868680"/>
+          </a:xfrm>
+          <a:prstGeom prst="rect">
+            <a:avLst/>
+          </a:prstGeom>
+          <a:noFill/>
+          <a:ln/>
+        </p:spPr>
+        <p:txBody>
+          <a:bodyPr wrap="square" lIns="0" tIns="0" rIns="0" bIns="0" rtlCol="0" anchor="t"/>
+          <a:lstStyle/>
+          <a:p>
+            <a:pPr algn="l" indent="0" marL="0">
+              <a:lnSpc>
+                <a:spcPct val="120000"/>
+              </a:lnSpc>
+              <a:buNone/>
+            </a:pPr>
+            <a:r>
+              <a:rPr lang="en-US" sz="2200" b="1" dirty="0">
+                <a:solidFill>
+                  <a:srgbClr val="595959"/>
+                </a:solidFill>
+                <a:latin typeface="メイリオ" pitchFamily="34" charset="0"/>
+                <a:ea typeface="メイリオ" pitchFamily="34" charset="-122"/>
+                <a:cs typeface="メイリオ" pitchFamily="34" charset="-120"/>
+              </a:rPr>
+              <a:t>その背景にあるのは、日常的に行われている</a:t>
+            </a:r>
+            <a:endParaRPr lang="en-US" sz="2200" dirty="0"/>
+          </a:p>
+          <a:p>
+            <a:pPr algn="l" indent="0" marL="0">
+              <a:lnSpc>
+                <a:spcPct val="120000"/>
+              </a:lnSpc>
+              <a:buNone/>
+            </a:pPr>
+            <a:r>
+              <a:rPr lang="en-US" sz="2200" b="1" dirty="0">
+                <a:solidFill>
+                  <a:srgbClr val="595959"/>
+                </a:solidFill>
+                <a:latin typeface="メイリオ" pitchFamily="34" charset="0"/>
+                <a:ea typeface="メイリオ" pitchFamily="34" charset="-122"/>
+                <a:cs typeface="メイリオ" pitchFamily="34" charset="-120"/>
+              </a:rPr>
+              <a:t>　</a:t>
+            </a:r>
+            <a:pPr algn="l" indent="0" marL="0">
+              <a:lnSpc>
+                <a:spcPct val="120000"/>
+              </a:lnSpc>
+              <a:buNone/>
+            </a:pPr>
+            <a:r>
+              <a:rPr lang="en-US" sz="2200" b="1" dirty="0">
+                <a:solidFill>
+                  <a:srgbClr val="EE7B08"/>
+                </a:solidFill>
+                <a:latin typeface="メイリオ" pitchFamily="34" charset="0"/>
+                <a:ea typeface="メイリオ" pitchFamily="34" charset="-122"/>
+                <a:cs typeface="メイリオ" pitchFamily="34" charset="-120"/>
+              </a:rPr>
+              <a:t>「対話を通した学び」</a:t>
+            </a:r>
+            <a:pPr algn="l" indent="0" marL="0">
+              <a:lnSpc>
+                <a:spcPct val="120000"/>
+              </a:lnSpc>
+              <a:buNone/>
+            </a:pPr>
+            <a:r>
+              <a:rPr lang="en-US" sz="2200" b="1" dirty="0">
+                <a:solidFill>
+                  <a:srgbClr val="595959"/>
+                </a:solidFill>
+                <a:latin typeface="メイリオ" pitchFamily="34" charset="0"/>
+                <a:ea typeface="メイリオ" pitchFamily="34" charset="-122"/>
+                <a:cs typeface="メイリオ" pitchFamily="34" charset="-120"/>
+              </a:rPr>
+              <a:t>である。</a:t>
+            </a:r>
+            <a:endParaRPr lang="en-US" sz="2200" dirty="0"/>
+          </a:p>
+        </p:txBody>
+      </p:sp>
+      <p:sp>
+        <p:nvSpPr>
+          <p:cNvPr id="5" name="Shape 3"/>
           <p:cNvSpPr/>
           <p:nvPr/>
         </p:nvSpPr>
         <p:spPr>
           <a:xfrm>
-            <a:off x="320040" y="1417320"/>
-            <a:ext cx="2697480" cy="2395728"/>
+            <a:off x="475488" y="3611880"/>
+            <a:ext cx="8193024" cy="822960"/>
           </a:xfrm>
           <a:prstGeom prst="roundRect">
             <a:avLst>
-              <a:gd name="adj" fmla="val 2290"/>
+              <a:gd name="adj" fmla="val 6667"/>
             </a:avLst>
           </a:prstGeom>
           <a:solidFill>
@@ -4230,14 +4804,14 @@
       </p:sp>
       <p:sp>
         <p:nvSpPr>
-          <p:cNvPr id="4" name="Text 2"/>
-          <p:cNvSpPr txBox="1"/>
-          <p:nvPr/>
-        </p:nvSpPr>
-        <p:spPr>
-          <a:xfrm>
-            <a:off x="466344" y="1527048"/>
-            <a:ext cx="2404872" cy="274320"/>
+          <p:cNvPr id="6" name="Text 4"/>
+          <p:cNvSpPr txBox="1"/>
+          <p:nvPr/>
+        </p:nvSpPr>
+        <p:spPr>
+          <a:xfrm>
+            <a:off x="731520" y="3611880"/>
+            <a:ext cx="7680960" cy="822960"/>
           </a:xfrm>
           <a:prstGeom prst="rect">
             <a:avLst/>
@@ -4255,747 +4829,13 @@
             <a:r>
               <a:rPr lang="en-US" sz="1600" b="1" dirty="0">
                 <a:solidFill>
-                  <a:srgbClr val="44C1A3"/>
-                </a:solidFill>
-                <a:latin typeface="メイリオ" pitchFamily="34" charset="0"/>
-                <a:ea typeface="メイリオ" pitchFamily="34" charset="-122"/>
-                <a:cs typeface="メイリオ" pitchFamily="34" charset="-120"/>
-              </a:rPr>
-              <a:t>保健体育</a:t>
-            </a:r>
-            <a:endParaRPr lang="en-US" sz="1600" dirty="0"/>
-          </a:p>
-        </p:txBody>
-      </p:sp>
-      <p:sp>
-        <p:nvSpPr>
-          <p:cNvPr id="5" name="Text 3"/>
-          <p:cNvSpPr txBox="1"/>
-          <p:nvPr/>
-        </p:nvSpPr>
-        <p:spPr>
-          <a:xfrm>
-            <a:off x="466344" y="1801368"/>
-            <a:ext cx="2404872" cy="237744"/>
-          </a:xfrm>
-          <a:prstGeom prst="rect">
-            <a:avLst/>
-          </a:prstGeom>
-          <a:noFill/>
-          <a:ln/>
-        </p:spPr>
-        <p:txBody>
-          <a:bodyPr wrap="square" lIns="0" tIns="0" rIns="0" bIns="0" rtlCol="0" anchor="ctr"/>
-          <a:lstStyle/>
-          <a:p>
-            <a:pPr algn="l" indent="0" marL="0">
-              <a:buNone/>
-            </a:pPr>
-            <a:r>
-              <a:rPr lang="en-US" sz="1100" b="1" dirty="0">
-                <a:solidFill>
-                  <a:srgbClr val="808080"/>
-                </a:solidFill>
-                <a:latin typeface="メイリオ" pitchFamily="34" charset="0"/>
-                <a:ea typeface="メイリオ" pitchFamily="34" charset="-122"/>
-                <a:cs typeface="メイリオ" pitchFamily="34" charset="-120"/>
-              </a:rPr>
-              <a:t>田口　和磨　先生</a:t>
-            </a:r>
-            <a:endParaRPr lang="en-US" sz="1100" dirty="0"/>
-          </a:p>
-        </p:txBody>
-      </p:sp>
-      <p:sp>
-        <p:nvSpPr>
-          <p:cNvPr id="6" name="Text 4"/>
-          <p:cNvSpPr txBox="1"/>
-          <p:nvPr/>
-        </p:nvSpPr>
-        <p:spPr>
-          <a:xfrm>
-            <a:off x="466344" y="2075688"/>
-            <a:ext cx="2404872" cy="1609344"/>
-          </a:xfrm>
-          <a:prstGeom prst="rect">
-            <a:avLst/>
-          </a:prstGeom>
-          <a:noFill/>
-          <a:ln/>
-        </p:spPr>
-        <p:txBody>
-          <a:bodyPr wrap="square" lIns="0" tIns="0" rIns="0" bIns="0" rtlCol="0" anchor="t"/>
-          <a:lstStyle/>
-          <a:p>
-            <a:pPr algn="l" indent="0" marL="0">
-              <a:lnSpc>
-                <a:spcPct val="125000"/>
-              </a:lnSpc>
-              <a:buNone/>
-            </a:pPr>
-            <a:r>
-              <a:rPr lang="en-US" sz="1350" b="1" dirty="0">
-                <a:solidFill>
                   <a:srgbClr val="595959"/>
                 </a:solidFill>
                 <a:latin typeface="メイリオ" pitchFamily="34" charset="0"/>
                 <a:ea typeface="メイリオ" pitchFamily="34" charset="-122"/>
                 <a:cs typeface="メイリオ" pitchFamily="34" charset="-120"/>
               </a:rPr>
-              <a:t>バディ同士で</a:t>
-            </a:r>
-            <a:endParaRPr lang="en-US" sz="1350" dirty="0"/>
-          </a:p>
-          <a:p>
-            <a:pPr algn="l" indent="0" marL="0">
-              <a:lnSpc>
-                <a:spcPct val="125000"/>
-              </a:lnSpc>
-              <a:buNone/>
-            </a:pPr>
-            <a:r>
-              <a:rPr lang="en-US" sz="1350" b="1" dirty="0">
-                <a:solidFill>
-                  <a:srgbClr val="EE7B08"/>
-                </a:solidFill>
-                <a:latin typeface="メイリオ" pitchFamily="34" charset="0"/>
-                <a:ea typeface="メイリオ" pitchFamily="34" charset="-122"/>
-                <a:cs typeface="メイリオ" pitchFamily="34" charset="-120"/>
-              </a:rPr>
-              <a:t>互いの泳ぎを見て</a:t>
-            </a:r>
-            <a:endParaRPr lang="en-US" sz="1350" dirty="0"/>
-          </a:p>
-          <a:p>
-            <a:pPr algn="l" indent="0" marL="0">
-              <a:lnSpc>
-                <a:spcPct val="125000"/>
-              </a:lnSpc>
-              <a:buNone/>
-            </a:pPr>
-            <a:r>
-              <a:rPr lang="en-US" sz="1350" b="1" dirty="0">
-                <a:solidFill>
-                  <a:srgbClr val="EE7B08"/>
-                </a:solidFill>
-                <a:latin typeface="メイリオ" pitchFamily="34" charset="0"/>
-                <a:ea typeface="メイリオ" pitchFamily="34" charset="-122"/>
-                <a:cs typeface="メイリオ" pitchFamily="34" charset="-120"/>
-              </a:rPr>
-              <a:t>改善点を考えていた。</a:t>
-            </a:r>
-            <a:endParaRPr lang="en-US" sz="1350" dirty="0"/>
-          </a:p>
-          <a:p>
-            <a:pPr algn="l" indent="0" marL="0">
-              <a:lnSpc>
-                <a:spcPct val="125000"/>
-              </a:lnSpc>
-              <a:buNone/>
-            </a:pPr>
-            <a:r>
-              <a:rPr lang="en-US" sz="1350" b="1" dirty="0">
-                <a:solidFill>
-                  <a:srgbClr val="595959"/>
-                </a:solidFill>
-                <a:latin typeface="メイリオ" pitchFamily="34" charset="0"/>
-                <a:ea typeface="メイリオ" pitchFamily="34" charset="-122"/>
-                <a:cs typeface="メイリオ" pitchFamily="34" charset="-120"/>
-              </a:rPr>
-              <a:t>得意な生徒が助言役を</a:t>
-            </a:r>
-            <a:endParaRPr lang="en-US" sz="1350" dirty="0"/>
-          </a:p>
-          <a:p>
-            <a:pPr algn="l" indent="0" marL="0">
-              <a:lnSpc>
-                <a:spcPct val="125000"/>
-              </a:lnSpc>
-              <a:buNone/>
-            </a:pPr>
-            <a:r>
-              <a:rPr lang="en-US" sz="1350" b="1" dirty="0">
-                <a:solidFill>
-                  <a:srgbClr val="595959"/>
-                </a:solidFill>
-                <a:latin typeface="メイリオ" pitchFamily="34" charset="0"/>
-                <a:ea typeface="メイリオ" pitchFamily="34" charset="-122"/>
-                <a:cs typeface="メイリオ" pitchFamily="34" charset="-120"/>
-              </a:rPr>
-              <a:t>担い、全員に役割が</a:t>
-            </a:r>
-            <a:endParaRPr lang="en-US" sz="1350" dirty="0"/>
-          </a:p>
-          <a:p>
-            <a:pPr algn="l" indent="0" marL="0">
-              <a:lnSpc>
-                <a:spcPct val="125000"/>
-              </a:lnSpc>
-              <a:buNone/>
-            </a:pPr>
-            <a:r>
-              <a:rPr lang="en-US" sz="1350" b="1" dirty="0">
-                <a:solidFill>
-                  <a:srgbClr val="595959"/>
-                </a:solidFill>
-                <a:latin typeface="メイリオ" pitchFamily="34" charset="0"/>
-                <a:ea typeface="メイリオ" pitchFamily="34" charset="-122"/>
-                <a:cs typeface="メイリオ" pitchFamily="34" charset="-120"/>
-              </a:rPr>
-              <a:t>あった。</a:t>
-            </a:r>
-            <a:endParaRPr lang="en-US" sz="1350" dirty="0"/>
-          </a:p>
-        </p:txBody>
-      </p:sp>
-      <p:sp>
-        <p:nvSpPr>
-          <p:cNvPr id="7" name="Shape 5"/>
-          <p:cNvSpPr/>
-          <p:nvPr/>
-        </p:nvSpPr>
-        <p:spPr>
-          <a:xfrm>
-            <a:off x="3227832" y="1417320"/>
-            <a:ext cx="2697480" cy="2395728"/>
-          </a:xfrm>
-          <a:prstGeom prst="roundRect">
-            <a:avLst>
-              <a:gd name="adj" fmla="val 2290"/>
-            </a:avLst>
-          </a:prstGeom>
-          <a:solidFill>
-            <a:srgbClr val="E9F7F3"/>
-          </a:solidFill>
-          <a:ln w="12700">
-            <a:solidFill>
-              <a:srgbClr val="B9E5DA"/>
-            </a:solidFill>
-            <a:prstDash val="solid"/>
-          </a:ln>
-        </p:spPr>
-      </p:sp>
-      <p:sp>
-        <p:nvSpPr>
-          <p:cNvPr id="8" name="Text 6"/>
-          <p:cNvSpPr txBox="1"/>
-          <p:nvPr/>
-        </p:nvSpPr>
-        <p:spPr>
-          <a:xfrm>
-            <a:off x="3374136" y="1527048"/>
-            <a:ext cx="2404872" cy="274320"/>
-          </a:xfrm>
-          <a:prstGeom prst="rect">
-            <a:avLst/>
-          </a:prstGeom>
-          <a:noFill/>
-          <a:ln/>
-        </p:spPr>
-        <p:txBody>
-          <a:bodyPr wrap="square" lIns="0" tIns="0" rIns="0" bIns="0" rtlCol="0" anchor="ctr"/>
-          <a:lstStyle/>
-          <a:p>
-            <a:pPr algn="l" indent="0" marL="0">
-              <a:buNone/>
-            </a:pPr>
-            <a:r>
-              <a:rPr lang="en-US" sz="1600" b="1" dirty="0">
-                <a:solidFill>
-                  <a:srgbClr val="44C1A3"/>
-                </a:solidFill>
-                <a:latin typeface="メイリオ" pitchFamily="34" charset="0"/>
-                <a:ea typeface="メイリオ" pitchFamily="34" charset="-122"/>
-                <a:cs typeface="メイリオ" pitchFamily="34" charset="-120"/>
-              </a:rPr>
-              <a:t>道徳</a:t>
-            </a:r>
-            <a:endParaRPr lang="en-US" sz="1600" dirty="0"/>
-          </a:p>
-        </p:txBody>
-      </p:sp>
-      <p:sp>
-        <p:nvSpPr>
-          <p:cNvPr id="9" name="Text 7"/>
-          <p:cNvSpPr txBox="1"/>
-          <p:nvPr/>
-        </p:nvSpPr>
-        <p:spPr>
-          <a:xfrm>
-            <a:off x="3374136" y="1801368"/>
-            <a:ext cx="2404872" cy="237744"/>
-          </a:xfrm>
-          <a:prstGeom prst="rect">
-            <a:avLst/>
-          </a:prstGeom>
-          <a:noFill/>
-          <a:ln/>
-        </p:spPr>
-        <p:txBody>
-          <a:bodyPr wrap="square" lIns="0" tIns="0" rIns="0" bIns="0" rtlCol="0" anchor="ctr"/>
-          <a:lstStyle/>
-          <a:p>
-            <a:pPr algn="l" indent="0" marL="0">
-              <a:buNone/>
-            </a:pPr>
-            <a:r>
-              <a:rPr lang="en-US" sz="1100" b="1" dirty="0">
-                <a:solidFill>
-                  <a:srgbClr val="808080"/>
-                </a:solidFill>
-                <a:latin typeface="メイリオ" pitchFamily="34" charset="0"/>
-                <a:ea typeface="メイリオ" pitchFamily="34" charset="-122"/>
-                <a:cs typeface="メイリオ" pitchFamily="34" charset="-120"/>
-              </a:rPr>
-              <a:t>東海林　静江　先生</a:t>
-            </a:r>
-            <a:endParaRPr lang="en-US" sz="1100" dirty="0"/>
-          </a:p>
-        </p:txBody>
-      </p:sp>
-      <p:sp>
-        <p:nvSpPr>
-          <p:cNvPr id="10" name="Text 8"/>
-          <p:cNvSpPr txBox="1"/>
-          <p:nvPr/>
-        </p:nvSpPr>
-        <p:spPr>
-          <a:xfrm>
-            <a:off x="3374136" y="2075688"/>
-            <a:ext cx="2404872" cy="1609344"/>
-          </a:xfrm>
-          <a:prstGeom prst="rect">
-            <a:avLst/>
-          </a:prstGeom>
-          <a:noFill/>
-          <a:ln/>
-        </p:spPr>
-        <p:txBody>
-          <a:bodyPr wrap="square" lIns="0" tIns="0" rIns="0" bIns="0" rtlCol="0" anchor="t"/>
-          <a:lstStyle/>
-          <a:p>
-            <a:pPr algn="l" indent="0" marL="0">
-              <a:lnSpc>
-                <a:spcPct val="125000"/>
-              </a:lnSpc>
-              <a:buNone/>
-            </a:pPr>
-            <a:r>
-              <a:rPr lang="en-US" sz="1350" b="1" dirty="0">
-                <a:solidFill>
-                  <a:srgbClr val="595959"/>
-                </a:solidFill>
-                <a:latin typeface="メイリオ" pitchFamily="34" charset="0"/>
-                <a:ea typeface="メイリオ" pitchFamily="34" charset="-122"/>
-                <a:cs typeface="メイリオ" pitchFamily="34" charset="-120"/>
-              </a:rPr>
-              <a:t>「嘘」をテーマに、</a:t>
-            </a:r>
-            <a:endParaRPr lang="en-US" sz="1350" dirty="0"/>
-          </a:p>
-          <a:p>
-            <a:pPr algn="l" indent="0" marL="0">
-              <a:lnSpc>
-                <a:spcPct val="125000"/>
-              </a:lnSpc>
-              <a:buNone/>
-            </a:pPr>
-            <a:r>
-              <a:rPr lang="en-US" sz="1350" b="1" dirty="0">
-                <a:solidFill>
-                  <a:srgbClr val="EE7B08"/>
-                </a:solidFill>
-                <a:latin typeface="メイリオ" pitchFamily="34" charset="0"/>
-                <a:ea typeface="メイリオ" pitchFamily="34" charset="-122"/>
-                <a:cs typeface="メイリオ" pitchFamily="34" charset="-120"/>
-              </a:rPr>
-              <a:t>価値観の違いについて</a:t>
-            </a:r>
-            <a:endParaRPr lang="en-US" sz="1350" dirty="0"/>
-          </a:p>
-          <a:p>
-            <a:pPr algn="l" indent="0" marL="0">
-              <a:lnSpc>
-                <a:spcPct val="125000"/>
-              </a:lnSpc>
-              <a:buNone/>
-            </a:pPr>
-            <a:r>
-              <a:rPr lang="en-US" sz="1350" b="1" dirty="0">
-                <a:solidFill>
-                  <a:srgbClr val="EE7B08"/>
-                </a:solidFill>
-                <a:latin typeface="メイリオ" pitchFamily="34" charset="0"/>
-                <a:ea typeface="メイリオ" pitchFamily="34" charset="-122"/>
-                <a:cs typeface="メイリオ" pitchFamily="34" charset="-120"/>
-              </a:rPr>
-              <a:t>議論していた。</a:t>
-            </a:r>
-            <a:endParaRPr lang="en-US" sz="1350" dirty="0"/>
-          </a:p>
-          <a:p>
-            <a:pPr algn="l" indent="0" marL="0">
-              <a:lnSpc>
-                <a:spcPct val="125000"/>
-              </a:lnSpc>
-              <a:buNone/>
-            </a:pPr>
-            <a:r>
-              <a:rPr lang="en-US" sz="1350" b="1" dirty="0">
-                <a:solidFill>
-                  <a:srgbClr val="595959"/>
-                </a:solidFill>
-                <a:latin typeface="メイリオ" pitchFamily="34" charset="0"/>
-                <a:ea typeface="メイリオ" pitchFamily="34" charset="-122"/>
-                <a:cs typeface="メイリオ" pitchFamily="34" charset="-120"/>
-              </a:rPr>
-              <a:t>発表より議論の時間を</a:t>
-            </a:r>
-            <a:endParaRPr lang="en-US" sz="1350" dirty="0"/>
-          </a:p>
-          <a:p>
-            <a:pPr algn="l" indent="0" marL="0">
-              <a:lnSpc>
-                <a:spcPct val="125000"/>
-              </a:lnSpc>
-              <a:buNone/>
-            </a:pPr>
-            <a:r>
-              <a:rPr lang="en-US" sz="1350" b="1" dirty="0">
-                <a:solidFill>
-                  <a:srgbClr val="595959"/>
-                </a:solidFill>
-                <a:latin typeface="メイリオ" pitchFamily="34" charset="0"/>
-                <a:ea typeface="メイリオ" pitchFamily="34" charset="-122"/>
-                <a:cs typeface="メイリオ" pitchFamily="34" charset="-120"/>
-              </a:rPr>
-              <a:t>重視した構成だった。</a:t>
-            </a:r>
-            <a:endParaRPr lang="en-US" sz="1350" dirty="0"/>
-          </a:p>
-        </p:txBody>
-      </p:sp>
-      <p:sp>
-        <p:nvSpPr>
-          <p:cNvPr id="11" name="Shape 9"/>
-          <p:cNvSpPr/>
-          <p:nvPr/>
-        </p:nvSpPr>
-        <p:spPr>
-          <a:xfrm>
-            <a:off x="6135624" y="1417320"/>
-            <a:ext cx="2697480" cy="2395728"/>
-          </a:xfrm>
-          <a:prstGeom prst="roundRect">
-            <a:avLst>
-              <a:gd name="adj" fmla="val 2290"/>
-            </a:avLst>
-          </a:prstGeom>
-          <a:solidFill>
-            <a:srgbClr val="E9F7F3"/>
-          </a:solidFill>
-          <a:ln w="12700">
-            <a:solidFill>
-              <a:srgbClr val="B9E5DA"/>
-            </a:solidFill>
-            <a:prstDash val="solid"/>
-          </a:ln>
-        </p:spPr>
-      </p:sp>
-      <p:sp>
-        <p:nvSpPr>
-          <p:cNvPr id="12" name="Text 10"/>
-          <p:cNvSpPr txBox="1"/>
-          <p:nvPr/>
-        </p:nvSpPr>
-        <p:spPr>
-          <a:xfrm>
-            <a:off x="6281928" y="1527048"/>
-            <a:ext cx="2404872" cy="274320"/>
-          </a:xfrm>
-          <a:prstGeom prst="rect">
-            <a:avLst/>
-          </a:prstGeom>
-          <a:noFill/>
-          <a:ln/>
-        </p:spPr>
-        <p:txBody>
-          <a:bodyPr wrap="square" lIns="0" tIns="0" rIns="0" bIns="0" rtlCol="0" anchor="ctr"/>
-          <a:lstStyle/>
-          <a:p>
-            <a:pPr algn="l" indent="0" marL="0">
-              <a:buNone/>
-            </a:pPr>
-            <a:r>
-              <a:rPr lang="en-US" sz="1600" b="1" dirty="0">
-                <a:solidFill>
-                  <a:srgbClr val="44C1A3"/>
-                </a:solidFill>
-                <a:latin typeface="メイリオ" pitchFamily="34" charset="0"/>
-                <a:ea typeface="メイリオ" pitchFamily="34" charset="-122"/>
-                <a:cs typeface="メイリオ" pitchFamily="34" charset="-120"/>
-              </a:rPr>
-              <a:t>外国語</a:t>
-            </a:r>
-            <a:endParaRPr lang="en-US" sz="1600" dirty="0"/>
-          </a:p>
-        </p:txBody>
-      </p:sp>
-      <p:sp>
-        <p:nvSpPr>
-          <p:cNvPr id="13" name="Text 11"/>
-          <p:cNvSpPr txBox="1"/>
-          <p:nvPr/>
-        </p:nvSpPr>
-        <p:spPr>
-          <a:xfrm>
-            <a:off x="6281928" y="1801368"/>
-            <a:ext cx="2404872" cy="237744"/>
-          </a:xfrm>
-          <a:prstGeom prst="rect">
-            <a:avLst/>
-          </a:prstGeom>
-          <a:noFill/>
-          <a:ln/>
-        </p:spPr>
-        <p:txBody>
-          <a:bodyPr wrap="square" lIns="0" tIns="0" rIns="0" bIns="0" rtlCol="0" anchor="ctr"/>
-          <a:lstStyle/>
-          <a:p>
-            <a:pPr algn="l" indent="0" marL="0">
-              <a:buNone/>
-            </a:pPr>
-            <a:r>
-              <a:rPr lang="en-US" sz="1100" b="1" dirty="0">
-                <a:solidFill>
-                  <a:srgbClr val="808080"/>
-                </a:solidFill>
-                <a:latin typeface="メイリオ" pitchFamily="34" charset="0"/>
-                <a:ea typeface="メイリオ" pitchFamily="34" charset="-122"/>
-                <a:cs typeface="メイリオ" pitchFamily="34" charset="-120"/>
-              </a:rPr>
-              <a:t>塚本　瑞穂　先生</a:t>
-            </a:r>
-            <a:endParaRPr lang="en-US" sz="1100" dirty="0"/>
-          </a:p>
-        </p:txBody>
-      </p:sp>
-      <p:sp>
-        <p:nvSpPr>
-          <p:cNvPr id="14" name="Text 12"/>
-          <p:cNvSpPr txBox="1"/>
-          <p:nvPr/>
-        </p:nvSpPr>
-        <p:spPr>
-          <a:xfrm>
-            <a:off x="6281928" y="2075688"/>
-            <a:ext cx="2404872" cy="1609344"/>
-          </a:xfrm>
-          <a:prstGeom prst="rect">
-            <a:avLst/>
-          </a:prstGeom>
-          <a:noFill/>
-          <a:ln/>
-        </p:spPr>
-        <p:txBody>
-          <a:bodyPr wrap="square" lIns="0" tIns="0" rIns="0" bIns="0" rtlCol="0" anchor="t"/>
-          <a:lstStyle/>
-          <a:p>
-            <a:pPr algn="l" indent="0" marL="0">
-              <a:lnSpc>
-                <a:spcPct val="125000"/>
-              </a:lnSpc>
-              <a:buNone/>
-            </a:pPr>
-            <a:r>
-              <a:rPr lang="en-US" sz="1350" b="1" dirty="0">
-                <a:solidFill>
-                  <a:srgbClr val="595959"/>
-                </a:solidFill>
-                <a:latin typeface="メイリオ" pitchFamily="34" charset="0"/>
-                <a:ea typeface="メイリオ" pitchFamily="34" charset="-122"/>
-                <a:cs typeface="メイリオ" pitchFamily="34" charset="-120"/>
-              </a:rPr>
-              <a:t>ペアでのやり取りから</a:t>
-            </a:r>
-            <a:endParaRPr lang="en-US" sz="1350" dirty="0"/>
-          </a:p>
-          <a:p>
-            <a:pPr algn="l" indent="0" marL="0">
-              <a:lnSpc>
-                <a:spcPct val="125000"/>
-              </a:lnSpc>
-              <a:buNone/>
-            </a:pPr>
-            <a:r>
-              <a:rPr lang="en-US" sz="1350" b="1" dirty="0">
-                <a:solidFill>
-                  <a:srgbClr val="EE7B08"/>
-                </a:solidFill>
-                <a:latin typeface="メイリオ" pitchFamily="34" charset="0"/>
-                <a:ea typeface="メイリオ" pitchFamily="34" charset="-122"/>
-                <a:cs typeface="メイリオ" pitchFamily="34" charset="-120"/>
-              </a:rPr>
-              <a:t>全体の学びへつなぐ。</a:t>
-            </a:r>
-            <a:endParaRPr lang="en-US" sz="1350" dirty="0"/>
-          </a:p>
-          <a:p>
-            <a:pPr algn="l" indent="0" marL="0">
-              <a:lnSpc>
-                <a:spcPct val="125000"/>
-              </a:lnSpc>
-              <a:buNone/>
-            </a:pPr>
-            <a:r>
-              <a:rPr lang="en-US" sz="1350" b="1" dirty="0">
-                <a:solidFill>
-                  <a:srgbClr val="595959"/>
-                </a:solidFill>
-                <a:latin typeface="メイリオ" pitchFamily="34" charset="0"/>
-                <a:ea typeface="メイリオ" pitchFamily="34" charset="-122"/>
-                <a:cs typeface="メイリオ" pitchFamily="34" charset="-120"/>
-              </a:rPr>
-              <a:t>音読も一人ではなく</a:t>
-            </a:r>
-            <a:endParaRPr lang="en-US" sz="1350" dirty="0"/>
-          </a:p>
-          <a:p>
-            <a:pPr algn="l" indent="0" marL="0">
-              <a:lnSpc>
-                <a:spcPct val="125000"/>
-              </a:lnSpc>
-              <a:buNone/>
-            </a:pPr>
-            <a:r>
-              <a:rPr lang="en-US" sz="1350" b="1" dirty="0">
-                <a:solidFill>
-                  <a:srgbClr val="EE7B08"/>
-                </a:solidFill>
-                <a:latin typeface="メイリオ" pitchFamily="34" charset="0"/>
-                <a:ea typeface="メイリオ" pitchFamily="34" charset="-122"/>
-                <a:cs typeface="メイリオ" pitchFamily="34" charset="-120"/>
-              </a:rPr>
-              <a:t>相手とともに行い、</a:t>
-            </a:r>
-            <a:endParaRPr lang="en-US" sz="1350" dirty="0"/>
-          </a:p>
-          <a:p>
-            <a:pPr algn="l" indent="0" marL="0">
-              <a:lnSpc>
-                <a:spcPct val="125000"/>
-              </a:lnSpc>
-              <a:buNone/>
-            </a:pPr>
-            <a:r>
-              <a:rPr lang="en-US" sz="1350" b="1" dirty="0">
-                <a:solidFill>
-                  <a:srgbClr val="595959"/>
-                </a:solidFill>
-                <a:latin typeface="メイリオ" pitchFamily="34" charset="0"/>
-                <a:ea typeface="メイリオ" pitchFamily="34" charset="-122"/>
-                <a:cs typeface="メイリオ" pitchFamily="34" charset="-120"/>
-              </a:rPr>
-              <a:t>表現を確かなものに</a:t>
-            </a:r>
-            <a:endParaRPr lang="en-US" sz="1350" dirty="0"/>
-          </a:p>
-          <a:p>
-            <a:pPr algn="l" indent="0" marL="0">
-              <a:lnSpc>
-                <a:spcPct val="125000"/>
-              </a:lnSpc>
-              <a:buNone/>
-            </a:pPr>
-            <a:r>
-              <a:rPr lang="en-US" sz="1350" b="1" dirty="0">
-                <a:solidFill>
-                  <a:srgbClr val="595959"/>
-                </a:solidFill>
-                <a:latin typeface="メイリオ" pitchFamily="34" charset="0"/>
-                <a:ea typeface="メイリオ" pitchFamily="34" charset="-122"/>
-                <a:cs typeface="メイリオ" pitchFamily="34" charset="-120"/>
-              </a:rPr>
-              <a:t>していた。</a:t>
-            </a:r>
-            <a:endParaRPr lang="en-US" sz="1350" dirty="0"/>
-          </a:p>
-        </p:txBody>
-      </p:sp>
-      <p:sp>
-        <p:nvSpPr>
-          <p:cNvPr id="15" name="Text 13"/>
-          <p:cNvSpPr txBox="1"/>
-          <p:nvPr/>
-        </p:nvSpPr>
-        <p:spPr>
-          <a:xfrm>
-            <a:off x="320040" y="3977640"/>
-            <a:ext cx="8503920" cy="822960"/>
-          </a:xfrm>
-          <a:prstGeom prst="rect">
-            <a:avLst/>
-          </a:prstGeom>
-          <a:noFill/>
-          <a:ln/>
-        </p:spPr>
-        <p:txBody>
-          <a:bodyPr wrap="square" lIns="0" tIns="0" rIns="0" bIns="0" rtlCol="0" anchor="t"/>
-          <a:lstStyle/>
-          <a:p>
-            <a:pPr algn="l" indent="0" marL="0">
-              <a:lnSpc>
-                <a:spcPct val="120000"/>
-              </a:lnSpc>
-              <a:buNone/>
-            </a:pPr>
-            <a:r>
-              <a:rPr lang="en-US" sz="1600" b="1" dirty="0">
-                <a:solidFill>
-                  <a:srgbClr val="595959"/>
-                </a:solidFill>
-                <a:latin typeface="メイリオ" pitchFamily="34" charset="0"/>
-                <a:ea typeface="メイリオ" pitchFamily="34" charset="-122"/>
-                <a:cs typeface="メイリオ" pitchFamily="34" charset="-120"/>
-              </a:rPr>
-              <a:t>教科は異なっても、共通していたのは</a:t>
-            </a:r>
-            <a:endParaRPr lang="en-US" sz="1600" dirty="0"/>
-          </a:p>
-          <a:p>
-            <a:pPr algn="l" indent="0" marL="0">
-              <a:lnSpc>
-                <a:spcPct val="120000"/>
-              </a:lnSpc>
-              <a:buNone/>
-            </a:pPr>
-            <a:r>
-              <a:rPr lang="en-US" sz="1600" b="1" dirty="0">
-                <a:solidFill>
-                  <a:srgbClr val="EE7B08"/>
-                </a:solidFill>
-                <a:latin typeface="メイリオ" pitchFamily="34" charset="0"/>
-                <a:ea typeface="メイリオ" pitchFamily="34" charset="-122"/>
-                <a:cs typeface="メイリオ" pitchFamily="34" charset="-120"/>
-              </a:rPr>
-              <a:t>「相手を通して自分を見つめる学び」</a:t>
-            </a:r>
-            <a:pPr algn="l" indent="0" marL="0">
-              <a:lnSpc>
-                <a:spcPct val="120000"/>
-              </a:lnSpc>
-              <a:buNone/>
-            </a:pPr>
-            <a:r>
-              <a:rPr lang="en-US" sz="1600" b="1" dirty="0">
-                <a:solidFill>
-                  <a:srgbClr val="595959"/>
-                </a:solidFill>
-                <a:latin typeface="メイリオ" pitchFamily="34" charset="0"/>
-                <a:ea typeface="メイリオ" pitchFamily="34" charset="-122"/>
-                <a:cs typeface="メイリオ" pitchFamily="34" charset="-120"/>
-              </a:rPr>
-              <a:t>であった。</a:t>
+              <a:t>本日の３つの授業にも、対話が学びを深める場面が表れていた。</a:t>
             </a:r>
             <a:endParaRPr lang="en-US" sz="1600" dirty="0"/>
           </a:p>
@@ -5084,7 +4924,7 @@
                 <a:ea typeface="メイリオ" pitchFamily="34" charset="-122"/>
                 <a:cs typeface="メイリオ" pitchFamily="34" charset="-120"/>
               </a:rPr>
-              <a:t>　③　学習の自己調整</a:t>
+              <a:t>　②　対話によって学びは深まる</a:t>
             </a:r>
             <a:endParaRPr lang="en-US" sz="3000" dirty="0"/>
           </a:p>
@@ -5092,210 +4932,18 @@
       </p:sp>
       <p:sp>
         <p:nvSpPr>
-          <p:cNvPr id="3" name="Text 1"/>
-          <p:cNvSpPr txBox="1"/>
-          <p:nvPr/>
-        </p:nvSpPr>
-        <p:spPr>
-          <a:xfrm>
-            <a:off x="475488" y="1444752"/>
-            <a:ext cx="8193024" cy="1280160"/>
-          </a:xfrm>
-          <a:prstGeom prst="rect">
-            <a:avLst/>
-          </a:prstGeom>
-          <a:noFill/>
-          <a:ln/>
-        </p:spPr>
-        <p:txBody>
-          <a:bodyPr wrap="square" lIns="0" tIns="0" rIns="0" bIns="0" rtlCol="0" anchor="t"/>
-          <a:lstStyle/>
-          <a:p>
-            <a:pPr algn="l" indent="0" marL="0">
-              <a:lnSpc>
-                <a:spcPct val="120000"/>
-              </a:lnSpc>
-              <a:buNone/>
-            </a:pPr>
-            <a:r>
-              <a:rPr lang="en-US" sz="2100" b="1" dirty="0">
-                <a:solidFill>
-                  <a:srgbClr val="595959"/>
-                </a:solidFill>
-                <a:latin typeface="メイリオ" pitchFamily="34" charset="0"/>
-                <a:ea typeface="メイリオ" pitchFamily="34" charset="-122"/>
-                <a:cs typeface="メイリオ" pitchFamily="34" charset="-120"/>
-              </a:rPr>
-              <a:t>これから求められる子どもは、</a:t>
-            </a:r>
-            <a:endParaRPr lang="en-US" sz="2100" dirty="0"/>
-          </a:p>
-          <a:p>
-            <a:pPr algn="l" indent="0" marL="0">
-              <a:lnSpc>
-                <a:spcPct val="120000"/>
-              </a:lnSpc>
-              <a:buNone/>
-            </a:pPr>
-            <a:r>
-              <a:rPr lang="en-US" sz="2100" b="1" dirty="0">
-                <a:solidFill>
-                  <a:srgbClr val="595959"/>
-                </a:solidFill>
-                <a:latin typeface="メイリオ" pitchFamily="34" charset="0"/>
-                <a:ea typeface="メイリオ" pitchFamily="34" charset="-122"/>
-                <a:cs typeface="メイリオ" pitchFamily="34" charset="-120"/>
-              </a:rPr>
-              <a:t>　教えられたことを学ぶ子どもではなく、</a:t>
-            </a:r>
-            <a:endParaRPr lang="en-US" sz="2100" dirty="0"/>
-          </a:p>
-          <a:p>
-            <a:pPr algn="l" indent="0" marL="0">
-              <a:lnSpc>
-                <a:spcPct val="120000"/>
-              </a:lnSpc>
-              <a:buNone/>
-            </a:pPr>
-            <a:r>
-              <a:rPr lang="en-US" sz="2100" b="1" dirty="0">
-                <a:solidFill>
-                  <a:srgbClr val="595959"/>
-                </a:solidFill>
-                <a:latin typeface="メイリオ" pitchFamily="34" charset="0"/>
-                <a:ea typeface="メイリオ" pitchFamily="34" charset="-122"/>
-                <a:cs typeface="メイリオ" pitchFamily="34" charset="-120"/>
-              </a:rPr>
-              <a:t>　</a:t>
-            </a:r>
-            <a:pPr algn="l" indent="0" marL="0">
-              <a:lnSpc>
-                <a:spcPct val="120000"/>
-              </a:lnSpc>
-              <a:buNone/>
-            </a:pPr>
-            <a:r>
-              <a:rPr lang="en-US" sz="2100" b="1" dirty="0">
-                <a:solidFill>
-                  <a:srgbClr val="EE7B08"/>
-                </a:solidFill>
-                <a:latin typeface="メイリオ" pitchFamily="34" charset="0"/>
-                <a:ea typeface="メイリオ" pitchFamily="34" charset="-122"/>
-                <a:cs typeface="メイリオ" pitchFamily="34" charset="-120"/>
-              </a:rPr>
-              <a:t>自分で学び続ける子ども</a:t>
-            </a:r>
-            <a:pPr algn="l" indent="0" marL="0">
-              <a:lnSpc>
-                <a:spcPct val="120000"/>
-              </a:lnSpc>
-              <a:buNone/>
-            </a:pPr>
-            <a:r>
-              <a:rPr lang="en-US" sz="2100" b="1" dirty="0">
-                <a:solidFill>
-                  <a:srgbClr val="595959"/>
-                </a:solidFill>
-                <a:latin typeface="メイリオ" pitchFamily="34" charset="0"/>
-                <a:ea typeface="メイリオ" pitchFamily="34" charset="-122"/>
-                <a:cs typeface="メイリオ" pitchFamily="34" charset="-120"/>
-              </a:rPr>
-              <a:t>である。</a:t>
-            </a:r>
-            <a:endParaRPr lang="en-US" sz="2100" dirty="0"/>
-          </a:p>
-        </p:txBody>
-      </p:sp>
-      <p:sp>
-        <p:nvSpPr>
-          <p:cNvPr id="4" name="Text 2"/>
-          <p:cNvSpPr txBox="1"/>
-          <p:nvPr/>
-        </p:nvSpPr>
-        <p:spPr>
-          <a:xfrm>
-            <a:off x="475488" y="2880360"/>
-            <a:ext cx="8193024" cy="502920"/>
-          </a:xfrm>
-          <a:prstGeom prst="rect">
-            <a:avLst/>
-          </a:prstGeom>
-          <a:noFill/>
-          <a:ln/>
-        </p:spPr>
-        <p:txBody>
-          <a:bodyPr wrap="square" lIns="0" tIns="0" rIns="0" bIns="0" rtlCol="0" anchor="t"/>
-          <a:lstStyle/>
-          <a:p>
-            <a:pPr algn="l" indent="0" marL="0">
-              <a:lnSpc>
-                <a:spcPct val="120000"/>
-              </a:lnSpc>
-              <a:buNone/>
-            </a:pPr>
-            <a:r>
-              <a:rPr lang="en-US" sz="2100" b="1" dirty="0">
-                <a:solidFill>
-                  <a:srgbClr val="595959"/>
-                </a:solidFill>
-                <a:latin typeface="メイリオ" pitchFamily="34" charset="0"/>
-                <a:ea typeface="メイリオ" pitchFamily="34" charset="-122"/>
-                <a:cs typeface="メイリオ" pitchFamily="34" charset="-120"/>
-              </a:rPr>
-              <a:t>そのために必要なのが</a:t>
-            </a:r>
-            <a:pPr algn="l" indent="0" marL="0">
-              <a:lnSpc>
-                <a:spcPct val="120000"/>
-              </a:lnSpc>
-              <a:buNone/>
-            </a:pPr>
-            <a:r>
-              <a:rPr lang="en-US" sz="2100" b="1" dirty="0">
-                <a:solidFill>
-                  <a:srgbClr val="EE7B08"/>
-                </a:solidFill>
-                <a:latin typeface="メイリオ" pitchFamily="34" charset="0"/>
-                <a:ea typeface="メイリオ" pitchFamily="34" charset="-122"/>
-                <a:cs typeface="メイリオ" pitchFamily="34" charset="-120"/>
-              </a:rPr>
-              <a:t>学習の自己調整</a:t>
-            </a:r>
-            <a:pPr algn="l" indent="0" marL="0">
-              <a:lnSpc>
-                <a:spcPct val="120000"/>
-              </a:lnSpc>
-              <a:buNone/>
-            </a:pPr>
-            <a:r>
-              <a:rPr lang="en-US" sz="2100" b="1" dirty="0">
-                <a:solidFill>
-                  <a:srgbClr val="595959"/>
-                </a:solidFill>
-                <a:latin typeface="メイリオ" pitchFamily="34" charset="0"/>
-                <a:ea typeface="メイリオ" pitchFamily="34" charset="-122"/>
-                <a:cs typeface="メイリオ" pitchFamily="34" charset="-120"/>
-              </a:rPr>
-              <a:t>である。</a:t>
-            </a:r>
-            <a:endParaRPr lang="en-US" sz="2100" dirty="0"/>
-          </a:p>
-        </p:txBody>
-      </p:sp>
-      <p:sp>
-        <p:nvSpPr>
-          <p:cNvPr id="5" name="Shape 3"/>
+          <p:cNvPr id="3" name="Shape 1"/>
           <p:cNvSpPr/>
           <p:nvPr/>
         </p:nvSpPr>
         <p:spPr>
           <a:xfrm>
-            <a:off x="475488" y="3611880"/>
-            <a:ext cx="8193024" cy="822960"/>
+            <a:off x="320040" y="1417320"/>
+            <a:ext cx="2697480" cy="2395728"/>
           </a:xfrm>
           <a:prstGeom prst="roundRect">
             <a:avLst>
-              <a:gd name="adj" fmla="val 6667"/>
+              <a:gd name="adj" fmla="val 2290"/>
             </a:avLst>
           </a:prstGeom>
           <a:solidFill>
@@ -5311,14 +4959,261 @@
       </p:sp>
       <p:sp>
         <p:nvSpPr>
+          <p:cNvPr id="4" name="Text 2"/>
+          <p:cNvSpPr txBox="1"/>
+          <p:nvPr/>
+        </p:nvSpPr>
+        <p:spPr>
+          <a:xfrm>
+            <a:off x="466344" y="1527048"/>
+            <a:ext cx="2404872" cy="274320"/>
+          </a:xfrm>
+          <a:prstGeom prst="rect">
+            <a:avLst/>
+          </a:prstGeom>
+          <a:noFill/>
+          <a:ln/>
+        </p:spPr>
+        <p:txBody>
+          <a:bodyPr wrap="square" lIns="0" tIns="0" rIns="0" bIns="0" rtlCol="0" anchor="ctr"/>
+          <a:lstStyle/>
+          <a:p>
+            <a:pPr algn="l" indent="0" marL="0">
+              <a:buNone/>
+            </a:pPr>
+            <a:r>
+              <a:rPr lang="en-US" sz="1600" b="1" dirty="0">
+                <a:solidFill>
+                  <a:srgbClr val="44C1A3"/>
+                </a:solidFill>
+                <a:latin typeface="メイリオ" pitchFamily="34" charset="0"/>
+                <a:ea typeface="メイリオ" pitchFamily="34" charset="-122"/>
+                <a:cs typeface="メイリオ" pitchFamily="34" charset="-120"/>
+              </a:rPr>
+              <a:t>保健体育</a:t>
+            </a:r>
+            <a:endParaRPr lang="en-US" sz="1600" dirty="0"/>
+          </a:p>
+        </p:txBody>
+      </p:sp>
+      <p:sp>
+        <p:nvSpPr>
+          <p:cNvPr id="5" name="Text 3"/>
+          <p:cNvSpPr txBox="1"/>
+          <p:nvPr/>
+        </p:nvSpPr>
+        <p:spPr>
+          <a:xfrm>
+            <a:off x="466344" y="1801368"/>
+            <a:ext cx="2404872" cy="237744"/>
+          </a:xfrm>
+          <a:prstGeom prst="rect">
+            <a:avLst/>
+          </a:prstGeom>
+          <a:noFill/>
+          <a:ln/>
+        </p:spPr>
+        <p:txBody>
+          <a:bodyPr wrap="square" lIns="0" tIns="0" rIns="0" bIns="0" rtlCol="0" anchor="ctr"/>
+          <a:lstStyle/>
+          <a:p>
+            <a:pPr algn="l" indent="0" marL="0">
+              <a:buNone/>
+            </a:pPr>
+            <a:r>
+              <a:rPr lang="en-US" sz="1100" b="1" dirty="0">
+                <a:solidFill>
+                  <a:srgbClr val="808080"/>
+                </a:solidFill>
+                <a:latin typeface="メイリオ" pitchFamily="34" charset="0"/>
+                <a:ea typeface="メイリオ" pitchFamily="34" charset="-122"/>
+                <a:cs typeface="メイリオ" pitchFamily="34" charset="-120"/>
+              </a:rPr>
+              <a:t>田口　和磨　先生</a:t>
+            </a:r>
+            <a:endParaRPr lang="en-US" sz="1100" dirty="0"/>
+          </a:p>
+        </p:txBody>
+      </p:sp>
+      <p:sp>
+        <p:nvSpPr>
           <p:cNvPr id="6" name="Text 4"/>
           <p:cNvSpPr txBox="1"/>
           <p:nvPr/>
         </p:nvSpPr>
         <p:spPr>
           <a:xfrm>
-            <a:off x="731520" y="3611880"/>
-            <a:ext cx="7680960" cy="822960"/>
+            <a:off x="466344" y="2075688"/>
+            <a:ext cx="2404872" cy="1609344"/>
+          </a:xfrm>
+          <a:prstGeom prst="rect">
+            <a:avLst/>
+          </a:prstGeom>
+          <a:noFill/>
+          <a:ln/>
+        </p:spPr>
+        <p:txBody>
+          <a:bodyPr wrap="square" lIns="0" tIns="0" rIns="0" bIns="0" rtlCol="0" anchor="t"/>
+          <a:lstStyle/>
+          <a:p>
+            <a:pPr algn="l" indent="0" marL="0">
+              <a:lnSpc>
+                <a:spcPct val="125000"/>
+              </a:lnSpc>
+              <a:buNone/>
+            </a:pPr>
+            <a:r>
+              <a:rPr lang="en-US" sz="1350" b="1" dirty="0">
+                <a:solidFill>
+                  <a:srgbClr val="595959"/>
+                </a:solidFill>
+                <a:latin typeface="メイリオ" pitchFamily="34" charset="0"/>
+                <a:ea typeface="メイリオ" pitchFamily="34" charset="-122"/>
+                <a:cs typeface="メイリオ" pitchFamily="34" charset="-120"/>
+              </a:rPr>
+              <a:t>バディ同士で</a:t>
+            </a:r>
+            <a:endParaRPr lang="en-US" sz="1350" dirty="0"/>
+          </a:p>
+          <a:p>
+            <a:pPr algn="l" indent="0" marL="0">
+              <a:lnSpc>
+                <a:spcPct val="125000"/>
+              </a:lnSpc>
+              <a:buNone/>
+            </a:pPr>
+            <a:r>
+              <a:rPr lang="en-US" sz="1350" b="1" dirty="0">
+                <a:solidFill>
+                  <a:srgbClr val="EE7B08"/>
+                </a:solidFill>
+                <a:latin typeface="メイリオ" pitchFamily="34" charset="0"/>
+                <a:ea typeface="メイリオ" pitchFamily="34" charset="-122"/>
+                <a:cs typeface="メイリオ" pitchFamily="34" charset="-120"/>
+              </a:rPr>
+              <a:t>互いの泳ぎを見て</a:t>
+            </a:r>
+            <a:endParaRPr lang="en-US" sz="1350" dirty="0"/>
+          </a:p>
+          <a:p>
+            <a:pPr algn="l" indent="0" marL="0">
+              <a:lnSpc>
+                <a:spcPct val="125000"/>
+              </a:lnSpc>
+              <a:buNone/>
+            </a:pPr>
+            <a:r>
+              <a:rPr lang="en-US" sz="1350" b="1" dirty="0">
+                <a:solidFill>
+                  <a:srgbClr val="EE7B08"/>
+                </a:solidFill>
+                <a:latin typeface="メイリオ" pitchFamily="34" charset="0"/>
+                <a:ea typeface="メイリオ" pitchFamily="34" charset="-122"/>
+                <a:cs typeface="メイリオ" pitchFamily="34" charset="-120"/>
+              </a:rPr>
+              <a:t>改善点を考えていた。</a:t>
+            </a:r>
+            <a:endParaRPr lang="en-US" sz="1350" dirty="0"/>
+          </a:p>
+          <a:p>
+            <a:pPr algn="l" indent="0" marL="0">
+              <a:lnSpc>
+                <a:spcPct val="125000"/>
+              </a:lnSpc>
+              <a:buNone/>
+            </a:pPr>
+            <a:r>
+              <a:rPr lang="en-US" sz="1350" b="1" dirty="0">
+                <a:solidFill>
+                  <a:srgbClr val="595959"/>
+                </a:solidFill>
+                <a:latin typeface="メイリオ" pitchFamily="34" charset="0"/>
+                <a:ea typeface="メイリオ" pitchFamily="34" charset="-122"/>
+                <a:cs typeface="メイリオ" pitchFamily="34" charset="-120"/>
+              </a:rPr>
+              <a:t>得意な生徒が助言役を</a:t>
+            </a:r>
+            <a:endParaRPr lang="en-US" sz="1350" dirty="0"/>
+          </a:p>
+          <a:p>
+            <a:pPr algn="l" indent="0" marL="0">
+              <a:lnSpc>
+                <a:spcPct val="125000"/>
+              </a:lnSpc>
+              <a:buNone/>
+            </a:pPr>
+            <a:r>
+              <a:rPr lang="en-US" sz="1350" b="1" dirty="0">
+                <a:solidFill>
+                  <a:srgbClr val="595959"/>
+                </a:solidFill>
+                <a:latin typeface="メイリオ" pitchFamily="34" charset="0"/>
+                <a:ea typeface="メイリオ" pitchFamily="34" charset="-122"/>
+                <a:cs typeface="メイリオ" pitchFamily="34" charset="-120"/>
+              </a:rPr>
+              <a:t>担い、全員に役割が</a:t>
+            </a:r>
+            <a:endParaRPr lang="en-US" sz="1350" dirty="0"/>
+          </a:p>
+          <a:p>
+            <a:pPr algn="l" indent="0" marL="0">
+              <a:lnSpc>
+                <a:spcPct val="125000"/>
+              </a:lnSpc>
+              <a:buNone/>
+            </a:pPr>
+            <a:r>
+              <a:rPr lang="en-US" sz="1350" b="1" dirty="0">
+                <a:solidFill>
+                  <a:srgbClr val="595959"/>
+                </a:solidFill>
+                <a:latin typeface="メイリオ" pitchFamily="34" charset="0"/>
+                <a:ea typeface="メイリオ" pitchFamily="34" charset="-122"/>
+                <a:cs typeface="メイリオ" pitchFamily="34" charset="-120"/>
+              </a:rPr>
+              <a:t>あった。</a:t>
+            </a:r>
+            <a:endParaRPr lang="en-US" sz="1350" dirty="0"/>
+          </a:p>
+        </p:txBody>
+      </p:sp>
+      <p:sp>
+        <p:nvSpPr>
+          <p:cNvPr id="7" name="Shape 5"/>
+          <p:cNvSpPr/>
+          <p:nvPr/>
+        </p:nvSpPr>
+        <p:spPr>
+          <a:xfrm>
+            <a:off x="3227832" y="1417320"/>
+            <a:ext cx="2697480" cy="2395728"/>
+          </a:xfrm>
+          <a:prstGeom prst="roundRect">
+            <a:avLst>
+              <a:gd name="adj" fmla="val 2290"/>
+            </a:avLst>
+          </a:prstGeom>
+          <a:solidFill>
+            <a:srgbClr val="E9F7F3"/>
+          </a:solidFill>
+          <a:ln w="12700">
+            <a:solidFill>
+              <a:srgbClr val="B9E5DA"/>
+            </a:solidFill>
+            <a:prstDash val="solid"/>
+          </a:ln>
+        </p:spPr>
+      </p:sp>
+      <p:sp>
+        <p:nvSpPr>
+          <p:cNvPr id="8" name="Text 6"/>
+          <p:cNvSpPr txBox="1"/>
+          <p:nvPr/>
+        </p:nvSpPr>
+        <p:spPr>
+          <a:xfrm>
+            <a:off x="3374136" y="1527048"/>
+            <a:ext cx="2404872" cy="274320"/>
           </a:xfrm>
           <a:prstGeom prst="rect">
             <a:avLst/>
@@ -5336,13 +5231,500 @@
             <a:r>
               <a:rPr lang="en-US" sz="1600" b="1" dirty="0">
                 <a:solidFill>
+                  <a:srgbClr val="44C1A3"/>
+                </a:solidFill>
+                <a:latin typeface="メイリオ" pitchFamily="34" charset="0"/>
+                <a:ea typeface="メイリオ" pitchFamily="34" charset="-122"/>
+                <a:cs typeface="メイリオ" pitchFamily="34" charset="-120"/>
+              </a:rPr>
+              <a:t>道徳</a:t>
+            </a:r>
+            <a:endParaRPr lang="en-US" sz="1600" dirty="0"/>
+          </a:p>
+        </p:txBody>
+      </p:sp>
+      <p:sp>
+        <p:nvSpPr>
+          <p:cNvPr id="9" name="Text 7"/>
+          <p:cNvSpPr txBox="1"/>
+          <p:nvPr/>
+        </p:nvSpPr>
+        <p:spPr>
+          <a:xfrm>
+            <a:off x="3374136" y="1801368"/>
+            <a:ext cx="2404872" cy="237744"/>
+          </a:xfrm>
+          <a:prstGeom prst="rect">
+            <a:avLst/>
+          </a:prstGeom>
+          <a:noFill/>
+          <a:ln/>
+        </p:spPr>
+        <p:txBody>
+          <a:bodyPr wrap="square" lIns="0" tIns="0" rIns="0" bIns="0" rtlCol="0" anchor="ctr"/>
+          <a:lstStyle/>
+          <a:p>
+            <a:pPr algn="l" indent="0" marL="0">
+              <a:buNone/>
+            </a:pPr>
+            <a:r>
+              <a:rPr lang="en-US" sz="1100" b="1" dirty="0">
+                <a:solidFill>
+                  <a:srgbClr val="808080"/>
+                </a:solidFill>
+                <a:latin typeface="メイリオ" pitchFamily="34" charset="0"/>
+                <a:ea typeface="メイリオ" pitchFamily="34" charset="-122"/>
+                <a:cs typeface="メイリオ" pitchFamily="34" charset="-120"/>
+              </a:rPr>
+              <a:t>東海林　静江　先生</a:t>
+            </a:r>
+            <a:endParaRPr lang="en-US" sz="1100" dirty="0"/>
+          </a:p>
+        </p:txBody>
+      </p:sp>
+      <p:sp>
+        <p:nvSpPr>
+          <p:cNvPr id="10" name="Text 8"/>
+          <p:cNvSpPr txBox="1"/>
+          <p:nvPr/>
+        </p:nvSpPr>
+        <p:spPr>
+          <a:xfrm>
+            <a:off x="3374136" y="2075688"/>
+            <a:ext cx="2404872" cy="1609344"/>
+          </a:xfrm>
+          <a:prstGeom prst="rect">
+            <a:avLst/>
+          </a:prstGeom>
+          <a:noFill/>
+          <a:ln/>
+        </p:spPr>
+        <p:txBody>
+          <a:bodyPr wrap="square" lIns="0" tIns="0" rIns="0" bIns="0" rtlCol="0" anchor="t"/>
+          <a:lstStyle/>
+          <a:p>
+            <a:pPr algn="l" indent="0" marL="0">
+              <a:lnSpc>
+                <a:spcPct val="125000"/>
+              </a:lnSpc>
+              <a:buNone/>
+            </a:pPr>
+            <a:r>
+              <a:rPr lang="en-US" sz="1350" b="1" dirty="0">
+                <a:solidFill>
                   <a:srgbClr val="595959"/>
                 </a:solidFill>
                 <a:latin typeface="メイリオ" pitchFamily="34" charset="0"/>
                 <a:ea typeface="メイリオ" pitchFamily="34" charset="-122"/>
                 <a:cs typeface="メイリオ" pitchFamily="34" charset="-120"/>
               </a:rPr>
-              <a:t>学習指導要領が示す「学びに向かう力」の中核をなす力である。</a:t>
+              <a:t>「嘘」をテーマに、</a:t>
+            </a:r>
+            <a:endParaRPr lang="en-US" sz="1350" dirty="0"/>
+          </a:p>
+          <a:p>
+            <a:pPr algn="l" indent="0" marL="0">
+              <a:lnSpc>
+                <a:spcPct val="125000"/>
+              </a:lnSpc>
+              <a:buNone/>
+            </a:pPr>
+            <a:r>
+              <a:rPr lang="en-US" sz="1350" b="1" dirty="0">
+                <a:solidFill>
+                  <a:srgbClr val="EE7B08"/>
+                </a:solidFill>
+                <a:latin typeface="メイリオ" pitchFamily="34" charset="0"/>
+                <a:ea typeface="メイリオ" pitchFamily="34" charset="-122"/>
+                <a:cs typeface="メイリオ" pitchFamily="34" charset="-120"/>
+              </a:rPr>
+              <a:t>価値観の違いについて</a:t>
+            </a:r>
+            <a:endParaRPr lang="en-US" sz="1350" dirty="0"/>
+          </a:p>
+          <a:p>
+            <a:pPr algn="l" indent="0" marL="0">
+              <a:lnSpc>
+                <a:spcPct val="125000"/>
+              </a:lnSpc>
+              <a:buNone/>
+            </a:pPr>
+            <a:r>
+              <a:rPr lang="en-US" sz="1350" b="1" dirty="0">
+                <a:solidFill>
+                  <a:srgbClr val="EE7B08"/>
+                </a:solidFill>
+                <a:latin typeface="メイリオ" pitchFamily="34" charset="0"/>
+                <a:ea typeface="メイリオ" pitchFamily="34" charset="-122"/>
+                <a:cs typeface="メイリオ" pitchFamily="34" charset="-120"/>
+              </a:rPr>
+              <a:t>議論していた。</a:t>
+            </a:r>
+            <a:endParaRPr lang="en-US" sz="1350" dirty="0"/>
+          </a:p>
+          <a:p>
+            <a:pPr algn="l" indent="0" marL="0">
+              <a:lnSpc>
+                <a:spcPct val="125000"/>
+              </a:lnSpc>
+              <a:buNone/>
+            </a:pPr>
+            <a:r>
+              <a:rPr lang="en-US" sz="1350" b="1" dirty="0">
+                <a:solidFill>
+                  <a:srgbClr val="595959"/>
+                </a:solidFill>
+                <a:latin typeface="メイリオ" pitchFamily="34" charset="0"/>
+                <a:ea typeface="メイリオ" pitchFamily="34" charset="-122"/>
+                <a:cs typeface="メイリオ" pitchFamily="34" charset="-120"/>
+              </a:rPr>
+              <a:t>発表より議論の時間を</a:t>
+            </a:r>
+            <a:endParaRPr lang="en-US" sz="1350" dirty="0"/>
+          </a:p>
+          <a:p>
+            <a:pPr algn="l" indent="0" marL="0">
+              <a:lnSpc>
+                <a:spcPct val="125000"/>
+              </a:lnSpc>
+              <a:buNone/>
+            </a:pPr>
+            <a:r>
+              <a:rPr lang="en-US" sz="1350" b="1" dirty="0">
+                <a:solidFill>
+                  <a:srgbClr val="595959"/>
+                </a:solidFill>
+                <a:latin typeface="メイリオ" pitchFamily="34" charset="0"/>
+                <a:ea typeface="メイリオ" pitchFamily="34" charset="-122"/>
+                <a:cs typeface="メイリオ" pitchFamily="34" charset="-120"/>
+              </a:rPr>
+              <a:t>重視した構成だった。</a:t>
+            </a:r>
+            <a:endParaRPr lang="en-US" sz="1350" dirty="0"/>
+          </a:p>
+        </p:txBody>
+      </p:sp>
+      <p:sp>
+        <p:nvSpPr>
+          <p:cNvPr id="11" name="Shape 9"/>
+          <p:cNvSpPr/>
+          <p:nvPr/>
+        </p:nvSpPr>
+        <p:spPr>
+          <a:xfrm>
+            <a:off x="6135624" y="1417320"/>
+            <a:ext cx="2697480" cy="2395728"/>
+          </a:xfrm>
+          <a:prstGeom prst="roundRect">
+            <a:avLst>
+              <a:gd name="adj" fmla="val 2290"/>
+            </a:avLst>
+          </a:prstGeom>
+          <a:solidFill>
+            <a:srgbClr val="E9F7F3"/>
+          </a:solidFill>
+          <a:ln w="12700">
+            <a:solidFill>
+              <a:srgbClr val="B9E5DA"/>
+            </a:solidFill>
+            <a:prstDash val="solid"/>
+          </a:ln>
+        </p:spPr>
+      </p:sp>
+      <p:sp>
+        <p:nvSpPr>
+          <p:cNvPr id="12" name="Text 10"/>
+          <p:cNvSpPr txBox="1"/>
+          <p:nvPr/>
+        </p:nvSpPr>
+        <p:spPr>
+          <a:xfrm>
+            <a:off x="6281928" y="1527048"/>
+            <a:ext cx="2404872" cy="274320"/>
+          </a:xfrm>
+          <a:prstGeom prst="rect">
+            <a:avLst/>
+          </a:prstGeom>
+          <a:noFill/>
+          <a:ln/>
+        </p:spPr>
+        <p:txBody>
+          <a:bodyPr wrap="square" lIns="0" tIns="0" rIns="0" bIns="0" rtlCol="0" anchor="ctr"/>
+          <a:lstStyle/>
+          <a:p>
+            <a:pPr algn="l" indent="0" marL="0">
+              <a:buNone/>
+            </a:pPr>
+            <a:r>
+              <a:rPr lang="en-US" sz="1600" b="1" dirty="0">
+                <a:solidFill>
+                  <a:srgbClr val="44C1A3"/>
+                </a:solidFill>
+                <a:latin typeface="メイリオ" pitchFamily="34" charset="0"/>
+                <a:ea typeface="メイリオ" pitchFamily="34" charset="-122"/>
+                <a:cs typeface="メイリオ" pitchFamily="34" charset="-120"/>
+              </a:rPr>
+              <a:t>外国語</a:t>
+            </a:r>
+            <a:endParaRPr lang="en-US" sz="1600" dirty="0"/>
+          </a:p>
+        </p:txBody>
+      </p:sp>
+      <p:sp>
+        <p:nvSpPr>
+          <p:cNvPr id="13" name="Text 11"/>
+          <p:cNvSpPr txBox="1"/>
+          <p:nvPr/>
+        </p:nvSpPr>
+        <p:spPr>
+          <a:xfrm>
+            <a:off x="6281928" y="1801368"/>
+            <a:ext cx="2404872" cy="237744"/>
+          </a:xfrm>
+          <a:prstGeom prst="rect">
+            <a:avLst/>
+          </a:prstGeom>
+          <a:noFill/>
+          <a:ln/>
+        </p:spPr>
+        <p:txBody>
+          <a:bodyPr wrap="square" lIns="0" tIns="0" rIns="0" bIns="0" rtlCol="0" anchor="ctr"/>
+          <a:lstStyle/>
+          <a:p>
+            <a:pPr algn="l" indent="0" marL="0">
+              <a:buNone/>
+            </a:pPr>
+            <a:r>
+              <a:rPr lang="en-US" sz="1100" b="1" dirty="0">
+                <a:solidFill>
+                  <a:srgbClr val="808080"/>
+                </a:solidFill>
+                <a:latin typeface="メイリオ" pitchFamily="34" charset="0"/>
+                <a:ea typeface="メイリオ" pitchFamily="34" charset="-122"/>
+                <a:cs typeface="メイリオ" pitchFamily="34" charset="-120"/>
+              </a:rPr>
+              <a:t>塚本　瑞穂　先生</a:t>
+            </a:r>
+            <a:endParaRPr lang="en-US" sz="1100" dirty="0"/>
+          </a:p>
+        </p:txBody>
+      </p:sp>
+      <p:sp>
+        <p:nvSpPr>
+          <p:cNvPr id="14" name="Text 12"/>
+          <p:cNvSpPr txBox="1"/>
+          <p:nvPr/>
+        </p:nvSpPr>
+        <p:spPr>
+          <a:xfrm>
+            <a:off x="6281928" y="2075688"/>
+            <a:ext cx="2404872" cy="1609344"/>
+          </a:xfrm>
+          <a:prstGeom prst="rect">
+            <a:avLst/>
+          </a:prstGeom>
+          <a:noFill/>
+          <a:ln/>
+        </p:spPr>
+        <p:txBody>
+          <a:bodyPr wrap="square" lIns="0" tIns="0" rIns="0" bIns="0" rtlCol="0" anchor="t"/>
+          <a:lstStyle/>
+          <a:p>
+            <a:pPr algn="l" indent="0" marL="0">
+              <a:lnSpc>
+                <a:spcPct val="125000"/>
+              </a:lnSpc>
+              <a:buNone/>
+            </a:pPr>
+            <a:r>
+              <a:rPr lang="en-US" sz="1350" b="1" dirty="0">
+                <a:solidFill>
+                  <a:srgbClr val="595959"/>
+                </a:solidFill>
+                <a:latin typeface="メイリオ" pitchFamily="34" charset="0"/>
+                <a:ea typeface="メイリオ" pitchFamily="34" charset="-122"/>
+                <a:cs typeface="メイリオ" pitchFamily="34" charset="-120"/>
+              </a:rPr>
+              <a:t>ペアでのやり取りから</a:t>
+            </a:r>
+            <a:endParaRPr lang="en-US" sz="1350" dirty="0"/>
+          </a:p>
+          <a:p>
+            <a:pPr algn="l" indent="0" marL="0">
+              <a:lnSpc>
+                <a:spcPct val="125000"/>
+              </a:lnSpc>
+              <a:buNone/>
+            </a:pPr>
+            <a:r>
+              <a:rPr lang="en-US" sz="1350" b="1" dirty="0">
+                <a:solidFill>
+                  <a:srgbClr val="EE7B08"/>
+                </a:solidFill>
+                <a:latin typeface="メイリオ" pitchFamily="34" charset="0"/>
+                <a:ea typeface="メイリオ" pitchFamily="34" charset="-122"/>
+                <a:cs typeface="メイリオ" pitchFamily="34" charset="-120"/>
+              </a:rPr>
+              <a:t>全体の学びへつなぐ。</a:t>
+            </a:r>
+            <a:endParaRPr lang="en-US" sz="1350" dirty="0"/>
+          </a:p>
+          <a:p>
+            <a:pPr algn="l" indent="0" marL="0">
+              <a:lnSpc>
+                <a:spcPct val="125000"/>
+              </a:lnSpc>
+              <a:buNone/>
+            </a:pPr>
+            <a:r>
+              <a:rPr lang="en-US" sz="1350" b="1" dirty="0">
+                <a:solidFill>
+                  <a:srgbClr val="595959"/>
+                </a:solidFill>
+                <a:latin typeface="メイリオ" pitchFamily="34" charset="0"/>
+                <a:ea typeface="メイリオ" pitchFamily="34" charset="-122"/>
+                <a:cs typeface="メイリオ" pitchFamily="34" charset="-120"/>
+              </a:rPr>
+              <a:t>音読も一人ではなく</a:t>
+            </a:r>
+            <a:endParaRPr lang="en-US" sz="1350" dirty="0"/>
+          </a:p>
+          <a:p>
+            <a:pPr algn="l" indent="0" marL="0">
+              <a:lnSpc>
+                <a:spcPct val="125000"/>
+              </a:lnSpc>
+              <a:buNone/>
+            </a:pPr>
+            <a:r>
+              <a:rPr lang="en-US" sz="1350" b="1" dirty="0">
+                <a:solidFill>
+                  <a:srgbClr val="EE7B08"/>
+                </a:solidFill>
+                <a:latin typeface="メイリオ" pitchFamily="34" charset="0"/>
+                <a:ea typeface="メイリオ" pitchFamily="34" charset="-122"/>
+                <a:cs typeface="メイリオ" pitchFamily="34" charset="-120"/>
+              </a:rPr>
+              <a:t>相手とともに行い、</a:t>
+            </a:r>
+            <a:endParaRPr lang="en-US" sz="1350" dirty="0"/>
+          </a:p>
+          <a:p>
+            <a:pPr algn="l" indent="0" marL="0">
+              <a:lnSpc>
+                <a:spcPct val="125000"/>
+              </a:lnSpc>
+              <a:buNone/>
+            </a:pPr>
+            <a:r>
+              <a:rPr lang="en-US" sz="1350" b="1" dirty="0">
+                <a:solidFill>
+                  <a:srgbClr val="595959"/>
+                </a:solidFill>
+                <a:latin typeface="メイリオ" pitchFamily="34" charset="0"/>
+                <a:ea typeface="メイリオ" pitchFamily="34" charset="-122"/>
+                <a:cs typeface="メイリオ" pitchFamily="34" charset="-120"/>
+              </a:rPr>
+              <a:t>表現を確かなものに</a:t>
+            </a:r>
+            <a:endParaRPr lang="en-US" sz="1350" dirty="0"/>
+          </a:p>
+          <a:p>
+            <a:pPr algn="l" indent="0" marL="0">
+              <a:lnSpc>
+                <a:spcPct val="125000"/>
+              </a:lnSpc>
+              <a:buNone/>
+            </a:pPr>
+            <a:r>
+              <a:rPr lang="en-US" sz="1350" b="1" dirty="0">
+                <a:solidFill>
+                  <a:srgbClr val="595959"/>
+                </a:solidFill>
+                <a:latin typeface="メイリオ" pitchFamily="34" charset="0"/>
+                <a:ea typeface="メイリオ" pitchFamily="34" charset="-122"/>
+                <a:cs typeface="メイリオ" pitchFamily="34" charset="-120"/>
+              </a:rPr>
+              <a:t>していた。</a:t>
+            </a:r>
+            <a:endParaRPr lang="en-US" sz="1350" dirty="0"/>
+          </a:p>
+        </p:txBody>
+      </p:sp>
+      <p:sp>
+        <p:nvSpPr>
+          <p:cNvPr id="15" name="Text 13"/>
+          <p:cNvSpPr txBox="1"/>
+          <p:nvPr/>
+        </p:nvSpPr>
+        <p:spPr>
+          <a:xfrm>
+            <a:off x="320040" y="3977640"/>
+            <a:ext cx="8503920" cy="822960"/>
+          </a:xfrm>
+          <a:prstGeom prst="rect">
+            <a:avLst/>
+          </a:prstGeom>
+          <a:noFill/>
+          <a:ln/>
+        </p:spPr>
+        <p:txBody>
+          <a:bodyPr wrap="square" lIns="0" tIns="0" rIns="0" bIns="0" rtlCol="0" anchor="t"/>
+          <a:lstStyle/>
+          <a:p>
+            <a:pPr algn="l" indent="0" marL="0">
+              <a:lnSpc>
+                <a:spcPct val="120000"/>
+              </a:lnSpc>
+              <a:buNone/>
+            </a:pPr>
+            <a:r>
+              <a:rPr lang="en-US" sz="1600" b="1" dirty="0">
+                <a:solidFill>
+                  <a:srgbClr val="595959"/>
+                </a:solidFill>
+                <a:latin typeface="メイリオ" pitchFamily="34" charset="0"/>
+                <a:ea typeface="メイリオ" pitchFamily="34" charset="-122"/>
+                <a:cs typeface="メイリオ" pitchFamily="34" charset="-120"/>
+              </a:rPr>
+              <a:t>教科は異なっても、共通していたのは</a:t>
+            </a:r>
+            <a:endParaRPr lang="en-US" sz="1600" dirty="0"/>
+          </a:p>
+          <a:p>
+            <a:pPr algn="l" indent="0" marL="0">
+              <a:lnSpc>
+                <a:spcPct val="120000"/>
+              </a:lnSpc>
+              <a:buNone/>
+            </a:pPr>
+            <a:r>
+              <a:rPr lang="en-US" sz="1600" b="1" dirty="0">
+                <a:solidFill>
+                  <a:srgbClr val="EE7B08"/>
+                </a:solidFill>
+                <a:latin typeface="メイリオ" pitchFamily="34" charset="0"/>
+                <a:ea typeface="メイリオ" pitchFamily="34" charset="-122"/>
+                <a:cs typeface="メイリオ" pitchFamily="34" charset="-120"/>
+              </a:rPr>
+              <a:t>「相手を通して自分を見つめる学び」</a:t>
+            </a:r>
+            <a:pPr algn="l" indent="0" marL="0">
+              <a:lnSpc>
+                <a:spcPct val="120000"/>
+              </a:lnSpc>
+              <a:buNone/>
+            </a:pPr>
+            <a:r>
+              <a:rPr lang="en-US" sz="1600" b="1" dirty="0">
+                <a:solidFill>
+                  <a:srgbClr val="595959"/>
+                </a:solidFill>
+                <a:latin typeface="メイリオ" pitchFamily="34" charset="0"/>
+                <a:ea typeface="メイリオ" pitchFamily="34" charset="-122"/>
+                <a:cs typeface="メイリオ" pitchFamily="34" charset="-120"/>
+              </a:rPr>
+              <a:t>であった。</a:t>
             </a:r>
             <a:endParaRPr lang="en-US" sz="1600" dirty="0"/>
           </a:p>
@@ -5431,7 +5813,7 @@
                 <a:ea typeface="メイリオ" pitchFamily="34" charset="-122"/>
                 <a:cs typeface="メイリオ" pitchFamily="34" charset="-120"/>
               </a:rPr>
-              <a:t>　③　自己調整が行われていた授業</a:t>
+              <a:t>　③　学習の自己調整</a:t>
             </a:r>
             <a:endParaRPr lang="en-US" sz="3000" dirty="0"/>
           </a:p>
@@ -5439,463 +5821,210 @@
       </p:sp>
       <p:sp>
         <p:nvSpPr>
-          <p:cNvPr id="3" name="Shape 1"/>
+          <p:cNvPr id="3" name="Text 1"/>
+          <p:cNvSpPr txBox="1"/>
+          <p:nvPr/>
+        </p:nvSpPr>
+        <p:spPr>
+          <a:xfrm>
+            <a:off x="475488" y="1444752"/>
+            <a:ext cx="8193024" cy="1280160"/>
+          </a:xfrm>
+          <a:prstGeom prst="rect">
+            <a:avLst/>
+          </a:prstGeom>
+          <a:noFill/>
+          <a:ln/>
+        </p:spPr>
+        <p:txBody>
+          <a:bodyPr wrap="square" lIns="0" tIns="0" rIns="0" bIns="0" rtlCol="0" anchor="t"/>
+          <a:lstStyle/>
+          <a:p>
+            <a:pPr algn="l" indent="0" marL="0">
+              <a:lnSpc>
+                <a:spcPct val="120000"/>
+              </a:lnSpc>
+              <a:buNone/>
+            </a:pPr>
+            <a:r>
+              <a:rPr lang="en-US" sz="2100" b="1" dirty="0">
+                <a:solidFill>
+                  <a:srgbClr val="595959"/>
+                </a:solidFill>
+                <a:latin typeface="メイリオ" pitchFamily="34" charset="0"/>
+                <a:ea typeface="メイリオ" pitchFamily="34" charset="-122"/>
+                <a:cs typeface="メイリオ" pitchFamily="34" charset="-120"/>
+              </a:rPr>
+              <a:t>これから求められる子どもは、</a:t>
+            </a:r>
+            <a:endParaRPr lang="en-US" sz="2100" dirty="0"/>
+          </a:p>
+          <a:p>
+            <a:pPr algn="l" indent="0" marL="0">
+              <a:lnSpc>
+                <a:spcPct val="120000"/>
+              </a:lnSpc>
+              <a:buNone/>
+            </a:pPr>
+            <a:r>
+              <a:rPr lang="en-US" sz="2100" b="1" dirty="0">
+                <a:solidFill>
+                  <a:srgbClr val="595959"/>
+                </a:solidFill>
+                <a:latin typeface="メイリオ" pitchFamily="34" charset="0"/>
+                <a:ea typeface="メイリオ" pitchFamily="34" charset="-122"/>
+                <a:cs typeface="メイリオ" pitchFamily="34" charset="-120"/>
+              </a:rPr>
+              <a:t>　教えられたことを学ぶ子どもではなく、</a:t>
+            </a:r>
+            <a:endParaRPr lang="en-US" sz="2100" dirty="0"/>
+          </a:p>
+          <a:p>
+            <a:pPr algn="l" indent="0" marL="0">
+              <a:lnSpc>
+                <a:spcPct val="120000"/>
+              </a:lnSpc>
+              <a:buNone/>
+            </a:pPr>
+            <a:r>
+              <a:rPr lang="en-US" sz="2100" b="1" dirty="0">
+                <a:solidFill>
+                  <a:srgbClr val="595959"/>
+                </a:solidFill>
+                <a:latin typeface="メイリオ" pitchFamily="34" charset="0"/>
+                <a:ea typeface="メイリオ" pitchFamily="34" charset="-122"/>
+                <a:cs typeface="メイリオ" pitchFamily="34" charset="-120"/>
+              </a:rPr>
+              <a:t>　</a:t>
+            </a:r>
+            <a:pPr algn="l" indent="0" marL="0">
+              <a:lnSpc>
+                <a:spcPct val="120000"/>
+              </a:lnSpc>
+              <a:buNone/>
+            </a:pPr>
+            <a:r>
+              <a:rPr lang="en-US" sz="2100" b="1" dirty="0">
+                <a:solidFill>
+                  <a:srgbClr val="EE7B08"/>
+                </a:solidFill>
+                <a:latin typeface="メイリオ" pitchFamily="34" charset="0"/>
+                <a:ea typeface="メイリオ" pitchFamily="34" charset="-122"/>
+                <a:cs typeface="メイリオ" pitchFamily="34" charset="-120"/>
+              </a:rPr>
+              <a:t>自分で学び続ける子ども</a:t>
+            </a:r>
+            <a:pPr algn="l" indent="0" marL="0">
+              <a:lnSpc>
+                <a:spcPct val="120000"/>
+              </a:lnSpc>
+              <a:buNone/>
+            </a:pPr>
+            <a:r>
+              <a:rPr lang="en-US" sz="2100" b="1" dirty="0">
+                <a:solidFill>
+                  <a:srgbClr val="595959"/>
+                </a:solidFill>
+                <a:latin typeface="メイリオ" pitchFamily="34" charset="0"/>
+                <a:ea typeface="メイリオ" pitchFamily="34" charset="-122"/>
+                <a:cs typeface="メイリオ" pitchFamily="34" charset="-120"/>
+              </a:rPr>
+              <a:t>である。</a:t>
+            </a:r>
+            <a:endParaRPr lang="en-US" sz="2100" dirty="0"/>
+          </a:p>
+        </p:txBody>
+      </p:sp>
+      <p:sp>
+        <p:nvSpPr>
+          <p:cNvPr id="4" name="Text 2"/>
+          <p:cNvSpPr txBox="1"/>
+          <p:nvPr/>
+        </p:nvSpPr>
+        <p:spPr>
+          <a:xfrm>
+            <a:off x="475488" y="2880360"/>
+            <a:ext cx="8193024" cy="502920"/>
+          </a:xfrm>
+          <a:prstGeom prst="rect">
+            <a:avLst/>
+          </a:prstGeom>
+          <a:noFill/>
+          <a:ln/>
+        </p:spPr>
+        <p:txBody>
+          <a:bodyPr wrap="square" lIns="0" tIns="0" rIns="0" bIns="0" rtlCol="0" anchor="t"/>
+          <a:lstStyle/>
+          <a:p>
+            <a:pPr algn="l" indent="0" marL="0">
+              <a:lnSpc>
+                <a:spcPct val="120000"/>
+              </a:lnSpc>
+              <a:buNone/>
+            </a:pPr>
+            <a:r>
+              <a:rPr lang="en-US" sz="2100" b="1" dirty="0">
+                <a:solidFill>
+                  <a:srgbClr val="595959"/>
+                </a:solidFill>
+                <a:latin typeface="メイリオ" pitchFamily="34" charset="0"/>
+                <a:ea typeface="メイリオ" pitchFamily="34" charset="-122"/>
+                <a:cs typeface="メイリオ" pitchFamily="34" charset="-120"/>
+              </a:rPr>
+              <a:t>そのために必要なのが</a:t>
+            </a:r>
+            <a:pPr algn="l" indent="0" marL="0">
+              <a:lnSpc>
+                <a:spcPct val="120000"/>
+              </a:lnSpc>
+              <a:buNone/>
+            </a:pPr>
+            <a:r>
+              <a:rPr lang="en-US" sz="2100" b="1" dirty="0">
+                <a:solidFill>
+                  <a:srgbClr val="EE7B08"/>
+                </a:solidFill>
+                <a:latin typeface="メイリオ" pitchFamily="34" charset="0"/>
+                <a:ea typeface="メイリオ" pitchFamily="34" charset="-122"/>
+                <a:cs typeface="メイリオ" pitchFamily="34" charset="-120"/>
+              </a:rPr>
+              <a:t>学習の自己調整</a:t>
+            </a:r>
+            <a:pPr algn="l" indent="0" marL="0">
+              <a:lnSpc>
+                <a:spcPct val="120000"/>
+              </a:lnSpc>
+              <a:buNone/>
+            </a:pPr>
+            <a:r>
+              <a:rPr lang="en-US" sz="2100" b="1" dirty="0">
+                <a:solidFill>
+                  <a:srgbClr val="595959"/>
+                </a:solidFill>
+                <a:latin typeface="メイリオ" pitchFamily="34" charset="0"/>
+                <a:ea typeface="メイリオ" pitchFamily="34" charset="-122"/>
+                <a:cs typeface="メイリオ" pitchFamily="34" charset="-120"/>
+              </a:rPr>
+              <a:t>である。</a:t>
+            </a:r>
+            <a:endParaRPr lang="en-US" sz="2100" dirty="0"/>
+          </a:p>
+        </p:txBody>
+      </p:sp>
+      <p:sp>
+        <p:nvSpPr>
+          <p:cNvPr id="5" name="Shape 3"/>
           <p:cNvSpPr/>
           <p:nvPr/>
         </p:nvSpPr>
         <p:spPr>
           <a:xfrm>
-            <a:off x="320040" y="1444752"/>
-            <a:ext cx="2011680" cy="530352"/>
+            <a:off x="475488" y="3611880"/>
+            <a:ext cx="8193024" cy="822960"/>
           </a:xfrm>
           <a:prstGeom prst="roundRect">
             <a:avLst>
-              <a:gd name="adj" fmla="val 12069"/>
-            </a:avLst>
-          </a:prstGeom>
-          <a:solidFill>
-            <a:srgbClr val="44C1A3"/>
-          </a:solidFill>
-          <a:ln/>
-        </p:spPr>
-      </p:sp>
-      <p:sp>
-        <p:nvSpPr>
-          <p:cNvPr id="4" name="Text 2"/>
-          <p:cNvSpPr txBox="1"/>
-          <p:nvPr/>
-        </p:nvSpPr>
-        <p:spPr>
-          <a:xfrm>
-            <a:off x="320040" y="1444752"/>
-            <a:ext cx="2011680" cy="530352"/>
-          </a:xfrm>
-          <a:prstGeom prst="rect">
-            <a:avLst/>
-          </a:prstGeom>
-          <a:noFill/>
-          <a:ln/>
-        </p:spPr>
-        <p:txBody>
-          <a:bodyPr wrap="square" lIns="0" tIns="0" rIns="0" bIns="0" rtlCol="0" anchor="ctr"/>
-          <a:lstStyle/>
-          <a:p>
-            <a:pPr algn="ctr" indent="0" marL="0">
-              <a:lnSpc>
-                <a:spcPct val="115000"/>
-              </a:lnSpc>
-              <a:buNone/>
-            </a:pPr>
-            <a:r>
-              <a:rPr lang="en-US" sz="1500" b="1" dirty="0">
-                <a:solidFill>
-                  <a:srgbClr val="FFFFFF"/>
-                </a:solidFill>
-                <a:latin typeface="メイリオ" pitchFamily="34" charset="0"/>
-                <a:ea typeface="メイリオ" pitchFamily="34" charset="-122"/>
-                <a:cs typeface="メイリオ" pitchFamily="34" charset="-120"/>
-              </a:rPr>
-              <a:t>本時の目標</a:t>
-            </a:r>
-            <a:endParaRPr lang="en-US" sz="1500" dirty="0"/>
-          </a:p>
-        </p:txBody>
-      </p:sp>
-      <p:sp>
-        <p:nvSpPr>
-          <p:cNvPr id="5" name="Shape 3"/>
-          <p:cNvSpPr/>
-          <p:nvPr/>
-        </p:nvSpPr>
-        <p:spPr>
-          <a:xfrm>
-            <a:off x="2514600" y="1444752"/>
-            <a:ext cx="2011680" cy="530352"/>
-          </a:xfrm>
-          <a:prstGeom prst="roundRect">
-            <a:avLst>
-              <a:gd name="adj" fmla="val 12069"/>
-            </a:avLst>
-          </a:prstGeom>
-          <a:solidFill>
-            <a:srgbClr val="44C1A3"/>
-          </a:solidFill>
-          <a:ln/>
-        </p:spPr>
-      </p:sp>
-      <p:sp>
-        <p:nvSpPr>
-          <p:cNvPr id="6" name="Text 4"/>
-          <p:cNvSpPr txBox="1"/>
-          <p:nvPr/>
-        </p:nvSpPr>
-        <p:spPr>
-          <a:xfrm>
-            <a:off x="2514600" y="1444752"/>
-            <a:ext cx="2011680" cy="530352"/>
-          </a:xfrm>
-          <a:prstGeom prst="rect">
-            <a:avLst/>
-          </a:prstGeom>
-          <a:noFill/>
-          <a:ln/>
-        </p:spPr>
-        <p:txBody>
-          <a:bodyPr wrap="square" lIns="0" tIns="0" rIns="0" bIns="0" rtlCol="0" anchor="ctr"/>
-          <a:lstStyle/>
-          <a:p>
-            <a:pPr algn="ctr" indent="0" marL="0">
-              <a:lnSpc>
-                <a:spcPct val="115000"/>
-              </a:lnSpc>
-              <a:buNone/>
-            </a:pPr>
-            <a:r>
-              <a:rPr lang="en-US" sz="1500" b="1" dirty="0">
-                <a:solidFill>
-                  <a:srgbClr val="FFFFFF"/>
-                </a:solidFill>
-                <a:latin typeface="メイリオ" pitchFamily="34" charset="0"/>
-                <a:ea typeface="メイリオ" pitchFamily="34" charset="-122"/>
-                <a:cs typeface="メイリオ" pitchFamily="34" charset="-120"/>
-              </a:rPr>
-              <a:t>振り返り</a:t>
-            </a:r>
-            <a:endParaRPr lang="en-US" sz="1500" dirty="0"/>
-          </a:p>
-        </p:txBody>
-      </p:sp>
-      <p:sp>
-        <p:nvSpPr>
-          <p:cNvPr id="7" name="Shape 5"/>
-          <p:cNvSpPr/>
-          <p:nvPr/>
-        </p:nvSpPr>
-        <p:spPr>
-          <a:xfrm>
-            <a:off x="4709160" y="1444752"/>
-            <a:ext cx="2011680" cy="530352"/>
-          </a:xfrm>
-          <a:prstGeom prst="roundRect">
-            <a:avLst>
-              <a:gd name="adj" fmla="val 12069"/>
-            </a:avLst>
-          </a:prstGeom>
-          <a:solidFill>
-            <a:srgbClr val="44C1A3"/>
-          </a:solidFill>
-          <a:ln/>
-        </p:spPr>
-      </p:sp>
-      <p:sp>
-        <p:nvSpPr>
-          <p:cNvPr id="8" name="Text 6"/>
-          <p:cNvSpPr txBox="1"/>
-          <p:nvPr/>
-        </p:nvSpPr>
-        <p:spPr>
-          <a:xfrm>
-            <a:off x="4709160" y="1444752"/>
-            <a:ext cx="2011680" cy="530352"/>
-          </a:xfrm>
-          <a:prstGeom prst="rect">
-            <a:avLst/>
-          </a:prstGeom>
-          <a:noFill/>
-          <a:ln/>
-        </p:spPr>
-        <p:txBody>
-          <a:bodyPr wrap="square" lIns="0" tIns="0" rIns="0" bIns="0" rtlCol="0" anchor="ctr"/>
-          <a:lstStyle/>
-          <a:p>
-            <a:pPr algn="ctr" indent="0" marL="0">
-              <a:lnSpc>
-                <a:spcPct val="115000"/>
-              </a:lnSpc>
-              <a:buNone/>
-            </a:pPr>
-            <a:r>
-              <a:rPr lang="en-US" sz="1500" b="1" dirty="0">
-                <a:solidFill>
-                  <a:srgbClr val="FFFFFF"/>
-                </a:solidFill>
-                <a:latin typeface="メイリオ" pitchFamily="34" charset="0"/>
-                <a:ea typeface="メイリオ" pitchFamily="34" charset="-122"/>
-                <a:cs typeface="メイリオ" pitchFamily="34" charset="-120"/>
-              </a:rPr>
-              <a:t>自己評価</a:t>
-            </a:r>
-            <a:endParaRPr lang="en-US" sz="1500" dirty="0"/>
-          </a:p>
-        </p:txBody>
-      </p:sp>
-      <p:sp>
-        <p:nvSpPr>
-          <p:cNvPr id="9" name="Shape 7"/>
-          <p:cNvSpPr/>
-          <p:nvPr/>
-        </p:nvSpPr>
-        <p:spPr>
-          <a:xfrm>
-            <a:off x="6903720" y="1444752"/>
-            <a:ext cx="2011680" cy="530352"/>
-          </a:xfrm>
-          <a:prstGeom prst="roundRect">
-            <a:avLst>
-              <a:gd name="adj" fmla="val 12069"/>
-            </a:avLst>
-          </a:prstGeom>
-          <a:solidFill>
-            <a:srgbClr val="44C1A3"/>
-          </a:solidFill>
-          <a:ln/>
-        </p:spPr>
-      </p:sp>
-      <p:sp>
-        <p:nvSpPr>
-          <p:cNvPr id="10" name="Text 8"/>
-          <p:cNvSpPr txBox="1"/>
-          <p:nvPr/>
-        </p:nvSpPr>
-        <p:spPr>
-          <a:xfrm>
-            <a:off x="6903720" y="1444752"/>
-            <a:ext cx="2011680" cy="530352"/>
-          </a:xfrm>
-          <a:prstGeom prst="rect">
-            <a:avLst/>
-          </a:prstGeom>
-          <a:noFill/>
-          <a:ln/>
-        </p:spPr>
-        <p:txBody>
-          <a:bodyPr wrap="square" lIns="0" tIns="0" rIns="0" bIns="0" rtlCol="0" anchor="ctr"/>
-          <a:lstStyle/>
-          <a:p>
-            <a:pPr algn="ctr" indent="0" marL="0">
-              <a:lnSpc>
-                <a:spcPct val="115000"/>
-              </a:lnSpc>
-              <a:buNone/>
-            </a:pPr>
-            <a:r>
-              <a:rPr lang="en-US" sz="1500" b="1" dirty="0">
-                <a:solidFill>
-                  <a:srgbClr val="FFFFFF"/>
-                </a:solidFill>
-                <a:latin typeface="メイリオ" pitchFamily="34" charset="0"/>
-                <a:ea typeface="メイリオ" pitchFamily="34" charset="-122"/>
-                <a:cs typeface="メイリオ" pitchFamily="34" charset="-120"/>
-              </a:rPr>
-              <a:t>次時への見通し</a:t>
-            </a:r>
-            <a:endParaRPr lang="en-US" sz="1500" dirty="0"/>
-          </a:p>
-        </p:txBody>
-      </p:sp>
-      <p:sp>
-        <p:nvSpPr>
-          <p:cNvPr id="11" name="Text 9"/>
-          <p:cNvSpPr txBox="1"/>
-          <p:nvPr/>
-        </p:nvSpPr>
-        <p:spPr>
-          <a:xfrm>
-            <a:off x="320040" y="2066544"/>
-            <a:ext cx="8503920" cy="320040"/>
-          </a:xfrm>
-          <a:prstGeom prst="rect">
-            <a:avLst/>
-          </a:prstGeom>
-          <a:noFill/>
-          <a:ln/>
-        </p:spPr>
-        <p:txBody>
-          <a:bodyPr wrap="square" lIns="0" tIns="0" rIns="0" bIns="0" rtlCol="0" anchor="ctr"/>
-          <a:lstStyle/>
-          <a:p>
-            <a:pPr algn="l" indent="0" marL="0">
-              <a:buNone/>
-            </a:pPr>
-            <a:r>
-              <a:rPr lang="en-US" sz="1400" b="1" dirty="0">
-                <a:solidFill>
-                  <a:srgbClr val="808080"/>
-                </a:solidFill>
-                <a:latin typeface="メイリオ" pitchFamily="34" charset="0"/>
-                <a:ea typeface="メイリオ" pitchFamily="34" charset="-122"/>
-                <a:cs typeface="メイリオ" pitchFamily="34" charset="-120"/>
-              </a:rPr>
-              <a:t>本日の授業では、この４点が大切にされていた。</a:t>
-            </a:r>
-            <a:endParaRPr lang="en-US" sz="1400" dirty="0"/>
-          </a:p>
-        </p:txBody>
-      </p:sp>
-      <p:sp>
-        <p:nvSpPr>
-          <p:cNvPr id="12" name="Text 10"/>
-          <p:cNvSpPr txBox="1"/>
-          <p:nvPr/>
-        </p:nvSpPr>
-        <p:spPr>
-          <a:xfrm>
-            <a:off x="320040" y="2468880"/>
-            <a:ext cx="8503920" cy="1188720"/>
-          </a:xfrm>
-          <a:prstGeom prst="rect">
-            <a:avLst/>
-          </a:prstGeom>
-          <a:noFill/>
-          <a:ln/>
-        </p:spPr>
-        <p:txBody>
-          <a:bodyPr wrap="square" lIns="0" tIns="0" rIns="0" bIns="0" rtlCol="0" anchor="t"/>
-          <a:lstStyle/>
-          <a:p>
-            <a:pPr algn="l" indent="0" marL="0">
-              <a:lnSpc>
-                <a:spcPct val="150000"/>
-              </a:lnSpc>
-              <a:buNone/>
-            </a:pPr>
-            <a:r>
-              <a:rPr lang="en-US" sz="1500" b="1" dirty="0">
-                <a:solidFill>
-                  <a:srgbClr val="595959"/>
-                </a:solidFill>
-                <a:latin typeface="メイリオ" pitchFamily="34" charset="0"/>
-                <a:ea typeface="メイリオ" pitchFamily="34" charset="-122"/>
-                <a:cs typeface="メイリオ" pitchFamily="34" charset="-120"/>
-              </a:rPr>
-              <a:t>・田口　先生　　着替えの前に目標と流れを確認し、</a:t>
-            </a:r>
-            <a:pPr algn="l" indent="0" marL="0">
-              <a:lnSpc>
-                <a:spcPct val="150000"/>
-              </a:lnSpc>
-              <a:buNone/>
-            </a:pPr>
-            <a:r>
-              <a:rPr lang="en-US" sz="1500" b="1" dirty="0">
-                <a:solidFill>
-                  <a:srgbClr val="EE7B08"/>
-                </a:solidFill>
-                <a:latin typeface="メイリオ" pitchFamily="34" charset="0"/>
-                <a:ea typeface="メイリオ" pitchFamily="34" charset="-122"/>
-                <a:cs typeface="メイリオ" pitchFamily="34" charset="-120"/>
-              </a:rPr>
-              <a:t>学習カードで要点を振り返る</a:t>
-            </a:r>
-            <a:endParaRPr lang="en-US" sz="1500" dirty="0"/>
-          </a:p>
-          <a:p>
-            <a:pPr algn="l" indent="0" marL="0">
-              <a:lnSpc>
-                <a:spcPct val="150000"/>
-              </a:lnSpc>
-              <a:buNone/>
-            </a:pPr>
-            <a:r>
-              <a:rPr lang="en-US" sz="1500" b="1" dirty="0">
-                <a:solidFill>
-                  <a:srgbClr val="595959"/>
-                </a:solidFill>
-                <a:latin typeface="メイリオ" pitchFamily="34" charset="0"/>
-                <a:ea typeface="メイリオ" pitchFamily="34" charset="-122"/>
-                <a:cs typeface="メイリオ" pitchFamily="34" charset="-120"/>
-              </a:rPr>
-              <a:t>・塚本　先生　　Today’s Goal と Plan を提示し、</a:t>
-            </a:r>
-            <a:pPr algn="l" indent="0" marL="0">
-              <a:lnSpc>
-                <a:spcPct val="150000"/>
-              </a:lnSpc>
-              <a:buNone/>
-            </a:pPr>
-            <a:r>
-              <a:rPr lang="en-US" sz="1500" b="1" dirty="0">
-                <a:solidFill>
-                  <a:srgbClr val="EE7B08"/>
-                </a:solidFill>
-                <a:latin typeface="メイリオ" pitchFamily="34" charset="0"/>
-                <a:ea typeface="メイリオ" pitchFamily="34" charset="-122"/>
-                <a:cs typeface="メイリオ" pitchFamily="34" charset="-120"/>
-              </a:rPr>
-              <a:t>振り返りをワークシートに記入</a:t>
-            </a:r>
-            <a:endParaRPr lang="en-US" sz="1500" dirty="0"/>
-          </a:p>
-          <a:p>
-            <a:pPr algn="l" indent="0" marL="0">
-              <a:lnSpc>
-                <a:spcPct val="150000"/>
-              </a:lnSpc>
-              <a:buNone/>
-            </a:pPr>
-            <a:r>
-              <a:rPr lang="en-US" sz="1500" b="1" dirty="0">
-                <a:solidFill>
-                  <a:srgbClr val="595959"/>
-                </a:solidFill>
-                <a:latin typeface="メイリオ" pitchFamily="34" charset="0"/>
-                <a:ea typeface="メイリオ" pitchFamily="34" charset="-122"/>
-                <a:cs typeface="メイリオ" pitchFamily="34" charset="-120"/>
-              </a:rPr>
-              <a:t>・東海林　先生　</a:t>
-            </a:r>
-            <a:pPr algn="l" indent="0" marL="0">
-              <a:lnSpc>
-                <a:spcPct val="150000"/>
-              </a:lnSpc>
-              <a:buNone/>
-            </a:pPr>
-            <a:r>
-              <a:rPr lang="en-US" sz="1500" b="1" dirty="0">
-                <a:solidFill>
-                  <a:srgbClr val="EE7B08"/>
-                </a:solidFill>
-                <a:latin typeface="メイリオ" pitchFamily="34" charset="0"/>
-                <a:ea typeface="メイリオ" pitchFamily="34" charset="-122"/>
-                <a:cs typeface="メイリオ" pitchFamily="34" charset="-120"/>
-              </a:rPr>
-              <a:t>前時のワークシート</a:t>
-            </a:r>
-            <a:pPr algn="l" indent="0" marL="0">
-              <a:lnSpc>
-                <a:spcPct val="150000"/>
-              </a:lnSpc>
-              <a:buNone/>
-            </a:pPr>
-            <a:r>
-              <a:rPr lang="en-US" sz="1500" b="1" dirty="0">
-                <a:solidFill>
-                  <a:srgbClr val="595959"/>
-                </a:solidFill>
-                <a:latin typeface="メイリオ" pitchFamily="34" charset="0"/>
-                <a:ea typeface="メイリオ" pitchFamily="34" charset="-122"/>
-                <a:cs typeface="メイリオ" pitchFamily="34" charset="-120"/>
-              </a:rPr>
-              <a:t>で自分の考えを確かめてから議論へ</a:t>
-            </a:r>
-            <a:endParaRPr lang="en-US" sz="1500" dirty="0"/>
-          </a:p>
-        </p:txBody>
-      </p:sp>
-      <p:sp>
-        <p:nvSpPr>
-          <p:cNvPr id="13" name="Shape 11"/>
-          <p:cNvSpPr/>
-          <p:nvPr/>
-        </p:nvSpPr>
-        <p:spPr>
-          <a:xfrm>
-            <a:off x="320040" y="3794760"/>
-            <a:ext cx="8503920" cy="777240"/>
-          </a:xfrm>
-          <a:prstGeom prst="roundRect">
-            <a:avLst>
-              <a:gd name="adj" fmla="val 7059"/>
+              <a:gd name="adj" fmla="val 6667"/>
             </a:avLst>
           </a:prstGeom>
           <a:solidFill>
@@ -5911,14 +6040,14 @@
       </p:sp>
       <p:sp>
         <p:nvSpPr>
-          <p:cNvPr id="14" name="Text 12"/>
-          <p:cNvSpPr txBox="1"/>
-          <p:nvPr/>
-        </p:nvSpPr>
-        <p:spPr>
-          <a:xfrm>
-            <a:off x="576072" y="3794760"/>
-            <a:ext cx="7991856" cy="777240"/>
+          <p:cNvPr id="6" name="Text 4"/>
+          <p:cNvSpPr txBox="1"/>
+          <p:nvPr/>
+        </p:nvSpPr>
+        <p:spPr>
+          <a:xfrm>
+            <a:off x="731520" y="3611880"/>
+            <a:ext cx="7680960" cy="822960"/>
           </a:xfrm>
           <a:prstGeom prst="rect">
             <a:avLst/>
@@ -5934,7 +6063,7 @@
               <a:buNone/>
             </a:pPr>
             <a:r>
-              <a:rPr lang="en-US" sz="1700" b="1" dirty="0">
+              <a:rPr lang="en-US" sz="1600" b="1" dirty="0">
                 <a:solidFill>
                   <a:srgbClr val="595959"/>
                 </a:solidFill>
@@ -5942,37 +6071,9 @@
                 <a:ea typeface="メイリオ" pitchFamily="34" charset="-122"/>
                 <a:cs typeface="メイリオ" pitchFamily="34" charset="-120"/>
               </a:rPr>
-              <a:t>教師が管理する学習から　</a:t>
-            </a:r>
-            <a:pPr algn="l" indent="0" marL="0">
-              <a:buNone/>
-            </a:pPr>
-            <a:r>
-              <a:rPr lang="en-US" sz="1700" b="1" dirty="0">
-                <a:solidFill>
-                  <a:srgbClr val="EE7B08"/>
-                </a:solidFill>
-                <a:latin typeface="メイリオ" pitchFamily="34" charset="0"/>
-                <a:ea typeface="メイリオ" pitchFamily="34" charset="-122"/>
-                <a:cs typeface="メイリオ" pitchFamily="34" charset="-120"/>
-              </a:rPr>
-              <a:t>子どもが管理する学習へ</a:t>
-            </a:r>
-            <a:pPr algn="l" indent="0" marL="0">
-              <a:buNone/>
-            </a:pPr>
-            <a:r>
-              <a:rPr lang="en-US" sz="1700" b="1" dirty="0">
-                <a:solidFill>
-                  <a:srgbClr val="595959"/>
-                </a:solidFill>
-                <a:latin typeface="メイリオ" pitchFamily="34" charset="0"/>
-                <a:ea typeface="メイリオ" pitchFamily="34" charset="-122"/>
-                <a:cs typeface="メイリオ" pitchFamily="34" charset="-120"/>
-              </a:rPr>
-              <a:t>　着実に転換が進んでいる。</a:t>
-            </a:r>
-            <a:endParaRPr lang="en-US" sz="1700" dirty="0"/>
+              <a:t>学習指導要領が示す「学びに向かう力」の中核をなす力である。</a:t>
+            </a:r>
+            <a:endParaRPr lang="en-US" sz="1600" dirty="0"/>
           </a:p>
         </p:txBody>
       </p:sp>
@@ -6010,7 +6111,7 @@
         <p:spPr>
           <a:xfrm>
             <a:off x="0" y="-9144"/>
-            <a:ext cx="9144000" cy="612648"/>
+            <a:ext cx="9144000" cy="1161288"/>
           </a:xfrm>
           <a:prstGeom prst="rect">
             <a:avLst/>
@@ -6039,22 +6140,337 @@
                 <a:ea typeface="メイリオ" pitchFamily="34" charset="-122"/>
                 <a:cs typeface="メイリオ" pitchFamily="34" charset="-120"/>
               </a:rPr>
-              <a:t>　今後に向けて</a:t>
+              <a:t>　２　５校時の授業について</a:t>
             </a:r>
             <a:endParaRPr lang="en-US" sz="3000" dirty="0"/>
           </a:p>
-        </p:txBody>
-      </p:sp>
-      <p:sp>
-        <p:nvSpPr>
-          <p:cNvPr id="3" name="Text 1"/>
-          <p:cNvSpPr txBox="1"/>
-          <p:nvPr/>
-        </p:nvSpPr>
-        <p:spPr>
-          <a:xfrm>
-            <a:off x="475488" y="896112"/>
-            <a:ext cx="8193024" cy="777240"/>
+          <a:p>
+            <a:pPr algn="l" indent="0" marL="0">
+              <a:lnSpc>
+                <a:spcPct val="120000"/>
+              </a:lnSpc>
+              <a:buNone/>
+            </a:pPr>
+            <a:r>
+              <a:rPr lang="en-US" sz="2800" b="1" dirty="0">
+                <a:solidFill>
+                  <a:srgbClr val="FFFFFF"/>
+                </a:solidFill>
+                <a:latin typeface="メイリオ" pitchFamily="34" charset="0"/>
+                <a:ea typeface="メイリオ" pitchFamily="34" charset="-122"/>
+                <a:cs typeface="メイリオ" pitchFamily="34" charset="-120"/>
+              </a:rPr>
+              <a:t>　③　自己調整が行われていた授業</a:t>
+            </a:r>
+            <a:endParaRPr lang="en-US" sz="3000" dirty="0"/>
+          </a:p>
+        </p:txBody>
+      </p:sp>
+      <p:sp>
+        <p:nvSpPr>
+          <p:cNvPr id="3" name="Shape 1"/>
+          <p:cNvSpPr/>
+          <p:nvPr/>
+        </p:nvSpPr>
+        <p:spPr>
+          <a:xfrm>
+            <a:off x="320040" y="1444752"/>
+            <a:ext cx="2011680" cy="530352"/>
+          </a:xfrm>
+          <a:prstGeom prst="roundRect">
+            <a:avLst>
+              <a:gd name="adj" fmla="val 12069"/>
+            </a:avLst>
+          </a:prstGeom>
+          <a:solidFill>
+            <a:srgbClr val="44C1A3"/>
+          </a:solidFill>
+          <a:ln/>
+        </p:spPr>
+      </p:sp>
+      <p:sp>
+        <p:nvSpPr>
+          <p:cNvPr id="4" name="Text 2"/>
+          <p:cNvSpPr txBox="1"/>
+          <p:nvPr/>
+        </p:nvSpPr>
+        <p:spPr>
+          <a:xfrm>
+            <a:off x="320040" y="1444752"/>
+            <a:ext cx="2011680" cy="530352"/>
+          </a:xfrm>
+          <a:prstGeom prst="rect">
+            <a:avLst/>
+          </a:prstGeom>
+          <a:noFill/>
+          <a:ln/>
+        </p:spPr>
+        <p:txBody>
+          <a:bodyPr wrap="square" lIns="0" tIns="0" rIns="0" bIns="0" rtlCol="0" anchor="ctr"/>
+          <a:lstStyle/>
+          <a:p>
+            <a:pPr algn="ctr" indent="0" marL="0">
+              <a:lnSpc>
+                <a:spcPct val="115000"/>
+              </a:lnSpc>
+              <a:buNone/>
+            </a:pPr>
+            <a:r>
+              <a:rPr lang="en-US" sz="1500" b="1" dirty="0">
+                <a:solidFill>
+                  <a:srgbClr val="FFFFFF"/>
+                </a:solidFill>
+                <a:latin typeface="メイリオ" pitchFamily="34" charset="0"/>
+                <a:ea typeface="メイリオ" pitchFamily="34" charset="-122"/>
+                <a:cs typeface="メイリオ" pitchFamily="34" charset="-120"/>
+              </a:rPr>
+              <a:t>本時の目標</a:t>
+            </a:r>
+            <a:endParaRPr lang="en-US" sz="1500" dirty="0"/>
+          </a:p>
+        </p:txBody>
+      </p:sp>
+      <p:sp>
+        <p:nvSpPr>
+          <p:cNvPr id="5" name="Shape 3"/>
+          <p:cNvSpPr/>
+          <p:nvPr/>
+        </p:nvSpPr>
+        <p:spPr>
+          <a:xfrm>
+            <a:off x="2514600" y="1444752"/>
+            <a:ext cx="2011680" cy="530352"/>
+          </a:xfrm>
+          <a:prstGeom prst="roundRect">
+            <a:avLst>
+              <a:gd name="adj" fmla="val 12069"/>
+            </a:avLst>
+          </a:prstGeom>
+          <a:solidFill>
+            <a:srgbClr val="44C1A3"/>
+          </a:solidFill>
+          <a:ln/>
+        </p:spPr>
+      </p:sp>
+      <p:sp>
+        <p:nvSpPr>
+          <p:cNvPr id="6" name="Text 4"/>
+          <p:cNvSpPr txBox="1"/>
+          <p:nvPr/>
+        </p:nvSpPr>
+        <p:spPr>
+          <a:xfrm>
+            <a:off x="2514600" y="1444752"/>
+            <a:ext cx="2011680" cy="530352"/>
+          </a:xfrm>
+          <a:prstGeom prst="rect">
+            <a:avLst/>
+          </a:prstGeom>
+          <a:noFill/>
+          <a:ln/>
+        </p:spPr>
+        <p:txBody>
+          <a:bodyPr wrap="square" lIns="0" tIns="0" rIns="0" bIns="0" rtlCol="0" anchor="ctr"/>
+          <a:lstStyle/>
+          <a:p>
+            <a:pPr algn="ctr" indent="0" marL="0">
+              <a:lnSpc>
+                <a:spcPct val="115000"/>
+              </a:lnSpc>
+              <a:buNone/>
+            </a:pPr>
+            <a:r>
+              <a:rPr lang="en-US" sz="1500" b="1" dirty="0">
+                <a:solidFill>
+                  <a:srgbClr val="FFFFFF"/>
+                </a:solidFill>
+                <a:latin typeface="メイリオ" pitchFamily="34" charset="0"/>
+                <a:ea typeface="メイリオ" pitchFamily="34" charset="-122"/>
+                <a:cs typeface="メイリオ" pitchFamily="34" charset="-120"/>
+              </a:rPr>
+              <a:t>振り返り</a:t>
+            </a:r>
+            <a:endParaRPr lang="en-US" sz="1500" dirty="0"/>
+          </a:p>
+        </p:txBody>
+      </p:sp>
+      <p:sp>
+        <p:nvSpPr>
+          <p:cNvPr id="7" name="Shape 5"/>
+          <p:cNvSpPr/>
+          <p:nvPr/>
+        </p:nvSpPr>
+        <p:spPr>
+          <a:xfrm>
+            <a:off x="4709160" y="1444752"/>
+            <a:ext cx="2011680" cy="530352"/>
+          </a:xfrm>
+          <a:prstGeom prst="roundRect">
+            <a:avLst>
+              <a:gd name="adj" fmla="val 12069"/>
+            </a:avLst>
+          </a:prstGeom>
+          <a:solidFill>
+            <a:srgbClr val="44C1A3"/>
+          </a:solidFill>
+          <a:ln/>
+        </p:spPr>
+      </p:sp>
+      <p:sp>
+        <p:nvSpPr>
+          <p:cNvPr id="8" name="Text 6"/>
+          <p:cNvSpPr txBox="1"/>
+          <p:nvPr/>
+        </p:nvSpPr>
+        <p:spPr>
+          <a:xfrm>
+            <a:off x="4709160" y="1444752"/>
+            <a:ext cx="2011680" cy="530352"/>
+          </a:xfrm>
+          <a:prstGeom prst="rect">
+            <a:avLst/>
+          </a:prstGeom>
+          <a:noFill/>
+          <a:ln/>
+        </p:spPr>
+        <p:txBody>
+          <a:bodyPr wrap="square" lIns="0" tIns="0" rIns="0" bIns="0" rtlCol="0" anchor="ctr"/>
+          <a:lstStyle/>
+          <a:p>
+            <a:pPr algn="ctr" indent="0" marL="0">
+              <a:lnSpc>
+                <a:spcPct val="115000"/>
+              </a:lnSpc>
+              <a:buNone/>
+            </a:pPr>
+            <a:r>
+              <a:rPr lang="en-US" sz="1500" b="1" dirty="0">
+                <a:solidFill>
+                  <a:srgbClr val="FFFFFF"/>
+                </a:solidFill>
+                <a:latin typeface="メイリオ" pitchFamily="34" charset="0"/>
+                <a:ea typeface="メイリオ" pitchFamily="34" charset="-122"/>
+                <a:cs typeface="メイリオ" pitchFamily="34" charset="-120"/>
+              </a:rPr>
+              <a:t>自己評価</a:t>
+            </a:r>
+            <a:endParaRPr lang="en-US" sz="1500" dirty="0"/>
+          </a:p>
+        </p:txBody>
+      </p:sp>
+      <p:sp>
+        <p:nvSpPr>
+          <p:cNvPr id="9" name="Shape 7"/>
+          <p:cNvSpPr/>
+          <p:nvPr/>
+        </p:nvSpPr>
+        <p:spPr>
+          <a:xfrm>
+            <a:off x="6903720" y="1444752"/>
+            <a:ext cx="2011680" cy="530352"/>
+          </a:xfrm>
+          <a:prstGeom prst="roundRect">
+            <a:avLst>
+              <a:gd name="adj" fmla="val 12069"/>
+            </a:avLst>
+          </a:prstGeom>
+          <a:solidFill>
+            <a:srgbClr val="44C1A3"/>
+          </a:solidFill>
+          <a:ln/>
+        </p:spPr>
+      </p:sp>
+      <p:sp>
+        <p:nvSpPr>
+          <p:cNvPr id="10" name="Text 8"/>
+          <p:cNvSpPr txBox="1"/>
+          <p:nvPr/>
+        </p:nvSpPr>
+        <p:spPr>
+          <a:xfrm>
+            <a:off x="6903720" y="1444752"/>
+            <a:ext cx="2011680" cy="530352"/>
+          </a:xfrm>
+          <a:prstGeom prst="rect">
+            <a:avLst/>
+          </a:prstGeom>
+          <a:noFill/>
+          <a:ln/>
+        </p:spPr>
+        <p:txBody>
+          <a:bodyPr wrap="square" lIns="0" tIns="0" rIns="0" bIns="0" rtlCol="0" anchor="ctr"/>
+          <a:lstStyle/>
+          <a:p>
+            <a:pPr algn="ctr" indent="0" marL="0">
+              <a:lnSpc>
+                <a:spcPct val="115000"/>
+              </a:lnSpc>
+              <a:buNone/>
+            </a:pPr>
+            <a:r>
+              <a:rPr lang="en-US" sz="1500" b="1" dirty="0">
+                <a:solidFill>
+                  <a:srgbClr val="FFFFFF"/>
+                </a:solidFill>
+                <a:latin typeface="メイリオ" pitchFamily="34" charset="0"/>
+                <a:ea typeface="メイリオ" pitchFamily="34" charset="-122"/>
+                <a:cs typeface="メイリオ" pitchFamily="34" charset="-120"/>
+              </a:rPr>
+              <a:t>次時への見通し</a:t>
+            </a:r>
+            <a:endParaRPr lang="en-US" sz="1500" dirty="0"/>
+          </a:p>
+        </p:txBody>
+      </p:sp>
+      <p:sp>
+        <p:nvSpPr>
+          <p:cNvPr id="11" name="Text 9"/>
+          <p:cNvSpPr txBox="1"/>
+          <p:nvPr/>
+        </p:nvSpPr>
+        <p:spPr>
+          <a:xfrm>
+            <a:off x="320040" y="2066544"/>
+            <a:ext cx="8503920" cy="320040"/>
+          </a:xfrm>
+          <a:prstGeom prst="rect">
+            <a:avLst/>
+          </a:prstGeom>
+          <a:noFill/>
+          <a:ln/>
+        </p:spPr>
+        <p:txBody>
+          <a:bodyPr wrap="square" lIns="0" tIns="0" rIns="0" bIns="0" rtlCol="0" anchor="ctr"/>
+          <a:lstStyle/>
+          <a:p>
+            <a:pPr algn="l" indent="0" marL="0">
+              <a:buNone/>
+            </a:pPr>
+            <a:r>
+              <a:rPr lang="en-US" sz="1400" b="1" dirty="0">
+                <a:solidFill>
+                  <a:srgbClr val="808080"/>
+                </a:solidFill>
+                <a:latin typeface="メイリオ" pitchFamily="34" charset="0"/>
+                <a:ea typeface="メイリオ" pitchFamily="34" charset="-122"/>
+                <a:cs typeface="メイリオ" pitchFamily="34" charset="-120"/>
+              </a:rPr>
+              <a:t>本日の授業では、この４点が大切にされていた。</a:t>
+            </a:r>
+            <a:endParaRPr lang="en-US" sz="1400" dirty="0"/>
+          </a:p>
+        </p:txBody>
+      </p:sp>
+      <p:sp>
+        <p:nvSpPr>
+          <p:cNvPr id="12" name="Text 10"/>
+          <p:cNvSpPr txBox="1"/>
+          <p:nvPr/>
+        </p:nvSpPr>
+        <p:spPr>
+          <a:xfrm>
+            <a:off x="320040" y="2468880"/>
+            <a:ext cx="8503920" cy="1188720"/>
           </a:xfrm>
           <a:prstGeom prst="rect">
             <a:avLst/>
@@ -6068,12 +6484,29 @@
           <a:p>
             <a:pPr algn="l" indent="0" marL="0">
               <a:lnSpc>
-                <a:spcPct val="120000"/>
-              </a:lnSpc>
-              <a:buNone/>
-            </a:pPr>
-            <a:r>
-              <a:rPr lang="en-US" sz="1800" b="1" dirty="0">
+                <a:spcPct val="150000"/>
+              </a:lnSpc>
+              <a:buNone/>
+            </a:pPr>
+            <a:r>
+              <a:rPr lang="en-US" sz="1500" b="1" dirty="0">
+                <a:solidFill>
+                  <a:srgbClr val="595959"/>
+                </a:solidFill>
+                <a:latin typeface="メイリオ" pitchFamily="34" charset="0"/>
+                <a:ea typeface="メイリオ" pitchFamily="34" charset="-122"/>
+                <a:cs typeface="メイリオ" pitchFamily="34" charset="-120"/>
+              </a:rPr>
+              <a:t>・田口　先生　　着替えの前に目標と流れを確認し、</a:t>
+            </a:r>
+            <a:pPr algn="l" indent="0" marL="0">
+              <a:lnSpc>
+                <a:spcPct val="150000"/>
+              </a:lnSpc>
+              <a:buNone/>
+            </a:pPr>
+            <a:r>
+              <a:rPr lang="en-US" sz="1500" b="1" dirty="0">
                 <a:solidFill>
                   <a:srgbClr val="EE7B08"/>
                 </a:solidFill>
@@ -6081,16 +6514,19 @@
                 <a:ea typeface="メイリオ" pitchFamily="34" charset="-122"/>
                 <a:cs typeface="メイリオ" pitchFamily="34" charset="-120"/>
               </a:rPr>
-              <a:t>学力調査結果</a:t>
-            </a:r>
-            <a:pPr algn="l" indent="0" marL="0">
-              <a:lnSpc>
-                <a:spcPct val="120000"/>
-              </a:lnSpc>
-              <a:buNone/>
-            </a:pPr>
-            <a:r>
-              <a:rPr lang="en-US" sz="1800" b="1" dirty="0">
+              <a:t>学習カードで要点を振り返る</a:t>
+            </a:r>
+            <a:endParaRPr lang="en-US" sz="1500" dirty="0"/>
+          </a:p>
+          <a:p>
+            <a:pPr algn="l" indent="0" marL="0">
+              <a:lnSpc>
+                <a:spcPct val="150000"/>
+              </a:lnSpc>
+              <a:buNone/>
+            </a:pPr>
+            <a:r>
+              <a:rPr lang="en-US" sz="1500" b="1" dirty="0">
                 <a:solidFill>
                   <a:srgbClr val="595959"/>
                 </a:solidFill>
@@ -6098,16 +6534,16 @@
                 <a:ea typeface="メイリオ" pitchFamily="34" charset="-122"/>
                 <a:cs typeface="メイリオ" pitchFamily="34" charset="-120"/>
               </a:rPr>
-              <a:t>　と　</a:t>
-            </a:r>
-            <a:pPr algn="l" indent="0" marL="0">
-              <a:lnSpc>
-                <a:spcPct val="120000"/>
-              </a:lnSpc>
-              <a:buNone/>
-            </a:pPr>
-            <a:r>
-              <a:rPr lang="en-US" sz="1800" b="1" dirty="0">
+              <a:t>・塚本　先生　　Today’s Goal と Plan を提示し、</a:t>
+            </a:r>
+            <a:pPr algn="l" indent="0" marL="0">
+              <a:lnSpc>
+                <a:spcPct val="150000"/>
+              </a:lnSpc>
+              <a:buNone/>
+            </a:pPr>
+            <a:r>
+              <a:rPr lang="en-US" sz="1500" b="1" dirty="0">
                 <a:solidFill>
                   <a:srgbClr val="EE7B08"/>
                 </a:solidFill>
@@ -6115,16 +6551,19 @@
                 <a:ea typeface="メイリオ" pitchFamily="34" charset="-122"/>
                 <a:cs typeface="メイリオ" pitchFamily="34" charset="-120"/>
               </a:rPr>
-              <a:t>今日の授業</a:t>
-            </a:r>
-            <a:pPr algn="l" indent="0" marL="0">
-              <a:lnSpc>
-                <a:spcPct val="120000"/>
-              </a:lnSpc>
-              <a:buNone/>
-            </a:pPr>
-            <a:r>
-              <a:rPr lang="en-US" sz="1800" b="1" dirty="0">
+              <a:t>振り返りをワークシートに記入</a:t>
+            </a:r>
+            <a:endParaRPr lang="en-US" sz="1500" dirty="0"/>
+          </a:p>
+          <a:p>
+            <a:pPr algn="l" indent="0" marL="0">
+              <a:lnSpc>
+                <a:spcPct val="150000"/>
+              </a:lnSpc>
+              <a:buNone/>
+            </a:pPr>
+            <a:r>
+              <a:rPr lang="en-US" sz="1500" b="1" dirty="0">
                 <a:solidFill>
                   <a:srgbClr val="595959"/>
                 </a:solidFill>
@@ -6132,19 +6571,33 @@
                 <a:ea typeface="メイリオ" pitchFamily="34" charset="-122"/>
                 <a:cs typeface="メイリオ" pitchFamily="34" charset="-120"/>
               </a:rPr>
-              <a:t>　をつなげて考えると、</a:t>
-            </a:r>
-            <a:endParaRPr lang="en-US" sz="1800" dirty="0"/>
-          </a:p>
-          <a:p>
-            <a:pPr algn="l" indent="0" marL="0">
-              <a:lnSpc>
-                <a:spcPct val="120000"/>
-              </a:lnSpc>
-              <a:buNone/>
-            </a:pPr>
-            <a:r>
-              <a:rPr lang="en-US" sz="1800" b="1" dirty="0">
+              <a:t>・東海林　先生　</a:t>
+            </a:r>
+            <a:pPr algn="l" indent="0" marL="0">
+              <a:lnSpc>
+                <a:spcPct val="150000"/>
+              </a:lnSpc>
+              <a:buNone/>
+            </a:pPr>
+            <a:r>
+              <a:rPr lang="en-US" sz="1500" b="1" dirty="0">
+                <a:solidFill>
+                  <a:srgbClr val="EE7B08"/>
+                </a:solidFill>
+                <a:latin typeface="メイリオ" pitchFamily="34" charset="0"/>
+                <a:ea typeface="メイリオ" pitchFamily="34" charset="-122"/>
+                <a:cs typeface="メイリオ" pitchFamily="34" charset="-120"/>
+              </a:rPr>
+              <a:t>前時のワークシート</a:t>
+            </a:r>
+            <a:pPr algn="l" indent="0" marL="0">
+              <a:lnSpc>
+                <a:spcPct val="150000"/>
+              </a:lnSpc>
+              <a:buNone/>
+            </a:pPr>
+            <a:r>
+              <a:rPr lang="en-US" sz="1500" b="1" dirty="0">
                 <a:solidFill>
                   <a:srgbClr val="595959"/>
                 </a:solidFill>
@@ -6152,22 +6605,22 @@
                 <a:ea typeface="メイリオ" pitchFamily="34" charset="-122"/>
                 <a:cs typeface="メイリオ" pitchFamily="34" charset="-120"/>
               </a:rPr>
-              <a:t>今後さらに伸ばしたいのは</a:t>
-            </a:r>
-            <a:endParaRPr lang="en-US" sz="1800" dirty="0"/>
-          </a:p>
-        </p:txBody>
-      </p:sp>
-      <p:sp>
-        <p:nvSpPr>
-          <p:cNvPr id="4" name="Shape 2"/>
+              <a:t>で自分の考えを確かめてから議論へ</a:t>
+            </a:r>
+            <a:endParaRPr lang="en-US" sz="1500" dirty="0"/>
+          </a:p>
+        </p:txBody>
+      </p:sp>
+      <p:sp>
+        <p:nvSpPr>
+          <p:cNvPr id="13" name="Shape 11"/>
           <p:cNvSpPr/>
           <p:nvPr/>
         </p:nvSpPr>
         <p:spPr>
           <a:xfrm>
-            <a:off x="475488" y="1755648"/>
-            <a:ext cx="8193024" cy="777240"/>
+            <a:off x="320040" y="3794760"/>
+            <a:ext cx="8503920" cy="777240"/>
           </a:xfrm>
           <a:prstGeom prst="roundRect">
             <a:avLst>
@@ -6187,14 +6640,14 @@
       </p:sp>
       <p:sp>
         <p:nvSpPr>
-          <p:cNvPr id="5" name="Text 3"/>
-          <p:cNvSpPr txBox="1"/>
-          <p:nvPr/>
-        </p:nvSpPr>
-        <p:spPr>
-          <a:xfrm>
-            <a:off x="731520" y="1755648"/>
-            <a:ext cx="7680960" cy="777240"/>
+          <p:cNvPr id="14" name="Text 12"/>
+          <p:cNvSpPr txBox="1"/>
+          <p:nvPr/>
+        </p:nvSpPr>
+        <p:spPr>
+          <a:xfrm>
+            <a:off x="576072" y="3794760"/>
+            <a:ext cx="7991856" cy="777240"/>
           </a:xfrm>
           <a:prstGeom prst="rect">
             <a:avLst/>
@@ -6210,7 +6663,21 @@
               <a:buNone/>
             </a:pPr>
             <a:r>
-              <a:rPr lang="en-US" sz="2300" b="1" dirty="0">
+              <a:rPr lang="en-US" sz="1700" b="1" dirty="0">
+                <a:solidFill>
+                  <a:srgbClr val="595959"/>
+                </a:solidFill>
+                <a:latin typeface="メイリオ" pitchFamily="34" charset="0"/>
+                <a:ea typeface="メイリオ" pitchFamily="34" charset="-122"/>
+                <a:cs typeface="メイリオ" pitchFamily="34" charset="-120"/>
+              </a:rPr>
+              <a:t>教師が管理する学習から　</a:t>
+            </a:r>
+            <a:pPr algn="l" indent="0" marL="0">
+              <a:buNone/>
+            </a:pPr>
+            <a:r>
+              <a:rPr lang="en-US" sz="1700" b="1" dirty="0">
                 <a:solidFill>
                   <a:srgbClr val="EE7B08"/>
                 </a:solidFill>
@@ -6218,107 +6685,13 @@
                 <a:ea typeface="メイリオ" pitchFamily="34" charset="-122"/>
                 <a:cs typeface="メイリオ" pitchFamily="34" charset="-120"/>
               </a:rPr>
-              <a:t>「学びを自分事として捉える子ども」である。</a:t>
-            </a:r>
-            <a:endParaRPr lang="en-US" sz="2300" dirty="0"/>
-          </a:p>
-        </p:txBody>
-      </p:sp>
-      <p:sp>
-        <p:nvSpPr>
-          <p:cNvPr id="6" name="Text 4"/>
-          <p:cNvSpPr txBox="1"/>
-          <p:nvPr/>
-        </p:nvSpPr>
-        <p:spPr>
-          <a:xfrm>
-            <a:off x="475488" y="2670048"/>
-            <a:ext cx="8193024" cy="320040"/>
-          </a:xfrm>
-          <a:prstGeom prst="rect">
-            <a:avLst/>
-          </a:prstGeom>
-          <a:noFill/>
-          <a:ln/>
-        </p:spPr>
-        <p:txBody>
-          <a:bodyPr wrap="square" lIns="0" tIns="0" rIns="0" bIns="0" rtlCol="0" anchor="ctr"/>
-          <a:lstStyle/>
-          <a:p>
-            <a:pPr algn="l" indent="0" marL="0">
-              <a:buNone/>
-            </a:pPr>
-            <a:r>
-              <a:rPr lang="en-US" sz="1500" b="1" dirty="0">
-                <a:solidFill>
-                  <a:srgbClr val="808080"/>
-                </a:solidFill>
-                <a:latin typeface="メイリオ" pitchFamily="34" charset="0"/>
-                <a:ea typeface="メイリオ" pitchFamily="34" charset="-122"/>
-                <a:cs typeface="メイリオ" pitchFamily="34" charset="-120"/>
-              </a:rPr>
-              <a:t>そのためには</a:t>
-            </a:r>
-            <a:endParaRPr lang="en-US" sz="1500" dirty="0"/>
-          </a:p>
-        </p:txBody>
-      </p:sp>
-      <p:sp>
-        <p:nvSpPr>
-          <p:cNvPr id="7" name="Shape 5"/>
-          <p:cNvSpPr/>
-          <p:nvPr/>
-        </p:nvSpPr>
-        <p:spPr>
-          <a:xfrm>
-            <a:off x="475488" y="3054096"/>
-            <a:ext cx="2468880" cy="585216"/>
-          </a:xfrm>
-          <a:prstGeom prst="roundRect">
-            <a:avLst>
-              <a:gd name="adj" fmla="val 10938"/>
-            </a:avLst>
-          </a:prstGeom>
-          <a:solidFill>
-            <a:srgbClr val="E9F7F3"/>
-          </a:solidFill>
-          <a:ln w="12700">
-            <a:solidFill>
-              <a:srgbClr val="B9E5DA"/>
-            </a:solidFill>
-            <a:prstDash val="solid"/>
-          </a:ln>
-        </p:spPr>
-      </p:sp>
-      <p:sp>
-        <p:nvSpPr>
-          <p:cNvPr id="8" name="Text 6"/>
-          <p:cNvSpPr txBox="1"/>
-          <p:nvPr/>
-        </p:nvSpPr>
-        <p:spPr>
-          <a:xfrm>
-            <a:off x="475488" y="3054096"/>
-            <a:ext cx="2468880" cy="585216"/>
-          </a:xfrm>
-          <a:prstGeom prst="rect">
-            <a:avLst/>
-          </a:prstGeom>
-          <a:noFill/>
-          <a:ln/>
-        </p:spPr>
-        <p:txBody>
-          <a:bodyPr wrap="square" lIns="0" tIns="0" rIns="0" bIns="0" rtlCol="0" anchor="ctr"/>
-          <a:lstStyle/>
-          <a:p>
-            <a:pPr algn="ctr" indent="0" marL="0">
-              <a:lnSpc>
-                <a:spcPct val="115000"/>
-              </a:lnSpc>
-              <a:buNone/>
-            </a:pPr>
-            <a:r>
-              <a:rPr lang="en-US" sz="1600" b="1" dirty="0">
+              <a:t>子どもが管理する学習へ</a:t>
+            </a:r>
+            <a:pPr algn="l" indent="0" marL="0">
+              <a:buNone/>
+            </a:pPr>
+            <a:r>
+              <a:rPr lang="en-US" sz="1700" b="1" dirty="0">
                 <a:solidFill>
                   <a:srgbClr val="595959"/>
                 </a:solidFill>
@@ -6326,214 +6699,9 @@
                 <a:ea typeface="メイリオ" pitchFamily="34" charset="-122"/>
                 <a:cs typeface="メイリオ" pitchFamily="34" charset="-120"/>
               </a:rPr>
-              <a:t>自己肯定感</a:t>
-            </a:r>
-            <a:endParaRPr lang="en-US" sz="1600" dirty="0"/>
-          </a:p>
-        </p:txBody>
-      </p:sp>
-      <p:sp>
-        <p:nvSpPr>
-          <p:cNvPr id="9" name="Shape 7"/>
-          <p:cNvSpPr/>
-          <p:nvPr/>
-        </p:nvSpPr>
-        <p:spPr>
-          <a:xfrm>
-            <a:off x="3218688" y="3054096"/>
-            <a:ext cx="2468880" cy="585216"/>
-          </a:xfrm>
-          <a:prstGeom prst="roundRect">
-            <a:avLst>
-              <a:gd name="adj" fmla="val 10938"/>
-            </a:avLst>
-          </a:prstGeom>
-          <a:solidFill>
-            <a:srgbClr val="E9F7F3"/>
-          </a:solidFill>
-          <a:ln w="12700">
-            <a:solidFill>
-              <a:srgbClr val="B9E5DA"/>
-            </a:solidFill>
-            <a:prstDash val="solid"/>
-          </a:ln>
-        </p:spPr>
-      </p:sp>
-      <p:sp>
-        <p:nvSpPr>
-          <p:cNvPr id="10" name="Text 8"/>
-          <p:cNvSpPr txBox="1"/>
-          <p:nvPr/>
-        </p:nvSpPr>
-        <p:spPr>
-          <a:xfrm>
-            <a:off x="3218688" y="3054096"/>
-            <a:ext cx="2468880" cy="585216"/>
-          </a:xfrm>
-          <a:prstGeom prst="rect">
-            <a:avLst/>
-          </a:prstGeom>
-          <a:noFill/>
-          <a:ln/>
-        </p:spPr>
-        <p:txBody>
-          <a:bodyPr wrap="square" lIns="0" tIns="0" rIns="0" bIns="0" rtlCol="0" anchor="ctr"/>
-          <a:lstStyle/>
-          <a:p>
-            <a:pPr algn="ctr" indent="0" marL="0">
-              <a:lnSpc>
-                <a:spcPct val="115000"/>
-              </a:lnSpc>
-              <a:buNone/>
-            </a:pPr>
-            <a:r>
-              <a:rPr lang="en-US" sz="1600" b="1" dirty="0">
-                <a:solidFill>
-                  <a:srgbClr val="595959"/>
-                </a:solidFill>
-                <a:latin typeface="メイリオ" pitchFamily="34" charset="0"/>
-                <a:ea typeface="メイリオ" pitchFamily="34" charset="-122"/>
-                <a:cs typeface="メイリオ" pitchFamily="34" charset="-120"/>
-              </a:rPr>
-              <a:t>対話・協働</a:t>
-            </a:r>
-            <a:endParaRPr lang="en-US" sz="1600" dirty="0"/>
-          </a:p>
-        </p:txBody>
-      </p:sp>
-      <p:sp>
-        <p:nvSpPr>
-          <p:cNvPr id="11" name="Shape 9"/>
-          <p:cNvSpPr/>
-          <p:nvPr/>
-        </p:nvSpPr>
-        <p:spPr>
-          <a:xfrm>
-            <a:off x="5961888" y="3054096"/>
-            <a:ext cx="2468880" cy="585216"/>
-          </a:xfrm>
-          <a:prstGeom prst="roundRect">
-            <a:avLst>
-              <a:gd name="adj" fmla="val 10938"/>
-            </a:avLst>
-          </a:prstGeom>
-          <a:solidFill>
-            <a:srgbClr val="E9F7F3"/>
-          </a:solidFill>
-          <a:ln w="12700">
-            <a:solidFill>
-              <a:srgbClr val="B9E5DA"/>
-            </a:solidFill>
-            <a:prstDash val="solid"/>
-          </a:ln>
-        </p:spPr>
-      </p:sp>
-      <p:sp>
-        <p:nvSpPr>
-          <p:cNvPr id="12" name="Text 10"/>
-          <p:cNvSpPr txBox="1"/>
-          <p:nvPr/>
-        </p:nvSpPr>
-        <p:spPr>
-          <a:xfrm>
-            <a:off x="5961888" y="3054096"/>
-            <a:ext cx="2468880" cy="585216"/>
-          </a:xfrm>
-          <a:prstGeom prst="rect">
-            <a:avLst/>
-          </a:prstGeom>
-          <a:noFill/>
-          <a:ln/>
-        </p:spPr>
-        <p:txBody>
-          <a:bodyPr wrap="square" lIns="0" tIns="0" rIns="0" bIns="0" rtlCol="0" anchor="ctr"/>
-          <a:lstStyle/>
-          <a:p>
-            <a:pPr algn="ctr" indent="0" marL="0">
-              <a:lnSpc>
-                <a:spcPct val="115000"/>
-              </a:lnSpc>
-              <a:buNone/>
-            </a:pPr>
-            <a:r>
-              <a:rPr lang="en-US" sz="1600" b="1" dirty="0">
-                <a:solidFill>
-                  <a:srgbClr val="595959"/>
-                </a:solidFill>
-                <a:latin typeface="メイリオ" pitchFamily="34" charset="0"/>
-                <a:ea typeface="メイリオ" pitchFamily="34" charset="-122"/>
-                <a:cs typeface="メイリオ" pitchFamily="34" charset="-120"/>
-              </a:rPr>
-              <a:t>学習の自己調整</a:t>
-            </a:r>
-            <a:endParaRPr lang="en-US" sz="1600" dirty="0"/>
-          </a:p>
-        </p:txBody>
-      </p:sp>
-      <p:sp>
-        <p:nvSpPr>
-          <p:cNvPr id="13" name="Text 11"/>
-          <p:cNvSpPr txBox="1"/>
-          <p:nvPr/>
-        </p:nvSpPr>
-        <p:spPr>
-          <a:xfrm>
-            <a:off x="475488" y="3840480"/>
-            <a:ext cx="8193024" cy="502920"/>
-          </a:xfrm>
-          <a:prstGeom prst="rect">
-            <a:avLst/>
-          </a:prstGeom>
-          <a:noFill/>
-          <a:ln/>
-        </p:spPr>
-        <p:txBody>
-          <a:bodyPr wrap="square" lIns="0" tIns="0" rIns="0" bIns="0" rtlCol="0" anchor="ctr"/>
-          <a:lstStyle/>
-          <a:p>
-            <a:pPr algn="l" indent="0" marL="0">
-              <a:buNone/>
-            </a:pPr>
-            <a:r>
-              <a:rPr lang="en-US" sz="1800" b="1" dirty="0">
-                <a:solidFill>
-                  <a:srgbClr val="595959"/>
-                </a:solidFill>
-                <a:latin typeface="メイリオ" pitchFamily="34" charset="0"/>
-                <a:ea typeface="メイリオ" pitchFamily="34" charset="-122"/>
-                <a:cs typeface="メイリオ" pitchFamily="34" charset="-120"/>
-              </a:rPr>
-              <a:t>を　</a:t>
-            </a:r>
-            <a:pPr algn="l" indent="0" marL="0">
-              <a:buNone/>
-            </a:pPr>
-            <a:r>
-              <a:rPr lang="en-US" sz="1800" b="1" dirty="0">
-                <a:solidFill>
-                  <a:srgbClr val="EE7B08"/>
-                </a:solidFill>
-                <a:latin typeface="メイリオ" pitchFamily="34" charset="0"/>
-                <a:ea typeface="メイリオ" pitchFamily="34" charset="-122"/>
-                <a:cs typeface="メイリオ" pitchFamily="34" charset="-120"/>
-              </a:rPr>
-              <a:t>９年間で系統的に</a:t>
-            </a:r>
-            <a:pPr algn="l" indent="0" marL="0">
-              <a:buNone/>
-            </a:pPr>
-            <a:r>
-              <a:rPr lang="en-US" sz="1800" b="1" dirty="0">
-                <a:solidFill>
-                  <a:srgbClr val="595959"/>
-                </a:solidFill>
-                <a:latin typeface="メイリオ" pitchFamily="34" charset="0"/>
-                <a:ea typeface="メイリオ" pitchFamily="34" charset="-122"/>
-                <a:cs typeface="メイリオ" pitchFamily="34" charset="-120"/>
-              </a:rPr>
-              <a:t>　育てていくことが重要である。</a:t>
-            </a:r>
-            <a:endParaRPr lang="en-US" sz="1800" dirty="0"/>
+              <a:t>　着実に転換が進んでいる。</a:t>
+            </a:r>
+            <a:endParaRPr lang="en-US" sz="1700" dirty="0"/>
           </a:p>
         </p:txBody>
       </p:sp>
@@ -6600,6 +6768,567 @@
                 <a:ea typeface="メイリオ" pitchFamily="34" charset="-122"/>
                 <a:cs typeface="メイリオ" pitchFamily="34" charset="-120"/>
               </a:rPr>
+              <a:t>　今後に向けて</a:t>
+            </a:r>
+            <a:endParaRPr lang="en-US" sz="3000" dirty="0"/>
+          </a:p>
+        </p:txBody>
+      </p:sp>
+      <p:sp>
+        <p:nvSpPr>
+          <p:cNvPr id="3" name="Text 1"/>
+          <p:cNvSpPr txBox="1"/>
+          <p:nvPr/>
+        </p:nvSpPr>
+        <p:spPr>
+          <a:xfrm>
+            <a:off x="475488" y="896112"/>
+            <a:ext cx="8193024" cy="777240"/>
+          </a:xfrm>
+          <a:prstGeom prst="rect">
+            <a:avLst/>
+          </a:prstGeom>
+          <a:noFill/>
+          <a:ln/>
+        </p:spPr>
+        <p:txBody>
+          <a:bodyPr wrap="square" lIns="0" tIns="0" rIns="0" bIns="0" rtlCol="0" anchor="t"/>
+          <a:lstStyle/>
+          <a:p>
+            <a:pPr algn="l" indent="0" marL="0">
+              <a:lnSpc>
+                <a:spcPct val="120000"/>
+              </a:lnSpc>
+              <a:buNone/>
+            </a:pPr>
+            <a:r>
+              <a:rPr lang="en-US" sz="1800" b="1" dirty="0">
+                <a:solidFill>
+                  <a:srgbClr val="EE7B08"/>
+                </a:solidFill>
+                <a:latin typeface="メイリオ" pitchFamily="34" charset="0"/>
+                <a:ea typeface="メイリオ" pitchFamily="34" charset="-122"/>
+                <a:cs typeface="メイリオ" pitchFamily="34" charset="-120"/>
+              </a:rPr>
+              <a:t>学力調査結果</a:t>
+            </a:r>
+            <a:pPr algn="l" indent="0" marL="0">
+              <a:lnSpc>
+                <a:spcPct val="120000"/>
+              </a:lnSpc>
+              <a:buNone/>
+            </a:pPr>
+            <a:r>
+              <a:rPr lang="en-US" sz="1800" b="1" dirty="0">
+                <a:solidFill>
+                  <a:srgbClr val="595959"/>
+                </a:solidFill>
+                <a:latin typeface="メイリオ" pitchFamily="34" charset="0"/>
+                <a:ea typeface="メイリオ" pitchFamily="34" charset="-122"/>
+                <a:cs typeface="メイリオ" pitchFamily="34" charset="-120"/>
+              </a:rPr>
+              <a:t>　と　</a:t>
+            </a:r>
+            <a:pPr algn="l" indent="0" marL="0">
+              <a:lnSpc>
+                <a:spcPct val="120000"/>
+              </a:lnSpc>
+              <a:buNone/>
+            </a:pPr>
+            <a:r>
+              <a:rPr lang="en-US" sz="1800" b="1" dirty="0">
+                <a:solidFill>
+                  <a:srgbClr val="EE7B08"/>
+                </a:solidFill>
+                <a:latin typeface="メイリオ" pitchFamily="34" charset="0"/>
+                <a:ea typeface="メイリオ" pitchFamily="34" charset="-122"/>
+                <a:cs typeface="メイリオ" pitchFamily="34" charset="-120"/>
+              </a:rPr>
+              <a:t>今日の授業</a:t>
+            </a:r>
+            <a:pPr algn="l" indent="0" marL="0">
+              <a:lnSpc>
+                <a:spcPct val="120000"/>
+              </a:lnSpc>
+              <a:buNone/>
+            </a:pPr>
+            <a:r>
+              <a:rPr lang="en-US" sz="1800" b="1" dirty="0">
+                <a:solidFill>
+                  <a:srgbClr val="595959"/>
+                </a:solidFill>
+                <a:latin typeface="メイリオ" pitchFamily="34" charset="0"/>
+                <a:ea typeface="メイリオ" pitchFamily="34" charset="-122"/>
+                <a:cs typeface="メイリオ" pitchFamily="34" charset="-120"/>
+              </a:rPr>
+              <a:t>　をつなげて考えると、</a:t>
+            </a:r>
+            <a:endParaRPr lang="en-US" sz="1800" dirty="0"/>
+          </a:p>
+          <a:p>
+            <a:pPr algn="l" indent="0" marL="0">
+              <a:lnSpc>
+                <a:spcPct val="120000"/>
+              </a:lnSpc>
+              <a:buNone/>
+            </a:pPr>
+            <a:r>
+              <a:rPr lang="en-US" sz="1800" b="1" dirty="0">
+                <a:solidFill>
+                  <a:srgbClr val="595959"/>
+                </a:solidFill>
+                <a:latin typeface="メイリオ" pitchFamily="34" charset="0"/>
+                <a:ea typeface="メイリオ" pitchFamily="34" charset="-122"/>
+                <a:cs typeface="メイリオ" pitchFamily="34" charset="-120"/>
+              </a:rPr>
+              <a:t>今後さらに伸ばしたいのは</a:t>
+            </a:r>
+            <a:endParaRPr lang="en-US" sz="1800" dirty="0"/>
+          </a:p>
+        </p:txBody>
+      </p:sp>
+      <p:sp>
+        <p:nvSpPr>
+          <p:cNvPr id="4" name="Shape 2"/>
+          <p:cNvSpPr/>
+          <p:nvPr/>
+        </p:nvSpPr>
+        <p:spPr>
+          <a:xfrm>
+            <a:off x="475488" y="1755648"/>
+            <a:ext cx="8193024" cy="777240"/>
+          </a:xfrm>
+          <a:prstGeom prst="roundRect">
+            <a:avLst>
+              <a:gd name="adj" fmla="val 7059"/>
+            </a:avLst>
+          </a:prstGeom>
+          <a:solidFill>
+            <a:srgbClr val="E9F7F3"/>
+          </a:solidFill>
+          <a:ln w="12700">
+            <a:solidFill>
+              <a:srgbClr val="B9E5DA"/>
+            </a:solidFill>
+            <a:prstDash val="solid"/>
+          </a:ln>
+        </p:spPr>
+      </p:sp>
+      <p:sp>
+        <p:nvSpPr>
+          <p:cNvPr id="5" name="Text 3"/>
+          <p:cNvSpPr txBox="1"/>
+          <p:nvPr/>
+        </p:nvSpPr>
+        <p:spPr>
+          <a:xfrm>
+            <a:off x="731520" y="1755648"/>
+            <a:ext cx="7680960" cy="777240"/>
+          </a:xfrm>
+          <a:prstGeom prst="rect">
+            <a:avLst/>
+          </a:prstGeom>
+          <a:noFill/>
+          <a:ln/>
+        </p:spPr>
+        <p:txBody>
+          <a:bodyPr wrap="square" lIns="0" tIns="0" rIns="0" bIns="0" rtlCol="0" anchor="ctr"/>
+          <a:lstStyle/>
+          <a:p>
+            <a:pPr algn="l" indent="0" marL="0">
+              <a:buNone/>
+            </a:pPr>
+            <a:r>
+              <a:rPr lang="en-US" sz="2300" b="1" dirty="0">
+                <a:solidFill>
+                  <a:srgbClr val="EE7B08"/>
+                </a:solidFill>
+                <a:latin typeface="メイリオ" pitchFamily="34" charset="0"/>
+                <a:ea typeface="メイリオ" pitchFamily="34" charset="-122"/>
+                <a:cs typeface="メイリオ" pitchFamily="34" charset="-120"/>
+              </a:rPr>
+              <a:t>「学びを自分事として捉える子ども」である。</a:t>
+            </a:r>
+            <a:endParaRPr lang="en-US" sz="2300" dirty="0"/>
+          </a:p>
+        </p:txBody>
+      </p:sp>
+      <p:sp>
+        <p:nvSpPr>
+          <p:cNvPr id="6" name="Text 4"/>
+          <p:cNvSpPr txBox="1"/>
+          <p:nvPr/>
+        </p:nvSpPr>
+        <p:spPr>
+          <a:xfrm>
+            <a:off x="475488" y="2670048"/>
+            <a:ext cx="8193024" cy="320040"/>
+          </a:xfrm>
+          <a:prstGeom prst="rect">
+            <a:avLst/>
+          </a:prstGeom>
+          <a:noFill/>
+          <a:ln/>
+        </p:spPr>
+        <p:txBody>
+          <a:bodyPr wrap="square" lIns="0" tIns="0" rIns="0" bIns="0" rtlCol="0" anchor="ctr"/>
+          <a:lstStyle/>
+          <a:p>
+            <a:pPr algn="l" indent="0" marL="0">
+              <a:buNone/>
+            </a:pPr>
+            <a:r>
+              <a:rPr lang="en-US" sz="1500" b="1" dirty="0">
+                <a:solidFill>
+                  <a:srgbClr val="808080"/>
+                </a:solidFill>
+                <a:latin typeface="メイリオ" pitchFamily="34" charset="0"/>
+                <a:ea typeface="メイリオ" pitchFamily="34" charset="-122"/>
+                <a:cs typeface="メイリオ" pitchFamily="34" charset="-120"/>
+              </a:rPr>
+              <a:t>そのためには</a:t>
+            </a:r>
+            <a:endParaRPr lang="en-US" sz="1500" dirty="0"/>
+          </a:p>
+        </p:txBody>
+      </p:sp>
+      <p:sp>
+        <p:nvSpPr>
+          <p:cNvPr id="7" name="Shape 5"/>
+          <p:cNvSpPr/>
+          <p:nvPr/>
+        </p:nvSpPr>
+        <p:spPr>
+          <a:xfrm>
+            <a:off x="475488" y="3054096"/>
+            <a:ext cx="2468880" cy="585216"/>
+          </a:xfrm>
+          <a:prstGeom prst="roundRect">
+            <a:avLst>
+              <a:gd name="adj" fmla="val 10938"/>
+            </a:avLst>
+          </a:prstGeom>
+          <a:solidFill>
+            <a:srgbClr val="E9F7F3"/>
+          </a:solidFill>
+          <a:ln w="12700">
+            <a:solidFill>
+              <a:srgbClr val="B9E5DA"/>
+            </a:solidFill>
+            <a:prstDash val="solid"/>
+          </a:ln>
+        </p:spPr>
+      </p:sp>
+      <p:sp>
+        <p:nvSpPr>
+          <p:cNvPr id="8" name="Text 6"/>
+          <p:cNvSpPr txBox="1"/>
+          <p:nvPr/>
+        </p:nvSpPr>
+        <p:spPr>
+          <a:xfrm>
+            <a:off x="475488" y="3054096"/>
+            <a:ext cx="2468880" cy="585216"/>
+          </a:xfrm>
+          <a:prstGeom prst="rect">
+            <a:avLst/>
+          </a:prstGeom>
+          <a:noFill/>
+          <a:ln/>
+        </p:spPr>
+        <p:txBody>
+          <a:bodyPr wrap="square" lIns="0" tIns="0" rIns="0" bIns="0" rtlCol="0" anchor="ctr"/>
+          <a:lstStyle/>
+          <a:p>
+            <a:pPr algn="ctr" indent="0" marL="0">
+              <a:lnSpc>
+                <a:spcPct val="115000"/>
+              </a:lnSpc>
+              <a:buNone/>
+            </a:pPr>
+            <a:r>
+              <a:rPr lang="en-US" sz="1600" b="1" dirty="0">
+                <a:solidFill>
+                  <a:srgbClr val="595959"/>
+                </a:solidFill>
+                <a:latin typeface="メイリオ" pitchFamily="34" charset="0"/>
+                <a:ea typeface="メイリオ" pitchFamily="34" charset="-122"/>
+                <a:cs typeface="メイリオ" pitchFamily="34" charset="-120"/>
+              </a:rPr>
+              <a:t>自己肯定感</a:t>
+            </a:r>
+            <a:endParaRPr lang="en-US" sz="1600" dirty="0"/>
+          </a:p>
+        </p:txBody>
+      </p:sp>
+      <p:sp>
+        <p:nvSpPr>
+          <p:cNvPr id="9" name="Shape 7"/>
+          <p:cNvSpPr/>
+          <p:nvPr/>
+        </p:nvSpPr>
+        <p:spPr>
+          <a:xfrm>
+            <a:off x="3218688" y="3054096"/>
+            <a:ext cx="2468880" cy="585216"/>
+          </a:xfrm>
+          <a:prstGeom prst="roundRect">
+            <a:avLst>
+              <a:gd name="adj" fmla="val 10938"/>
+            </a:avLst>
+          </a:prstGeom>
+          <a:solidFill>
+            <a:srgbClr val="E9F7F3"/>
+          </a:solidFill>
+          <a:ln w="12700">
+            <a:solidFill>
+              <a:srgbClr val="B9E5DA"/>
+            </a:solidFill>
+            <a:prstDash val="solid"/>
+          </a:ln>
+        </p:spPr>
+      </p:sp>
+      <p:sp>
+        <p:nvSpPr>
+          <p:cNvPr id="10" name="Text 8"/>
+          <p:cNvSpPr txBox="1"/>
+          <p:nvPr/>
+        </p:nvSpPr>
+        <p:spPr>
+          <a:xfrm>
+            <a:off x="3218688" y="3054096"/>
+            <a:ext cx="2468880" cy="585216"/>
+          </a:xfrm>
+          <a:prstGeom prst="rect">
+            <a:avLst/>
+          </a:prstGeom>
+          <a:noFill/>
+          <a:ln/>
+        </p:spPr>
+        <p:txBody>
+          <a:bodyPr wrap="square" lIns="0" tIns="0" rIns="0" bIns="0" rtlCol="0" anchor="ctr"/>
+          <a:lstStyle/>
+          <a:p>
+            <a:pPr algn="ctr" indent="0" marL="0">
+              <a:lnSpc>
+                <a:spcPct val="115000"/>
+              </a:lnSpc>
+              <a:buNone/>
+            </a:pPr>
+            <a:r>
+              <a:rPr lang="en-US" sz="1600" b="1" dirty="0">
+                <a:solidFill>
+                  <a:srgbClr val="595959"/>
+                </a:solidFill>
+                <a:latin typeface="メイリオ" pitchFamily="34" charset="0"/>
+                <a:ea typeface="メイリオ" pitchFamily="34" charset="-122"/>
+                <a:cs typeface="メイリオ" pitchFamily="34" charset="-120"/>
+              </a:rPr>
+              <a:t>対話・協働</a:t>
+            </a:r>
+            <a:endParaRPr lang="en-US" sz="1600" dirty="0"/>
+          </a:p>
+        </p:txBody>
+      </p:sp>
+      <p:sp>
+        <p:nvSpPr>
+          <p:cNvPr id="11" name="Shape 9"/>
+          <p:cNvSpPr/>
+          <p:nvPr/>
+        </p:nvSpPr>
+        <p:spPr>
+          <a:xfrm>
+            <a:off x="5961888" y="3054096"/>
+            <a:ext cx="2468880" cy="585216"/>
+          </a:xfrm>
+          <a:prstGeom prst="roundRect">
+            <a:avLst>
+              <a:gd name="adj" fmla="val 10938"/>
+            </a:avLst>
+          </a:prstGeom>
+          <a:solidFill>
+            <a:srgbClr val="E9F7F3"/>
+          </a:solidFill>
+          <a:ln w="12700">
+            <a:solidFill>
+              <a:srgbClr val="B9E5DA"/>
+            </a:solidFill>
+            <a:prstDash val="solid"/>
+          </a:ln>
+        </p:spPr>
+      </p:sp>
+      <p:sp>
+        <p:nvSpPr>
+          <p:cNvPr id="12" name="Text 10"/>
+          <p:cNvSpPr txBox="1"/>
+          <p:nvPr/>
+        </p:nvSpPr>
+        <p:spPr>
+          <a:xfrm>
+            <a:off x="5961888" y="3054096"/>
+            <a:ext cx="2468880" cy="585216"/>
+          </a:xfrm>
+          <a:prstGeom prst="rect">
+            <a:avLst/>
+          </a:prstGeom>
+          <a:noFill/>
+          <a:ln/>
+        </p:spPr>
+        <p:txBody>
+          <a:bodyPr wrap="square" lIns="0" tIns="0" rIns="0" bIns="0" rtlCol="0" anchor="ctr"/>
+          <a:lstStyle/>
+          <a:p>
+            <a:pPr algn="ctr" indent="0" marL="0">
+              <a:lnSpc>
+                <a:spcPct val="115000"/>
+              </a:lnSpc>
+              <a:buNone/>
+            </a:pPr>
+            <a:r>
+              <a:rPr lang="en-US" sz="1600" b="1" dirty="0">
+                <a:solidFill>
+                  <a:srgbClr val="595959"/>
+                </a:solidFill>
+                <a:latin typeface="メイリオ" pitchFamily="34" charset="0"/>
+                <a:ea typeface="メイリオ" pitchFamily="34" charset="-122"/>
+                <a:cs typeface="メイリオ" pitchFamily="34" charset="-120"/>
+              </a:rPr>
+              <a:t>学習の自己調整</a:t>
+            </a:r>
+            <a:endParaRPr lang="en-US" sz="1600" dirty="0"/>
+          </a:p>
+        </p:txBody>
+      </p:sp>
+      <p:sp>
+        <p:nvSpPr>
+          <p:cNvPr id="13" name="Text 11"/>
+          <p:cNvSpPr txBox="1"/>
+          <p:nvPr/>
+        </p:nvSpPr>
+        <p:spPr>
+          <a:xfrm>
+            <a:off x="475488" y="3840480"/>
+            <a:ext cx="8193024" cy="502920"/>
+          </a:xfrm>
+          <a:prstGeom prst="rect">
+            <a:avLst/>
+          </a:prstGeom>
+          <a:noFill/>
+          <a:ln/>
+        </p:spPr>
+        <p:txBody>
+          <a:bodyPr wrap="square" lIns="0" tIns="0" rIns="0" bIns="0" rtlCol="0" anchor="ctr"/>
+          <a:lstStyle/>
+          <a:p>
+            <a:pPr algn="l" indent="0" marL="0">
+              <a:buNone/>
+            </a:pPr>
+            <a:r>
+              <a:rPr lang="en-US" sz="1800" b="1" dirty="0">
+                <a:solidFill>
+                  <a:srgbClr val="595959"/>
+                </a:solidFill>
+                <a:latin typeface="メイリオ" pitchFamily="34" charset="0"/>
+                <a:ea typeface="メイリオ" pitchFamily="34" charset="-122"/>
+                <a:cs typeface="メイリオ" pitchFamily="34" charset="-120"/>
+              </a:rPr>
+              <a:t>を　</a:t>
+            </a:r>
+            <a:pPr algn="l" indent="0" marL="0">
+              <a:buNone/>
+            </a:pPr>
+            <a:r>
+              <a:rPr lang="en-US" sz="1800" b="1" dirty="0">
+                <a:solidFill>
+                  <a:srgbClr val="EE7B08"/>
+                </a:solidFill>
+                <a:latin typeface="メイリオ" pitchFamily="34" charset="0"/>
+                <a:ea typeface="メイリオ" pitchFamily="34" charset="-122"/>
+                <a:cs typeface="メイリオ" pitchFamily="34" charset="-120"/>
+              </a:rPr>
+              <a:t>９年間で系統的に</a:t>
+            </a:r>
+            <a:pPr algn="l" indent="0" marL="0">
+              <a:buNone/>
+            </a:pPr>
+            <a:r>
+              <a:rPr lang="en-US" sz="1800" b="1" dirty="0">
+                <a:solidFill>
+                  <a:srgbClr val="595959"/>
+                </a:solidFill>
+                <a:latin typeface="メイリオ" pitchFamily="34" charset="0"/>
+                <a:ea typeface="メイリオ" pitchFamily="34" charset="-122"/>
+                <a:cs typeface="メイリオ" pitchFamily="34" charset="-120"/>
+              </a:rPr>
+              <a:t>　育てていくことが重要である。</a:t>
+            </a:r>
+            <a:endParaRPr lang="en-US" sz="1800" dirty="0"/>
+          </a:p>
+        </p:txBody>
+      </p:sp>
+    </p:spTree>
+  </p:cSld>
+  <p:clrMapOvr>
+    <a:masterClrMapping/>
+  </p:clrMapOvr>
+</p:sld>
+</file>
+
+<file path=ppt/slides/slide18.xml><?xml version="1.0" encoding="utf-8"?>
+<p:sld xmlns:a="http://schemas.openxmlformats.org/drawingml/2006/main" xmlns:r="http://schemas.openxmlformats.org/officeDocument/2006/relationships" xmlns:p="http://schemas.openxmlformats.org/presentationml/2006/main">
+  <p:cSld name="Slide 18">
+    <p:spTree>
+      <p:nvGrpSpPr>
+        <p:cNvPr id="1" name=""/>
+        <p:cNvGrpSpPr/>
+        <p:nvPr/>
+      </p:nvGrpSpPr>
+      <p:grpSpPr>
+        <a:xfrm>
+          <a:off x="0" y="0"/>
+          <a:ext cx="0" cy="0"/>
+          <a:chOff x="0" y="0"/>
+          <a:chExt cx="0" cy="0"/>
+        </a:xfrm>
+      </p:grpSpPr>
+      <p:sp>
+        <p:nvSpPr>
+          <p:cNvPr id="2" name="Text 0"/>
+          <p:cNvSpPr txBox="1"/>
+          <p:nvPr/>
+        </p:nvSpPr>
+        <p:spPr>
+          <a:xfrm>
+            <a:off x="0" y="-9144"/>
+            <a:ext cx="9144000" cy="612648"/>
+          </a:xfrm>
+          <a:prstGeom prst="rect">
+            <a:avLst/>
+          </a:prstGeom>
+          <a:solidFill>
+            <a:srgbClr val="44C1A3"/>
+          </a:solidFill>
+          <a:ln/>
+        </p:spPr>
+        <p:txBody>
+          <a:bodyPr wrap="square" lIns="0" tIns="0" rIns="0" bIns="0" rtlCol="0" anchor="ctr"/>
+          <a:lstStyle/>
+          <a:p>
+            <a:pPr algn="l" indent="0" marL="0">
+              <a:lnSpc>
+                <a:spcPct val="120000"/>
+              </a:lnSpc>
+              <a:buNone/>
+            </a:pPr>
+            <a:r>
+              <a:rPr lang="en-US" sz="3000" b="1" dirty="0">
+                <a:solidFill>
+                  <a:srgbClr val="FFFFFF"/>
+                </a:solidFill>
+                <a:latin typeface="メイリオ" pitchFamily="34" charset="0"/>
+                <a:ea typeface="メイリオ" pitchFamily="34" charset="-122"/>
+                <a:cs typeface="メイリオ" pitchFamily="34" charset="-120"/>
+              </a:rPr>
               <a:t>　まとめ</a:t>
             </a:r>
             <a:endParaRPr lang="en-US" sz="3000" dirty="0"/>
@@ -11647,7 +12376,7 @@
                 <a:ea typeface="メイリオ" pitchFamily="34" charset="-122"/>
                 <a:cs typeface="メイリオ" pitchFamily="34" charset="-120"/>
               </a:rPr>
-              <a:t>　学力調査結果から見える強み</a:t>
+              <a:t>　本校と練馬区の比較</a:t>
             </a:r>
             <a:endParaRPr lang="en-US" sz="3000" dirty="0"/>
           </a:p>
@@ -11655,153 +12384,18 @@
       </p:sp>
       <p:sp>
         <p:nvSpPr>
-          <p:cNvPr id="3" name="Text 1"/>
-          <p:cNvSpPr txBox="1"/>
-          <p:nvPr/>
-        </p:nvSpPr>
-        <p:spPr>
-          <a:xfrm>
-            <a:off x="475488" y="1417320"/>
-            <a:ext cx="8193024" cy="868680"/>
-          </a:xfrm>
-          <a:prstGeom prst="rect">
-            <a:avLst/>
-          </a:prstGeom>
-          <a:noFill/>
-          <a:ln/>
-        </p:spPr>
-        <p:txBody>
-          <a:bodyPr wrap="square" lIns="0" tIns="0" rIns="0" bIns="0" rtlCol="0" anchor="t"/>
-          <a:lstStyle/>
-          <a:p>
-            <a:pPr algn="l" indent="0" marL="0">
-              <a:lnSpc>
-                <a:spcPct val="120000"/>
-              </a:lnSpc>
-              <a:buNone/>
-            </a:pPr>
-            <a:r>
-              <a:rPr lang="en-US" sz="2000" b="1" dirty="0">
-                <a:solidFill>
-                  <a:srgbClr val="595959"/>
-                </a:solidFill>
-                <a:latin typeface="メイリオ" pitchFamily="34" charset="0"/>
-                <a:ea typeface="メイリオ" pitchFamily="34" charset="-122"/>
-                <a:cs typeface="メイリオ" pitchFamily="34" charset="-120"/>
-              </a:rPr>
-              <a:t>学力調査結果は「結果」である。</a:t>
-            </a:r>
-            <a:endParaRPr lang="en-US" sz="2000" dirty="0"/>
-          </a:p>
-          <a:p>
-            <a:pPr algn="l" indent="0" marL="0">
-              <a:lnSpc>
-                <a:spcPct val="120000"/>
-              </a:lnSpc>
-              <a:buNone/>
-            </a:pPr>
-            <a:r>
-              <a:rPr lang="en-US" sz="2000" b="1" dirty="0">
-                <a:solidFill>
-                  <a:srgbClr val="595959"/>
-                </a:solidFill>
-                <a:latin typeface="メイリオ" pitchFamily="34" charset="0"/>
-                <a:ea typeface="メイリオ" pitchFamily="34" charset="-122"/>
-                <a:cs typeface="メイリオ" pitchFamily="34" charset="-120"/>
-              </a:rPr>
-              <a:t>では、</a:t>
-            </a:r>
-            <a:pPr algn="l" indent="0" marL="0">
-              <a:lnSpc>
-                <a:spcPct val="120000"/>
-              </a:lnSpc>
-              <a:buNone/>
-            </a:pPr>
-            <a:r>
-              <a:rPr lang="en-US" sz="2000" b="1" dirty="0">
-                <a:solidFill>
-                  <a:srgbClr val="EE7B08"/>
-                </a:solidFill>
-                <a:latin typeface="メイリオ" pitchFamily="34" charset="0"/>
-                <a:ea typeface="メイリオ" pitchFamily="34" charset="-122"/>
-                <a:cs typeface="メイリオ" pitchFamily="34" charset="-120"/>
-              </a:rPr>
-              <a:t>その結果を生み出した要因は何か</a:t>
-            </a:r>
-            <a:pPr algn="l" indent="0" marL="0">
-              <a:lnSpc>
-                <a:spcPct val="120000"/>
-              </a:lnSpc>
-              <a:buNone/>
-            </a:pPr>
-            <a:r>
-              <a:rPr lang="en-US" sz="2000" b="1" dirty="0">
-                <a:solidFill>
-                  <a:srgbClr val="595959"/>
-                </a:solidFill>
-                <a:latin typeface="メイリオ" pitchFamily="34" charset="0"/>
-                <a:ea typeface="メイリオ" pitchFamily="34" charset="-122"/>
-                <a:cs typeface="メイリオ" pitchFamily="34" charset="-120"/>
-              </a:rPr>
-              <a:t>。</a:t>
-            </a:r>
-            <a:endParaRPr lang="en-US" sz="2000" dirty="0"/>
-          </a:p>
-        </p:txBody>
-      </p:sp>
-      <p:sp>
-        <p:nvSpPr>
-          <p:cNvPr id="4" name="Text 2"/>
-          <p:cNvSpPr txBox="1"/>
-          <p:nvPr/>
-        </p:nvSpPr>
-        <p:spPr>
-          <a:xfrm>
-            <a:off x="475488" y="2286000"/>
-            <a:ext cx="8193024" cy="347472"/>
-          </a:xfrm>
-          <a:prstGeom prst="rect">
-            <a:avLst/>
-          </a:prstGeom>
-          <a:noFill/>
-          <a:ln/>
-        </p:spPr>
-        <p:txBody>
-          <a:bodyPr wrap="square" lIns="0" tIns="0" rIns="0" bIns="0" rtlCol="0" anchor="ctr"/>
-          <a:lstStyle/>
-          <a:p>
-            <a:pPr algn="l" indent="0" marL="0">
-              <a:buNone/>
-            </a:pPr>
-            <a:r>
-              <a:rPr lang="en-US" sz="1500" b="1" dirty="0">
-                <a:solidFill>
-                  <a:srgbClr val="808080"/>
-                </a:solidFill>
-                <a:latin typeface="メイリオ" pitchFamily="34" charset="0"/>
-                <a:ea typeface="メイリオ" pitchFamily="34" charset="-122"/>
-                <a:cs typeface="メイリオ" pitchFamily="34" charset="-120"/>
-              </a:rPr>
-              <a:t>本日の授業から、次の３つが見えてきた。</a:t>
-            </a:r>
-            <a:endParaRPr lang="en-US" sz="1500" dirty="0"/>
-          </a:p>
-        </p:txBody>
-      </p:sp>
-      <p:sp>
-        <p:nvSpPr>
-          <p:cNvPr id="5" name="Shape 3"/>
+          <p:cNvPr id="3" name="Shape 1"/>
           <p:cNvSpPr/>
           <p:nvPr/>
         </p:nvSpPr>
         <p:spPr>
           <a:xfrm>
-            <a:off x="475488" y="2724912"/>
-            <a:ext cx="2468880" cy="1417320"/>
+            <a:off x="320040" y="1417320"/>
+            <a:ext cx="2697480" cy="2560320"/>
           </a:xfrm>
           <a:prstGeom prst="roundRect">
             <a:avLst>
-              <a:gd name="adj" fmla="val 3871"/>
+              <a:gd name="adj" fmla="val 2143"/>
             </a:avLst>
           </a:prstGeom>
           <a:solidFill>
@@ -11817,14 +12411,14 @@
       </p:sp>
       <p:sp>
         <p:nvSpPr>
-          <p:cNvPr id="6" name="Shape 4"/>
+          <p:cNvPr id="4" name="Shape 2"/>
           <p:cNvSpPr/>
           <p:nvPr/>
         </p:nvSpPr>
         <p:spPr>
           <a:xfrm>
-            <a:off x="1481328" y="2889504"/>
-            <a:ext cx="457200" cy="457200"/>
+            <a:off x="466344" y="1517904"/>
+            <a:ext cx="365760" cy="365760"/>
           </a:xfrm>
           <a:prstGeom prst="ellipse">
             <a:avLst/>
@@ -11837,14 +12431,154 @@
       </p:sp>
       <p:sp>
         <p:nvSpPr>
+          <p:cNvPr id="5" name="Text 3"/>
+          <p:cNvSpPr txBox="1"/>
+          <p:nvPr/>
+        </p:nvSpPr>
+        <p:spPr>
+          <a:xfrm>
+            <a:off x="466344" y="1517904"/>
+            <a:ext cx="365760" cy="365760"/>
+          </a:xfrm>
+          <a:prstGeom prst="rect">
+            <a:avLst/>
+          </a:prstGeom>
+          <a:noFill/>
+          <a:ln/>
+        </p:spPr>
+        <p:txBody>
+          <a:bodyPr wrap="square" lIns="0" tIns="0" rIns="0" bIns="0" rtlCol="0" anchor="ctr"/>
+          <a:lstStyle/>
+          <a:p>
+            <a:pPr algn="ctr" indent="0" marL="0">
+              <a:buNone/>
+            </a:pPr>
+            <a:r>
+              <a:rPr lang="en-US" sz="1800" b="1" dirty="0">
+                <a:solidFill>
+                  <a:srgbClr val="FFFFFF"/>
+                </a:solidFill>
+                <a:latin typeface="メイリオ" pitchFamily="34" charset="0"/>
+                <a:ea typeface="メイリオ" pitchFamily="34" charset="-122"/>
+                <a:cs typeface="メイリオ" pitchFamily="34" charset="-120"/>
+              </a:rPr>
+              <a:t>①</a:t>
+            </a:r>
+            <a:endParaRPr lang="en-US" sz="1800" dirty="0"/>
+          </a:p>
+        </p:txBody>
+      </p:sp>
+      <p:sp>
+        <p:nvSpPr>
+          <p:cNvPr id="6" name="Text 4"/>
+          <p:cNvSpPr txBox="1"/>
+          <p:nvPr/>
+        </p:nvSpPr>
+        <p:spPr>
+          <a:xfrm>
+            <a:off x="886968" y="1517904"/>
+            <a:ext cx="1984248" cy="365760"/>
+          </a:xfrm>
+          <a:prstGeom prst="rect">
+            <a:avLst/>
+          </a:prstGeom>
+          <a:noFill/>
+          <a:ln/>
+        </p:spPr>
+        <p:txBody>
+          <a:bodyPr wrap="square" lIns="0" tIns="0" rIns="0" bIns="0" rtlCol="0" anchor="ctr"/>
+          <a:lstStyle/>
+          <a:p>
+            <a:pPr algn="l" indent="0" marL="0">
+              <a:buNone/>
+            </a:pPr>
+            <a:r>
+              <a:rPr lang="en-US" sz="1500" b="1" dirty="0">
+                <a:solidFill>
+                  <a:srgbClr val="44C1A3"/>
+                </a:solidFill>
+                <a:latin typeface="メイリオ" pitchFamily="34" charset="0"/>
+                <a:ea typeface="メイリオ" pitchFamily="34" charset="-122"/>
+                <a:cs typeface="メイリオ" pitchFamily="34" charset="-120"/>
+              </a:rPr>
+              <a:t>自己肯定感</a:t>
+            </a:r>
+            <a:endParaRPr lang="en-US" sz="1500" dirty="0"/>
+          </a:p>
+        </p:txBody>
+      </p:sp>
+      <p:sp>
+        <p:nvSpPr>
           <p:cNvPr id="7" name="Text 5"/>
           <p:cNvSpPr txBox="1"/>
           <p:nvPr/>
         </p:nvSpPr>
         <p:spPr>
           <a:xfrm>
-            <a:off x="1481328" y="2889504"/>
-            <a:ext cx="457200" cy="457200"/>
+            <a:off x="466344" y="1956816"/>
+            <a:ext cx="2404872" cy="420624"/>
+          </a:xfrm>
+          <a:prstGeom prst="rect">
+            <a:avLst/>
+          </a:prstGeom>
+          <a:noFill/>
+          <a:ln/>
+        </p:spPr>
+        <p:txBody>
+          <a:bodyPr wrap="square" lIns="0" tIns="0" rIns="0" bIns="0" rtlCol="0" anchor="t"/>
+          <a:lstStyle/>
+          <a:p>
+            <a:pPr algn="l" indent="0" marL="0">
+              <a:lnSpc>
+                <a:spcPct val="115000"/>
+              </a:lnSpc>
+              <a:buNone/>
+            </a:pPr>
+            <a:r>
+              <a:rPr lang="en-US" sz="1050" b="1" dirty="0">
+                <a:solidFill>
+                  <a:srgbClr val="808080"/>
+                </a:solidFill>
+                <a:latin typeface="メイリオ" pitchFamily="34" charset="0"/>
+                <a:ea typeface="メイリオ" pitchFamily="34" charset="-122"/>
+                <a:cs typeface="メイリオ" pitchFamily="34" charset="-120"/>
+              </a:rPr>
+              <a:t>自分には、よいところが</a:t>
+            </a:r>
+            <a:endParaRPr lang="en-US" sz="1050" dirty="0"/>
+          </a:p>
+          <a:p>
+            <a:pPr algn="l" indent="0" marL="0">
+              <a:lnSpc>
+                <a:spcPct val="115000"/>
+              </a:lnSpc>
+              <a:buNone/>
+            </a:pPr>
+            <a:r>
+              <a:rPr lang="en-US" sz="1050" b="1" dirty="0">
+                <a:solidFill>
+                  <a:srgbClr val="808080"/>
+                </a:solidFill>
+                <a:latin typeface="メイリオ" pitchFamily="34" charset="0"/>
+                <a:ea typeface="メイリオ" pitchFamily="34" charset="-122"/>
+                <a:cs typeface="メイリオ" pitchFamily="34" charset="-120"/>
+              </a:rPr>
+              <a:t>あると思いますか</a:t>
+            </a:r>
+            <a:endParaRPr lang="en-US" sz="1050" dirty="0"/>
+          </a:p>
+        </p:txBody>
+      </p:sp>
+      <p:sp>
+        <p:nvSpPr>
+          <p:cNvPr id="8" name="Text 6"/>
+          <p:cNvSpPr txBox="1"/>
+          <p:nvPr/>
+        </p:nvSpPr>
+        <p:spPr>
+          <a:xfrm>
+            <a:off x="466344" y="2450592"/>
+            <a:ext cx="2404872" cy="201168"/>
           </a:xfrm>
           <a:prstGeom prst="rect">
             <a:avLst/>
@@ -11856,60 +12590,21 @@
           <a:bodyPr wrap="square" lIns="0" tIns="0" rIns="0" bIns="0" rtlCol="0" anchor="ctr"/>
           <a:lstStyle/>
           <a:p>
-            <a:pPr algn="ctr" indent="0" marL="0">
-              <a:buNone/>
-            </a:pPr>
-            <a:r>
-              <a:rPr lang="en-US" sz="2300" b="1" dirty="0">
-                <a:solidFill>
-                  <a:srgbClr val="FFFFFF"/>
-                </a:solidFill>
-                <a:latin typeface="メイリオ" pitchFamily="34" charset="0"/>
-                <a:ea typeface="メイリオ" pitchFamily="34" charset="-122"/>
-                <a:cs typeface="メイリオ" pitchFamily="34" charset="-120"/>
-              </a:rPr>
-              <a:t>①</a:t>
-            </a:r>
-            <a:endParaRPr lang="en-US" sz="2300" dirty="0"/>
-          </a:p>
-        </p:txBody>
-      </p:sp>
-      <p:sp>
-        <p:nvSpPr>
-          <p:cNvPr id="8" name="Text 6"/>
-          <p:cNvSpPr txBox="1"/>
-          <p:nvPr/>
-        </p:nvSpPr>
-        <p:spPr>
-          <a:xfrm>
-            <a:off x="566928" y="3438144"/>
-            <a:ext cx="2286000" cy="502920"/>
-          </a:xfrm>
-          <a:prstGeom prst="rect">
-            <a:avLst/>
-          </a:prstGeom>
-          <a:noFill/>
-          <a:ln/>
-        </p:spPr>
-        <p:txBody>
-          <a:bodyPr wrap="square" lIns="0" tIns="0" rIns="0" bIns="0" rtlCol="0" anchor="ctr"/>
-          <a:lstStyle/>
-          <a:p>
-            <a:pPr algn="ctr" indent="0" marL="0">
-              <a:buNone/>
-            </a:pPr>
-            <a:r>
-              <a:rPr lang="en-US" sz="1800" b="1" dirty="0">
-                <a:solidFill>
-                  <a:srgbClr val="EE7B08"/>
-                </a:solidFill>
-                <a:latin typeface="メイリオ" pitchFamily="34" charset="0"/>
-                <a:ea typeface="メイリオ" pitchFamily="34" charset="-122"/>
-                <a:cs typeface="メイリオ" pitchFamily="34" charset="-120"/>
-              </a:rPr>
-              <a:t>自己肯定感</a:t>
-            </a:r>
-            <a:endParaRPr lang="en-US" sz="1800" dirty="0"/>
+            <a:pPr algn="l" indent="0" marL="0">
+              <a:buNone/>
+            </a:pPr>
+            <a:r>
+              <a:rPr lang="en-US" sz="1050" b="1" dirty="0">
+                <a:solidFill>
+                  <a:srgbClr val="808080"/>
+                </a:solidFill>
+                <a:latin typeface="メイリオ" pitchFamily="34" charset="0"/>
+                <a:ea typeface="メイリオ" pitchFamily="34" charset="-122"/>
+                <a:cs typeface="メイリオ" pitchFamily="34" charset="-120"/>
+              </a:rPr>
+              <a:t>小学部（６年）</a:t>
+            </a:r>
+            <a:endParaRPr lang="en-US" sz="1050" dirty="0"/>
           </a:p>
         </p:txBody>
       </p:sp>
@@ -11921,12 +12616,393 @@
         </p:nvSpPr>
         <p:spPr>
           <a:xfrm>
-            <a:off x="3218688" y="2724912"/>
-            <a:ext cx="2468880" cy="1417320"/>
+            <a:off x="466344" y="2688336"/>
+            <a:ext cx="859536" cy="310896"/>
           </a:xfrm>
           <a:prstGeom prst="roundRect">
             <a:avLst>
-              <a:gd name="adj" fmla="val 3871"/>
+              <a:gd name="adj" fmla="val 14706"/>
+            </a:avLst>
+          </a:prstGeom>
+          <a:solidFill>
+            <a:srgbClr val="FFFFFF"/>
+          </a:solidFill>
+          <a:ln w="12700">
+            <a:solidFill>
+              <a:srgbClr val="F6CFA4"/>
+            </a:solidFill>
+            <a:prstDash val="dash"/>
+          </a:ln>
+        </p:spPr>
+      </p:sp>
+      <p:sp>
+        <p:nvSpPr>
+          <p:cNvPr id="10" name="Text 8"/>
+          <p:cNvSpPr txBox="1"/>
+          <p:nvPr/>
+        </p:nvSpPr>
+        <p:spPr>
+          <a:xfrm>
+            <a:off x="466344" y="2688336"/>
+            <a:ext cx="859536" cy="310896"/>
+          </a:xfrm>
+          <a:prstGeom prst="rect">
+            <a:avLst/>
+          </a:prstGeom>
+          <a:noFill/>
+          <a:ln/>
+        </p:spPr>
+        <p:txBody>
+          <a:bodyPr wrap="square" lIns="0" tIns="0" rIns="0" bIns="0" rtlCol="0" anchor="ctr"/>
+          <a:lstStyle/>
+          <a:p>
+            <a:pPr algn="ctr" indent="0" marL="0">
+              <a:buNone/>
+            </a:pPr>
+            <a:r>
+              <a:rPr lang="en-US" sz="1100" b="1" dirty="0">
+                <a:solidFill>
+                  <a:srgbClr val="F6CFA4"/>
+                </a:solidFill>
+                <a:latin typeface="メイリオ" pitchFamily="34" charset="0"/>
+                <a:ea typeface="メイリオ" pitchFamily="34" charset="-122"/>
+                <a:cs typeface="メイリオ" pitchFamily="34" charset="-120"/>
+              </a:rPr>
+              <a:t>記入</a:t>
+            </a:r>
+            <a:endParaRPr lang="en-US" sz="1100" dirty="0"/>
+          </a:p>
+        </p:txBody>
+      </p:sp>
+      <p:sp>
+        <p:nvSpPr>
+          <p:cNvPr id="11" name="Text 9"/>
+          <p:cNvSpPr txBox="1"/>
+          <p:nvPr/>
+        </p:nvSpPr>
+        <p:spPr>
+          <a:xfrm>
+            <a:off x="1435608" y="2651760"/>
+            <a:ext cx="731520" cy="384048"/>
+          </a:xfrm>
+          <a:prstGeom prst="rect">
+            <a:avLst/>
+          </a:prstGeom>
+          <a:noFill/>
+          <a:ln/>
+        </p:spPr>
+        <p:txBody>
+          <a:bodyPr wrap="square" lIns="0" tIns="0" rIns="0" bIns="0" rtlCol="0" anchor="ctr"/>
+          <a:lstStyle/>
+          <a:p>
+            <a:pPr algn="l" indent="0" marL="0">
+              <a:buNone/>
+            </a:pPr>
+            <a:r>
+              <a:rPr lang="en-US" sz="1100" b="1" dirty="0">
+                <a:solidFill>
+                  <a:srgbClr val="808080"/>
+                </a:solidFill>
+                <a:latin typeface="メイリオ" pitchFamily="34" charset="0"/>
+                <a:ea typeface="メイリオ" pitchFamily="34" charset="-122"/>
+                <a:cs typeface="メイリオ" pitchFamily="34" charset="-120"/>
+              </a:rPr>
+              <a:t>区 86.4</a:t>
+            </a:r>
+            <a:endParaRPr lang="en-US" sz="1100" dirty="0"/>
+          </a:p>
+        </p:txBody>
+      </p:sp>
+      <p:sp>
+        <p:nvSpPr>
+          <p:cNvPr id="12" name="Shape 10"/>
+          <p:cNvSpPr/>
+          <p:nvPr/>
+        </p:nvSpPr>
+        <p:spPr>
+          <a:xfrm>
+            <a:off x="2194560" y="2688336"/>
+            <a:ext cx="676656" cy="310896"/>
+          </a:xfrm>
+          <a:prstGeom prst="roundRect">
+            <a:avLst>
+              <a:gd name="adj" fmla="val 14706"/>
+            </a:avLst>
+          </a:prstGeom>
+          <a:solidFill>
+            <a:srgbClr val="F2F2F2"/>
+          </a:solidFill>
+          <a:ln w="12700">
+            <a:solidFill>
+              <a:srgbClr val="DDDDDD"/>
+            </a:solidFill>
+            <a:prstDash val="solid"/>
+          </a:ln>
+        </p:spPr>
+      </p:sp>
+      <p:sp>
+        <p:nvSpPr>
+          <p:cNvPr id="13" name="Text 11"/>
+          <p:cNvSpPr txBox="1"/>
+          <p:nvPr/>
+        </p:nvSpPr>
+        <p:spPr>
+          <a:xfrm>
+            <a:off x="2194560" y="2688336"/>
+            <a:ext cx="676656" cy="310896"/>
+          </a:xfrm>
+          <a:prstGeom prst="rect">
+            <a:avLst/>
+          </a:prstGeom>
+          <a:noFill/>
+          <a:ln/>
+        </p:spPr>
+        <p:txBody>
+          <a:bodyPr wrap="square" lIns="0" tIns="0" rIns="0" bIns="0" rtlCol="0" anchor="ctr"/>
+          <a:lstStyle/>
+          <a:p>
+            <a:pPr algn="ctr" indent="0" marL="0">
+              <a:buNone/>
+            </a:pPr>
+            <a:r>
+              <a:rPr lang="en-US" sz="1200" b="1" dirty="0">
+                <a:solidFill>
+                  <a:srgbClr val="808080"/>
+                </a:solidFill>
+                <a:latin typeface="メイリオ" pitchFamily="34" charset="0"/>
+                <a:ea typeface="メイリオ" pitchFamily="34" charset="-122"/>
+                <a:cs typeface="メイリオ" pitchFamily="34" charset="-120"/>
+              </a:rPr>
+              <a:t>―</a:t>
+            </a:r>
+            <a:endParaRPr lang="en-US" sz="1200" dirty="0"/>
+          </a:p>
+        </p:txBody>
+      </p:sp>
+      <p:sp>
+        <p:nvSpPr>
+          <p:cNvPr id="14" name="Text 12"/>
+          <p:cNvSpPr txBox="1"/>
+          <p:nvPr/>
+        </p:nvSpPr>
+        <p:spPr>
+          <a:xfrm>
+            <a:off x="466344" y="3200400"/>
+            <a:ext cx="2404872" cy="201168"/>
+          </a:xfrm>
+          <a:prstGeom prst="rect">
+            <a:avLst/>
+          </a:prstGeom>
+          <a:noFill/>
+          <a:ln/>
+        </p:spPr>
+        <p:txBody>
+          <a:bodyPr wrap="square" lIns="0" tIns="0" rIns="0" bIns="0" rtlCol="0" anchor="ctr"/>
+          <a:lstStyle/>
+          <a:p>
+            <a:pPr algn="l" indent="0" marL="0">
+              <a:buNone/>
+            </a:pPr>
+            <a:r>
+              <a:rPr lang="en-US" sz="1050" b="1" dirty="0">
+                <a:solidFill>
+                  <a:srgbClr val="808080"/>
+                </a:solidFill>
+                <a:latin typeface="メイリオ" pitchFamily="34" charset="0"/>
+                <a:ea typeface="メイリオ" pitchFamily="34" charset="-122"/>
+                <a:cs typeface="メイリオ" pitchFamily="34" charset="-120"/>
+              </a:rPr>
+              <a:t>中学部（９年）</a:t>
+            </a:r>
+            <a:endParaRPr lang="en-US" sz="1050" dirty="0"/>
+          </a:p>
+        </p:txBody>
+      </p:sp>
+      <p:sp>
+        <p:nvSpPr>
+          <p:cNvPr id="15" name="Shape 13"/>
+          <p:cNvSpPr/>
+          <p:nvPr/>
+        </p:nvSpPr>
+        <p:spPr>
+          <a:xfrm>
+            <a:off x="466344" y="3438144"/>
+            <a:ext cx="859536" cy="310896"/>
+          </a:xfrm>
+          <a:prstGeom prst="roundRect">
+            <a:avLst>
+              <a:gd name="adj" fmla="val 14706"/>
+            </a:avLst>
+          </a:prstGeom>
+          <a:solidFill>
+            <a:srgbClr val="FFFFFF"/>
+          </a:solidFill>
+          <a:ln w="12700">
+            <a:solidFill>
+              <a:srgbClr val="F6CFA4"/>
+            </a:solidFill>
+            <a:prstDash val="dash"/>
+          </a:ln>
+        </p:spPr>
+      </p:sp>
+      <p:sp>
+        <p:nvSpPr>
+          <p:cNvPr id="16" name="Text 14"/>
+          <p:cNvSpPr txBox="1"/>
+          <p:nvPr/>
+        </p:nvSpPr>
+        <p:spPr>
+          <a:xfrm>
+            <a:off x="466344" y="3438144"/>
+            <a:ext cx="859536" cy="310896"/>
+          </a:xfrm>
+          <a:prstGeom prst="rect">
+            <a:avLst/>
+          </a:prstGeom>
+          <a:noFill/>
+          <a:ln/>
+        </p:spPr>
+        <p:txBody>
+          <a:bodyPr wrap="square" lIns="0" tIns="0" rIns="0" bIns="0" rtlCol="0" anchor="ctr"/>
+          <a:lstStyle/>
+          <a:p>
+            <a:pPr algn="ctr" indent="0" marL="0">
+              <a:buNone/>
+            </a:pPr>
+            <a:r>
+              <a:rPr lang="en-US" sz="1100" b="1" dirty="0">
+                <a:solidFill>
+                  <a:srgbClr val="F6CFA4"/>
+                </a:solidFill>
+                <a:latin typeface="メイリオ" pitchFamily="34" charset="0"/>
+                <a:ea typeface="メイリオ" pitchFamily="34" charset="-122"/>
+                <a:cs typeface="メイリオ" pitchFamily="34" charset="-120"/>
+              </a:rPr>
+              <a:t>記入</a:t>
+            </a:r>
+            <a:endParaRPr lang="en-US" sz="1100" dirty="0"/>
+          </a:p>
+        </p:txBody>
+      </p:sp>
+      <p:sp>
+        <p:nvSpPr>
+          <p:cNvPr id="17" name="Text 15"/>
+          <p:cNvSpPr txBox="1"/>
+          <p:nvPr/>
+        </p:nvSpPr>
+        <p:spPr>
+          <a:xfrm>
+            <a:off x="1435608" y="3401568"/>
+            <a:ext cx="731520" cy="384048"/>
+          </a:xfrm>
+          <a:prstGeom prst="rect">
+            <a:avLst/>
+          </a:prstGeom>
+          <a:noFill/>
+          <a:ln/>
+        </p:spPr>
+        <p:txBody>
+          <a:bodyPr wrap="square" lIns="0" tIns="0" rIns="0" bIns="0" rtlCol="0" anchor="ctr"/>
+          <a:lstStyle/>
+          <a:p>
+            <a:pPr algn="l" indent="0" marL="0">
+              <a:buNone/>
+            </a:pPr>
+            <a:r>
+              <a:rPr lang="en-US" sz="1100" b="1" dirty="0">
+                <a:solidFill>
+                  <a:srgbClr val="808080"/>
+                </a:solidFill>
+                <a:latin typeface="メイリオ" pitchFamily="34" charset="0"/>
+                <a:ea typeface="メイリオ" pitchFamily="34" charset="-122"/>
+                <a:cs typeface="メイリオ" pitchFamily="34" charset="-120"/>
+              </a:rPr>
+              <a:t>区 83.3</a:t>
+            </a:r>
+            <a:endParaRPr lang="en-US" sz="1100" dirty="0"/>
+          </a:p>
+        </p:txBody>
+      </p:sp>
+      <p:sp>
+        <p:nvSpPr>
+          <p:cNvPr id="18" name="Shape 16"/>
+          <p:cNvSpPr/>
+          <p:nvPr/>
+        </p:nvSpPr>
+        <p:spPr>
+          <a:xfrm>
+            <a:off x="2194560" y="3438144"/>
+            <a:ext cx="676656" cy="310896"/>
+          </a:xfrm>
+          <a:prstGeom prst="roundRect">
+            <a:avLst>
+              <a:gd name="adj" fmla="val 14706"/>
+            </a:avLst>
+          </a:prstGeom>
+          <a:solidFill>
+            <a:srgbClr val="F2F2F2"/>
+          </a:solidFill>
+          <a:ln w="12700">
+            <a:solidFill>
+              <a:srgbClr val="DDDDDD"/>
+            </a:solidFill>
+            <a:prstDash val="solid"/>
+          </a:ln>
+        </p:spPr>
+      </p:sp>
+      <p:sp>
+        <p:nvSpPr>
+          <p:cNvPr id="19" name="Text 17"/>
+          <p:cNvSpPr txBox="1"/>
+          <p:nvPr/>
+        </p:nvSpPr>
+        <p:spPr>
+          <a:xfrm>
+            <a:off x="2194560" y="3438144"/>
+            <a:ext cx="676656" cy="310896"/>
+          </a:xfrm>
+          <a:prstGeom prst="rect">
+            <a:avLst/>
+          </a:prstGeom>
+          <a:noFill/>
+          <a:ln/>
+        </p:spPr>
+        <p:txBody>
+          <a:bodyPr wrap="square" lIns="0" tIns="0" rIns="0" bIns="0" rtlCol="0" anchor="ctr"/>
+          <a:lstStyle/>
+          <a:p>
+            <a:pPr algn="ctr" indent="0" marL="0">
+              <a:buNone/>
+            </a:pPr>
+            <a:r>
+              <a:rPr lang="en-US" sz="1200" b="1" dirty="0">
+                <a:solidFill>
+                  <a:srgbClr val="808080"/>
+                </a:solidFill>
+                <a:latin typeface="メイリオ" pitchFamily="34" charset="0"/>
+                <a:ea typeface="メイリオ" pitchFamily="34" charset="-122"/>
+                <a:cs typeface="メイリオ" pitchFamily="34" charset="-120"/>
+              </a:rPr>
+              <a:t>―</a:t>
+            </a:r>
+            <a:endParaRPr lang="en-US" sz="1200" dirty="0"/>
+          </a:p>
+        </p:txBody>
+      </p:sp>
+      <p:sp>
+        <p:nvSpPr>
+          <p:cNvPr id="20" name="Shape 18"/>
+          <p:cNvSpPr/>
+          <p:nvPr/>
+        </p:nvSpPr>
+        <p:spPr>
+          <a:xfrm>
+            <a:off x="3227832" y="1417320"/>
+            <a:ext cx="2697480" cy="2560320"/>
+          </a:xfrm>
+          <a:prstGeom prst="roundRect">
+            <a:avLst>
+              <a:gd name="adj" fmla="val 2143"/>
             </a:avLst>
           </a:prstGeom>
           <a:solidFill>
@@ -11942,14 +13018,14 @@
       </p:sp>
       <p:sp>
         <p:nvSpPr>
-          <p:cNvPr id="10" name="Shape 8"/>
+          <p:cNvPr id="21" name="Shape 19"/>
           <p:cNvSpPr/>
           <p:nvPr/>
         </p:nvSpPr>
         <p:spPr>
           <a:xfrm>
-            <a:off x="4224528" y="2889504"/>
-            <a:ext cx="457200" cy="457200"/>
+            <a:off x="3374136" y="1517904"/>
+            <a:ext cx="365760" cy="365760"/>
           </a:xfrm>
           <a:prstGeom prst="ellipse">
             <a:avLst/>
@@ -11962,14 +13038,14 @@
       </p:sp>
       <p:sp>
         <p:nvSpPr>
-          <p:cNvPr id="11" name="Text 9"/>
-          <p:cNvSpPr txBox="1"/>
-          <p:nvPr/>
-        </p:nvSpPr>
-        <p:spPr>
-          <a:xfrm>
-            <a:off x="4224528" y="2889504"/>
-            <a:ext cx="457200" cy="457200"/>
+          <p:cNvPr id="22" name="Text 20"/>
+          <p:cNvSpPr txBox="1"/>
+          <p:nvPr/>
+        </p:nvSpPr>
+        <p:spPr>
+          <a:xfrm>
+            <a:off x="3374136" y="1517904"/>
+            <a:ext cx="365760" cy="365760"/>
           </a:xfrm>
           <a:prstGeom prst="rect">
             <a:avLst/>
@@ -11985,7 +13061,7 @@
               <a:buNone/>
             </a:pPr>
             <a:r>
-              <a:rPr lang="en-US" sz="2300" b="1" dirty="0">
+              <a:rPr lang="en-US" sz="1800" b="1" dirty="0">
                 <a:solidFill>
                   <a:srgbClr val="FFFFFF"/>
                 </a:solidFill>
@@ -11995,20 +13071,20 @@
               </a:rPr>
               <a:t>②</a:t>
             </a:r>
-            <a:endParaRPr lang="en-US" sz="2300" dirty="0"/>
-          </a:p>
-        </p:txBody>
-      </p:sp>
-      <p:sp>
-        <p:nvSpPr>
-          <p:cNvPr id="12" name="Text 10"/>
-          <p:cNvSpPr txBox="1"/>
-          <p:nvPr/>
-        </p:nvSpPr>
-        <p:spPr>
-          <a:xfrm>
-            <a:off x="3310128" y="3438144"/>
-            <a:ext cx="2286000" cy="502920"/>
+            <a:endParaRPr lang="en-US" sz="1800" dirty="0"/>
+          </a:p>
+        </p:txBody>
+      </p:sp>
+      <p:sp>
+        <p:nvSpPr>
+          <p:cNvPr id="23" name="Text 21"/>
+          <p:cNvSpPr txBox="1"/>
+          <p:nvPr/>
+        </p:nvSpPr>
+        <p:spPr>
+          <a:xfrm>
+            <a:off x="3794760" y="1517904"/>
+            <a:ext cx="1984248" cy="365760"/>
           </a:xfrm>
           <a:prstGeom prst="rect">
             <a:avLst/>
@@ -12020,13 +13096,13 @@
           <a:bodyPr wrap="square" lIns="0" tIns="0" rIns="0" bIns="0" rtlCol="0" anchor="ctr"/>
           <a:lstStyle/>
           <a:p>
-            <a:pPr algn="ctr" indent="0" marL="0">
-              <a:buNone/>
-            </a:pPr>
-            <a:r>
-              <a:rPr lang="en-US" sz="1800" b="1" dirty="0">
-                <a:solidFill>
-                  <a:srgbClr val="EE7B08"/>
+            <a:pPr algn="l" indent="0" marL="0">
+              <a:buNone/>
+            </a:pPr>
+            <a:r>
+              <a:rPr lang="en-US" sz="1500" b="1" dirty="0">
+                <a:solidFill>
+                  <a:srgbClr val="44C1A3"/>
                 </a:solidFill>
                 <a:latin typeface="メイリオ" pitchFamily="34" charset="0"/>
                 <a:ea typeface="メイリオ" pitchFamily="34" charset="-122"/>
@@ -12034,24 +13110,506 @@
               </a:rPr>
               <a:t>対話・協働</a:t>
             </a:r>
-            <a:endParaRPr lang="en-US" sz="1800" dirty="0"/>
-          </a:p>
-        </p:txBody>
-      </p:sp>
-      <p:sp>
-        <p:nvSpPr>
-          <p:cNvPr id="13" name="Shape 11"/>
+            <a:endParaRPr lang="en-US" sz="1500" dirty="0"/>
+          </a:p>
+        </p:txBody>
+      </p:sp>
+      <p:sp>
+        <p:nvSpPr>
+          <p:cNvPr id="24" name="Text 22"/>
+          <p:cNvSpPr txBox="1"/>
+          <p:nvPr/>
+        </p:nvSpPr>
+        <p:spPr>
+          <a:xfrm>
+            <a:off x="3374136" y="1956816"/>
+            <a:ext cx="2404872" cy="420624"/>
+          </a:xfrm>
+          <a:prstGeom prst="rect">
+            <a:avLst/>
+          </a:prstGeom>
+          <a:noFill/>
+          <a:ln/>
+        </p:spPr>
+        <p:txBody>
+          <a:bodyPr wrap="square" lIns="0" tIns="0" rIns="0" bIns="0" rtlCol="0" anchor="t"/>
+          <a:lstStyle/>
+          <a:p>
+            <a:pPr algn="l" indent="0" marL="0">
+              <a:lnSpc>
+                <a:spcPct val="115000"/>
+              </a:lnSpc>
+              <a:buNone/>
+            </a:pPr>
+            <a:r>
+              <a:rPr lang="en-US" sz="1050" b="1" dirty="0">
+                <a:solidFill>
+                  <a:srgbClr val="808080"/>
+                </a:solidFill>
+                <a:latin typeface="メイリオ" pitchFamily="34" charset="0"/>
+                <a:ea typeface="メイリオ" pitchFamily="34" charset="-122"/>
+                <a:cs typeface="メイリオ" pitchFamily="34" charset="-120"/>
+              </a:rPr>
+              <a:t>話し合う活動を通じて、</a:t>
+            </a:r>
+            <a:endParaRPr lang="en-US" sz="1050" dirty="0"/>
+          </a:p>
+          <a:p>
+            <a:pPr algn="l" indent="0" marL="0">
+              <a:lnSpc>
+                <a:spcPct val="115000"/>
+              </a:lnSpc>
+              <a:buNone/>
+            </a:pPr>
+            <a:r>
+              <a:rPr lang="en-US" sz="1050" b="1" dirty="0">
+                <a:solidFill>
+                  <a:srgbClr val="808080"/>
+                </a:solidFill>
+                <a:latin typeface="メイリオ" pitchFamily="34" charset="0"/>
+                <a:ea typeface="メイリオ" pitchFamily="34" charset="-122"/>
+                <a:cs typeface="メイリオ" pitchFamily="34" charset="-120"/>
+              </a:rPr>
+              <a:t>考えを深められている</a:t>
+            </a:r>
+            <a:endParaRPr lang="en-US" sz="1050" dirty="0"/>
+          </a:p>
+        </p:txBody>
+      </p:sp>
+      <p:sp>
+        <p:nvSpPr>
+          <p:cNvPr id="25" name="Text 23"/>
+          <p:cNvSpPr txBox="1"/>
+          <p:nvPr/>
+        </p:nvSpPr>
+        <p:spPr>
+          <a:xfrm>
+            <a:off x="3374136" y="2450592"/>
+            <a:ext cx="2404872" cy="201168"/>
+          </a:xfrm>
+          <a:prstGeom prst="rect">
+            <a:avLst/>
+          </a:prstGeom>
+          <a:noFill/>
+          <a:ln/>
+        </p:spPr>
+        <p:txBody>
+          <a:bodyPr wrap="square" lIns="0" tIns="0" rIns="0" bIns="0" rtlCol="0" anchor="ctr"/>
+          <a:lstStyle/>
+          <a:p>
+            <a:pPr algn="l" indent="0" marL="0">
+              <a:buNone/>
+            </a:pPr>
+            <a:r>
+              <a:rPr lang="en-US" sz="1050" b="1" dirty="0">
+                <a:solidFill>
+                  <a:srgbClr val="808080"/>
+                </a:solidFill>
+                <a:latin typeface="メイリオ" pitchFamily="34" charset="0"/>
+                <a:ea typeface="メイリオ" pitchFamily="34" charset="-122"/>
+                <a:cs typeface="メイリオ" pitchFamily="34" charset="-120"/>
+              </a:rPr>
+              <a:t>小学部（６年）</a:t>
+            </a:r>
+            <a:endParaRPr lang="en-US" sz="1050" dirty="0"/>
+          </a:p>
+        </p:txBody>
+      </p:sp>
+      <p:sp>
+        <p:nvSpPr>
+          <p:cNvPr id="26" name="Shape 24"/>
           <p:cNvSpPr/>
           <p:nvPr/>
         </p:nvSpPr>
         <p:spPr>
           <a:xfrm>
-            <a:off x="5961888" y="2724912"/>
-            <a:ext cx="2468880" cy="1417320"/>
+            <a:off x="3374136" y="2688336"/>
+            <a:ext cx="859536" cy="310896"/>
           </a:xfrm>
           <a:prstGeom prst="roundRect">
             <a:avLst>
-              <a:gd name="adj" fmla="val 3871"/>
+              <a:gd name="adj" fmla="val 14706"/>
+            </a:avLst>
+          </a:prstGeom>
+          <a:solidFill>
+            <a:srgbClr val="FFFFFF"/>
+          </a:solidFill>
+          <a:ln w="12700">
+            <a:solidFill>
+              <a:srgbClr val="F6CFA4"/>
+            </a:solidFill>
+            <a:prstDash val="dash"/>
+          </a:ln>
+        </p:spPr>
+      </p:sp>
+      <p:sp>
+        <p:nvSpPr>
+          <p:cNvPr id="27" name="Text 25"/>
+          <p:cNvSpPr txBox="1"/>
+          <p:nvPr/>
+        </p:nvSpPr>
+        <p:spPr>
+          <a:xfrm>
+            <a:off x="3374136" y="2688336"/>
+            <a:ext cx="859536" cy="310896"/>
+          </a:xfrm>
+          <a:prstGeom prst="rect">
+            <a:avLst/>
+          </a:prstGeom>
+          <a:noFill/>
+          <a:ln/>
+        </p:spPr>
+        <p:txBody>
+          <a:bodyPr wrap="square" lIns="0" tIns="0" rIns="0" bIns="0" rtlCol="0" anchor="ctr"/>
+          <a:lstStyle/>
+          <a:p>
+            <a:pPr algn="ctr" indent="0" marL="0">
+              <a:buNone/>
+            </a:pPr>
+            <a:r>
+              <a:rPr lang="en-US" sz="1100" b="1" dirty="0">
+                <a:solidFill>
+                  <a:srgbClr val="F6CFA4"/>
+                </a:solidFill>
+                <a:latin typeface="メイリオ" pitchFamily="34" charset="0"/>
+                <a:ea typeface="メイリオ" pitchFamily="34" charset="-122"/>
+                <a:cs typeface="メイリオ" pitchFamily="34" charset="-120"/>
+              </a:rPr>
+              <a:t>記入</a:t>
+            </a:r>
+            <a:endParaRPr lang="en-US" sz="1100" dirty="0"/>
+          </a:p>
+        </p:txBody>
+      </p:sp>
+      <p:sp>
+        <p:nvSpPr>
+          <p:cNvPr id="28" name="Text 26"/>
+          <p:cNvSpPr txBox="1"/>
+          <p:nvPr/>
+        </p:nvSpPr>
+        <p:spPr>
+          <a:xfrm>
+            <a:off x="4343400" y="2651760"/>
+            <a:ext cx="731520" cy="384048"/>
+          </a:xfrm>
+          <a:prstGeom prst="rect">
+            <a:avLst/>
+          </a:prstGeom>
+          <a:noFill/>
+          <a:ln/>
+        </p:spPr>
+        <p:txBody>
+          <a:bodyPr wrap="square" lIns="0" tIns="0" rIns="0" bIns="0" rtlCol="0" anchor="ctr"/>
+          <a:lstStyle/>
+          <a:p>
+            <a:pPr algn="l" indent="0" marL="0">
+              <a:buNone/>
+            </a:pPr>
+            <a:r>
+              <a:rPr lang="en-US" sz="1100" b="1" dirty="0">
+                <a:solidFill>
+                  <a:srgbClr val="808080"/>
+                </a:solidFill>
+                <a:latin typeface="メイリオ" pitchFamily="34" charset="0"/>
+                <a:ea typeface="メイリオ" pitchFamily="34" charset="-122"/>
+                <a:cs typeface="メイリオ" pitchFamily="34" charset="-120"/>
+              </a:rPr>
+              <a:t>区 87.0</a:t>
+            </a:r>
+            <a:endParaRPr lang="en-US" sz="1100" dirty="0"/>
+          </a:p>
+        </p:txBody>
+      </p:sp>
+      <p:sp>
+        <p:nvSpPr>
+          <p:cNvPr id="29" name="Shape 27"/>
+          <p:cNvSpPr/>
+          <p:nvPr/>
+        </p:nvSpPr>
+        <p:spPr>
+          <a:xfrm>
+            <a:off x="5102352" y="2688336"/>
+            <a:ext cx="676656" cy="310896"/>
+          </a:xfrm>
+          <a:prstGeom prst="roundRect">
+            <a:avLst>
+              <a:gd name="adj" fmla="val 14706"/>
+            </a:avLst>
+          </a:prstGeom>
+          <a:solidFill>
+            <a:srgbClr val="F2F2F2"/>
+          </a:solidFill>
+          <a:ln w="12700">
+            <a:solidFill>
+              <a:srgbClr val="DDDDDD"/>
+            </a:solidFill>
+            <a:prstDash val="solid"/>
+          </a:ln>
+        </p:spPr>
+      </p:sp>
+      <p:sp>
+        <p:nvSpPr>
+          <p:cNvPr id="30" name="Text 28"/>
+          <p:cNvSpPr txBox="1"/>
+          <p:nvPr/>
+        </p:nvSpPr>
+        <p:spPr>
+          <a:xfrm>
+            <a:off x="5102352" y="2688336"/>
+            <a:ext cx="676656" cy="310896"/>
+          </a:xfrm>
+          <a:prstGeom prst="rect">
+            <a:avLst/>
+          </a:prstGeom>
+          <a:noFill/>
+          <a:ln/>
+        </p:spPr>
+        <p:txBody>
+          <a:bodyPr wrap="square" lIns="0" tIns="0" rIns="0" bIns="0" rtlCol="0" anchor="ctr"/>
+          <a:lstStyle/>
+          <a:p>
+            <a:pPr algn="ctr" indent="0" marL="0">
+              <a:buNone/>
+            </a:pPr>
+            <a:r>
+              <a:rPr lang="en-US" sz="1200" b="1" dirty="0">
+                <a:solidFill>
+                  <a:srgbClr val="808080"/>
+                </a:solidFill>
+                <a:latin typeface="メイリオ" pitchFamily="34" charset="0"/>
+                <a:ea typeface="メイリオ" pitchFamily="34" charset="-122"/>
+                <a:cs typeface="メイリオ" pitchFamily="34" charset="-120"/>
+              </a:rPr>
+              <a:t>―</a:t>
+            </a:r>
+            <a:endParaRPr lang="en-US" sz="1200" dirty="0"/>
+          </a:p>
+        </p:txBody>
+      </p:sp>
+      <p:sp>
+        <p:nvSpPr>
+          <p:cNvPr id="31" name="Text 29"/>
+          <p:cNvSpPr txBox="1"/>
+          <p:nvPr/>
+        </p:nvSpPr>
+        <p:spPr>
+          <a:xfrm>
+            <a:off x="3374136" y="3200400"/>
+            <a:ext cx="2404872" cy="201168"/>
+          </a:xfrm>
+          <a:prstGeom prst="rect">
+            <a:avLst/>
+          </a:prstGeom>
+          <a:noFill/>
+          <a:ln/>
+        </p:spPr>
+        <p:txBody>
+          <a:bodyPr wrap="square" lIns="0" tIns="0" rIns="0" bIns="0" rtlCol="0" anchor="ctr"/>
+          <a:lstStyle/>
+          <a:p>
+            <a:pPr algn="l" indent="0" marL="0">
+              <a:buNone/>
+            </a:pPr>
+            <a:r>
+              <a:rPr lang="en-US" sz="1050" b="1" dirty="0">
+                <a:solidFill>
+                  <a:srgbClr val="808080"/>
+                </a:solidFill>
+                <a:latin typeface="メイリオ" pitchFamily="34" charset="0"/>
+                <a:ea typeface="メイリオ" pitchFamily="34" charset="-122"/>
+                <a:cs typeface="メイリオ" pitchFamily="34" charset="-120"/>
+              </a:rPr>
+              <a:t>中学部（９年）</a:t>
+            </a:r>
+            <a:endParaRPr lang="en-US" sz="1050" dirty="0"/>
+          </a:p>
+        </p:txBody>
+      </p:sp>
+      <p:sp>
+        <p:nvSpPr>
+          <p:cNvPr id="32" name="Shape 30"/>
+          <p:cNvSpPr/>
+          <p:nvPr/>
+        </p:nvSpPr>
+        <p:spPr>
+          <a:xfrm>
+            <a:off x="3374136" y="3438144"/>
+            <a:ext cx="859536" cy="310896"/>
+          </a:xfrm>
+          <a:prstGeom prst="roundRect">
+            <a:avLst>
+              <a:gd name="adj" fmla="val 14706"/>
+            </a:avLst>
+          </a:prstGeom>
+          <a:solidFill>
+            <a:srgbClr val="FFFFFF"/>
+          </a:solidFill>
+          <a:ln w="12700">
+            <a:solidFill>
+              <a:srgbClr val="F6CFA4"/>
+            </a:solidFill>
+            <a:prstDash val="dash"/>
+          </a:ln>
+        </p:spPr>
+      </p:sp>
+      <p:sp>
+        <p:nvSpPr>
+          <p:cNvPr id="33" name="Text 31"/>
+          <p:cNvSpPr txBox="1"/>
+          <p:nvPr/>
+        </p:nvSpPr>
+        <p:spPr>
+          <a:xfrm>
+            <a:off x="3374136" y="3438144"/>
+            <a:ext cx="859536" cy="310896"/>
+          </a:xfrm>
+          <a:prstGeom prst="rect">
+            <a:avLst/>
+          </a:prstGeom>
+          <a:noFill/>
+          <a:ln/>
+        </p:spPr>
+        <p:txBody>
+          <a:bodyPr wrap="square" lIns="0" tIns="0" rIns="0" bIns="0" rtlCol="0" anchor="ctr"/>
+          <a:lstStyle/>
+          <a:p>
+            <a:pPr algn="ctr" indent="0" marL="0">
+              <a:buNone/>
+            </a:pPr>
+            <a:r>
+              <a:rPr lang="en-US" sz="1100" b="1" dirty="0">
+                <a:solidFill>
+                  <a:srgbClr val="F6CFA4"/>
+                </a:solidFill>
+                <a:latin typeface="メイリオ" pitchFamily="34" charset="0"/>
+                <a:ea typeface="メイリオ" pitchFamily="34" charset="-122"/>
+                <a:cs typeface="メイリオ" pitchFamily="34" charset="-120"/>
+              </a:rPr>
+              <a:t>記入</a:t>
+            </a:r>
+            <a:endParaRPr lang="en-US" sz="1100" dirty="0"/>
+          </a:p>
+        </p:txBody>
+      </p:sp>
+      <p:sp>
+        <p:nvSpPr>
+          <p:cNvPr id="34" name="Text 32"/>
+          <p:cNvSpPr txBox="1"/>
+          <p:nvPr/>
+        </p:nvSpPr>
+        <p:spPr>
+          <a:xfrm>
+            <a:off x="4343400" y="3401568"/>
+            <a:ext cx="731520" cy="384048"/>
+          </a:xfrm>
+          <a:prstGeom prst="rect">
+            <a:avLst/>
+          </a:prstGeom>
+          <a:noFill/>
+          <a:ln/>
+        </p:spPr>
+        <p:txBody>
+          <a:bodyPr wrap="square" lIns="0" tIns="0" rIns="0" bIns="0" rtlCol="0" anchor="ctr"/>
+          <a:lstStyle/>
+          <a:p>
+            <a:pPr algn="l" indent="0" marL="0">
+              <a:buNone/>
+            </a:pPr>
+            <a:r>
+              <a:rPr lang="en-US" sz="1100" b="1" dirty="0">
+                <a:solidFill>
+                  <a:srgbClr val="808080"/>
+                </a:solidFill>
+                <a:latin typeface="メイリオ" pitchFamily="34" charset="0"/>
+                <a:ea typeface="メイリオ" pitchFamily="34" charset="-122"/>
+                <a:cs typeface="メイリオ" pitchFamily="34" charset="-120"/>
+              </a:rPr>
+              <a:t>区 86.6</a:t>
+            </a:r>
+            <a:endParaRPr lang="en-US" sz="1100" dirty="0"/>
+          </a:p>
+        </p:txBody>
+      </p:sp>
+      <p:sp>
+        <p:nvSpPr>
+          <p:cNvPr id="35" name="Shape 33"/>
+          <p:cNvSpPr/>
+          <p:nvPr/>
+        </p:nvSpPr>
+        <p:spPr>
+          <a:xfrm>
+            <a:off x="5102352" y="3438144"/>
+            <a:ext cx="676656" cy="310896"/>
+          </a:xfrm>
+          <a:prstGeom prst="roundRect">
+            <a:avLst>
+              <a:gd name="adj" fmla="val 14706"/>
+            </a:avLst>
+          </a:prstGeom>
+          <a:solidFill>
+            <a:srgbClr val="F2F2F2"/>
+          </a:solidFill>
+          <a:ln w="12700">
+            <a:solidFill>
+              <a:srgbClr val="DDDDDD"/>
+            </a:solidFill>
+            <a:prstDash val="solid"/>
+          </a:ln>
+        </p:spPr>
+      </p:sp>
+      <p:sp>
+        <p:nvSpPr>
+          <p:cNvPr id="36" name="Text 34"/>
+          <p:cNvSpPr txBox="1"/>
+          <p:nvPr/>
+        </p:nvSpPr>
+        <p:spPr>
+          <a:xfrm>
+            <a:off x="5102352" y="3438144"/>
+            <a:ext cx="676656" cy="310896"/>
+          </a:xfrm>
+          <a:prstGeom prst="rect">
+            <a:avLst/>
+          </a:prstGeom>
+          <a:noFill/>
+          <a:ln/>
+        </p:spPr>
+        <p:txBody>
+          <a:bodyPr wrap="square" lIns="0" tIns="0" rIns="0" bIns="0" rtlCol="0" anchor="ctr"/>
+          <a:lstStyle/>
+          <a:p>
+            <a:pPr algn="ctr" indent="0" marL="0">
+              <a:buNone/>
+            </a:pPr>
+            <a:r>
+              <a:rPr lang="en-US" sz="1200" b="1" dirty="0">
+                <a:solidFill>
+                  <a:srgbClr val="808080"/>
+                </a:solidFill>
+                <a:latin typeface="メイリオ" pitchFamily="34" charset="0"/>
+                <a:ea typeface="メイリオ" pitchFamily="34" charset="-122"/>
+                <a:cs typeface="メイリオ" pitchFamily="34" charset="-120"/>
+              </a:rPr>
+              <a:t>―</a:t>
+            </a:r>
+            <a:endParaRPr lang="en-US" sz="1200" dirty="0"/>
+          </a:p>
+        </p:txBody>
+      </p:sp>
+      <p:sp>
+        <p:nvSpPr>
+          <p:cNvPr id="37" name="Shape 35"/>
+          <p:cNvSpPr/>
+          <p:nvPr/>
+        </p:nvSpPr>
+        <p:spPr>
+          <a:xfrm>
+            <a:off x="6135624" y="1417320"/>
+            <a:ext cx="2697480" cy="2560320"/>
+          </a:xfrm>
+          <a:prstGeom prst="roundRect">
+            <a:avLst>
+              <a:gd name="adj" fmla="val 2143"/>
             </a:avLst>
           </a:prstGeom>
           <a:solidFill>
@@ -12067,14 +13625,14 @@
       </p:sp>
       <p:sp>
         <p:nvSpPr>
-          <p:cNvPr id="14" name="Shape 12"/>
+          <p:cNvPr id="38" name="Shape 36"/>
           <p:cNvSpPr/>
           <p:nvPr/>
         </p:nvSpPr>
         <p:spPr>
           <a:xfrm>
-            <a:off x="6967728" y="2889504"/>
-            <a:ext cx="457200" cy="457200"/>
+            <a:off x="6281928" y="1517904"/>
+            <a:ext cx="365760" cy="365760"/>
           </a:xfrm>
           <a:prstGeom prst="ellipse">
             <a:avLst/>
@@ -12087,14 +13645,14 @@
       </p:sp>
       <p:sp>
         <p:nvSpPr>
-          <p:cNvPr id="15" name="Text 13"/>
-          <p:cNvSpPr txBox="1"/>
-          <p:nvPr/>
-        </p:nvSpPr>
-        <p:spPr>
-          <a:xfrm>
-            <a:off x="6967728" y="2889504"/>
-            <a:ext cx="457200" cy="457200"/>
+          <p:cNvPr id="39" name="Text 37"/>
+          <p:cNvSpPr txBox="1"/>
+          <p:nvPr/>
+        </p:nvSpPr>
+        <p:spPr>
+          <a:xfrm>
+            <a:off x="6281928" y="1517904"/>
+            <a:ext cx="365760" cy="365760"/>
           </a:xfrm>
           <a:prstGeom prst="rect">
             <a:avLst/>
@@ -12110,7 +13668,7 @@
               <a:buNone/>
             </a:pPr>
             <a:r>
-              <a:rPr lang="en-US" sz="2300" b="1" dirty="0">
+              <a:rPr lang="en-US" sz="1800" b="1" dirty="0">
                 <a:solidFill>
                   <a:srgbClr val="FFFFFF"/>
                 </a:solidFill>
@@ -12120,20 +13678,20 @@
               </a:rPr>
               <a:t>③</a:t>
             </a:r>
-            <a:endParaRPr lang="en-US" sz="2300" dirty="0"/>
-          </a:p>
-        </p:txBody>
-      </p:sp>
-      <p:sp>
-        <p:nvSpPr>
-          <p:cNvPr id="16" name="Text 14"/>
-          <p:cNvSpPr txBox="1"/>
-          <p:nvPr/>
-        </p:nvSpPr>
-        <p:spPr>
-          <a:xfrm>
-            <a:off x="6053328" y="3438144"/>
-            <a:ext cx="2286000" cy="502920"/>
+            <a:endParaRPr lang="en-US" sz="1800" dirty="0"/>
+          </a:p>
+        </p:txBody>
+      </p:sp>
+      <p:sp>
+        <p:nvSpPr>
+          <p:cNvPr id="40" name="Text 38"/>
+          <p:cNvSpPr txBox="1"/>
+          <p:nvPr/>
+        </p:nvSpPr>
+        <p:spPr>
+          <a:xfrm>
+            <a:off x="6702552" y="1517904"/>
+            <a:ext cx="1984248" cy="365760"/>
           </a:xfrm>
           <a:prstGeom prst="rect">
             <a:avLst/>
@@ -12145,19 +13703,540 @@
           <a:bodyPr wrap="square" lIns="0" tIns="0" rIns="0" bIns="0" rtlCol="0" anchor="ctr"/>
           <a:lstStyle/>
           <a:p>
+            <a:pPr algn="l" indent="0" marL="0">
+              <a:buNone/>
+            </a:pPr>
+            <a:r>
+              <a:rPr lang="en-US" sz="1500" b="1" dirty="0">
+                <a:solidFill>
+                  <a:srgbClr val="44C1A3"/>
+                </a:solidFill>
+                <a:latin typeface="メイリオ" pitchFamily="34" charset="0"/>
+                <a:ea typeface="メイリオ" pitchFamily="34" charset="-122"/>
+                <a:cs typeface="メイリオ" pitchFamily="34" charset="-120"/>
+              </a:rPr>
+              <a:t>学習の自己調整</a:t>
+            </a:r>
+            <a:endParaRPr lang="en-US" sz="1500" dirty="0"/>
+          </a:p>
+        </p:txBody>
+      </p:sp>
+      <p:sp>
+        <p:nvSpPr>
+          <p:cNvPr id="41" name="Text 39"/>
+          <p:cNvSpPr txBox="1"/>
+          <p:nvPr/>
+        </p:nvSpPr>
+        <p:spPr>
+          <a:xfrm>
+            <a:off x="6281928" y="1956816"/>
+            <a:ext cx="2404872" cy="420624"/>
+          </a:xfrm>
+          <a:prstGeom prst="rect">
+            <a:avLst/>
+          </a:prstGeom>
+          <a:noFill/>
+          <a:ln/>
+        </p:spPr>
+        <p:txBody>
+          <a:bodyPr wrap="square" lIns="0" tIns="0" rIns="0" bIns="0" rtlCol="0" anchor="t"/>
+          <a:lstStyle/>
+          <a:p>
+            <a:pPr algn="l" indent="0" marL="0">
+              <a:lnSpc>
+                <a:spcPct val="115000"/>
+              </a:lnSpc>
+              <a:buNone/>
+            </a:pPr>
+            <a:r>
+              <a:rPr lang="en-US" sz="1050" b="1" dirty="0">
+                <a:solidFill>
+                  <a:srgbClr val="808080"/>
+                </a:solidFill>
+                <a:latin typeface="メイリオ" pitchFamily="34" charset="0"/>
+                <a:ea typeface="メイリオ" pitchFamily="34" charset="-122"/>
+                <a:cs typeface="メイリオ" pitchFamily="34" charset="-120"/>
+              </a:rPr>
+              <a:t>分かった点・分からない点を</a:t>
+            </a:r>
+            <a:endParaRPr lang="en-US" sz="1050" dirty="0"/>
+          </a:p>
+          <a:p>
+            <a:pPr algn="l" indent="0" marL="0">
+              <a:lnSpc>
+                <a:spcPct val="115000"/>
+              </a:lnSpc>
+              <a:buNone/>
+            </a:pPr>
+            <a:r>
+              <a:rPr lang="en-US" sz="1050" b="1" dirty="0">
+                <a:solidFill>
+                  <a:srgbClr val="808080"/>
+                </a:solidFill>
+                <a:latin typeface="メイリオ" pitchFamily="34" charset="0"/>
+                <a:ea typeface="メイリオ" pitchFamily="34" charset="-122"/>
+                <a:cs typeface="メイリオ" pitchFamily="34" charset="-120"/>
+              </a:rPr>
+              <a:t>見直し、次につなげている</a:t>
+            </a:r>
+            <a:endParaRPr lang="en-US" sz="1050" dirty="0"/>
+          </a:p>
+        </p:txBody>
+      </p:sp>
+      <p:sp>
+        <p:nvSpPr>
+          <p:cNvPr id="42" name="Text 40"/>
+          <p:cNvSpPr txBox="1"/>
+          <p:nvPr/>
+        </p:nvSpPr>
+        <p:spPr>
+          <a:xfrm>
+            <a:off x="6281928" y="2450592"/>
+            <a:ext cx="2404872" cy="201168"/>
+          </a:xfrm>
+          <a:prstGeom prst="rect">
+            <a:avLst/>
+          </a:prstGeom>
+          <a:noFill/>
+          <a:ln/>
+        </p:spPr>
+        <p:txBody>
+          <a:bodyPr wrap="square" lIns="0" tIns="0" rIns="0" bIns="0" rtlCol="0" anchor="ctr"/>
+          <a:lstStyle/>
+          <a:p>
+            <a:pPr algn="l" indent="0" marL="0">
+              <a:buNone/>
+            </a:pPr>
+            <a:r>
+              <a:rPr lang="en-US" sz="1050" b="1" dirty="0">
+                <a:solidFill>
+                  <a:srgbClr val="808080"/>
+                </a:solidFill>
+                <a:latin typeface="メイリオ" pitchFamily="34" charset="0"/>
+                <a:ea typeface="メイリオ" pitchFamily="34" charset="-122"/>
+                <a:cs typeface="メイリオ" pitchFamily="34" charset="-120"/>
+              </a:rPr>
+              <a:t>小学部（６年）</a:t>
+            </a:r>
+            <a:endParaRPr lang="en-US" sz="1050" dirty="0"/>
+          </a:p>
+        </p:txBody>
+      </p:sp>
+      <p:sp>
+        <p:nvSpPr>
+          <p:cNvPr id="43" name="Shape 41"/>
+          <p:cNvSpPr/>
+          <p:nvPr/>
+        </p:nvSpPr>
+        <p:spPr>
+          <a:xfrm>
+            <a:off x="6281928" y="2688336"/>
+            <a:ext cx="859536" cy="310896"/>
+          </a:xfrm>
+          <a:prstGeom prst="roundRect">
+            <a:avLst>
+              <a:gd name="adj" fmla="val 14706"/>
+            </a:avLst>
+          </a:prstGeom>
+          <a:solidFill>
+            <a:srgbClr val="FFFFFF"/>
+          </a:solidFill>
+          <a:ln w="12700">
+            <a:solidFill>
+              <a:srgbClr val="F6CFA4"/>
+            </a:solidFill>
+            <a:prstDash val="dash"/>
+          </a:ln>
+        </p:spPr>
+      </p:sp>
+      <p:sp>
+        <p:nvSpPr>
+          <p:cNvPr id="44" name="Text 42"/>
+          <p:cNvSpPr txBox="1"/>
+          <p:nvPr/>
+        </p:nvSpPr>
+        <p:spPr>
+          <a:xfrm>
+            <a:off x="6281928" y="2688336"/>
+            <a:ext cx="859536" cy="310896"/>
+          </a:xfrm>
+          <a:prstGeom prst="rect">
+            <a:avLst/>
+          </a:prstGeom>
+          <a:noFill/>
+          <a:ln/>
+        </p:spPr>
+        <p:txBody>
+          <a:bodyPr wrap="square" lIns="0" tIns="0" rIns="0" bIns="0" rtlCol="0" anchor="ctr"/>
+          <a:lstStyle/>
+          <a:p>
             <a:pPr algn="ctr" indent="0" marL="0">
               <a:buNone/>
             </a:pPr>
             <a:r>
+              <a:rPr lang="en-US" sz="1100" b="1" dirty="0">
+                <a:solidFill>
+                  <a:srgbClr val="F6CFA4"/>
+                </a:solidFill>
+                <a:latin typeface="メイリオ" pitchFamily="34" charset="0"/>
+                <a:ea typeface="メイリオ" pitchFamily="34" charset="-122"/>
+                <a:cs typeface="メイリオ" pitchFamily="34" charset="-120"/>
+              </a:rPr>
+              <a:t>記入</a:t>
+            </a:r>
+            <a:endParaRPr lang="en-US" sz="1100" dirty="0"/>
+          </a:p>
+        </p:txBody>
+      </p:sp>
+      <p:sp>
+        <p:nvSpPr>
+          <p:cNvPr id="45" name="Text 43"/>
+          <p:cNvSpPr txBox="1"/>
+          <p:nvPr/>
+        </p:nvSpPr>
+        <p:spPr>
+          <a:xfrm>
+            <a:off x="7251192" y="2651760"/>
+            <a:ext cx="731520" cy="384048"/>
+          </a:xfrm>
+          <a:prstGeom prst="rect">
+            <a:avLst/>
+          </a:prstGeom>
+          <a:noFill/>
+          <a:ln/>
+        </p:spPr>
+        <p:txBody>
+          <a:bodyPr wrap="square" lIns="0" tIns="0" rIns="0" bIns="0" rtlCol="0" anchor="ctr"/>
+          <a:lstStyle/>
+          <a:p>
+            <a:pPr algn="l" indent="0" marL="0">
+              <a:buNone/>
+            </a:pPr>
+            <a:r>
+              <a:rPr lang="en-US" sz="1100" b="1" dirty="0">
+                <a:solidFill>
+                  <a:srgbClr val="808080"/>
+                </a:solidFill>
+                <a:latin typeface="メイリオ" pitchFamily="34" charset="0"/>
+                <a:ea typeface="メイリオ" pitchFamily="34" charset="-122"/>
+                <a:cs typeface="メイリオ" pitchFamily="34" charset="-120"/>
+              </a:rPr>
+              <a:t>区 79.0</a:t>
+            </a:r>
+            <a:endParaRPr lang="en-US" sz="1100" dirty="0"/>
+          </a:p>
+        </p:txBody>
+      </p:sp>
+      <p:sp>
+        <p:nvSpPr>
+          <p:cNvPr id="46" name="Shape 44"/>
+          <p:cNvSpPr/>
+          <p:nvPr/>
+        </p:nvSpPr>
+        <p:spPr>
+          <a:xfrm>
+            <a:off x="8010144" y="2688336"/>
+            <a:ext cx="676656" cy="310896"/>
+          </a:xfrm>
+          <a:prstGeom prst="roundRect">
+            <a:avLst>
+              <a:gd name="adj" fmla="val 14706"/>
+            </a:avLst>
+          </a:prstGeom>
+          <a:solidFill>
+            <a:srgbClr val="F2F2F2"/>
+          </a:solidFill>
+          <a:ln w="12700">
+            <a:solidFill>
+              <a:srgbClr val="DDDDDD"/>
+            </a:solidFill>
+            <a:prstDash val="solid"/>
+          </a:ln>
+        </p:spPr>
+      </p:sp>
+      <p:sp>
+        <p:nvSpPr>
+          <p:cNvPr id="47" name="Text 45"/>
+          <p:cNvSpPr txBox="1"/>
+          <p:nvPr/>
+        </p:nvSpPr>
+        <p:spPr>
+          <a:xfrm>
+            <a:off x="8010144" y="2688336"/>
+            <a:ext cx="676656" cy="310896"/>
+          </a:xfrm>
+          <a:prstGeom prst="rect">
+            <a:avLst/>
+          </a:prstGeom>
+          <a:noFill/>
+          <a:ln/>
+        </p:spPr>
+        <p:txBody>
+          <a:bodyPr wrap="square" lIns="0" tIns="0" rIns="0" bIns="0" rtlCol="0" anchor="ctr"/>
+          <a:lstStyle/>
+          <a:p>
+            <a:pPr algn="ctr" indent="0" marL="0">
+              <a:buNone/>
+            </a:pPr>
+            <a:r>
+              <a:rPr lang="en-US" sz="1200" b="1" dirty="0">
+                <a:solidFill>
+                  <a:srgbClr val="808080"/>
+                </a:solidFill>
+                <a:latin typeface="メイリオ" pitchFamily="34" charset="0"/>
+                <a:ea typeface="メイリオ" pitchFamily="34" charset="-122"/>
+                <a:cs typeface="メイリオ" pitchFamily="34" charset="-120"/>
+              </a:rPr>
+              <a:t>―</a:t>
+            </a:r>
+            <a:endParaRPr lang="en-US" sz="1200" dirty="0"/>
+          </a:p>
+        </p:txBody>
+      </p:sp>
+      <p:sp>
+        <p:nvSpPr>
+          <p:cNvPr id="48" name="Text 46"/>
+          <p:cNvSpPr txBox="1"/>
+          <p:nvPr/>
+        </p:nvSpPr>
+        <p:spPr>
+          <a:xfrm>
+            <a:off x="6281928" y="3200400"/>
+            <a:ext cx="2404872" cy="201168"/>
+          </a:xfrm>
+          <a:prstGeom prst="rect">
+            <a:avLst/>
+          </a:prstGeom>
+          <a:noFill/>
+          <a:ln/>
+        </p:spPr>
+        <p:txBody>
+          <a:bodyPr wrap="square" lIns="0" tIns="0" rIns="0" bIns="0" rtlCol="0" anchor="ctr"/>
+          <a:lstStyle/>
+          <a:p>
+            <a:pPr algn="l" indent="0" marL="0">
+              <a:buNone/>
+            </a:pPr>
+            <a:r>
+              <a:rPr lang="en-US" sz="1050" b="1" dirty="0">
+                <a:solidFill>
+                  <a:srgbClr val="808080"/>
+                </a:solidFill>
+                <a:latin typeface="メイリオ" pitchFamily="34" charset="0"/>
+                <a:ea typeface="メイリオ" pitchFamily="34" charset="-122"/>
+                <a:cs typeface="メイリオ" pitchFamily="34" charset="-120"/>
+              </a:rPr>
+              <a:t>中学部（９年）</a:t>
+            </a:r>
+            <a:endParaRPr lang="en-US" sz="1050" dirty="0"/>
+          </a:p>
+        </p:txBody>
+      </p:sp>
+      <p:sp>
+        <p:nvSpPr>
+          <p:cNvPr id="49" name="Shape 47"/>
+          <p:cNvSpPr/>
+          <p:nvPr/>
+        </p:nvSpPr>
+        <p:spPr>
+          <a:xfrm>
+            <a:off x="6281928" y="3438144"/>
+            <a:ext cx="859536" cy="310896"/>
+          </a:xfrm>
+          <a:prstGeom prst="roundRect">
+            <a:avLst>
+              <a:gd name="adj" fmla="val 14706"/>
+            </a:avLst>
+          </a:prstGeom>
+          <a:solidFill>
+            <a:srgbClr val="FFFFFF"/>
+          </a:solidFill>
+          <a:ln w="12700">
+            <a:solidFill>
+              <a:srgbClr val="F6CFA4"/>
+            </a:solidFill>
+            <a:prstDash val="dash"/>
+          </a:ln>
+        </p:spPr>
+      </p:sp>
+      <p:sp>
+        <p:nvSpPr>
+          <p:cNvPr id="50" name="Text 48"/>
+          <p:cNvSpPr txBox="1"/>
+          <p:nvPr/>
+        </p:nvSpPr>
+        <p:spPr>
+          <a:xfrm>
+            <a:off x="6281928" y="3438144"/>
+            <a:ext cx="859536" cy="310896"/>
+          </a:xfrm>
+          <a:prstGeom prst="rect">
+            <a:avLst/>
+          </a:prstGeom>
+          <a:noFill/>
+          <a:ln/>
+        </p:spPr>
+        <p:txBody>
+          <a:bodyPr wrap="square" lIns="0" tIns="0" rIns="0" bIns="0" rtlCol="0" anchor="ctr"/>
+          <a:lstStyle/>
+          <a:p>
+            <a:pPr algn="ctr" indent="0" marL="0">
+              <a:buNone/>
+            </a:pPr>
+            <a:r>
+              <a:rPr lang="en-US" sz="1100" b="1" dirty="0">
+                <a:solidFill>
+                  <a:srgbClr val="F6CFA4"/>
+                </a:solidFill>
+                <a:latin typeface="メイリオ" pitchFamily="34" charset="0"/>
+                <a:ea typeface="メイリオ" pitchFamily="34" charset="-122"/>
+                <a:cs typeface="メイリオ" pitchFamily="34" charset="-120"/>
+              </a:rPr>
+              <a:t>記入</a:t>
+            </a:r>
+            <a:endParaRPr lang="en-US" sz="1100" dirty="0"/>
+          </a:p>
+        </p:txBody>
+      </p:sp>
+      <p:sp>
+        <p:nvSpPr>
+          <p:cNvPr id="51" name="Text 49"/>
+          <p:cNvSpPr txBox="1"/>
+          <p:nvPr/>
+        </p:nvSpPr>
+        <p:spPr>
+          <a:xfrm>
+            <a:off x="7251192" y="3401568"/>
+            <a:ext cx="731520" cy="384048"/>
+          </a:xfrm>
+          <a:prstGeom prst="rect">
+            <a:avLst/>
+          </a:prstGeom>
+          <a:noFill/>
+          <a:ln/>
+        </p:spPr>
+        <p:txBody>
+          <a:bodyPr wrap="square" lIns="0" tIns="0" rIns="0" bIns="0" rtlCol="0" anchor="ctr"/>
+          <a:lstStyle/>
+          <a:p>
+            <a:pPr algn="l" indent="0" marL="0">
+              <a:buNone/>
+            </a:pPr>
+            <a:r>
+              <a:rPr lang="en-US" sz="1100" b="1" dirty="0">
+                <a:solidFill>
+                  <a:srgbClr val="808080"/>
+                </a:solidFill>
+                <a:latin typeface="メイリオ" pitchFamily="34" charset="0"/>
+                <a:ea typeface="メイリオ" pitchFamily="34" charset="-122"/>
+                <a:cs typeface="メイリオ" pitchFamily="34" charset="-120"/>
+              </a:rPr>
+              <a:t>区 79.0</a:t>
+            </a:r>
+            <a:endParaRPr lang="en-US" sz="1100" dirty="0"/>
+          </a:p>
+        </p:txBody>
+      </p:sp>
+      <p:sp>
+        <p:nvSpPr>
+          <p:cNvPr id="52" name="Shape 50"/>
+          <p:cNvSpPr/>
+          <p:nvPr/>
+        </p:nvSpPr>
+        <p:spPr>
+          <a:xfrm>
+            <a:off x="8010144" y="3438144"/>
+            <a:ext cx="676656" cy="310896"/>
+          </a:xfrm>
+          <a:prstGeom prst="roundRect">
+            <a:avLst>
+              <a:gd name="adj" fmla="val 14706"/>
+            </a:avLst>
+          </a:prstGeom>
+          <a:solidFill>
+            <a:srgbClr val="F2F2F2"/>
+          </a:solidFill>
+          <a:ln w="12700">
+            <a:solidFill>
+              <a:srgbClr val="DDDDDD"/>
+            </a:solidFill>
+            <a:prstDash val="solid"/>
+          </a:ln>
+        </p:spPr>
+      </p:sp>
+      <p:sp>
+        <p:nvSpPr>
+          <p:cNvPr id="53" name="Text 51"/>
+          <p:cNvSpPr txBox="1"/>
+          <p:nvPr/>
+        </p:nvSpPr>
+        <p:spPr>
+          <a:xfrm>
+            <a:off x="8010144" y="3438144"/>
+            <a:ext cx="676656" cy="310896"/>
+          </a:xfrm>
+          <a:prstGeom prst="rect">
+            <a:avLst/>
+          </a:prstGeom>
+          <a:noFill/>
+          <a:ln/>
+        </p:spPr>
+        <p:txBody>
+          <a:bodyPr wrap="square" lIns="0" tIns="0" rIns="0" bIns="0" rtlCol="0" anchor="ctr"/>
+          <a:lstStyle/>
+          <a:p>
+            <a:pPr algn="ctr" indent="0" marL="0">
+              <a:buNone/>
+            </a:pPr>
+            <a:r>
+              <a:rPr lang="en-US" sz="1200" b="1" dirty="0">
+                <a:solidFill>
+                  <a:srgbClr val="808080"/>
+                </a:solidFill>
+                <a:latin typeface="メイリオ" pitchFamily="34" charset="0"/>
+                <a:ea typeface="メイリオ" pitchFamily="34" charset="-122"/>
+                <a:cs typeface="メイリオ" pitchFamily="34" charset="-120"/>
+              </a:rPr>
+              <a:t>―</a:t>
+            </a:r>
+            <a:endParaRPr lang="en-US" sz="1200" dirty="0"/>
+          </a:p>
+        </p:txBody>
+      </p:sp>
+      <p:sp>
+        <p:nvSpPr>
+          <p:cNvPr id="54" name="Text 52"/>
+          <p:cNvSpPr txBox="1"/>
+          <p:nvPr/>
+        </p:nvSpPr>
+        <p:spPr>
+          <a:xfrm>
+            <a:off x="320040" y="4069080"/>
+            <a:ext cx="8503920" cy="365760"/>
+          </a:xfrm>
+          <a:prstGeom prst="rect">
+            <a:avLst/>
+          </a:prstGeom>
+          <a:noFill/>
+          <a:ln/>
+        </p:spPr>
+        <p:txBody>
+          <a:bodyPr wrap="square" lIns="0" tIns="0" rIns="0" bIns="0" rtlCol="0" anchor="ctr"/>
+          <a:lstStyle/>
+          <a:p>
+            <a:pPr algn="l" indent="0" marL="0">
+              <a:buNone/>
+            </a:pPr>
+            <a:r>
               <a:rPr lang="en-US" sz="1800" b="1" dirty="0">
                 <a:solidFill>
-                  <a:srgbClr val="EE7B08"/>
-                </a:solidFill>
-                <a:latin typeface="メイリオ" pitchFamily="34" charset="0"/>
-                <a:ea typeface="メイリオ" pitchFamily="34" charset="-122"/>
-                <a:cs typeface="メイリオ" pitchFamily="34" charset="-120"/>
-              </a:rPr>
-              <a:t>学習の自己調整</a:t>
+                  <a:srgbClr val="808080"/>
+                </a:solidFill>
+                <a:latin typeface="メイリオ" pitchFamily="34" charset="0"/>
+                <a:ea typeface="メイリオ" pitchFamily="34" charset="-122"/>
+                <a:cs typeface="メイリオ" pitchFamily="34" charset="-120"/>
+              </a:rPr>
+              <a:t>本校の数値を記入すると、練馬区平均との比較が表示される。</a:t>
             </a:r>
             <a:endParaRPr lang="en-US" sz="1800" dirty="0"/>
           </a:p>
@@ -12165,14 +14244,14 @@
       </p:sp>
       <p:sp>
         <p:nvSpPr>
-          <p:cNvPr id="17" name="Text 15"/>
-          <p:cNvSpPr txBox="1"/>
-          <p:nvPr/>
-        </p:nvSpPr>
-        <p:spPr>
-          <a:xfrm>
-            <a:off x="475488" y="4261104"/>
-            <a:ext cx="8193024" cy="347472"/>
+          <p:cNvPr id="55" name="Text 53"/>
+          <p:cNvSpPr txBox="1"/>
+          <p:nvPr/>
+        </p:nvSpPr>
+        <p:spPr>
+          <a:xfrm>
+            <a:off x="320040" y="4443984"/>
+            <a:ext cx="8503920" cy="329184"/>
           </a:xfrm>
           <a:prstGeom prst="rect">
             <a:avLst/>
@@ -12196,9 +14275,48 @@
                 <a:ea typeface="メイリオ" pitchFamily="34" charset="-122"/>
                 <a:cs typeface="メイリオ" pitchFamily="34" charset="-120"/>
               </a:rPr>
-              <a:t>この３つが、学力調査結果を支える土台になっている。</a:t>
+              <a:t>本日の授業で見た手だての積み重ねが、この数値を支えている。</a:t>
             </a:r>
             <a:endParaRPr lang="en-US" sz="1500" dirty="0"/>
+          </a:p>
+        </p:txBody>
+      </p:sp>
+      <p:sp>
+        <p:nvSpPr>
+          <p:cNvPr id="56" name="Text 54"/>
+          <p:cNvSpPr txBox="1"/>
+          <p:nvPr/>
+        </p:nvSpPr>
+        <p:spPr>
+          <a:xfrm>
+            <a:off x="320040" y="4791456"/>
+            <a:ext cx="8503920" cy="237744"/>
+          </a:xfrm>
+          <a:prstGeom prst="rect">
+            <a:avLst/>
+          </a:prstGeom>
+          <a:noFill/>
+          <a:ln/>
+        </p:spPr>
+        <p:txBody>
+          <a:bodyPr wrap="square" lIns="0" tIns="0" rIns="0" bIns="0" rtlCol="0" anchor="ctr"/>
+          <a:lstStyle/>
+          <a:p>
+            <a:pPr algn="l" indent="0" marL="0">
+              <a:buNone/>
+            </a:pPr>
+            <a:r>
+              <a:rPr lang="en-US" sz="950" b="1" dirty="0">
+                <a:solidFill>
+                  <a:srgbClr val="808080"/>
+                </a:solidFill>
+                <a:latin typeface="メイリオ" pitchFamily="34" charset="0"/>
+                <a:ea typeface="メイリオ" pitchFamily="34" charset="-122"/>
+                <a:cs typeface="メイリオ" pitchFamily="34" charset="-120"/>
+              </a:rPr>
+              <a:t>出典：練馬区は令和８年度 全国学力・学習状況調査（練馬区）　肯定的回答の割合　※「記入」欄に本校の数値を入れてご使用ください</a:t>
+            </a:r>
+            <a:endParaRPr lang="en-US" sz="950" dirty="0"/>
           </a:p>
         </p:txBody>
       </p:sp>

--- a/指導課訪問_みらい青空学園/指導課訪問_５校時指導助言資料_みらい青空学園.pptx
+++ b/指導課訪問_みらい青空学園/指導課訪問_５校時指導助言資料_みらい青空学園.pptx
@@ -1501,9 +1501,11 @@
           <a:p>
             <a:r>
               <a:rPr lang="en-US" dirty="0"/>
-              <a:t>はじめにクイズを２問。練馬区の令和８年度全国学力・学習状況調査、質問紙調査の結果からです。
-Q1「将来の夢や目標を持っていますか」。小学校６年生は80.3％が肯定的に答えています。では中学校３年生は何％でしょうか。①約80％、②約73％、③約66％。
-Q2「英語の勉強は好きですか」。小学校６年生は68.2％。中学校３年生は。①約68％、②約61％、③約55％。
+              <a:t>はじめにクイズを２問。令和８年度の全国学力・学習状況調査、質問紙調査の結果からです。
+全国では、小学校から中学校にかけて下がる項目が多くあります。たとえば「英語の勉強は好きですか」。全国では小学校66.7％から中学校51.2％へ、15.5ポイント下がります。
+では、本校ではどうだったでしょうか。
+Q1「英語の勉強は好きですか」。本校の小学部６年は51.8％。中学部９年は。①約42、②約52、③約62パーセント。
+Q2「自分には、よいところがあると思いますか」。本校の小学部６年は85.2％。中学部９年は。①約85、②約88、③約92パーセント。
 （数秒、挙手や指名で予想を出してもらう）</a:t>
             </a:r>
             <a:endParaRPr lang="en-US" dirty="0"/>
@@ -1592,9 +1594,10 @@
           <a:p>
             <a:r>
               <a:rPr lang="en-US" dirty="0"/>
-              <a:t>答えは、Q1が③の65.5％、Q2が③の54.7％です。
-小学校から中学校へ、夢や目標をもつ子どもは14.8ポイント、英語が好きな子どもは13.5ポイント減っています。
-同じ子どもが、３年の間にこれだけ変わる。これがいわゆる中１ギャップと呼ばれる段差です。</a:t>
+              <a:t>答えは、いずれも③です。
+「英語の勉強は好きですか」は、51.8％から61.7％へ、9.9ポイント上がっています。全国は15.5ポイント下がる項目です。小学部では全国を下回っていたものが、中学部では全国を10ポイント以上、上回りました。
+「自分には、よいところがある」は、85.2％から91.5％へ、6.3ポイント上がっています。全国は1.6ポイント下がります。
+全国も東京都も下がる項目で、本校は上がっている。これが本日の出発点です。</a:t>
             </a:r>
             <a:endParaRPr lang="en-US" dirty="0"/>
           </a:p>
@@ -1682,9 +1685,11 @@
           <a:p>
             <a:r>
               <a:rPr lang="en-US" dirty="0"/>
-              <a:t>ただし、この段差は必然ではありません。
-練馬区では「学校に行くのは楽しい」が小88.9％、中87.2％。「自分と違う意見について考えるのは楽しい」が小80.6％、中79.8％。いずれも小・中ともに東京都・全国を上回り、落差もわずかです。
-つまり、つなぎ方次第で段差はなだらかにできる。その仕組みが、９年間を見通した教育、すなわち小中一貫教育です。ここから本題に入ります。</a:t>
+              <a:t>上がっているのは、この２項目だけではありません。
+「友達や周りの人の考えを大切にして、協力しながら課題の解決に取り組んでいますか」は、85.1％から100％へ。中学部は全員が肯定的に答えています。
+「話し合う活動を通じて、自分の考えを深めたり、新たな考え方に気付いたりすることができていますか」は、92.5％から97.9％へ。
+「自分と違う意見について考えるのは楽しい」は、81.4％から87.2％へ。
+９年間を見通した教育の成果が、数値に表れています。ここから本題に入ります。</a:t>
             </a:r>
             <a:endParaRPr lang="en-US" dirty="0"/>
           </a:p>
@@ -8417,7 +8422,7 @@
                 <a:ea typeface="メイリオ" pitchFamily="34" charset="-122"/>
                 <a:cs typeface="メイリオ" pitchFamily="34" charset="-120"/>
               </a:rPr>
-              <a:t>　クイズ　小学校から中学校へ、答えはどう変わる？</a:t>
+              <a:t>　クイズ　本校の子どもたちは、どう変わったか</a:t>
             </a:r>
             <a:endParaRPr lang="en-US" sz="3000" dirty="0"/>
           </a:p>
@@ -8425,57 +8430,18 @@
       </p:sp>
       <p:sp>
         <p:nvSpPr>
-          <p:cNvPr id="3" name="Text 1"/>
-          <p:cNvSpPr txBox="1"/>
-          <p:nvPr/>
-        </p:nvSpPr>
-        <p:spPr>
-          <a:xfrm>
-            <a:off x="320040" y="1389888"/>
-            <a:ext cx="8503920" cy="292608"/>
-          </a:xfrm>
-          <a:prstGeom prst="rect">
-            <a:avLst/>
-          </a:prstGeom>
-          <a:noFill/>
-          <a:ln/>
-        </p:spPr>
-        <p:txBody>
-          <a:bodyPr wrap="square" lIns="0" tIns="0" rIns="0" bIns="0" rtlCol="0" anchor="ctr"/>
-          <a:lstStyle/>
-          <a:p>
-            <a:pPr algn="l" indent="0" marL="0">
-              <a:buNone/>
-            </a:pPr>
-            <a:r>
-              <a:rPr lang="en-US" sz="1300" b="1" dirty="0">
-                <a:solidFill>
-                  <a:srgbClr val="808080"/>
-                </a:solidFill>
-                <a:latin typeface="メイリオ" pitchFamily="34" charset="0"/>
-                <a:ea typeface="メイリオ" pitchFamily="34" charset="-122"/>
-                <a:cs typeface="メイリオ" pitchFamily="34" charset="-120"/>
-              </a:rPr>
-              <a:t>令和８年度　全国学力・学習状況調査（練馬区・質問紙調査）から</a:t>
-            </a:r>
-            <a:endParaRPr lang="en-US" sz="1300" dirty="0"/>
-          </a:p>
-        </p:txBody>
-      </p:sp>
-      <p:sp>
-        <p:nvSpPr>
-          <p:cNvPr id="4" name="Shape 2"/>
+          <p:cNvPr id="3" name="Shape 1"/>
           <p:cNvSpPr/>
           <p:nvPr/>
         </p:nvSpPr>
         <p:spPr>
           <a:xfrm>
-            <a:off x="320040" y="1755648"/>
-            <a:ext cx="8503920" cy="1325880"/>
+            <a:off x="320040" y="1371600"/>
+            <a:ext cx="8503920" cy="914400"/>
           </a:xfrm>
           <a:prstGeom prst="roundRect">
             <a:avLst>
-              <a:gd name="adj" fmla="val 4138"/>
+              <a:gd name="adj" fmla="val 6000"/>
             </a:avLst>
           </a:prstGeom>
           <a:solidFill>
@@ -8491,14 +8457,93 @@
       </p:sp>
       <p:sp>
         <p:nvSpPr>
+          <p:cNvPr id="4" name="Text 2"/>
+          <p:cNvSpPr txBox="1"/>
+          <p:nvPr/>
+        </p:nvSpPr>
+        <p:spPr>
+          <a:xfrm>
+            <a:off x="576072" y="1371600"/>
+            <a:ext cx="7991856" cy="914400"/>
+          </a:xfrm>
+          <a:prstGeom prst="rect">
+            <a:avLst/>
+          </a:prstGeom>
+          <a:noFill/>
+          <a:ln/>
+        </p:spPr>
+        <p:txBody>
+          <a:bodyPr wrap="square" lIns="0" tIns="0" rIns="0" bIns="0" rtlCol="0" anchor="ctr"/>
+          <a:lstStyle/>
+          <a:p>
+            <a:pPr algn="l" indent="0" marL="0">
+              <a:lnSpc>
+                <a:spcPct val="130000"/>
+              </a:lnSpc>
+              <a:buNone/>
+            </a:pPr>
+            <a:r>
+              <a:rPr lang="en-US" sz="1500" b="1" dirty="0">
+                <a:solidFill>
+                  <a:srgbClr val="595959"/>
+                </a:solidFill>
+                <a:latin typeface="メイリオ" pitchFamily="34" charset="0"/>
+                <a:ea typeface="メイリオ" pitchFamily="34" charset="-122"/>
+                <a:cs typeface="メイリオ" pitchFamily="34" charset="-120"/>
+              </a:rPr>
+              <a:t>全国では、小学校から中学校にかけて下がる項目が多い。</a:t>
+            </a:r>
+            <a:endParaRPr lang="en-US" sz="1500" dirty="0"/>
+          </a:p>
+          <a:p>
+            <a:pPr algn="l" indent="0" marL="0">
+              <a:lnSpc>
+                <a:spcPct val="130000"/>
+              </a:lnSpc>
+              <a:buNone/>
+            </a:pPr>
+            <a:r>
+              <a:rPr lang="en-US" sz="1500" b="1" dirty="0">
+                <a:solidFill>
+                  <a:srgbClr val="595959"/>
+                </a:solidFill>
+                <a:latin typeface="メイリオ" pitchFamily="34" charset="0"/>
+                <a:ea typeface="メイリオ" pitchFamily="34" charset="-122"/>
+                <a:cs typeface="メイリオ" pitchFamily="34" charset="-120"/>
+              </a:rPr>
+              <a:t>　例：「英語の勉強は好きですか」　全国　小 66.7％ → 中 51.2％　</a:t>
+            </a:r>
+            <a:pPr algn="l" indent="0" marL="0">
+              <a:lnSpc>
+                <a:spcPct val="130000"/>
+              </a:lnSpc>
+              <a:buNone/>
+            </a:pPr>
+            <a:r>
+              <a:rPr lang="en-US" sz="1500" b="1" dirty="0">
+                <a:solidFill>
+                  <a:srgbClr val="EE7B08"/>
+                </a:solidFill>
+                <a:latin typeface="メイリオ" pitchFamily="34" charset="0"/>
+                <a:ea typeface="メイリオ" pitchFamily="34" charset="-122"/>
+                <a:cs typeface="メイリオ" pitchFamily="34" charset="-120"/>
+              </a:rPr>
+              <a:t>−15.5ポイント</a:t>
+            </a:r>
+            <a:endParaRPr lang="en-US" sz="1500" dirty="0"/>
+          </a:p>
+        </p:txBody>
+      </p:sp>
+      <p:sp>
+        <p:nvSpPr>
           <p:cNvPr id="5" name="Text 3"/>
           <p:cNvSpPr txBox="1"/>
           <p:nvPr/>
         </p:nvSpPr>
         <p:spPr>
           <a:xfrm>
-            <a:off x="576072" y="1865376"/>
-            <a:ext cx="7991856" cy="329184"/>
+            <a:off x="320040" y="2377440"/>
+            <a:ext cx="8503920" cy="292608"/>
           </a:xfrm>
           <a:prstGeom prst="rect">
             <a:avLst/>
@@ -8514,60 +8559,7 @@
               <a:buNone/>
             </a:pPr>
             <a:r>
-              <a:rPr lang="en-US" sz="1800" b="1" dirty="0">
-                <a:solidFill>
-                  <a:srgbClr val="44C1A3"/>
-                </a:solidFill>
-                <a:latin typeface="メイリオ" pitchFamily="34" charset="0"/>
-                <a:ea typeface="メイリオ" pitchFamily="34" charset="-122"/>
-                <a:cs typeface="メイリオ" pitchFamily="34" charset="-120"/>
-              </a:rPr>
-              <a:t>Q1　</a:t>
-            </a:r>
-            <a:pPr algn="l" indent="0" marL="0">
-              <a:buNone/>
-            </a:pPr>
-            <a:r>
-              <a:rPr lang="en-US" sz="1800" b="1" dirty="0">
-                <a:solidFill>
-                  <a:srgbClr val="595959"/>
-                </a:solidFill>
-                <a:latin typeface="メイリオ" pitchFamily="34" charset="0"/>
-                <a:ea typeface="メイリオ" pitchFamily="34" charset="-122"/>
-                <a:cs typeface="メイリオ" pitchFamily="34" charset="-120"/>
-              </a:rPr>
-              <a:t>「将来の夢や目標を持っていますか」</a:t>
-            </a:r>
-            <a:endParaRPr lang="en-US" sz="1800" dirty="0"/>
-          </a:p>
-        </p:txBody>
-      </p:sp>
-      <p:sp>
-        <p:nvSpPr>
-          <p:cNvPr id="6" name="Text 4"/>
-          <p:cNvSpPr txBox="1"/>
-          <p:nvPr/>
-        </p:nvSpPr>
-        <p:spPr>
-          <a:xfrm>
-            <a:off x="576072" y="2231136"/>
-            <a:ext cx="7991856" cy="274320"/>
-          </a:xfrm>
-          <a:prstGeom prst="rect">
-            <a:avLst/>
-          </a:prstGeom>
-          <a:noFill/>
-          <a:ln/>
-        </p:spPr>
-        <p:txBody>
-          <a:bodyPr wrap="square" lIns="0" tIns="0" rIns="0" bIns="0" rtlCol="0" anchor="ctr"/>
-          <a:lstStyle/>
-          <a:p>
-            <a:pPr algn="l" indent="0" marL="0">
-              <a:buNone/>
-            </a:pPr>
-            <a:r>
-              <a:rPr lang="en-US" sz="1400" b="1" dirty="0">
+              <a:rPr lang="en-US" sz="1300" b="1" dirty="0">
                 <a:solidFill>
                   <a:srgbClr val="808080"/>
                 </a:solidFill>
@@ -8575,26 +8567,145 @@
                 <a:ea typeface="メイリオ" pitchFamily="34" charset="-122"/>
                 <a:cs typeface="メイリオ" pitchFamily="34" charset="-120"/>
               </a:rPr>
-              <a:t>小学校６年生は 80.3％。では、中学校３年生は？</a:t>
-            </a:r>
-            <a:endParaRPr lang="en-US" sz="1400" dirty="0"/>
-          </a:p>
-        </p:txBody>
-      </p:sp>
-      <p:sp>
-        <p:nvSpPr>
-          <p:cNvPr id="7" name="Shape 5"/>
+              <a:t>では、本校（旧旭丘小学校・旧旭丘中学校）はどうだったでしょうか。</a:t>
+            </a:r>
+            <a:endParaRPr lang="en-US" sz="1300" dirty="0"/>
+          </a:p>
+        </p:txBody>
+      </p:sp>
+      <p:sp>
+        <p:nvSpPr>
+          <p:cNvPr id="6" name="Shape 4"/>
           <p:cNvSpPr/>
           <p:nvPr/>
         </p:nvSpPr>
         <p:spPr>
           <a:xfrm>
-            <a:off x="685800" y="2578608"/>
-            <a:ext cx="2057400" cy="384048"/>
+            <a:off x="320040" y="2724912"/>
+            <a:ext cx="8503920" cy="914400"/>
           </a:xfrm>
           <a:prstGeom prst="roundRect">
             <a:avLst>
-              <a:gd name="adj" fmla="val 16667"/>
+              <a:gd name="adj" fmla="val 6000"/>
+            </a:avLst>
+          </a:prstGeom>
+          <a:solidFill>
+            <a:srgbClr val="E9F7F3"/>
+          </a:solidFill>
+          <a:ln w="12700">
+            <a:solidFill>
+              <a:srgbClr val="B9E5DA"/>
+            </a:solidFill>
+            <a:prstDash val="solid"/>
+          </a:ln>
+        </p:spPr>
+      </p:sp>
+      <p:sp>
+        <p:nvSpPr>
+          <p:cNvPr id="7" name="Text 5"/>
+          <p:cNvSpPr txBox="1"/>
+          <p:nvPr/>
+        </p:nvSpPr>
+        <p:spPr>
+          <a:xfrm>
+            <a:off x="576072" y="2779776"/>
+            <a:ext cx="4800600" cy="292608"/>
+          </a:xfrm>
+          <a:prstGeom prst="rect">
+            <a:avLst/>
+          </a:prstGeom>
+          <a:noFill/>
+          <a:ln/>
+        </p:spPr>
+        <p:txBody>
+          <a:bodyPr wrap="square" lIns="0" tIns="0" rIns="0" bIns="0" rtlCol="0" anchor="ctr"/>
+          <a:lstStyle/>
+          <a:p>
+            <a:pPr algn="l" indent="0" marL="0">
+              <a:buNone/>
+            </a:pPr>
+            <a:r>
+              <a:rPr lang="en-US" sz="1500" b="1" dirty="0">
+                <a:solidFill>
+                  <a:srgbClr val="44C1A3"/>
+                </a:solidFill>
+                <a:latin typeface="メイリオ" pitchFamily="34" charset="0"/>
+                <a:ea typeface="メイリオ" pitchFamily="34" charset="-122"/>
+                <a:cs typeface="メイリオ" pitchFamily="34" charset="-120"/>
+              </a:rPr>
+              <a:t>Q1　</a:t>
+            </a:r>
+            <a:pPr algn="l" indent="0" marL="0">
+              <a:buNone/>
+            </a:pPr>
+            <a:r>
+              <a:rPr lang="en-US" sz="1500" b="1" dirty="0">
+                <a:solidFill>
+                  <a:srgbClr val="595959"/>
+                </a:solidFill>
+                <a:latin typeface="メイリオ" pitchFamily="34" charset="0"/>
+                <a:ea typeface="メイリオ" pitchFamily="34" charset="-122"/>
+                <a:cs typeface="メイリオ" pitchFamily="34" charset="-120"/>
+              </a:rPr>
+              <a:t>「英語の勉強は好きですか」</a:t>
+            </a:r>
+            <a:endParaRPr lang="en-US" sz="1500" dirty="0"/>
+          </a:p>
+        </p:txBody>
+      </p:sp>
+      <p:sp>
+        <p:nvSpPr>
+          <p:cNvPr id="8" name="Text 6"/>
+          <p:cNvSpPr txBox="1"/>
+          <p:nvPr/>
+        </p:nvSpPr>
+        <p:spPr>
+          <a:xfrm>
+            <a:off x="576072" y="3072384"/>
+            <a:ext cx="4800600" cy="256032"/>
+          </a:xfrm>
+          <a:prstGeom prst="rect">
+            <a:avLst/>
+          </a:prstGeom>
+          <a:noFill/>
+          <a:ln/>
+        </p:spPr>
+        <p:txBody>
+          <a:bodyPr wrap="square" lIns="0" tIns="0" rIns="0" bIns="0" rtlCol="0" anchor="ctr"/>
+          <a:lstStyle/>
+          <a:p>
+            <a:pPr algn="l" indent="0" marL="0">
+              <a:buNone/>
+            </a:pPr>
+            <a:r>
+              <a:rPr lang="en-US" sz="1200" b="1" dirty="0">
+                <a:solidFill>
+                  <a:srgbClr val="808080"/>
+                </a:solidFill>
+                <a:latin typeface="メイリオ" pitchFamily="34" charset="0"/>
+                <a:ea typeface="メイリオ" pitchFamily="34" charset="-122"/>
+                <a:cs typeface="メイリオ" pitchFamily="34" charset="-120"/>
+              </a:rPr>
+              <a:t>本校の小学部６年は 51.8％。では、中学部９年は？</a:t>
+            </a:r>
+            <a:endParaRPr lang="en-US" sz="1200" dirty="0"/>
+          </a:p>
+        </p:txBody>
+      </p:sp>
+      <p:sp>
+        <p:nvSpPr>
+          <p:cNvPr id="9" name="Shape 7"/>
+          <p:cNvSpPr/>
+          <p:nvPr/>
+        </p:nvSpPr>
+        <p:spPr>
+          <a:xfrm>
+            <a:off x="5486400" y="2999232"/>
+            <a:ext cx="969264" cy="365760"/>
+          </a:xfrm>
+          <a:prstGeom prst="roundRect">
+            <a:avLst>
+              <a:gd name="adj" fmla="val 15000"/>
             </a:avLst>
           </a:prstGeom>
           <a:solidFill>
@@ -8610,14 +8721,14 @@
       </p:sp>
       <p:sp>
         <p:nvSpPr>
-          <p:cNvPr id="8" name="Text 6"/>
-          <p:cNvSpPr txBox="1"/>
-          <p:nvPr/>
-        </p:nvSpPr>
-        <p:spPr>
-          <a:xfrm>
-            <a:off x="685800" y="2578608"/>
-            <a:ext cx="2057400" cy="384048"/>
+          <p:cNvPr id="10" name="Text 8"/>
+          <p:cNvSpPr txBox="1"/>
+          <p:nvPr/>
+        </p:nvSpPr>
+        <p:spPr>
+          <a:xfrm>
+            <a:off x="5486400" y="2999232"/>
+            <a:ext cx="969264" cy="365760"/>
           </a:xfrm>
           <a:prstGeom prst="rect">
             <a:avLst/>
@@ -8633,7 +8744,7 @@
               <a:buNone/>
             </a:pPr>
             <a:r>
-              <a:rPr lang="en-US" sz="1500" b="1" dirty="0">
+              <a:rPr lang="en-US" sz="1100" b="1" dirty="0">
                 <a:solidFill>
                   <a:srgbClr val="595959"/>
                 </a:solidFill>
@@ -8641,26 +8752,26 @@
                 <a:ea typeface="メイリオ" pitchFamily="34" charset="-122"/>
                 <a:cs typeface="メイリオ" pitchFamily="34" charset="-120"/>
               </a:rPr>
-              <a:t>① 約 80％</a:t>
-            </a:r>
-            <a:endParaRPr lang="en-US" sz="1500" dirty="0"/>
-          </a:p>
-        </p:txBody>
-      </p:sp>
-      <p:sp>
-        <p:nvSpPr>
-          <p:cNvPr id="9" name="Shape 7"/>
+              <a:t>① 約 42％</a:t>
+            </a:r>
+            <a:endParaRPr lang="en-US" sz="1100" dirty="0"/>
+          </a:p>
+        </p:txBody>
+      </p:sp>
+      <p:sp>
+        <p:nvSpPr>
+          <p:cNvPr id="11" name="Shape 9"/>
           <p:cNvSpPr/>
           <p:nvPr/>
         </p:nvSpPr>
         <p:spPr>
           <a:xfrm>
-            <a:off x="2926080" y="2578608"/>
-            <a:ext cx="2057400" cy="384048"/>
+            <a:off x="6547104" y="2999232"/>
+            <a:ext cx="969264" cy="365760"/>
           </a:xfrm>
           <a:prstGeom prst="roundRect">
             <a:avLst>
-              <a:gd name="adj" fmla="val 16667"/>
+              <a:gd name="adj" fmla="val 15000"/>
             </a:avLst>
           </a:prstGeom>
           <a:solidFill>
@@ -8676,14 +8787,14 @@
       </p:sp>
       <p:sp>
         <p:nvSpPr>
-          <p:cNvPr id="10" name="Text 8"/>
-          <p:cNvSpPr txBox="1"/>
-          <p:nvPr/>
-        </p:nvSpPr>
-        <p:spPr>
-          <a:xfrm>
-            <a:off x="2926080" y="2578608"/>
-            <a:ext cx="2057400" cy="384048"/>
+          <p:cNvPr id="12" name="Text 10"/>
+          <p:cNvSpPr txBox="1"/>
+          <p:nvPr/>
+        </p:nvSpPr>
+        <p:spPr>
+          <a:xfrm>
+            <a:off x="6547104" y="2999232"/>
+            <a:ext cx="969264" cy="365760"/>
           </a:xfrm>
           <a:prstGeom prst="rect">
             <a:avLst/>
@@ -8699,7 +8810,7 @@
               <a:buNone/>
             </a:pPr>
             <a:r>
-              <a:rPr lang="en-US" sz="1500" b="1" dirty="0">
+              <a:rPr lang="en-US" sz="1100" b="1" dirty="0">
                 <a:solidFill>
                   <a:srgbClr val="595959"/>
                 </a:solidFill>
@@ -8707,26 +8818,26 @@
                 <a:ea typeface="メイリオ" pitchFamily="34" charset="-122"/>
                 <a:cs typeface="メイリオ" pitchFamily="34" charset="-120"/>
               </a:rPr>
-              <a:t>② 約 73％</a:t>
-            </a:r>
-            <a:endParaRPr lang="en-US" sz="1500" dirty="0"/>
-          </a:p>
-        </p:txBody>
-      </p:sp>
-      <p:sp>
-        <p:nvSpPr>
-          <p:cNvPr id="11" name="Shape 9"/>
+              <a:t>② 約 52％</a:t>
+            </a:r>
+            <a:endParaRPr lang="en-US" sz="1100" dirty="0"/>
+          </a:p>
+        </p:txBody>
+      </p:sp>
+      <p:sp>
+        <p:nvSpPr>
+          <p:cNvPr id="13" name="Shape 11"/>
           <p:cNvSpPr/>
           <p:nvPr/>
         </p:nvSpPr>
         <p:spPr>
           <a:xfrm>
-            <a:off x="5166360" y="2578608"/>
-            <a:ext cx="2057400" cy="384048"/>
+            <a:off x="7607808" y="2999232"/>
+            <a:ext cx="969264" cy="365760"/>
           </a:xfrm>
           <a:prstGeom prst="roundRect">
             <a:avLst>
-              <a:gd name="adj" fmla="val 16667"/>
+              <a:gd name="adj" fmla="val 15000"/>
             </a:avLst>
           </a:prstGeom>
           <a:solidFill>
@@ -8742,14 +8853,14 @@
       </p:sp>
       <p:sp>
         <p:nvSpPr>
-          <p:cNvPr id="12" name="Text 10"/>
-          <p:cNvSpPr txBox="1"/>
-          <p:nvPr/>
-        </p:nvSpPr>
-        <p:spPr>
-          <a:xfrm>
-            <a:off x="5166360" y="2578608"/>
-            <a:ext cx="2057400" cy="384048"/>
+          <p:cNvPr id="14" name="Text 12"/>
+          <p:cNvSpPr txBox="1"/>
+          <p:nvPr/>
+        </p:nvSpPr>
+        <p:spPr>
+          <a:xfrm>
+            <a:off x="7607808" y="2999232"/>
+            <a:ext cx="969264" cy="365760"/>
           </a:xfrm>
           <a:prstGeom prst="rect">
             <a:avLst/>
@@ -8765,7 +8876,7 @@
               <a:buNone/>
             </a:pPr>
             <a:r>
-              <a:rPr lang="en-US" sz="1500" b="1" dirty="0">
+              <a:rPr lang="en-US" sz="1100" b="1" dirty="0">
                 <a:solidFill>
                   <a:srgbClr val="595959"/>
                 </a:solidFill>
@@ -8773,26 +8884,26 @@
                 <a:ea typeface="メイリオ" pitchFamily="34" charset="-122"/>
                 <a:cs typeface="メイリオ" pitchFamily="34" charset="-120"/>
               </a:rPr>
-              <a:t>③ 約 66％</a:t>
-            </a:r>
-            <a:endParaRPr lang="en-US" sz="1500" dirty="0"/>
-          </a:p>
-        </p:txBody>
-      </p:sp>
-      <p:sp>
-        <p:nvSpPr>
-          <p:cNvPr id="13" name="Shape 11"/>
+              <a:t>③ 約 62％</a:t>
+            </a:r>
+            <a:endParaRPr lang="en-US" sz="1100" dirty="0"/>
+          </a:p>
+        </p:txBody>
+      </p:sp>
+      <p:sp>
+        <p:nvSpPr>
+          <p:cNvPr id="15" name="Shape 13"/>
           <p:cNvSpPr/>
           <p:nvPr/>
         </p:nvSpPr>
         <p:spPr>
           <a:xfrm>
-            <a:off x="320040" y="3218688"/>
-            <a:ext cx="8503920" cy="1325880"/>
+            <a:off x="320040" y="3749040"/>
+            <a:ext cx="8503920" cy="914400"/>
           </a:xfrm>
           <a:prstGeom prst="roundRect">
             <a:avLst>
-              <a:gd name="adj" fmla="val 4138"/>
+              <a:gd name="adj" fmla="val 6000"/>
             </a:avLst>
           </a:prstGeom>
           <a:solidFill>
@@ -8808,14 +8919,14 @@
       </p:sp>
       <p:sp>
         <p:nvSpPr>
-          <p:cNvPr id="14" name="Text 12"/>
-          <p:cNvSpPr txBox="1"/>
-          <p:nvPr/>
-        </p:nvSpPr>
-        <p:spPr>
-          <a:xfrm>
-            <a:off x="576072" y="3328416"/>
-            <a:ext cx="7991856" cy="329184"/>
+          <p:cNvPr id="16" name="Text 14"/>
+          <p:cNvSpPr txBox="1"/>
+          <p:nvPr/>
+        </p:nvSpPr>
+        <p:spPr>
+          <a:xfrm>
+            <a:off x="576072" y="3803904"/>
+            <a:ext cx="4800600" cy="292608"/>
           </a:xfrm>
           <a:prstGeom prst="rect">
             <a:avLst/>
@@ -8831,7 +8942,7 @@
               <a:buNone/>
             </a:pPr>
             <a:r>
-              <a:rPr lang="en-US" sz="1800" b="1" dirty="0">
+              <a:rPr lang="en-US" sz="1500" b="1" dirty="0">
                 <a:solidFill>
                   <a:srgbClr val="44C1A3"/>
                 </a:solidFill>
@@ -8845,7 +8956,7 @@
               <a:buNone/>
             </a:pPr>
             <a:r>
-              <a:rPr lang="en-US" sz="1800" b="1" dirty="0">
+              <a:rPr lang="en-US" sz="1500" b="1" dirty="0">
                 <a:solidFill>
                   <a:srgbClr val="595959"/>
                 </a:solidFill>
@@ -8853,22 +8964,22 @@
                 <a:ea typeface="メイリオ" pitchFamily="34" charset="-122"/>
                 <a:cs typeface="メイリオ" pitchFamily="34" charset="-120"/>
               </a:rPr>
-              <a:t>「英語の勉強は好きですか」</a:t>
-            </a:r>
-            <a:endParaRPr lang="en-US" sz="1800" dirty="0"/>
-          </a:p>
-        </p:txBody>
-      </p:sp>
-      <p:sp>
-        <p:nvSpPr>
-          <p:cNvPr id="15" name="Text 13"/>
-          <p:cNvSpPr txBox="1"/>
-          <p:nvPr/>
-        </p:nvSpPr>
-        <p:spPr>
-          <a:xfrm>
-            <a:off x="576072" y="3694176"/>
-            <a:ext cx="7991856" cy="274320"/>
+              <a:t>「自分には、よいところがあると思いますか」</a:t>
+            </a:r>
+            <a:endParaRPr lang="en-US" sz="1500" dirty="0"/>
+          </a:p>
+        </p:txBody>
+      </p:sp>
+      <p:sp>
+        <p:nvSpPr>
+          <p:cNvPr id="17" name="Text 15"/>
+          <p:cNvSpPr txBox="1"/>
+          <p:nvPr/>
+        </p:nvSpPr>
+        <p:spPr>
+          <a:xfrm>
+            <a:off x="576072" y="4096512"/>
+            <a:ext cx="4800600" cy="256032"/>
           </a:xfrm>
           <a:prstGeom prst="rect">
             <a:avLst/>
@@ -8884,7 +8995,7 @@
               <a:buNone/>
             </a:pPr>
             <a:r>
-              <a:rPr lang="en-US" sz="1400" b="1" dirty="0">
+              <a:rPr lang="en-US" sz="1200" b="1" dirty="0">
                 <a:solidFill>
                   <a:srgbClr val="808080"/>
                 </a:solidFill>
@@ -8892,26 +9003,26 @@
                 <a:ea typeface="メイリオ" pitchFamily="34" charset="-122"/>
                 <a:cs typeface="メイリオ" pitchFamily="34" charset="-120"/>
               </a:rPr>
-              <a:t>小学校６年生は 68.2％。では、中学校３年生は？</a:t>
-            </a:r>
-            <a:endParaRPr lang="en-US" sz="1400" dirty="0"/>
-          </a:p>
-        </p:txBody>
-      </p:sp>
-      <p:sp>
-        <p:nvSpPr>
-          <p:cNvPr id="16" name="Shape 14"/>
+              <a:t>本校の小学部６年は 85.2％。では、中学部９年は？</a:t>
+            </a:r>
+            <a:endParaRPr lang="en-US" sz="1200" dirty="0"/>
+          </a:p>
+        </p:txBody>
+      </p:sp>
+      <p:sp>
+        <p:nvSpPr>
+          <p:cNvPr id="18" name="Shape 16"/>
           <p:cNvSpPr/>
           <p:nvPr/>
         </p:nvSpPr>
         <p:spPr>
           <a:xfrm>
-            <a:off x="685800" y="4041648"/>
-            <a:ext cx="2057400" cy="384048"/>
+            <a:off x="5486400" y="4023360"/>
+            <a:ext cx="969264" cy="365760"/>
           </a:xfrm>
           <a:prstGeom prst="roundRect">
             <a:avLst>
-              <a:gd name="adj" fmla="val 16667"/>
+              <a:gd name="adj" fmla="val 15000"/>
             </a:avLst>
           </a:prstGeom>
           <a:solidFill>
@@ -8927,14 +9038,14 @@
       </p:sp>
       <p:sp>
         <p:nvSpPr>
-          <p:cNvPr id="17" name="Text 15"/>
-          <p:cNvSpPr txBox="1"/>
-          <p:nvPr/>
-        </p:nvSpPr>
-        <p:spPr>
-          <a:xfrm>
-            <a:off x="685800" y="4041648"/>
-            <a:ext cx="2057400" cy="384048"/>
+          <p:cNvPr id="19" name="Text 17"/>
+          <p:cNvSpPr txBox="1"/>
+          <p:nvPr/>
+        </p:nvSpPr>
+        <p:spPr>
+          <a:xfrm>
+            <a:off x="5486400" y="4023360"/>
+            <a:ext cx="969264" cy="365760"/>
           </a:xfrm>
           <a:prstGeom prst="rect">
             <a:avLst/>
@@ -8950,7 +9061,7 @@
               <a:buNone/>
             </a:pPr>
             <a:r>
-              <a:rPr lang="en-US" sz="1500" b="1" dirty="0">
+              <a:rPr lang="en-US" sz="1100" b="1" dirty="0">
                 <a:solidFill>
                   <a:srgbClr val="595959"/>
                 </a:solidFill>
@@ -8958,26 +9069,26 @@
                 <a:ea typeface="メイリオ" pitchFamily="34" charset="-122"/>
                 <a:cs typeface="メイリオ" pitchFamily="34" charset="-120"/>
               </a:rPr>
-              <a:t>① 約 68％</a:t>
-            </a:r>
-            <a:endParaRPr lang="en-US" sz="1500" dirty="0"/>
-          </a:p>
-        </p:txBody>
-      </p:sp>
-      <p:sp>
-        <p:nvSpPr>
-          <p:cNvPr id="18" name="Shape 16"/>
+              <a:t>① 約 85％</a:t>
+            </a:r>
+            <a:endParaRPr lang="en-US" sz="1100" dirty="0"/>
+          </a:p>
+        </p:txBody>
+      </p:sp>
+      <p:sp>
+        <p:nvSpPr>
+          <p:cNvPr id="20" name="Shape 18"/>
           <p:cNvSpPr/>
           <p:nvPr/>
         </p:nvSpPr>
         <p:spPr>
           <a:xfrm>
-            <a:off x="2926080" y="4041648"/>
-            <a:ext cx="2057400" cy="384048"/>
+            <a:off x="6547104" y="4023360"/>
+            <a:ext cx="969264" cy="365760"/>
           </a:xfrm>
           <a:prstGeom prst="roundRect">
             <a:avLst>
-              <a:gd name="adj" fmla="val 16667"/>
+              <a:gd name="adj" fmla="val 15000"/>
             </a:avLst>
           </a:prstGeom>
           <a:solidFill>
@@ -8993,14 +9104,14 @@
       </p:sp>
       <p:sp>
         <p:nvSpPr>
-          <p:cNvPr id="19" name="Text 17"/>
-          <p:cNvSpPr txBox="1"/>
-          <p:nvPr/>
-        </p:nvSpPr>
-        <p:spPr>
-          <a:xfrm>
-            <a:off x="2926080" y="4041648"/>
-            <a:ext cx="2057400" cy="384048"/>
+          <p:cNvPr id="21" name="Text 19"/>
+          <p:cNvSpPr txBox="1"/>
+          <p:nvPr/>
+        </p:nvSpPr>
+        <p:spPr>
+          <a:xfrm>
+            <a:off x="6547104" y="4023360"/>
+            <a:ext cx="969264" cy="365760"/>
           </a:xfrm>
           <a:prstGeom prst="rect">
             <a:avLst/>
@@ -9016,7 +9127,7 @@
               <a:buNone/>
             </a:pPr>
             <a:r>
-              <a:rPr lang="en-US" sz="1500" b="1" dirty="0">
+              <a:rPr lang="en-US" sz="1100" b="1" dirty="0">
                 <a:solidFill>
                   <a:srgbClr val="595959"/>
                 </a:solidFill>
@@ -9024,26 +9135,26 @@
                 <a:ea typeface="メイリオ" pitchFamily="34" charset="-122"/>
                 <a:cs typeface="メイリオ" pitchFamily="34" charset="-120"/>
               </a:rPr>
-              <a:t>② 約 61％</a:t>
-            </a:r>
-            <a:endParaRPr lang="en-US" sz="1500" dirty="0"/>
-          </a:p>
-        </p:txBody>
-      </p:sp>
-      <p:sp>
-        <p:nvSpPr>
-          <p:cNvPr id="20" name="Shape 18"/>
+              <a:t>② 約 88％</a:t>
+            </a:r>
+            <a:endParaRPr lang="en-US" sz="1100" dirty="0"/>
+          </a:p>
+        </p:txBody>
+      </p:sp>
+      <p:sp>
+        <p:nvSpPr>
+          <p:cNvPr id="22" name="Shape 20"/>
           <p:cNvSpPr/>
           <p:nvPr/>
         </p:nvSpPr>
         <p:spPr>
           <a:xfrm>
-            <a:off x="5166360" y="4041648"/>
-            <a:ext cx="2057400" cy="384048"/>
+            <a:off x="7607808" y="4023360"/>
+            <a:ext cx="969264" cy="365760"/>
           </a:xfrm>
           <a:prstGeom prst="roundRect">
             <a:avLst>
-              <a:gd name="adj" fmla="val 16667"/>
+              <a:gd name="adj" fmla="val 15000"/>
             </a:avLst>
           </a:prstGeom>
           <a:solidFill>
@@ -9059,14 +9170,14 @@
       </p:sp>
       <p:sp>
         <p:nvSpPr>
-          <p:cNvPr id="21" name="Text 19"/>
-          <p:cNvSpPr txBox="1"/>
-          <p:nvPr/>
-        </p:nvSpPr>
-        <p:spPr>
-          <a:xfrm>
-            <a:off x="5166360" y="4041648"/>
-            <a:ext cx="2057400" cy="384048"/>
+          <p:cNvPr id="23" name="Text 21"/>
+          <p:cNvSpPr txBox="1"/>
+          <p:nvPr/>
+        </p:nvSpPr>
+        <p:spPr>
+          <a:xfrm>
+            <a:off x="7607808" y="4023360"/>
+            <a:ext cx="969264" cy="365760"/>
           </a:xfrm>
           <a:prstGeom prst="rect">
             <a:avLst/>
@@ -9082,7 +9193,7 @@
               <a:buNone/>
             </a:pPr>
             <a:r>
-              <a:rPr lang="en-US" sz="1500" b="1" dirty="0">
+              <a:rPr lang="en-US" sz="1100" b="1" dirty="0">
                 <a:solidFill>
                   <a:srgbClr val="595959"/>
                 </a:solidFill>
@@ -9090,9 +9201,9 @@
                 <a:ea typeface="メイリオ" pitchFamily="34" charset="-122"/>
                 <a:cs typeface="メイリオ" pitchFamily="34" charset="-120"/>
               </a:rPr>
-              <a:t>③ 約 55％</a:t>
-            </a:r>
-            <a:endParaRPr lang="en-US" sz="1500" dirty="0"/>
+              <a:t>③ 約 92％</a:t>
+            </a:r>
+            <a:endParaRPr lang="en-US" sz="1100" dirty="0"/>
           </a:p>
         </p:txBody>
       </p:sp>
@@ -9179,7 +9290,7 @@
                 <a:ea typeface="メイリオ" pitchFamily="34" charset="-122"/>
                 <a:cs typeface="メイリオ" pitchFamily="34" charset="-120"/>
               </a:rPr>
-              <a:t>　答え　小学校から中学校で、大きく下がる</a:t>
+              <a:t>　答え　本校では、中学部で上がっている</a:t>
             </a:r>
             <a:endParaRPr lang="en-US" sz="3000" dirty="0"/>
           </a:p>
@@ -9193,7 +9304,7 @@
         </p:nvSpPr>
         <p:spPr>
           <a:xfrm>
-            <a:off x="320040" y="1463040"/>
+            <a:off x="320040" y="1444752"/>
             <a:ext cx="8503920" cy="1325880"/>
           </a:xfrm>
           <a:prstGeom prst="roundRect">
@@ -9220,8 +9331,8 @@
         </p:nvSpPr>
         <p:spPr>
           <a:xfrm>
-            <a:off x="576072" y="1554480"/>
-            <a:ext cx="7991856" cy="292608"/>
+            <a:off x="576072" y="1517904"/>
+            <a:ext cx="5120640" cy="274320"/>
           </a:xfrm>
           <a:prstGeom prst="rect">
             <a:avLst/>
@@ -9245,7 +9356,7 @@
                 <a:ea typeface="メイリオ" pitchFamily="34" charset="-122"/>
                 <a:cs typeface="メイリオ" pitchFamily="34" charset="-120"/>
               </a:rPr>
-              <a:t>Q1　「将来の夢や目標を持っていますか」</a:t>
+              <a:t>Q1　「英語の勉強は好きですか」</a:t>
             </a:r>
             <a:endParaRPr lang="en-US" sz="1600" dirty="0"/>
           </a:p>
@@ -9253,13 +9364,52 @@
       </p:sp>
       <p:sp>
         <p:nvSpPr>
-          <p:cNvPr id="5" name="Shape 3"/>
+          <p:cNvPr id="5" name="Text 3"/>
+          <p:cNvSpPr txBox="1"/>
+          <p:nvPr/>
+        </p:nvSpPr>
+        <p:spPr>
+          <a:xfrm>
+            <a:off x="5669280" y="1517904"/>
+            <a:ext cx="2898648" cy="274320"/>
+          </a:xfrm>
+          <a:prstGeom prst="rect">
+            <a:avLst/>
+          </a:prstGeom>
+          <a:noFill/>
+          <a:ln/>
+        </p:spPr>
+        <p:txBody>
+          <a:bodyPr wrap="square" lIns="0" tIns="0" rIns="0" bIns="0" rtlCol="0" anchor="ctr"/>
+          <a:lstStyle/>
+          <a:p>
+            <a:pPr algn="r" indent="0" marL="0">
+              <a:buNone/>
+            </a:pPr>
+            <a:r>
+              <a:rPr lang="en-US" sz="1100" b="1" dirty="0">
+                <a:solidFill>
+                  <a:srgbClr val="808080"/>
+                </a:solidFill>
+                <a:latin typeface="メイリオ" pitchFamily="34" charset="0"/>
+                <a:ea typeface="メイリオ" pitchFamily="34" charset="-122"/>
+                <a:cs typeface="メイリオ" pitchFamily="34" charset="-120"/>
+              </a:rPr>
+              <a:t>全国は 66.7 → 51.2　−15.5ポイント</a:t>
+            </a:r>
+            <a:endParaRPr lang="en-US" sz="1100" dirty="0"/>
+          </a:p>
+        </p:txBody>
+      </p:sp>
+      <p:sp>
+        <p:nvSpPr>
+          <p:cNvPr id="6" name="Shape 4"/>
           <p:cNvSpPr/>
           <p:nvPr/>
         </p:nvSpPr>
         <p:spPr>
           <a:xfrm>
-            <a:off x="576072" y="1975104"/>
+            <a:off x="576072" y="1956816"/>
             <a:ext cx="1463040" cy="438912"/>
           </a:xfrm>
           <a:prstGeom prst="roundRect">
@@ -9268,20 +9418,25 @@
             </a:avLst>
           </a:prstGeom>
           <a:solidFill>
-            <a:srgbClr val="44C1A3"/>
+            <a:srgbClr val="E9F7F3"/>
           </a:solidFill>
-          <a:ln/>
-        </p:spPr>
-      </p:sp>
-      <p:sp>
-        <p:nvSpPr>
-          <p:cNvPr id="6" name="Text 4"/>
-          <p:cNvSpPr txBox="1"/>
-          <p:nvPr/>
-        </p:nvSpPr>
-        <p:spPr>
-          <a:xfrm>
-            <a:off x="576072" y="1975104"/>
+          <a:ln w="12700">
+            <a:solidFill>
+              <a:srgbClr val="B9E5DA"/>
+            </a:solidFill>
+            <a:prstDash val="solid"/>
+          </a:ln>
+        </p:spPr>
+      </p:sp>
+      <p:sp>
+        <p:nvSpPr>
+          <p:cNvPr id="7" name="Text 5"/>
+          <p:cNvSpPr txBox="1"/>
+          <p:nvPr/>
+        </p:nvSpPr>
+        <p:spPr>
+          <a:xfrm>
+            <a:off x="576072" y="1956816"/>
             <a:ext cx="1463040" cy="438912"/>
           </a:xfrm>
           <a:prstGeom prst="rect">
@@ -9298,29 +9453,29 @@
               <a:buNone/>
             </a:pPr>
             <a:r>
-              <a:rPr lang="en-US" sz="1300" b="1" dirty="0">
-                <a:solidFill>
-                  <a:srgbClr val="FFFFFF"/>
-                </a:solidFill>
-                <a:latin typeface="メイリオ" pitchFamily="34" charset="0"/>
-                <a:ea typeface="メイリオ" pitchFamily="34" charset="-122"/>
-                <a:cs typeface="メイリオ" pitchFamily="34" charset="-120"/>
-              </a:rPr>
-              <a:t>小学校６年生</a:t>
-            </a:r>
-            <a:endParaRPr lang="en-US" sz="1300" dirty="0"/>
-          </a:p>
-        </p:txBody>
-      </p:sp>
-      <p:sp>
-        <p:nvSpPr>
-          <p:cNvPr id="7" name="Text 5"/>
-          <p:cNvSpPr txBox="1"/>
-          <p:nvPr/>
-        </p:nvSpPr>
-        <p:spPr>
-          <a:xfrm>
-            <a:off x="2130552" y="1901952"/>
+              <a:rPr lang="en-US" sz="1200" b="1" dirty="0">
+                <a:solidFill>
+                  <a:srgbClr val="44C1A3"/>
+                </a:solidFill>
+                <a:latin typeface="メイリオ" pitchFamily="34" charset="0"/>
+                <a:ea typeface="メイリオ" pitchFamily="34" charset="-122"/>
+                <a:cs typeface="メイリオ" pitchFamily="34" charset="-120"/>
+              </a:rPr>
+              <a:t>小学部（６年）</a:t>
+            </a:r>
+            <a:endParaRPr lang="en-US" sz="1200" dirty="0"/>
+          </a:p>
+        </p:txBody>
+      </p:sp>
+      <p:sp>
+        <p:nvSpPr>
+          <p:cNvPr id="8" name="Text 6"/>
+          <p:cNvSpPr txBox="1"/>
+          <p:nvPr/>
+        </p:nvSpPr>
+        <p:spPr>
+          <a:xfrm>
+            <a:off x="2130552" y="1883664"/>
             <a:ext cx="1417320" cy="585216"/>
           </a:xfrm>
           <a:prstGeom prst="rect">
@@ -9345,7 +9500,7 @@
                 <a:ea typeface="メイリオ" pitchFamily="34" charset="-122"/>
                 <a:cs typeface="メイリオ" pitchFamily="34" charset="-120"/>
               </a:rPr>
-              <a:t>80.3</a:t>
+              <a:t>51.8</a:t>
             </a:r>
             <a:pPr algn="l" indent="0" marL="0">
               <a:buNone/>
@@ -9367,13 +9522,13 @@
       </p:sp>
       <p:sp>
         <p:nvSpPr>
-          <p:cNvPr id="8" name="Text 6"/>
-          <p:cNvSpPr txBox="1"/>
-          <p:nvPr/>
-        </p:nvSpPr>
-        <p:spPr>
-          <a:xfrm>
-            <a:off x="3584448" y="1938528"/>
+          <p:cNvPr id="9" name="Text 7"/>
+          <p:cNvSpPr txBox="1"/>
+          <p:nvPr/>
+        </p:nvSpPr>
+        <p:spPr>
+          <a:xfrm>
+            <a:off x="3584448" y="1920240"/>
             <a:ext cx="457200" cy="512064"/>
           </a:xfrm>
           <a:prstGeom prst="rect">
@@ -9406,13 +9561,13 @@
       </p:sp>
       <p:sp>
         <p:nvSpPr>
-          <p:cNvPr id="9" name="Shape 7"/>
+          <p:cNvPr id="10" name="Shape 8"/>
           <p:cNvSpPr/>
           <p:nvPr/>
         </p:nvSpPr>
         <p:spPr>
           <a:xfrm>
-            <a:off x="4078224" y="1975104"/>
+            <a:off x="4078224" y="1956816"/>
             <a:ext cx="1463040" cy="438912"/>
           </a:xfrm>
           <a:prstGeom prst="roundRect">
@@ -9421,20 +9576,20 @@
             </a:avLst>
           </a:prstGeom>
           <a:solidFill>
-            <a:srgbClr val="EE7B08"/>
+            <a:srgbClr val="44C1A3"/>
           </a:solidFill>
           <a:ln/>
         </p:spPr>
       </p:sp>
       <p:sp>
         <p:nvSpPr>
-          <p:cNvPr id="10" name="Text 8"/>
-          <p:cNvSpPr txBox="1"/>
-          <p:nvPr/>
-        </p:nvSpPr>
-        <p:spPr>
-          <a:xfrm>
-            <a:off x="4078224" y="1975104"/>
+          <p:cNvPr id="11" name="Text 9"/>
+          <p:cNvSpPr txBox="1"/>
+          <p:nvPr/>
+        </p:nvSpPr>
+        <p:spPr>
+          <a:xfrm>
+            <a:off x="4078224" y="1956816"/>
             <a:ext cx="1463040" cy="438912"/>
           </a:xfrm>
           <a:prstGeom prst="rect">
@@ -9451,7 +9606,7 @@
               <a:buNone/>
             </a:pPr>
             <a:r>
-              <a:rPr lang="en-US" sz="1300" b="1" dirty="0">
+              <a:rPr lang="en-US" sz="1200" b="1" dirty="0">
                 <a:solidFill>
                   <a:srgbClr val="FFFFFF"/>
                 </a:solidFill>
@@ -9459,21 +9614,21 @@
                 <a:ea typeface="メイリオ" pitchFamily="34" charset="-122"/>
                 <a:cs typeface="メイリオ" pitchFamily="34" charset="-120"/>
               </a:rPr>
-              <a:t>中学校３年生</a:t>
-            </a:r>
-            <a:endParaRPr lang="en-US" sz="1300" dirty="0"/>
-          </a:p>
-        </p:txBody>
-      </p:sp>
-      <p:sp>
-        <p:nvSpPr>
-          <p:cNvPr id="11" name="Text 9"/>
-          <p:cNvSpPr txBox="1"/>
-          <p:nvPr/>
-        </p:nvSpPr>
-        <p:spPr>
-          <a:xfrm>
-            <a:off x="5632704" y="1901952"/>
+              <a:t>中学部（９年）</a:t>
+            </a:r>
+            <a:endParaRPr lang="en-US" sz="1200" dirty="0"/>
+          </a:p>
+        </p:txBody>
+      </p:sp>
+      <p:sp>
+        <p:nvSpPr>
+          <p:cNvPr id="12" name="Text 10"/>
+          <p:cNvSpPr txBox="1"/>
+          <p:nvPr/>
+        </p:nvSpPr>
+        <p:spPr>
+          <a:xfrm>
+            <a:off x="5632704" y="1883664"/>
             <a:ext cx="1417320" cy="585216"/>
           </a:xfrm>
           <a:prstGeom prst="rect">
@@ -9498,7 +9653,7 @@
                 <a:ea typeface="メイリオ" pitchFamily="34" charset="-122"/>
                 <a:cs typeface="メイリオ" pitchFamily="34" charset="-120"/>
               </a:rPr>
-              <a:t>65.5</a:t>
+              <a:t>61.7</a:t>
             </a:r>
             <a:pPr algn="l" indent="0" marL="0">
               <a:buNone/>
@@ -9520,13 +9675,13 @@
       </p:sp>
       <p:sp>
         <p:nvSpPr>
-          <p:cNvPr id="12" name="Shape 10"/>
+          <p:cNvPr id="13" name="Shape 11"/>
           <p:cNvSpPr/>
           <p:nvPr/>
         </p:nvSpPr>
         <p:spPr>
           <a:xfrm>
-            <a:off x="7086600" y="1901952"/>
+            <a:off x="7086600" y="1883664"/>
             <a:ext cx="1481328" cy="585216"/>
           </a:xfrm>
           <a:prstGeom prst="roundRect">
@@ -9547,13 +9702,13 @@
       </p:sp>
       <p:sp>
         <p:nvSpPr>
-          <p:cNvPr id="13" name="Text 11"/>
-          <p:cNvSpPr txBox="1"/>
-          <p:nvPr/>
-        </p:nvSpPr>
-        <p:spPr>
-          <a:xfrm>
-            <a:off x="7086600" y="1901952"/>
+          <p:cNvPr id="14" name="Text 12"/>
+          <p:cNvSpPr txBox="1"/>
+          <p:nvPr/>
+        </p:nvSpPr>
+        <p:spPr>
+          <a:xfrm>
+            <a:off x="7086600" y="1883664"/>
             <a:ext cx="1481328" cy="585216"/>
           </a:xfrm>
           <a:prstGeom prst="rect">
@@ -9581,7 +9736,7 @@
                 <a:ea typeface="メイリオ" pitchFamily="34" charset="-122"/>
                 <a:cs typeface="メイリオ" pitchFamily="34" charset="-120"/>
               </a:rPr>
-              <a:t>−14.8</a:t>
+              <a:t>＋9.9</a:t>
             </a:r>
             <a:endParaRPr lang="en-US" sz="2000" dirty="0"/>
           </a:p>
@@ -9609,13 +9764,13 @@
       </p:sp>
       <p:sp>
         <p:nvSpPr>
-          <p:cNvPr id="14" name="Shape 12"/>
+          <p:cNvPr id="15" name="Shape 13"/>
           <p:cNvSpPr/>
           <p:nvPr/>
         </p:nvSpPr>
         <p:spPr>
           <a:xfrm>
-            <a:off x="320040" y="2926080"/>
+            <a:off x="320040" y="2907792"/>
             <a:ext cx="8503920" cy="1325880"/>
           </a:xfrm>
           <a:prstGeom prst="roundRect">
@@ -9636,14 +9791,14 @@
       </p:sp>
       <p:sp>
         <p:nvSpPr>
-          <p:cNvPr id="15" name="Text 13"/>
-          <p:cNvSpPr txBox="1"/>
-          <p:nvPr/>
-        </p:nvSpPr>
-        <p:spPr>
-          <a:xfrm>
-            <a:off x="576072" y="3017520"/>
-            <a:ext cx="7991856" cy="292608"/>
+          <p:cNvPr id="16" name="Text 14"/>
+          <p:cNvSpPr txBox="1"/>
+          <p:nvPr/>
+        </p:nvSpPr>
+        <p:spPr>
+          <a:xfrm>
+            <a:off x="576072" y="2980944"/>
+            <a:ext cx="5120640" cy="274320"/>
           </a:xfrm>
           <a:prstGeom prst="rect">
             <a:avLst/>
@@ -9667,7 +9822,7 @@
                 <a:ea typeface="メイリオ" pitchFamily="34" charset="-122"/>
                 <a:cs typeface="メイリオ" pitchFamily="34" charset="-120"/>
               </a:rPr>
-              <a:t>Q2　「英語の勉強は好きですか」</a:t>
+              <a:t>Q2　「自分には、よいところがあると思いますか」</a:t>
             </a:r>
             <a:endParaRPr lang="en-US" sz="1600" dirty="0"/>
           </a:p>
@@ -9675,13 +9830,52 @@
       </p:sp>
       <p:sp>
         <p:nvSpPr>
-          <p:cNvPr id="16" name="Shape 14"/>
+          <p:cNvPr id="17" name="Text 15"/>
+          <p:cNvSpPr txBox="1"/>
+          <p:nvPr/>
+        </p:nvSpPr>
+        <p:spPr>
+          <a:xfrm>
+            <a:off x="5669280" y="2980944"/>
+            <a:ext cx="2898648" cy="274320"/>
+          </a:xfrm>
+          <a:prstGeom prst="rect">
+            <a:avLst/>
+          </a:prstGeom>
+          <a:noFill/>
+          <a:ln/>
+        </p:spPr>
+        <p:txBody>
+          <a:bodyPr wrap="square" lIns="0" tIns="0" rIns="0" bIns="0" rtlCol="0" anchor="ctr"/>
+          <a:lstStyle/>
+          <a:p>
+            <a:pPr algn="r" indent="0" marL="0">
+              <a:buNone/>
+            </a:pPr>
+            <a:r>
+              <a:rPr lang="en-US" sz="1100" b="1" dirty="0">
+                <a:solidFill>
+                  <a:srgbClr val="808080"/>
+                </a:solidFill>
+                <a:latin typeface="メイリオ" pitchFamily="34" charset="0"/>
+                <a:ea typeface="メイリオ" pitchFamily="34" charset="-122"/>
+                <a:cs typeface="メイリオ" pitchFamily="34" charset="-120"/>
+              </a:rPr>
+              <a:t>全国は 85.6 → 84.0　−1.6ポイント</a:t>
+            </a:r>
+            <a:endParaRPr lang="en-US" sz="1100" dirty="0"/>
+          </a:p>
+        </p:txBody>
+      </p:sp>
+      <p:sp>
+        <p:nvSpPr>
+          <p:cNvPr id="18" name="Shape 16"/>
           <p:cNvSpPr/>
           <p:nvPr/>
         </p:nvSpPr>
         <p:spPr>
           <a:xfrm>
-            <a:off x="576072" y="3438144"/>
+            <a:off x="576072" y="3419856"/>
             <a:ext cx="1463040" cy="438912"/>
           </a:xfrm>
           <a:prstGeom prst="roundRect">
@@ -9690,20 +9884,25 @@
             </a:avLst>
           </a:prstGeom>
           <a:solidFill>
-            <a:srgbClr val="44C1A3"/>
+            <a:srgbClr val="E9F7F3"/>
           </a:solidFill>
-          <a:ln/>
-        </p:spPr>
-      </p:sp>
-      <p:sp>
-        <p:nvSpPr>
-          <p:cNvPr id="17" name="Text 15"/>
-          <p:cNvSpPr txBox="1"/>
-          <p:nvPr/>
-        </p:nvSpPr>
-        <p:spPr>
-          <a:xfrm>
-            <a:off x="576072" y="3438144"/>
+          <a:ln w="12700">
+            <a:solidFill>
+              <a:srgbClr val="B9E5DA"/>
+            </a:solidFill>
+            <a:prstDash val="solid"/>
+          </a:ln>
+        </p:spPr>
+      </p:sp>
+      <p:sp>
+        <p:nvSpPr>
+          <p:cNvPr id="19" name="Text 17"/>
+          <p:cNvSpPr txBox="1"/>
+          <p:nvPr/>
+        </p:nvSpPr>
+        <p:spPr>
+          <a:xfrm>
+            <a:off x="576072" y="3419856"/>
             <a:ext cx="1463040" cy="438912"/>
           </a:xfrm>
           <a:prstGeom prst="rect">
@@ -9720,29 +9919,29 @@
               <a:buNone/>
             </a:pPr>
             <a:r>
-              <a:rPr lang="en-US" sz="1300" b="1" dirty="0">
-                <a:solidFill>
-                  <a:srgbClr val="FFFFFF"/>
-                </a:solidFill>
-                <a:latin typeface="メイリオ" pitchFamily="34" charset="0"/>
-                <a:ea typeface="メイリオ" pitchFamily="34" charset="-122"/>
-                <a:cs typeface="メイリオ" pitchFamily="34" charset="-120"/>
-              </a:rPr>
-              <a:t>小学校６年生</a:t>
-            </a:r>
-            <a:endParaRPr lang="en-US" sz="1300" dirty="0"/>
-          </a:p>
-        </p:txBody>
-      </p:sp>
-      <p:sp>
-        <p:nvSpPr>
-          <p:cNvPr id="18" name="Text 16"/>
-          <p:cNvSpPr txBox="1"/>
-          <p:nvPr/>
-        </p:nvSpPr>
-        <p:spPr>
-          <a:xfrm>
-            <a:off x="2130552" y="3364992"/>
+              <a:rPr lang="en-US" sz="1200" b="1" dirty="0">
+                <a:solidFill>
+                  <a:srgbClr val="44C1A3"/>
+                </a:solidFill>
+                <a:latin typeface="メイリオ" pitchFamily="34" charset="0"/>
+                <a:ea typeface="メイリオ" pitchFamily="34" charset="-122"/>
+                <a:cs typeface="メイリオ" pitchFamily="34" charset="-120"/>
+              </a:rPr>
+              <a:t>小学部（６年）</a:t>
+            </a:r>
+            <a:endParaRPr lang="en-US" sz="1200" dirty="0"/>
+          </a:p>
+        </p:txBody>
+      </p:sp>
+      <p:sp>
+        <p:nvSpPr>
+          <p:cNvPr id="20" name="Text 18"/>
+          <p:cNvSpPr txBox="1"/>
+          <p:nvPr/>
+        </p:nvSpPr>
+        <p:spPr>
+          <a:xfrm>
+            <a:off x="2130552" y="3346704"/>
             <a:ext cx="1417320" cy="585216"/>
           </a:xfrm>
           <a:prstGeom prst="rect">
@@ -9767,7 +9966,7 @@
                 <a:ea typeface="メイリオ" pitchFamily="34" charset="-122"/>
                 <a:cs typeface="メイリオ" pitchFamily="34" charset="-120"/>
               </a:rPr>
-              <a:t>68.2</a:t>
+              <a:t>85.2</a:t>
             </a:r>
             <a:pPr algn="l" indent="0" marL="0">
               <a:buNone/>
@@ -9789,13 +9988,13 @@
       </p:sp>
       <p:sp>
         <p:nvSpPr>
-          <p:cNvPr id="19" name="Text 17"/>
-          <p:cNvSpPr txBox="1"/>
-          <p:nvPr/>
-        </p:nvSpPr>
-        <p:spPr>
-          <a:xfrm>
-            <a:off x="3584448" y="3401568"/>
+          <p:cNvPr id="21" name="Text 19"/>
+          <p:cNvSpPr txBox="1"/>
+          <p:nvPr/>
+        </p:nvSpPr>
+        <p:spPr>
+          <a:xfrm>
+            <a:off x="3584448" y="3383280"/>
             <a:ext cx="457200" cy="512064"/>
           </a:xfrm>
           <a:prstGeom prst="rect">
@@ -9828,13 +10027,13 @@
       </p:sp>
       <p:sp>
         <p:nvSpPr>
-          <p:cNvPr id="20" name="Shape 18"/>
+          <p:cNvPr id="22" name="Shape 20"/>
           <p:cNvSpPr/>
           <p:nvPr/>
         </p:nvSpPr>
         <p:spPr>
           <a:xfrm>
-            <a:off x="4078224" y="3438144"/>
+            <a:off x="4078224" y="3419856"/>
             <a:ext cx="1463040" cy="438912"/>
           </a:xfrm>
           <a:prstGeom prst="roundRect">
@@ -9843,20 +10042,20 @@
             </a:avLst>
           </a:prstGeom>
           <a:solidFill>
-            <a:srgbClr val="EE7B08"/>
+            <a:srgbClr val="44C1A3"/>
           </a:solidFill>
           <a:ln/>
         </p:spPr>
       </p:sp>
       <p:sp>
         <p:nvSpPr>
-          <p:cNvPr id="21" name="Text 19"/>
-          <p:cNvSpPr txBox="1"/>
-          <p:nvPr/>
-        </p:nvSpPr>
-        <p:spPr>
-          <a:xfrm>
-            <a:off x="4078224" y="3438144"/>
+          <p:cNvPr id="23" name="Text 21"/>
+          <p:cNvSpPr txBox="1"/>
+          <p:nvPr/>
+        </p:nvSpPr>
+        <p:spPr>
+          <a:xfrm>
+            <a:off x="4078224" y="3419856"/>
             <a:ext cx="1463040" cy="438912"/>
           </a:xfrm>
           <a:prstGeom prst="rect">
@@ -9873,7 +10072,7 @@
               <a:buNone/>
             </a:pPr>
             <a:r>
-              <a:rPr lang="en-US" sz="1300" b="1" dirty="0">
+              <a:rPr lang="en-US" sz="1200" b="1" dirty="0">
                 <a:solidFill>
                   <a:srgbClr val="FFFFFF"/>
                 </a:solidFill>
@@ -9881,21 +10080,21 @@
                 <a:ea typeface="メイリオ" pitchFamily="34" charset="-122"/>
                 <a:cs typeface="メイリオ" pitchFamily="34" charset="-120"/>
               </a:rPr>
-              <a:t>中学校３年生</a:t>
-            </a:r>
-            <a:endParaRPr lang="en-US" sz="1300" dirty="0"/>
-          </a:p>
-        </p:txBody>
-      </p:sp>
-      <p:sp>
-        <p:nvSpPr>
-          <p:cNvPr id="22" name="Text 20"/>
-          <p:cNvSpPr txBox="1"/>
-          <p:nvPr/>
-        </p:nvSpPr>
-        <p:spPr>
-          <a:xfrm>
-            <a:off x="5632704" y="3364992"/>
+              <a:t>中学部（９年）</a:t>
+            </a:r>
+            <a:endParaRPr lang="en-US" sz="1200" dirty="0"/>
+          </a:p>
+        </p:txBody>
+      </p:sp>
+      <p:sp>
+        <p:nvSpPr>
+          <p:cNvPr id="24" name="Text 22"/>
+          <p:cNvSpPr txBox="1"/>
+          <p:nvPr/>
+        </p:nvSpPr>
+        <p:spPr>
+          <a:xfrm>
+            <a:off x="5632704" y="3346704"/>
             <a:ext cx="1417320" cy="585216"/>
           </a:xfrm>
           <a:prstGeom prst="rect">
@@ -9920,7 +10119,7 @@
                 <a:ea typeface="メイリオ" pitchFamily="34" charset="-122"/>
                 <a:cs typeface="メイリオ" pitchFamily="34" charset="-120"/>
               </a:rPr>
-              <a:t>54.7</a:t>
+              <a:t>91.5</a:t>
             </a:r>
             <a:pPr algn="l" indent="0" marL="0">
               <a:buNone/>
@@ -9942,13 +10141,13 @@
       </p:sp>
       <p:sp>
         <p:nvSpPr>
-          <p:cNvPr id="23" name="Shape 21"/>
+          <p:cNvPr id="25" name="Shape 23"/>
           <p:cNvSpPr/>
           <p:nvPr/>
         </p:nvSpPr>
         <p:spPr>
           <a:xfrm>
-            <a:off x="7086600" y="3364992"/>
+            <a:off x="7086600" y="3346704"/>
             <a:ext cx="1481328" cy="585216"/>
           </a:xfrm>
           <a:prstGeom prst="roundRect">
@@ -9969,13 +10168,13 @@
       </p:sp>
       <p:sp>
         <p:nvSpPr>
-          <p:cNvPr id="24" name="Text 22"/>
-          <p:cNvSpPr txBox="1"/>
-          <p:nvPr/>
-        </p:nvSpPr>
-        <p:spPr>
-          <a:xfrm>
-            <a:off x="7086600" y="3364992"/>
+          <p:cNvPr id="26" name="Text 24"/>
+          <p:cNvSpPr txBox="1"/>
+          <p:nvPr/>
+        </p:nvSpPr>
+        <p:spPr>
+          <a:xfrm>
+            <a:off x="7086600" y="3346704"/>
             <a:ext cx="1481328" cy="585216"/>
           </a:xfrm>
           <a:prstGeom prst="rect">
@@ -10003,7 +10202,7 @@
                 <a:ea typeface="メイリオ" pitchFamily="34" charset="-122"/>
                 <a:cs typeface="メイリオ" pitchFamily="34" charset="-120"/>
               </a:rPr>
-              <a:t>−13.5</a:t>
+              <a:t>＋6.3</a:t>
             </a:r>
             <a:endParaRPr lang="en-US" sz="2000" dirty="0"/>
           </a:p>
@@ -10031,14 +10230,14 @@
       </p:sp>
       <p:sp>
         <p:nvSpPr>
-          <p:cNvPr id="25" name="Text 23"/>
-          <p:cNvSpPr txBox="1"/>
-          <p:nvPr/>
-        </p:nvSpPr>
-        <p:spPr>
-          <a:xfrm>
-            <a:off x="320040" y="4389120"/>
-            <a:ext cx="8503920" cy="274320"/>
+          <p:cNvPr id="27" name="Text 25"/>
+          <p:cNvSpPr txBox="1"/>
+          <p:nvPr/>
+        </p:nvSpPr>
+        <p:spPr>
+          <a:xfrm>
+            <a:off x="320040" y="4315968"/>
+            <a:ext cx="8503920" cy="347472"/>
           </a:xfrm>
           <a:prstGeom prst="rect">
             <a:avLst/>
@@ -10054,7 +10253,46 @@
               <a:buNone/>
             </a:pPr>
             <a:r>
-              <a:rPr lang="en-US" sz="1100" b="1" dirty="0">
+              <a:rPr lang="en-US" sz="1800" b="1" dirty="0">
+                <a:solidFill>
+                  <a:srgbClr val="595959"/>
+                </a:solidFill>
+                <a:latin typeface="メイリオ" pitchFamily="34" charset="0"/>
+                <a:ea typeface="メイリオ" pitchFamily="34" charset="-122"/>
+                <a:cs typeface="メイリオ" pitchFamily="34" charset="-120"/>
+              </a:rPr>
+              <a:t>全国も東京都も下がる項目で、本校は上がっている。</a:t>
+            </a:r>
+            <a:endParaRPr lang="en-US" sz="1800" dirty="0"/>
+          </a:p>
+        </p:txBody>
+      </p:sp>
+      <p:sp>
+        <p:nvSpPr>
+          <p:cNvPr id="28" name="Text 26"/>
+          <p:cNvSpPr txBox="1"/>
+          <p:nvPr/>
+        </p:nvSpPr>
+        <p:spPr>
+          <a:xfrm>
+            <a:off x="320040" y="4700016"/>
+            <a:ext cx="8503920" cy="237744"/>
+          </a:xfrm>
+          <a:prstGeom prst="rect">
+            <a:avLst/>
+          </a:prstGeom>
+          <a:noFill/>
+          <a:ln/>
+        </p:spPr>
+        <p:txBody>
+          <a:bodyPr wrap="square" lIns="0" tIns="0" rIns="0" bIns="0" rtlCol="0" anchor="ctr"/>
+          <a:lstStyle/>
+          <a:p>
+            <a:pPr algn="l" indent="0" marL="0">
+              <a:buNone/>
+            </a:pPr>
+            <a:r>
+              <a:rPr lang="en-US" sz="950" b="1" dirty="0">
                 <a:solidFill>
                   <a:srgbClr val="808080"/>
                 </a:solidFill>
@@ -10062,9 +10300,9 @@
                 <a:ea typeface="メイリオ" pitchFamily="34" charset="-122"/>
                 <a:cs typeface="メイリオ" pitchFamily="34" charset="-120"/>
               </a:rPr>
-              <a:t>出典：令和８年度 全国学力・学習状況調査（練馬区）　質問紙調査　肯定的回答の割合</a:t>
-            </a:r>
-            <a:endParaRPr lang="en-US" sz="1100" dirty="0"/>
+              <a:t>出典：令和８年度 全国学力・学習状況調査　回答結果集計表　肯定的回答の割合　本校 小学部27名・中学部47名</a:t>
+            </a:r>
+            <a:endParaRPr lang="en-US" sz="950" dirty="0"/>
           </a:p>
         </p:txBody>
       </p:sp>
@@ -10151,7 +10389,7 @@
                 <a:ea typeface="メイリオ" pitchFamily="34" charset="-122"/>
                 <a:cs typeface="メイリオ" pitchFamily="34" charset="-120"/>
               </a:rPr>
-              <a:t>　この段差は、必然ではない</a:t>
+              <a:t>　これが、小中一貫教育校の強みである</a:t>
             </a:r>
             <a:endParaRPr lang="en-US" sz="3000" dirty="0"/>
           </a:p>
@@ -10165,27 +10403,24 @@
         </p:nvSpPr>
         <p:spPr>
           <a:xfrm>
-            <a:off x="475488" y="1444752"/>
-            <a:ext cx="8193024" cy="777240"/>
-          </a:xfrm>
-          <a:prstGeom prst="rect">
-            <a:avLst/>
-          </a:prstGeom>
-          <a:noFill/>
-          <a:ln/>
-        </p:spPr>
-        <p:txBody>
-          <a:bodyPr wrap="square" lIns="0" tIns="0" rIns="0" bIns="0" rtlCol="0" anchor="t"/>
-          <a:lstStyle/>
-          <a:p>
-            <a:pPr algn="l" indent="0" marL="0">
-              <a:lnSpc>
-                <a:spcPct val="120000"/>
-              </a:lnSpc>
-              <a:buNone/>
-            </a:pPr>
-            <a:r>
-              <a:rPr lang="en-US" sz="1800" b="1" dirty="0">
+            <a:off x="320040" y="1371600"/>
+            <a:ext cx="8503920" cy="310896"/>
+          </a:xfrm>
+          <a:prstGeom prst="rect">
+            <a:avLst/>
+          </a:prstGeom>
+          <a:noFill/>
+          <a:ln/>
+        </p:spPr>
+        <p:txBody>
+          <a:bodyPr wrap="square" lIns="0" tIns="0" rIns="0" bIns="0" rtlCol="0" anchor="ctr"/>
+          <a:lstStyle/>
+          <a:p>
+            <a:pPr algn="l" indent="0" marL="0">
+              <a:buNone/>
+            </a:pPr>
+            <a:r>
+              <a:rPr lang="en-US" sz="1600" b="1" dirty="0">
                 <a:solidFill>
                   <a:srgbClr val="595959"/>
                 </a:solidFill>
@@ -10193,63 +10428,9 @@
                 <a:ea typeface="メイリオ" pitchFamily="34" charset="-122"/>
                 <a:cs typeface="メイリオ" pitchFamily="34" charset="-120"/>
               </a:rPr>
-              <a:t>小学校から中学校へ。多くの項目で肯定的な回答は下がる。</a:t>
-            </a:r>
-            <a:endParaRPr lang="en-US" sz="1800" dirty="0"/>
-          </a:p>
-          <a:p>
-            <a:pPr algn="l" indent="0" marL="0">
-              <a:lnSpc>
-                <a:spcPct val="120000"/>
-              </a:lnSpc>
-              <a:buNone/>
-            </a:pPr>
-            <a:r>
-              <a:rPr lang="en-US" sz="1800" b="1" dirty="0">
-                <a:solidFill>
-                  <a:srgbClr val="595959"/>
-                </a:solidFill>
-                <a:latin typeface="メイリオ" pitchFamily="34" charset="0"/>
-                <a:ea typeface="メイリオ" pitchFamily="34" charset="-122"/>
-                <a:cs typeface="メイリオ" pitchFamily="34" charset="-120"/>
-              </a:rPr>
-              <a:t>しかし、</a:t>
-            </a:r>
-            <a:pPr algn="l" indent="0" marL="0">
-              <a:lnSpc>
-                <a:spcPct val="120000"/>
-              </a:lnSpc>
-              <a:buNone/>
-            </a:pPr>
-            <a:r>
-              <a:rPr lang="en-US" sz="1800" b="1" dirty="0">
-                <a:solidFill>
-                  <a:srgbClr val="EE7B08"/>
-                </a:solidFill>
-                <a:latin typeface="メイリオ" pitchFamily="34" charset="0"/>
-                <a:ea typeface="メイリオ" pitchFamily="34" charset="-122"/>
-                <a:cs typeface="メイリオ" pitchFamily="34" charset="-120"/>
-              </a:rPr>
-              <a:t>下がらない項目</a:t>
-            </a:r>
-            <a:pPr algn="l" indent="0" marL="0">
-              <a:lnSpc>
-                <a:spcPct val="120000"/>
-              </a:lnSpc>
-              <a:buNone/>
-            </a:pPr>
-            <a:r>
-              <a:rPr lang="en-US" sz="1800" b="1" dirty="0">
-                <a:solidFill>
-                  <a:srgbClr val="595959"/>
-                </a:solidFill>
-                <a:latin typeface="メイリオ" pitchFamily="34" charset="0"/>
-                <a:ea typeface="メイリオ" pitchFamily="34" charset="-122"/>
-                <a:cs typeface="メイリオ" pitchFamily="34" charset="-120"/>
-              </a:rPr>
-              <a:t>もある。</a:t>
-            </a:r>
-            <a:endParaRPr lang="en-US" sz="1800" dirty="0"/>
+              <a:t>上がっているのは、この２項目だけではない。</a:t>
+            </a:r>
+            <a:endParaRPr lang="en-US" sz="1600" dirty="0"/>
           </a:p>
         </p:txBody>
       </p:sp>
@@ -10261,12 +10442,12 @@
         </p:nvSpPr>
         <p:spPr>
           <a:xfrm>
-            <a:off x="320040" y="2377440"/>
-            <a:ext cx="4160520" cy="1417320"/>
+            <a:off x="320040" y="1755648"/>
+            <a:ext cx="2697480" cy="2103120"/>
           </a:xfrm>
           <a:prstGeom prst="roundRect">
             <a:avLst>
-              <a:gd name="adj" fmla="val 3871"/>
+              <a:gd name="adj" fmla="val 2609"/>
             </a:avLst>
           </a:prstGeom>
           <a:solidFill>
@@ -10288,8 +10469,8 @@
         </p:nvSpPr>
         <p:spPr>
           <a:xfrm>
-            <a:off x="521208" y="2487168"/>
-            <a:ext cx="3758184" cy="502920"/>
+            <a:off x="484632" y="1865376"/>
+            <a:ext cx="2368296" cy="658368"/>
           </a:xfrm>
           <a:prstGeom prst="rect">
             <a:avLst/>
@@ -10308,7 +10489,7 @@
               <a:buNone/>
             </a:pPr>
             <a:r>
-              <a:rPr lang="en-US" sz="1500" b="1" dirty="0">
+              <a:rPr lang="en-US" sz="1200" b="1" dirty="0">
                 <a:solidFill>
                   <a:srgbClr val="595959"/>
                 </a:solidFill>
@@ -10316,9 +10497,49 @@
                 <a:ea typeface="メイリオ" pitchFamily="34" charset="-122"/>
                 <a:cs typeface="メイリオ" pitchFamily="34" charset="-120"/>
               </a:rPr>
-              <a:t>学校に行くのは楽しい</a:t>
-            </a:r>
-            <a:endParaRPr lang="en-US" sz="1500" dirty="0"/>
+              <a:t>友達や周りの人の考えを</a:t>
+            </a:r>
+            <a:endParaRPr lang="en-US" sz="1200" dirty="0"/>
+          </a:p>
+          <a:p>
+            <a:pPr algn="l" indent="0" marL="0">
+              <a:lnSpc>
+                <a:spcPct val="115000"/>
+              </a:lnSpc>
+              <a:buNone/>
+            </a:pPr>
+            <a:r>
+              <a:rPr lang="en-US" sz="1200" b="1" dirty="0">
+                <a:solidFill>
+                  <a:srgbClr val="595959"/>
+                </a:solidFill>
+                <a:latin typeface="メイリオ" pitchFamily="34" charset="0"/>
+                <a:ea typeface="メイリオ" pitchFamily="34" charset="-122"/>
+                <a:cs typeface="メイリオ" pitchFamily="34" charset="-120"/>
+              </a:rPr>
+              <a:t>大切にして、協力しながら</a:t>
+            </a:r>
+            <a:endParaRPr lang="en-US" sz="1200" dirty="0"/>
+          </a:p>
+          <a:p>
+            <a:pPr algn="l" indent="0" marL="0">
+              <a:lnSpc>
+                <a:spcPct val="115000"/>
+              </a:lnSpc>
+              <a:buNone/>
+            </a:pPr>
+            <a:r>
+              <a:rPr lang="en-US" sz="1200" b="1" dirty="0">
+                <a:solidFill>
+                  <a:srgbClr val="595959"/>
+                </a:solidFill>
+                <a:latin typeface="メイリオ" pitchFamily="34" charset="0"/>
+                <a:ea typeface="メイリオ" pitchFamily="34" charset="-122"/>
+                <a:cs typeface="メイリオ" pitchFamily="34" charset="-120"/>
+              </a:rPr>
+              <a:t>課題の解決に取り組んでいる</a:t>
+            </a:r>
+            <a:endParaRPr lang="en-US" sz="1200" dirty="0"/>
           </a:p>
         </p:txBody>
       </p:sp>
@@ -10330,8 +10551,8 @@
         </p:nvSpPr>
         <p:spPr>
           <a:xfrm>
-            <a:off x="521208" y="3054096"/>
-            <a:ext cx="3758184" cy="411480"/>
+            <a:off x="484632" y="2670048"/>
+            <a:ext cx="2368296" cy="402336"/>
           </a:xfrm>
           <a:prstGeom prst="rect">
             <a:avLst/>
@@ -10347,7 +10568,7 @@
               <a:buNone/>
             </a:pPr>
             <a:r>
-              <a:rPr lang="en-US" sz="1400" b="1" dirty="0">
+              <a:rPr lang="en-US" sz="1100" b="1" dirty="0">
                 <a:solidFill>
                   <a:srgbClr val="44C1A3"/>
                 </a:solidFill>
@@ -10361,7 +10582,7 @@
               <a:buNone/>
             </a:pPr>
             <a:r>
-              <a:rPr lang="en-US" sz="2100" b="1" dirty="0">
+              <a:rPr lang="en-US" sz="1700" b="1" dirty="0">
                 <a:solidFill>
                   <a:srgbClr val="3F3F3F"/>
                 </a:solidFill>
@@ -10369,7 +10590,7 @@
                 <a:ea typeface="メイリオ" pitchFamily="34" charset="-122"/>
                 <a:cs typeface="メイリオ" pitchFamily="34" charset="-120"/>
               </a:rPr>
-              <a:t>88.9</a:t>
+              <a:t>85.1</a:t>
             </a:r>
             <a:pPr algn="l" indent="0" marL="0">
               <a:buNone/>
@@ -10377,108 +10598,41 @@
             <a:r>
               <a:rPr lang="en-US" sz="1300" b="1" dirty="0">
                 <a:solidFill>
+                  <a:srgbClr val="808080"/>
+                </a:solidFill>
+                <a:latin typeface="メイリオ" pitchFamily="34" charset="0"/>
+                <a:ea typeface="メイリオ" pitchFamily="34" charset="-122"/>
+                <a:cs typeface="メイリオ" pitchFamily="34" charset="-120"/>
+              </a:rPr>
+              <a:t> → </a:t>
+            </a:r>
+            <a:pPr algn="l" indent="0" marL="0">
+              <a:buNone/>
+            </a:pPr>
+            <a:r>
+              <a:rPr lang="en-US" sz="1100" b="1" dirty="0">
+                <a:solidFill>
+                  <a:srgbClr val="44C1A3"/>
+                </a:solidFill>
+                <a:latin typeface="メイリオ" pitchFamily="34" charset="0"/>
+                <a:ea typeface="メイリオ" pitchFamily="34" charset="-122"/>
+                <a:cs typeface="メイリオ" pitchFamily="34" charset="-120"/>
+              </a:rPr>
+              <a:t>中 </a:t>
+            </a:r>
+            <a:pPr algn="l" indent="0" marL="0">
+              <a:buNone/>
+            </a:pPr>
+            <a:r>
+              <a:rPr lang="en-US" sz="1700" b="1" dirty="0">
+                <a:solidFill>
                   <a:srgbClr val="3F3F3F"/>
                 </a:solidFill>
                 <a:latin typeface="メイリオ" pitchFamily="34" charset="0"/>
                 <a:ea typeface="メイリオ" pitchFamily="34" charset="-122"/>
                 <a:cs typeface="メイリオ" pitchFamily="34" charset="-120"/>
               </a:rPr>
-              <a:t>％</a:t>
-            </a:r>
-            <a:pPr algn="l" indent="0" marL="0">
-              <a:buNone/>
-            </a:pPr>
-            <a:r>
-              <a:rPr lang="en-US" sz="1600" b="1" dirty="0">
-                <a:solidFill>
-                  <a:srgbClr val="808080"/>
-                </a:solidFill>
-                <a:latin typeface="メイリオ" pitchFamily="34" charset="0"/>
-                <a:ea typeface="メイリオ" pitchFamily="34" charset="-122"/>
-                <a:cs typeface="メイリオ" pitchFamily="34" charset="-120"/>
-              </a:rPr>
-              <a:t>　→　</a:t>
-            </a:r>
-            <a:pPr algn="l" indent="0" marL="0">
-              <a:buNone/>
-            </a:pPr>
-            <a:r>
-              <a:rPr lang="en-US" sz="1400" b="1" dirty="0">
-                <a:solidFill>
-                  <a:srgbClr val="EE7B08"/>
-                </a:solidFill>
-                <a:latin typeface="メイリオ" pitchFamily="34" charset="0"/>
-                <a:ea typeface="メイリオ" pitchFamily="34" charset="-122"/>
-                <a:cs typeface="メイリオ" pitchFamily="34" charset="-120"/>
-              </a:rPr>
-              <a:t>中 </a:t>
-            </a:r>
-            <a:pPr algn="l" indent="0" marL="0">
-              <a:buNone/>
-            </a:pPr>
-            <a:r>
-              <a:rPr lang="en-US" sz="2100" b="1" dirty="0">
-                <a:solidFill>
-                  <a:srgbClr val="3F3F3F"/>
-                </a:solidFill>
-                <a:latin typeface="メイリオ" pitchFamily="34" charset="0"/>
-                <a:ea typeface="メイリオ" pitchFamily="34" charset="-122"/>
-                <a:cs typeface="メイリオ" pitchFamily="34" charset="-120"/>
-              </a:rPr>
-              <a:t>87.2</a:t>
-            </a:r>
-            <a:pPr algn="l" indent="0" marL="0">
-              <a:buNone/>
-            </a:pPr>
-            <a:r>
-              <a:rPr lang="en-US" sz="1300" b="1" dirty="0">
-                <a:solidFill>
-                  <a:srgbClr val="3F3F3F"/>
-                </a:solidFill>
-                <a:latin typeface="メイリオ" pitchFamily="34" charset="0"/>
-                <a:ea typeface="メイリオ" pitchFamily="34" charset="-122"/>
-                <a:cs typeface="メイリオ" pitchFamily="34" charset="-120"/>
-              </a:rPr>
-              <a:t>％</a:t>
-            </a:r>
-            <a:endParaRPr lang="en-US" sz="1400" dirty="0"/>
-          </a:p>
-        </p:txBody>
-      </p:sp>
-      <p:sp>
-        <p:nvSpPr>
-          <p:cNvPr id="7" name="Text 5"/>
-          <p:cNvSpPr txBox="1"/>
-          <p:nvPr/>
-        </p:nvSpPr>
-        <p:spPr>
-          <a:xfrm>
-            <a:off x="521208" y="3474720"/>
-            <a:ext cx="3758184" cy="237744"/>
-          </a:xfrm>
-          <a:prstGeom prst="rect">
-            <a:avLst/>
-          </a:prstGeom>
-          <a:noFill/>
-          <a:ln/>
-        </p:spPr>
-        <p:txBody>
-          <a:bodyPr wrap="square" lIns="0" tIns="0" rIns="0" bIns="0" rtlCol="0" anchor="ctr"/>
-          <a:lstStyle/>
-          <a:p>
-            <a:pPr algn="l" indent="0" marL="0">
-              <a:buNone/>
-            </a:pPr>
-            <a:r>
-              <a:rPr lang="en-US" sz="1100" b="1" dirty="0">
-                <a:solidFill>
-                  <a:srgbClr val="808080"/>
-                </a:solidFill>
-                <a:latin typeface="メイリオ" pitchFamily="34" charset="0"/>
-                <a:ea typeface="メイリオ" pitchFamily="34" charset="-122"/>
-                <a:cs typeface="メイリオ" pitchFamily="34" charset="-120"/>
-              </a:rPr>
-              <a:t>小・中とも東京都・全国を上回る</a:t>
+              <a:t>100.0</a:t>
             </a:r>
             <a:endParaRPr lang="en-US" sz="1100" dirty="0"/>
           </a:p>
@@ -10486,18 +10640,84 @@
       </p:sp>
       <p:sp>
         <p:nvSpPr>
-          <p:cNvPr id="8" name="Shape 6"/>
+          <p:cNvPr id="7" name="Shape 5"/>
           <p:cNvSpPr/>
           <p:nvPr/>
         </p:nvSpPr>
         <p:spPr>
           <a:xfrm>
-            <a:off x="4663440" y="2377440"/>
-            <a:ext cx="4160520" cy="1417320"/>
+            <a:off x="484632" y="3163824"/>
+            <a:ext cx="1444752" cy="402336"/>
           </a:xfrm>
           <a:prstGeom prst="roundRect">
             <a:avLst>
-              <a:gd name="adj" fmla="val 3871"/>
+              <a:gd name="adj" fmla="val 13636"/>
+            </a:avLst>
+          </a:prstGeom>
+          <a:solidFill>
+            <a:srgbClr val="FDF0E3"/>
+          </a:solidFill>
+          <a:ln w="12700">
+            <a:solidFill>
+              <a:srgbClr val="F6CFA4"/>
+            </a:solidFill>
+            <a:prstDash val="solid"/>
+          </a:ln>
+        </p:spPr>
+      </p:sp>
+      <p:sp>
+        <p:nvSpPr>
+          <p:cNvPr id="8" name="Text 6"/>
+          <p:cNvSpPr txBox="1"/>
+          <p:nvPr/>
+        </p:nvSpPr>
+        <p:spPr>
+          <a:xfrm>
+            <a:off x="484632" y="3163824"/>
+            <a:ext cx="1444752" cy="402336"/>
+          </a:xfrm>
+          <a:prstGeom prst="rect">
+            <a:avLst/>
+          </a:prstGeom>
+          <a:noFill/>
+          <a:ln/>
+        </p:spPr>
+        <p:txBody>
+          <a:bodyPr wrap="square" lIns="0" tIns="0" rIns="0" bIns="0" rtlCol="0" anchor="ctr"/>
+          <a:lstStyle/>
+          <a:p>
+            <a:pPr algn="ctr" indent="0" marL="0">
+              <a:buNone/>
+            </a:pPr>
+            <a:r>
+              <a:rPr lang="en-US" sz="1100" b="1" dirty="0">
+                <a:solidFill>
+                  <a:srgbClr val="EE7B08"/>
+                </a:solidFill>
+                <a:latin typeface="メイリオ" pitchFamily="34" charset="0"/>
+                <a:ea typeface="メイリオ" pitchFamily="34" charset="-122"/>
+                <a:cs typeface="メイリオ" pitchFamily="34" charset="-120"/>
+              </a:rPr>
+              <a:t>＋14.9 ポイント</a:t>
+            </a:r>
+            <a:endParaRPr lang="en-US" sz="1100" dirty="0"/>
+          </a:p>
+        </p:txBody>
+      </p:sp>
+      <p:sp>
+        <p:nvSpPr>
+          <p:cNvPr id="9" name="Shape 7"/>
+          <p:cNvSpPr/>
+          <p:nvPr/>
+        </p:nvSpPr>
+        <p:spPr>
+          <a:xfrm>
+            <a:off x="3227832" y="1755648"/>
+            <a:ext cx="2697480" cy="2103120"/>
+          </a:xfrm>
+          <a:prstGeom prst="roundRect">
+            <a:avLst>
+              <a:gd name="adj" fmla="val 2609"/>
             </a:avLst>
           </a:prstGeom>
           <a:solidFill>
@@ -10513,14 +10733,14 @@
       </p:sp>
       <p:sp>
         <p:nvSpPr>
-          <p:cNvPr id="9" name="Text 7"/>
-          <p:cNvSpPr txBox="1"/>
-          <p:nvPr/>
-        </p:nvSpPr>
-        <p:spPr>
-          <a:xfrm>
-            <a:off x="4864608" y="2487168"/>
-            <a:ext cx="3758184" cy="502920"/>
+          <p:cNvPr id="10" name="Text 8"/>
+          <p:cNvSpPr txBox="1"/>
+          <p:nvPr/>
+        </p:nvSpPr>
+        <p:spPr>
+          <a:xfrm>
+            <a:off x="3392424" y="1865376"/>
+            <a:ext cx="2368296" cy="658368"/>
           </a:xfrm>
           <a:prstGeom prst="rect">
             <a:avLst/>
@@ -10539,7 +10759,7 @@
               <a:buNone/>
             </a:pPr>
             <a:r>
-              <a:rPr lang="en-US" sz="1500" b="1" dirty="0">
+              <a:rPr lang="en-US" sz="1200" b="1" dirty="0">
                 <a:solidFill>
                   <a:srgbClr val="595959"/>
                 </a:solidFill>
@@ -10547,9 +10767,279 @@
                 <a:ea typeface="メイリオ" pitchFamily="34" charset="-122"/>
                 <a:cs typeface="メイリオ" pitchFamily="34" charset="-120"/>
               </a:rPr>
+              <a:t>話し合う活動を通じて、</a:t>
+            </a:r>
+            <a:endParaRPr lang="en-US" sz="1200" dirty="0"/>
+          </a:p>
+          <a:p>
+            <a:pPr algn="l" indent="0" marL="0">
+              <a:lnSpc>
+                <a:spcPct val="115000"/>
+              </a:lnSpc>
+              <a:buNone/>
+            </a:pPr>
+            <a:r>
+              <a:rPr lang="en-US" sz="1200" b="1" dirty="0">
+                <a:solidFill>
+                  <a:srgbClr val="595959"/>
+                </a:solidFill>
+                <a:latin typeface="メイリオ" pitchFamily="34" charset="0"/>
+                <a:ea typeface="メイリオ" pitchFamily="34" charset="-122"/>
+                <a:cs typeface="メイリオ" pitchFamily="34" charset="-120"/>
+              </a:rPr>
+              <a:t>自分の考えを深めたり、</a:t>
+            </a:r>
+            <a:endParaRPr lang="en-US" sz="1200" dirty="0"/>
+          </a:p>
+          <a:p>
+            <a:pPr algn="l" indent="0" marL="0">
+              <a:lnSpc>
+                <a:spcPct val="115000"/>
+              </a:lnSpc>
+              <a:buNone/>
+            </a:pPr>
+            <a:r>
+              <a:rPr lang="en-US" sz="1200" b="1" dirty="0">
+                <a:solidFill>
+                  <a:srgbClr val="595959"/>
+                </a:solidFill>
+                <a:latin typeface="メイリオ" pitchFamily="34" charset="0"/>
+                <a:ea typeface="メイリオ" pitchFamily="34" charset="-122"/>
+                <a:cs typeface="メイリオ" pitchFamily="34" charset="-120"/>
+              </a:rPr>
+              <a:t>新たな考え方に気付ける</a:t>
+            </a:r>
+            <a:endParaRPr lang="en-US" sz="1200" dirty="0"/>
+          </a:p>
+        </p:txBody>
+      </p:sp>
+      <p:sp>
+        <p:nvSpPr>
+          <p:cNvPr id="11" name="Text 9"/>
+          <p:cNvSpPr txBox="1"/>
+          <p:nvPr/>
+        </p:nvSpPr>
+        <p:spPr>
+          <a:xfrm>
+            <a:off x="3392424" y="2670048"/>
+            <a:ext cx="2368296" cy="402336"/>
+          </a:xfrm>
+          <a:prstGeom prst="rect">
+            <a:avLst/>
+          </a:prstGeom>
+          <a:noFill/>
+          <a:ln/>
+        </p:spPr>
+        <p:txBody>
+          <a:bodyPr wrap="square" lIns="0" tIns="0" rIns="0" bIns="0" rtlCol="0" anchor="ctr"/>
+          <a:lstStyle/>
+          <a:p>
+            <a:pPr algn="l" indent="0" marL="0">
+              <a:buNone/>
+            </a:pPr>
+            <a:r>
+              <a:rPr lang="en-US" sz="1100" b="1" dirty="0">
+                <a:solidFill>
+                  <a:srgbClr val="44C1A3"/>
+                </a:solidFill>
+                <a:latin typeface="メイリオ" pitchFamily="34" charset="0"/>
+                <a:ea typeface="メイリオ" pitchFamily="34" charset="-122"/>
+                <a:cs typeface="メイリオ" pitchFamily="34" charset="-120"/>
+              </a:rPr>
+              <a:t>小 </a:t>
+            </a:r>
+            <a:pPr algn="l" indent="0" marL="0">
+              <a:buNone/>
+            </a:pPr>
+            <a:r>
+              <a:rPr lang="en-US" sz="1700" b="1" dirty="0">
+                <a:solidFill>
+                  <a:srgbClr val="3F3F3F"/>
+                </a:solidFill>
+                <a:latin typeface="メイリオ" pitchFamily="34" charset="0"/>
+                <a:ea typeface="メイリオ" pitchFamily="34" charset="-122"/>
+                <a:cs typeface="メイリオ" pitchFamily="34" charset="-120"/>
+              </a:rPr>
+              <a:t>92.5</a:t>
+            </a:r>
+            <a:pPr algn="l" indent="0" marL="0">
+              <a:buNone/>
+            </a:pPr>
+            <a:r>
+              <a:rPr lang="en-US" sz="1300" b="1" dirty="0">
+                <a:solidFill>
+                  <a:srgbClr val="808080"/>
+                </a:solidFill>
+                <a:latin typeface="メイリオ" pitchFamily="34" charset="0"/>
+                <a:ea typeface="メイリオ" pitchFamily="34" charset="-122"/>
+                <a:cs typeface="メイリオ" pitchFamily="34" charset="-120"/>
+              </a:rPr>
+              <a:t> → </a:t>
+            </a:r>
+            <a:pPr algn="l" indent="0" marL="0">
+              <a:buNone/>
+            </a:pPr>
+            <a:r>
+              <a:rPr lang="en-US" sz="1100" b="1" dirty="0">
+                <a:solidFill>
+                  <a:srgbClr val="44C1A3"/>
+                </a:solidFill>
+                <a:latin typeface="メイリオ" pitchFamily="34" charset="0"/>
+                <a:ea typeface="メイリオ" pitchFamily="34" charset="-122"/>
+                <a:cs typeface="メイリオ" pitchFamily="34" charset="-120"/>
+              </a:rPr>
+              <a:t>中 </a:t>
+            </a:r>
+            <a:pPr algn="l" indent="0" marL="0">
+              <a:buNone/>
+            </a:pPr>
+            <a:r>
+              <a:rPr lang="en-US" sz="1700" b="1" dirty="0">
+                <a:solidFill>
+                  <a:srgbClr val="3F3F3F"/>
+                </a:solidFill>
+                <a:latin typeface="メイリオ" pitchFamily="34" charset="0"/>
+                <a:ea typeface="メイリオ" pitchFamily="34" charset="-122"/>
+                <a:cs typeface="メイリオ" pitchFamily="34" charset="-120"/>
+              </a:rPr>
+              <a:t>97.9</a:t>
+            </a:r>
+            <a:endParaRPr lang="en-US" sz="1100" dirty="0"/>
+          </a:p>
+        </p:txBody>
+      </p:sp>
+      <p:sp>
+        <p:nvSpPr>
+          <p:cNvPr id="12" name="Shape 10"/>
+          <p:cNvSpPr/>
+          <p:nvPr/>
+        </p:nvSpPr>
+        <p:spPr>
+          <a:xfrm>
+            <a:off x="3392424" y="3163824"/>
+            <a:ext cx="1444752" cy="402336"/>
+          </a:xfrm>
+          <a:prstGeom prst="roundRect">
+            <a:avLst>
+              <a:gd name="adj" fmla="val 13636"/>
+            </a:avLst>
+          </a:prstGeom>
+          <a:solidFill>
+            <a:srgbClr val="FDF0E3"/>
+          </a:solidFill>
+          <a:ln w="12700">
+            <a:solidFill>
+              <a:srgbClr val="F6CFA4"/>
+            </a:solidFill>
+            <a:prstDash val="solid"/>
+          </a:ln>
+        </p:spPr>
+      </p:sp>
+      <p:sp>
+        <p:nvSpPr>
+          <p:cNvPr id="13" name="Text 11"/>
+          <p:cNvSpPr txBox="1"/>
+          <p:nvPr/>
+        </p:nvSpPr>
+        <p:spPr>
+          <a:xfrm>
+            <a:off x="3392424" y="3163824"/>
+            <a:ext cx="1444752" cy="402336"/>
+          </a:xfrm>
+          <a:prstGeom prst="rect">
+            <a:avLst/>
+          </a:prstGeom>
+          <a:noFill/>
+          <a:ln/>
+        </p:spPr>
+        <p:txBody>
+          <a:bodyPr wrap="square" lIns="0" tIns="0" rIns="0" bIns="0" rtlCol="0" anchor="ctr"/>
+          <a:lstStyle/>
+          <a:p>
+            <a:pPr algn="ctr" indent="0" marL="0">
+              <a:buNone/>
+            </a:pPr>
+            <a:r>
+              <a:rPr lang="en-US" sz="1100" b="1" dirty="0">
+                <a:solidFill>
+                  <a:srgbClr val="EE7B08"/>
+                </a:solidFill>
+                <a:latin typeface="メイリオ" pitchFamily="34" charset="0"/>
+                <a:ea typeface="メイリオ" pitchFamily="34" charset="-122"/>
+                <a:cs typeface="メイリオ" pitchFamily="34" charset="-120"/>
+              </a:rPr>
+              <a:t>＋5.4 ポイント</a:t>
+            </a:r>
+            <a:endParaRPr lang="en-US" sz="1100" dirty="0"/>
+          </a:p>
+        </p:txBody>
+      </p:sp>
+      <p:sp>
+        <p:nvSpPr>
+          <p:cNvPr id="14" name="Shape 12"/>
+          <p:cNvSpPr/>
+          <p:nvPr/>
+        </p:nvSpPr>
+        <p:spPr>
+          <a:xfrm>
+            <a:off x="6135624" y="1755648"/>
+            <a:ext cx="2697480" cy="2103120"/>
+          </a:xfrm>
+          <a:prstGeom prst="roundRect">
+            <a:avLst>
+              <a:gd name="adj" fmla="val 2609"/>
+            </a:avLst>
+          </a:prstGeom>
+          <a:solidFill>
+            <a:srgbClr val="E9F7F3"/>
+          </a:solidFill>
+          <a:ln w="12700">
+            <a:solidFill>
+              <a:srgbClr val="B9E5DA"/>
+            </a:solidFill>
+            <a:prstDash val="solid"/>
+          </a:ln>
+        </p:spPr>
+      </p:sp>
+      <p:sp>
+        <p:nvSpPr>
+          <p:cNvPr id="15" name="Text 13"/>
+          <p:cNvSpPr txBox="1"/>
+          <p:nvPr/>
+        </p:nvSpPr>
+        <p:spPr>
+          <a:xfrm>
+            <a:off x="6300216" y="1865376"/>
+            <a:ext cx="2368296" cy="658368"/>
+          </a:xfrm>
+          <a:prstGeom prst="rect">
+            <a:avLst/>
+          </a:prstGeom>
+          <a:noFill/>
+          <a:ln/>
+        </p:spPr>
+        <p:txBody>
+          <a:bodyPr wrap="square" lIns="0" tIns="0" rIns="0" bIns="0" rtlCol="0" anchor="t"/>
+          <a:lstStyle/>
+          <a:p>
+            <a:pPr algn="l" indent="0" marL="0">
+              <a:lnSpc>
+                <a:spcPct val="115000"/>
+              </a:lnSpc>
+              <a:buNone/>
+            </a:pPr>
+            <a:r>
+              <a:rPr lang="en-US" sz="1200" b="1" dirty="0">
+                <a:solidFill>
+                  <a:srgbClr val="595959"/>
+                </a:solidFill>
+                <a:latin typeface="メイリオ" pitchFamily="34" charset="0"/>
+                <a:ea typeface="メイリオ" pitchFamily="34" charset="-122"/>
+                <a:cs typeface="メイリオ" pitchFamily="34" charset="-120"/>
+              </a:rPr>
               <a:t>自分と違う意見について</a:t>
             </a:r>
-            <a:endParaRPr lang="en-US" sz="1500" dirty="0"/>
+            <a:endParaRPr lang="en-US" sz="1200" dirty="0"/>
           </a:p>
           <a:p>
             <a:pPr algn="l" indent="0" marL="0">
@@ -10559,7 +11049,7 @@
               <a:buNone/>
             </a:pPr>
             <a:r>
-              <a:rPr lang="en-US" sz="1500" b="1" dirty="0">
+              <a:rPr lang="en-US" sz="1200" b="1" dirty="0">
                 <a:solidFill>
                   <a:srgbClr val="595959"/>
                 </a:solidFill>
@@ -10569,20 +11059,20 @@
               </a:rPr>
               <a:t>考えるのは楽しい</a:t>
             </a:r>
-            <a:endParaRPr lang="en-US" sz="1500" dirty="0"/>
-          </a:p>
-        </p:txBody>
-      </p:sp>
-      <p:sp>
-        <p:nvSpPr>
-          <p:cNvPr id="10" name="Text 8"/>
-          <p:cNvSpPr txBox="1"/>
-          <p:nvPr/>
-        </p:nvSpPr>
-        <p:spPr>
-          <a:xfrm>
-            <a:off x="4864608" y="3054096"/>
-            <a:ext cx="3758184" cy="411480"/>
+            <a:endParaRPr lang="en-US" sz="1200" dirty="0"/>
+          </a:p>
+        </p:txBody>
+      </p:sp>
+      <p:sp>
+        <p:nvSpPr>
+          <p:cNvPr id="16" name="Text 14"/>
+          <p:cNvSpPr txBox="1"/>
+          <p:nvPr/>
+        </p:nvSpPr>
+        <p:spPr>
+          <a:xfrm>
+            <a:off x="6300216" y="2670048"/>
+            <a:ext cx="2368296" cy="402336"/>
           </a:xfrm>
           <a:prstGeom prst="rect">
             <a:avLst/>
@@ -10598,7 +11088,7 @@
               <a:buNone/>
             </a:pPr>
             <a:r>
-              <a:rPr lang="en-US" sz="1400" b="1" dirty="0">
+              <a:rPr lang="en-US" sz="1100" b="1" dirty="0">
                 <a:solidFill>
                   <a:srgbClr val="44C1A3"/>
                 </a:solidFill>
@@ -10612,7 +11102,7 @@
               <a:buNone/>
             </a:pPr>
             <a:r>
-              <a:rPr lang="en-US" sz="2100" b="1" dirty="0">
+              <a:rPr lang="en-US" sz="1700" b="1" dirty="0">
                 <a:solidFill>
                   <a:srgbClr val="3F3F3F"/>
                 </a:solidFill>
@@ -10620,7 +11110,7 @@
                 <a:ea typeface="メイリオ" pitchFamily="34" charset="-122"/>
                 <a:cs typeface="メイリオ" pitchFamily="34" charset="-120"/>
               </a:rPr>
-              <a:t>80.6</a:t>
+              <a:t>81.4</a:t>
             </a:r>
             <a:pPr algn="l" indent="0" marL="0">
               <a:buNone/>
@@ -10628,19 +11118,214 @@
             <a:r>
               <a:rPr lang="en-US" sz="1300" b="1" dirty="0">
                 <a:solidFill>
+                  <a:srgbClr val="808080"/>
+                </a:solidFill>
+                <a:latin typeface="メイリオ" pitchFamily="34" charset="0"/>
+                <a:ea typeface="メイリオ" pitchFamily="34" charset="-122"/>
+                <a:cs typeface="メイリオ" pitchFamily="34" charset="-120"/>
+              </a:rPr>
+              <a:t> → </a:t>
+            </a:r>
+            <a:pPr algn="l" indent="0" marL="0">
+              <a:buNone/>
+            </a:pPr>
+            <a:r>
+              <a:rPr lang="en-US" sz="1100" b="1" dirty="0">
+                <a:solidFill>
+                  <a:srgbClr val="44C1A3"/>
+                </a:solidFill>
+                <a:latin typeface="メイリオ" pitchFamily="34" charset="0"/>
+                <a:ea typeface="メイリオ" pitchFamily="34" charset="-122"/>
+                <a:cs typeface="メイリオ" pitchFamily="34" charset="-120"/>
+              </a:rPr>
+              <a:t>中 </a:t>
+            </a:r>
+            <a:pPr algn="l" indent="0" marL="0">
+              <a:buNone/>
+            </a:pPr>
+            <a:r>
+              <a:rPr lang="en-US" sz="1700" b="1" dirty="0">
+                <a:solidFill>
                   <a:srgbClr val="3F3F3F"/>
                 </a:solidFill>
                 <a:latin typeface="メイリオ" pitchFamily="34" charset="0"/>
                 <a:ea typeface="メイリオ" pitchFamily="34" charset="-122"/>
                 <a:cs typeface="メイリオ" pitchFamily="34" charset="-120"/>
               </a:rPr>
-              <a:t>％</a:t>
-            </a:r>
-            <a:pPr algn="l" indent="0" marL="0">
-              <a:buNone/>
-            </a:pPr>
-            <a:r>
-              <a:rPr lang="en-US" sz="1600" b="1" dirty="0">
+              <a:t>87.2</a:t>
+            </a:r>
+            <a:endParaRPr lang="en-US" sz="1100" dirty="0"/>
+          </a:p>
+        </p:txBody>
+      </p:sp>
+      <p:sp>
+        <p:nvSpPr>
+          <p:cNvPr id="17" name="Shape 15"/>
+          <p:cNvSpPr/>
+          <p:nvPr/>
+        </p:nvSpPr>
+        <p:spPr>
+          <a:xfrm>
+            <a:off x="6300216" y="3163824"/>
+            <a:ext cx="1444752" cy="402336"/>
+          </a:xfrm>
+          <a:prstGeom prst="roundRect">
+            <a:avLst>
+              <a:gd name="adj" fmla="val 13636"/>
+            </a:avLst>
+          </a:prstGeom>
+          <a:solidFill>
+            <a:srgbClr val="FDF0E3"/>
+          </a:solidFill>
+          <a:ln w="12700">
+            <a:solidFill>
+              <a:srgbClr val="F6CFA4"/>
+            </a:solidFill>
+            <a:prstDash val="solid"/>
+          </a:ln>
+        </p:spPr>
+      </p:sp>
+      <p:sp>
+        <p:nvSpPr>
+          <p:cNvPr id="18" name="Text 16"/>
+          <p:cNvSpPr txBox="1"/>
+          <p:nvPr/>
+        </p:nvSpPr>
+        <p:spPr>
+          <a:xfrm>
+            <a:off x="6300216" y="3163824"/>
+            <a:ext cx="1444752" cy="402336"/>
+          </a:xfrm>
+          <a:prstGeom prst="rect">
+            <a:avLst/>
+          </a:prstGeom>
+          <a:noFill/>
+          <a:ln/>
+        </p:spPr>
+        <p:txBody>
+          <a:bodyPr wrap="square" lIns="0" tIns="0" rIns="0" bIns="0" rtlCol="0" anchor="ctr"/>
+          <a:lstStyle/>
+          <a:p>
+            <a:pPr algn="ctr" indent="0" marL="0">
+              <a:buNone/>
+            </a:pPr>
+            <a:r>
+              <a:rPr lang="en-US" sz="1100" b="1" dirty="0">
+                <a:solidFill>
+                  <a:srgbClr val="EE7B08"/>
+                </a:solidFill>
+                <a:latin typeface="メイリオ" pitchFamily="34" charset="0"/>
+                <a:ea typeface="メイリオ" pitchFamily="34" charset="-122"/>
+                <a:cs typeface="メイリオ" pitchFamily="34" charset="-120"/>
+              </a:rPr>
+              <a:t>＋5.8 ポイント</a:t>
+            </a:r>
+            <a:endParaRPr lang="en-US" sz="1100" dirty="0"/>
+          </a:p>
+        </p:txBody>
+      </p:sp>
+      <p:sp>
+        <p:nvSpPr>
+          <p:cNvPr id="19" name="Text 17"/>
+          <p:cNvSpPr txBox="1"/>
+          <p:nvPr/>
+        </p:nvSpPr>
+        <p:spPr>
+          <a:xfrm>
+            <a:off x="320040" y="4023360"/>
+            <a:ext cx="8503920" cy="548640"/>
+          </a:xfrm>
+          <a:prstGeom prst="rect">
+            <a:avLst/>
+          </a:prstGeom>
+          <a:noFill/>
+          <a:ln/>
+        </p:spPr>
+        <p:txBody>
+          <a:bodyPr wrap="square" lIns="0" tIns="0" rIns="0" bIns="0" rtlCol="0" anchor="t"/>
+          <a:lstStyle/>
+          <a:p>
+            <a:pPr algn="l" indent="0" marL="0">
+              <a:lnSpc>
+                <a:spcPct val="120000"/>
+              </a:lnSpc>
+              <a:buNone/>
+            </a:pPr>
+            <a:r>
+              <a:rPr lang="en-US" sz="1900" b="1" dirty="0">
+                <a:solidFill>
+                  <a:srgbClr val="595959"/>
+                </a:solidFill>
+                <a:latin typeface="メイリオ" pitchFamily="34" charset="0"/>
+                <a:ea typeface="メイリオ" pitchFamily="34" charset="-122"/>
+                <a:cs typeface="メイリオ" pitchFamily="34" charset="-120"/>
+              </a:rPr>
+              <a:t>９年間を見通した教育の成果が、</a:t>
+            </a:r>
+            <a:pPr algn="l" indent="0" marL="0">
+              <a:lnSpc>
+                <a:spcPct val="120000"/>
+              </a:lnSpc>
+              <a:buNone/>
+            </a:pPr>
+            <a:r>
+              <a:rPr lang="en-US" sz="1900" b="1" dirty="0">
+                <a:solidFill>
+                  <a:srgbClr val="EE7B08"/>
+                </a:solidFill>
+                <a:latin typeface="メイリオ" pitchFamily="34" charset="0"/>
+                <a:ea typeface="メイリオ" pitchFamily="34" charset="-122"/>
+                <a:cs typeface="メイリオ" pitchFamily="34" charset="-120"/>
+              </a:rPr>
+              <a:t>数値に表れている</a:t>
+            </a:r>
+            <a:pPr algn="l" indent="0" marL="0">
+              <a:lnSpc>
+                <a:spcPct val="120000"/>
+              </a:lnSpc>
+              <a:buNone/>
+            </a:pPr>
+            <a:r>
+              <a:rPr lang="en-US" sz="1900" b="1" dirty="0">
+                <a:solidFill>
+                  <a:srgbClr val="595959"/>
+                </a:solidFill>
+                <a:latin typeface="メイリオ" pitchFamily="34" charset="0"/>
+                <a:ea typeface="メイリオ" pitchFamily="34" charset="-122"/>
+                <a:cs typeface="メイリオ" pitchFamily="34" charset="-120"/>
+              </a:rPr>
+              <a:t>。</a:t>
+            </a:r>
+            <a:endParaRPr lang="en-US" sz="1900" dirty="0"/>
+          </a:p>
+        </p:txBody>
+      </p:sp>
+      <p:sp>
+        <p:nvSpPr>
+          <p:cNvPr id="20" name="Text 18"/>
+          <p:cNvSpPr txBox="1"/>
+          <p:nvPr/>
+        </p:nvSpPr>
+        <p:spPr>
+          <a:xfrm>
+            <a:off x="320040" y="4700016"/>
+            <a:ext cx="8503920" cy="237744"/>
+          </a:xfrm>
+          <a:prstGeom prst="rect">
+            <a:avLst/>
+          </a:prstGeom>
+          <a:noFill/>
+          <a:ln/>
+        </p:spPr>
+        <p:txBody>
+          <a:bodyPr wrap="square" lIns="0" tIns="0" rIns="0" bIns="0" rtlCol="0" anchor="ctr"/>
+          <a:lstStyle/>
+          <a:p>
+            <a:pPr algn="l" indent="0" marL="0">
+              <a:buNone/>
+            </a:pPr>
+            <a:r>
+              <a:rPr lang="en-US" sz="950" b="1" dirty="0">
                 <a:solidFill>
                   <a:srgbClr val="808080"/>
                 </a:solidFill>
@@ -10648,166 +11333,9 @@
                 <a:ea typeface="メイリオ" pitchFamily="34" charset="-122"/>
                 <a:cs typeface="メイリオ" pitchFamily="34" charset="-120"/>
               </a:rPr>
-              <a:t>　→　</a:t>
-            </a:r>
-            <a:pPr algn="l" indent="0" marL="0">
-              <a:buNone/>
-            </a:pPr>
-            <a:r>
-              <a:rPr lang="en-US" sz="1400" b="1" dirty="0">
-                <a:solidFill>
-                  <a:srgbClr val="EE7B08"/>
-                </a:solidFill>
-                <a:latin typeface="メイリオ" pitchFamily="34" charset="0"/>
-                <a:ea typeface="メイリオ" pitchFamily="34" charset="-122"/>
-                <a:cs typeface="メイリオ" pitchFamily="34" charset="-120"/>
-              </a:rPr>
-              <a:t>中 </a:t>
-            </a:r>
-            <a:pPr algn="l" indent="0" marL="0">
-              <a:buNone/>
-            </a:pPr>
-            <a:r>
-              <a:rPr lang="en-US" sz="2100" b="1" dirty="0">
-                <a:solidFill>
-                  <a:srgbClr val="3F3F3F"/>
-                </a:solidFill>
-                <a:latin typeface="メイリオ" pitchFamily="34" charset="0"/>
-                <a:ea typeface="メイリオ" pitchFamily="34" charset="-122"/>
-                <a:cs typeface="メイリオ" pitchFamily="34" charset="-120"/>
-              </a:rPr>
-              <a:t>79.8</a:t>
-            </a:r>
-            <a:pPr algn="l" indent="0" marL="0">
-              <a:buNone/>
-            </a:pPr>
-            <a:r>
-              <a:rPr lang="en-US" sz="1300" b="1" dirty="0">
-                <a:solidFill>
-                  <a:srgbClr val="3F3F3F"/>
-                </a:solidFill>
-                <a:latin typeface="メイリオ" pitchFamily="34" charset="0"/>
-                <a:ea typeface="メイリオ" pitchFamily="34" charset="-122"/>
-                <a:cs typeface="メイリオ" pitchFamily="34" charset="-120"/>
-              </a:rPr>
-              <a:t>％</a:t>
-            </a:r>
-            <a:endParaRPr lang="en-US" sz="1400" dirty="0"/>
-          </a:p>
-        </p:txBody>
-      </p:sp>
-      <p:sp>
-        <p:nvSpPr>
-          <p:cNvPr id="11" name="Text 9"/>
-          <p:cNvSpPr txBox="1"/>
-          <p:nvPr/>
-        </p:nvSpPr>
-        <p:spPr>
-          <a:xfrm>
-            <a:off x="4864608" y="3474720"/>
-            <a:ext cx="3758184" cy="237744"/>
-          </a:xfrm>
-          <a:prstGeom prst="rect">
-            <a:avLst/>
-          </a:prstGeom>
-          <a:noFill/>
-          <a:ln/>
-        </p:spPr>
-        <p:txBody>
-          <a:bodyPr wrap="square" lIns="0" tIns="0" rIns="0" bIns="0" rtlCol="0" anchor="ctr"/>
-          <a:lstStyle/>
-          <a:p>
-            <a:pPr algn="l" indent="0" marL="0">
-              <a:buNone/>
-            </a:pPr>
-            <a:r>
-              <a:rPr lang="en-US" sz="1100" b="1" dirty="0">
-                <a:solidFill>
-                  <a:srgbClr val="808080"/>
-                </a:solidFill>
-                <a:latin typeface="メイリオ" pitchFamily="34" charset="0"/>
-                <a:ea typeface="メイリオ" pitchFamily="34" charset="-122"/>
-                <a:cs typeface="メイリオ" pitchFamily="34" charset="-120"/>
-              </a:rPr>
-              <a:t>小・中とも東京都・全国を上回る</a:t>
-            </a:r>
-            <a:endParaRPr lang="en-US" sz="1100" dirty="0"/>
-          </a:p>
-        </p:txBody>
-      </p:sp>
-      <p:sp>
-        <p:nvSpPr>
-          <p:cNvPr id="12" name="Text 10"/>
-          <p:cNvSpPr txBox="1"/>
-          <p:nvPr/>
-        </p:nvSpPr>
-        <p:spPr>
-          <a:xfrm>
-            <a:off x="475488" y="3950208"/>
-            <a:ext cx="8193024" cy="548640"/>
-          </a:xfrm>
-          <a:prstGeom prst="rect">
-            <a:avLst/>
-          </a:prstGeom>
-          <a:noFill/>
-          <a:ln/>
-        </p:spPr>
-        <p:txBody>
-          <a:bodyPr wrap="square" lIns="0" tIns="0" rIns="0" bIns="0" rtlCol="0" anchor="t"/>
-          <a:lstStyle/>
-          <a:p>
-            <a:pPr algn="l" indent="0" marL="0">
-              <a:lnSpc>
-                <a:spcPct val="120000"/>
-              </a:lnSpc>
-              <a:buNone/>
-            </a:pPr>
-            <a:r>
-              <a:rPr lang="en-US" sz="1900" b="1" dirty="0">
-                <a:solidFill>
-                  <a:srgbClr val="595959"/>
-                </a:solidFill>
-                <a:latin typeface="メイリオ" pitchFamily="34" charset="0"/>
-                <a:ea typeface="メイリオ" pitchFamily="34" charset="-122"/>
-                <a:cs typeface="メイリオ" pitchFamily="34" charset="-120"/>
-              </a:rPr>
-              <a:t>段差をなだらかにするのが、</a:t>
-            </a:r>
-            <a:pPr algn="l" indent="0" marL="0">
-              <a:lnSpc>
-                <a:spcPct val="120000"/>
-              </a:lnSpc>
-              <a:buNone/>
-            </a:pPr>
-            <a:r>
-              <a:rPr lang="en-US" sz="1900" b="1" dirty="0">
-                <a:solidFill>
-                  <a:srgbClr val="EE7B08"/>
-                </a:solidFill>
-                <a:latin typeface="メイリオ" pitchFamily="34" charset="0"/>
-                <a:ea typeface="メイリオ" pitchFamily="34" charset="-122"/>
-                <a:cs typeface="メイリオ" pitchFamily="34" charset="-120"/>
-              </a:rPr>
-              <a:t>９年間を見通した教育</a:t>
-            </a:r>
-            <a:pPr algn="l" indent="0" marL="0">
-              <a:lnSpc>
-                <a:spcPct val="120000"/>
-              </a:lnSpc>
-              <a:buNone/>
-            </a:pPr>
-            <a:r>
-              <a:rPr lang="en-US" sz="1900" b="1" dirty="0">
-                <a:solidFill>
-                  <a:srgbClr val="595959"/>
-                </a:solidFill>
-                <a:latin typeface="メイリオ" pitchFamily="34" charset="0"/>
-                <a:ea typeface="メイリオ" pitchFamily="34" charset="-122"/>
-                <a:cs typeface="メイリオ" pitchFamily="34" charset="-120"/>
-              </a:rPr>
-              <a:t>である。</a:t>
-            </a:r>
-            <a:endParaRPr lang="en-US" sz="1900" dirty="0"/>
+              <a:t>出典：令和８年度 全国学力・学習状況調査　回答結果集計表　肯定的回答の割合</a:t>
+            </a:r>
+            <a:endParaRPr lang="en-US" sz="950" dirty="0"/>
           </a:p>
         </p:txBody>
       </p:sp>
@@ -12610,73 +13138,60 @@
       </p:sp>
       <p:sp>
         <p:nvSpPr>
-          <p:cNvPr id="9" name="Shape 7"/>
-          <p:cNvSpPr/>
-          <p:nvPr/>
-        </p:nvSpPr>
-        <p:spPr>
-          <a:xfrm>
-            <a:off x="466344" y="2688336"/>
-            <a:ext cx="859536" cy="310896"/>
-          </a:xfrm>
-          <a:prstGeom prst="roundRect">
-            <a:avLst>
-              <a:gd name="adj" fmla="val 14706"/>
-            </a:avLst>
-          </a:prstGeom>
-          <a:solidFill>
-            <a:srgbClr val="FFFFFF"/>
-          </a:solidFill>
-          <a:ln w="12700">
-            <a:solidFill>
-              <a:srgbClr val="F6CFA4"/>
-            </a:solidFill>
-            <a:prstDash val="dash"/>
-          </a:ln>
-        </p:spPr>
+          <p:cNvPr id="9" name="Text 7"/>
+          <p:cNvSpPr txBox="1"/>
+          <p:nvPr/>
+        </p:nvSpPr>
+        <p:spPr>
+          <a:xfrm>
+            <a:off x="466344" y="2651760"/>
+            <a:ext cx="914400" cy="384048"/>
+          </a:xfrm>
+          <a:prstGeom prst="rect">
+            <a:avLst/>
+          </a:prstGeom>
+          <a:noFill/>
+          <a:ln/>
+        </p:spPr>
+        <p:txBody>
+          <a:bodyPr wrap="square" lIns="0" tIns="0" rIns="0" bIns="0" rtlCol="0" anchor="ctr"/>
+          <a:lstStyle/>
+          <a:p>
+            <a:pPr algn="l" indent="0" marL="0">
+              <a:buNone/>
+            </a:pPr>
+            <a:r>
+              <a:rPr lang="en-US" sz="2000" b="1" dirty="0">
+                <a:solidFill>
+                  <a:srgbClr val="3F3F3F"/>
+                </a:solidFill>
+                <a:latin typeface="メイリオ" pitchFamily="34" charset="0"/>
+                <a:ea typeface="メイリオ" pitchFamily="34" charset="-122"/>
+                <a:cs typeface="メイリオ" pitchFamily="34" charset="-120"/>
+              </a:rPr>
+              <a:t>85.2</a:t>
+            </a:r>
+            <a:pPr algn="l" indent="0" marL="0">
+              <a:buNone/>
+            </a:pPr>
+            <a:r>
+              <a:rPr lang="en-US" sz="1200" b="1" dirty="0">
+                <a:solidFill>
+                  <a:srgbClr val="3F3F3F"/>
+                </a:solidFill>
+                <a:latin typeface="メイリオ" pitchFamily="34" charset="0"/>
+                <a:ea typeface="メイリオ" pitchFamily="34" charset="-122"/>
+                <a:cs typeface="メイリオ" pitchFamily="34" charset="-120"/>
+              </a:rPr>
+              <a:t>％</a:t>
+            </a:r>
+            <a:endParaRPr lang="en-US" sz="2000" dirty="0"/>
+          </a:p>
+        </p:txBody>
       </p:sp>
       <p:sp>
         <p:nvSpPr>
           <p:cNvPr id="10" name="Text 8"/>
-          <p:cNvSpPr txBox="1"/>
-          <p:nvPr/>
-        </p:nvSpPr>
-        <p:spPr>
-          <a:xfrm>
-            <a:off x="466344" y="2688336"/>
-            <a:ext cx="859536" cy="310896"/>
-          </a:xfrm>
-          <a:prstGeom prst="rect">
-            <a:avLst/>
-          </a:prstGeom>
-          <a:noFill/>
-          <a:ln/>
-        </p:spPr>
-        <p:txBody>
-          <a:bodyPr wrap="square" lIns="0" tIns="0" rIns="0" bIns="0" rtlCol="0" anchor="ctr"/>
-          <a:lstStyle/>
-          <a:p>
-            <a:pPr algn="ctr" indent="0" marL="0">
-              <a:buNone/>
-            </a:pPr>
-            <a:r>
-              <a:rPr lang="en-US" sz="1100" b="1" dirty="0">
-                <a:solidFill>
-                  <a:srgbClr val="F6CFA4"/>
-                </a:solidFill>
-                <a:latin typeface="メイリオ" pitchFamily="34" charset="0"/>
-                <a:ea typeface="メイリオ" pitchFamily="34" charset="-122"/>
-                <a:cs typeface="メイリオ" pitchFamily="34" charset="-120"/>
-              </a:rPr>
-              <a:t>記入</a:t>
-            </a:r>
-            <a:endParaRPr lang="en-US" sz="1100" dirty="0"/>
-          </a:p>
-        </p:txBody>
-      </p:sp>
-      <p:sp>
-        <p:nvSpPr>
-          <p:cNvPr id="11" name="Text 9"/>
           <p:cNvSpPr txBox="1"/>
           <p:nvPr/>
         </p:nvSpPr>
@@ -12715,7 +13230,7 @@
       </p:sp>
       <p:sp>
         <p:nvSpPr>
-          <p:cNvPr id="12" name="Shape 10"/>
+          <p:cNvPr id="11" name="Shape 9"/>
           <p:cNvSpPr/>
           <p:nvPr/>
         </p:nvSpPr>
@@ -12742,7 +13257,7 @@
       </p:sp>
       <p:sp>
         <p:nvSpPr>
-          <p:cNvPr id="13" name="Text 11"/>
+          <p:cNvPr id="12" name="Text 10"/>
           <p:cNvSpPr txBox="1"/>
           <p:nvPr/>
         </p:nvSpPr>
@@ -12773,7 +13288,7 @@
                 <a:ea typeface="メイリオ" pitchFamily="34" charset="-122"/>
                 <a:cs typeface="メイリオ" pitchFamily="34" charset="-120"/>
               </a:rPr>
-              <a:t>―</a:t>
+              <a:t>-1.2</a:t>
             </a:r>
             <a:endParaRPr lang="en-US" sz="1200" dirty="0"/>
           </a:p>
@@ -12781,7 +13296,7 @@
       </p:sp>
       <p:sp>
         <p:nvSpPr>
-          <p:cNvPr id="14" name="Text 12"/>
+          <p:cNvPr id="13" name="Text 11"/>
           <p:cNvSpPr txBox="1"/>
           <p:nvPr/>
         </p:nvSpPr>
@@ -12820,14 +13335,106 @@
       </p:sp>
       <p:sp>
         <p:nvSpPr>
-          <p:cNvPr id="15" name="Shape 13"/>
+          <p:cNvPr id="14" name="Text 12"/>
+          <p:cNvSpPr txBox="1"/>
+          <p:nvPr/>
+        </p:nvSpPr>
+        <p:spPr>
+          <a:xfrm>
+            <a:off x="466344" y="3401568"/>
+            <a:ext cx="914400" cy="384048"/>
+          </a:xfrm>
+          <a:prstGeom prst="rect">
+            <a:avLst/>
+          </a:prstGeom>
+          <a:noFill/>
+          <a:ln/>
+        </p:spPr>
+        <p:txBody>
+          <a:bodyPr wrap="square" lIns="0" tIns="0" rIns="0" bIns="0" rtlCol="0" anchor="ctr"/>
+          <a:lstStyle/>
+          <a:p>
+            <a:pPr algn="l" indent="0" marL="0">
+              <a:buNone/>
+            </a:pPr>
+            <a:r>
+              <a:rPr lang="en-US" sz="2000" b="1" dirty="0">
+                <a:solidFill>
+                  <a:srgbClr val="3F3F3F"/>
+                </a:solidFill>
+                <a:latin typeface="メイリオ" pitchFamily="34" charset="0"/>
+                <a:ea typeface="メイリオ" pitchFamily="34" charset="-122"/>
+                <a:cs typeface="メイリオ" pitchFamily="34" charset="-120"/>
+              </a:rPr>
+              <a:t>91.5</a:t>
+            </a:r>
+            <a:pPr algn="l" indent="0" marL="0">
+              <a:buNone/>
+            </a:pPr>
+            <a:r>
+              <a:rPr lang="en-US" sz="1200" b="1" dirty="0">
+                <a:solidFill>
+                  <a:srgbClr val="3F3F3F"/>
+                </a:solidFill>
+                <a:latin typeface="メイリオ" pitchFamily="34" charset="0"/>
+                <a:ea typeface="メイリオ" pitchFamily="34" charset="-122"/>
+                <a:cs typeface="メイリオ" pitchFamily="34" charset="-120"/>
+              </a:rPr>
+              <a:t>％</a:t>
+            </a:r>
+            <a:endParaRPr lang="en-US" sz="2000" dirty="0"/>
+          </a:p>
+        </p:txBody>
+      </p:sp>
+      <p:sp>
+        <p:nvSpPr>
+          <p:cNvPr id="15" name="Text 13"/>
+          <p:cNvSpPr txBox="1"/>
+          <p:nvPr/>
+        </p:nvSpPr>
+        <p:spPr>
+          <a:xfrm>
+            <a:off x="1435608" y="3401568"/>
+            <a:ext cx="731520" cy="384048"/>
+          </a:xfrm>
+          <a:prstGeom prst="rect">
+            <a:avLst/>
+          </a:prstGeom>
+          <a:noFill/>
+          <a:ln/>
+        </p:spPr>
+        <p:txBody>
+          <a:bodyPr wrap="square" lIns="0" tIns="0" rIns="0" bIns="0" rtlCol="0" anchor="ctr"/>
+          <a:lstStyle/>
+          <a:p>
+            <a:pPr algn="l" indent="0" marL="0">
+              <a:buNone/>
+            </a:pPr>
+            <a:r>
+              <a:rPr lang="en-US" sz="1100" b="1" dirty="0">
+                <a:solidFill>
+                  <a:srgbClr val="808080"/>
+                </a:solidFill>
+                <a:latin typeface="メイリオ" pitchFamily="34" charset="0"/>
+                <a:ea typeface="メイリオ" pitchFamily="34" charset="-122"/>
+                <a:cs typeface="メイリオ" pitchFamily="34" charset="-120"/>
+              </a:rPr>
+              <a:t>区 83.3</a:t>
+            </a:r>
+            <a:endParaRPr lang="en-US" sz="1100" dirty="0"/>
+          </a:p>
+        </p:txBody>
+      </p:sp>
+      <p:sp>
+        <p:nvSpPr>
+          <p:cNvPr id="16" name="Shape 14"/>
           <p:cNvSpPr/>
           <p:nvPr/>
         </p:nvSpPr>
         <p:spPr>
           <a:xfrm>
-            <a:off x="466344" y="3438144"/>
-            <a:ext cx="859536" cy="310896"/>
+            <a:off x="2194560" y="3438144"/>
+            <a:ext cx="676656" cy="310896"/>
           </a:xfrm>
           <a:prstGeom prst="roundRect">
             <a:avLst>
@@ -12835,98 +13442,20 @@
             </a:avLst>
           </a:prstGeom>
           <a:solidFill>
-            <a:srgbClr val="FFFFFF"/>
+            <a:srgbClr val="FDF0E3"/>
           </a:solidFill>
           <a:ln w="12700">
             <a:solidFill>
               <a:srgbClr val="F6CFA4"/>
             </a:solidFill>
-            <a:prstDash val="dash"/>
+            <a:prstDash val="solid"/>
           </a:ln>
         </p:spPr>
       </p:sp>
       <p:sp>
         <p:nvSpPr>
-          <p:cNvPr id="16" name="Text 14"/>
-          <p:cNvSpPr txBox="1"/>
-          <p:nvPr/>
-        </p:nvSpPr>
-        <p:spPr>
-          <a:xfrm>
-            <a:off x="466344" y="3438144"/>
-            <a:ext cx="859536" cy="310896"/>
-          </a:xfrm>
-          <a:prstGeom prst="rect">
-            <a:avLst/>
-          </a:prstGeom>
-          <a:noFill/>
-          <a:ln/>
-        </p:spPr>
-        <p:txBody>
-          <a:bodyPr wrap="square" lIns="0" tIns="0" rIns="0" bIns="0" rtlCol="0" anchor="ctr"/>
-          <a:lstStyle/>
-          <a:p>
-            <a:pPr algn="ctr" indent="0" marL="0">
-              <a:buNone/>
-            </a:pPr>
-            <a:r>
-              <a:rPr lang="en-US" sz="1100" b="1" dirty="0">
-                <a:solidFill>
-                  <a:srgbClr val="F6CFA4"/>
-                </a:solidFill>
-                <a:latin typeface="メイリオ" pitchFamily="34" charset="0"/>
-                <a:ea typeface="メイリオ" pitchFamily="34" charset="-122"/>
-                <a:cs typeface="メイリオ" pitchFamily="34" charset="-120"/>
-              </a:rPr>
-              <a:t>記入</a:t>
-            </a:r>
-            <a:endParaRPr lang="en-US" sz="1100" dirty="0"/>
-          </a:p>
-        </p:txBody>
-      </p:sp>
-      <p:sp>
-        <p:nvSpPr>
           <p:cNvPr id="17" name="Text 15"/>
           <p:cNvSpPr txBox="1"/>
-          <p:nvPr/>
-        </p:nvSpPr>
-        <p:spPr>
-          <a:xfrm>
-            <a:off x="1435608" y="3401568"/>
-            <a:ext cx="731520" cy="384048"/>
-          </a:xfrm>
-          <a:prstGeom prst="rect">
-            <a:avLst/>
-          </a:prstGeom>
-          <a:noFill/>
-          <a:ln/>
-        </p:spPr>
-        <p:txBody>
-          <a:bodyPr wrap="square" lIns="0" tIns="0" rIns="0" bIns="0" rtlCol="0" anchor="ctr"/>
-          <a:lstStyle/>
-          <a:p>
-            <a:pPr algn="l" indent="0" marL="0">
-              <a:buNone/>
-            </a:pPr>
-            <a:r>
-              <a:rPr lang="en-US" sz="1100" b="1" dirty="0">
-                <a:solidFill>
-                  <a:srgbClr val="808080"/>
-                </a:solidFill>
-                <a:latin typeface="メイリオ" pitchFamily="34" charset="0"/>
-                <a:ea typeface="メイリオ" pitchFamily="34" charset="-122"/>
-                <a:cs typeface="メイリオ" pitchFamily="34" charset="-120"/>
-              </a:rPr>
-              <a:t>区 83.3</a:t>
-            </a:r>
-            <a:endParaRPr lang="en-US" sz="1100" dirty="0"/>
-          </a:p>
-        </p:txBody>
-      </p:sp>
-      <p:sp>
-        <p:nvSpPr>
-          <p:cNvPr id="18" name="Shape 16"/>
-          <p:cNvSpPr/>
           <p:nvPr/>
         </p:nvSpPr>
         <p:spPr>
@@ -12934,33 +13463,6 @@
             <a:off x="2194560" y="3438144"/>
             <a:ext cx="676656" cy="310896"/>
           </a:xfrm>
-          <a:prstGeom prst="roundRect">
-            <a:avLst>
-              <a:gd name="adj" fmla="val 14706"/>
-            </a:avLst>
-          </a:prstGeom>
-          <a:solidFill>
-            <a:srgbClr val="F2F2F2"/>
-          </a:solidFill>
-          <a:ln w="12700">
-            <a:solidFill>
-              <a:srgbClr val="DDDDDD"/>
-            </a:solidFill>
-            <a:prstDash val="solid"/>
-          </a:ln>
-        </p:spPr>
-      </p:sp>
-      <p:sp>
-        <p:nvSpPr>
-          <p:cNvPr id="19" name="Text 17"/>
-          <p:cNvSpPr txBox="1"/>
-          <p:nvPr/>
-        </p:nvSpPr>
-        <p:spPr>
-          <a:xfrm>
-            <a:off x="2194560" y="3438144"/>
-            <a:ext cx="676656" cy="310896"/>
-          </a:xfrm>
           <a:prstGeom prst="rect">
             <a:avLst/>
           </a:prstGeom>
@@ -12977,13 +13479,13 @@
             <a:r>
               <a:rPr lang="en-US" sz="1200" b="1" dirty="0">
                 <a:solidFill>
-                  <a:srgbClr val="808080"/>
-                </a:solidFill>
-                <a:latin typeface="メイリオ" pitchFamily="34" charset="0"/>
-                <a:ea typeface="メイリオ" pitchFamily="34" charset="-122"/>
-                <a:cs typeface="メイリオ" pitchFamily="34" charset="-120"/>
-              </a:rPr>
-              <a:t>―</a:t>
+                  <a:srgbClr val="EE7B08"/>
+                </a:solidFill>
+                <a:latin typeface="メイリオ" pitchFamily="34" charset="0"/>
+                <a:ea typeface="メイリオ" pitchFamily="34" charset="-122"/>
+                <a:cs typeface="メイリオ" pitchFamily="34" charset="-120"/>
+              </a:rPr>
+              <a:t>＋8.2</a:t>
             </a:r>
             <a:endParaRPr lang="en-US" sz="1200" dirty="0"/>
           </a:p>
@@ -12991,7 +13493,7 @@
       </p:sp>
       <p:sp>
         <p:nvSpPr>
-          <p:cNvPr id="20" name="Shape 18"/>
+          <p:cNvPr id="18" name="Shape 16"/>
           <p:cNvSpPr/>
           <p:nvPr/>
         </p:nvSpPr>
@@ -13018,7 +13520,7 @@
       </p:sp>
       <p:sp>
         <p:nvSpPr>
-          <p:cNvPr id="21" name="Shape 19"/>
+          <p:cNvPr id="19" name="Shape 17"/>
           <p:cNvSpPr/>
           <p:nvPr/>
         </p:nvSpPr>
@@ -13038,7 +13540,7 @@
       </p:sp>
       <p:sp>
         <p:nvSpPr>
-          <p:cNvPr id="22" name="Text 20"/>
+          <p:cNvPr id="20" name="Text 18"/>
           <p:cNvSpPr txBox="1"/>
           <p:nvPr/>
         </p:nvSpPr>
@@ -13077,7 +13579,7 @@
       </p:sp>
       <p:sp>
         <p:nvSpPr>
-          <p:cNvPr id="23" name="Text 21"/>
+          <p:cNvPr id="21" name="Text 19"/>
           <p:cNvSpPr txBox="1"/>
           <p:nvPr/>
         </p:nvSpPr>
@@ -13116,7 +13618,7 @@
       </p:sp>
       <p:sp>
         <p:nvSpPr>
-          <p:cNvPr id="24" name="Text 22"/>
+          <p:cNvPr id="22" name="Text 20"/>
           <p:cNvSpPr txBox="1"/>
           <p:nvPr/>
         </p:nvSpPr>
@@ -13178,7 +13680,7 @@
       </p:sp>
       <p:sp>
         <p:nvSpPr>
-          <p:cNvPr id="25" name="Text 23"/>
+          <p:cNvPr id="23" name="Text 21"/>
           <p:cNvSpPr txBox="1"/>
           <p:nvPr/>
         </p:nvSpPr>
@@ -13217,14 +13719,106 @@
       </p:sp>
       <p:sp>
         <p:nvSpPr>
+          <p:cNvPr id="24" name="Text 22"/>
+          <p:cNvSpPr txBox="1"/>
+          <p:nvPr/>
+        </p:nvSpPr>
+        <p:spPr>
+          <a:xfrm>
+            <a:off x="3374136" y="2651760"/>
+            <a:ext cx="914400" cy="384048"/>
+          </a:xfrm>
+          <a:prstGeom prst="rect">
+            <a:avLst/>
+          </a:prstGeom>
+          <a:noFill/>
+          <a:ln/>
+        </p:spPr>
+        <p:txBody>
+          <a:bodyPr wrap="square" lIns="0" tIns="0" rIns="0" bIns="0" rtlCol="0" anchor="ctr"/>
+          <a:lstStyle/>
+          <a:p>
+            <a:pPr algn="l" indent="0" marL="0">
+              <a:buNone/>
+            </a:pPr>
+            <a:r>
+              <a:rPr lang="en-US" sz="2000" b="1" dirty="0">
+                <a:solidFill>
+                  <a:srgbClr val="3F3F3F"/>
+                </a:solidFill>
+                <a:latin typeface="メイリオ" pitchFamily="34" charset="0"/>
+                <a:ea typeface="メイリオ" pitchFamily="34" charset="-122"/>
+                <a:cs typeface="メイリオ" pitchFamily="34" charset="-120"/>
+              </a:rPr>
+              <a:t>92.5</a:t>
+            </a:r>
+            <a:pPr algn="l" indent="0" marL="0">
+              <a:buNone/>
+            </a:pPr>
+            <a:r>
+              <a:rPr lang="en-US" sz="1200" b="1" dirty="0">
+                <a:solidFill>
+                  <a:srgbClr val="3F3F3F"/>
+                </a:solidFill>
+                <a:latin typeface="メイリオ" pitchFamily="34" charset="0"/>
+                <a:ea typeface="メイリオ" pitchFamily="34" charset="-122"/>
+                <a:cs typeface="メイリオ" pitchFamily="34" charset="-120"/>
+              </a:rPr>
+              <a:t>％</a:t>
+            </a:r>
+            <a:endParaRPr lang="en-US" sz="2000" dirty="0"/>
+          </a:p>
+        </p:txBody>
+      </p:sp>
+      <p:sp>
+        <p:nvSpPr>
+          <p:cNvPr id="25" name="Text 23"/>
+          <p:cNvSpPr txBox="1"/>
+          <p:nvPr/>
+        </p:nvSpPr>
+        <p:spPr>
+          <a:xfrm>
+            <a:off x="4343400" y="2651760"/>
+            <a:ext cx="731520" cy="384048"/>
+          </a:xfrm>
+          <a:prstGeom prst="rect">
+            <a:avLst/>
+          </a:prstGeom>
+          <a:noFill/>
+          <a:ln/>
+        </p:spPr>
+        <p:txBody>
+          <a:bodyPr wrap="square" lIns="0" tIns="0" rIns="0" bIns="0" rtlCol="0" anchor="ctr"/>
+          <a:lstStyle/>
+          <a:p>
+            <a:pPr algn="l" indent="0" marL="0">
+              <a:buNone/>
+            </a:pPr>
+            <a:r>
+              <a:rPr lang="en-US" sz="1100" b="1" dirty="0">
+                <a:solidFill>
+                  <a:srgbClr val="808080"/>
+                </a:solidFill>
+                <a:latin typeface="メイリオ" pitchFamily="34" charset="0"/>
+                <a:ea typeface="メイリオ" pitchFamily="34" charset="-122"/>
+                <a:cs typeface="メイリオ" pitchFamily="34" charset="-120"/>
+              </a:rPr>
+              <a:t>区 87.0</a:t>
+            </a:r>
+            <a:endParaRPr lang="en-US" sz="1100" dirty="0"/>
+          </a:p>
+        </p:txBody>
+      </p:sp>
+      <p:sp>
+        <p:nvSpPr>
           <p:cNvPr id="26" name="Shape 24"/>
           <p:cNvSpPr/>
           <p:nvPr/>
         </p:nvSpPr>
         <p:spPr>
           <a:xfrm>
-            <a:off x="3374136" y="2688336"/>
-            <a:ext cx="859536" cy="310896"/>
+            <a:off x="5102352" y="2688336"/>
+            <a:ext cx="676656" cy="310896"/>
           </a:xfrm>
           <a:prstGeom prst="roundRect">
             <a:avLst>
@@ -13232,13 +13826,13 @@
             </a:avLst>
           </a:prstGeom>
           <a:solidFill>
-            <a:srgbClr val="FFFFFF"/>
+            <a:srgbClr val="FDF0E3"/>
           </a:solidFill>
           <a:ln w="12700">
             <a:solidFill>
               <a:srgbClr val="F6CFA4"/>
             </a:solidFill>
-            <a:prstDash val="dash"/>
+            <a:prstDash val="solid"/>
           </a:ln>
         </p:spPr>
       </p:sp>
@@ -13250,8 +13844,8 @@
         </p:nvSpPr>
         <p:spPr>
           <a:xfrm>
-            <a:off x="3374136" y="2688336"/>
-            <a:ext cx="859536" cy="310896"/>
+            <a:off x="5102352" y="2688336"/>
+            <a:ext cx="676656" cy="310896"/>
           </a:xfrm>
           <a:prstGeom prst="rect">
             <a:avLst/>
@@ -13267,15 +13861,146 @@
               <a:buNone/>
             </a:pPr>
             <a:r>
+              <a:rPr lang="en-US" sz="1200" b="1" dirty="0">
+                <a:solidFill>
+                  <a:srgbClr val="EE7B08"/>
+                </a:solidFill>
+                <a:latin typeface="メイリオ" pitchFamily="34" charset="0"/>
+                <a:ea typeface="メイリオ" pitchFamily="34" charset="-122"/>
+                <a:cs typeface="メイリオ" pitchFamily="34" charset="-120"/>
+              </a:rPr>
+              <a:t>＋5.5</a:t>
+            </a:r>
+            <a:endParaRPr lang="en-US" sz="1200" dirty="0"/>
+          </a:p>
+        </p:txBody>
+      </p:sp>
+      <p:sp>
+        <p:nvSpPr>
+          <p:cNvPr id="28" name="Text 26"/>
+          <p:cNvSpPr txBox="1"/>
+          <p:nvPr/>
+        </p:nvSpPr>
+        <p:spPr>
+          <a:xfrm>
+            <a:off x="3374136" y="3200400"/>
+            <a:ext cx="2404872" cy="201168"/>
+          </a:xfrm>
+          <a:prstGeom prst="rect">
+            <a:avLst/>
+          </a:prstGeom>
+          <a:noFill/>
+          <a:ln/>
+        </p:spPr>
+        <p:txBody>
+          <a:bodyPr wrap="square" lIns="0" tIns="0" rIns="0" bIns="0" rtlCol="0" anchor="ctr"/>
+          <a:lstStyle/>
+          <a:p>
+            <a:pPr algn="l" indent="0" marL="0">
+              <a:buNone/>
+            </a:pPr>
+            <a:r>
+              <a:rPr lang="en-US" sz="1050" b="1" dirty="0">
+                <a:solidFill>
+                  <a:srgbClr val="808080"/>
+                </a:solidFill>
+                <a:latin typeface="メイリオ" pitchFamily="34" charset="0"/>
+                <a:ea typeface="メイリオ" pitchFamily="34" charset="-122"/>
+                <a:cs typeface="メイリオ" pitchFamily="34" charset="-120"/>
+              </a:rPr>
+              <a:t>中学部（９年）</a:t>
+            </a:r>
+            <a:endParaRPr lang="en-US" sz="1050" dirty="0"/>
+          </a:p>
+        </p:txBody>
+      </p:sp>
+      <p:sp>
+        <p:nvSpPr>
+          <p:cNvPr id="29" name="Text 27"/>
+          <p:cNvSpPr txBox="1"/>
+          <p:nvPr/>
+        </p:nvSpPr>
+        <p:spPr>
+          <a:xfrm>
+            <a:off x="3374136" y="3401568"/>
+            <a:ext cx="914400" cy="384048"/>
+          </a:xfrm>
+          <a:prstGeom prst="rect">
+            <a:avLst/>
+          </a:prstGeom>
+          <a:noFill/>
+          <a:ln/>
+        </p:spPr>
+        <p:txBody>
+          <a:bodyPr wrap="square" lIns="0" tIns="0" rIns="0" bIns="0" rtlCol="0" anchor="ctr"/>
+          <a:lstStyle/>
+          <a:p>
+            <a:pPr algn="l" indent="0" marL="0">
+              <a:buNone/>
+            </a:pPr>
+            <a:r>
+              <a:rPr lang="en-US" sz="2000" b="1" dirty="0">
+                <a:solidFill>
+                  <a:srgbClr val="3F3F3F"/>
+                </a:solidFill>
+                <a:latin typeface="メイリオ" pitchFamily="34" charset="0"/>
+                <a:ea typeface="メイリオ" pitchFamily="34" charset="-122"/>
+                <a:cs typeface="メイリオ" pitchFamily="34" charset="-120"/>
+              </a:rPr>
+              <a:t>97.9</a:t>
+            </a:r>
+            <a:pPr algn="l" indent="0" marL="0">
+              <a:buNone/>
+            </a:pPr>
+            <a:r>
+              <a:rPr lang="en-US" sz="1200" b="1" dirty="0">
+                <a:solidFill>
+                  <a:srgbClr val="3F3F3F"/>
+                </a:solidFill>
+                <a:latin typeface="メイリオ" pitchFamily="34" charset="0"/>
+                <a:ea typeface="メイリオ" pitchFamily="34" charset="-122"/>
+                <a:cs typeface="メイリオ" pitchFamily="34" charset="-120"/>
+              </a:rPr>
+              <a:t>％</a:t>
+            </a:r>
+            <a:endParaRPr lang="en-US" sz="2000" dirty="0"/>
+          </a:p>
+        </p:txBody>
+      </p:sp>
+      <p:sp>
+        <p:nvSpPr>
+          <p:cNvPr id="30" name="Text 28"/>
+          <p:cNvSpPr txBox="1"/>
+          <p:nvPr/>
+        </p:nvSpPr>
+        <p:spPr>
+          <a:xfrm>
+            <a:off x="4343400" y="3401568"/>
+            <a:ext cx="731520" cy="384048"/>
+          </a:xfrm>
+          <a:prstGeom prst="rect">
+            <a:avLst/>
+          </a:prstGeom>
+          <a:noFill/>
+          <a:ln/>
+        </p:spPr>
+        <p:txBody>
+          <a:bodyPr wrap="square" lIns="0" tIns="0" rIns="0" bIns="0" rtlCol="0" anchor="ctr"/>
+          <a:lstStyle/>
+          <a:p>
+            <a:pPr algn="l" indent="0" marL="0">
+              <a:buNone/>
+            </a:pPr>
+            <a:r>
               <a:rPr lang="en-US" sz="1100" b="1" dirty="0">
                 <a:solidFill>
-                  <a:srgbClr val="F6CFA4"/>
-                </a:solidFill>
-                <a:latin typeface="メイリオ" pitchFamily="34" charset="0"/>
-                <a:ea typeface="メイリオ" pitchFamily="34" charset="-122"/>
-                <a:cs typeface="メイリオ" pitchFamily="34" charset="-120"/>
-              </a:rPr>
-              <a:t>記入</a:t>
+                  <a:srgbClr val="808080"/>
+                </a:solidFill>
+                <a:latin typeface="メイリオ" pitchFamily="34" charset="0"/>
+                <a:ea typeface="メイリオ" pitchFamily="34" charset="-122"/>
+                <a:cs typeface="メイリオ" pitchFamily="34" charset="-120"/>
+              </a:rPr>
+              <a:t>区 86.6</a:t>
             </a:r>
             <a:endParaRPr lang="en-US" sz="1100" dirty="0"/>
           </a:p>
@@ -13283,52 +14008,13 @@
       </p:sp>
       <p:sp>
         <p:nvSpPr>
-          <p:cNvPr id="28" name="Text 26"/>
-          <p:cNvSpPr txBox="1"/>
-          <p:nvPr/>
-        </p:nvSpPr>
-        <p:spPr>
-          <a:xfrm>
-            <a:off x="4343400" y="2651760"/>
-            <a:ext cx="731520" cy="384048"/>
-          </a:xfrm>
-          <a:prstGeom prst="rect">
-            <a:avLst/>
-          </a:prstGeom>
-          <a:noFill/>
-          <a:ln/>
-        </p:spPr>
-        <p:txBody>
-          <a:bodyPr wrap="square" lIns="0" tIns="0" rIns="0" bIns="0" rtlCol="0" anchor="ctr"/>
-          <a:lstStyle/>
-          <a:p>
-            <a:pPr algn="l" indent="0" marL="0">
-              <a:buNone/>
-            </a:pPr>
-            <a:r>
-              <a:rPr lang="en-US" sz="1100" b="1" dirty="0">
-                <a:solidFill>
-                  <a:srgbClr val="808080"/>
-                </a:solidFill>
-                <a:latin typeface="メイリオ" pitchFamily="34" charset="0"/>
-                <a:ea typeface="メイリオ" pitchFamily="34" charset="-122"/>
-                <a:cs typeface="メイリオ" pitchFamily="34" charset="-120"/>
-              </a:rPr>
-              <a:t>区 87.0</a:t>
-            </a:r>
-            <a:endParaRPr lang="en-US" sz="1100" dirty="0"/>
-          </a:p>
-        </p:txBody>
-      </p:sp>
-      <p:sp>
-        <p:nvSpPr>
-          <p:cNvPr id="29" name="Shape 27"/>
+          <p:cNvPr id="31" name="Shape 29"/>
           <p:cNvSpPr/>
           <p:nvPr/>
         </p:nvSpPr>
         <p:spPr>
           <a:xfrm>
-            <a:off x="5102352" y="2688336"/>
+            <a:off x="5102352" y="3438144"/>
             <a:ext cx="676656" cy="310896"/>
           </a:xfrm>
           <a:prstGeom prst="roundRect">
@@ -13337,203 +14023,20 @@
             </a:avLst>
           </a:prstGeom>
           <a:solidFill>
-            <a:srgbClr val="F2F2F2"/>
-          </a:solidFill>
-          <a:ln w="12700">
-            <a:solidFill>
-              <a:srgbClr val="DDDDDD"/>
-            </a:solidFill>
-            <a:prstDash val="solid"/>
-          </a:ln>
-        </p:spPr>
-      </p:sp>
-      <p:sp>
-        <p:nvSpPr>
-          <p:cNvPr id="30" name="Text 28"/>
-          <p:cNvSpPr txBox="1"/>
-          <p:nvPr/>
-        </p:nvSpPr>
-        <p:spPr>
-          <a:xfrm>
-            <a:off x="5102352" y="2688336"/>
-            <a:ext cx="676656" cy="310896"/>
-          </a:xfrm>
-          <a:prstGeom prst="rect">
-            <a:avLst/>
-          </a:prstGeom>
-          <a:noFill/>
-          <a:ln/>
-        </p:spPr>
-        <p:txBody>
-          <a:bodyPr wrap="square" lIns="0" tIns="0" rIns="0" bIns="0" rtlCol="0" anchor="ctr"/>
-          <a:lstStyle/>
-          <a:p>
-            <a:pPr algn="ctr" indent="0" marL="0">
-              <a:buNone/>
-            </a:pPr>
-            <a:r>
-              <a:rPr lang="en-US" sz="1200" b="1" dirty="0">
-                <a:solidFill>
-                  <a:srgbClr val="808080"/>
-                </a:solidFill>
-                <a:latin typeface="メイリオ" pitchFamily="34" charset="0"/>
-                <a:ea typeface="メイリオ" pitchFamily="34" charset="-122"/>
-                <a:cs typeface="メイリオ" pitchFamily="34" charset="-120"/>
-              </a:rPr>
-              <a:t>―</a:t>
-            </a:r>
-            <a:endParaRPr lang="en-US" sz="1200" dirty="0"/>
-          </a:p>
-        </p:txBody>
-      </p:sp>
-      <p:sp>
-        <p:nvSpPr>
-          <p:cNvPr id="31" name="Text 29"/>
-          <p:cNvSpPr txBox="1"/>
-          <p:nvPr/>
-        </p:nvSpPr>
-        <p:spPr>
-          <a:xfrm>
-            <a:off x="3374136" y="3200400"/>
-            <a:ext cx="2404872" cy="201168"/>
-          </a:xfrm>
-          <a:prstGeom prst="rect">
-            <a:avLst/>
-          </a:prstGeom>
-          <a:noFill/>
-          <a:ln/>
-        </p:spPr>
-        <p:txBody>
-          <a:bodyPr wrap="square" lIns="0" tIns="0" rIns="0" bIns="0" rtlCol="0" anchor="ctr"/>
-          <a:lstStyle/>
-          <a:p>
-            <a:pPr algn="l" indent="0" marL="0">
-              <a:buNone/>
-            </a:pPr>
-            <a:r>
-              <a:rPr lang="en-US" sz="1050" b="1" dirty="0">
-                <a:solidFill>
-                  <a:srgbClr val="808080"/>
-                </a:solidFill>
-                <a:latin typeface="メイリオ" pitchFamily="34" charset="0"/>
-                <a:ea typeface="メイリオ" pitchFamily="34" charset="-122"/>
-                <a:cs typeface="メイリオ" pitchFamily="34" charset="-120"/>
-              </a:rPr>
-              <a:t>中学部（９年）</a:t>
-            </a:r>
-            <a:endParaRPr lang="en-US" sz="1050" dirty="0"/>
-          </a:p>
-        </p:txBody>
-      </p:sp>
-      <p:sp>
-        <p:nvSpPr>
-          <p:cNvPr id="32" name="Shape 30"/>
-          <p:cNvSpPr/>
-          <p:nvPr/>
-        </p:nvSpPr>
-        <p:spPr>
-          <a:xfrm>
-            <a:off x="3374136" y="3438144"/>
-            <a:ext cx="859536" cy="310896"/>
-          </a:xfrm>
-          <a:prstGeom prst="roundRect">
-            <a:avLst>
-              <a:gd name="adj" fmla="val 14706"/>
-            </a:avLst>
-          </a:prstGeom>
-          <a:solidFill>
-            <a:srgbClr val="FFFFFF"/>
+            <a:srgbClr val="FDF0E3"/>
           </a:solidFill>
           <a:ln w="12700">
             <a:solidFill>
               <a:srgbClr val="F6CFA4"/>
             </a:solidFill>
-            <a:prstDash val="dash"/>
+            <a:prstDash val="solid"/>
           </a:ln>
         </p:spPr>
       </p:sp>
       <p:sp>
         <p:nvSpPr>
-          <p:cNvPr id="33" name="Text 31"/>
-          <p:cNvSpPr txBox="1"/>
-          <p:nvPr/>
-        </p:nvSpPr>
-        <p:spPr>
-          <a:xfrm>
-            <a:off x="3374136" y="3438144"/>
-            <a:ext cx="859536" cy="310896"/>
-          </a:xfrm>
-          <a:prstGeom prst="rect">
-            <a:avLst/>
-          </a:prstGeom>
-          <a:noFill/>
-          <a:ln/>
-        </p:spPr>
-        <p:txBody>
-          <a:bodyPr wrap="square" lIns="0" tIns="0" rIns="0" bIns="0" rtlCol="0" anchor="ctr"/>
-          <a:lstStyle/>
-          <a:p>
-            <a:pPr algn="ctr" indent="0" marL="0">
-              <a:buNone/>
-            </a:pPr>
-            <a:r>
-              <a:rPr lang="en-US" sz="1100" b="1" dirty="0">
-                <a:solidFill>
-                  <a:srgbClr val="F6CFA4"/>
-                </a:solidFill>
-                <a:latin typeface="メイリオ" pitchFamily="34" charset="0"/>
-                <a:ea typeface="メイリオ" pitchFamily="34" charset="-122"/>
-                <a:cs typeface="メイリオ" pitchFamily="34" charset="-120"/>
-              </a:rPr>
-              <a:t>記入</a:t>
-            </a:r>
-            <a:endParaRPr lang="en-US" sz="1100" dirty="0"/>
-          </a:p>
-        </p:txBody>
-      </p:sp>
-      <p:sp>
-        <p:nvSpPr>
-          <p:cNvPr id="34" name="Text 32"/>
-          <p:cNvSpPr txBox="1"/>
-          <p:nvPr/>
-        </p:nvSpPr>
-        <p:spPr>
-          <a:xfrm>
-            <a:off x="4343400" y="3401568"/>
-            <a:ext cx="731520" cy="384048"/>
-          </a:xfrm>
-          <a:prstGeom prst="rect">
-            <a:avLst/>
-          </a:prstGeom>
-          <a:noFill/>
-          <a:ln/>
-        </p:spPr>
-        <p:txBody>
-          <a:bodyPr wrap="square" lIns="0" tIns="0" rIns="0" bIns="0" rtlCol="0" anchor="ctr"/>
-          <a:lstStyle/>
-          <a:p>
-            <a:pPr algn="l" indent="0" marL="0">
-              <a:buNone/>
-            </a:pPr>
-            <a:r>
-              <a:rPr lang="en-US" sz="1100" b="1" dirty="0">
-                <a:solidFill>
-                  <a:srgbClr val="808080"/>
-                </a:solidFill>
-                <a:latin typeface="メイリオ" pitchFamily="34" charset="0"/>
-                <a:ea typeface="メイリオ" pitchFamily="34" charset="-122"/>
-                <a:cs typeface="メイリオ" pitchFamily="34" charset="-120"/>
-              </a:rPr>
-              <a:t>区 86.6</a:t>
-            </a:r>
-            <a:endParaRPr lang="en-US" sz="1100" dirty="0"/>
-          </a:p>
-        </p:txBody>
-      </p:sp>
-      <p:sp>
-        <p:nvSpPr>
-          <p:cNvPr id="35" name="Shape 33"/>
-          <p:cNvSpPr/>
+          <p:cNvPr id="32" name="Text 30"/>
+          <p:cNvSpPr txBox="1"/>
           <p:nvPr/>
         </p:nvSpPr>
         <p:spPr>
@@ -13541,33 +14044,6 @@
             <a:off x="5102352" y="3438144"/>
             <a:ext cx="676656" cy="310896"/>
           </a:xfrm>
-          <a:prstGeom prst="roundRect">
-            <a:avLst>
-              <a:gd name="adj" fmla="val 14706"/>
-            </a:avLst>
-          </a:prstGeom>
-          <a:solidFill>
-            <a:srgbClr val="F2F2F2"/>
-          </a:solidFill>
-          <a:ln w="12700">
-            <a:solidFill>
-              <a:srgbClr val="DDDDDD"/>
-            </a:solidFill>
-            <a:prstDash val="solid"/>
-          </a:ln>
-        </p:spPr>
-      </p:sp>
-      <p:sp>
-        <p:nvSpPr>
-          <p:cNvPr id="36" name="Text 34"/>
-          <p:cNvSpPr txBox="1"/>
-          <p:nvPr/>
-        </p:nvSpPr>
-        <p:spPr>
-          <a:xfrm>
-            <a:off x="5102352" y="3438144"/>
-            <a:ext cx="676656" cy="310896"/>
-          </a:xfrm>
           <a:prstGeom prst="rect">
             <a:avLst/>
           </a:prstGeom>
@@ -13584,13 +14060,13 @@
             <a:r>
               <a:rPr lang="en-US" sz="1200" b="1" dirty="0">
                 <a:solidFill>
-                  <a:srgbClr val="808080"/>
-                </a:solidFill>
-                <a:latin typeface="メイリオ" pitchFamily="34" charset="0"/>
-                <a:ea typeface="メイリオ" pitchFamily="34" charset="-122"/>
-                <a:cs typeface="メイリオ" pitchFamily="34" charset="-120"/>
-              </a:rPr>
-              <a:t>―</a:t>
+                  <a:srgbClr val="EE7B08"/>
+                </a:solidFill>
+                <a:latin typeface="メイリオ" pitchFamily="34" charset="0"/>
+                <a:ea typeface="メイリオ" pitchFamily="34" charset="-122"/>
+                <a:cs typeface="メイリオ" pitchFamily="34" charset="-120"/>
+              </a:rPr>
+              <a:t>＋11.3</a:t>
             </a:r>
             <a:endParaRPr lang="en-US" sz="1200" dirty="0"/>
           </a:p>
@@ -13598,7 +14074,7 @@
       </p:sp>
       <p:sp>
         <p:nvSpPr>
-          <p:cNvPr id="37" name="Shape 35"/>
+          <p:cNvPr id="33" name="Shape 31"/>
           <p:cNvSpPr/>
           <p:nvPr/>
         </p:nvSpPr>
@@ -13625,7 +14101,7 @@
       </p:sp>
       <p:sp>
         <p:nvSpPr>
-          <p:cNvPr id="38" name="Shape 36"/>
+          <p:cNvPr id="34" name="Shape 32"/>
           <p:cNvSpPr/>
           <p:nvPr/>
         </p:nvSpPr>
@@ -13645,7 +14121,7 @@
       </p:sp>
       <p:sp>
         <p:nvSpPr>
-          <p:cNvPr id="39" name="Text 37"/>
+          <p:cNvPr id="35" name="Text 33"/>
           <p:cNvSpPr txBox="1"/>
           <p:nvPr/>
         </p:nvSpPr>
@@ -13684,7 +14160,7 @@
       </p:sp>
       <p:sp>
         <p:nvSpPr>
-          <p:cNvPr id="40" name="Text 38"/>
+          <p:cNvPr id="36" name="Text 34"/>
           <p:cNvSpPr txBox="1"/>
           <p:nvPr/>
         </p:nvSpPr>
@@ -13723,7 +14199,7 @@
       </p:sp>
       <p:sp>
         <p:nvSpPr>
-          <p:cNvPr id="41" name="Text 39"/>
+          <p:cNvPr id="37" name="Text 35"/>
           <p:cNvSpPr txBox="1"/>
           <p:nvPr/>
         </p:nvSpPr>
@@ -13785,7 +14261,7 @@
       </p:sp>
       <p:sp>
         <p:nvSpPr>
-          <p:cNvPr id="42" name="Text 40"/>
+          <p:cNvPr id="38" name="Text 36"/>
           <p:cNvSpPr txBox="1"/>
           <p:nvPr/>
         </p:nvSpPr>
@@ -13824,14 +14300,106 @@
       </p:sp>
       <p:sp>
         <p:nvSpPr>
-          <p:cNvPr id="43" name="Shape 41"/>
+          <p:cNvPr id="39" name="Text 37"/>
+          <p:cNvSpPr txBox="1"/>
+          <p:nvPr/>
+        </p:nvSpPr>
+        <p:spPr>
+          <a:xfrm>
+            <a:off x="6281928" y="2651760"/>
+            <a:ext cx="914400" cy="384048"/>
+          </a:xfrm>
+          <a:prstGeom prst="rect">
+            <a:avLst/>
+          </a:prstGeom>
+          <a:noFill/>
+          <a:ln/>
+        </p:spPr>
+        <p:txBody>
+          <a:bodyPr wrap="square" lIns="0" tIns="0" rIns="0" bIns="0" rtlCol="0" anchor="ctr"/>
+          <a:lstStyle/>
+          <a:p>
+            <a:pPr algn="l" indent="0" marL="0">
+              <a:buNone/>
+            </a:pPr>
+            <a:r>
+              <a:rPr lang="en-US" sz="2000" b="1" dirty="0">
+                <a:solidFill>
+                  <a:srgbClr val="3F3F3F"/>
+                </a:solidFill>
+                <a:latin typeface="メイリオ" pitchFamily="34" charset="0"/>
+                <a:ea typeface="メイリオ" pitchFamily="34" charset="-122"/>
+                <a:cs typeface="メイリオ" pitchFamily="34" charset="-120"/>
+              </a:rPr>
+              <a:t>92.6</a:t>
+            </a:r>
+            <a:pPr algn="l" indent="0" marL="0">
+              <a:buNone/>
+            </a:pPr>
+            <a:r>
+              <a:rPr lang="en-US" sz="1200" b="1" dirty="0">
+                <a:solidFill>
+                  <a:srgbClr val="3F3F3F"/>
+                </a:solidFill>
+                <a:latin typeface="メイリオ" pitchFamily="34" charset="0"/>
+                <a:ea typeface="メイリオ" pitchFamily="34" charset="-122"/>
+                <a:cs typeface="メイリオ" pitchFamily="34" charset="-120"/>
+              </a:rPr>
+              <a:t>％</a:t>
+            </a:r>
+            <a:endParaRPr lang="en-US" sz="2000" dirty="0"/>
+          </a:p>
+        </p:txBody>
+      </p:sp>
+      <p:sp>
+        <p:nvSpPr>
+          <p:cNvPr id="40" name="Text 38"/>
+          <p:cNvSpPr txBox="1"/>
+          <p:nvPr/>
+        </p:nvSpPr>
+        <p:spPr>
+          <a:xfrm>
+            <a:off x="7251192" y="2651760"/>
+            <a:ext cx="731520" cy="384048"/>
+          </a:xfrm>
+          <a:prstGeom prst="rect">
+            <a:avLst/>
+          </a:prstGeom>
+          <a:noFill/>
+          <a:ln/>
+        </p:spPr>
+        <p:txBody>
+          <a:bodyPr wrap="square" lIns="0" tIns="0" rIns="0" bIns="0" rtlCol="0" anchor="ctr"/>
+          <a:lstStyle/>
+          <a:p>
+            <a:pPr algn="l" indent="0" marL="0">
+              <a:buNone/>
+            </a:pPr>
+            <a:r>
+              <a:rPr lang="en-US" sz="1100" b="1" dirty="0">
+                <a:solidFill>
+                  <a:srgbClr val="808080"/>
+                </a:solidFill>
+                <a:latin typeface="メイリオ" pitchFamily="34" charset="0"/>
+                <a:ea typeface="メイリオ" pitchFamily="34" charset="-122"/>
+                <a:cs typeface="メイリオ" pitchFamily="34" charset="-120"/>
+              </a:rPr>
+              <a:t>区 79.0</a:t>
+            </a:r>
+            <a:endParaRPr lang="en-US" sz="1100" dirty="0"/>
+          </a:p>
+        </p:txBody>
+      </p:sp>
+      <p:sp>
+        <p:nvSpPr>
+          <p:cNvPr id="41" name="Shape 39"/>
           <p:cNvSpPr/>
           <p:nvPr/>
         </p:nvSpPr>
         <p:spPr>
           <a:xfrm>
-            <a:off x="6281928" y="2688336"/>
-            <a:ext cx="859536" cy="310896"/>
+            <a:off x="8010144" y="2688336"/>
+            <a:ext cx="676656" cy="310896"/>
           </a:xfrm>
           <a:prstGeom prst="roundRect">
             <a:avLst>
@@ -13839,26 +14407,104 @@
             </a:avLst>
           </a:prstGeom>
           <a:solidFill>
-            <a:srgbClr val="FFFFFF"/>
+            <a:srgbClr val="FDF0E3"/>
           </a:solidFill>
           <a:ln w="12700">
             <a:solidFill>
               <a:srgbClr val="F6CFA4"/>
             </a:solidFill>
-            <a:prstDash val="dash"/>
+            <a:prstDash val="solid"/>
           </a:ln>
         </p:spPr>
       </p:sp>
       <p:sp>
         <p:nvSpPr>
+          <p:cNvPr id="42" name="Text 40"/>
+          <p:cNvSpPr txBox="1"/>
+          <p:nvPr/>
+        </p:nvSpPr>
+        <p:spPr>
+          <a:xfrm>
+            <a:off x="8010144" y="2688336"/>
+            <a:ext cx="676656" cy="310896"/>
+          </a:xfrm>
+          <a:prstGeom prst="rect">
+            <a:avLst/>
+          </a:prstGeom>
+          <a:noFill/>
+          <a:ln/>
+        </p:spPr>
+        <p:txBody>
+          <a:bodyPr wrap="square" lIns="0" tIns="0" rIns="0" bIns="0" rtlCol="0" anchor="ctr"/>
+          <a:lstStyle/>
+          <a:p>
+            <a:pPr algn="ctr" indent="0" marL="0">
+              <a:buNone/>
+            </a:pPr>
+            <a:r>
+              <a:rPr lang="en-US" sz="1200" b="1" dirty="0">
+                <a:solidFill>
+                  <a:srgbClr val="EE7B08"/>
+                </a:solidFill>
+                <a:latin typeface="メイリオ" pitchFamily="34" charset="0"/>
+                <a:ea typeface="メイリオ" pitchFamily="34" charset="-122"/>
+                <a:cs typeface="メイリオ" pitchFamily="34" charset="-120"/>
+              </a:rPr>
+              <a:t>＋13.6</a:t>
+            </a:r>
+            <a:endParaRPr lang="en-US" sz="1200" dirty="0"/>
+          </a:p>
+        </p:txBody>
+      </p:sp>
+      <p:sp>
+        <p:nvSpPr>
+          <p:cNvPr id="43" name="Text 41"/>
+          <p:cNvSpPr txBox="1"/>
+          <p:nvPr/>
+        </p:nvSpPr>
+        <p:spPr>
+          <a:xfrm>
+            <a:off x="6281928" y="3200400"/>
+            <a:ext cx="2404872" cy="201168"/>
+          </a:xfrm>
+          <a:prstGeom prst="rect">
+            <a:avLst/>
+          </a:prstGeom>
+          <a:noFill/>
+          <a:ln/>
+        </p:spPr>
+        <p:txBody>
+          <a:bodyPr wrap="square" lIns="0" tIns="0" rIns="0" bIns="0" rtlCol="0" anchor="ctr"/>
+          <a:lstStyle/>
+          <a:p>
+            <a:pPr algn="l" indent="0" marL="0">
+              <a:buNone/>
+            </a:pPr>
+            <a:r>
+              <a:rPr lang="en-US" sz="1050" b="1" dirty="0">
+                <a:solidFill>
+                  <a:srgbClr val="808080"/>
+                </a:solidFill>
+                <a:latin typeface="メイリオ" pitchFamily="34" charset="0"/>
+                <a:ea typeface="メイリオ" pitchFamily="34" charset="-122"/>
+                <a:cs typeface="メイリオ" pitchFamily="34" charset="-120"/>
+              </a:rPr>
+              <a:t>中学部（９年）</a:t>
+            </a:r>
+            <a:endParaRPr lang="en-US" sz="1050" dirty="0"/>
+          </a:p>
+        </p:txBody>
+      </p:sp>
+      <p:sp>
+        <p:nvSpPr>
           <p:cNvPr id="44" name="Text 42"/>
           <p:cNvSpPr txBox="1"/>
           <p:nvPr/>
         </p:nvSpPr>
         <p:spPr>
           <a:xfrm>
-            <a:off x="6281928" y="2688336"/>
-            <a:ext cx="859536" cy="310896"/>
+            <a:off x="6281928" y="3401568"/>
+            <a:ext cx="914400" cy="384048"/>
           </a:xfrm>
           <a:prstGeom prst="rect">
             <a:avLst/>
@@ -13870,21 +14516,35 @@
           <a:bodyPr wrap="square" lIns="0" tIns="0" rIns="0" bIns="0" rtlCol="0" anchor="ctr"/>
           <a:lstStyle/>
           <a:p>
-            <a:pPr algn="ctr" indent="0" marL="0">
-              <a:buNone/>
-            </a:pPr>
-            <a:r>
-              <a:rPr lang="en-US" sz="1100" b="1" dirty="0">
-                <a:solidFill>
-                  <a:srgbClr val="F6CFA4"/>
-                </a:solidFill>
-                <a:latin typeface="メイリオ" pitchFamily="34" charset="0"/>
-                <a:ea typeface="メイリオ" pitchFamily="34" charset="-122"/>
-                <a:cs typeface="メイリオ" pitchFamily="34" charset="-120"/>
-              </a:rPr>
-              <a:t>記入</a:t>
-            </a:r>
-            <a:endParaRPr lang="en-US" sz="1100" dirty="0"/>
+            <a:pPr algn="l" indent="0" marL="0">
+              <a:buNone/>
+            </a:pPr>
+            <a:r>
+              <a:rPr lang="en-US" sz="2000" b="1" dirty="0">
+                <a:solidFill>
+                  <a:srgbClr val="3F3F3F"/>
+                </a:solidFill>
+                <a:latin typeface="メイリオ" pitchFamily="34" charset="0"/>
+                <a:ea typeface="メイリオ" pitchFamily="34" charset="-122"/>
+                <a:cs typeface="メイリオ" pitchFamily="34" charset="-120"/>
+              </a:rPr>
+              <a:t>89.4</a:t>
+            </a:r>
+            <a:pPr algn="l" indent="0" marL="0">
+              <a:buNone/>
+            </a:pPr>
+            <a:r>
+              <a:rPr lang="en-US" sz="1200" b="1" dirty="0">
+                <a:solidFill>
+                  <a:srgbClr val="3F3F3F"/>
+                </a:solidFill>
+                <a:latin typeface="メイリオ" pitchFamily="34" charset="0"/>
+                <a:ea typeface="メイリオ" pitchFamily="34" charset="-122"/>
+                <a:cs typeface="メイリオ" pitchFamily="34" charset="-120"/>
+              </a:rPr>
+              <a:t>％</a:t>
+            </a:r>
+            <a:endParaRPr lang="en-US" sz="2000" dirty="0"/>
           </a:p>
         </p:txBody>
       </p:sp>
@@ -13896,7 +14556,7 @@
         </p:nvSpPr>
         <p:spPr>
           <a:xfrm>
-            <a:off x="7251192" y="2651760"/>
+            <a:off x="7251192" y="3401568"/>
             <a:ext cx="731520" cy="384048"/>
           </a:xfrm>
           <a:prstGeom prst="rect">
@@ -13935,7 +14595,7 @@
         </p:nvSpPr>
         <p:spPr>
           <a:xfrm>
-            <a:off x="8010144" y="2688336"/>
+            <a:off x="8010144" y="3438144"/>
             <a:ext cx="676656" cy="310896"/>
           </a:xfrm>
           <a:prstGeom prst="roundRect">
@@ -13944,203 +14604,20 @@
             </a:avLst>
           </a:prstGeom>
           <a:solidFill>
-            <a:srgbClr val="F2F2F2"/>
-          </a:solidFill>
-          <a:ln w="12700">
-            <a:solidFill>
-              <a:srgbClr val="DDDDDD"/>
-            </a:solidFill>
-            <a:prstDash val="solid"/>
-          </a:ln>
-        </p:spPr>
-      </p:sp>
-      <p:sp>
-        <p:nvSpPr>
-          <p:cNvPr id="47" name="Text 45"/>
-          <p:cNvSpPr txBox="1"/>
-          <p:nvPr/>
-        </p:nvSpPr>
-        <p:spPr>
-          <a:xfrm>
-            <a:off x="8010144" y="2688336"/>
-            <a:ext cx="676656" cy="310896"/>
-          </a:xfrm>
-          <a:prstGeom prst="rect">
-            <a:avLst/>
-          </a:prstGeom>
-          <a:noFill/>
-          <a:ln/>
-        </p:spPr>
-        <p:txBody>
-          <a:bodyPr wrap="square" lIns="0" tIns="0" rIns="0" bIns="0" rtlCol="0" anchor="ctr"/>
-          <a:lstStyle/>
-          <a:p>
-            <a:pPr algn="ctr" indent="0" marL="0">
-              <a:buNone/>
-            </a:pPr>
-            <a:r>
-              <a:rPr lang="en-US" sz="1200" b="1" dirty="0">
-                <a:solidFill>
-                  <a:srgbClr val="808080"/>
-                </a:solidFill>
-                <a:latin typeface="メイリオ" pitchFamily="34" charset="0"/>
-                <a:ea typeface="メイリオ" pitchFamily="34" charset="-122"/>
-                <a:cs typeface="メイリオ" pitchFamily="34" charset="-120"/>
-              </a:rPr>
-              <a:t>―</a:t>
-            </a:r>
-            <a:endParaRPr lang="en-US" sz="1200" dirty="0"/>
-          </a:p>
-        </p:txBody>
-      </p:sp>
-      <p:sp>
-        <p:nvSpPr>
-          <p:cNvPr id="48" name="Text 46"/>
-          <p:cNvSpPr txBox="1"/>
-          <p:nvPr/>
-        </p:nvSpPr>
-        <p:spPr>
-          <a:xfrm>
-            <a:off x="6281928" y="3200400"/>
-            <a:ext cx="2404872" cy="201168"/>
-          </a:xfrm>
-          <a:prstGeom prst="rect">
-            <a:avLst/>
-          </a:prstGeom>
-          <a:noFill/>
-          <a:ln/>
-        </p:spPr>
-        <p:txBody>
-          <a:bodyPr wrap="square" lIns="0" tIns="0" rIns="0" bIns="0" rtlCol="0" anchor="ctr"/>
-          <a:lstStyle/>
-          <a:p>
-            <a:pPr algn="l" indent="0" marL="0">
-              <a:buNone/>
-            </a:pPr>
-            <a:r>
-              <a:rPr lang="en-US" sz="1050" b="1" dirty="0">
-                <a:solidFill>
-                  <a:srgbClr val="808080"/>
-                </a:solidFill>
-                <a:latin typeface="メイリオ" pitchFamily="34" charset="0"/>
-                <a:ea typeface="メイリオ" pitchFamily="34" charset="-122"/>
-                <a:cs typeface="メイリオ" pitchFamily="34" charset="-120"/>
-              </a:rPr>
-              <a:t>中学部（９年）</a:t>
-            </a:r>
-            <a:endParaRPr lang="en-US" sz="1050" dirty="0"/>
-          </a:p>
-        </p:txBody>
-      </p:sp>
-      <p:sp>
-        <p:nvSpPr>
-          <p:cNvPr id="49" name="Shape 47"/>
-          <p:cNvSpPr/>
-          <p:nvPr/>
-        </p:nvSpPr>
-        <p:spPr>
-          <a:xfrm>
-            <a:off x="6281928" y="3438144"/>
-            <a:ext cx="859536" cy="310896"/>
-          </a:xfrm>
-          <a:prstGeom prst="roundRect">
-            <a:avLst>
-              <a:gd name="adj" fmla="val 14706"/>
-            </a:avLst>
-          </a:prstGeom>
-          <a:solidFill>
-            <a:srgbClr val="FFFFFF"/>
+            <a:srgbClr val="FDF0E3"/>
           </a:solidFill>
           <a:ln w="12700">
             <a:solidFill>
               <a:srgbClr val="F6CFA4"/>
             </a:solidFill>
-            <a:prstDash val="dash"/>
+            <a:prstDash val="solid"/>
           </a:ln>
         </p:spPr>
       </p:sp>
       <p:sp>
         <p:nvSpPr>
-          <p:cNvPr id="50" name="Text 48"/>
-          <p:cNvSpPr txBox="1"/>
-          <p:nvPr/>
-        </p:nvSpPr>
-        <p:spPr>
-          <a:xfrm>
-            <a:off x="6281928" y="3438144"/>
-            <a:ext cx="859536" cy="310896"/>
-          </a:xfrm>
-          <a:prstGeom prst="rect">
-            <a:avLst/>
-          </a:prstGeom>
-          <a:noFill/>
-          <a:ln/>
-        </p:spPr>
-        <p:txBody>
-          <a:bodyPr wrap="square" lIns="0" tIns="0" rIns="0" bIns="0" rtlCol="0" anchor="ctr"/>
-          <a:lstStyle/>
-          <a:p>
-            <a:pPr algn="ctr" indent="0" marL="0">
-              <a:buNone/>
-            </a:pPr>
-            <a:r>
-              <a:rPr lang="en-US" sz="1100" b="1" dirty="0">
-                <a:solidFill>
-                  <a:srgbClr val="F6CFA4"/>
-                </a:solidFill>
-                <a:latin typeface="メイリオ" pitchFamily="34" charset="0"/>
-                <a:ea typeface="メイリオ" pitchFamily="34" charset="-122"/>
-                <a:cs typeface="メイリオ" pitchFamily="34" charset="-120"/>
-              </a:rPr>
-              <a:t>記入</a:t>
-            </a:r>
-            <a:endParaRPr lang="en-US" sz="1100" dirty="0"/>
-          </a:p>
-        </p:txBody>
-      </p:sp>
-      <p:sp>
-        <p:nvSpPr>
-          <p:cNvPr id="51" name="Text 49"/>
-          <p:cNvSpPr txBox="1"/>
-          <p:nvPr/>
-        </p:nvSpPr>
-        <p:spPr>
-          <a:xfrm>
-            <a:off x="7251192" y="3401568"/>
-            <a:ext cx="731520" cy="384048"/>
-          </a:xfrm>
-          <a:prstGeom prst="rect">
-            <a:avLst/>
-          </a:prstGeom>
-          <a:noFill/>
-          <a:ln/>
-        </p:spPr>
-        <p:txBody>
-          <a:bodyPr wrap="square" lIns="0" tIns="0" rIns="0" bIns="0" rtlCol="0" anchor="ctr"/>
-          <a:lstStyle/>
-          <a:p>
-            <a:pPr algn="l" indent="0" marL="0">
-              <a:buNone/>
-            </a:pPr>
-            <a:r>
-              <a:rPr lang="en-US" sz="1100" b="1" dirty="0">
-                <a:solidFill>
-                  <a:srgbClr val="808080"/>
-                </a:solidFill>
-                <a:latin typeface="メイリオ" pitchFamily="34" charset="0"/>
-                <a:ea typeface="メイリオ" pitchFamily="34" charset="-122"/>
-                <a:cs typeface="メイリオ" pitchFamily="34" charset="-120"/>
-              </a:rPr>
-              <a:t>区 79.0</a:t>
-            </a:r>
-            <a:endParaRPr lang="en-US" sz="1100" dirty="0"/>
-          </a:p>
-        </p:txBody>
-      </p:sp>
-      <p:sp>
-        <p:nvSpPr>
-          <p:cNvPr id="52" name="Shape 50"/>
-          <p:cNvSpPr/>
+          <p:cNvPr id="47" name="Text 45"/>
+          <p:cNvSpPr txBox="1"/>
           <p:nvPr/>
         </p:nvSpPr>
         <p:spPr>
@@ -14148,33 +14625,6 @@
             <a:off x="8010144" y="3438144"/>
             <a:ext cx="676656" cy="310896"/>
           </a:xfrm>
-          <a:prstGeom prst="roundRect">
-            <a:avLst>
-              <a:gd name="adj" fmla="val 14706"/>
-            </a:avLst>
-          </a:prstGeom>
-          <a:solidFill>
-            <a:srgbClr val="F2F2F2"/>
-          </a:solidFill>
-          <a:ln w="12700">
-            <a:solidFill>
-              <a:srgbClr val="DDDDDD"/>
-            </a:solidFill>
-            <a:prstDash val="solid"/>
-          </a:ln>
-        </p:spPr>
-      </p:sp>
-      <p:sp>
-        <p:nvSpPr>
-          <p:cNvPr id="53" name="Text 51"/>
-          <p:cNvSpPr txBox="1"/>
-          <p:nvPr/>
-        </p:nvSpPr>
-        <p:spPr>
-          <a:xfrm>
-            <a:off x="8010144" y="3438144"/>
-            <a:ext cx="676656" cy="310896"/>
-          </a:xfrm>
           <a:prstGeom prst="rect">
             <a:avLst/>
           </a:prstGeom>
@@ -14191,13 +14641,13 @@
             <a:r>
               <a:rPr lang="en-US" sz="1200" b="1" dirty="0">
                 <a:solidFill>
-                  <a:srgbClr val="808080"/>
-                </a:solidFill>
-                <a:latin typeface="メイリオ" pitchFamily="34" charset="0"/>
-                <a:ea typeface="メイリオ" pitchFamily="34" charset="-122"/>
-                <a:cs typeface="メイリオ" pitchFamily="34" charset="-120"/>
-              </a:rPr>
-              <a:t>―</a:t>
+                  <a:srgbClr val="EE7B08"/>
+                </a:solidFill>
+                <a:latin typeface="メイリオ" pitchFamily="34" charset="0"/>
+                <a:ea typeface="メイリオ" pitchFamily="34" charset="-122"/>
+                <a:cs typeface="メイリオ" pitchFamily="34" charset="-120"/>
+              </a:rPr>
+              <a:t>＋10.4</a:t>
             </a:r>
             <a:endParaRPr lang="en-US" sz="1200" dirty="0"/>
           </a:p>
@@ -14205,7 +14655,7 @@
       </p:sp>
       <p:sp>
         <p:nvSpPr>
-          <p:cNvPr id="54" name="Text 52"/>
+          <p:cNvPr id="48" name="Text 46"/>
           <p:cNvSpPr txBox="1"/>
           <p:nvPr/>
         </p:nvSpPr>
@@ -14230,13 +14680,41 @@
             <a:r>
               <a:rPr lang="en-US" sz="1800" b="1" dirty="0">
                 <a:solidFill>
-                  <a:srgbClr val="808080"/>
-                </a:solidFill>
-                <a:latin typeface="メイリオ" pitchFamily="34" charset="0"/>
-                <a:ea typeface="メイリオ" pitchFamily="34" charset="-122"/>
-                <a:cs typeface="メイリオ" pitchFamily="34" charset="-120"/>
-              </a:rPr>
-              <a:t>本校の数値を記入すると、練馬区平均との比較が表示される。</a:t>
+                  <a:srgbClr val="595959"/>
+                </a:solidFill>
+                <a:latin typeface="メイリオ" pitchFamily="34" charset="0"/>
+                <a:ea typeface="メイリオ" pitchFamily="34" charset="-122"/>
+                <a:cs typeface="メイリオ" pitchFamily="34" charset="-120"/>
+              </a:rPr>
+              <a:t>6項目中5項目で、</a:t>
+            </a:r>
+            <a:pPr algn="l" indent="0" marL="0">
+              <a:buNone/>
+            </a:pPr>
+            <a:r>
+              <a:rPr lang="en-US" sz="1800" b="1" dirty="0">
+                <a:solidFill>
+                  <a:srgbClr val="EE7B08"/>
+                </a:solidFill>
+                <a:latin typeface="メイリオ" pitchFamily="34" charset="0"/>
+                <a:ea typeface="メイリオ" pitchFamily="34" charset="-122"/>
+                <a:cs typeface="メイリオ" pitchFamily="34" charset="-120"/>
+              </a:rPr>
+              <a:t>本校は練馬区平均を上回っている</a:t>
+            </a:r>
+            <a:pPr algn="l" indent="0" marL="0">
+              <a:buNone/>
+            </a:pPr>
+            <a:r>
+              <a:rPr lang="en-US" sz="1800" b="1" dirty="0">
+                <a:solidFill>
+                  <a:srgbClr val="595959"/>
+                </a:solidFill>
+                <a:latin typeface="メイリオ" pitchFamily="34" charset="0"/>
+                <a:ea typeface="メイリオ" pitchFamily="34" charset="-122"/>
+                <a:cs typeface="メイリオ" pitchFamily="34" charset="-120"/>
+              </a:rPr>
+              <a:t>。</a:t>
             </a:r>
             <a:endParaRPr lang="en-US" sz="1800" dirty="0"/>
           </a:p>
@@ -14244,7 +14722,7 @@
       </p:sp>
       <p:sp>
         <p:nvSpPr>
-          <p:cNvPr id="55" name="Text 53"/>
+          <p:cNvPr id="49" name="Text 47"/>
           <p:cNvSpPr txBox="1"/>
           <p:nvPr/>
         </p:nvSpPr>
@@ -14283,7 +14761,7 @@
       </p:sp>
       <p:sp>
         <p:nvSpPr>
-          <p:cNvPr id="56" name="Text 54"/>
+          <p:cNvPr id="50" name="Text 48"/>
           <p:cNvSpPr txBox="1"/>
           <p:nvPr/>
         </p:nvSpPr>
@@ -14314,7 +14792,7 @@
                 <a:ea typeface="メイリオ" pitchFamily="34" charset="-122"/>
                 <a:cs typeface="メイリオ" pitchFamily="34" charset="-120"/>
               </a:rPr>
-              <a:t>出典：練馬区は令和８年度 全国学力・学習状況調査（練馬区）　肯定的回答の割合　※「記入」欄に本校の数値を入れてご使用ください</a:t>
+              <a:t>出典：練馬区は令和８年度 全国学力・学習状況調査（練馬区）　肯定的回答の割合</a:t>
             </a:r>
             <a:endParaRPr lang="en-US" sz="950" dirty="0"/>
           </a:p>

--- a/指導課訪問_みらい青空学園/指導課訪問_５校時指導助言資料_みらい青空学園.pptx
+++ b/指導課訪問_みらい青空学園/指導課訪問_５校時指導助言資料_みらい青空学園.pptx
@@ -23,9 +23,10 @@
     <p:sldId id="271" r:id="rId17"/>
     <p:sldId id="272" r:id="rId18"/>
     <p:sldId id="273" r:id="rId19"/>
+    <p:sldId id="274" r:id="rId20"/>
   </p:sldIdLst>
   <p:notesMasterIdLst>
-    <p:notesMasterId r:id="rId20"/>
+    <p:notesMasterId r:id="rId21"/>
   </p:notesMasterIdLst>
   <p:sldSz cx="9144000" cy="5143500"/>
   <p:notesSz cx="5143500" cy="9144000"/>
@@ -697,8 +698,10 @@
           <a:p>
             <a:r>
               <a:rPr lang="en-US" dirty="0"/>
-              <a:t>１点目は自己肯定感です。これからの学力向上の基盤になるものだと考えています。
-ここでいう自己肯定感は「できる子になる」ことではありません。「成長できる自分を信じること」です。この違いが授業のつくり方を変えます。</a:t>
+              <a:t>ここからは、本日の授業を見ていきます。まず、３つの教室の様子です。
+プールでは泳力別に分かれて、道徳では車座に近い形で、外国語ではペアで。
+３つの教室に共通していたのは、子どもが動き、考え、伝える時間の多さでした。
+（※当日の写真を貼り付けて使用する）</a:t>
             </a:r>
             <a:endParaRPr lang="en-US" dirty="0"/>
           </a:p>
@@ -786,10 +789,8 @@
           <a:p>
             <a:r>
               <a:rPr lang="en-US" dirty="0"/>
-              <a:t>田口先生は、泳力差の大きい集団に対して段階的な課題、泳力別のコース、バディでの確認活動を用意されていました。キックの確認の視点を３点示されたことで、子どもが自分の泳ぎを見る目をもてていました。
-東海林先生は、安心して自分の考えを表現できる環境をつくられていました。前時の考えを大切にしつつ、意見が変わってもよいと保障されていた点が印象的でした。
-塚本先生は、発表の前にペアで共有する時間を確保され、全員に発話の機会を用意されていました。
-いずれも、子どもが「認められる」よりも「自分で成長を実感する」経験を積み重ねる授業でした。</a:t>
+              <a:t>１点目は自己肯定感です。これからの学力向上の基盤になるものだと考えています。
+ここでいう自己肯定感は「できる子になる」ことではありません。「成長できる自分を信じること」です。この違いが授業のつくり方を変えます。</a:t>
             </a:r>
             <a:endParaRPr lang="en-US" dirty="0"/>
           </a:p>
@@ -877,8 +878,10 @@
           <a:p>
             <a:r>
               <a:rPr lang="en-US" dirty="0"/>
-              <a:t>２点目は対話・協働です。調査結果に表れた主体的な学びの土台は、一朝一夕にできるものではありません。
-その背景には、日常的に積み重ねられている対話を通した学びがあると受け止めました。</a:t>
+              <a:t>田口先生は、泳力差の大きい集団に対して段階的な課題、泳力別のコース、バディでの確認活動を用意されていました。キックの確認の視点を３点示されたことで、子どもが自分の泳ぎを見る目をもてていました。
+東海林先生は、安心して自分の考えを表現できる環境をつくられていました。前時の考えを大切にしつつ、意見が変わってもよいと保障されていた点が印象的でした。
+塚本先生は、発表の前にペアで共有する時間を確保され、全員に発話の機会を用意されていました。
+いずれも、子どもが「認められる」よりも「自分で成長を実感する」経験を積み重ねる授業でした。</a:t>
             </a:r>
             <a:endParaRPr lang="en-US" dirty="0"/>
           </a:p>
@@ -966,8 +969,8 @@
           <a:p>
             <a:r>
               <a:rPr lang="en-US" dirty="0"/>
-              <a:t>保健体育では、バディで互いの泳ぎを見合い、改善点を考えていました。道徳では「嘘」をテーマに価値観の違いを議論していました。外国語では、ペアでのやり取りを全体の学びにつないでいました。
-教科は異なりますが、共通していたのは「相手を通して自分を見つめる学び」です。これが対話・協働の本質だと考えます。</a:t>
+              <a:t>２点目は対話・協働です。調査結果に表れた主体的な学びの土台は、一朝一夕にできるものではありません。
+その背景には、日常的に積み重ねられている対話を通した学びがあると受け止めました。</a:t>
             </a:r>
             <a:endParaRPr lang="en-US" dirty="0"/>
           </a:p>
@@ -1055,8 +1058,8 @@
           <a:p>
             <a:r>
               <a:rPr lang="en-US" dirty="0"/>
-              <a:t>３点目は学習の自己調整です。これから求められる子どもは、教えられたことを学ぶ子どもではなく、自分で学び続ける子どもです。
-そのために必要なのが、学習を自分で調整する力です。</a:t>
+              <a:t>保健体育では、バディで互いの泳ぎを見合い、改善点を考えていました。道徳では「嘘」をテーマに価値観の違いを議論していました。外国語では、ペアでのやり取りを全体の学びにつないでいました。
+教科は異なりますが、共通していたのは「相手を通して自分を見つめる学び」です。これが対話・協働の本質だと考えます。</a:t>
             </a:r>
             <a:endParaRPr lang="en-US" dirty="0"/>
           </a:p>
@@ -1144,9 +1147,8 @@
           <a:p>
             <a:r>
               <a:rPr lang="en-US" dirty="0"/>
-              <a:t>本日の授業では、本時の目標、振り返り、自己評価、次時への見通しが大切にされていました。
-田口先生は着替えの前に目標と流れを確認され、学習カードで要点を振り返らせていました。塚本先生は Today’s Goal と Today’s Plan を示し、振り返りをワークシートに記入させていました。東海林先生は前時のワークシートで自分の考えを確かめてから議論に入っていました。
-教師が管理する学習から、子どもが管理する学習へ、着実に転換が進んでいます。</a:t>
+              <a:t>３点目は学習の自己調整です。これから求められる子どもは、教えられたことを学ぶ子どもではなく、自分で学び続ける子どもです。
+そのために必要なのが、学習を自分で調整する力です。</a:t>
             </a:r>
             <a:endParaRPr lang="en-US" dirty="0"/>
           </a:p>
@@ -1234,8 +1236,9 @@
           <a:p>
             <a:r>
               <a:rPr lang="en-US" dirty="0"/>
-              <a:t>学力調査結果と今日の授業をつなげて考えると、今後さらに伸ばしたいのは「学びを自分事として捉える子ども」です。
-そのためには、自己肯定感、対話・協働、学習の自己調整を、９年間で系統的に育てていくことが重要になります。学年や教科で終わらせず、９年間の系統として整理していただきたいと考えます。</a:t>
+              <a:t>本日の授業では、本時の目標、振り返り、自己評価、次時への見通しが大切にされていました。
+田口先生は着替えの前に目標と流れを確認され、学習カードで要点を振り返らせていました。塚本先生は Today’s Goal と Today’s Plan を示し、振り返りをワークシートに記入させていました。東海林先生は前時のワークシートで自分の考えを確かめてから議論に入っていました。
+教師が管理する学習から、子どもが管理する学習へ、着実に転換が進んでいます。</a:t>
             </a:r>
             <a:endParaRPr lang="en-US" dirty="0"/>
           </a:p>
@@ -1323,9 +1326,8 @@
           <a:p>
             <a:r>
               <a:rPr lang="en-US" dirty="0"/>
-              <a:t>まとめです。学力向上は、知識の積み上げだけで実現するものではありません。
-みらい青空学園では、自己肯定感、対話・協働、学習の自己調整が着実に育成されています。これこそが、施設一体型小中一貫教育校としての最大の強みであり、学力調査結果を支える土台です。
-今後も、９年間を見通した学びの充実に期待しています。本日はありがとうございました。</a:t>
+              <a:t>学力調査結果と今日の授業をつなげて考えると、今後さらに伸ばしたいのは「学びを自分事として捉える子ども」です。
+そのためには、自己肯定感、対話・協働、学習の自己調整を、９年間で系統的に育てていくことが重要になります。学年や教科で終わらせず、９年間の系統として整理していただきたいと考えます。</a:t>
             </a:r>
             <a:endParaRPr lang="en-US" dirty="0"/>
           </a:p>
@@ -1349,6 +1351,96 @@
             <a:fld id="{F7021451-1387-4CA6-816F-3879F97B5CBC}" type="slidenum">
               <a:rPr lang="en-US"/>
               <a:t>18</a:t>
+            </a:fld>
+            <a:endParaRPr lang="en-US"/>
+          </a:p>
+        </p:txBody>
+      </p:sp>
+    </p:spTree>
+    <p:extLst>
+      <p:ext uri="{BB962C8B-B14F-4D97-AF65-F5344CB8AC3E}">
+        <p14:creationId xmlns:p14="http://schemas.microsoft.com/office/powerpoint/2010/main" val="1024086991"/>
+      </p:ext>
+    </p:extLst>
+  </p:cSld>
+  <p:clrMapOvr>
+    <a:masterClrMapping/>
+  </p:clrMapOvr>
+</p:notes>
+</file>
+
+<file path=ppt/notesSlides/notesSlide19.xml><?xml version="1.0" encoding="utf-8"?>
+<p:notes xmlns:a="http://schemas.openxmlformats.org/drawingml/2006/main" xmlns:r="http://schemas.openxmlformats.org/officeDocument/2006/relationships" xmlns:p="http://schemas.openxmlformats.org/presentationml/2006/main">
+  <p:cSld>
+    <p:spTree>
+      <p:nvGrpSpPr>
+        <p:cNvPr id="1" name=""/>
+        <p:cNvGrpSpPr/>
+        <p:nvPr/>
+      </p:nvGrpSpPr>
+      <p:grpSpPr>
+        <a:xfrm>
+          <a:off x="0" y="0"/>
+          <a:ext cx="0" cy="0"/>
+          <a:chOff x="0" y="0"/>
+          <a:chExt cx="0" cy="0"/>
+        </a:xfrm>
+      </p:grpSpPr>
+      <p:sp>
+        <p:nvSpPr>
+          <p:cNvPr id="2" name="Slide Image Placeholder 1"/>
+          <p:cNvSpPr>
+            <a:spLocks noGrp="1" noRot="1" noChangeAspect="1"/>
+          </p:cNvSpPr>
+          <p:nvPr>
+            <p:ph type="sldImg"/>
+          </p:nvPr>
+        </p:nvSpPr>
+        <p:spPr/>
+      </p:sp>
+      <p:sp>
+        <p:nvSpPr>
+          <p:cNvPr id="3" name="Notes Placeholder 2"/>
+          <p:cNvSpPr>
+            <a:spLocks noGrp="1"/>
+          </p:cNvSpPr>
+          <p:nvPr>
+            <p:ph type="body" idx="1"/>
+          </p:nvPr>
+        </p:nvSpPr>
+        <p:spPr/>
+        <p:txBody>
+          <a:bodyPr/>
+          <a:lstStyle/>
+          <a:p>
+            <a:r>
+              <a:rPr lang="en-US" dirty="0"/>
+              <a:t>まとめです。学力向上は、知識の積み上げだけで実現するものではありません。
+みらい青空学園では、自己肯定感、対話・協働、学習の自己調整が着実に育成されています。これこそが、施設一体型小中一貫教育校としての最大の強みであり、学力調査結果を支える土台です。
+今後も、９年間を見通した学びの充実に期待しています。本日はありがとうございました。</a:t>
+            </a:r>
+            <a:endParaRPr lang="en-US" dirty="0"/>
+          </a:p>
+        </p:txBody>
+      </p:sp>
+      <p:sp>
+        <p:nvSpPr>
+          <p:cNvPr id="4" name="Slide Number Placeholder 3"/>
+          <p:cNvSpPr>
+            <a:spLocks noGrp="1"/>
+          </p:cNvSpPr>
+          <p:nvPr>
+            <p:ph type="sldNum" sz="quarter" idx="10"/>
+          </p:nvPr>
+        </p:nvSpPr>
+        <p:spPr/>
+        <p:txBody>
+          <a:bodyPr/>
+          <a:lstStyle/>
+          <a:p>
+            <a:fld id="{F7021451-1387-4CA6-816F-3879F97B5CBC}" type="slidenum">
+              <a:rPr lang="en-US"/>
+              <a:t>19</a:t>
             </a:fld>
             <a:endParaRPr lang="en-US"/>
           </a:p>
@@ -3362,7 +3454,7 @@
                 <a:ea typeface="メイリオ" pitchFamily="34" charset="-122"/>
                 <a:cs typeface="メイリオ" pitchFamily="34" charset="-120"/>
               </a:rPr>
-              <a:t>　①　自己肯定感</a:t>
+              <a:t>　本日の授業から</a:t>
             </a:r>
             <a:endParaRPr lang="en-US" sz="3000" dirty="0"/>
           </a:p>
@@ -3370,14 +3462,509 @@
       </p:sp>
       <p:sp>
         <p:nvSpPr>
-          <p:cNvPr id="3" name="Text 1"/>
-          <p:cNvSpPr txBox="1"/>
-          <p:nvPr/>
-        </p:nvSpPr>
-        <p:spPr>
-          <a:xfrm>
-            <a:off x="475488" y="1481328"/>
-            <a:ext cx="8193024" cy="1005840"/>
+          <p:cNvPr id="3" name="Shape 1"/>
+          <p:cNvSpPr/>
+          <p:nvPr/>
+        </p:nvSpPr>
+        <p:spPr>
+          <a:xfrm>
+            <a:off x="320040" y="1444752"/>
+            <a:ext cx="2697480" cy="1993392"/>
+          </a:xfrm>
+          <a:prstGeom prst="rect">
+            <a:avLst/>
+          </a:prstGeom>
+          <a:solidFill>
+            <a:srgbClr val="FBFEFD"/>
+          </a:solidFill>
+          <a:ln w="19050">
+            <a:solidFill>
+              <a:srgbClr val="44C1A3"/>
+            </a:solidFill>
+            <a:prstDash val="dash"/>
+          </a:ln>
+        </p:spPr>
+      </p:sp>
+      <p:sp>
+        <p:nvSpPr>
+          <p:cNvPr id="4" name="Text 2"/>
+          <p:cNvSpPr txBox="1"/>
+          <p:nvPr/>
+        </p:nvSpPr>
+        <p:spPr>
+          <a:xfrm>
+            <a:off x="320040" y="1444752"/>
+            <a:ext cx="2697480" cy="1993392"/>
+          </a:xfrm>
+          <a:prstGeom prst="rect">
+            <a:avLst/>
+          </a:prstGeom>
+          <a:noFill/>
+          <a:ln/>
+        </p:spPr>
+        <p:txBody>
+          <a:bodyPr wrap="square" lIns="0" tIns="0" rIns="0" bIns="0" rtlCol="0" anchor="ctr"/>
+          <a:lstStyle/>
+          <a:p>
+            <a:pPr algn="ctr" indent="0" marL="0">
+              <a:lnSpc>
+                <a:spcPct val="125000"/>
+              </a:lnSpc>
+              <a:buNone/>
+            </a:pPr>
+            <a:r>
+              <a:rPr lang="en-US" sz="1500" b="1" dirty="0">
+                <a:solidFill>
+                  <a:srgbClr val="44C1A3"/>
+                </a:solidFill>
+                <a:latin typeface="メイリオ" pitchFamily="34" charset="0"/>
+                <a:ea typeface="メイリオ" pitchFamily="34" charset="-122"/>
+                <a:cs typeface="メイリオ" pitchFamily="34" charset="-120"/>
+              </a:rPr>
+              <a:t>授業写真</a:t>
+            </a:r>
+            <a:endParaRPr lang="en-US" sz="1500" dirty="0"/>
+          </a:p>
+          <a:p>
+            <a:pPr algn="ctr" indent="0" marL="0">
+              <a:lnSpc>
+                <a:spcPct val="125000"/>
+              </a:lnSpc>
+              <a:buNone/>
+            </a:pPr>
+            <a:r>
+              <a:rPr lang="en-US" sz="1500" b="1" dirty="0">
+                <a:solidFill>
+                  <a:srgbClr val="44C1A3"/>
+                </a:solidFill>
+                <a:latin typeface="メイリオ" pitchFamily="34" charset="0"/>
+                <a:ea typeface="メイリオ" pitchFamily="34" charset="-122"/>
+                <a:cs typeface="メイリオ" pitchFamily="34" charset="-120"/>
+              </a:rPr>
+              <a:t>（貼付欄）</a:t>
+            </a:r>
+            <a:endParaRPr lang="en-US" sz="1500" dirty="0"/>
+          </a:p>
+        </p:txBody>
+      </p:sp>
+      <p:sp>
+        <p:nvSpPr>
+          <p:cNvPr id="5" name="Text 3"/>
+          <p:cNvSpPr txBox="1"/>
+          <p:nvPr/>
+        </p:nvSpPr>
+        <p:spPr>
+          <a:xfrm>
+            <a:off x="320040" y="3511296"/>
+            <a:ext cx="2697480" cy="274320"/>
+          </a:xfrm>
+          <a:prstGeom prst="rect">
+            <a:avLst/>
+          </a:prstGeom>
+          <a:noFill/>
+          <a:ln/>
+        </p:spPr>
+        <p:txBody>
+          <a:bodyPr wrap="square" lIns="0" tIns="0" rIns="0" bIns="0" rtlCol="0" anchor="ctr"/>
+          <a:lstStyle/>
+          <a:p>
+            <a:pPr algn="l" indent="0" marL="0">
+              <a:buNone/>
+            </a:pPr>
+            <a:r>
+              <a:rPr lang="en-US" sz="1500" b="1" dirty="0">
+                <a:solidFill>
+                  <a:srgbClr val="44C1A3"/>
+                </a:solidFill>
+                <a:latin typeface="メイリオ" pitchFamily="34" charset="0"/>
+                <a:ea typeface="メイリオ" pitchFamily="34" charset="-122"/>
+                <a:cs typeface="メイリオ" pitchFamily="34" charset="-120"/>
+              </a:rPr>
+              <a:t>田口　和磨　先生</a:t>
+            </a:r>
+            <a:endParaRPr lang="en-US" sz="1500" dirty="0"/>
+          </a:p>
+        </p:txBody>
+      </p:sp>
+      <p:sp>
+        <p:nvSpPr>
+          <p:cNvPr id="6" name="Text 4"/>
+          <p:cNvSpPr txBox="1"/>
+          <p:nvPr/>
+        </p:nvSpPr>
+        <p:spPr>
+          <a:xfrm>
+            <a:off x="320040" y="3785616"/>
+            <a:ext cx="2697480" cy="237744"/>
+          </a:xfrm>
+          <a:prstGeom prst="rect">
+            <a:avLst/>
+          </a:prstGeom>
+          <a:noFill/>
+          <a:ln/>
+        </p:spPr>
+        <p:txBody>
+          <a:bodyPr wrap="square" lIns="0" tIns="0" rIns="0" bIns="0" rtlCol="0" anchor="ctr"/>
+          <a:lstStyle/>
+          <a:p>
+            <a:pPr algn="l" indent="0" marL="0">
+              <a:buNone/>
+            </a:pPr>
+            <a:r>
+              <a:rPr lang="en-US" sz="1100" b="1" dirty="0">
+                <a:solidFill>
+                  <a:srgbClr val="808080"/>
+                </a:solidFill>
+                <a:latin typeface="メイリオ" pitchFamily="34" charset="0"/>
+                <a:ea typeface="メイリオ" pitchFamily="34" charset="-122"/>
+                <a:cs typeface="メイリオ" pitchFamily="34" charset="-120"/>
+              </a:rPr>
+              <a:t>保健体育・９年ＡＢ組／水泳</a:t>
+            </a:r>
+            <a:endParaRPr lang="en-US" sz="1100" dirty="0"/>
+          </a:p>
+        </p:txBody>
+      </p:sp>
+      <p:sp>
+        <p:nvSpPr>
+          <p:cNvPr id="7" name="Shape 5"/>
+          <p:cNvSpPr/>
+          <p:nvPr/>
+        </p:nvSpPr>
+        <p:spPr>
+          <a:xfrm>
+            <a:off x="3227832" y="1444752"/>
+            <a:ext cx="2697480" cy="1993392"/>
+          </a:xfrm>
+          <a:prstGeom prst="rect">
+            <a:avLst/>
+          </a:prstGeom>
+          <a:solidFill>
+            <a:srgbClr val="FBFEFD"/>
+          </a:solidFill>
+          <a:ln w="19050">
+            <a:solidFill>
+              <a:srgbClr val="44C1A3"/>
+            </a:solidFill>
+            <a:prstDash val="dash"/>
+          </a:ln>
+        </p:spPr>
+      </p:sp>
+      <p:sp>
+        <p:nvSpPr>
+          <p:cNvPr id="8" name="Text 6"/>
+          <p:cNvSpPr txBox="1"/>
+          <p:nvPr/>
+        </p:nvSpPr>
+        <p:spPr>
+          <a:xfrm>
+            <a:off x="3227832" y="1444752"/>
+            <a:ext cx="2697480" cy="1993392"/>
+          </a:xfrm>
+          <a:prstGeom prst="rect">
+            <a:avLst/>
+          </a:prstGeom>
+          <a:noFill/>
+          <a:ln/>
+        </p:spPr>
+        <p:txBody>
+          <a:bodyPr wrap="square" lIns="0" tIns="0" rIns="0" bIns="0" rtlCol="0" anchor="ctr"/>
+          <a:lstStyle/>
+          <a:p>
+            <a:pPr algn="ctr" indent="0" marL="0">
+              <a:lnSpc>
+                <a:spcPct val="125000"/>
+              </a:lnSpc>
+              <a:buNone/>
+            </a:pPr>
+            <a:r>
+              <a:rPr lang="en-US" sz="1500" b="1" dirty="0">
+                <a:solidFill>
+                  <a:srgbClr val="44C1A3"/>
+                </a:solidFill>
+                <a:latin typeface="メイリオ" pitchFamily="34" charset="0"/>
+                <a:ea typeface="メイリオ" pitchFamily="34" charset="-122"/>
+                <a:cs typeface="メイリオ" pitchFamily="34" charset="-120"/>
+              </a:rPr>
+              <a:t>授業写真</a:t>
+            </a:r>
+            <a:endParaRPr lang="en-US" sz="1500" dirty="0"/>
+          </a:p>
+          <a:p>
+            <a:pPr algn="ctr" indent="0" marL="0">
+              <a:lnSpc>
+                <a:spcPct val="125000"/>
+              </a:lnSpc>
+              <a:buNone/>
+            </a:pPr>
+            <a:r>
+              <a:rPr lang="en-US" sz="1500" b="1" dirty="0">
+                <a:solidFill>
+                  <a:srgbClr val="44C1A3"/>
+                </a:solidFill>
+                <a:latin typeface="メイリオ" pitchFamily="34" charset="0"/>
+                <a:ea typeface="メイリオ" pitchFamily="34" charset="-122"/>
+                <a:cs typeface="メイリオ" pitchFamily="34" charset="-120"/>
+              </a:rPr>
+              <a:t>（貼付欄）</a:t>
+            </a:r>
+            <a:endParaRPr lang="en-US" sz="1500" dirty="0"/>
+          </a:p>
+        </p:txBody>
+      </p:sp>
+      <p:sp>
+        <p:nvSpPr>
+          <p:cNvPr id="9" name="Text 7"/>
+          <p:cNvSpPr txBox="1"/>
+          <p:nvPr/>
+        </p:nvSpPr>
+        <p:spPr>
+          <a:xfrm>
+            <a:off x="3227832" y="3511296"/>
+            <a:ext cx="2697480" cy="274320"/>
+          </a:xfrm>
+          <a:prstGeom prst="rect">
+            <a:avLst/>
+          </a:prstGeom>
+          <a:noFill/>
+          <a:ln/>
+        </p:spPr>
+        <p:txBody>
+          <a:bodyPr wrap="square" lIns="0" tIns="0" rIns="0" bIns="0" rtlCol="0" anchor="ctr"/>
+          <a:lstStyle/>
+          <a:p>
+            <a:pPr algn="l" indent="0" marL="0">
+              <a:buNone/>
+            </a:pPr>
+            <a:r>
+              <a:rPr lang="en-US" sz="1500" b="1" dirty="0">
+                <a:solidFill>
+                  <a:srgbClr val="44C1A3"/>
+                </a:solidFill>
+                <a:latin typeface="メイリオ" pitchFamily="34" charset="0"/>
+                <a:ea typeface="メイリオ" pitchFamily="34" charset="-122"/>
+                <a:cs typeface="メイリオ" pitchFamily="34" charset="-120"/>
+              </a:rPr>
+              <a:t>東海林　静江　先生</a:t>
+            </a:r>
+            <a:endParaRPr lang="en-US" sz="1500" dirty="0"/>
+          </a:p>
+        </p:txBody>
+      </p:sp>
+      <p:sp>
+        <p:nvSpPr>
+          <p:cNvPr id="10" name="Text 8"/>
+          <p:cNvSpPr txBox="1"/>
+          <p:nvPr/>
+        </p:nvSpPr>
+        <p:spPr>
+          <a:xfrm>
+            <a:off x="3227832" y="3785616"/>
+            <a:ext cx="2697480" cy="237744"/>
+          </a:xfrm>
+          <a:prstGeom prst="rect">
+            <a:avLst/>
+          </a:prstGeom>
+          <a:noFill/>
+          <a:ln/>
+        </p:spPr>
+        <p:txBody>
+          <a:bodyPr wrap="square" lIns="0" tIns="0" rIns="0" bIns="0" rtlCol="0" anchor="ctr"/>
+          <a:lstStyle/>
+          <a:p>
+            <a:pPr algn="l" indent="0" marL="0">
+              <a:buNone/>
+            </a:pPr>
+            <a:r>
+              <a:rPr lang="en-US" sz="1100" b="1" dirty="0">
+                <a:solidFill>
+                  <a:srgbClr val="808080"/>
+                </a:solidFill>
+                <a:latin typeface="メイリオ" pitchFamily="34" charset="0"/>
+                <a:ea typeface="メイリオ" pitchFamily="34" charset="-122"/>
+                <a:cs typeface="メイリオ" pitchFamily="34" charset="-120"/>
+              </a:rPr>
+              <a:t>道徳・特別支援学級Ｄ組／うそ</a:t>
+            </a:r>
+            <a:endParaRPr lang="en-US" sz="1100" dirty="0"/>
+          </a:p>
+        </p:txBody>
+      </p:sp>
+      <p:sp>
+        <p:nvSpPr>
+          <p:cNvPr id="11" name="Shape 9"/>
+          <p:cNvSpPr/>
+          <p:nvPr/>
+        </p:nvSpPr>
+        <p:spPr>
+          <a:xfrm>
+            <a:off x="6135624" y="1444752"/>
+            <a:ext cx="2697480" cy="1993392"/>
+          </a:xfrm>
+          <a:prstGeom prst="rect">
+            <a:avLst/>
+          </a:prstGeom>
+          <a:solidFill>
+            <a:srgbClr val="FBFEFD"/>
+          </a:solidFill>
+          <a:ln w="19050">
+            <a:solidFill>
+              <a:srgbClr val="44C1A3"/>
+            </a:solidFill>
+            <a:prstDash val="dash"/>
+          </a:ln>
+        </p:spPr>
+      </p:sp>
+      <p:sp>
+        <p:nvSpPr>
+          <p:cNvPr id="12" name="Text 10"/>
+          <p:cNvSpPr txBox="1"/>
+          <p:nvPr/>
+        </p:nvSpPr>
+        <p:spPr>
+          <a:xfrm>
+            <a:off x="6135624" y="1444752"/>
+            <a:ext cx="2697480" cy="1993392"/>
+          </a:xfrm>
+          <a:prstGeom prst="rect">
+            <a:avLst/>
+          </a:prstGeom>
+          <a:noFill/>
+          <a:ln/>
+        </p:spPr>
+        <p:txBody>
+          <a:bodyPr wrap="square" lIns="0" tIns="0" rIns="0" bIns="0" rtlCol="0" anchor="ctr"/>
+          <a:lstStyle/>
+          <a:p>
+            <a:pPr algn="ctr" indent="0" marL="0">
+              <a:lnSpc>
+                <a:spcPct val="125000"/>
+              </a:lnSpc>
+              <a:buNone/>
+            </a:pPr>
+            <a:r>
+              <a:rPr lang="en-US" sz="1500" b="1" dirty="0">
+                <a:solidFill>
+                  <a:srgbClr val="44C1A3"/>
+                </a:solidFill>
+                <a:latin typeface="メイリオ" pitchFamily="34" charset="0"/>
+                <a:ea typeface="メイリオ" pitchFamily="34" charset="-122"/>
+                <a:cs typeface="メイリオ" pitchFamily="34" charset="-120"/>
+              </a:rPr>
+              <a:t>授業写真</a:t>
+            </a:r>
+            <a:endParaRPr lang="en-US" sz="1500" dirty="0"/>
+          </a:p>
+          <a:p>
+            <a:pPr algn="ctr" indent="0" marL="0">
+              <a:lnSpc>
+                <a:spcPct val="125000"/>
+              </a:lnSpc>
+              <a:buNone/>
+            </a:pPr>
+            <a:r>
+              <a:rPr lang="en-US" sz="1500" b="1" dirty="0">
+                <a:solidFill>
+                  <a:srgbClr val="44C1A3"/>
+                </a:solidFill>
+                <a:latin typeface="メイリオ" pitchFamily="34" charset="0"/>
+                <a:ea typeface="メイリオ" pitchFamily="34" charset="-122"/>
+                <a:cs typeface="メイリオ" pitchFamily="34" charset="-120"/>
+              </a:rPr>
+              <a:t>（貼付欄）</a:t>
+            </a:r>
+            <a:endParaRPr lang="en-US" sz="1500" dirty="0"/>
+          </a:p>
+        </p:txBody>
+      </p:sp>
+      <p:sp>
+        <p:nvSpPr>
+          <p:cNvPr id="13" name="Text 11"/>
+          <p:cNvSpPr txBox="1"/>
+          <p:nvPr/>
+        </p:nvSpPr>
+        <p:spPr>
+          <a:xfrm>
+            <a:off x="6135624" y="3511296"/>
+            <a:ext cx="2697480" cy="274320"/>
+          </a:xfrm>
+          <a:prstGeom prst="rect">
+            <a:avLst/>
+          </a:prstGeom>
+          <a:noFill/>
+          <a:ln/>
+        </p:spPr>
+        <p:txBody>
+          <a:bodyPr wrap="square" lIns="0" tIns="0" rIns="0" bIns="0" rtlCol="0" anchor="ctr"/>
+          <a:lstStyle/>
+          <a:p>
+            <a:pPr algn="l" indent="0" marL="0">
+              <a:buNone/>
+            </a:pPr>
+            <a:r>
+              <a:rPr lang="en-US" sz="1500" b="1" dirty="0">
+                <a:solidFill>
+                  <a:srgbClr val="44C1A3"/>
+                </a:solidFill>
+                <a:latin typeface="メイリオ" pitchFamily="34" charset="0"/>
+                <a:ea typeface="メイリオ" pitchFamily="34" charset="-122"/>
+                <a:cs typeface="メイリオ" pitchFamily="34" charset="-120"/>
+              </a:rPr>
+              <a:t>塚本　瑞穂　先生</a:t>
+            </a:r>
+            <a:endParaRPr lang="en-US" sz="1500" dirty="0"/>
+          </a:p>
+        </p:txBody>
+      </p:sp>
+      <p:sp>
+        <p:nvSpPr>
+          <p:cNvPr id="14" name="Text 12"/>
+          <p:cNvSpPr txBox="1"/>
+          <p:nvPr/>
+        </p:nvSpPr>
+        <p:spPr>
+          <a:xfrm>
+            <a:off x="6135624" y="3785616"/>
+            <a:ext cx="2697480" cy="237744"/>
+          </a:xfrm>
+          <a:prstGeom prst="rect">
+            <a:avLst/>
+          </a:prstGeom>
+          <a:noFill/>
+          <a:ln/>
+        </p:spPr>
+        <p:txBody>
+          <a:bodyPr wrap="square" lIns="0" tIns="0" rIns="0" bIns="0" rtlCol="0" anchor="ctr"/>
+          <a:lstStyle/>
+          <a:p>
+            <a:pPr algn="l" indent="0" marL="0">
+              <a:buNone/>
+            </a:pPr>
+            <a:r>
+              <a:rPr lang="en-US" sz="1100" b="1" dirty="0">
+                <a:solidFill>
+                  <a:srgbClr val="808080"/>
+                </a:solidFill>
+                <a:latin typeface="メイリオ" pitchFamily="34" charset="0"/>
+                <a:ea typeface="メイリオ" pitchFamily="34" charset="-122"/>
+                <a:cs typeface="メイリオ" pitchFamily="34" charset="-120"/>
+              </a:rPr>
+              <a:t>外国語・７年Ｂ組／Unit 4</a:t>
+            </a:r>
+            <a:endParaRPr lang="en-US" sz="1100" dirty="0"/>
+          </a:p>
+        </p:txBody>
+      </p:sp>
+      <p:sp>
+        <p:nvSpPr>
+          <p:cNvPr id="15" name="Text 13"/>
+          <p:cNvSpPr txBox="1"/>
+          <p:nvPr/>
+        </p:nvSpPr>
+        <p:spPr>
+          <a:xfrm>
+            <a:off x="320040" y="4206240"/>
+            <a:ext cx="8503920" cy="548640"/>
           </a:xfrm>
           <a:prstGeom prst="rect">
             <a:avLst/>
@@ -3396,7 +3983,7 @@
               <a:buNone/>
             </a:pPr>
             <a:r>
-              <a:rPr lang="en-US" sz="2400" b="1" dirty="0">
+              <a:rPr lang="en-US" sz="1700" b="1" dirty="0">
                 <a:solidFill>
                   <a:srgbClr val="595959"/>
                 </a:solidFill>
@@ -3404,11 +3991,8 @@
                 <a:ea typeface="メイリオ" pitchFamily="34" charset="-122"/>
                 <a:cs typeface="メイリオ" pitchFamily="34" charset="-120"/>
               </a:rPr>
-              <a:t>これからの時代、学力向上の基盤となるのは</a:t>
-            </a:r>
-            <a:endParaRPr lang="en-US" sz="2400" dirty="0"/>
-          </a:p>
-          <a:p>
+              <a:t>３つの教室に共通していたのは、</a:t>
+            </a:r>
             <a:pPr algn="l" indent="0" marL="0">
               <a:lnSpc>
                 <a:spcPct val="120000"/>
@@ -3416,7 +4000,24 @@
               <a:buNone/>
             </a:pPr>
             <a:r>
-              <a:rPr lang="en-US" sz="2400" b="1" dirty="0">
+              <a:rPr lang="en-US" sz="1700" b="1" dirty="0">
+                <a:solidFill>
+                  <a:srgbClr val="EE7B08"/>
+                </a:solidFill>
+                <a:latin typeface="メイリオ" pitchFamily="34" charset="0"/>
+                <a:ea typeface="メイリオ" pitchFamily="34" charset="-122"/>
+                <a:cs typeface="メイリオ" pitchFamily="34" charset="-120"/>
+              </a:rPr>
+              <a:t>子どもが動き、考え、伝える時間</a:t>
+            </a:r>
+            <a:pPr algn="l" indent="0" marL="0">
+              <a:lnSpc>
+                <a:spcPct val="120000"/>
+              </a:lnSpc>
+              <a:buNone/>
+            </a:pPr>
+            <a:r>
+              <a:rPr lang="en-US" sz="1700" b="1" dirty="0">
                 <a:solidFill>
                   <a:srgbClr val="595959"/>
                 </a:solidFill>
@@ -3424,152 +4025,48 @@
                 <a:ea typeface="メイリオ" pitchFamily="34" charset="-122"/>
                 <a:cs typeface="メイリオ" pitchFamily="34" charset="-120"/>
               </a:rPr>
-              <a:t>　</a:t>
-            </a:r>
-            <a:pPr algn="l" indent="0" marL="0">
-              <a:lnSpc>
-                <a:spcPct val="120000"/>
-              </a:lnSpc>
-              <a:buNone/>
-            </a:pPr>
-            <a:r>
-              <a:rPr lang="en-US" sz="2400" b="1" dirty="0">
-                <a:solidFill>
-                  <a:srgbClr val="EE7B08"/>
-                </a:solidFill>
-                <a:latin typeface="メイリオ" pitchFamily="34" charset="0"/>
-                <a:ea typeface="メイリオ" pitchFamily="34" charset="-122"/>
-                <a:cs typeface="メイリオ" pitchFamily="34" charset="-120"/>
-              </a:rPr>
-              <a:t>自己肯定感</a:t>
-            </a:r>
-            <a:pPr algn="l" indent="0" marL="0">
-              <a:lnSpc>
-                <a:spcPct val="120000"/>
-              </a:lnSpc>
-              <a:buNone/>
-            </a:pPr>
-            <a:r>
-              <a:rPr lang="en-US" sz="2400" b="1" dirty="0">
-                <a:solidFill>
-                  <a:srgbClr val="595959"/>
-                </a:solidFill>
-                <a:latin typeface="メイリオ" pitchFamily="34" charset="0"/>
-                <a:ea typeface="メイリオ" pitchFamily="34" charset="-122"/>
-                <a:cs typeface="メイリオ" pitchFamily="34" charset="-120"/>
-              </a:rPr>
-              <a:t>である。</a:t>
-            </a:r>
-            <a:endParaRPr lang="en-US" sz="2400" dirty="0"/>
-          </a:p>
-        </p:txBody>
-      </p:sp>
-      <p:sp>
-        <p:nvSpPr>
-          <p:cNvPr id="4" name="Shape 2"/>
-          <p:cNvSpPr/>
-          <p:nvPr/>
-        </p:nvSpPr>
-        <p:spPr>
-          <a:xfrm>
-            <a:off x="475488" y="2697480"/>
-            <a:ext cx="8193024" cy="1737360"/>
-          </a:xfrm>
-          <a:prstGeom prst="roundRect">
-            <a:avLst>
-              <a:gd name="adj" fmla="val 3158"/>
-            </a:avLst>
-          </a:prstGeom>
-          <a:solidFill>
-            <a:srgbClr val="E9F7F3"/>
-          </a:solidFill>
-          <a:ln w="12700">
-            <a:solidFill>
-              <a:srgbClr val="B9E5DA"/>
-            </a:solidFill>
-            <a:prstDash val="solid"/>
-          </a:ln>
-        </p:spPr>
-      </p:sp>
-      <p:sp>
-        <p:nvSpPr>
-          <p:cNvPr id="5" name="Text 3"/>
-          <p:cNvSpPr txBox="1"/>
-          <p:nvPr/>
-        </p:nvSpPr>
-        <p:spPr>
-          <a:xfrm>
-            <a:off x="731520" y="2852928"/>
-            <a:ext cx="7680960" cy="1417320"/>
-          </a:xfrm>
-          <a:prstGeom prst="rect">
-            <a:avLst/>
-          </a:prstGeom>
-          <a:noFill/>
-          <a:ln/>
-        </p:spPr>
-        <p:txBody>
-          <a:bodyPr wrap="square" lIns="0" tIns="0" rIns="0" bIns="0" rtlCol="0" anchor="t"/>
-          <a:lstStyle/>
-          <a:p>
-            <a:pPr algn="l" indent="0" marL="0">
-              <a:lnSpc>
-                <a:spcPct val="130000"/>
-              </a:lnSpc>
-              <a:buNone/>
-            </a:pPr>
-            <a:r>
-              <a:rPr lang="en-US" sz="1700" b="1" dirty="0">
-                <a:solidFill>
-                  <a:srgbClr val="44C1A3"/>
-                </a:solidFill>
-                <a:latin typeface="メイリオ" pitchFamily="34" charset="0"/>
-                <a:ea typeface="メイリオ" pitchFamily="34" charset="-122"/>
-                <a:cs typeface="メイリオ" pitchFamily="34" charset="-120"/>
-              </a:rPr>
-              <a:t>自己肯定感とは</a:t>
+              <a:t>の多さである。</a:t>
             </a:r>
             <a:endParaRPr lang="en-US" sz="1700" dirty="0"/>
           </a:p>
-          <a:p>
-            <a:pPr algn="l" indent="0" marL="0">
-              <a:lnSpc>
-                <a:spcPct val="130000"/>
-              </a:lnSpc>
-              <a:buNone/>
-            </a:pPr>
-            <a:r>
-              <a:rPr lang="en-US" sz="2200" b="1" dirty="0">
-                <a:solidFill>
-                  <a:srgbClr val="595959"/>
-                </a:solidFill>
-                <a:latin typeface="メイリオ" pitchFamily="34" charset="0"/>
-                <a:ea typeface="メイリオ" pitchFamily="34" charset="-122"/>
-                <a:cs typeface="メイリオ" pitchFamily="34" charset="-120"/>
-              </a:rPr>
-              <a:t>「できる子になる」ことではなく、</a:t>
-            </a:r>
-            <a:endParaRPr lang="en-US" sz="1700" dirty="0"/>
-          </a:p>
-          <a:p>
-            <a:pPr algn="l" indent="0" marL="0">
-              <a:lnSpc>
-                <a:spcPct val="130000"/>
-              </a:lnSpc>
-              <a:buNone/>
-            </a:pPr>
-            <a:r>
-              <a:rPr lang="en-US" sz="2200" b="1" dirty="0">
-                <a:solidFill>
-                  <a:srgbClr val="EE7B08"/>
-                </a:solidFill>
-                <a:latin typeface="メイリオ" pitchFamily="34" charset="0"/>
-                <a:ea typeface="メイリオ" pitchFamily="34" charset="-122"/>
-                <a:cs typeface="メイリオ" pitchFamily="34" charset="-120"/>
-              </a:rPr>
-              <a:t>「成長できる自分を信じること」である。</a:t>
-            </a:r>
-            <a:endParaRPr lang="en-US" sz="1700" dirty="0"/>
+        </p:txBody>
+      </p:sp>
+      <p:sp>
+        <p:nvSpPr>
+          <p:cNvPr id="16" name="Text 14"/>
+          <p:cNvSpPr txBox="1"/>
+          <p:nvPr/>
+        </p:nvSpPr>
+        <p:spPr>
+          <a:xfrm>
+            <a:off x="320040" y="4754880"/>
+            <a:ext cx="8503920" cy="237744"/>
+          </a:xfrm>
+          <a:prstGeom prst="rect">
+            <a:avLst/>
+          </a:prstGeom>
+          <a:noFill/>
+          <a:ln/>
+        </p:spPr>
+        <p:txBody>
+          <a:bodyPr wrap="square" lIns="0" tIns="0" rIns="0" bIns="0" rtlCol="0" anchor="ctr"/>
+          <a:lstStyle/>
+          <a:p>
+            <a:pPr algn="l" indent="0" marL="0">
+              <a:buNone/>
+            </a:pPr>
+            <a:r>
+              <a:rPr lang="en-US" sz="950" b="1" dirty="0">
+                <a:solidFill>
+                  <a:srgbClr val="808080"/>
+                </a:solidFill>
+                <a:latin typeface="メイリオ" pitchFamily="34" charset="0"/>
+                <a:ea typeface="メイリオ" pitchFamily="34" charset="-122"/>
+                <a:cs typeface="メイリオ" pitchFamily="34" charset="-120"/>
+              </a:rPr>
+              <a:t>※ 点線の枠に当日の授業写真を貼り付けてご使用ください。</a:t>
+            </a:r>
+            <a:endParaRPr lang="en-US" sz="950" dirty="0"/>
           </a:p>
         </p:txBody>
       </p:sp>
@@ -3656,7 +4153,7 @@
                 <a:ea typeface="メイリオ" pitchFamily="34" charset="-122"/>
                 <a:cs typeface="メイリオ" pitchFamily="34" charset="-120"/>
               </a:rPr>
-              <a:t>　①　自己肯定感を育む授業</a:t>
+              <a:t>　①　自己肯定感</a:t>
             </a:r>
             <a:endParaRPr lang="en-US" sz="3000" dirty="0"/>
           </a:p>
@@ -3664,18 +4161,114 @@
       </p:sp>
       <p:sp>
         <p:nvSpPr>
-          <p:cNvPr id="3" name="Shape 1"/>
+          <p:cNvPr id="3" name="Text 1"/>
+          <p:cNvSpPr txBox="1"/>
+          <p:nvPr/>
+        </p:nvSpPr>
+        <p:spPr>
+          <a:xfrm>
+            <a:off x="475488" y="1481328"/>
+            <a:ext cx="8193024" cy="1005840"/>
+          </a:xfrm>
+          <a:prstGeom prst="rect">
+            <a:avLst/>
+          </a:prstGeom>
+          <a:noFill/>
+          <a:ln/>
+        </p:spPr>
+        <p:txBody>
+          <a:bodyPr wrap="square" lIns="0" tIns="0" rIns="0" bIns="0" rtlCol="0" anchor="t"/>
+          <a:lstStyle/>
+          <a:p>
+            <a:pPr algn="l" indent="0" marL="0">
+              <a:lnSpc>
+                <a:spcPct val="120000"/>
+              </a:lnSpc>
+              <a:buNone/>
+            </a:pPr>
+            <a:r>
+              <a:rPr lang="en-US" sz="2400" b="1" dirty="0">
+                <a:solidFill>
+                  <a:srgbClr val="595959"/>
+                </a:solidFill>
+                <a:latin typeface="メイリオ" pitchFamily="34" charset="0"/>
+                <a:ea typeface="メイリオ" pitchFamily="34" charset="-122"/>
+                <a:cs typeface="メイリオ" pitchFamily="34" charset="-120"/>
+              </a:rPr>
+              <a:t>これからの時代、学力向上の基盤となるのは</a:t>
+            </a:r>
+            <a:endParaRPr lang="en-US" sz="2400" dirty="0"/>
+          </a:p>
+          <a:p>
+            <a:pPr algn="l" indent="0" marL="0">
+              <a:lnSpc>
+                <a:spcPct val="120000"/>
+              </a:lnSpc>
+              <a:buNone/>
+            </a:pPr>
+            <a:r>
+              <a:rPr lang="en-US" sz="2400" b="1" dirty="0">
+                <a:solidFill>
+                  <a:srgbClr val="595959"/>
+                </a:solidFill>
+                <a:latin typeface="メイリオ" pitchFamily="34" charset="0"/>
+                <a:ea typeface="メイリオ" pitchFamily="34" charset="-122"/>
+                <a:cs typeface="メイリオ" pitchFamily="34" charset="-120"/>
+              </a:rPr>
+              <a:t>　</a:t>
+            </a:r>
+            <a:pPr algn="l" indent="0" marL="0">
+              <a:lnSpc>
+                <a:spcPct val="120000"/>
+              </a:lnSpc>
+              <a:buNone/>
+            </a:pPr>
+            <a:r>
+              <a:rPr lang="en-US" sz="2400" b="1" dirty="0">
+                <a:solidFill>
+                  <a:srgbClr val="EE7B08"/>
+                </a:solidFill>
+                <a:latin typeface="メイリオ" pitchFamily="34" charset="0"/>
+                <a:ea typeface="メイリオ" pitchFamily="34" charset="-122"/>
+                <a:cs typeface="メイリオ" pitchFamily="34" charset="-120"/>
+              </a:rPr>
+              <a:t>自己肯定感</a:t>
+            </a:r>
+            <a:pPr algn="l" indent="0" marL="0">
+              <a:lnSpc>
+                <a:spcPct val="120000"/>
+              </a:lnSpc>
+              <a:buNone/>
+            </a:pPr>
+            <a:r>
+              <a:rPr lang="en-US" sz="2400" b="1" dirty="0">
+                <a:solidFill>
+                  <a:srgbClr val="595959"/>
+                </a:solidFill>
+                <a:latin typeface="メイリオ" pitchFamily="34" charset="0"/>
+                <a:ea typeface="メイリオ" pitchFamily="34" charset="-122"/>
+                <a:cs typeface="メイリオ" pitchFamily="34" charset="-120"/>
+              </a:rPr>
+              <a:t>である。</a:t>
+            </a:r>
+            <a:endParaRPr lang="en-US" sz="2400" dirty="0"/>
+          </a:p>
+        </p:txBody>
+      </p:sp>
+      <p:sp>
+        <p:nvSpPr>
+          <p:cNvPr id="4" name="Shape 2"/>
           <p:cNvSpPr/>
           <p:nvPr/>
         </p:nvSpPr>
         <p:spPr>
           <a:xfrm>
-            <a:off x="320040" y="1417320"/>
-            <a:ext cx="2697480" cy="2395728"/>
+            <a:off x="475488" y="2697480"/>
+            <a:ext cx="8193024" cy="1737360"/>
           </a:xfrm>
           <a:prstGeom prst="roundRect">
             <a:avLst>
-              <a:gd name="adj" fmla="val 2290"/>
+              <a:gd name="adj" fmla="val 3158"/>
             </a:avLst>
           </a:prstGeom>
           <a:solidFill>
@@ -3691,30 +4284,33 @@
       </p:sp>
       <p:sp>
         <p:nvSpPr>
-          <p:cNvPr id="4" name="Text 2"/>
-          <p:cNvSpPr txBox="1"/>
-          <p:nvPr/>
-        </p:nvSpPr>
-        <p:spPr>
-          <a:xfrm>
-            <a:off x="466344" y="1527048"/>
-            <a:ext cx="2404872" cy="274320"/>
-          </a:xfrm>
-          <a:prstGeom prst="rect">
-            <a:avLst/>
-          </a:prstGeom>
-          <a:noFill/>
-          <a:ln/>
-        </p:spPr>
-        <p:txBody>
-          <a:bodyPr wrap="square" lIns="0" tIns="0" rIns="0" bIns="0" rtlCol="0" anchor="ctr"/>
-          <a:lstStyle/>
-          <a:p>
-            <a:pPr algn="l" indent="0" marL="0">
-              <a:buNone/>
-            </a:pPr>
-            <a:r>
-              <a:rPr lang="en-US" sz="1600" b="1" dirty="0">
+          <p:cNvPr id="5" name="Text 3"/>
+          <p:cNvSpPr txBox="1"/>
+          <p:nvPr/>
+        </p:nvSpPr>
+        <p:spPr>
+          <a:xfrm>
+            <a:off x="731520" y="2852928"/>
+            <a:ext cx="7680960" cy="1417320"/>
+          </a:xfrm>
+          <a:prstGeom prst="rect">
+            <a:avLst/>
+          </a:prstGeom>
+          <a:noFill/>
+          <a:ln/>
+        </p:spPr>
+        <p:txBody>
+          <a:bodyPr wrap="square" lIns="0" tIns="0" rIns="0" bIns="0" rtlCol="0" anchor="t"/>
+          <a:lstStyle/>
+          <a:p>
+            <a:pPr algn="l" indent="0" marL="0">
+              <a:lnSpc>
+                <a:spcPct val="130000"/>
+              </a:lnSpc>
+              <a:buNone/>
+            </a:pPr>
+            <a:r>
+              <a:rPr lang="en-US" sz="1700" b="1" dirty="0">
                 <a:solidFill>
                   <a:srgbClr val="44C1A3"/>
                 </a:solidFill>
@@ -3722,80 +4318,19 @@
                 <a:ea typeface="メイリオ" pitchFamily="34" charset="-122"/>
                 <a:cs typeface="メイリオ" pitchFamily="34" charset="-120"/>
               </a:rPr>
-              <a:t>田口　和磨　先生</a:t>
-            </a:r>
-            <a:endParaRPr lang="en-US" sz="1600" dirty="0"/>
-          </a:p>
-        </p:txBody>
-      </p:sp>
-      <p:sp>
-        <p:nvSpPr>
-          <p:cNvPr id="5" name="Text 3"/>
-          <p:cNvSpPr txBox="1"/>
-          <p:nvPr/>
-        </p:nvSpPr>
-        <p:spPr>
-          <a:xfrm>
-            <a:off x="466344" y="1801368"/>
-            <a:ext cx="2404872" cy="237744"/>
-          </a:xfrm>
-          <a:prstGeom prst="rect">
-            <a:avLst/>
-          </a:prstGeom>
-          <a:noFill/>
-          <a:ln/>
-        </p:spPr>
-        <p:txBody>
-          <a:bodyPr wrap="square" lIns="0" tIns="0" rIns="0" bIns="0" rtlCol="0" anchor="ctr"/>
-          <a:lstStyle/>
-          <a:p>
-            <a:pPr algn="l" indent="0" marL="0">
-              <a:buNone/>
-            </a:pPr>
-            <a:r>
-              <a:rPr lang="en-US" sz="1100" b="1" dirty="0">
-                <a:solidFill>
-                  <a:srgbClr val="808080"/>
-                </a:solidFill>
-                <a:latin typeface="メイリオ" pitchFamily="34" charset="0"/>
-                <a:ea typeface="メイリオ" pitchFamily="34" charset="-122"/>
-                <a:cs typeface="メイリオ" pitchFamily="34" charset="-120"/>
-              </a:rPr>
-              <a:t>保健体育・９年ＡＢ組／水泳</a:t>
-            </a:r>
-            <a:endParaRPr lang="en-US" sz="1100" dirty="0"/>
-          </a:p>
-        </p:txBody>
-      </p:sp>
-      <p:sp>
-        <p:nvSpPr>
-          <p:cNvPr id="6" name="Text 4"/>
-          <p:cNvSpPr txBox="1"/>
-          <p:nvPr/>
-        </p:nvSpPr>
-        <p:spPr>
-          <a:xfrm>
-            <a:off x="466344" y="2075688"/>
-            <a:ext cx="2404872" cy="1609344"/>
-          </a:xfrm>
-          <a:prstGeom prst="rect">
-            <a:avLst/>
-          </a:prstGeom>
-          <a:noFill/>
-          <a:ln/>
-        </p:spPr>
-        <p:txBody>
-          <a:bodyPr wrap="square" lIns="0" tIns="0" rIns="0" bIns="0" rtlCol="0" anchor="t"/>
-          <a:lstStyle/>
-          <a:p>
-            <a:pPr algn="l" indent="0" marL="0">
-              <a:lnSpc>
-                <a:spcPct val="125000"/>
-              </a:lnSpc>
-              <a:buNone/>
-            </a:pPr>
-            <a:r>
-              <a:rPr lang="en-US" sz="1350" b="1" dirty="0">
+              <a:t>自己肯定感とは</a:t>
+            </a:r>
+            <a:endParaRPr lang="en-US" sz="1700" dirty="0"/>
+          </a:p>
+          <a:p>
+            <a:pPr algn="l" indent="0" marL="0">
+              <a:lnSpc>
+                <a:spcPct val="130000"/>
+              </a:lnSpc>
+              <a:buNone/>
+            </a:pPr>
+            <a:r>
+              <a:rPr lang="en-US" sz="2200" b="1" dirty="0">
                 <a:solidFill>
                   <a:srgbClr val="595959"/>
                 </a:solidFill>
@@ -3803,19 +4338,19 @@
                 <a:ea typeface="メイリオ" pitchFamily="34" charset="-122"/>
                 <a:cs typeface="メイリオ" pitchFamily="34" charset="-120"/>
               </a:rPr>
-              <a:t>泳力差の大きい集団に</a:t>
-            </a:r>
-            <a:endParaRPr lang="en-US" sz="1350" dirty="0"/>
-          </a:p>
-          <a:p>
-            <a:pPr algn="l" indent="0" marL="0">
-              <a:lnSpc>
-                <a:spcPct val="125000"/>
-              </a:lnSpc>
-              <a:buNone/>
-            </a:pPr>
-            <a:r>
-              <a:rPr lang="en-US" sz="1350" b="1" dirty="0">
+              <a:t>「できる子になる」ことではなく、</a:t>
+            </a:r>
+            <a:endParaRPr lang="en-US" sz="1700" dirty="0"/>
+          </a:p>
+          <a:p>
+            <a:pPr algn="l" indent="0" marL="0">
+              <a:lnSpc>
+                <a:spcPct val="130000"/>
+              </a:lnSpc>
+              <a:buNone/>
+            </a:pPr>
+            <a:r>
+              <a:rPr lang="en-US" sz="2200" b="1" dirty="0">
                 <a:solidFill>
                   <a:srgbClr val="EE7B08"/>
                 </a:solidFill>
@@ -3823,679 +4358,9 @@
                 <a:ea typeface="メイリオ" pitchFamily="34" charset="-122"/>
                 <a:cs typeface="メイリオ" pitchFamily="34" charset="-120"/>
               </a:rPr>
-              <a:t>・段階的な課題設定</a:t>
-            </a:r>
-            <a:endParaRPr lang="en-US" sz="1350" dirty="0"/>
-          </a:p>
-          <a:p>
-            <a:pPr algn="l" indent="0" marL="0">
-              <a:lnSpc>
-                <a:spcPct val="125000"/>
-              </a:lnSpc>
-              <a:buNone/>
-            </a:pPr>
-            <a:r>
-              <a:rPr lang="en-US" sz="1350" b="1" dirty="0">
-                <a:solidFill>
-                  <a:srgbClr val="EE7B08"/>
-                </a:solidFill>
-                <a:latin typeface="メイリオ" pitchFamily="34" charset="0"/>
-                <a:ea typeface="メイリオ" pitchFamily="34" charset="-122"/>
-                <a:cs typeface="メイリオ" pitchFamily="34" charset="-120"/>
-              </a:rPr>
-              <a:t>・泳力別のコース編成</a:t>
-            </a:r>
-            <a:endParaRPr lang="en-US" sz="1350" dirty="0"/>
-          </a:p>
-          <a:p>
-            <a:pPr algn="l" indent="0" marL="0">
-              <a:lnSpc>
-                <a:spcPct val="125000"/>
-              </a:lnSpc>
-              <a:buNone/>
-            </a:pPr>
-            <a:r>
-              <a:rPr lang="en-US" sz="1350" b="1" dirty="0">
-                <a:solidFill>
-                  <a:srgbClr val="EE7B08"/>
-                </a:solidFill>
-                <a:latin typeface="メイリオ" pitchFamily="34" charset="0"/>
-                <a:ea typeface="メイリオ" pitchFamily="34" charset="-122"/>
-                <a:cs typeface="メイリオ" pitchFamily="34" charset="-120"/>
-              </a:rPr>
-              <a:t>・バディでの確認活動</a:t>
-            </a:r>
-            <a:endParaRPr lang="en-US" sz="1350" dirty="0"/>
-          </a:p>
-          <a:p>
-            <a:pPr algn="l" indent="0" marL="0">
-              <a:lnSpc>
-                <a:spcPct val="125000"/>
-              </a:lnSpc>
-              <a:buNone/>
-            </a:pPr>
-            <a:r>
-              <a:rPr lang="en-US" sz="1350" b="1" dirty="0">
-                <a:solidFill>
-                  <a:srgbClr val="595959"/>
-                </a:solidFill>
-                <a:latin typeface="メイリオ" pitchFamily="34" charset="0"/>
-                <a:ea typeface="メイリオ" pitchFamily="34" charset="-122"/>
-                <a:cs typeface="メイリオ" pitchFamily="34" charset="-120"/>
-              </a:rPr>
-              <a:t>確認の視点を３点示し、</a:t>
-            </a:r>
-            <a:endParaRPr lang="en-US" sz="1350" dirty="0"/>
-          </a:p>
-          <a:p>
-            <a:pPr algn="l" indent="0" marL="0">
-              <a:lnSpc>
-                <a:spcPct val="125000"/>
-              </a:lnSpc>
-              <a:buNone/>
-            </a:pPr>
-            <a:r>
-              <a:rPr lang="en-US" sz="1350" b="1" dirty="0">
-                <a:solidFill>
-                  <a:srgbClr val="595959"/>
-                </a:solidFill>
-                <a:latin typeface="メイリオ" pitchFamily="34" charset="0"/>
-                <a:ea typeface="メイリオ" pitchFamily="34" charset="-122"/>
-                <a:cs typeface="メイリオ" pitchFamily="34" charset="-120"/>
-              </a:rPr>
-              <a:t>見る目を育てていた。</a:t>
-            </a:r>
-            <a:endParaRPr lang="en-US" sz="1350" dirty="0"/>
-          </a:p>
-        </p:txBody>
-      </p:sp>
-      <p:sp>
-        <p:nvSpPr>
-          <p:cNvPr id="7" name="Shape 5"/>
-          <p:cNvSpPr/>
-          <p:nvPr/>
-        </p:nvSpPr>
-        <p:spPr>
-          <a:xfrm>
-            <a:off x="3227832" y="1417320"/>
-            <a:ext cx="2697480" cy="2395728"/>
-          </a:xfrm>
-          <a:prstGeom prst="roundRect">
-            <a:avLst>
-              <a:gd name="adj" fmla="val 2290"/>
-            </a:avLst>
-          </a:prstGeom>
-          <a:solidFill>
-            <a:srgbClr val="E9F7F3"/>
-          </a:solidFill>
-          <a:ln w="12700">
-            <a:solidFill>
-              <a:srgbClr val="B9E5DA"/>
-            </a:solidFill>
-            <a:prstDash val="solid"/>
-          </a:ln>
-        </p:spPr>
-      </p:sp>
-      <p:sp>
-        <p:nvSpPr>
-          <p:cNvPr id="8" name="Text 6"/>
-          <p:cNvSpPr txBox="1"/>
-          <p:nvPr/>
-        </p:nvSpPr>
-        <p:spPr>
-          <a:xfrm>
-            <a:off x="3374136" y="1527048"/>
-            <a:ext cx="2404872" cy="274320"/>
-          </a:xfrm>
-          <a:prstGeom prst="rect">
-            <a:avLst/>
-          </a:prstGeom>
-          <a:noFill/>
-          <a:ln/>
-        </p:spPr>
-        <p:txBody>
-          <a:bodyPr wrap="square" lIns="0" tIns="0" rIns="0" bIns="0" rtlCol="0" anchor="ctr"/>
-          <a:lstStyle/>
-          <a:p>
-            <a:pPr algn="l" indent="0" marL="0">
-              <a:buNone/>
-            </a:pPr>
-            <a:r>
-              <a:rPr lang="en-US" sz="1600" b="1" dirty="0">
-                <a:solidFill>
-                  <a:srgbClr val="44C1A3"/>
-                </a:solidFill>
-                <a:latin typeface="メイリオ" pitchFamily="34" charset="0"/>
-                <a:ea typeface="メイリオ" pitchFamily="34" charset="-122"/>
-                <a:cs typeface="メイリオ" pitchFamily="34" charset="-120"/>
-              </a:rPr>
-              <a:t>東海林　静江　先生</a:t>
-            </a:r>
-            <a:endParaRPr lang="en-US" sz="1600" dirty="0"/>
-          </a:p>
-        </p:txBody>
-      </p:sp>
-      <p:sp>
-        <p:nvSpPr>
-          <p:cNvPr id="9" name="Text 7"/>
-          <p:cNvSpPr txBox="1"/>
-          <p:nvPr/>
-        </p:nvSpPr>
-        <p:spPr>
-          <a:xfrm>
-            <a:off x="3374136" y="1801368"/>
-            <a:ext cx="2404872" cy="237744"/>
-          </a:xfrm>
-          <a:prstGeom prst="rect">
-            <a:avLst/>
-          </a:prstGeom>
-          <a:noFill/>
-          <a:ln/>
-        </p:spPr>
-        <p:txBody>
-          <a:bodyPr wrap="square" lIns="0" tIns="0" rIns="0" bIns="0" rtlCol="0" anchor="ctr"/>
-          <a:lstStyle/>
-          <a:p>
-            <a:pPr algn="l" indent="0" marL="0">
-              <a:buNone/>
-            </a:pPr>
-            <a:r>
-              <a:rPr lang="en-US" sz="1100" b="1" dirty="0">
-                <a:solidFill>
-                  <a:srgbClr val="808080"/>
-                </a:solidFill>
-                <a:latin typeface="メイリオ" pitchFamily="34" charset="0"/>
-                <a:ea typeface="メイリオ" pitchFamily="34" charset="-122"/>
-                <a:cs typeface="メイリオ" pitchFamily="34" charset="-120"/>
-              </a:rPr>
-              <a:t>道徳・特別支援学級Ｄ組／うそ</a:t>
-            </a:r>
-            <a:endParaRPr lang="en-US" sz="1100" dirty="0"/>
-          </a:p>
-        </p:txBody>
-      </p:sp>
-      <p:sp>
-        <p:nvSpPr>
-          <p:cNvPr id="10" name="Text 8"/>
-          <p:cNvSpPr txBox="1"/>
-          <p:nvPr/>
-        </p:nvSpPr>
-        <p:spPr>
-          <a:xfrm>
-            <a:off x="3374136" y="2075688"/>
-            <a:ext cx="2404872" cy="1609344"/>
-          </a:xfrm>
-          <a:prstGeom prst="rect">
-            <a:avLst/>
-          </a:prstGeom>
-          <a:noFill/>
-          <a:ln/>
-        </p:spPr>
-        <p:txBody>
-          <a:bodyPr wrap="square" lIns="0" tIns="0" rIns="0" bIns="0" rtlCol="0" anchor="t"/>
-          <a:lstStyle/>
-          <a:p>
-            <a:pPr algn="l" indent="0" marL="0">
-              <a:lnSpc>
-                <a:spcPct val="125000"/>
-              </a:lnSpc>
-              <a:buNone/>
-            </a:pPr>
-            <a:r>
-              <a:rPr lang="en-US" sz="1350" b="1" dirty="0">
-                <a:solidFill>
-                  <a:srgbClr val="595959"/>
-                </a:solidFill>
-                <a:latin typeface="メイリオ" pitchFamily="34" charset="0"/>
-                <a:ea typeface="メイリオ" pitchFamily="34" charset="-122"/>
-                <a:cs typeface="メイリオ" pitchFamily="34" charset="-120"/>
-              </a:rPr>
-              <a:t>安心して自分の考えを</a:t>
-            </a:r>
-            <a:endParaRPr lang="en-US" sz="1350" dirty="0"/>
-          </a:p>
-          <a:p>
-            <a:pPr algn="l" indent="0" marL="0">
-              <a:lnSpc>
-                <a:spcPct val="125000"/>
-              </a:lnSpc>
-              <a:buNone/>
-            </a:pPr>
-            <a:r>
-              <a:rPr lang="en-US" sz="1350" b="1" dirty="0">
-                <a:solidFill>
-                  <a:srgbClr val="EE7B08"/>
-                </a:solidFill>
-                <a:latin typeface="メイリオ" pitchFamily="34" charset="0"/>
-                <a:ea typeface="メイリオ" pitchFamily="34" charset="-122"/>
-                <a:cs typeface="メイリオ" pitchFamily="34" charset="-120"/>
-              </a:rPr>
-              <a:t>表現できる環境</a:t>
-            </a:r>
-            <a:endParaRPr lang="en-US" sz="1350" dirty="0"/>
-          </a:p>
-          <a:p>
-            <a:pPr algn="l" indent="0" marL="0">
-              <a:lnSpc>
-                <a:spcPct val="125000"/>
-              </a:lnSpc>
-              <a:buNone/>
-            </a:pPr>
-            <a:r>
-              <a:rPr lang="en-US" sz="1350" b="1" dirty="0">
-                <a:solidFill>
-                  <a:srgbClr val="595959"/>
-                </a:solidFill>
-                <a:latin typeface="メイリオ" pitchFamily="34" charset="0"/>
-                <a:ea typeface="メイリオ" pitchFamily="34" charset="-122"/>
-                <a:cs typeface="メイリオ" pitchFamily="34" charset="-120"/>
-              </a:rPr>
-              <a:t>・前時の考えを尊重</a:t>
-            </a:r>
-            <a:endParaRPr lang="en-US" sz="1350" dirty="0"/>
-          </a:p>
-          <a:p>
-            <a:pPr algn="l" indent="0" marL="0">
-              <a:lnSpc>
-                <a:spcPct val="125000"/>
-              </a:lnSpc>
-              <a:buNone/>
-            </a:pPr>
-            <a:r>
-              <a:rPr lang="en-US" sz="1350" b="1" dirty="0">
-                <a:solidFill>
-                  <a:srgbClr val="EE7B08"/>
-                </a:solidFill>
-                <a:latin typeface="メイリオ" pitchFamily="34" charset="0"/>
-                <a:ea typeface="メイリオ" pitchFamily="34" charset="-122"/>
-                <a:cs typeface="メイリオ" pitchFamily="34" charset="-120"/>
-              </a:rPr>
-              <a:t>・意見が変わってよい</a:t>
-            </a:r>
-            <a:endParaRPr lang="en-US" sz="1350" dirty="0"/>
-          </a:p>
-          <a:p>
-            <a:pPr algn="l" indent="0" marL="0">
-              <a:lnSpc>
-                <a:spcPct val="125000"/>
-              </a:lnSpc>
-              <a:buNone/>
-            </a:pPr>
-            <a:r>
-              <a:rPr lang="en-US" sz="1350" b="1" dirty="0">
-                <a:solidFill>
-                  <a:srgbClr val="595959"/>
-                </a:solidFill>
-                <a:latin typeface="メイリオ" pitchFamily="34" charset="0"/>
-                <a:ea typeface="メイリオ" pitchFamily="34" charset="-122"/>
-                <a:cs typeface="メイリオ" pitchFamily="34" charset="-120"/>
-              </a:rPr>
-              <a:t>答えは一つではないと</a:t>
-            </a:r>
-            <a:endParaRPr lang="en-US" sz="1350" dirty="0"/>
-          </a:p>
-          <a:p>
-            <a:pPr algn="l" indent="0" marL="0">
-              <a:lnSpc>
-                <a:spcPct val="125000"/>
-              </a:lnSpc>
-              <a:buNone/>
-            </a:pPr>
-            <a:r>
-              <a:rPr lang="en-US" sz="1350" b="1" dirty="0">
-                <a:solidFill>
-                  <a:srgbClr val="595959"/>
-                </a:solidFill>
-                <a:latin typeface="メイリオ" pitchFamily="34" charset="0"/>
-                <a:ea typeface="メイリオ" pitchFamily="34" charset="-122"/>
-                <a:cs typeface="メイリオ" pitchFamily="34" charset="-120"/>
-              </a:rPr>
-              <a:t>保障されていた。</a:t>
-            </a:r>
-            <a:endParaRPr lang="en-US" sz="1350" dirty="0"/>
-          </a:p>
-        </p:txBody>
-      </p:sp>
-      <p:sp>
-        <p:nvSpPr>
-          <p:cNvPr id="11" name="Shape 9"/>
-          <p:cNvSpPr/>
-          <p:nvPr/>
-        </p:nvSpPr>
-        <p:spPr>
-          <a:xfrm>
-            <a:off x="6135624" y="1417320"/>
-            <a:ext cx="2697480" cy="2395728"/>
-          </a:xfrm>
-          <a:prstGeom prst="roundRect">
-            <a:avLst>
-              <a:gd name="adj" fmla="val 2290"/>
-            </a:avLst>
-          </a:prstGeom>
-          <a:solidFill>
-            <a:srgbClr val="E9F7F3"/>
-          </a:solidFill>
-          <a:ln w="12700">
-            <a:solidFill>
-              <a:srgbClr val="B9E5DA"/>
-            </a:solidFill>
-            <a:prstDash val="solid"/>
-          </a:ln>
-        </p:spPr>
-      </p:sp>
-      <p:sp>
-        <p:nvSpPr>
-          <p:cNvPr id="12" name="Text 10"/>
-          <p:cNvSpPr txBox="1"/>
-          <p:nvPr/>
-        </p:nvSpPr>
-        <p:spPr>
-          <a:xfrm>
-            <a:off x="6281928" y="1527048"/>
-            <a:ext cx="2404872" cy="274320"/>
-          </a:xfrm>
-          <a:prstGeom prst="rect">
-            <a:avLst/>
-          </a:prstGeom>
-          <a:noFill/>
-          <a:ln/>
-        </p:spPr>
-        <p:txBody>
-          <a:bodyPr wrap="square" lIns="0" tIns="0" rIns="0" bIns="0" rtlCol="0" anchor="ctr"/>
-          <a:lstStyle/>
-          <a:p>
-            <a:pPr algn="l" indent="0" marL="0">
-              <a:buNone/>
-            </a:pPr>
-            <a:r>
-              <a:rPr lang="en-US" sz="1600" b="1" dirty="0">
-                <a:solidFill>
-                  <a:srgbClr val="44C1A3"/>
-                </a:solidFill>
-                <a:latin typeface="メイリオ" pitchFamily="34" charset="0"/>
-                <a:ea typeface="メイリオ" pitchFamily="34" charset="-122"/>
-                <a:cs typeface="メイリオ" pitchFamily="34" charset="-120"/>
-              </a:rPr>
-              <a:t>塚本　瑞穂　先生</a:t>
-            </a:r>
-            <a:endParaRPr lang="en-US" sz="1600" dirty="0"/>
-          </a:p>
-        </p:txBody>
-      </p:sp>
-      <p:sp>
-        <p:nvSpPr>
-          <p:cNvPr id="13" name="Text 11"/>
-          <p:cNvSpPr txBox="1"/>
-          <p:nvPr/>
-        </p:nvSpPr>
-        <p:spPr>
-          <a:xfrm>
-            <a:off x="6281928" y="1801368"/>
-            <a:ext cx="2404872" cy="237744"/>
-          </a:xfrm>
-          <a:prstGeom prst="rect">
-            <a:avLst/>
-          </a:prstGeom>
-          <a:noFill/>
-          <a:ln/>
-        </p:spPr>
-        <p:txBody>
-          <a:bodyPr wrap="square" lIns="0" tIns="0" rIns="0" bIns="0" rtlCol="0" anchor="ctr"/>
-          <a:lstStyle/>
-          <a:p>
-            <a:pPr algn="l" indent="0" marL="0">
-              <a:buNone/>
-            </a:pPr>
-            <a:r>
-              <a:rPr lang="en-US" sz="1100" b="1" dirty="0">
-                <a:solidFill>
-                  <a:srgbClr val="808080"/>
-                </a:solidFill>
-                <a:latin typeface="メイリオ" pitchFamily="34" charset="0"/>
-                <a:ea typeface="メイリオ" pitchFamily="34" charset="-122"/>
-                <a:cs typeface="メイリオ" pitchFamily="34" charset="-120"/>
-              </a:rPr>
-              <a:t>外国語・７年Ｂ組／Unit 4</a:t>
-            </a:r>
-            <a:endParaRPr lang="en-US" sz="1100" dirty="0"/>
-          </a:p>
-        </p:txBody>
-      </p:sp>
-      <p:sp>
-        <p:nvSpPr>
-          <p:cNvPr id="14" name="Text 12"/>
-          <p:cNvSpPr txBox="1"/>
-          <p:nvPr/>
-        </p:nvSpPr>
-        <p:spPr>
-          <a:xfrm>
-            <a:off x="6281928" y="2075688"/>
-            <a:ext cx="2404872" cy="1609344"/>
-          </a:xfrm>
-          <a:prstGeom prst="rect">
-            <a:avLst/>
-          </a:prstGeom>
-          <a:noFill/>
-          <a:ln/>
-        </p:spPr>
-        <p:txBody>
-          <a:bodyPr wrap="square" lIns="0" tIns="0" rIns="0" bIns="0" rtlCol="0" anchor="t"/>
-          <a:lstStyle/>
-          <a:p>
-            <a:pPr algn="l" indent="0" marL="0">
-              <a:lnSpc>
-                <a:spcPct val="125000"/>
-              </a:lnSpc>
-              <a:buNone/>
-            </a:pPr>
-            <a:r>
-              <a:rPr lang="en-US" sz="1350" b="1" dirty="0">
-                <a:solidFill>
-                  <a:srgbClr val="595959"/>
-                </a:solidFill>
-                <a:latin typeface="メイリオ" pitchFamily="34" charset="0"/>
-                <a:ea typeface="メイリオ" pitchFamily="34" charset="-122"/>
-                <a:cs typeface="メイリオ" pitchFamily="34" charset="-120"/>
-              </a:rPr>
-              <a:t>習熟度差の大きい学級で</a:t>
-            </a:r>
-            <a:endParaRPr lang="en-US" sz="1350" dirty="0"/>
-          </a:p>
-          <a:p>
-            <a:pPr algn="l" indent="0" marL="0">
-              <a:lnSpc>
-                <a:spcPct val="125000"/>
-              </a:lnSpc>
-              <a:buNone/>
-            </a:pPr>
-            <a:r>
-              <a:rPr lang="en-US" sz="1350" b="1" dirty="0">
-                <a:solidFill>
-                  <a:srgbClr val="EE7B08"/>
-                </a:solidFill>
-                <a:latin typeface="メイリオ" pitchFamily="34" charset="0"/>
-                <a:ea typeface="メイリオ" pitchFamily="34" charset="-122"/>
-                <a:cs typeface="メイリオ" pitchFamily="34" charset="-120"/>
-              </a:rPr>
-              <a:t>・発表前にペアで共有</a:t>
-            </a:r>
-            <a:endParaRPr lang="en-US" sz="1350" dirty="0"/>
-          </a:p>
-          <a:p>
-            <a:pPr algn="l" indent="0" marL="0">
-              <a:lnSpc>
-                <a:spcPct val="125000"/>
-              </a:lnSpc>
-              <a:buNone/>
-            </a:pPr>
-            <a:r>
-              <a:rPr lang="en-US" sz="1350" b="1" dirty="0">
-                <a:solidFill>
-                  <a:srgbClr val="EE7B08"/>
-                </a:solidFill>
-                <a:latin typeface="メイリオ" pitchFamily="34" charset="0"/>
-                <a:ea typeface="メイリオ" pitchFamily="34" charset="-122"/>
-                <a:cs typeface="メイリオ" pitchFamily="34" charset="-120"/>
-              </a:rPr>
-              <a:t>・全員に発話の機会</a:t>
-            </a:r>
-            <a:endParaRPr lang="en-US" sz="1350" dirty="0"/>
-          </a:p>
-          <a:p>
-            <a:pPr algn="l" indent="0" marL="0">
-              <a:lnSpc>
-                <a:spcPct val="125000"/>
-              </a:lnSpc>
-              <a:buNone/>
-            </a:pPr>
-            <a:r>
-              <a:rPr lang="en-US" sz="1350" b="1" dirty="0">
-                <a:solidFill>
-                  <a:srgbClr val="595959"/>
-                </a:solidFill>
-                <a:latin typeface="メイリオ" pitchFamily="34" charset="0"/>
-                <a:ea typeface="メイリオ" pitchFamily="34" charset="-122"/>
-                <a:cs typeface="メイリオ" pitchFamily="34" charset="-120"/>
-              </a:rPr>
-              <a:t>不安を減らし、誰もが</a:t>
-            </a:r>
-            <a:endParaRPr lang="en-US" sz="1350" dirty="0"/>
-          </a:p>
-          <a:p>
-            <a:pPr algn="l" indent="0" marL="0">
-              <a:lnSpc>
-                <a:spcPct val="125000"/>
-              </a:lnSpc>
-              <a:buNone/>
-            </a:pPr>
-            <a:r>
-              <a:rPr lang="en-US" sz="1350" b="1" dirty="0">
-                <a:solidFill>
-                  <a:srgbClr val="595959"/>
-                </a:solidFill>
-                <a:latin typeface="メイリオ" pitchFamily="34" charset="0"/>
-                <a:ea typeface="メイリオ" pitchFamily="34" charset="-122"/>
-                <a:cs typeface="メイリオ" pitchFamily="34" charset="-120"/>
-              </a:rPr>
-              <a:t>参加できる場をつくって</a:t>
-            </a:r>
-            <a:endParaRPr lang="en-US" sz="1350" dirty="0"/>
-          </a:p>
-          <a:p>
-            <a:pPr algn="l" indent="0" marL="0">
-              <a:lnSpc>
-                <a:spcPct val="125000"/>
-              </a:lnSpc>
-              <a:buNone/>
-            </a:pPr>
-            <a:r>
-              <a:rPr lang="en-US" sz="1350" b="1" dirty="0">
-                <a:solidFill>
-                  <a:srgbClr val="595959"/>
-                </a:solidFill>
-                <a:latin typeface="メイリオ" pitchFamily="34" charset="0"/>
-                <a:ea typeface="メイリオ" pitchFamily="34" charset="-122"/>
-                <a:cs typeface="メイリオ" pitchFamily="34" charset="-120"/>
-              </a:rPr>
-              <a:t>いた。</a:t>
-            </a:r>
-            <a:endParaRPr lang="en-US" sz="1350" dirty="0"/>
-          </a:p>
-        </p:txBody>
-      </p:sp>
-      <p:sp>
-        <p:nvSpPr>
-          <p:cNvPr id="15" name="Text 13"/>
-          <p:cNvSpPr txBox="1"/>
-          <p:nvPr/>
-        </p:nvSpPr>
-        <p:spPr>
-          <a:xfrm>
-            <a:off x="320040" y="3977640"/>
-            <a:ext cx="8503920" cy="822960"/>
-          </a:xfrm>
-          <a:prstGeom prst="rect">
-            <a:avLst/>
-          </a:prstGeom>
-          <a:noFill/>
-          <a:ln/>
-        </p:spPr>
-        <p:txBody>
-          <a:bodyPr wrap="square" lIns="0" tIns="0" rIns="0" bIns="0" rtlCol="0" anchor="t"/>
-          <a:lstStyle/>
-          <a:p>
-            <a:pPr algn="l" indent="0" marL="0">
-              <a:lnSpc>
-                <a:spcPct val="120000"/>
-              </a:lnSpc>
-              <a:buNone/>
-            </a:pPr>
-            <a:r>
-              <a:rPr lang="en-US" sz="1600" b="1" dirty="0">
-                <a:solidFill>
-                  <a:srgbClr val="595959"/>
-                </a:solidFill>
-                <a:latin typeface="メイリオ" pitchFamily="34" charset="0"/>
-                <a:ea typeface="メイリオ" pitchFamily="34" charset="-122"/>
-                <a:cs typeface="メイリオ" pitchFamily="34" charset="-120"/>
-              </a:rPr>
-              <a:t>子どもたちは「認められる」よりも、</a:t>
-            </a:r>
-            <a:pPr algn="l" indent="0" marL="0">
-              <a:lnSpc>
-                <a:spcPct val="120000"/>
-              </a:lnSpc>
-              <a:buNone/>
-            </a:pPr>
-            <a:r>
-              <a:rPr lang="en-US" sz="1600" b="1" dirty="0">
-                <a:solidFill>
-                  <a:srgbClr val="EE7B08"/>
-                </a:solidFill>
-                <a:latin typeface="メイリオ" pitchFamily="34" charset="0"/>
-                <a:ea typeface="メイリオ" pitchFamily="34" charset="-122"/>
-                <a:cs typeface="メイリオ" pitchFamily="34" charset="-120"/>
-              </a:rPr>
-              <a:t>「自分で成長を実感する」</a:t>
-            </a:r>
-            <a:pPr algn="l" indent="0" marL="0">
-              <a:lnSpc>
-                <a:spcPct val="120000"/>
-              </a:lnSpc>
-              <a:buNone/>
-            </a:pPr>
-            <a:r>
-              <a:rPr lang="en-US" sz="1600" b="1" dirty="0">
-                <a:solidFill>
-                  <a:srgbClr val="595959"/>
-                </a:solidFill>
-                <a:latin typeface="メイリオ" pitchFamily="34" charset="0"/>
-                <a:ea typeface="メイリオ" pitchFamily="34" charset="-122"/>
-                <a:cs typeface="メイリオ" pitchFamily="34" charset="-120"/>
-              </a:rPr>
-              <a:t>経験を</a:t>
-            </a:r>
-            <a:endParaRPr lang="en-US" sz="1600" dirty="0"/>
-          </a:p>
-          <a:p>
-            <a:pPr algn="l" indent="0" marL="0">
-              <a:lnSpc>
-                <a:spcPct val="120000"/>
-              </a:lnSpc>
-              <a:buNone/>
-            </a:pPr>
-            <a:r>
-              <a:rPr lang="en-US" sz="1600" b="1" dirty="0">
-                <a:solidFill>
-                  <a:srgbClr val="595959"/>
-                </a:solidFill>
-                <a:latin typeface="メイリオ" pitchFamily="34" charset="0"/>
-                <a:ea typeface="メイリオ" pitchFamily="34" charset="-122"/>
-                <a:cs typeface="メイリオ" pitchFamily="34" charset="-120"/>
-              </a:rPr>
-              <a:t>積み重ねていた。</a:t>
-            </a:r>
-            <a:endParaRPr lang="en-US" sz="1600" dirty="0"/>
+              <a:t>「成長できる自分を信じること」である。</a:t>
+            </a:r>
+            <a:endParaRPr lang="en-US" sz="1700" dirty="0"/>
           </a:p>
         </p:txBody>
       </p:sp>
@@ -4582,7 +4447,7 @@
                 <a:ea typeface="メイリオ" pitchFamily="34" charset="-122"/>
                 <a:cs typeface="メイリオ" pitchFamily="34" charset="-120"/>
               </a:rPr>
-              <a:t>　②　対話・協働</a:t>
+              <a:t>　①　自己肯定感を育む授業</a:t>
             </a:r>
             <a:endParaRPr lang="en-US" sz="3000" dirty="0"/>
           </a:p>
@@ -4590,210 +4455,18 @@
       </p:sp>
       <p:sp>
         <p:nvSpPr>
-          <p:cNvPr id="3" name="Text 1"/>
-          <p:cNvSpPr txBox="1"/>
-          <p:nvPr/>
-        </p:nvSpPr>
-        <p:spPr>
-          <a:xfrm>
-            <a:off x="475488" y="1444752"/>
-            <a:ext cx="8193024" cy="868680"/>
-          </a:xfrm>
-          <a:prstGeom prst="rect">
-            <a:avLst/>
-          </a:prstGeom>
-          <a:noFill/>
-          <a:ln/>
-        </p:spPr>
-        <p:txBody>
-          <a:bodyPr wrap="square" lIns="0" tIns="0" rIns="0" bIns="0" rtlCol="0" anchor="t"/>
-          <a:lstStyle/>
-          <a:p>
-            <a:pPr algn="l" indent="0" marL="0">
-              <a:lnSpc>
-                <a:spcPct val="120000"/>
-              </a:lnSpc>
-              <a:buNone/>
-            </a:pPr>
-            <a:r>
-              <a:rPr lang="en-US" sz="2200" b="1" dirty="0">
-                <a:solidFill>
-                  <a:srgbClr val="595959"/>
-                </a:solidFill>
-                <a:latin typeface="メイリオ" pitchFamily="34" charset="0"/>
-                <a:ea typeface="メイリオ" pitchFamily="34" charset="-122"/>
-                <a:cs typeface="メイリオ" pitchFamily="34" charset="-120"/>
-              </a:rPr>
-              <a:t>本校の学力調査結果からは、</a:t>
-            </a:r>
-            <a:endParaRPr lang="en-US" sz="2200" dirty="0"/>
-          </a:p>
-          <a:p>
-            <a:pPr algn="l" indent="0" marL="0">
-              <a:lnSpc>
-                <a:spcPct val="120000"/>
-              </a:lnSpc>
-              <a:buNone/>
-            </a:pPr>
-            <a:r>
-              <a:rPr lang="en-US" sz="2200" b="1" dirty="0">
-                <a:solidFill>
-                  <a:srgbClr val="595959"/>
-                </a:solidFill>
-                <a:latin typeface="メイリオ" pitchFamily="34" charset="0"/>
-                <a:ea typeface="メイリオ" pitchFamily="34" charset="-122"/>
-                <a:cs typeface="メイリオ" pitchFamily="34" charset="-120"/>
-              </a:rPr>
-              <a:t>　</a:t>
-            </a:r>
-            <a:pPr algn="l" indent="0" marL="0">
-              <a:lnSpc>
-                <a:spcPct val="120000"/>
-              </a:lnSpc>
-              <a:buNone/>
-            </a:pPr>
-            <a:r>
-              <a:rPr lang="en-US" sz="2200" b="1" dirty="0">
-                <a:solidFill>
-                  <a:srgbClr val="EE7B08"/>
-                </a:solidFill>
-                <a:latin typeface="メイリオ" pitchFamily="34" charset="0"/>
-                <a:ea typeface="メイリオ" pitchFamily="34" charset="-122"/>
-                <a:cs typeface="メイリオ" pitchFamily="34" charset="-120"/>
-              </a:rPr>
-              <a:t>主体的な学びの土台</a:t>
-            </a:r>
-            <a:pPr algn="l" indent="0" marL="0">
-              <a:lnSpc>
-                <a:spcPct val="120000"/>
-              </a:lnSpc>
-              <a:buNone/>
-            </a:pPr>
-            <a:r>
-              <a:rPr lang="en-US" sz="2200" b="1" dirty="0">
-                <a:solidFill>
-                  <a:srgbClr val="595959"/>
-                </a:solidFill>
-                <a:latin typeface="メイリオ" pitchFamily="34" charset="0"/>
-                <a:ea typeface="メイリオ" pitchFamily="34" charset="-122"/>
-                <a:cs typeface="メイリオ" pitchFamily="34" charset="-120"/>
-              </a:rPr>
-              <a:t>が形成されていることが分かる。</a:t>
-            </a:r>
-            <a:endParaRPr lang="en-US" sz="2200" dirty="0"/>
-          </a:p>
-        </p:txBody>
-      </p:sp>
-      <p:sp>
-        <p:nvSpPr>
-          <p:cNvPr id="4" name="Text 2"/>
-          <p:cNvSpPr txBox="1"/>
-          <p:nvPr/>
-        </p:nvSpPr>
-        <p:spPr>
-          <a:xfrm>
-            <a:off x="475488" y="2514600"/>
-            <a:ext cx="8193024" cy="868680"/>
-          </a:xfrm>
-          <a:prstGeom prst="rect">
-            <a:avLst/>
-          </a:prstGeom>
-          <a:noFill/>
-          <a:ln/>
-        </p:spPr>
-        <p:txBody>
-          <a:bodyPr wrap="square" lIns="0" tIns="0" rIns="0" bIns="0" rtlCol="0" anchor="t"/>
-          <a:lstStyle/>
-          <a:p>
-            <a:pPr algn="l" indent="0" marL="0">
-              <a:lnSpc>
-                <a:spcPct val="120000"/>
-              </a:lnSpc>
-              <a:buNone/>
-            </a:pPr>
-            <a:r>
-              <a:rPr lang="en-US" sz="2200" b="1" dirty="0">
-                <a:solidFill>
-                  <a:srgbClr val="595959"/>
-                </a:solidFill>
-                <a:latin typeface="メイリオ" pitchFamily="34" charset="0"/>
-                <a:ea typeface="メイリオ" pitchFamily="34" charset="-122"/>
-                <a:cs typeface="メイリオ" pitchFamily="34" charset="-120"/>
-              </a:rPr>
-              <a:t>その背景にあるのは、日常的に行われている</a:t>
-            </a:r>
-            <a:endParaRPr lang="en-US" sz="2200" dirty="0"/>
-          </a:p>
-          <a:p>
-            <a:pPr algn="l" indent="0" marL="0">
-              <a:lnSpc>
-                <a:spcPct val="120000"/>
-              </a:lnSpc>
-              <a:buNone/>
-            </a:pPr>
-            <a:r>
-              <a:rPr lang="en-US" sz="2200" b="1" dirty="0">
-                <a:solidFill>
-                  <a:srgbClr val="595959"/>
-                </a:solidFill>
-                <a:latin typeface="メイリオ" pitchFamily="34" charset="0"/>
-                <a:ea typeface="メイリオ" pitchFamily="34" charset="-122"/>
-                <a:cs typeface="メイリオ" pitchFamily="34" charset="-120"/>
-              </a:rPr>
-              <a:t>　</a:t>
-            </a:r>
-            <a:pPr algn="l" indent="0" marL="0">
-              <a:lnSpc>
-                <a:spcPct val="120000"/>
-              </a:lnSpc>
-              <a:buNone/>
-            </a:pPr>
-            <a:r>
-              <a:rPr lang="en-US" sz="2200" b="1" dirty="0">
-                <a:solidFill>
-                  <a:srgbClr val="EE7B08"/>
-                </a:solidFill>
-                <a:latin typeface="メイリオ" pitchFamily="34" charset="0"/>
-                <a:ea typeface="メイリオ" pitchFamily="34" charset="-122"/>
-                <a:cs typeface="メイリオ" pitchFamily="34" charset="-120"/>
-              </a:rPr>
-              <a:t>「対話を通した学び」</a:t>
-            </a:r>
-            <a:pPr algn="l" indent="0" marL="0">
-              <a:lnSpc>
-                <a:spcPct val="120000"/>
-              </a:lnSpc>
-              <a:buNone/>
-            </a:pPr>
-            <a:r>
-              <a:rPr lang="en-US" sz="2200" b="1" dirty="0">
-                <a:solidFill>
-                  <a:srgbClr val="595959"/>
-                </a:solidFill>
-                <a:latin typeface="メイリオ" pitchFamily="34" charset="0"/>
-                <a:ea typeface="メイリオ" pitchFamily="34" charset="-122"/>
-                <a:cs typeface="メイリオ" pitchFamily="34" charset="-120"/>
-              </a:rPr>
-              <a:t>である。</a:t>
-            </a:r>
-            <a:endParaRPr lang="en-US" sz="2200" dirty="0"/>
-          </a:p>
-        </p:txBody>
-      </p:sp>
-      <p:sp>
-        <p:nvSpPr>
-          <p:cNvPr id="5" name="Shape 3"/>
+          <p:cNvPr id="3" name="Shape 1"/>
           <p:cNvSpPr/>
           <p:nvPr/>
         </p:nvSpPr>
         <p:spPr>
           <a:xfrm>
-            <a:off x="475488" y="3611880"/>
-            <a:ext cx="8193024" cy="822960"/>
+            <a:off x="320040" y="1417320"/>
+            <a:ext cx="2697480" cy="2395728"/>
           </a:xfrm>
           <a:prstGeom prst="roundRect">
             <a:avLst>
-              <a:gd name="adj" fmla="val 6667"/>
+              <a:gd name="adj" fmla="val 2290"/>
             </a:avLst>
           </a:prstGeom>
           <a:solidFill>
@@ -4809,14 +4482,261 @@
       </p:sp>
       <p:sp>
         <p:nvSpPr>
+          <p:cNvPr id="4" name="Text 2"/>
+          <p:cNvSpPr txBox="1"/>
+          <p:nvPr/>
+        </p:nvSpPr>
+        <p:spPr>
+          <a:xfrm>
+            <a:off x="466344" y="1527048"/>
+            <a:ext cx="2404872" cy="274320"/>
+          </a:xfrm>
+          <a:prstGeom prst="rect">
+            <a:avLst/>
+          </a:prstGeom>
+          <a:noFill/>
+          <a:ln/>
+        </p:spPr>
+        <p:txBody>
+          <a:bodyPr wrap="square" lIns="0" tIns="0" rIns="0" bIns="0" rtlCol="0" anchor="ctr"/>
+          <a:lstStyle/>
+          <a:p>
+            <a:pPr algn="l" indent="0" marL="0">
+              <a:buNone/>
+            </a:pPr>
+            <a:r>
+              <a:rPr lang="en-US" sz="1600" b="1" dirty="0">
+                <a:solidFill>
+                  <a:srgbClr val="44C1A3"/>
+                </a:solidFill>
+                <a:latin typeface="メイリオ" pitchFamily="34" charset="0"/>
+                <a:ea typeface="メイリオ" pitchFamily="34" charset="-122"/>
+                <a:cs typeface="メイリオ" pitchFamily="34" charset="-120"/>
+              </a:rPr>
+              <a:t>田口　和磨　先生</a:t>
+            </a:r>
+            <a:endParaRPr lang="en-US" sz="1600" dirty="0"/>
+          </a:p>
+        </p:txBody>
+      </p:sp>
+      <p:sp>
+        <p:nvSpPr>
+          <p:cNvPr id="5" name="Text 3"/>
+          <p:cNvSpPr txBox="1"/>
+          <p:nvPr/>
+        </p:nvSpPr>
+        <p:spPr>
+          <a:xfrm>
+            <a:off x="466344" y="1801368"/>
+            <a:ext cx="2404872" cy="237744"/>
+          </a:xfrm>
+          <a:prstGeom prst="rect">
+            <a:avLst/>
+          </a:prstGeom>
+          <a:noFill/>
+          <a:ln/>
+        </p:spPr>
+        <p:txBody>
+          <a:bodyPr wrap="square" lIns="0" tIns="0" rIns="0" bIns="0" rtlCol="0" anchor="ctr"/>
+          <a:lstStyle/>
+          <a:p>
+            <a:pPr algn="l" indent="0" marL="0">
+              <a:buNone/>
+            </a:pPr>
+            <a:r>
+              <a:rPr lang="en-US" sz="1100" b="1" dirty="0">
+                <a:solidFill>
+                  <a:srgbClr val="808080"/>
+                </a:solidFill>
+                <a:latin typeface="メイリオ" pitchFamily="34" charset="0"/>
+                <a:ea typeface="メイリオ" pitchFamily="34" charset="-122"/>
+                <a:cs typeface="メイリオ" pitchFamily="34" charset="-120"/>
+              </a:rPr>
+              <a:t>保健体育・９年ＡＢ組／水泳</a:t>
+            </a:r>
+            <a:endParaRPr lang="en-US" sz="1100" dirty="0"/>
+          </a:p>
+        </p:txBody>
+      </p:sp>
+      <p:sp>
+        <p:nvSpPr>
           <p:cNvPr id="6" name="Text 4"/>
           <p:cNvSpPr txBox="1"/>
           <p:nvPr/>
         </p:nvSpPr>
         <p:spPr>
           <a:xfrm>
-            <a:off x="731520" y="3611880"/>
-            <a:ext cx="7680960" cy="822960"/>
+            <a:off x="466344" y="2075688"/>
+            <a:ext cx="2404872" cy="1609344"/>
+          </a:xfrm>
+          <a:prstGeom prst="rect">
+            <a:avLst/>
+          </a:prstGeom>
+          <a:noFill/>
+          <a:ln/>
+        </p:spPr>
+        <p:txBody>
+          <a:bodyPr wrap="square" lIns="0" tIns="0" rIns="0" bIns="0" rtlCol="0" anchor="t"/>
+          <a:lstStyle/>
+          <a:p>
+            <a:pPr algn="l" indent="0" marL="0">
+              <a:lnSpc>
+                <a:spcPct val="125000"/>
+              </a:lnSpc>
+              <a:buNone/>
+            </a:pPr>
+            <a:r>
+              <a:rPr lang="en-US" sz="1350" b="1" dirty="0">
+                <a:solidFill>
+                  <a:srgbClr val="595959"/>
+                </a:solidFill>
+                <a:latin typeface="メイリオ" pitchFamily="34" charset="0"/>
+                <a:ea typeface="メイリオ" pitchFamily="34" charset="-122"/>
+                <a:cs typeface="メイリオ" pitchFamily="34" charset="-120"/>
+              </a:rPr>
+              <a:t>泳力差の大きい集団に</a:t>
+            </a:r>
+            <a:endParaRPr lang="en-US" sz="1350" dirty="0"/>
+          </a:p>
+          <a:p>
+            <a:pPr algn="l" indent="0" marL="0">
+              <a:lnSpc>
+                <a:spcPct val="125000"/>
+              </a:lnSpc>
+              <a:buNone/>
+            </a:pPr>
+            <a:r>
+              <a:rPr lang="en-US" sz="1350" b="1" dirty="0">
+                <a:solidFill>
+                  <a:srgbClr val="EE7B08"/>
+                </a:solidFill>
+                <a:latin typeface="メイリオ" pitchFamily="34" charset="0"/>
+                <a:ea typeface="メイリオ" pitchFamily="34" charset="-122"/>
+                <a:cs typeface="メイリオ" pitchFamily="34" charset="-120"/>
+              </a:rPr>
+              <a:t>・段階的な課題設定</a:t>
+            </a:r>
+            <a:endParaRPr lang="en-US" sz="1350" dirty="0"/>
+          </a:p>
+          <a:p>
+            <a:pPr algn="l" indent="0" marL="0">
+              <a:lnSpc>
+                <a:spcPct val="125000"/>
+              </a:lnSpc>
+              <a:buNone/>
+            </a:pPr>
+            <a:r>
+              <a:rPr lang="en-US" sz="1350" b="1" dirty="0">
+                <a:solidFill>
+                  <a:srgbClr val="EE7B08"/>
+                </a:solidFill>
+                <a:latin typeface="メイリオ" pitchFamily="34" charset="0"/>
+                <a:ea typeface="メイリオ" pitchFamily="34" charset="-122"/>
+                <a:cs typeface="メイリオ" pitchFamily="34" charset="-120"/>
+              </a:rPr>
+              <a:t>・泳力別のコース編成</a:t>
+            </a:r>
+            <a:endParaRPr lang="en-US" sz="1350" dirty="0"/>
+          </a:p>
+          <a:p>
+            <a:pPr algn="l" indent="0" marL="0">
+              <a:lnSpc>
+                <a:spcPct val="125000"/>
+              </a:lnSpc>
+              <a:buNone/>
+            </a:pPr>
+            <a:r>
+              <a:rPr lang="en-US" sz="1350" b="1" dirty="0">
+                <a:solidFill>
+                  <a:srgbClr val="EE7B08"/>
+                </a:solidFill>
+                <a:latin typeface="メイリオ" pitchFamily="34" charset="0"/>
+                <a:ea typeface="メイリオ" pitchFamily="34" charset="-122"/>
+                <a:cs typeface="メイリオ" pitchFamily="34" charset="-120"/>
+              </a:rPr>
+              <a:t>・バディでの確認活動</a:t>
+            </a:r>
+            <a:endParaRPr lang="en-US" sz="1350" dirty="0"/>
+          </a:p>
+          <a:p>
+            <a:pPr algn="l" indent="0" marL="0">
+              <a:lnSpc>
+                <a:spcPct val="125000"/>
+              </a:lnSpc>
+              <a:buNone/>
+            </a:pPr>
+            <a:r>
+              <a:rPr lang="en-US" sz="1350" b="1" dirty="0">
+                <a:solidFill>
+                  <a:srgbClr val="595959"/>
+                </a:solidFill>
+                <a:latin typeface="メイリオ" pitchFamily="34" charset="0"/>
+                <a:ea typeface="メイリオ" pitchFamily="34" charset="-122"/>
+                <a:cs typeface="メイリオ" pitchFamily="34" charset="-120"/>
+              </a:rPr>
+              <a:t>確認の視点を３点示し、</a:t>
+            </a:r>
+            <a:endParaRPr lang="en-US" sz="1350" dirty="0"/>
+          </a:p>
+          <a:p>
+            <a:pPr algn="l" indent="0" marL="0">
+              <a:lnSpc>
+                <a:spcPct val="125000"/>
+              </a:lnSpc>
+              <a:buNone/>
+            </a:pPr>
+            <a:r>
+              <a:rPr lang="en-US" sz="1350" b="1" dirty="0">
+                <a:solidFill>
+                  <a:srgbClr val="595959"/>
+                </a:solidFill>
+                <a:latin typeface="メイリオ" pitchFamily="34" charset="0"/>
+                <a:ea typeface="メイリオ" pitchFamily="34" charset="-122"/>
+                <a:cs typeface="メイリオ" pitchFamily="34" charset="-120"/>
+              </a:rPr>
+              <a:t>見る目を育てていた。</a:t>
+            </a:r>
+            <a:endParaRPr lang="en-US" sz="1350" dirty="0"/>
+          </a:p>
+        </p:txBody>
+      </p:sp>
+      <p:sp>
+        <p:nvSpPr>
+          <p:cNvPr id="7" name="Shape 5"/>
+          <p:cNvSpPr/>
+          <p:nvPr/>
+        </p:nvSpPr>
+        <p:spPr>
+          <a:xfrm>
+            <a:off x="3227832" y="1417320"/>
+            <a:ext cx="2697480" cy="2395728"/>
+          </a:xfrm>
+          <a:prstGeom prst="roundRect">
+            <a:avLst>
+              <a:gd name="adj" fmla="val 2290"/>
+            </a:avLst>
+          </a:prstGeom>
+          <a:solidFill>
+            <a:srgbClr val="E9F7F3"/>
+          </a:solidFill>
+          <a:ln w="12700">
+            <a:solidFill>
+              <a:srgbClr val="B9E5DA"/>
+            </a:solidFill>
+            <a:prstDash val="solid"/>
+          </a:ln>
+        </p:spPr>
+      </p:sp>
+      <p:sp>
+        <p:nvSpPr>
+          <p:cNvPr id="8" name="Text 6"/>
+          <p:cNvSpPr txBox="1"/>
+          <p:nvPr/>
+        </p:nvSpPr>
+        <p:spPr>
+          <a:xfrm>
+            <a:off x="3374136" y="1527048"/>
+            <a:ext cx="2404872" cy="274320"/>
           </a:xfrm>
           <a:prstGeom prst="rect">
             <a:avLst/>
@@ -4834,13 +4754,537 @@
             <a:r>
               <a:rPr lang="en-US" sz="1600" b="1" dirty="0">
                 <a:solidFill>
+                  <a:srgbClr val="44C1A3"/>
+                </a:solidFill>
+                <a:latin typeface="メイリオ" pitchFamily="34" charset="0"/>
+                <a:ea typeface="メイリオ" pitchFamily="34" charset="-122"/>
+                <a:cs typeface="メイリオ" pitchFamily="34" charset="-120"/>
+              </a:rPr>
+              <a:t>東海林　静江　先生</a:t>
+            </a:r>
+            <a:endParaRPr lang="en-US" sz="1600" dirty="0"/>
+          </a:p>
+        </p:txBody>
+      </p:sp>
+      <p:sp>
+        <p:nvSpPr>
+          <p:cNvPr id="9" name="Text 7"/>
+          <p:cNvSpPr txBox="1"/>
+          <p:nvPr/>
+        </p:nvSpPr>
+        <p:spPr>
+          <a:xfrm>
+            <a:off x="3374136" y="1801368"/>
+            <a:ext cx="2404872" cy="237744"/>
+          </a:xfrm>
+          <a:prstGeom prst="rect">
+            <a:avLst/>
+          </a:prstGeom>
+          <a:noFill/>
+          <a:ln/>
+        </p:spPr>
+        <p:txBody>
+          <a:bodyPr wrap="square" lIns="0" tIns="0" rIns="0" bIns="0" rtlCol="0" anchor="ctr"/>
+          <a:lstStyle/>
+          <a:p>
+            <a:pPr algn="l" indent="0" marL="0">
+              <a:buNone/>
+            </a:pPr>
+            <a:r>
+              <a:rPr lang="en-US" sz="1100" b="1" dirty="0">
+                <a:solidFill>
+                  <a:srgbClr val="808080"/>
+                </a:solidFill>
+                <a:latin typeface="メイリオ" pitchFamily="34" charset="0"/>
+                <a:ea typeface="メイリオ" pitchFamily="34" charset="-122"/>
+                <a:cs typeface="メイリオ" pitchFamily="34" charset="-120"/>
+              </a:rPr>
+              <a:t>道徳・特別支援学級Ｄ組／うそ</a:t>
+            </a:r>
+            <a:endParaRPr lang="en-US" sz="1100" dirty="0"/>
+          </a:p>
+        </p:txBody>
+      </p:sp>
+      <p:sp>
+        <p:nvSpPr>
+          <p:cNvPr id="10" name="Text 8"/>
+          <p:cNvSpPr txBox="1"/>
+          <p:nvPr/>
+        </p:nvSpPr>
+        <p:spPr>
+          <a:xfrm>
+            <a:off x="3374136" y="2075688"/>
+            <a:ext cx="2404872" cy="1609344"/>
+          </a:xfrm>
+          <a:prstGeom prst="rect">
+            <a:avLst/>
+          </a:prstGeom>
+          <a:noFill/>
+          <a:ln/>
+        </p:spPr>
+        <p:txBody>
+          <a:bodyPr wrap="square" lIns="0" tIns="0" rIns="0" bIns="0" rtlCol="0" anchor="t"/>
+          <a:lstStyle/>
+          <a:p>
+            <a:pPr algn="l" indent="0" marL="0">
+              <a:lnSpc>
+                <a:spcPct val="125000"/>
+              </a:lnSpc>
+              <a:buNone/>
+            </a:pPr>
+            <a:r>
+              <a:rPr lang="en-US" sz="1350" b="1" dirty="0">
+                <a:solidFill>
                   <a:srgbClr val="595959"/>
                 </a:solidFill>
                 <a:latin typeface="メイリオ" pitchFamily="34" charset="0"/>
                 <a:ea typeface="メイリオ" pitchFamily="34" charset="-122"/>
                 <a:cs typeface="メイリオ" pitchFamily="34" charset="-120"/>
               </a:rPr>
-              <a:t>本日の３つの授業にも、対話が学びを深める場面が表れていた。</a:t>
+              <a:t>安心して自分の考えを</a:t>
+            </a:r>
+            <a:endParaRPr lang="en-US" sz="1350" dirty="0"/>
+          </a:p>
+          <a:p>
+            <a:pPr algn="l" indent="0" marL="0">
+              <a:lnSpc>
+                <a:spcPct val="125000"/>
+              </a:lnSpc>
+              <a:buNone/>
+            </a:pPr>
+            <a:r>
+              <a:rPr lang="en-US" sz="1350" b="1" dirty="0">
+                <a:solidFill>
+                  <a:srgbClr val="EE7B08"/>
+                </a:solidFill>
+                <a:latin typeface="メイリオ" pitchFamily="34" charset="0"/>
+                <a:ea typeface="メイリオ" pitchFamily="34" charset="-122"/>
+                <a:cs typeface="メイリオ" pitchFamily="34" charset="-120"/>
+              </a:rPr>
+              <a:t>表現できる環境</a:t>
+            </a:r>
+            <a:endParaRPr lang="en-US" sz="1350" dirty="0"/>
+          </a:p>
+          <a:p>
+            <a:pPr algn="l" indent="0" marL="0">
+              <a:lnSpc>
+                <a:spcPct val="125000"/>
+              </a:lnSpc>
+              <a:buNone/>
+            </a:pPr>
+            <a:r>
+              <a:rPr lang="en-US" sz="1350" b="1" dirty="0">
+                <a:solidFill>
+                  <a:srgbClr val="595959"/>
+                </a:solidFill>
+                <a:latin typeface="メイリオ" pitchFamily="34" charset="0"/>
+                <a:ea typeface="メイリオ" pitchFamily="34" charset="-122"/>
+                <a:cs typeface="メイリオ" pitchFamily="34" charset="-120"/>
+              </a:rPr>
+              <a:t>・前時の考えを尊重</a:t>
+            </a:r>
+            <a:endParaRPr lang="en-US" sz="1350" dirty="0"/>
+          </a:p>
+          <a:p>
+            <a:pPr algn="l" indent="0" marL="0">
+              <a:lnSpc>
+                <a:spcPct val="125000"/>
+              </a:lnSpc>
+              <a:buNone/>
+            </a:pPr>
+            <a:r>
+              <a:rPr lang="en-US" sz="1350" b="1" dirty="0">
+                <a:solidFill>
+                  <a:srgbClr val="EE7B08"/>
+                </a:solidFill>
+                <a:latin typeface="メイリオ" pitchFamily="34" charset="0"/>
+                <a:ea typeface="メイリオ" pitchFamily="34" charset="-122"/>
+                <a:cs typeface="メイリオ" pitchFamily="34" charset="-120"/>
+              </a:rPr>
+              <a:t>・意見が変わってよい</a:t>
+            </a:r>
+            <a:endParaRPr lang="en-US" sz="1350" dirty="0"/>
+          </a:p>
+          <a:p>
+            <a:pPr algn="l" indent="0" marL="0">
+              <a:lnSpc>
+                <a:spcPct val="125000"/>
+              </a:lnSpc>
+              <a:buNone/>
+            </a:pPr>
+            <a:r>
+              <a:rPr lang="en-US" sz="1350" b="1" dirty="0">
+                <a:solidFill>
+                  <a:srgbClr val="595959"/>
+                </a:solidFill>
+                <a:latin typeface="メイリオ" pitchFamily="34" charset="0"/>
+                <a:ea typeface="メイリオ" pitchFamily="34" charset="-122"/>
+                <a:cs typeface="メイリオ" pitchFamily="34" charset="-120"/>
+              </a:rPr>
+              <a:t>答えは一つではないと</a:t>
+            </a:r>
+            <a:endParaRPr lang="en-US" sz="1350" dirty="0"/>
+          </a:p>
+          <a:p>
+            <a:pPr algn="l" indent="0" marL="0">
+              <a:lnSpc>
+                <a:spcPct val="125000"/>
+              </a:lnSpc>
+              <a:buNone/>
+            </a:pPr>
+            <a:r>
+              <a:rPr lang="en-US" sz="1350" b="1" dirty="0">
+                <a:solidFill>
+                  <a:srgbClr val="595959"/>
+                </a:solidFill>
+                <a:latin typeface="メイリオ" pitchFamily="34" charset="0"/>
+                <a:ea typeface="メイリオ" pitchFamily="34" charset="-122"/>
+                <a:cs typeface="メイリオ" pitchFamily="34" charset="-120"/>
+              </a:rPr>
+              <a:t>保障されていた。</a:t>
+            </a:r>
+            <a:endParaRPr lang="en-US" sz="1350" dirty="0"/>
+          </a:p>
+        </p:txBody>
+      </p:sp>
+      <p:sp>
+        <p:nvSpPr>
+          <p:cNvPr id="11" name="Shape 9"/>
+          <p:cNvSpPr/>
+          <p:nvPr/>
+        </p:nvSpPr>
+        <p:spPr>
+          <a:xfrm>
+            <a:off x="6135624" y="1417320"/>
+            <a:ext cx="2697480" cy="2395728"/>
+          </a:xfrm>
+          <a:prstGeom prst="roundRect">
+            <a:avLst>
+              <a:gd name="adj" fmla="val 2290"/>
+            </a:avLst>
+          </a:prstGeom>
+          <a:solidFill>
+            <a:srgbClr val="E9F7F3"/>
+          </a:solidFill>
+          <a:ln w="12700">
+            <a:solidFill>
+              <a:srgbClr val="B9E5DA"/>
+            </a:solidFill>
+            <a:prstDash val="solid"/>
+          </a:ln>
+        </p:spPr>
+      </p:sp>
+      <p:sp>
+        <p:nvSpPr>
+          <p:cNvPr id="12" name="Text 10"/>
+          <p:cNvSpPr txBox="1"/>
+          <p:nvPr/>
+        </p:nvSpPr>
+        <p:spPr>
+          <a:xfrm>
+            <a:off x="6281928" y="1527048"/>
+            <a:ext cx="2404872" cy="274320"/>
+          </a:xfrm>
+          <a:prstGeom prst="rect">
+            <a:avLst/>
+          </a:prstGeom>
+          <a:noFill/>
+          <a:ln/>
+        </p:spPr>
+        <p:txBody>
+          <a:bodyPr wrap="square" lIns="0" tIns="0" rIns="0" bIns="0" rtlCol="0" anchor="ctr"/>
+          <a:lstStyle/>
+          <a:p>
+            <a:pPr algn="l" indent="0" marL="0">
+              <a:buNone/>
+            </a:pPr>
+            <a:r>
+              <a:rPr lang="en-US" sz="1600" b="1" dirty="0">
+                <a:solidFill>
+                  <a:srgbClr val="44C1A3"/>
+                </a:solidFill>
+                <a:latin typeface="メイリオ" pitchFamily="34" charset="0"/>
+                <a:ea typeface="メイリオ" pitchFamily="34" charset="-122"/>
+                <a:cs typeface="メイリオ" pitchFamily="34" charset="-120"/>
+              </a:rPr>
+              <a:t>塚本　瑞穂　先生</a:t>
+            </a:r>
+            <a:endParaRPr lang="en-US" sz="1600" dirty="0"/>
+          </a:p>
+        </p:txBody>
+      </p:sp>
+      <p:sp>
+        <p:nvSpPr>
+          <p:cNvPr id="13" name="Text 11"/>
+          <p:cNvSpPr txBox="1"/>
+          <p:nvPr/>
+        </p:nvSpPr>
+        <p:spPr>
+          <a:xfrm>
+            <a:off x="6281928" y="1801368"/>
+            <a:ext cx="2404872" cy="237744"/>
+          </a:xfrm>
+          <a:prstGeom prst="rect">
+            <a:avLst/>
+          </a:prstGeom>
+          <a:noFill/>
+          <a:ln/>
+        </p:spPr>
+        <p:txBody>
+          <a:bodyPr wrap="square" lIns="0" tIns="0" rIns="0" bIns="0" rtlCol="0" anchor="ctr"/>
+          <a:lstStyle/>
+          <a:p>
+            <a:pPr algn="l" indent="0" marL="0">
+              <a:buNone/>
+            </a:pPr>
+            <a:r>
+              <a:rPr lang="en-US" sz="1100" b="1" dirty="0">
+                <a:solidFill>
+                  <a:srgbClr val="808080"/>
+                </a:solidFill>
+                <a:latin typeface="メイリオ" pitchFamily="34" charset="0"/>
+                <a:ea typeface="メイリオ" pitchFamily="34" charset="-122"/>
+                <a:cs typeface="メイリオ" pitchFamily="34" charset="-120"/>
+              </a:rPr>
+              <a:t>外国語・７年Ｂ組／Unit 4</a:t>
+            </a:r>
+            <a:endParaRPr lang="en-US" sz="1100" dirty="0"/>
+          </a:p>
+        </p:txBody>
+      </p:sp>
+      <p:sp>
+        <p:nvSpPr>
+          <p:cNvPr id="14" name="Text 12"/>
+          <p:cNvSpPr txBox="1"/>
+          <p:nvPr/>
+        </p:nvSpPr>
+        <p:spPr>
+          <a:xfrm>
+            <a:off x="6281928" y="2075688"/>
+            <a:ext cx="2404872" cy="1609344"/>
+          </a:xfrm>
+          <a:prstGeom prst="rect">
+            <a:avLst/>
+          </a:prstGeom>
+          <a:noFill/>
+          <a:ln/>
+        </p:spPr>
+        <p:txBody>
+          <a:bodyPr wrap="square" lIns="0" tIns="0" rIns="0" bIns="0" rtlCol="0" anchor="t"/>
+          <a:lstStyle/>
+          <a:p>
+            <a:pPr algn="l" indent="0" marL="0">
+              <a:lnSpc>
+                <a:spcPct val="125000"/>
+              </a:lnSpc>
+              <a:buNone/>
+            </a:pPr>
+            <a:r>
+              <a:rPr lang="en-US" sz="1350" b="1" dirty="0">
+                <a:solidFill>
+                  <a:srgbClr val="595959"/>
+                </a:solidFill>
+                <a:latin typeface="メイリオ" pitchFamily="34" charset="0"/>
+                <a:ea typeface="メイリオ" pitchFamily="34" charset="-122"/>
+                <a:cs typeface="メイリオ" pitchFamily="34" charset="-120"/>
+              </a:rPr>
+              <a:t>習熟度差の大きい学級で</a:t>
+            </a:r>
+            <a:endParaRPr lang="en-US" sz="1350" dirty="0"/>
+          </a:p>
+          <a:p>
+            <a:pPr algn="l" indent="0" marL="0">
+              <a:lnSpc>
+                <a:spcPct val="125000"/>
+              </a:lnSpc>
+              <a:buNone/>
+            </a:pPr>
+            <a:r>
+              <a:rPr lang="en-US" sz="1350" b="1" dirty="0">
+                <a:solidFill>
+                  <a:srgbClr val="EE7B08"/>
+                </a:solidFill>
+                <a:latin typeface="メイリオ" pitchFamily="34" charset="0"/>
+                <a:ea typeface="メイリオ" pitchFamily="34" charset="-122"/>
+                <a:cs typeface="メイリオ" pitchFamily="34" charset="-120"/>
+              </a:rPr>
+              <a:t>・発表前にペアで共有</a:t>
+            </a:r>
+            <a:endParaRPr lang="en-US" sz="1350" dirty="0"/>
+          </a:p>
+          <a:p>
+            <a:pPr algn="l" indent="0" marL="0">
+              <a:lnSpc>
+                <a:spcPct val="125000"/>
+              </a:lnSpc>
+              <a:buNone/>
+            </a:pPr>
+            <a:r>
+              <a:rPr lang="en-US" sz="1350" b="1" dirty="0">
+                <a:solidFill>
+                  <a:srgbClr val="EE7B08"/>
+                </a:solidFill>
+                <a:latin typeface="メイリオ" pitchFamily="34" charset="0"/>
+                <a:ea typeface="メイリオ" pitchFamily="34" charset="-122"/>
+                <a:cs typeface="メイリオ" pitchFamily="34" charset="-120"/>
+              </a:rPr>
+              <a:t>・全員に発話の機会</a:t>
+            </a:r>
+            <a:endParaRPr lang="en-US" sz="1350" dirty="0"/>
+          </a:p>
+          <a:p>
+            <a:pPr algn="l" indent="0" marL="0">
+              <a:lnSpc>
+                <a:spcPct val="125000"/>
+              </a:lnSpc>
+              <a:buNone/>
+            </a:pPr>
+            <a:r>
+              <a:rPr lang="en-US" sz="1350" b="1" dirty="0">
+                <a:solidFill>
+                  <a:srgbClr val="595959"/>
+                </a:solidFill>
+                <a:latin typeface="メイリオ" pitchFamily="34" charset="0"/>
+                <a:ea typeface="メイリオ" pitchFamily="34" charset="-122"/>
+                <a:cs typeface="メイリオ" pitchFamily="34" charset="-120"/>
+              </a:rPr>
+              <a:t>不安を減らし、誰もが</a:t>
+            </a:r>
+            <a:endParaRPr lang="en-US" sz="1350" dirty="0"/>
+          </a:p>
+          <a:p>
+            <a:pPr algn="l" indent="0" marL="0">
+              <a:lnSpc>
+                <a:spcPct val="125000"/>
+              </a:lnSpc>
+              <a:buNone/>
+            </a:pPr>
+            <a:r>
+              <a:rPr lang="en-US" sz="1350" b="1" dirty="0">
+                <a:solidFill>
+                  <a:srgbClr val="595959"/>
+                </a:solidFill>
+                <a:latin typeface="メイリオ" pitchFamily="34" charset="0"/>
+                <a:ea typeface="メイリオ" pitchFamily="34" charset="-122"/>
+                <a:cs typeface="メイリオ" pitchFamily="34" charset="-120"/>
+              </a:rPr>
+              <a:t>参加できる場をつくって</a:t>
+            </a:r>
+            <a:endParaRPr lang="en-US" sz="1350" dirty="0"/>
+          </a:p>
+          <a:p>
+            <a:pPr algn="l" indent="0" marL="0">
+              <a:lnSpc>
+                <a:spcPct val="125000"/>
+              </a:lnSpc>
+              <a:buNone/>
+            </a:pPr>
+            <a:r>
+              <a:rPr lang="en-US" sz="1350" b="1" dirty="0">
+                <a:solidFill>
+                  <a:srgbClr val="595959"/>
+                </a:solidFill>
+                <a:latin typeface="メイリオ" pitchFamily="34" charset="0"/>
+                <a:ea typeface="メイリオ" pitchFamily="34" charset="-122"/>
+                <a:cs typeface="メイリオ" pitchFamily="34" charset="-120"/>
+              </a:rPr>
+              <a:t>いた。</a:t>
+            </a:r>
+            <a:endParaRPr lang="en-US" sz="1350" dirty="0"/>
+          </a:p>
+        </p:txBody>
+      </p:sp>
+      <p:sp>
+        <p:nvSpPr>
+          <p:cNvPr id="15" name="Text 13"/>
+          <p:cNvSpPr txBox="1"/>
+          <p:nvPr/>
+        </p:nvSpPr>
+        <p:spPr>
+          <a:xfrm>
+            <a:off x="320040" y="3977640"/>
+            <a:ext cx="8503920" cy="822960"/>
+          </a:xfrm>
+          <a:prstGeom prst="rect">
+            <a:avLst/>
+          </a:prstGeom>
+          <a:noFill/>
+          <a:ln/>
+        </p:spPr>
+        <p:txBody>
+          <a:bodyPr wrap="square" lIns="0" tIns="0" rIns="0" bIns="0" rtlCol="0" anchor="t"/>
+          <a:lstStyle/>
+          <a:p>
+            <a:pPr algn="l" indent="0" marL="0">
+              <a:lnSpc>
+                <a:spcPct val="120000"/>
+              </a:lnSpc>
+              <a:buNone/>
+            </a:pPr>
+            <a:r>
+              <a:rPr lang="en-US" sz="1600" b="1" dirty="0">
+                <a:solidFill>
+                  <a:srgbClr val="595959"/>
+                </a:solidFill>
+                <a:latin typeface="メイリオ" pitchFamily="34" charset="0"/>
+                <a:ea typeface="メイリオ" pitchFamily="34" charset="-122"/>
+                <a:cs typeface="メイリオ" pitchFamily="34" charset="-120"/>
+              </a:rPr>
+              <a:t>子どもたちは「認められる」よりも、</a:t>
+            </a:r>
+            <a:pPr algn="l" indent="0" marL="0">
+              <a:lnSpc>
+                <a:spcPct val="120000"/>
+              </a:lnSpc>
+              <a:buNone/>
+            </a:pPr>
+            <a:r>
+              <a:rPr lang="en-US" sz="1600" b="1" dirty="0">
+                <a:solidFill>
+                  <a:srgbClr val="EE7B08"/>
+                </a:solidFill>
+                <a:latin typeface="メイリオ" pitchFamily="34" charset="0"/>
+                <a:ea typeface="メイリオ" pitchFamily="34" charset="-122"/>
+                <a:cs typeface="メイリオ" pitchFamily="34" charset="-120"/>
+              </a:rPr>
+              <a:t>「自分で成長を実感する」</a:t>
+            </a:r>
+            <a:pPr algn="l" indent="0" marL="0">
+              <a:lnSpc>
+                <a:spcPct val="120000"/>
+              </a:lnSpc>
+              <a:buNone/>
+            </a:pPr>
+            <a:r>
+              <a:rPr lang="en-US" sz="1600" b="1" dirty="0">
+                <a:solidFill>
+                  <a:srgbClr val="595959"/>
+                </a:solidFill>
+                <a:latin typeface="メイリオ" pitchFamily="34" charset="0"/>
+                <a:ea typeface="メイリオ" pitchFamily="34" charset="-122"/>
+                <a:cs typeface="メイリオ" pitchFamily="34" charset="-120"/>
+              </a:rPr>
+              <a:t>経験を</a:t>
+            </a:r>
+            <a:endParaRPr lang="en-US" sz="1600" dirty="0"/>
+          </a:p>
+          <a:p>
+            <a:pPr algn="l" indent="0" marL="0">
+              <a:lnSpc>
+                <a:spcPct val="120000"/>
+              </a:lnSpc>
+              <a:buNone/>
+            </a:pPr>
+            <a:r>
+              <a:rPr lang="en-US" sz="1600" b="1" dirty="0">
+                <a:solidFill>
+                  <a:srgbClr val="595959"/>
+                </a:solidFill>
+                <a:latin typeface="メイリオ" pitchFamily="34" charset="0"/>
+                <a:ea typeface="メイリオ" pitchFamily="34" charset="-122"/>
+                <a:cs typeface="メイリオ" pitchFamily="34" charset="-120"/>
+              </a:rPr>
+              <a:t>積み重ねていた。</a:t>
             </a:r>
             <a:endParaRPr lang="en-US" sz="1600" dirty="0"/>
           </a:p>
@@ -4929,7 +5373,7 @@
                 <a:ea typeface="メイリオ" pitchFamily="34" charset="-122"/>
                 <a:cs typeface="メイリオ" pitchFamily="34" charset="-120"/>
               </a:rPr>
-              <a:t>　②　対話によって学びは深まる</a:t>
+              <a:t>　②　対話・協働</a:t>
             </a:r>
             <a:endParaRPr lang="en-US" sz="3000" dirty="0"/>
           </a:p>
@@ -4937,18 +5381,210 @@
       </p:sp>
       <p:sp>
         <p:nvSpPr>
-          <p:cNvPr id="3" name="Shape 1"/>
+          <p:cNvPr id="3" name="Text 1"/>
+          <p:cNvSpPr txBox="1"/>
+          <p:nvPr/>
+        </p:nvSpPr>
+        <p:spPr>
+          <a:xfrm>
+            <a:off x="475488" y="1444752"/>
+            <a:ext cx="8193024" cy="868680"/>
+          </a:xfrm>
+          <a:prstGeom prst="rect">
+            <a:avLst/>
+          </a:prstGeom>
+          <a:noFill/>
+          <a:ln/>
+        </p:spPr>
+        <p:txBody>
+          <a:bodyPr wrap="square" lIns="0" tIns="0" rIns="0" bIns="0" rtlCol="0" anchor="t"/>
+          <a:lstStyle/>
+          <a:p>
+            <a:pPr algn="l" indent="0" marL="0">
+              <a:lnSpc>
+                <a:spcPct val="120000"/>
+              </a:lnSpc>
+              <a:buNone/>
+            </a:pPr>
+            <a:r>
+              <a:rPr lang="en-US" sz="2200" b="1" dirty="0">
+                <a:solidFill>
+                  <a:srgbClr val="595959"/>
+                </a:solidFill>
+                <a:latin typeface="メイリオ" pitchFamily="34" charset="0"/>
+                <a:ea typeface="メイリオ" pitchFamily="34" charset="-122"/>
+                <a:cs typeface="メイリオ" pitchFamily="34" charset="-120"/>
+              </a:rPr>
+              <a:t>本校の学力調査結果からは、</a:t>
+            </a:r>
+            <a:endParaRPr lang="en-US" sz="2200" dirty="0"/>
+          </a:p>
+          <a:p>
+            <a:pPr algn="l" indent="0" marL="0">
+              <a:lnSpc>
+                <a:spcPct val="120000"/>
+              </a:lnSpc>
+              <a:buNone/>
+            </a:pPr>
+            <a:r>
+              <a:rPr lang="en-US" sz="2200" b="1" dirty="0">
+                <a:solidFill>
+                  <a:srgbClr val="595959"/>
+                </a:solidFill>
+                <a:latin typeface="メイリオ" pitchFamily="34" charset="0"/>
+                <a:ea typeface="メイリオ" pitchFamily="34" charset="-122"/>
+                <a:cs typeface="メイリオ" pitchFamily="34" charset="-120"/>
+              </a:rPr>
+              <a:t>　</a:t>
+            </a:r>
+            <a:pPr algn="l" indent="0" marL="0">
+              <a:lnSpc>
+                <a:spcPct val="120000"/>
+              </a:lnSpc>
+              <a:buNone/>
+            </a:pPr>
+            <a:r>
+              <a:rPr lang="en-US" sz="2200" b="1" dirty="0">
+                <a:solidFill>
+                  <a:srgbClr val="EE7B08"/>
+                </a:solidFill>
+                <a:latin typeface="メイリオ" pitchFamily="34" charset="0"/>
+                <a:ea typeface="メイリオ" pitchFamily="34" charset="-122"/>
+                <a:cs typeface="メイリオ" pitchFamily="34" charset="-120"/>
+              </a:rPr>
+              <a:t>主体的な学びの土台</a:t>
+            </a:r>
+            <a:pPr algn="l" indent="0" marL="0">
+              <a:lnSpc>
+                <a:spcPct val="120000"/>
+              </a:lnSpc>
+              <a:buNone/>
+            </a:pPr>
+            <a:r>
+              <a:rPr lang="en-US" sz="2200" b="1" dirty="0">
+                <a:solidFill>
+                  <a:srgbClr val="595959"/>
+                </a:solidFill>
+                <a:latin typeface="メイリオ" pitchFamily="34" charset="0"/>
+                <a:ea typeface="メイリオ" pitchFamily="34" charset="-122"/>
+                <a:cs typeface="メイリオ" pitchFamily="34" charset="-120"/>
+              </a:rPr>
+              <a:t>が形成されていることが分かる。</a:t>
+            </a:r>
+            <a:endParaRPr lang="en-US" sz="2200" dirty="0"/>
+          </a:p>
+        </p:txBody>
+      </p:sp>
+      <p:sp>
+        <p:nvSpPr>
+          <p:cNvPr id="4" name="Text 2"/>
+          <p:cNvSpPr txBox="1"/>
+          <p:nvPr/>
+        </p:nvSpPr>
+        <p:spPr>
+          <a:xfrm>
+            <a:off x="475488" y="2514600"/>
+            <a:ext cx="8193024" cy="868680"/>
+          </a:xfrm>
+          <a:prstGeom prst="rect">
+            <a:avLst/>
+          </a:prstGeom>
+          <a:noFill/>
+          <a:ln/>
+        </p:spPr>
+        <p:txBody>
+          <a:bodyPr wrap="square" lIns="0" tIns="0" rIns="0" bIns="0" rtlCol="0" anchor="t"/>
+          <a:lstStyle/>
+          <a:p>
+            <a:pPr algn="l" indent="0" marL="0">
+              <a:lnSpc>
+                <a:spcPct val="120000"/>
+              </a:lnSpc>
+              <a:buNone/>
+            </a:pPr>
+            <a:r>
+              <a:rPr lang="en-US" sz="2200" b="1" dirty="0">
+                <a:solidFill>
+                  <a:srgbClr val="595959"/>
+                </a:solidFill>
+                <a:latin typeface="メイリオ" pitchFamily="34" charset="0"/>
+                <a:ea typeface="メイリオ" pitchFamily="34" charset="-122"/>
+                <a:cs typeface="メイリオ" pitchFamily="34" charset="-120"/>
+              </a:rPr>
+              <a:t>その背景にあるのは、日常的に行われている</a:t>
+            </a:r>
+            <a:endParaRPr lang="en-US" sz="2200" dirty="0"/>
+          </a:p>
+          <a:p>
+            <a:pPr algn="l" indent="0" marL="0">
+              <a:lnSpc>
+                <a:spcPct val="120000"/>
+              </a:lnSpc>
+              <a:buNone/>
+            </a:pPr>
+            <a:r>
+              <a:rPr lang="en-US" sz="2200" b="1" dirty="0">
+                <a:solidFill>
+                  <a:srgbClr val="595959"/>
+                </a:solidFill>
+                <a:latin typeface="メイリオ" pitchFamily="34" charset="0"/>
+                <a:ea typeface="メイリオ" pitchFamily="34" charset="-122"/>
+                <a:cs typeface="メイリオ" pitchFamily="34" charset="-120"/>
+              </a:rPr>
+              <a:t>　</a:t>
+            </a:r>
+            <a:pPr algn="l" indent="0" marL="0">
+              <a:lnSpc>
+                <a:spcPct val="120000"/>
+              </a:lnSpc>
+              <a:buNone/>
+            </a:pPr>
+            <a:r>
+              <a:rPr lang="en-US" sz="2200" b="1" dirty="0">
+                <a:solidFill>
+                  <a:srgbClr val="EE7B08"/>
+                </a:solidFill>
+                <a:latin typeface="メイリオ" pitchFamily="34" charset="0"/>
+                <a:ea typeface="メイリオ" pitchFamily="34" charset="-122"/>
+                <a:cs typeface="メイリオ" pitchFamily="34" charset="-120"/>
+              </a:rPr>
+              <a:t>「対話を通した学び」</a:t>
+            </a:r>
+            <a:pPr algn="l" indent="0" marL="0">
+              <a:lnSpc>
+                <a:spcPct val="120000"/>
+              </a:lnSpc>
+              <a:buNone/>
+            </a:pPr>
+            <a:r>
+              <a:rPr lang="en-US" sz="2200" b="1" dirty="0">
+                <a:solidFill>
+                  <a:srgbClr val="595959"/>
+                </a:solidFill>
+                <a:latin typeface="メイリオ" pitchFamily="34" charset="0"/>
+                <a:ea typeface="メイリオ" pitchFamily="34" charset="-122"/>
+                <a:cs typeface="メイリオ" pitchFamily="34" charset="-120"/>
+              </a:rPr>
+              <a:t>である。</a:t>
+            </a:r>
+            <a:endParaRPr lang="en-US" sz="2200" dirty="0"/>
+          </a:p>
+        </p:txBody>
+      </p:sp>
+      <p:sp>
+        <p:nvSpPr>
+          <p:cNvPr id="5" name="Shape 3"/>
           <p:cNvSpPr/>
           <p:nvPr/>
         </p:nvSpPr>
         <p:spPr>
           <a:xfrm>
-            <a:off x="320040" y="1417320"/>
-            <a:ext cx="2697480" cy="2395728"/>
+            <a:off x="475488" y="3611880"/>
+            <a:ext cx="8193024" cy="822960"/>
           </a:xfrm>
           <a:prstGeom prst="roundRect">
             <a:avLst>
-              <a:gd name="adj" fmla="val 2290"/>
+              <a:gd name="adj" fmla="val 6667"/>
             </a:avLst>
           </a:prstGeom>
           <a:solidFill>
@@ -4964,14 +5600,14 @@
       </p:sp>
       <p:sp>
         <p:nvSpPr>
-          <p:cNvPr id="4" name="Text 2"/>
-          <p:cNvSpPr txBox="1"/>
-          <p:nvPr/>
-        </p:nvSpPr>
-        <p:spPr>
-          <a:xfrm>
-            <a:off x="466344" y="1527048"/>
-            <a:ext cx="2404872" cy="274320"/>
+          <p:cNvPr id="6" name="Text 4"/>
+          <p:cNvSpPr txBox="1"/>
+          <p:nvPr/>
+        </p:nvSpPr>
+        <p:spPr>
+          <a:xfrm>
+            <a:off x="731520" y="3611880"/>
+            <a:ext cx="7680960" cy="822960"/>
           </a:xfrm>
           <a:prstGeom prst="rect">
             <a:avLst/>
@@ -4989,747 +5625,13 @@
             <a:r>
               <a:rPr lang="en-US" sz="1600" b="1" dirty="0">
                 <a:solidFill>
-                  <a:srgbClr val="44C1A3"/>
-                </a:solidFill>
-                <a:latin typeface="メイリオ" pitchFamily="34" charset="0"/>
-                <a:ea typeface="メイリオ" pitchFamily="34" charset="-122"/>
-                <a:cs typeface="メイリオ" pitchFamily="34" charset="-120"/>
-              </a:rPr>
-              <a:t>保健体育</a:t>
-            </a:r>
-            <a:endParaRPr lang="en-US" sz="1600" dirty="0"/>
-          </a:p>
-        </p:txBody>
-      </p:sp>
-      <p:sp>
-        <p:nvSpPr>
-          <p:cNvPr id="5" name="Text 3"/>
-          <p:cNvSpPr txBox="1"/>
-          <p:nvPr/>
-        </p:nvSpPr>
-        <p:spPr>
-          <a:xfrm>
-            <a:off x="466344" y="1801368"/>
-            <a:ext cx="2404872" cy="237744"/>
-          </a:xfrm>
-          <a:prstGeom prst="rect">
-            <a:avLst/>
-          </a:prstGeom>
-          <a:noFill/>
-          <a:ln/>
-        </p:spPr>
-        <p:txBody>
-          <a:bodyPr wrap="square" lIns="0" tIns="0" rIns="0" bIns="0" rtlCol="0" anchor="ctr"/>
-          <a:lstStyle/>
-          <a:p>
-            <a:pPr algn="l" indent="0" marL="0">
-              <a:buNone/>
-            </a:pPr>
-            <a:r>
-              <a:rPr lang="en-US" sz="1100" b="1" dirty="0">
-                <a:solidFill>
-                  <a:srgbClr val="808080"/>
-                </a:solidFill>
-                <a:latin typeface="メイリオ" pitchFamily="34" charset="0"/>
-                <a:ea typeface="メイリオ" pitchFamily="34" charset="-122"/>
-                <a:cs typeface="メイリオ" pitchFamily="34" charset="-120"/>
-              </a:rPr>
-              <a:t>田口　和磨　先生</a:t>
-            </a:r>
-            <a:endParaRPr lang="en-US" sz="1100" dirty="0"/>
-          </a:p>
-        </p:txBody>
-      </p:sp>
-      <p:sp>
-        <p:nvSpPr>
-          <p:cNvPr id="6" name="Text 4"/>
-          <p:cNvSpPr txBox="1"/>
-          <p:nvPr/>
-        </p:nvSpPr>
-        <p:spPr>
-          <a:xfrm>
-            <a:off x="466344" y="2075688"/>
-            <a:ext cx="2404872" cy="1609344"/>
-          </a:xfrm>
-          <a:prstGeom prst="rect">
-            <a:avLst/>
-          </a:prstGeom>
-          <a:noFill/>
-          <a:ln/>
-        </p:spPr>
-        <p:txBody>
-          <a:bodyPr wrap="square" lIns="0" tIns="0" rIns="0" bIns="0" rtlCol="0" anchor="t"/>
-          <a:lstStyle/>
-          <a:p>
-            <a:pPr algn="l" indent="0" marL="0">
-              <a:lnSpc>
-                <a:spcPct val="125000"/>
-              </a:lnSpc>
-              <a:buNone/>
-            </a:pPr>
-            <a:r>
-              <a:rPr lang="en-US" sz="1350" b="1" dirty="0">
-                <a:solidFill>
                   <a:srgbClr val="595959"/>
                 </a:solidFill>
                 <a:latin typeface="メイリオ" pitchFamily="34" charset="0"/>
                 <a:ea typeface="メイリオ" pitchFamily="34" charset="-122"/>
                 <a:cs typeface="メイリオ" pitchFamily="34" charset="-120"/>
               </a:rPr>
-              <a:t>バディ同士で</a:t>
-            </a:r>
-            <a:endParaRPr lang="en-US" sz="1350" dirty="0"/>
-          </a:p>
-          <a:p>
-            <a:pPr algn="l" indent="0" marL="0">
-              <a:lnSpc>
-                <a:spcPct val="125000"/>
-              </a:lnSpc>
-              <a:buNone/>
-            </a:pPr>
-            <a:r>
-              <a:rPr lang="en-US" sz="1350" b="1" dirty="0">
-                <a:solidFill>
-                  <a:srgbClr val="EE7B08"/>
-                </a:solidFill>
-                <a:latin typeface="メイリオ" pitchFamily="34" charset="0"/>
-                <a:ea typeface="メイリオ" pitchFamily="34" charset="-122"/>
-                <a:cs typeface="メイリオ" pitchFamily="34" charset="-120"/>
-              </a:rPr>
-              <a:t>互いの泳ぎを見て</a:t>
-            </a:r>
-            <a:endParaRPr lang="en-US" sz="1350" dirty="0"/>
-          </a:p>
-          <a:p>
-            <a:pPr algn="l" indent="0" marL="0">
-              <a:lnSpc>
-                <a:spcPct val="125000"/>
-              </a:lnSpc>
-              <a:buNone/>
-            </a:pPr>
-            <a:r>
-              <a:rPr lang="en-US" sz="1350" b="1" dirty="0">
-                <a:solidFill>
-                  <a:srgbClr val="EE7B08"/>
-                </a:solidFill>
-                <a:latin typeface="メイリオ" pitchFamily="34" charset="0"/>
-                <a:ea typeface="メイリオ" pitchFamily="34" charset="-122"/>
-                <a:cs typeface="メイリオ" pitchFamily="34" charset="-120"/>
-              </a:rPr>
-              <a:t>改善点を考えていた。</a:t>
-            </a:r>
-            <a:endParaRPr lang="en-US" sz="1350" dirty="0"/>
-          </a:p>
-          <a:p>
-            <a:pPr algn="l" indent="0" marL="0">
-              <a:lnSpc>
-                <a:spcPct val="125000"/>
-              </a:lnSpc>
-              <a:buNone/>
-            </a:pPr>
-            <a:r>
-              <a:rPr lang="en-US" sz="1350" b="1" dirty="0">
-                <a:solidFill>
-                  <a:srgbClr val="595959"/>
-                </a:solidFill>
-                <a:latin typeface="メイリオ" pitchFamily="34" charset="0"/>
-                <a:ea typeface="メイリオ" pitchFamily="34" charset="-122"/>
-                <a:cs typeface="メイリオ" pitchFamily="34" charset="-120"/>
-              </a:rPr>
-              <a:t>得意な生徒が助言役を</a:t>
-            </a:r>
-            <a:endParaRPr lang="en-US" sz="1350" dirty="0"/>
-          </a:p>
-          <a:p>
-            <a:pPr algn="l" indent="0" marL="0">
-              <a:lnSpc>
-                <a:spcPct val="125000"/>
-              </a:lnSpc>
-              <a:buNone/>
-            </a:pPr>
-            <a:r>
-              <a:rPr lang="en-US" sz="1350" b="1" dirty="0">
-                <a:solidFill>
-                  <a:srgbClr val="595959"/>
-                </a:solidFill>
-                <a:latin typeface="メイリオ" pitchFamily="34" charset="0"/>
-                <a:ea typeface="メイリオ" pitchFamily="34" charset="-122"/>
-                <a:cs typeface="メイリオ" pitchFamily="34" charset="-120"/>
-              </a:rPr>
-              <a:t>担い、全員に役割が</a:t>
-            </a:r>
-            <a:endParaRPr lang="en-US" sz="1350" dirty="0"/>
-          </a:p>
-          <a:p>
-            <a:pPr algn="l" indent="0" marL="0">
-              <a:lnSpc>
-                <a:spcPct val="125000"/>
-              </a:lnSpc>
-              <a:buNone/>
-            </a:pPr>
-            <a:r>
-              <a:rPr lang="en-US" sz="1350" b="1" dirty="0">
-                <a:solidFill>
-                  <a:srgbClr val="595959"/>
-                </a:solidFill>
-                <a:latin typeface="メイリオ" pitchFamily="34" charset="0"/>
-                <a:ea typeface="メイリオ" pitchFamily="34" charset="-122"/>
-                <a:cs typeface="メイリオ" pitchFamily="34" charset="-120"/>
-              </a:rPr>
-              <a:t>あった。</a:t>
-            </a:r>
-            <a:endParaRPr lang="en-US" sz="1350" dirty="0"/>
-          </a:p>
-        </p:txBody>
-      </p:sp>
-      <p:sp>
-        <p:nvSpPr>
-          <p:cNvPr id="7" name="Shape 5"/>
-          <p:cNvSpPr/>
-          <p:nvPr/>
-        </p:nvSpPr>
-        <p:spPr>
-          <a:xfrm>
-            <a:off x="3227832" y="1417320"/>
-            <a:ext cx="2697480" cy="2395728"/>
-          </a:xfrm>
-          <a:prstGeom prst="roundRect">
-            <a:avLst>
-              <a:gd name="adj" fmla="val 2290"/>
-            </a:avLst>
-          </a:prstGeom>
-          <a:solidFill>
-            <a:srgbClr val="E9F7F3"/>
-          </a:solidFill>
-          <a:ln w="12700">
-            <a:solidFill>
-              <a:srgbClr val="B9E5DA"/>
-            </a:solidFill>
-            <a:prstDash val="solid"/>
-          </a:ln>
-        </p:spPr>
-      </p:sp>
-      <p:sp>
-        <p:nvSpPr>
-          <p:cNvPr id="8" name="Text 6"/>
-          <p:cNvSpPr txBox="1"/>
-          <p:nvPr/>
-        </p:nvSpPr>
-        <p:spPr>
-          <a:xfrm>
-            <a:off x="3374136" y="1527048"/>
-            <a:ext cx="2404872" cy="274320"/>
-          </a:xfrm>
-          <a:prstGeom prst="rect">
-            <a:avLst/>
-          </a:prstGeom>
-          <a:noFill/>
-          <a:ln/>
-        </p:spPr>
-        <p:txBody>
-          <a:bodyPr wrap="square" lIns="0" tIns="0" rIns="0" bIns="0" rtlCol="0" anchor="ctr"/>
-          <a:lstStyle/>
-          <a:p>
-            <a:pPr algn="l" indent="0" marL="0">
-              <a:buNone/>
-            </a:pPr>
-            <a:r>
-              <a:rPr lang="en-US" sz="1600" b="1" dirty="0">
-                <a:solidFill>
-                  <a:srgbClr val="44C1A3"/>
-                </a:solidFill>
-                <a:latin typeface="メイリオ" pitchFamily="34" charset="0"/>
-                <a:ea typeface="メイリオ" pitchFamily="34" charset="-122"/>
-                <a:cs typeface="メイリオ" pitchFamily="34" charset="-120"/>
-              </a:rPr>
-              <a:t>道徳</a:t>
-            </a:r>
-            <a:endParaRPr lang="en-US" sz="1600" dirty="0"/>
-          </a:p>
-        </p:txBody>
-      </p:sp>
-      <p:sp>
-        <p:nvSpPr>
-          <p:cNvPr id="9" name="Text 7"/>
-          <p:cNvSpPr txBox="1"/>
-          <p:nvPr/>
-        </p:nvSpPr>
-        <p:spPr>
-          <a:xfrm>
-            <a:off x="3374136" y="1801368"/>
-            <a:ext cx="2404872" cy="237744"/>
-          </a:xfrm>
-          <a:prstGeom prst="rect">
-            <a:avLst/>
-          </a:prstGeom>
-          <a:noFill/>
-          <a:ln/>
-        </p:spPr>
-        <p:txBody>
-          <a:bodyPr wrap="square" lIns="0" tIns="0" rIns="0" bIns="0" rtlCol="0" anchor="ctr"/>
-          <a:lstStyle/>
-          <a:p>
-            <a:pPr algn="l" indent="0" marL="0">
-              <a:buNone/>
-            </a:pPr>
-            <a:r>
-              <a:rPr lang="en-US" sz="1100" b="1" dirty="0">
-                <a:solidFill>
-                  <a:srgbClr val="808080"/>
-                </a:solidFill>
-                <a:latin typeface="メイリオ" pitchFamily="34" charset="0"/>
-                <a:ea typeface="メイリオ" pitchFamily="34" charset="-122"/>
-                <a:cs typeface="メイリオ" pitchFamily="34" charset="-120"/>
-              </a:rPr>
-              <a:t>東海林　静江　先生</a:t>
-            </a:r>
-            <a:endParaRPr lang="en-US" sz="1100" dirty="0"/>
-          </a:p>
-        </p:txBody>
-      </p:sp>
-      <p:sp>
-        <p:nvSpPr>
-          <p:cNvPr id="10" name="Text 8"/>
-          <p:cNvSpPr txBox="1"/>
-          <p:nvPr/>
-        </p:nvSpPr>
-        <p:spPr>
-          <a:xfrm>
-            <a:off x="3374136" y="2075688"/>
-            <a:ext cx="2404872" cy="1609344"/>
-          </a:xfrm>
-          <a:prstGeom prst="rect">
-            <a:avLst/>
-          </a:prstGeom>
-          <a:noFill/>
-          <a:ln/>
-        </p:spPr>
-        <p:txBody>
-          <a:bodyPr wrap="square" lIns="0" tIns="0" rIns="0" bIns="0" rtlCol="0" anchor="t"/>
-          <a:lstStyle/>
-          <a:p>
-            <a:pPr algn="l" indent="0" marL="0">
-              <a:lnSpc>
-                <a:spcPct val="125000"/>
-              </a:lnSpc>
-              <a:buNone/>
-            </a:pPr>
-            <a:r>
-              <a:rPr lang="en-US" sz="1350" b="1" dirty="0">
-                <a:solidFill>
-                  <a:srgbClr val="595959"/>
-                </a:solidFill>
-                <a:latin typeface="メイリオ" pitchFamily="34" charset="0"/>
-                <a:ea typeface="メイリオ" pitchFamily="34" charset="-122"/>
-                <a:cs typeface="メイリオ" pitchFamily="34" charset="-120"/>
-              </a:rPr>
-              <a:t>「嘘」をテーマに、</a:t>
-            </a:r>
-            <a:endParaRPr lang="en-US" sz="1350" dirty="0"/>
-          </a:p>
-          <a:p>
-            <a:pPr algn="l" indent="0" marL="0">
-              <a:lnSpc>
-                <a:spcPct val="125000"/>
-              </a:lnSpc>
-              <a:buNone/>
-            </a:pPr>
-            <a:r>
-              <a:rPr lang="en-US" sz="1350" b="1" dirty="0">
-                <a:solidFill>
-                  <a:srgbClr val="EE7B08"/>
-                </a:solidFill>
-                <a:latin typeface="メイリオ" pitchFamily="34" charset="0"/>
-                <a:ea typeface="メイリオ" pitchFamily="34" charset="-122"/>
-                <a:cs typeface="メイリオ" pitchFamily="34" charset="-120"/>
-              </a:rPr>
-              <a:t>価値観の違いについて</a:t>
-            </a:r>
-            <a:endParaRPr lang="en-US" sz="1350" dirty="0"/>
-          </a:p>
-          <a:p>
-            <a:pPr algn="l" indent="0" marL="0">
-              <a:lnSpc>
-                <a:spcPct val="125000"/>
-              </a:lnSpc>
-              <a:buNone/>
-            </a:pPr>
-            <a:r>
-              <a:rPr lang="en-US" sz="1350" b="1" dirty="0">
-                <a:solidFill>
-                  <a:srgbClr val="EE7B08"/>
-                </a:solidFill>
-                <a:latin typeface="メイリオ" pitchFamily="34" charset="0"/>
-                <a:ea typeface="メイリオ" pitchFamily="34" charset="-122"/>
-                <a:cs typeface="メイリオ" pitchFamily="34" charset="-120"/>
-              </a:rPr>
-              <a:t>議論していた。</a:t>
-            </a:r>
-            <a:endParaRPr lang="en-US" sz="1350" dirty="0"/>
-          </a:p>
-          <a:p>
-            <a:pPr algn="l" indent="0" marL="0">
-              <a:lnSpc>
-                <a:spcPct val="125000"/>
-              </a:lnSpc>
-              <a:buNone/>
-            </a:pPr>
-            <a:r>
-              <a:rPr lang="en-US" sz="1350" b="1" dirty="0">
-                <a:solidFill>
-                  <a:srgbClr val="595959"/>
-                </a:solidFill>
-                <a:latin typeface="メイリオ" pitchFamily="34" charset="0"/>
-                <a:ea typeface="メイリオ" pitchFamily="34" charset="-122"/>
-                <a:cs typeface="メイリオ" pitchFamily="34" charset="-120"/>
-              </a:rPr>
-              <a:t>発表より議論の時間を</a:t>
-            </a:r>
-            <a:endParaRPr lang="en-US" sz="1350" dirty="0"/>
-          </a:p>
-          <a:p>
-            <a:pPr algn="l" indent="0" marL="0">
-              <a:lnSpc>
-                <a:spcPct val="125000"/>
-              </a:lnSpc>
-              <a:buNone/>
-            </a:pPr>
-            <a:r>
-              <a:rPr lang="en-US" sz="1350" b="1" dirty="0">
-                <a:solidFill>
-                  <a:srgbClr val="595959"/>
-                </a:solidFill>
-                <a:latin typeface="メイリオ" pitchFamily="34" charset="0"/>
-                <a:ea typeface="メイリオ" pitchFamily="34" charset="-122"/>
-                <a:cs typeface="メイリオ" pitchFamily="34" charset="-120"/>
-              </a:rPr>
-              <a:t>重視した構成だった。</a:t>
-            </a:r>
-            <a:endParaRPr lang="en-US" sz="1350" dirty="0"/>
-          </a:p>
-        </p:txBody>
-      </p:sp>
-      <p:sp>
-        <p:nvSpPr>
-          <p:cNvPr id="11" name="Shape 9"/>
-          <p:cNvSpPr/>
-          <p:nvPr/>
-        </p:nvSpPr>
-        <p:spPr>
-          <a:xfrm>
-            <a:off x="6135624" y="1417320"/>
-            <a:ext cx="2697480" cy="2395728"/>
-          </a:xfrm>
-          <a:prstGeom prst="roundRect">
-            <a:avLst>
-              <a:gd name="adj" fmla="val 2290"/>
-            </a:avLst>
-          </a:prstGeom>
-          <a:solidFill>
-            <a:srgbClr val="E9F7F3"/>
-          </a:solidFill>
-          <a:ln w="12700">
-            <a:solidFill>
-              <a:srgbClr val="B9E5DA"/>
-            </a:solidFill>
-            <a:prstDash val="solid"/>
-          </a:ln>
-        </p:spPr>
-      </p:sp>
-      <p:sp>
-        <p:nvSpPr>
-          <p:cNvPr id="12" name="Text 10"/>
-          <p:cNvSpPr txBox="1"/>
-          <p:nvPr/>
-        </p:nvSpPr>
-        <p:spPr>
-          <a:xfrm>
-            <a:off x="6281928" y="1527048"/>
-            <a:ext cx="2404872" cy="274320"/>
-          </a:xfrm>
-          <a:prstGeom prst="rect">
-            <a:avLst/>
-          </a:prstGeom>
-          <a:noFill/>
-          <a:ln/>
-        </p:spPr>
-        <p:txBody>
-          <a:bodyPr wrap="square" lIns="0" tIns="0" rIns="0" bIns="0" rtlCol="0" anchor="ctr"/>
-          <a:lstStyle/>
-          <a:p>
-            <a:pPr algn="l" indent="0" marL="0">
-              <a:buNone/>
-            </a:pPr>
-            <a:r>
-              <a:rPr lang="en-US" sz="1600" b="1" dirty="0">
-                <a:solidFill>
-                  <a:srgbClr val="44C1A3"/>
-                </a:solidFill>
-                <a:latin typeface="メイリオ" pitchFamily="34" charset="0"/>
-                <a:ea typeface="メイリオ" pitchFamily="34" charset="-122"/>
-                <a:cs typeface="メイリオ" pitchFamily="34" charset="-120"/>
-              </a:rPr>
-              <a:t>外国語</a:t>
-            </a:r>
-            <a:endParaRPr lang="en-US" sz="1600" dirty="0"/>
-          </a:p>
-        </p:txBody>
-      </p:sp>
-      <p:sp>
-        <p:nvSpPr>
-          <p:cNvPr id="13" name="Text 11"/>
-          <p:cNvSpPr txBox="1"/>
-          <p:nvPr/>
-        </p:nvSpPr>
-        <p:spPr>
-          <a:xfrm>
-            <a:off x="6281928" y="1801368"/>
-            <a:ext cx="2404872" cy="237744"/>
-          </a:xfrm>
-          <a:prstGeom prst="rect">
-            <a:avLst/>
-          </a:prstGeom>
-          <a:noFill/>
-          <a:ln/>
-        </p:spPr>
-        <p:txBody>
-          <a:bodyPr wrap="square" lIns="0" tIns="0" rIns="0" bIns="0" rtlCol="0" anchor="ctr"/>
-          <a:lstStyle/>
-          <a:p>
-            <a:pPr algn="l" indent="0" marL="0">
-              <a:buNone/>
-            </a:pPr>
-            <a:r>
-              <a:rPr lang="en-US" sz="1100" b="1" dirty="0">
-                <a:solidFill>
-                  <a:srgbClr val="808080"/>
-                </a:solidFill>
-                <a:latin typeface="メイリオ" pitchFamily="34" charset="0"/>
-                <a:ea typeface="メイリオ" pitchFamily="34" charset="-122"/>
-                <a:cs typeface="メイリオ" pitchFamily="34" charset="-120"/>
-              </a:rPr>
-              <a:t>塚本　瑞穂　先生</a:t>
-            </a:r>
-            <a:endParaRPr lang="en-US" sz="1100" dirty="0"/>
-          </a:p>
-        </p:txBody>
-      </p:sp>
-      <p:sp>
-        <p:nvSpPr>
-          <p:cNvPr id="14" name="Text 12"/>
-          <p:cNvSpPr txBox="1"/>
-          <p:nvPr/>
-        </p:nvSpPr>
-        <p:spPr>
-          <a:xfrm>
-            <a:off x="6281928" y="2075688"/>
-            <a:ext cx="2404872" cy="1609344"/>
-          </a:xfrm>
-          <a:prstGeom prst="rect">
-            <a:avLst/>
-          </a:prstGeom>
-          <a:noFill/>
-          <a:ln/>
-        </p:spPr>
-        <p:txBody>
-          <a:bodyPr wrap="square" lIns="0" tIns="0" rIns="0" bIns="0" rtlCol="0" anchor="t"/>
-          <a:lstStyle/>
-          <a:p>
-            <a:pPr algn="l" indent="0" marL="0">
-              <a:lnSpc>
-                <a:spcPct val="125000"/>
-              </a:lnSpc>
-              <a:buNone/>
-            </a:pPr>
-            <a:r>
-              <a:rPr lang="en-US" sz="1350" b="1" dirty="0">
-                <a:solidFill>
-                  <a:srgbClr val="595959"/>
-                </a:solidFill>
-                <a:latin typeface="メイリオ" pitchFamily="34" charset="0"/>
-                <a:ea typeface="メイリオ" pitchFamily="34" charset="-122"/>
-                <a:cs typeface="メイリオ" pitchFamily="34" charset="-120"/>
-              </a:rPr>
-              <a:t>ペアでのやり取りから</a:t>
-            </a:r>
-            <a:endParaRPr lang="en-US" sz="1350" dirty="0"/>
-          </a:p>
-          <a:p>
-            <a:pPr algn="l" indent="0" marL="0">
-              <a:lnSpc>
-                <a:spcPct val="125000"/>
-              </a:lnSpc>
-              <a:buNone/>
-            </a:pPr>
-            <a:r>
-              <a:rPr lang="en-US" sz="1350" b="1" dirty="0">
-                <a:solidFill>
-                  <a:srgbClr val="EE7B08"/>
-                </a:solidFill>
-                <a:latin typeface="メイリオ" pitchFamily="34" charset="0"/>
-                <a:ea typeface="メイリオ" pitchFamily="34" charset="-122"/>
-                <a:cs typeface="メイリオ" pitchFamily="34" charset="-120"/>
-              </a:rPr>
-              <a:t>全体の学びへつなぐ。</a:t>
-            </a:r>
-            <a:endParaRPr lang="en-US" sz="1350" dirty="0"/>
-          </a:p>
-          <a:p>
-            <a:pPr algn="l" indent="0" marL="0">
-              <a:lnSpc>
-                <a:spcPct val="125000"/>
-              </a:lnSpc>
-              <a:buNone/>
-            </a:pPr>
-            <a:r>
-              <a:rPr lang="en-US" sz="1350" b="1" dirty="0">
-                <a:solidFill>
-                  <a:srgbClr val="595959"/>
-                </a:solidFill>
-                <a:latin typeface="メイリオ" pitchFamily="34" charset="0"/>
-                <a:ea typeface="メイリオ" pitchFamily="34" charset="-122"/>
-                <a:cs typeface="メイリオ" pitchFamily="34" charset="-120"/>
-              </a:rPr>
-              <a:t>音読も一人ではなく</a:t>
-            </a:r>
-            <a:endParaRPr lang="en-US" sz="1350" dirty="0"/>
-          </a:p>
-          <a:p>
-            <a:pPr algn="l" indent="0" marL="0">
-              <a:lnSpc>
-                <a:spcPct val="125000"/>
-              </a:lnSpc>
-              <a:buNone/>
-            </a:pPr>
-            <a:r>
-              <a:rPr lang="en-US" sz="1350" b="1" dirty="0">
-                <a:solidFill>
-                  <a:srgbClr val="EE7B08"/>
-                </a:solidFill>
-                <a:latin typeface="メイリオ" pitchFamily="34" charset="0"/>
-                <a:ea typeface="メイリオ" pitchFamily="34" charset="-122"/>
-                <a:cs typeface="メイリオ" pitchFamily="34" charset="-120"/>
-              </a:rPr>
-              <a:t>相手とともに行い、</a:t>
-            </a:r>
-            <a:endParaRPr lang="en-US" sz="1350" dirty="0"/>
-          </a:p>
-          <a:p>
-            <a:pPr algn="l" indent="0" marL="0">
-              <a:lnSpc>
-                <a:spcPct val="125000"/>
-              </a:lnSpc>
-              <a:buNone/>
-            </a:pPr>
-            <a:r>
-              <a:rPr lang="en-US" sz="1350" b="1" dirty="0">
-                <a:solidFill>
-                  <a:srgbClr val="595959"/>
-                </a:solidFill>
-                <a:latin typeface="メイリオ" pitchFamily="34" charset="0"/>
-                <a:ea typeface="メイリオ" pitchFamily="34" charset="-122"/>
-                <a:cs typeface="メイリオ" pitchFamily="34" charset="-120"/>
-              </a:rPr>
-              <a:t>表現を確かなものに</a:t>
-            </a:r>
-            <a:endParaRPr lang="en-US" sz="1350" dirty="0"/>
-          </a:p>
-          <a:p>
-            <a:pPr algn="l" indent="0" marL="0">
-              <a:lnSpc>
-                <a:spcPct val="125000"/>
-              </a:lnSpc>
-              <a:buNone/>
-            </a:pPr>
-            <a:r>
-              <a:rPr lang="en-US" sz="1350" b="1" dirty="0">
-                <a:solidFill>
-                  <a:srgbClr val="595959"/>
-                </a:solidFill>
-                <a:latin typeface="メイリオ" pitchFamily="34" charset="0"/>
-                <a:ea typeface="メイリオ" pitchFamily="34" charset="-122"/>
-                <a:cs typeface="メイリオ" pitchFamily="34" charset="-120"/>
-              </a:rPr>
-              <a:t>していた。</a:t>
-            </a:r>
-            <a:endParaRPr lang="en-US" sz="1350" dirty="0"/>
-          </a:p>
-        </p:txBody>
-      </p:sp>
-      <p:sp>
-        <p:nvSpPr>
-          <p:cNvPr id="15" name="Text 13"/>
-          <p:cNvSpPr txBox="1"/>
-          <p:nvPr/>
-        </p:nvSpPr>
-        <p:spPr>
-          <a:xfrm>
-            <a:off x="320040" y="3977640"/>
-            <a:ext cx="8503920" cy="822960"/>
-          </a:xfrm>
-          <a:prstGeom prst="rect">
-            <a:avLst/>
-          </a:prstGeom>
-          <a:noFill/>
-          <a:ln/>
-        </p:spPr>
-        <p:txBody>
-          <a:bodyPr wrap="square" lIns="0" tIns="0" rIns="0" bIns="0" rtlCol="0" anchor="t"/>
-          <a:lstStyle/>
-          <a:p>
-            <a:pPr algn="l" indent="0" marL="0">
-              <a:lnSpc>
-                <a:spcPct val="120000"/>
-              </a:lnSpc>
-              <a:buNone/>
-            </a:pPr>
-            <a:r>
-              <a:rPr lang="en-US" sz="1600" b="1" dirty="0">
-                <a:solidFill>
-                  <a:srgbClr val="595959"/>
-                </a:solidFill>
-                <a:latin typeface="メイリオ" pitchFamily="34" charset="0"/>
-                <a:ea typeface="メイリオ" pitchFamily="34" charset="-122"/>
-                <a:cs typeface="メイリオ" pitchFamily="34" charset="-120"/>
-              </a:rPr>
-              <a:t>教科は異なっても、共通していたのは</a:t>
-            </a:r>
-            <a:endParaRPr lang="en-US" sz="1600" dirty="0"/>
-          </a:p>
-          <a:p>
-            <a:pPr algn="l" indent="0" marL="0">
-              <a:lnSpc>
-                <a:spcPct val="120000"/>
-              </a:lnSpc>
-              <a:buNone/>
-            </a:pPr>
-            <a:r>
-              <a:rPr lang="en-US" sz="1600" b="1" dirty="0">
-                <a:solidFill>
-                  <a:srgbClr val="EE7B08"/>
-                </a:solidFill>
-                <a:latin typeface="メイリオ" pitchFamily="34" charset="0"/>
-                <a:ea typeface="メイリオ" pitchFamily="34" charset="-122"/>
-                <a:cs typeface="メイリオ" pitchFamily="34" charset="-120"/>
-              </a:rPr>
-              <a:t>「相手を通して自分を見つめる学び」</a:t>
-            </a:r>
-            <a:pPr algn="l" indent="0" marL="0">
-              <a:lnSpc>
-                <a:spcPct val="120000"/>
-              </a:lnSpc>
-              <a:buNone/>
-            </a:pPr>
-            <a:r>
-              <a:rPr lang="en-US" sz="1600" b="1" dirty="0">
-                <a:solidFill>
-                  <a:srgbClr val="595959"/>
-                </a:solidFill>
-                <a:latin typeface="メイリオ" pitchFamily="34" charset="0"/>
-                <a:ea typeface="メイリオ" pitchFamily="34" charset="-122"/>
-                <a:cs typeface="メイリオ" pitchFamily="34" charset="-120"/>
-              </a:rPr>
-              <a:t>であった。</a:t>
+              <a:t>本日の３つの授業にも、対話が学びを深める場面が表れていた。</a:t>
             </a:r>
             <a:endParaRPr lang="en-US" sz="1600" dirty="0"/>
           </a:p>
@@ -5818,7 +5720,7 @@
                 <a:ea typeface="メイリオ" pitchFamily="34" charset="-122"/>
                 <a:cs typeface="メイリオ" pitchFamily="34" charset="-120"/>
               </a:rPr>
-              <a:t>　③　学習の自己調整</a:t>
+              <a:t>　②　対話によって学びは深まる</a:t>
             </a:r>
             <a:endParaRPr lang="en-US" sz="3000" dirty="0"/>
           </a:p>
@@ -5826,210 +5728,18 @@
       </p:sp>
       <p:sp>
         <p:nvSpPr>
-          <p:cNvPr id="3" name="Text 1"/>
-          <p:cNvSpPr txBox="1"/>
-          <p:nvPr/>
-        </p:nvSpPr>
-        <p:spPr>
-          <a:xfrm>
-            <a:off x="475488" y="1444752"/>
-            <a:ext cx="8193024" cy="1280160"/>
-          </a:xfrm>
-          <a:prstGeom prst="rect">
-            <a:avLst/>
-          </a:prstGeom>
-          <a:noFill/>
-          <a:ln/>
-        </p:spPr>
-        <p:txBody>
-          <a:bodyPr wrap="square" lIns="0" tIns="0" rIns="0" bIns="0" rtlCol="0" anchor="t"/>
-          <a:lstStyle/>
-          <a:p>
-            <a:pPr algn="l" indent="0" marL="0">
-              <a:lnSpc>
-                <a:spcPct val="120000"/>
-              </a:lnSpc>
-              <a:buNone/>
-            </a:pPr>
-            <a:r>
-              <a:rPr lang="en-US" sz="2100" b="1" dirty="0">
-                <a:solidFill>
-                  <a:srgbClr val="595959"/>
-                </a:solidFill>
-                <a:latin typeface="メイリオ" pitchFamily="34" charset="0"/>
-                <a:ea typeface="メイリオ" pitchFamily="34" charset="-122"/>
-                <a:cs typeface="メイリオ" pitchFamily="34" charset="-120"/>
-              </a:rPr>
-              <a:t>これから求められる子どもは、</a:t>
-            </a:r>
-            <a:endParaRPr lang="en-US" sz="2100" dirty="0"/>
-          </a:p>
-          <a:p>
-            <a:pPr algn="l" indent="0" marL="0">
-              <a:lnSpc>
-                <a:spcPct val="120000"/>
-              </a:lnSpc>
-              <a:buNone/>
-            </a:pPr>
-            <a:r>
-              <a:rPr lang="en-US" sz="2100" b="1" dirty="0">
-                <a:solidFill>
-                  <a:srgbClr val="595959"/>
-                </a:solidFill>
-                <a:latin typeface="メイリオ" pitchFamily="34" charset="0"/>
-                <a:ea typeface="メイリオ" pitchFamily="34" charset="-122"/>
-                <a:cs typeface="メイリオ" pitchFamily="34" charset="-120"/>
-              </a:rPr>
-              <a:t>　教えられたことを学ぶ子どもではなく、</a:t>
-            </a:r>
-            <a:endParaRPr lang="en-US" sz="2100" dirty="0"/>
-          </a:p>
-          <a:p>
-            <a:pPr algn="l" indent="0" marL="0">
-              <a:lnSpc>
-                <a:spcPct val="120000"/>
-              </a:lnSpc>
-              <a:buNone/>
-            </a:pPr>
-            <a:r>
-              <a:rPr lang="en-US" sz="2100" b="1" dirty="0">
-                <a:solidFill>
-                  <a:srgbClr val="595959"/>
-                </a:solidFill>
-                <a:latin typeface="メイリオ" pitchFamily="34" charset="0"/>
-                <a:ea typeface="メイリオ" pitchFamily="34" charset="-122"/>
-                <a:cs typeface="メイリオ" pitchFamily="34" charset="-120"/>
-              </a:rPr>
-              <a:t>　</a:t>
-            </a:r>
-            <a:pPr algn="l" indent="0" marL="0">
-              <a:lnSpc>
-                <a:spcPct val="120000"/>
-              </a:lnSpc>
-              <a:buNone/>
-            </a:pPr>
-            <a:r>
-              <a:rPr lang="en-US" sz="2100" b="1" dirty="0">
-                <a:solidFill>
-                  <a:srgbClr val="EE7B08"/>
-                </a:solidFill>
-                <a:latin typeface="メイリオ" pitchFamily="34" charset="0"/>
-                <a:ea typeface="メイリオ" pitchFamily="34" charset="-122"/>
-                <a:cs typeface="メイリオ" pitchFamily="34" charset="-120"/>
-              </a:rPr>
-              <a:t>自分で学び続ける子ども</a:t>
-            </a:r>
-            <a:pPr algn="l" indent="0" marL="0">
-              <a:lnSpc>
-                <a:spcPct val="120000"/>
-              </a:lnSpc>
-              <a:buNone/>
-            </a:pPr>
-            <a:r>
-              <a:rPr lang="en-US" sz="2100" b="1" dirty="0">
-                <a:solidFill>
-                  <a:srgbClr val="595959"/>
-                </a:solidFill>
-                <a:latin typeface="メイリオ" pitchFamily="34" charset="0"/>
-                <a:ea typeface="メイリオ" pitchFamily="34" charset="-122"/>
-                <a:cs typeface="メイリオ" pitchFamily="34" charset="-120"/>
-              </a:rPr>
-              <a:t>である。</a:t>
-            </a:r>
-            <a:endParaRPr lang="en-US" sz="2100" dirty="0"/>
-          </a:p>
-        </p:txBody>
-      </p:sp>
-      <p:sp>
-        <p:nvSpPr>
-          <p:cNvPr id="4" name="Text 2"/>
-          <p:cNvSpPr txBox="1"/>
-          <p:nvPr/>
-        </p:nvSpPr>
-        <p:spPr>
-          <a:xfrm>
-            <a:off x="475488" y="2880360"/>
-            <a:ext cx="8193024" cy="502920"/>
-          </a:xfrm>
-          <a:prstGeom prst="rect">
-            <a:avLst/>
-          </a:prstGeom>
-          <a:noFill/>
-          <a:ln/>
-        </p:spPr>
-        <p:txBody>
-          <a:bodyPr wrap="square" lIns="0" tIns="0" rIns="0" bIns="0" rtlCol="0" anchor="t"/>
-          <a:lstStyle/>
-          <a:p>
-            <a:pPr algn="l" indent="0" marL="0">
-              <a:lnSpc>
-                <a:spcPct val="120000"/>
-              </a:lnSpc>
-              <a:buNone/>
-            </a:pPr>
-            <a:r>
-              <a:rPr lang="en-US" sz="2100" b="1" dirty="0">
-                <a:solidFill>
-                  <a:srgbClr val="595959"/>
-                </a:solidFill>
-                <a:latin typeface="メイリオ" pitchFamily="34" charset="0"/>
-                <a:ea typeface="メイリオ" pitchFamily="34" charset="-122"/>
-                <a:cs typeface="メイリオ" pitchFamily="34" charset="-120"/>
-              </a:rPr>
-              <a:t>そのために必要なのが</a:t>
-            </a:r>
-            <a:pPr algn="l" indent="0" marL="0">
-              <a:lnSpc>
-                <a:spcPct val="120000"/>
-              </a:lnSpc>
-              <a:buNone/>
-            </a:pPr>
-            <a:r>
-              <a:rPr lang="en-US" sz="2100" b="1" dirty="0">
-                <a:solidFill>
-                  <a:srgbClr val="EE7B08"/>
-                </a:solidFill>
-                <a:latin typeface="メイリオ" pitchFamily="34" charset="0"/>
-                <a:ea typeface="メイリオ" pitchFamily="34" charset="-122"/>
-                <a:cs typeface="メイリオ" pitchFamily="34" charset="-120"/>
-              </a:rPr>
-              <a:t>学習の自己調整</a:t>
-            </a:r>
-            <a:pPr algn="l" indent="0" marL="0">
-              <a:lnSpc>
-                <a:spcPct val="120000"/>
-              </a:lnSpc>
-              <a:buNone/>
-            </a:pPr>
-            <a:r>
-              <a:rPr lang="en-US" sz="2100" b="1" dirty="0">
-                <a:solidFill>
-                  <a:srgbClr val="595959"/>
-                </a:solidFill>
-                <a:latin typeface="メイリオ" pitchFamily="34" charset="0"/>
-                <a:ea typeface="メイリオ" pitchFamily="34" charset="-122"/>
-                <a:cs typeface="メイリオ" pitchFamily="34" charset="-120"/>
-              </a:rPr>
-              <a:t>である。</a:t>
-            </a:r>
-            <a:endParaRPr lang="en-US" sz="2100" dirty="0"/>
-          </a:p>
-        </p:txBody>
-      </p:sp>
-      <p:sp>
-        <p:nvSpPr>
-          <p:cNvPr id="5" name="Shape 3"/>
+          <p:cNvPr id="3" name="Shape 1"/>
           <p:cNvSpPr/>
           <p:nvPr/>
         </p:nvSpPr>
         <p:spPr>
           <a:xfrm>
-            <a:off x="475488" y="3611880"/>
-            <a:ext cx="8193024" cy="822960"/>
+            <a:off x="320040" y="1417320"/>
+            <a:ext cx="2697480" cy="2395728"/>
           </a:xfrm>
           <a:prstGeom prst="roundRect">
             <a:avLst>
-              <a:gd name="adj" fmla="val 6667"/>
+              <a:gd name="adj" fmla="val 2290"/>
             </a:avLst>
           </a:prstGeom>
           <a:solidFill>
@@ -6045,14 +5755,261 @@
       </p:sp>
       <p:sp>
         <p:nvSpPr>
+          <p:cNvPr id="4" name="Text 2"/>
+          <p:cNvSpPr txBox="1"/>
+          <p:nvPr/>
+        </p:nvSpPr>
+        <p:spPr>
+          <a:xfrm>
+            <a:off x="466344" y="1527048"/>
+            <a:ext cx="2404872" cy="274320"/>
+          </a:xfrm>
+          <a:prstGeom prst="rect">
+            <a:avLst/>
+          </a:prstGeom>
+          <a:noFill/>
+          <a:ln/>
+        </p:spPr>
+        <p:txBody>
+          <a:bodyPr wrap="square" lIns="0" tIns="0" rIns="0" bIns="0" rtlCol="0" anchor="ctr"/>
+          <a:lstStyle/>
+          <a:p>
+            <a:pPr algn="l" indent="0" marL="0">
+              <a:buNone/>
+            </a:pPr>
+            <a:r>
+              <a:rPr lang="en-US" sz="1600" b="1" dirty="0">
+                <a:solidFill>
+                  <a:srgbClr val="44C1A3"/>
+                </a:solidFill>
+                <a:latin typeface="メイリオ" pitchFamily="34" charset="0"/>
+                <a:ea typeface="メイリオ" pitchFamily="34" charset="-122"/>
+                <a:cs typeface="メイリオ" pitchFamily="34" charset="-120"/>
+              </a:rPr>
+              <a:t>保健体育</a:t>
+            </a:r>
+            <a:endParaRPr lang="en-US" sz="1600" dirty="0"/>
+          </a:p>
+        </p:txBody>
+      </p:sp>
+      <p:sp>
+        <p:nvSpPr>
+          <p:cNvPr id="5" name="Text 3"/>
+          <p:cNvSpPr txBox="1"/>
+          <p:nvPr/>
+        </p:nvSpPr>
+        <p:spPr>
+          <a:xfrm>
+            <a:off x="466344" y="1801368"/>
+            <a:ext cx="2404872" cy="237744"/>
+          </a:xfrm>
+          <a:prstGeom prst="rect">
+            <a:avLst/>
+          </a:prstGeom>
+          <a:noFill/>
+          <a:ln/>
+        </p:spPr>
+        <p:txBody>
+          <a:bodyPr wrap="square" lIns="0" tIns="0" rIns="0" bIns="0" rtlCol="0" anchor="ctr"/>
+          <a:lstStyle/>
+          <a:p>
+            <a:pPr algn="l" indent="0" marL="0">
+              <a:buNone/>
+            </a:pPr>
+            <a:r>
+              <a:rPr lang="en-US" sz="1100" b="1" dirty="0">
+                <a:solidFill>
+                  <a:srgbClr val="808080"/>
+                </a:solidFill>
+                <a:latin typeface="メイリオ" pitchFamily="34" charset="0"/>
+                <a:ea typeface="メイリオ" pitchFamily="34" charset="-122"/>
+                <a:cs typeface="メイリオ" pitchFamily="34" charset="-120"/>
+              </a:rPr>
+              <a:t>田口　和磨　先生</a:t>
+            </a:r>
+            <a:endParaRPr lang="en-US" sz="1100" dirty="0"/>
+          </a:p>
+        </p:txBody>
+      </p:sp>
+      <p:sp>
+        <p:nvSpPr>
           <p:cNvPr id="6" name="Text 4"/>
           <p:cNvSpPr txBox="1"/>
           <p:nvPr/>
         </p:nvSpPr>
         <p:spPr>
           <a:xfrm>
-            <a:off x="731520" y="3611880"/>
-            <a:ext cx="7680960" cy="822960"/>
+            <a:off x="466344" y="2075688"/>
+            <a:ext cx="2404872" cy="1609344"/>
+          </a:xfrm>
+          <a:prstGeom prst="rect">
+            <a:avLst/>
+          </a:prstGeom>
+          <a:noFill/>
+          <a:ln/>
+        </p:spPr>
+        <p:txBody>
+          <a:bodyPr wrap="square" lIns="0" tIns="0" rIns="0" bIns="0" rtlCol="0" anchor="t"/>
+          <a:lstStyle/>
+          <a:p>
+            <a:pPr algn="l" indent="0" marL="0">
+              <a:lnSpc>
+                <a:spcPct val="125000"/>
+              </a:lnSpc>
+              <a:buNone/>
+            </a:pPr>
+            <a:r>
+              <a:rPr lang="en-US" sz="1350" b="1" dirty="0">
+                <a:solidFill>
+                  <a:srgbClr val="595959"/>
+                </a:solidFill>
+                <a:latin typeface="メイリオ" pitchFamily="34" charset="0"/>
+                <a:ea typeface="メイリオ" pitchFamily="34" charset="-122"/>
+                <a:cs typeface="メイリオ" pitchFamily="34" charset="-120"/>
+              </a:rPr>
+              <a:t>バディ同士で</a:t>
+            </a:r>
+            <a:endParaRPr lang="en-US" sz="1350" dirty="0"/>
+          </a:p>
+          <a:p>
+            <a:pPr algn="l" indent="0" marL="0">
+              <a:lnSpc>
+                <a:spcPct val="125000"/>
+              </a:lnSpc>
+              <a:buNone/>
+            </a:pPr>
+            <a:r>
+              <a:rPr lang="en-US" sz="1350" b="1" dirty="0">
+                <a:solidFill>
+                  <a:srgbClr val="EE7B08"/>
+                </a:solidFill>
+                <a:latin typeface="メイリオ" pitchFamily="34" charset="0"/>
+                <a:ea typeface="メイリオ" pitchFamily="34" charset="-122"/>
+                <a:cs typeface="メイリオ" pitchFamily="34" charset="-120"/>
+              </a:rPr>
+              <a:t>互いの泳ぎを見て</a:t>
+            </a:r>
+            <a:endParaRPr lang="en-US" sz="1350" dirty="0"/>
+          </a:p>
+          <a:p>
+            <a:pPr algn="l" indent="0" marL="0">
+              <a:lnSpc>
+                <a:spcPct val="125000"/>
+              </a:lnSpc>
+              <a:buNone/>
+            </a:pPr>
+            <a:r>
+              <a:rPr lang="en-US" sz="1350" b="1" dirty="0">
+                <a:solidFill>
+                  <a:srgbClr val="EE7B08"/>
+                </a:solidFill>
+                <a:latin typeface="メイリオ" pitchFamily="34" charset="0"/>
+                <a:ea typeface="メイリオ" pitchFamily="34" charset="-122"/>
+                <a:cs typeface="メイリオ" pitchFamily="34" charset="-120"/>
+              </a:rPr>
+              <a:t>改善点を考えていた。</a:t>
+            </a:r>
+            <a:endParaRPr lang="en-US" sz="1350" dirty="0"/>
+          </a:p>
+          <a:p>
+            <a:pPr algn="l" indent="0" marL="0">
+              <a:lnSpc>
+                <a:spcPct val="125000"/>
+              </a:lnSpc>
+              <a:buNone/>
+            </a:pPr>
+            <a:r>
+              <a:rPr lang="en-US" sz="1350" b="1" dirty="0">
+                <a:solidFill>
+                  <a:srgbClr val="595959"/>
+                </a:solidFill>
+                <a:latin typeface="メイリオ" pitchFamily="34" charset="0"/>
+                <a:ea typeface="メイリオ" pitchFamily="34" charset="-122"/>
+                <a:cs typeface="メイリオ" pitchFamily="34" charset="-120"/>
+              </a:rPr>
+              <a:t>得意な生徒が助言役を</a:t>
+            </a:r>
+            <a:endParaRPr lang="en-US" sz="1350" dirty="0"/>
+          </a:p>
+          <a:p>
+            <a:pPr algn="l" indent="0" marL="0">
+              <a:lnSpc>
+                <a:spcPct val="125000"/>
+              </a:lnSpc>
+              <a:buNone/>
+            </a:pPr>
+            <a:r>
+              <a:rPr lang="en-US" sz="1350" b="1" dirty="0">
+                <a:solidFill>
+                  <a:srgbClr val="595959"/>
+                </a:solidFill>
+                <a:latin typeface="メイリオ" pitchFamily="34" charset="0"/>
+                <a:ea typeface="メイリオ" pitchFamily="34" charset="-122"/>
+                <a:cs typeface="メイリオ" pitchFamily="34" charset="-120"/>
+              </a:rPr>
+              <a:t>担い、全員に役割が</a:t>
+            </a:r>
+            <a:endParaRPr lang="en-US" sz="1350" dirty="0"/>
+          </a:p>
+          <a:p>
+            <a:pPr algn="l" indent="0" marL="0">
+              <a:lnSpc>
+                <a:spcPct val="125000"/>
+              </a:lnSpc>
+              <a:buNone/>
+            </a:pPr>
+            <a:r>
+              <a:rPr lang="en-US" sz="1350" b="1" dirty="0">
+                <a:solidFill>
+                  <a:srgbClr val="595959"/>
+                </a:solidFill>
+                <a:latin typeface="メイリオ" pitchFamily="34" charset="0"/>
+                <a:ea typeface="メイリオ" pitchFamily="34" charset="-122"/>
+                <a:cs typeface="メイリオ" pitchFamily="34" charset="-120"/>
+              </a:rPr>
+              <a:t>あった。</a:t>
+            </a:r>
+            <a:endParaRPr lang="en-US" sz="1350" dirty="0"/>
+          </a:p>
+        </p:txBody>
+      </p:sp>
+      <p:sp>
+        <p:nvSpPr>
+          <p:cNvPr id="7" name="Shape 5"/>
+          <p:cNvSpPr/>
+          <p:nvPr/>
+        </p:nvSpPr>
+        <p:spPr>
+          <a:xfrm>
+            <a:off x="3227832" y="1417320"/>
+            <a:ext cx="2697480" cy="2395728"/>
+          </a:xfrm>
+          <a:prstGeom prst="roundRect">
+            <a:avLst>
+              <a:gd name="adj" fmla="val 2290"/>
+            </a:avLst>
+          </a:prstGeom>
+          <a:solidFill>
+            <a:srgbClr val="E9F7F3"/>
+          </a:solidFill>
+          <a:ln w="12700">
+            <a:solidFill>
+              <a:srgbClr val="B9E5DA"/>
+            </a:solidFill>
+            <a:prstDash val="solid"/>
+          </a:ln>
+        </p:spPr>
+      </p:sp>
+      <p:sp>
+        <p:nvSpPr>
+          <p:cNvPr id="8" name="Text 6"/>
+          <p:cNvSpPr txBox="1"/>
+          <p:nvPr/>
+        </p:nvSpPr>
+        <p:spPr>
+          <a:xfrm>
+            <a:off x="3374136" y="1527048"/>
+            <a:ext cx="2404872" cy="274320"/>
           </a:xfrm>
           <a:prstGeom prst="rect">
             <a:avLst/>
@@ -6070,13 +6027,500 @@
             <a:r>
               <a:rPr lang="en-US" sz="1600" b="1" dirty="0">
                 <a:solidFill>
+                  <a:srgbClr val="44C1A3"/>
+                </a:solidFill>
+                <a:latin typeface="メイリオ" pitchFamily="34" charset="0"/>
+                <a:ea typeface="メイリオ" pitchFamily="34" charset="-122"/>
+                <a:cs typeface="メイリオ" pitchFamily="34" charset="-120"/>
+              </a:rPr>
+              <a:t>道徳</a:t>
+            </a:r>
+            <a:endParaRPr lang="en-US" sz="1600" dirty="0"/>
+          </a:p>
+        </p:txBody>
+      </p:sp>
+      <p:sp>
+        <p:nvSpPr>
+          <p:cNvPr id="9" name="Text 7"/>
+          <p:cNvSpPr txBox="1"/>
+          <p:nvPr/>
+        </p:nvSpPr>
+        <p:spPr>
+          <a:xfrm>
+            <a:off x="3374136" y="1801368"/>
+            <a:ext cx="2404872" cy="237744"/>
+          </a:xfrm>
+          <a:prstGeom prst="rect">
+            <a:avLst/>
+          </a:prstGeom>
+          <a:noFill/>
+          <a:ln/>
+        </p:spPr>
+        <p:txBody>
+          <a:bodyPr wrap="square" lIns="0" tIns="0" rIns="0" bIns="0" rtlCol="0" anchor="ctr"/>
+          <a:lstStyle/>
+          <a:p>
+            <a:pPr algn="l" indent="0" marL="0">
+              <a:buNone/>
+            </a:pPr>
+            <a:r>
+              <a:rPr lang="en-US" sz="1100" b="1" dirty="0">
+                <a:solidFill>
+                  <a:srgbClr val="808080"/>
+                </a:solidFill>
+                <a:latin typeface="メイリオ" pitchFamily="34" charset="0"/>
+                <a:ea typeface="メイリオ" pitchFamily="34" charset="-122"/>
+                <a:cs typeface="メイリオ" pitchFamily="34" charset="-120"/>
+              </a:rPr>
+              <a:t>東海林　静江　先生</a:t>
+            </a:r>
+            <a:endParaRPr lang="en-US" sz="1100" dirty="0"/>
+          </a:p>
+        </p:txBody>
+      </p:sp>
+      <p:sp>
+        <p:nvSpPr>
+          <p:cNvPr id="10" name="Text 8"/>
+          <p:cNvSpPr txBox="1"/>
+          <p:nvPr/>
+        </p:nvSpPr>
+        <p:spPr>
+          <a:xfrm>
+            <a:off x="3374136" y="2075688"/>
+            <a:ext cx="2404872" cy="1609344"/>
+          </a:xfrm>
+          <a:prstGeom prst="rect">
+            <a:avLst/>
+          </a:prstGeom>
+          <a:noFill/>
+          <a:ln/>
+        </p:spPr>
+        <p:txBody>
+          <a:bodyPr wrap="square" lIns="0" tIns="0" rIns="0" bIns="0" rtlCol="0" anchor="t"/>
+          <a:lstStyle/>
+          <a:p>
+            <a:pPr algn="l" indent="0" marL="0">
+              <a:lnSpc>
+                <a:spcPct val="125000"/>
+              </a:lnSpc>
+              <a:buNone/>
+            </a:pPr>
+            <a:r>
+              <a:rPr lang="en-US" sz="1350" b="1" dirty="0">
+                <a:solidFill>
                   <a:srgbClr val="595959"/>
                 </a:solidFill>
                 <a:latin typeface="メイリオ" pitchFamily="34" charset="0"/>
                 <a:ea typeface="メイリオ" pitchFamily="34" charset="-122"/>
                 <a:cs typeface="メイリオ" pitchFamily="34" charset="-120"/>
               </a:rPr>
-              <a:t>学習指導要領が示す「学びに向かう力」の中核をなす力である。</a:t>
+              <a:t>「嘘」をテーマに、</a:t>
+            </a:r>
+            <a:endParaRPr lang="en-US" sz="1350" dirty="0"/>
+          </a:p>
+          <a:p>
+            <a:pPr algn="l" indent="0" marL="0">
+              <a:lnSpc>
+                <a:spcPct val="125000"/>
+              </a:lnSpc>
+              <a:buNone/>
+            </a:pPr>
+            <a:r>
+              <a:rPr lang="en-US" sz="1350" b="1" dirty="0">
+                <a:solidFill>
+                  <a:srgbClr val="EE7B08"/>
+                </a:solidFill>
+                <a:latin typeface="メイリオ" pitchFamily="34" charset="0"/>
+                <a:ea typeface="メイリオ" pitchFamily="34" charset="-122"/>
+                <a:cs typeface="メイリオ" pitchFamily="34" charset="-120"/>
+              </a:rPr>
+              <a:t>価値観の違いについて</a:t>
+            </a:r>
+            <a:endParaRPr lang="en-US" sz="1350" dirty="0"/>
+          </a:p>
+          <a:p>
+            <a:pPr algn="l" indent="0" marL="0">
+              <a:lnSpc>
+                <a:spcPct val="125000"/>
+              </a:lnSpc>
+              <a:buNone/>
+            </a:pPr>
+            <a:r>
+              <a:rPr lang="en-US" sz="1350" b="1" dirty="0">
+                <a:solidFill>
+                  <a:srgbClr val="EE7B08"/>
+                </a:solidFill>
+                <a:latin typeface="メイリオ" pitchFamily="34" charset="0"/>
+                <a:ea typeface="メイリオ" pitchFamily="34" charset="-122"/>
+                <a:cs typeface="メイリオ" pitchFamily="34" charset="-120"/>
+              </a:rPr>
+              <a:t>議論していた。</a:t>
+            </a:r>
+            <a:endParaRPr lang="en-US" sz="1350" dirty="0"/>
+          </a:p>
+          <a:p>
+            <a:pPr algn="l" indent="0" marL="0">
+              <a:lnSpc>
+                <a:spcPct val="125000"/>
+              </a:lnSpc>
+              <a:buNone/>
+            </a:pPr>
+            <a:r>
+              <a:rPr lang="en-US" sz="1350" b="1" dirty="0">
+                <a:solidFill>
+                  <a:srgbClr val="595959"/>
+                </a:solidFill>
+                <a:latin typeface="メイリオ" pitchFamily="34" charset="0"/>
+                <a:ea typeface="メイリオ" pitchFamily="34" charset="-122"/>
+                <a:cs typeface="メイリオ" pitchFamily="34" charset="-120"/>
+              </a:rPr>
+              <a:t>発表より議論の時間を</a:t>
+            </a:r>
+            <a:endParaRPr lang="en-US" sz="1350" dirty="0"/>
+          </a:p>
+          <a:p>
+            <a:pPr algn="l" indent="0" marL="0">
+              <a:lnSpc>
+                <a:spcPct val="125000"/>
+              </a:lnSpc>
+              <a:buNone/>
+            </a:pPr>
+            <a:r>
+              <a:rPr lang="en-US" sz="1350" b="1" dirty="0">
+                <a:solidFill>
+                  <a:srgbClr val="595959"/>
+                </a:solidFill>
+                <a:latin typeface="メイリオ" pitchFamily="34" charset="0"/>
+                <a:ea typeface="メイリオ" pitchFamily="34" charset="-122"/>
+                <a:cs typeface="メイリオ" pitchFamily="34" charset="-120"/>
+              </a:rPr>
+              <a:t>重視した構成だった。</a:t>
+            </a:r>
+            <a:endParaRPr lang="en-US" sz="1350" dirty="0"/>
+          </a:p>
+        </p:txBody>
+      </p:sp>
+      <p:sp>
+        <p:nvSpPr>
+          <p:cNvPr id="11" name="Shape 9"/>
+          <p:cNvSpPr/>
+          <p:nvPr/>
+        </p:nvSpPr>
+        <p:spPr>
+          <a:xfrm>
+            <a:off x="6135624" y="1417320"/>
+            <a:ext cx="2697480" cy="2395728"/>
+          </a:xfrm>
+          <a:prstGeom prst="roundRect">
+            <a:avLst>
+              <a:gd name="adj" fmla="val 2290"/>
+            </a:avLst>
+          </a:prstGeom>
+          <a:solidFill>
+            <a:srgbClr val="E9F7F3"/>
+          </a:solidFill>
+          <a:ln w="12700">
+            <a:solidFill>
+              <a:srgbClr val="B9E5DA"/>
+            </a:solidFill>
+            <a:prstDash val="solid"/>
+          </a:ln>
+        </p:spPr>
+      </p:sp>
+      <p:sp>
+        <p:nvSpPr>
+          <p:cNvPr id="12" name="Text 10"/>
+          <p:cNvSpPr txBox="1"/>
+          <p:nvPr/>
+        </p:nvSpPr>
+        <p:spPr>
+          <a:xfrm>
+            <a:off x="6281928" y="1527048"/>
+            <a:ext cx="2404872" cy="274320"/>
+          </a:xfrm>
+          <a:prstGeom prst="rect">
+            <a:avLst/>
+          </a:prstGeom>
+          <a:noFill/>
+          <a:ln/>
+        </p:spPr>
+        <p:txBody>
+          <a:bodyPr wrap="square" lIns="0" tIns="0" rIns="0" bIns="0" rtlCol="0" anchor="ctr"/>
+          <a:lstStyle/>
+          <a:p>
+            <a:pPr algn="l" indent="0" marL="0">
+              <a:buNone/>
+            </a:pPr>
+            <a:r>
+              <a:rPr lang="en-US" sz="1600" b="1" dirty="0">
+                <a:solidFill>
+                  <a:srgbClr val="44C1A3"/>
+                </a:solidFill>
+                <a:latin typeface="メイリオ" pitchFamily="34" charset="0"/>
+                <a:ea typeface="メイリオ" pitchFamily="34" charset="-122"/>
+                <a:cs typeface="メイリオ" pitchFamily="34" charset="-120"/>
+              </a:rPr>
+              <a:t>外国語</a:t>
+            </a:r>
+            <a:endParaRPr lang="en-US" sz="1600" dirty="0"/>
+          </a:p>
+        </p:txBody>
+      </p:sp>
+      <p:sp>
+        <p:nvSpPr>
+          <p:cNvPr id="13" name="Text 11"/>
+          <p:cNvSpPr txBox="1"/>
+          <p:nvPr/>
+        </p:nvSpPr>
+        <p:spPr>
+          <a:xfrm>
+            <a:off x="6281928" y="1801368"/>
+            <a:ext cx="2404872" cy="237744"/>
+          </a:xfrm>
+          <a:prstGeom prst="rect">
+            <a:avLst/>
+          </a:prstGeom>
+          <a:noFill/>
+          <a:ln/>
+        </p:spPr>
+        <p:txBody>
+          <a:bodyPr wrap="square" lIns="0" tIns="0" rIns="0" bIns="0" rtlCol="0" anchor="ctr"/>
+          <a:lstStyle/>
+          <a:p>
+            <a:pPr algn="l" indent="0" marL="0">
+              <a:buNone/>
+            </a:pPr>
+            <a:r>
+              <a:rPr lang="en-US" sz="1100" b="1" dirty="0">
+                <a:solidFill>
+                  <a:srgbClr val="808080"/>
+                </a:solidFill>
+                <a:latin typeface="メイリオ" pitchFamily="34" charset="0"/>
+                <a:ea typeface="メイリオ" pitchFamily="34" charset="-122"/>
+                <a:cs typeface="メイリオ" pitchFamily="34" charset="-120"/>
+              </a:rPr>
+              <a:t>塚本　瑞穂　先生</a:t>
+            </a:r>
+            <a:endParaRPr lang="en-US" sz="1100" dirty="0"/>
+          </a:p>
+        </p:txBody>
+      </p:sp>
+      <p:sp>
+        <p:nvSpPr>
+          <p:cNvPr id="14" name="Text 12"/>
+          <p:cNvSpPr txBox="1"/>
+          <p:nvPr/>
+        </p:nvSpPr>
+        <p:spPr>
+          <a:xfrm>
+            <a:off x="6281928" y="2075688"/>
+            <a:ext cx="2404872" cy="1609344"/>
+          </a:xfrm>
+          <a:prstGeom prst="rect">
+            <a:avLst/>
+          </a:prstGeom>
+          <a:noFill/>
+          <a:ln/>
+        </p:spPr>
+        <p:txBody>
+          <a:bodyPr wrap="square" lIns="0" tIns="0" rIns="0" bIns="0" rtlCol="0" anchor="t"/>
+          <a:lstStyle/>
+          <a:p>
+            <a:pPr algn="l" indent="0" marL="0">
+              <a:lnSpc>
+                <a:spcPct val="125000"/>
+              </a:lnSpc>
+              <a:buNone/>
+            </a:pPr>
+            <a:r>
+              <a:rPr lang="en-US" sz="1350" b="1" dirty="0">
+                <a:solidFill>
+                  <a:srgbClr val="595959"/>
+                </a:solidFill>
+                <a:latin typeface="メイリオ" pitchFamily="34" charset="0"/>
+                <a:ea typeface="メイリオ" pitchFamily="34" charset="-122"/>
+                <a:cs typeface="メイリオ" pitchFamily="34" charset="-120"/>
+              </a:rPr>
+              <a:t>ペアでのやり取りから</a:t>
+            </a:r>
+            <a:endParaRPr lang="en-US" sz="1350" dirty="0"/>
+          </a:p>
+          <a:p>
+            <a:pPr algn="l" indent="0" marL="0">
+              <a:lnSpc>
+                <a:spcPct val="125000"/>
+              </a:lnSpc>
+              <a:buNone/>
+            </a:pPr>
+            <a:r>
+              <a:rPr lang="en-US" sz="1350" b="1" dirty="0">
+                <a:solidFill>
+                  <a:srgbClr val="EE7B08"/>
+                </a:solidFill>
+                <a:latin typeface="メイリオ" pitchFamily="34" charset="0"/>
+                <a:ea typeface="メイリオ" pitchFamily="34" charset="-122"/>
+                <a:cs typeface="メイリオ" pitchFamily="34" charset="-120"/>
+              </a:rPr>
+              <a:t>全体の学びへつなぐ。</a:t>
+            </a:r>
+            <a:endParaRPr lang="en-US" sz="1350" dirty="0"/>
+          </a:p>
+          <a:p>
+            <a:pPr algn="l" indent="0" marL="0">
+              <a:lnSpc>
+                <a:spcPct val="125000"/>
+              </a:lnSpc>
+              <a:buNone/>
+            </a:pPr>
+            <a:r>
+              <a:rPr lang="en-US" sz="1350" b="1" dirty="0">
+                <a:solidFill>
+                  <a:srgbClr val="595959"/>
+                </a:solidFill>
+                <a:latin typeface="メイリオ" pitchFamily="34" charset="0"/>
+                <a:ea typeface="メイリオ" pitchFamily="34" charset="-122"/>
+                <a:cs typeface="メイリオ" pitchFamily="34" charset="-120"/>
+              </a:rPr>
+              <a:t>音読も一人ではなく</a:t>
+            </a:r>
+            <a:endParaRPr lang="en-US" sz="1350" dirty="0"/>
+          </a:p>
+          <a:p>
+            <a:pPr algn="l" indent="0" marL="0">
+              <a:lnSpc>
+                <a:spcPct val="125000"/>
+              </a:lnSpc>
+              <a:buNone/>
+            </a:pPr>
+            <a:r>
+              <a:rPr lang="en-US" sz="1350" b="1" dirty="0">
+                <a:solidFill>
+                  <a:srgbClr val="EE7B08"/>
+                </a:solidFill>
+                <a:latin typeface="メイリオ" pitchFamily="34" charset="0"/>
+                <a:ea typeface="メイリオ" pitchFamily="34" charset="-122"/>
+                <a:cs typeface="メイリオ" pitchFamily="34" charset="-120"/>
+              </a:rPr>
+              <a:t>相手とともに行い、</a:t>
+            </a:r>
+            <a:endParaRPr lang="en-US" sz="1350" dirty="0"/>
+          </a:p>
+          <a:p>
+            <a:pPr algn="l" indent="0" marL="0">
+              <a:lnSpc>
+                <a:spcPct val="125000"/>
+              </a:lnSpc>
+              <a:buNone/>
+            </a:pPr>
+            <a:r>
+              <a:rPr lang="en-US" sz="1350" b="1" dirty="0">
+                <a:solidFill>
+                  <a:srgbClr val="595959"/>
+                </a:solidFill>
+                <a:latin typeface="メイリオ" pitchFamily="34" charset="0"/>
+                <a:ea typeface="メイリオ" pitchFamily="34" charset="-122"/>
+                <a:cs typeface="メイリオ" pitchFamily="34" charset="-120"/>
+              </a:rPr>
+              <a:t>表現を確かなものに</a:t>
+            </a:r>
+            <a:endParaRPr lang="en-US" sz="1350" dirty="0"/>
+          </a:p>
+          <a:p>
+            <a:pPr algn="l" indent="0" marL="0">
+              <a:lnSpc>
+                <a:spcPct val="125000"/>
+              </a:lnSpc>
+              <a:buNone/>
+            </a:pPr>
+            <a:r>
+              <a:rPr lang="en-US" sz="1350" b="1" dirty="0">
+                <a:solidFill>
+                  <a:srgbClr val="595959"/>
+                </a:solidFill>
+                <a:latin typeface="メイリオ" pitchFamily="34" charset="0"/>
+                <a:ea typeface="メイリオ" pitchFamily="34" charset="-122"/>
+                <a:cs typeface="メイリオ" pitchFamily="34" charset="-120"/>
+              </a:rPr>
+              <a:t>していた。</a:t>
+            </a:r>
+            <a:endParaRPr lang="en-US" sz="1350" dirty="0"/>
+          </a:p>
+        </p:txBody>
+      </p:sp>
+      <p:sp>
+        <p:nvSpPr>
+          <p:cNvPr id="15" name="Text 13"/>
+          <p:cNvSpPr txBox="1"/>
+          <p:nvPr/>
+        </p:nvSpPr>
+        <p:spPr>
+          <a:xfrm>
+            <a:off x="320040" y="3977640"/>
+            <a:ext cx="8503920" cy="822960"/>
+          </a:xfrm>
+          <a:prstGeom prst="rect">
+            <a:avLst/>
+          </a:prstGeom>
+          <a:noFill/>
+          <a:ln/>
+        </p:spPr>
+        <p:txBody>
+          <a:bodyPr wrap="square" lIns="0" tIns="0" rIns="0" bIns="0" rtlCol="0" anchor="t"/>
+          <a:lstStyle/>
+          <a:p>
+            <a:pPr algn="l" indent="0" marL="0">
+              <a:lnSpc>
+                <a:spcPct val="120000"/>
+              </a:lnSpc>
+              <a:buNone/>
+            </a:pPr>
+            <a:r>
+              <a:rPr lang="en-US" sz="1600" b="1" dirty="0">
+                <a:solidFill>
+                  <a:srgbClr val="595959"/>
+                </a:solidFill>
+                <a:latin typeface="メイリオ" pitchFamily="34" charset="0"/>
+                <a:ea typeface="メイリオ" pitchFamily="34" charset="-122"/>
+                <a:cs typeface="メイリオ" pitchFamily="34" charset="-120"/>
+              </a:rPr>
+              <a:t>教科は異なっても、共通していたのは</a:t>
+            </a:r>
+            <a:endParaRPr lang="en-US" sz="1600" dirty="0"/>
+          </a:p>
+          <a:p>
+            <a:pPr algn="l" indent="0" marL="0">
+              <a:lnSpc>
+                <a:spcPct val="120000"/>
+              </a:lnSpc>
+              <a:buNone/>
+            </a:pPr>
+            <a:r>
+              <a:rPr lang="en-US" sz="1600" b="1" dirty="0">
+                <a:solidFill>
+                  <a:srgbClr val="EE7B08"/>
+                </a:solidFill>
+                <a:latin typeface="メイリオ" pitchFamily="34" charset="0"/>
+                <a:ea typeface="メイリオ" pitchFamily="34" charset="-122"/>
+                <a:cs typeface="メイリオ" pitchFamily="34" charset="-120"/>
+              </a:rPr>
+              <a:t>「相手を通して自分を見つめる学び」</a:t>
+            </a:r>
+            <a:pPr algn="l" indent="0" marL="0">
+              <a:lnSpc>
+                <a:spcPct val="120000"/>
+              </a:lnSpc>
+              <a:buNone/>
+            </a:pPr>
+            <a:r>
+              <a:rPr lang="en-US" sz="1600" b="1" dirty="0">
+                <a:solidFill>
+                  <a:srgbClr val="595959"/>
+                </a:solidFill>
+                <a:latin typeface="メイリオ" pitchFamily="34" charset="0"/>
+                <a:ea typeface="メイリオ" pitchFamily="34" charset="-122"/>
+                <a:cs typeface="メイリオ" pitchFamily="34" charset="-120"/>
+              </a:rPr>
+              <a:t>であった。</a:t>
             </a:r>
             <a:endParaRPr lang="en-US" sz="1600" dirty="0"/>
           </a:p>
@@ -6165,7 +6609,7 @@
                 <a:ea typeface="メイリオ" pitchFamily="34" charset="-122"/>
                 <a:cs typeface="メイリオ" pitchFamily="34" charset="-120"/>
               </a:rPr>
-              <a:t>　③　自己調整が行われていた授業</a:t>
+              <a:t>　③　学習の自己調整</a:t>
             </a:r>
             <a:endParaRPr lang="en-US" sz="3000" dirty="0"/>
           </a:p>
@@ -6173,463 +6617,210 @@
       </p:sp>
       <p:sp>
         <p:nvSpPr>
-          <p:cNvPr id="3" name="Shape 1"/>
+          <p:cNvPr id="3" name="Text 1"/>
+          <p:cNvSpPr txBox="1"/>
+          <p:nvPr/>
+        </p:nvSpPr>
+        <p:spPr>
+          <a:xfrm>
+            <a:off x="475488" y="1444752"/>
+            <a:ext cx="8193024" cy="1280160"/>
+          </a:xfrm>
+          <a:prstGeom prst="rect">
+            <a:avLst/>
+          </a:prstGeom>
+          <a:noFill/>
+          <a:ln/>
+        </p:spPr>
+        <p:txBody>
+          <a:bodyPr wrap="square" lIns="0" tIns="0" rIns="0" bIns="0" rtlCol="0" anchor="t"/>
+          <a:lstStyle/>
+          <a:p>
+            <a:pPr algn="l" indent="0" marL="0">
+              <a:lnSpc>
+                <a:spcPct val="120000"/>
+              </a:lnSpc>
+              <a:buNone/>
+            </a:pPr>
+            <a:r>
+              <a:rPr lang="en-US" sz="2100" b="1" dirty="0">
+                <a:solidFill>
+                  <a:srgbClr val="595959"/>
+                </a:solidFill>
+                <a:latin typeface="メイリオ" pitchFamily="34" charset="0"/>
+                <a:ea typeface="メイリオ" pitchFamily="34" charset="-122"/>
+                <a:cs typeface="メイリオ" pitchFamily="34" charset="-120"/>
+              </a:rPr>
+              <a:t>これから求められる子どもは、</a:t>
+            </a:r>
+            <a:endParaRPr lang="en-US" sz="2100" dirty="0"/>
+          </a:p>
+          <a:p>
+            <a:pPr algn="l" indent="0" marL="0">
+              <a:lnSpc>
+                <a:spcPct val="120000"/>
+              </a:lnSpc>
+              <a:buNone/>
+            </a:pPr>
+            <a:r>
+              <a:rPr lang="en-US" sz="2100" b="1" dirty="0">
+                <a:solidFill>
+                  <a:srgbClr val="595959"/>
+                </a:solidFill>
+                <a:latin typeface="メイリオ" pitchFamily="34" charset="0"/>
+                <a:ea typeface="メイリオ" pitchFamily="34" charset="-122"/>
+                <a:cs typeface="メイリオ" pitchFamily="34" charset="-120"/>
+              </a:rPr>
+              <a:t>　教えられたことを学ぶ子どもではなく、</a:t>
+            </a:r>
+            <a:endParaRPr lang="en-US" sz="2100" dirty="0"/>
+          </a:p>
+          <a:p>
+            <a:pPr algn="l" indent="0" marL="0">
+              <a:lnSpc>
+                <a:spcPct val="120000"/>
+              </a:lnSpc>
+              <a:buNone/>
+            </a:pPr>
+            <a:r>
+              <a:rPr lang="en-US" sz="2100" b="1" dirty="0">
+                <a:solidFill>
+                  <a:srgbClr val="595959"/>
+                </a:solidFill>
+                <a:latin typeface="メイリオ" pitchFamily="34" charset="0"/>
+                <a:ea typeface="メイリオ" pitchFamily="34" charset="-122"/>
+                <a:cs typeface="メイリオ" pitchFamily="34" charset="-120"/>
+              </a:rPr>
+              <a:t>　</a:t>
+            </a:r>
+            <a:pPr algn="l" indent="0" marL="0">
+              <a:lnSpc>
+                <a:spcPct val="120000"/>
+              </a:lnSpc>
+              <a:buNone/>
+            </a:pPr>
+            <a:r>
+              <a:rPr lang="en-US" sz="2100" b="1" dirty="0">
+                <a:solidFill>
+                  <a:srgbClr val="EE7B08"/>
+                </a:solidFill>
+                <a:latin typeface="メイリオ" pitchFamily="34" charset="0"/>
+                <a:ea typeface="メイリオ" pitchFamily="34" charset="-122"/>
+                <a:cs typeface="メイリオ" pitchFamily="34" charset="-120"/>
+              </a:rPr>
+              <a:t>自分で学び続ける子ども</a:t>
+            </a:r>
+            <a:pPr algn="l" indent="0" marL="0">
+              <a:lnSpc>
+                <a:spcPct val="120000"/>
+              </a:lnSpc>
+              <a:buNone/>
+            </a:pPr>
+            <a:r>
+              <a:rPr lang="en-US" sz="2100" b="1" dirty="0">
+                <a:solidFill>
+                  <a:srgbClr val="595959"/>
+                </a:solidFill>
+                <a:latin typeface="メイリオ" pitchFamily="34" charset="0"/>
+                <a:ea typeface="メイリオ" pitchFamily="34" charset="-122"/>
+                <a:cs typeface="メイリオ" pitchFamily="34" charset="-120"/>
+              </a:rPr>
+              <a:t>である。</a:t>
+            </a:r>
+            <a:endParaRPr lang="en-US" sz="2100" dirty="0"/>
+          </a:p>
+        </p:txBody>
+      </p:sp>
+      <p:sp>
+        <p:nvSpPr>
+          <p:cNvPr id="4" name="Text 2"/>
+          <p:cNvSpPr txBox="1"/>
+          <p:nvPr/>
+        </p:nvSpPr>
+        <p:spPr>
+          <a:xfrm>
+            <a:off x="475488" y="2880360"/>
+            <a:ext cx="8193024" cy="502920"/>
+          </a:xfrm>
+          <a:prstGeom prst="rect">
+            <a:avLst/>
+          </a:prstGeom>
+          <a:noFill/>
+          <a:ln/>
+        </p:spPr>
+        <p:txBody>
+          <a:bodyPr wrap="square" lIns="0" tIns="0" rIns="0" bIns="0" rtlCol="0" anchor="t"/>
+          <a:lstStyle/>
+          <a:p>
+            <a:pPr algn="l" indent="0" marL="0">
+              <a:lnSpc>
+                <a:spcPct val="120000"/>
+              </a:lnSpc>
+              <a:buNone/>
+            </a:pPr>
+            <a:r>
+              <a:rPr lang="en-US" sz="2100" b="1" dirty="0">
+                <a:solidFill>
+                  <a:srgbClr val="595959"/>
+                </a:solidFill>
+                <a:latin typeface="メイリオ" pitchFamily="34" charset="0"/>
+                <a:ea typeface="メイリオ" pitchFamily="34" charset="-122"/>
+                <a:cs typeface="メイリオ" pitchFamily="34" charset="-120"/>
+              </a:rPr>
+              <a:t>そのために必要なのが</a:t>
+            </a:r>
+            <a:pPr algn="l" indent="0" marL="0">
+              <a:lnSpc>
+                <a:spcPct val="120000"/>
+              </a:lnSpc>
+              <a:buNone/>
+            </a:pPr>
+            <a:r>
+              <a:rPr lang="en-US" sz="2100" b="1" dirty="0">
+                <a:solidFill>
+                  <a:srgbClr val="EE7B08"/>
+                </a:solidFill>
+                <a:latin typeface="メイリオ" pitchFamily="34" charset="0"/>
+                <a:ea typeface="メイリオ" pitchFamily="34" charset="-122"/>
+                <a:cs typeface="メイリオ" pitchFamily="34" charset="-120"/>
+              </a:rPr>
+              <a:t>学習の自己調整</a:t>
+            </a:r>
+            <a:pPr algn="l" indent="0" marL="0">
+              <a:lnSpc>
+                <a:spcPct val="120000"/>
+              </a:lnSpc>
+              <a:buNone/>
+            </a:pPr>
+            <a:r>
+              <a:rPr lang="en-US" sz="2100" b="1" dirty="0">
+                <a:solidFill>
+                  <a:srgbClr val="595959"/>
+                </a:solidFill>
+                <a:latin typeface="メイリオ" pitchFamily="34" charset="0"/>
+                <a:ea typeface="メイリオ" pitchFamily="34" charset="-122"/>
+                <a:cs typeface="メイリオ" pitchFamily="34" charset="-120"/>
+              </a:rPr>
+              <a:t>である。</a:t>
+            </a:r>
+            <a:endParaRPr lang="en-US" sz="2100" dirty="0"/>
+          </a:p>
+        </p:txBody>
+      </p:sp>
+      <p:sp>
+        <p:nvSpPr>
+          <p:cNvPr id="5" name="Shape 3"/>
           <p:cNvSpPr/>
           <p:nvPr/>
         </p:nvSpPr>
         <p:spPr>
           <a:xfrm>
-            <a:off x="320040" y="1444752"/>
-            <a:ext cx="2011680" cy="530352"/>
+            <a:off x="475488" y="3611880"/>
+            <a:ext cx="8193024" cy="822960"/>
           </a:xfrm>
           <a:prstGeom prst="roundRect">
             <a:avLst>
-              <a:gd name="adj" fmla="val 12069"/>
-            </a:avLst>
-          </a:prstGeom>
-          <a:solidFill>
-            <a:srgbClr val="44C1A3"/>
-          </a:solidFill>
-          <a:ln/>
-        </p:spPr>
-      </p:sp>
-      <p:sp>
-        <p:nvSpPr>
-          <p:cNvPr id="4" name="Text 2"/>
-          <p:cNvSpPr txBox="1"/>
-          <p:nvPr/>
-        </p:nvSpPr>
-        <p:spPr>
-          <a:xfrm>
-            <a:off x="320040" y="1444752"/>
-            <a:ext cx="2011680" cy="530352"/>
-          </a:xfrm>
-          <a:prstGeom prst="rect">
-            <a:avLst/>
-          </a:prstGeom>
-          <a:noFill/>
-          <a:ln/>
-        </p:spPr>
-        <p:txBody>
-          <a:bodyPr wrap="square" lIns="0" tIns="0" rIns="0" bIns="0" rtlCol="0" anchor="ctr"/>
-          <a:lstStyle/>
-          <a:p>
-            <a:pPr algn="ctr" indent="0" marL="0">
-              <a:lnSpc>
-                <a:spcPct val="115000"/>
-              </a:lnSpc>
-              <a:buNone/>
-            </a:pPr>
-            <a:r>
-              <a:rPr lang="en-US" sz="1500" b="1" dirty="0">
-                <a:solidFill>
-                  <a:srgbClr val="FFFFFF"/>
-                </a:solidFill>
-                <a:latin typeface="メイリオ" pitchFamily="34" charset="0"/>
-                <a:ea typeface="メイリオ" pitchFamily="34" charset="-122"/>
-                <a:cs typeface="メイリオ" pitchFamily="34" charset="-120"/>
-              </a:rPr>
-              <a:t>本時の目標</a:t>
-            </a:r>
-            <a:endParaRPr lang="en-US" sz="1500" dirty="0"/>
-          </a:p>
-        </p:txBody>
-      </p:sp>
-      <p:sp>
-        <p:nvSpPr>
-          <p:cNvPr id="5" name="Shape 3"/>
-          <p:cNvSpPr/>
-          <p:nvPr/>
-        </p:nvSpPr>
-        <p:spPr>
-          <a:xfrm>
-            <a:off x="2514600" y="1444752"/>
-            <a:ext cx="2011680" cy="530352"/>
-          </a:xfrm>
-          <a:prstGeom prst="roundRect">
-            <a:avLst>
-              <a:gd name="adj" fmla="val 12069"/>
-            </a:avLst>
-          </a:prstGeom>
-          <a:solidFill>
-            <a:srgbClr val="44C1A3"/>
-          </a:solidFill>
-          <a:ln/>
-        </p:spPr>
-      </p:sp>
-      <p:sp>
-        <p:nvSpPr>
-          <p:cNvPr id="6" name="Text 4"/>
-          <p:cNvSpPr txBox="1"/>
-          <p:nvPr/>
-        </p:nvSpPr>
-        <p:spPr>
-          <a:xfrm>
-            <a:off x="2514600" y="1444752"/>
-            <a:ext cx="2011680" cy="530352"/>
-          </a:xfrm>
-          <a:prstGeom prst="rect">
-            <a:avLst/>
-          </a:prstGeom>
-          <a:noFill/>
-          <a:ln/>
-        </p:spPr>
-        <p:txBody>
-          <a:bodyPr wrap="square" lIns="0" tIns="0" rIns="0" bIns="0" rtlCol="0" anchor="ctr"/>
-          <a:lstStyle/>
-          <a:p>
-            <a:pPr algn="ctr" indent="0" marL="0">
-              <a:lnSpc>
-                <a:spcPct val="115000"/>
-              </a:lnSpc>
-              <a:buNone/>
-            </a:pPr>
-            <a:r>
-              <a:rPr lang="en-US" sz="1500" b="1" dirty="0">
-                <a:solidFill>
-                  <a:srgbClr val="FFFFFF"/>
-                </a:solidFill>
-                <a:latin typeface="メイリオ" pitchFamily="34" charset="0"/>
-                <a:ea typeface="メイリオ" pitchFamily="34" charset="-122"/>
-                <a:cs typeface="メイリオ" pitchFamily="34" charset="-120"/>
-              </a:rPr>
-              <a:t>振り返り</a:t>
-            </a:r>
-            <a:endParaRPr lang="en-US" sz="1500" dirty="0"/>
-          </a:p>
-        </p:txBody>
-      </p:sp>
-      <p:sp>
-        <p:nvSpPr>
-          <p:cNvPr id="7" name="Shape 5"/>
-          <p:cNvSpPr/>
-          <p:nvPr/>
-        </p:nvSpPr>
-        <p:spPr>
-          <a:xfrm>
-            <a:off x="4709160" y="1444752"/>
-            <a:ext cx="2011680" cy="530352"/>
-          </a:xfrm>
-          <a:prstGeom prst="roundRect">
-            <a:avLst>
-              <a:gd name="adj" fmla="val 12069"/>
-            </a:avLst>
-          </a:prstGeom>
-          <a:solidFill>
-            <a:srgbClr val="44C1A3"/>
-          </a:solidFill>
-          <a:ln/>
-        </p:spPr>
-      </p:sp>
-      <p:sp>
-        <p:nvSpPr>
-          <p:cNvPr id="8" name="Text 6"/>
-          <p:cNvSpPr txBox="1"/>
-          <p:nvPr/>
-        </p:nvSpPr>
-        <p:spPr>
-          <a:xfrm>
-            <a:off x="4709160" y="1444752"/>
-            <a:ext cx="2011680" cy="530352"/>
-          </a:xfrm>
-          <a:prstGeom prst="rect">
-            <a:avLst/>
-          </a:prstGeom>
-          <a:noFill/>
-          <a:ln/>
-        </p:spPr>
-        <p:txBody>
-          <a:bodyPr wrap="square" lIns="0" tIns="0" rIns="0" bIns="0" rtlCol="0" anchor="ctr"/>
-          <a:lstStyle/>
-          <a:p>
-            <a:pPr algn="ctr" indent="0" marL="0">
-              <a:lnSpc>
-                <a:spcPct val="115000"/>
-              </a:lnSpc>
-              <a:buNone/>
-            </a:pPr>
-            <a:r>
-              <a:rPr lang="en-US" sz="1500" b="1" dirty="0">
-                <a:solidFill>
-                  <a:srgbClr val="FFFFFF"/>
-                </a:solidFill>
-                <a:latin typeface="メイリオ" pitchFamily="34" charset="0"/>
-                <a:ea typeface="メイリオ" pitchFamily="34" charset="-122"/>
-                <a:cs typeface="メイリオ" pitchFamily="34" charset="-120"/>
-              </a:rPr>
-              <a:t>自己評価</a:t>
-            </a:r>
-            <a:endParaRPr lang="en-US" sz="1500" dirty="0"/>
-          </a:p>
-        </p:txBody>
-      </p:sp>
-      <p:sp>
-        <p:nvSpPr>
-          <p:cNvPr id="9" name="Shape 7"/>
-          <p:cNvSpPr/>
-          <p:nvPr/>
-        </p:nvSpPr>
-        <p:spPr>
-          <a:xfrm>
-            <a:off x="6903720" y="1444752"/>
-            <a:ext cx="2011680" cy="530352"/>
-          </a:xfrm>
-          <a:prstGeom prst="roundRect">
-            <a:avLst>
-              <a:gd name="adj" fmla="val 12069"/>
-            </a:avLst>
-          </a:prstGeom>
-          <a:solidFill>
-            <a:srgbClr val="44C1A3"/>
-          </a:solidFill>
-          <a:ln/>
-        </p:spPr>
-      </p:sp>
-      <p:sp>
-        <p:nvSpPr>
-          <p:cNvPr id="10" name="Text 8"/>
-          <p:cNvSpPr txBox="1"/>
-          <p:nvPr/>
-        </p:nvSpPr>
-        <p:spPr>
-          <a:xfrm>
-            <a:off x="6903720" y="1444752"/>
-            <a:ext cx="2011680" cy="530352"/>
-          </a:xfrm>
-          <a:prstGeom prst="rect">
-            <a:avLst/>
-          </a:prstGeom>
-          <a:noFill/>
-          <a:ln/>
-        </p:spPr>
-        <p:txBody>
-          <a:bodyPr wrap="square" lIns="0" tIns="0" rIns="0" bIns="0" rtlCol="0" anchor="ctr"/>
-          <a:lstStyle/>
-          <a:p>
-            <a:pPr algn="ctr" indent="0" marL="0">
-              <a:lnSpc>
-                <a:spcPct val="115000"/>
-              </a:lnSpc>
-              <a:buNone/>
-            </a:pPr>
-            <a:r>
-              <a:rPr lang="en-US" sz="1500" b="1" dirty="0">
-                <a:solidFill>
-                  <a:srgbClr val="FFFFFF"/>
-                </a:solidFill>
-                <a:latin typeface="メイリオ" pitchFamily="34" charset="0"/>
-                <a:ea typeface="メイリオ" pitchFamily="34" charset="-122"/>
-                <a:cs typeface="メイリオ" pitchFamily="34" charset="-120"/>
-              </a:rPr>
-              <a:t>次時への見通し</a:t>
-            </a:r>
-            <a:endParaRPr lang="en-US" sz="1500" dirty="0"/>
-          </a:p>
-        </p:txBody>
-      </p:sp>
-      <p:sp>
-        <p:nvSpPr>
-          <p:cNvPr id="11" name="Text 9"/>
-          <p:cNvSpPr txBox="1"/>
-          <p:nvPr/>
-        </p:nvSpPr>
-        <p:spPr>
-          <a:xfrm>
-            <a:off x="320040" y="2066544"/>
-            <a:ext cx="8503920" cy="320040"/>
-          </a:xfrm>
-          <a:prstGeom prst="rect">
-            <a:avLst/>
-          </a:prstGeom>
-          <a:noFill/>
-          <a:ln/>
-        </p:spPr>
-        <p:txBody>
-          <a:bodyPr wrap="square" lIns="0" tIns="0" rIns="0" bIns="0" rtlCol="0" anchor="ctr"/>
-          <a:lstStyle/>
-          <a:p>
-            <a:pPr algn="l" indent="0" marL="0">
-              <a:buNone/>
-            </a:pPr>
-            <a:r>
-              <a:rPr lang="en-US" sz="1400" b="1" dirty="0">
-                <a:solidFill>
-                  <a:srgbClr val="808080"/>
-                </a:solidFill>
-                <a:latin typeface="メイリオ" pitchFamily="34" charset="0"/>
-                <a:ea typeface="メイリオ" pitchFamily="34" charset="-122"/>
-                <a:cs typeface="メイリオ" pitchFamily="34" charset="-120"/>
-              </a:rPr>
-              <a:t>本日の授業では、この４点が大切にされていた。</a:t>
-            </a:r>
-            <a:endParaRPr lang="en-US" sz="1400" dirty="0"/>
-          </a:p>
-        </p:txBody>
-      </p:sp>
-      <p:sp>
-        <p:nvSpPr>
-          <p:cNvPr id="12" name="Text 10"/>
-          <p:cNvSpPr txBox="1"/>
-          <p:nvPr/>
-        </p:nvSpPr>
-        <p:spPr>
-          <a:xfrm>
-            <a:off x="320040" y="2468880"/>
-            <a:ext cx="8503920" cy="1188720"/>
-          </a:xfrm>
-          <a:prstGeom prst="rect">
-            <a:avLst/>
-          </a:prstGeom>
-          <a:noFill/>
-          <a:ln/>
-        </p:spPr>
-        <p:txBody>
-          <a:bodyPr wrap="square" lIns="0" tIns="0" rIns="0" bIns="0" rtlCol="0" anchor="t"/>
-          <a:lstStyle/>
-          <a:p>
-            <a:pPr algn="l" indent="0" marL="0">
-              <a:lnSpc>
-                <a:spcPct val="150000"/>
-              </a:lnSpc>
-              <a:buNone/>
-            </a:pPr>
-            <a:r>
-              <a:rPr lang="en-US" sz="1500" b="1" dirty="0">
-                <a:solidFill>
-                  <a:srgbClr val="595959"/>
-                </a:solidFill>
-                <a:latin typeface="メイリオ" pitchFamily="34" charset="0"/>
-                <a:ea typeface="メイリオ" pitchFamily="34" charset="-122"/>
-                <a:cs typeface="メイリオ" pitchFamily="34" charset="-120"/>
-              </a:rPr>
-              <a:t>・田口　先生　　着替えの前に目標と流れを確認し、</a:t>
-            </a:r>
-            <a:pPr algn="l" indent="0" marL="0">
-              <a:lnSpc>
-                <a:spcPct val="150000"/>
-              </a:lnSpc>
-              <a:buNone/>
-            </a:pPr>
-            <a:r>
-              <a:rPr lang="en-US" sz="1500" b="1" dirty="0">
-                <a:solidFill>
-                  <a:srgbClr val="EE7B08"/>
-                </a:solidFill>
-                <a:latin typeface="メイリオ" pitchFamily="34" charset="0"/>
-                <a:ea typeface="メイリオ" pitchFamily="34" charset="-122"/>
-                <a:cs typeface="メイリオ" pitchFamily="34" charset="-120"/>
-              </a:rPr>
-              <a:t>学習カードで要点を振り返る</a:t>
-            </a:r>
-            <a:endParaRPr lang="en-US" sz="1500" dirty="0"/>
-          </a:p>
-          <a:p>
-            <a:pPr algn="l" indent="0" marL="0">
-              <a:lnSpc>
-                <a:spcPct val="150000"/>
-              </a:lnSpc>
-              <a:buNone/>
-            </a:pPr>
-            <a:r>
-              <a:rPr lang="en-US" sz="1500" b="1" dirty="0">
-                <a:solidFill>
-                  <a:srgbClr val="595959"/>
-                </a:solidFill>
-                <a:latin typeface="メイリオ" pitchFamily="34" charset="0"/>
-                <a:ea typeface="メイリオ" pitchFamily="34" charset="-122"/>
-                <a:cs typeface="メイリオ" pitchFamily="34" charset="-120"/>
-              </a:rPr>
-              <a:t>・塚本　先生　　Today’s Goal と Plan を提示し、</a:t>
-            </a:r>
-            <a:pPr algn="l" indent="0" marL="0">
-              <a:lnSpc>
-                <a:spcPct val="150000"/>
-              </a:lnSpc>
-              <a:buNone/>
-            </a:pPr>
-            <a:r>
-              <a:rPr lang="en-US" sz="1500" b="1" dirty="0">
-                <a:solidFill>
-                  <a:srgbClr val="EE7B08"/>
-                </a:solidFill>
-                <a:latin typeface="メイリオ" pitchFamily="34" charset="0"/>
-                <a:ea typeface="メイリオ" pitchFamily="34" charset="-122"/>
-                <a:cs typeface="メイリオ" pitchFamily="34" charset="-120"/>
-              </a:rPr>
-              <a:t>振り返りをワークシートに記入</a:t>
-            </a:r>
-            <a:endParaRPr lang="en-US" sz="1500" dirty="0"/>
-          </a:p>
-          <a:p>
-            <a:pPr algn="l" indent="0" marL="0">
-              <a:lnSpc>
-                <a:spcPct val="150000"/>
-              </a:lnSpc>
-              <a:buNone/>
-            </a:pPr>
-            <a:r>
-              <a:rPr lang="en-US" sz="1500" b="1" dirty="0">
-                <a:solidFill>
-                  <a:srgbClr val="595959"/>
-                </a:solidFill>
-                <a:latin typeface="メイリオ" pitchFamily="34" charset="0"/>
-                <a:ea typeface="メイリオ" pitchFamily="34" charset="-122"/>
-                <a:cs typeface="メイリオ" pitchFamily="34" charset="-120"/>
-              </a:rPr>
-              <a:t>・東海林　先生　</a:t>
-            </a:r>
-            <a:pPr algn="l" indent="0" marL="0">
-              <a:lnSpc>
-                <a:spcPct val="150000"/>
-              </a:lnSpc>
-              <a:buNone/>
-            </a:pPr>
-            <a:r>
-              <a:rPr lang="en-US" sz="1500" b="1" dirty="0">
-                <a:solidFill>
-                  <a:srgbClr val="EE7B08"/>
-                </a:solidFill>
-                <a:latin typeface="メイリオ" pitchFamily="34" charset="0"/>
-                <a:ea typeface="メイリオ" pitchFamily="34" charset="-122"/>
-                <a:cs typeface="メイリオ" pitchFamily="34" charset="-120"/>
-              </a:rPr>
-              <a:t>前時のワークシート</a:t>
-            </a:r>
-            <a:pPr algn="l" indent="0" marL="0">
-              <a:lnSpc>
-                <a:spcPct val="150000"/>
-              </a:lnSpc>
-              <a:buNone/>
-            </a:pPr>
-            <a:r>
-              <a:rPr lang="en-US" sz="1500" b="1" dirty="0">
-                <a:solidFill>
-                  <a:srgbClr val="595959"/>
-                </a:solidFill>
-                <a:latin typeface="メイリオ" pitchFamily="34" charset="0"/>
-                <a:ea typeface="メイリオ" pitchFamily="34" charset="-122"/>
-                <a:cs typeface="メイリオ" pitchFamily="34" charset="-120"/>
-              </a:rPr>
-              <a:t>で自分の考えを確かめてから議論へ</a:t>
-            </a:r>
-            <a:endParaRPr lang="en-US" sz="1500" dirty="0"/>
-          </a:p>
-        </p:txBody>
-      </p:sp>
-      <p:sp>
-        <p:nvSpPr>
-          <p:cNvPr id="13" name="Shape 11"/>
-          <p:cNvSpPr/>
-          <p:nvPr/>
-        </p:nvSpPr>
-        <p:spPr>
-          <a:xfrm>
-            <a:off x="320040" y="3794760"/>
-            <a:ext cx="8503920" cy="777240"/>
-          </a:xfrm>
-          <a:prstGeom prst="roundRect">
-            <a:avLst>
-              <a:gd name="adj" fmla="val 7059"/>
+              <a:gd name="adj" fmla="val 6667"/>
             </a:avLst>
           </a:prstGeom>
           <a:solidFill>
@@ -6645,14 +6836,14 @@
       </p:sp>
       <p:sp>
         <p:nvSpPr>
-          <p:cNvPr id="14" name="Text 12"/>
-          <p:cNvSpPr txBox="1"/>
-          <p:nvPr/>
-        </p:nvSpPr>
-        <p:spPr>
-          <a:xfrm>
-            <a:off x="576072" y="3794760"/>
-            <a:ext cx="7991856" cy="777240"/>
+          <p:cNvPr id="6" name="Text 4"/>
+          <p:cNvSpPr txBox="1"/>
+          <p:nvPr/>
+        </p:nvSpPr>
+        <p:spPr>
+          <a:xfrm>
+            <a:off x="731520" y="3611880"/>
+            <a:ext cx="7680960" cy="822960"/>
           </a:xfrm>
           <a:prstGeom prst="rect">
             <a:avLst/>
@@ -6668,7 +6859,7 @@
               <a:buNone/>
             </a:pPr>
             <a:r>
-              <a:rPr lang="en-US" sz="1700" b="1" dirty="0">
+              <a:rPr lang="en-US" sz="1600" b="1" dirty="0">
                 <a:solidFill>
                   <a:srgbClr val="595959"/>
                 </a:solidFill>
@@ -6676,37 +6867,9 @@
                 <a:ea typeface="メイリオ" pitchFamily="34" charset="-122"/>
                 <a:cs typeface="メイリオ" pitchFamily="34" charset="-120"/>
               </a:rPr>
-              <a:t>教師が管理する学習から　</a:t>
-            </a:r>
-            <a:pPr algn="l" indent="0" marL="0">
-              <a:buNone/>
-            </a:pPr>
-            <a:r>
-              <a:rPr lang="en-US" sz="1700" b="1" dirty="0">
-                <a:solidFill>
-                  <a:srgbClr val="EE7B08"/>
-                </a:solidFill>
-                <a:latin typeface="メイリオ" pitchFamily="34" charset="0"/>
-                <a:ea typeface="メイリオ" pitchFamily="34" charset="-122"/>
-                <a:cs typeface="メイリオ" pitchFamily="34" charset="-120"/>
-              </a:rPr>
-              <a:t>子どもが管理する学習へ</a:t>
-            </a:r>
-            <a:pPr algn="l" indent="0" marL="0">
-              <a:buNone/>
-            </a:pPr>
-            <a:r>
-              <a:rPr lang="en-US" sz="1700" b="1" dirty="0">
-                <a:solidFill>
-                  <a:srgbClr val="595959"/>
-                </a:solidFill>
-                <a:latin typeface="メイリオ" pitchFamily="34" charset="0"/>
-                <a:ea typeface="メイリオ" pitchFamily="34" charset="-122"/>
-                <a:cs typeface="メイリオ" pitchFamily="34" charset="-120"/>
-              </a:rPr>
-              <a:t>　着実に転換が進んでいる。</a:t>
-            </a:r>
-            <a:endParaRPr lang="en-US" sz="1700" dirty="0"/>
+              <a:t>学習指導要領が示す「学びに向かう力」の中核をなす力である。</a:t>
+            </a:r>
+            <a:endParaRPr lang="en-US" sz="1600" dirty="0"/>
           </a:p>
         </p:txBody>
       </p:sp>
@@ -6744,7 +6907,7 @@
         <p:spPr>
           <a:xfrm>
             <a:off x="0" y="-9144"/>
-            <a:ext cx="9144000" cy="612648"/>
+            <a:ext cx="9144000" cy="1161288"/>
           </a:xfrm>
           <a:prstGeom prst="rect">
             <a:avLst/>
@@ -6773,22 +6936,337 @@
                 <a:ea typeface="メイリオ" pitchFamily="34" charset="-122"/>
                 <a:cs typeface="メイリオ" pitchFamily="34" charset="-120"/>
               </a:rPr>
-              <a:t>　今後に向けて</a:t>
+              <a:t>　２　５校時の授業について</a:t>
             </a:r>
             <a:endParaRPr lang="en-US" sz="3000" dirty="0"/>
           </a:p>
-        </p:txBody>
-      </p:sp>
-      <p:sp>
-        <p:nvSpPr>
-          <p:cNvPr id="3" name="Text 1"/>
-          <p:cNvSpPr txBox="1"/>
-          <p:nvPr/>
-        </p:nvSpPr>
-        <p:spPr>
-          <a:xfrm>
-            <a:off x="475488" y="896112"/>
-            <a:ext cx="8193024" cy="777240"/>
+          <a:p>
+            <a:pPr algn="l" indent="0" marL="0">
+              <a:lnSpc>
+                <a:spcPct val="120000"/>
+              </a:lnSpc>
+              <a:buNone/>
+            </a:pPr>
+            <a:r>
+              <a:rPr lang="en-US" sz="2800" b="1" dirty="0">
+                <a:solidFill>
+                  <a:srgbClr val="FFFFFF"/>
+                </a:solidFill>
+                <a:latin typeface="メイリオ" pitchFamily="34" charset="0"/>
+                <a:ea typeface="メイリオ" pitchFamily="34" charset="-122"/>
+                <a:cs typeface="メイリオ" pitchFamily="34" charset="-120"/>
+              </a:rPr>
+              <a:t>　③　自己調整が行われていた授業</a:t>
+            </a:r>
+            <a:endParaRPr lang="en-US" sz="3000" dirty="0"/>
+          </a:p>
+        </p:txBody>
+      </p:sp>
+      <p:sp>
+        <p:nvSpPr>
+          <p:cNvPr id="3" name="Shape 1"/>
+          <p:cNvSpPr/>
+          <p:nvPr/>
+        </p:nvSpPr>
+        <p:spPr>
+          <a:xfrm>
+            <a:off x="320040" y="1444752"/>
+            <a:ext cx="2011680" cy="530352"/>
+          </a:xfrm>
+          <a:prstGeom prst="roundRect">
+            <a:avLst>
+              <a:gd name="adj" fmla="val 12069"/>
+            </a:avLst>
+          </a:prstGeom>
+          <a:solidFill>
+            <a:srgbClr val="44C1A3"/>
+          </a:solidFill>
+          <a:ln/>
+        </p:spPr>
+      </p:sp>
+      <p:sp>
+        <p:nvSpPr>
+          <p:cNvPr id="4" name="Text 2"/>
+          <p:cNvSpPr txBox="1"/>
+          <p:nvPr/>
+        </p:nvSpPr>
+        <p:spPr>
+          <a:xfrm>
+            <a:off x="320040" y="1444752"/>
+            <a:ext cx="2011680" cy="530352"/>
+          </a:xfrm>
+          <a:prstGeom prst="rect">
+            <a:avLst/>
+          </a:prstGeom>
+          <a:noFill/>
+          <a:ln/>
+        </p:spPr>
+        <p:txBody>
+          <a:bodyPr wrap="square" lIns="0" tIns="0" rIns="0" bIns="0" rtlCol="0" anchor="ctr"/>
+          <a:lstStyle/>
+          <a:p>
+            <a:pPr algn="ctr" indent="0" marL="0">
+              <a:lnSpc>
+                <a:spcPct val="115000"/>
+              </a:lnSpc>
+              <a:buNone/>
+            </a:pPr>
+            <a:r>
+              <a:rPr lang="en-US" sz="1500" b="1" dirty="0">
+                <a:solidFill>
+                  <a:srgbClr val="FFFFFF"/>
+                </a:solidFill>
+                <a:latin typeface="メイリオ" pitchFamily="34" charset="0"/>
+                <a:ea typeface="メイリオ" pitchFamily="34" charset="-122"/>
+                <a:cs typeface="メイリオ" pitchFamily="34" charset="-120"/>
+              </a:rPr>
+              <a:t>本時の目標</a:t>
+            </a:r>
+            <a:endParaRPr lang="en-US" sz="1500" dirty="0"/>
+          </a:p>
+        </p:txBody>
+      </p:sp>
+      <p:sp>
+        <p:nvSpPr>
+          <p:cNvPr id="5" name="Shape 3"/>
+          <p:cNvSpPr/>
+          <p:nvPr/>
+        </p:nvSpPr>
+        <p:spPr>
+          <a:xfrm>
+            <a:off x="2514600" y="1444752"/>
+            <a:ext cx="2011680" cy="530352"/>
+          </a:xfrm>
+          <a:prstGeom prst="roundRect">
+            <a:avLst>
+              <a:gd name="adj" fmla="val 12069"/>
+            </a:avLst>
+          </a:prstGeom>
+          <a:solidFill>
+            <a:srgbClr val="44C1A3"/>
+          </a:solidFill>
+          <a:ln/>
+        </p:spPr>
+      </p:sp>
+      <p:sp>
+        <p:nvSpPr>
+          <p:cNvPr id="6" name="Text 4"/>
+          <p:cNvSpPr txBox="1"/>
+          <p:nvPr/>
+        </p:nvSpPr>
+        <p:spPr>
+          <a:xfrm>
+            <a:off x="2514600" y="1444752"/>
+            <a:ext cx="2011680" cy="530352"/>
+          </a:xfrm>
+          <a:prstGeom prst="rect">
+            <a:avLst/>
+          </a:prstGeom>
+          <a:noFill/>
+          <a:ln/>
+        </p:spPr>
+        <p:txBody>
+          <a:bodyPr wrap="square" lIns="0" tIns="0" rIns="0" bIns="0" rtlCol="0" anchor="ctr"/>
+          <a:lstStyle/>
+          <a:p>
+            <a:pPr algn="ctr" indent="0" marL="0">
+              <a:lnSpc>
+                <a:spcPct val="115000"/>
+              </a:lnSpc>
+              <a:buNone/>
+            </a:pPr>
+            <a:r>
+              <a:rPr lang="en-US" sz="1500" b="1" dirty="0">
+                <a:solidFill>
+                  <a:srgbClr val="FFFFFF"/>
+                </a:solidFill>
+                <a:latin typeface="メイリオ" pitchFamily="34" charset="0"/>
+                <a:ea typeface="メイリオ" pitchFamily="34" charset="-122"/>
+                <a:cs typeface="メイリオ" pitchFamily="34" charset="-120"/>
+              </a:rPr>
+              <a:t>振り返り</a:t>
+            </a:r>
+            <a:endParaRPr lang="en-US" sz="1500" dirty="0"/>
+          </a:p>
+        </p:txBody>
+      </p:sp>
+      <p:sp>
+        <p:nvSpPr>
+          <p:cNvPr id="7" name="Shape 5"/>
+          <p:cNvSpPr/>
+          <p:nvPr/>
+        </p:nvSpPr>
+        <p:spPr>
+          <a:xfrm>
+            <a:off x="4709160" y="1444752"/>
+            <a:ext cx="2011680" cy="530352"/>
+          </a:xfrm>
+          <a:prstGeom prst="roundRect">
+            <a:avLst>
+              <a:gd name="adj" fmla="val 12069"/>
+            </a:avLst>
+          </a:prstGeom>
+          <a:solidFill>
+            <a:srgbClr val="44C1A3"/>
+          </a:solidFill>
+          <a:ln/>
+        </p:spPr>
+      </p:sp>
+      <p:sp>
+        <p:nvSpPr>
+          <p:cNvPr id="8" name="Text 6"/>
+          <p:cNvSpPr txBox="1"/>
+          <p:nvPr/>
+        </p:nvSpPr>
+        <p:spPr>
+          <a:xfrm>
+            <a:off x="4709160" y="1444752"/>
+            <a:ext cx="2011680" cy="530352"/>
+          </a:xfrm>
+          <a:prstGeom prst="rect">
+            <a:avLst/>
+          </a:prstGeom>
+          <a:noFill/>
+          <a:ln/>
+        </p:spPr>
+        <p:txBody>
+          <a:bodyPr wrap="square" lIns="0" tIns="0" rIns="0" bIns="0" rtlCol="0" anchor="ctr"/>
+          <a:lstStyle/>
+          <a:p>
+            <a:pPr algn="ctr" indent="0" marL="0">
+              <a:lnSpc>
+                <a:spcPct val="115000"/>
+              </a:lnSpc>
+              <a:buNone/>
+            </a:pPr>
+            <a:r>
+              <a:rPr lang="en-US" sz="1500" b="1" dirty="0">
+                <a:solidFill>
+                  <a:srgbClr val="FFFFFF"/>
+                </a:solidFill>
+                <a:latin typeface="メイリオ" pitchFamily="34" charset="0"/>
+                <a:ea typeface="メイリオ" pitchFamily="34" charset="-122"/>
+                <a:cs typeface="メイリオ" pitchFamily="34" charset="-120"/>
+              </a:rPr>
+              <a:t>自己評価</a:t>
+            </a:r>
+            <a:endParaRPr lang="en-US" sz="1500" dirty="0"/>
+          </a:p>
+        </p:txBody>
+      </p:sp>
+      <p:sp>
+        <p:nvSpPr>
+          <p:cNvPr id="9" name="Shape 7"/>
+          <p:cNvSpPr/>
+          <p:nvPr/>
+        </p:nvSpPr>
+        <p:spPr>
+          <a:xfrm>
+            <a:off x="6903720" y="1444752"/>
+            <a:ext cx="2011680" cy="530352"/>
+          </a:xfrm>
+          <a:prstGeom prst="roundRect">
+            <a:avLst>
+              <a:gd name="adj" fmla="val 12069"/>
+            </a:avLst>
+          </a:prstGeom>
+          <a:solidFill>
+            <a:srgbClr val="44C1A3"/>
+          </a:solidFill>
+          <a:ln/>
+        </p:spPr>
+      </p:sp>
+      <p:sp>
+        <p:nvSpPr>
+          <p:cNvPr id="10" name="Text 8"/>
+          <p:cNvSpPr txBox="1"/>
+          <p:nvPr/>
+        </p:nvSpPr>
+        <p:spPr>
+          <a:xfrm>
+            <a:off x="6903720" y="1444752"/>
+            <a:ext cx="2011680" cy="530352"/>
+          </a:xfrm>
+          <a:prstGeom prst="rect">
+            <a:avLst/>
+          </a:prstGeom>
+          <a:noFill/>
+          <a:ln/>
+        </p:spPr>
+        <p:txBody>
+          <a:bodyPr wrap="square" lIns="0" tIns="0" rIns="0" bIns="0" rtlCol="0" anchor="ctr"/>
+          <a:lstStyle/>
+          <a:p>
+            <a:pPr algn="ctr" indent="0" marL="0">
+              <a:lnSpc>
+                <a:spcPct val="115000"/>
+              </a:lnSpc>
+              <a:buNone/>
+            </a:pPr>
+            <a:r>
+              <a:rPr lang="en-US" sz="1500" b="1" dirty="0">
+                <a:solidFill>
+                  <a:srgbClr val="FFFFFF"/>
+                </a:solidFill>
+                <a:latin typeface="メイリオ" pitchFamily="34" charset="0"/>
+                <a:ea typeface="メイリオ" pitchFamily="34" charset="-122"/>
+                <a:cs typeface="メイリオ" pitchFamily="34" charset="-120"/>
+              </a:rPr>
+              <a:t>次時への見通し</a:t>
+            </a:r>
+            <a:endParaRPr lang="en-US" sz="1500" dirty="0"/>
+          </a:p>
+        </p:txBody>
+      </p:sp>
+      <p:sp>
+        <p:nvSpPr>
+          <p:cNvPr id="11" name="Text 9"/>
+          <p:cNvSpPr txBox="1"/>
+          <p:nvPr/>
+        </p:nvSpPr>
+        <p:spPr>
+          <a:xfrm>
+            <a:off x="320040" y="2066544"/>
+            <a:ext cx="8503920" cy="320040"/>
+          </a:xfrm>
+          <a:prstGeom prst="rect">
+            <a:avLst/>
+          </a:prstGeom>
+          <a:noFill/>
+          <a:ln/>
+        </p:spPr>
+        <p:txBody>
+          <a:bodyPr wrap="square" lIns="0" tIns="0" rIns="0" bIns="0" rtlCol="0" anchor="ctr"/>
+          <a:lstStyle/>
+          <a:p>
+            <a:pPr algn="l" indent="0" marL="0">
+              <a:buNone/>
+            </a:pPr>
+            <a:r>
+              <a:rPr lang="en-US" sz="1400" b="1" dirty="0">
+                <a:solidFill>
+                  <a:srgbClr val="808080"/>
+                </a:solidFill>
+                <a:latin typeface="メイリオ" pitchFamily="34" charset="0"/>
+                <a:ea typeface="メイリオ" pitchFamily="34" charset="-122"/>
+                <a:cs typeface="メイリオ" pitchFamily="34" charset="-120"/>
+              </a:rPr>
+              <a:t>本日の授業では、この４点が大切にされていた。</a:t>
+            </a:r>
+            <a:endParaRPr lang="en-US" sz="1400" dirty="0"/>
+          </a:p>
+        </p:txBody>
+      </p:sp>
+      <p:sp>
+        <p:nvSpPr>
+          <p:cNvPr id="12" name="Text 10"/>
+          <p:cNvSpPr txBox="1"/>
+          <p:nvPr/>
+        </p:nvSpPr>
+        <p:spPr>
+          <a:xfrm>
+            <a:off x="320040" y="2468880"/>
+            <a:ext cx="8503920" cy="1188720"/>
           </a:xfrm>
           <a:prstGeom prst="rect">
             <a:avLst/>
@@ -6802,12 +7280,29 @@
           <a:p>
             <a:pPr algn="l" indent="0" marL="0">
               <a:lnSpc>
-                <a:spcPct val="120000"/>
-              </a:lnSpc>
-              <a:buNone/>
-            </a:pPr>
-            <a:r>
-              <a:rPr lang="en-US" sz="1800" b="1" dirty="0">
+                <a:spcPct val="150000"/>
+              </a:lnSpc>
+              <a:buNone/>
+            </a:pPr>
+            <a:r>
+              <a:rPr lang="en-US" sz="1500" b="1" dirty="0">
+                <a:solidFill>
+                  <a:srgbClr val="595959"/>
+                </a:solidFill>
+                <a:latin typeface="メイリオ" pitchFamily="34" charset="0"/>
+                <a:ea typeface="メイリオ" pitchFamily="34" charset="-122"/>
+                <a:cs typeface="メイリオ" pitchFamily="34" charset="-120"/>
+              </a:rPr>
+              <a:t>・田口　先生　　着替えの前に目標と流れを確認し、</a:t>
+            </a:r>
+            <a:pPr algn="l" indent="0" marL="0">
+              <a:lnSpc>
+                <a:spcPct val="150000"/>
+              </a:lnSpc>
+              <a:buNone/>
+            </a:pPr>
+            <a:r>
+              <a:rPr lang="en-US" sz="1500" b="1" dirty="0">
                 <a:solidFill>
                   <a:srgbClr val="EE7B08"/>
                 </a:solidFill>
@@ -6815,16 +7310,19 @@
                 <a:ea typeface="メイリオ" pitchFamily="34" charset="-122"/>
                 <a:cs typeface="メイリオ" pitchFamily="34" charset="-120"/>
               </a:rPr>
-              <a:t>学力調査結果</a:t>
-            </a:r>
-            <a:pPr algn="l" indent="0" marL="0">
-              <a:lnSpc>
-                <a:spcPct val="120000"/>
-              </a:lnSpc>
-              <a:buNone/>
-            </a:pPr>
-            <a:r>
-              <a:rPr lang="en-US" sz="1800" b="1" dirty="0">
+              <a:t>学習カードで要点を振り返る</a:t>
+            </a:r>
+            <a:endParaRPr lang="en-US" sz="1500" dirty="0"/>
+          </a:p>
+          <a:p>
+            <a:pPr algn="l" indent="0" marL="0">
+              <a:lnSpc>
+                <a:spcPct val="150000"/>
+              </a:lnSpc>
+              <a:buNone/>
+            </a:pPr>
+            <a:r>
+              <a:rPr lang="en-US" sz="1500" b="1" dirty="0">
                 <a:solidFill>
                   <a:srgbClr val="595959"/>
                 </a:solidFill>
@@ -6832,16 +7330,16 @@
                 <a:ea typeface="メイリオ" pitchFamily="34" charset="-122"/>
                 <a:cs typeface="メイリオ" pitchFamily="34" charset="-120"/>
               </a:rPr>
-              <a:t>　と　</a:t>
-            </a:r>
-            <a:pPr algn="l" indent="0" marL="0">
-              <a:lnSpc>
-                <a:spcPct val="120000"/>
-              </a:lnSpc>
-              <a:buNone/>
-            </a:pPr>
-            <a:r>
-              <a:rPr lang="en-US" sz="1800" b="1" dirty="0">
+              <a:t>・塚本　先生　　Today’s Goal と Plan を提示し、</a:t>
+            </a:r>
+            <a:pPr algn="l" indent="0" marL="0">
+              <a:lnSpc>
+                <a:spcPct val="150000"/>
+              </a:lnSpc>
+              <a:buNone/>
+            </a:pPr>
+            <a:r>
+              <a:rPr lang="en-US" sz="1500" b="1" dirty="0">
                 <a:solidFill>
                   <a:srgbClr val="EE7B08"/>
                 </a:solidFill>
@@ -6849,16 +7347,19 @@
                 <a:ea typeface="メイリオ" pitchFamily="34" charset="-122"/>
                 <a:cs typeface="メイリオ" pitchFamily="34" charset="-120"/>
               </a:rPr>
-              <a:t>今日の授業</a:t>
-            </a:r>
-            <a:pPr algn="l" indent="0" marL="0">
-              <a:lnSpc>
-                <a:spcPct val="120000"/>
-              </a:lnSpc>
-              <a:buNone/>
-            </a:pPr>
-            <a:r>
-              <a:rPr lang="en-US" sz="1800" b="1" dirty="0">
+              <a:t>振り返りをワークシートに記入</a:t>
+            </a:r>
+            <a:endParaRPr lang="en-US" sz="1500" dirty="0"/>
+          </a:p>
+          <a:p>
+            <a:pPr algn="l" indent="0" marL="0">
+              <a:lnSpc>
+                <a:spcPct val="150000"/>
+              </a:lnSpc>
+              <a:buNone/>
+            </a:pPr>
+            <a:r>
+              <a:rPr lang="en-US" sz="1500" b="1" dirty="0">
                 <a:solidFill>
                   <a:srgbClr val="595959"/>
                 </a:solidFill>
@@ -6866,19 +7367,33 @@
                 <a:ea typeface="メイリオ" pitchFamily="34" charset="-122"/>
                 <a:cs typeface="メイリオ" pitchFamily="34" charset="-120"/>
               </a:rPr>
-              <a:t>　をつなげて考えると、</a:t>
-            </a:r>
-            <a:endParaRPr lang="en-US" sz="1800" dirty="0"/>
-          </a:p>
-          <a:p>
-            <a:pPr algn="l" indent="0" marL="0">
-              <a:lnSpc>
-                <a:spcPct val="120000"/>
-              </a:lnSpc>
-              <a:buNone/>
-            </a:pPr>
-            <a:r>
-              <a:rPr lang="en-US" sz="1800" b="1" dirty="0">
+              <a:t>・東海林　先生　</a:t>
+            </a:r>
+            <a:pPr algn="l" indent="0" marL="0">
+              <a:lnSpc>
+                <a:spcPct val="150000"/>
+              </a:lnSpc>
+              <a:buNone/>
+            </a:pPr>
+            <a:r>
+              <a:rPr lang="en-US" sz="1500" b="1" dirty="0">
+                <a:solidFill>
+                  <a:srgbClr val="EE7B08"/>
+                </a:solidFill>
+                <a:latin typeface="メイリオ" pitchFamily="34" charset="0"/>
+                <a:ea typeface="メイリオ" pitchFamily="34" charset="-122"/>
+                <a:cs typeface="メイリオ" pitchFamily="34" charset="-120"/>
+              </a:rPr>
+              <a:t>前時のワークシート</a:t>
+            </a:r>
+            <a:pPr algn="l" indent="0" marL="0">
+              <a:lnSpc>
+                <a:spcPct val="150000"/>
+              </a:lnSpc>
+              <a:buNone/>
+            </a:pPr>
+            <a:r>
+              <a:rPr lang="en-US" sz="1500" b="1" dirty="0">
                 <a:solidFill>
                   <a:srgbClr val="595959"/>
                 </a:solidFill>
@@ -6886,22 +7401,22 @@
                 <a:ea typeface="メイリオ" pitchFamily="34" charset="-122"/>
                 <a:cs typeface="メイリオ" pitchFamily="34" charset="-120"/>
               </a:rPr>
-              <a:t>今後さらに伸ばしたいのは</a:t>
-            </a:r>
-            <a:endParaRPr lang="en-US" sz="1800" dirty="0"/>
-          </a:p>
-        </p:txBody>
-      </p:sp>
-      <p:sp>
-        <p:nvSpPr>
-          <p:cNvPr id="4" name="Shape 2"/>
+              <a:t>で自分の考えを確かめてから議論へ</a:t>
+            </a:r>
+            <a:endParaRPr lang="en-US" sz="1500" dirty="0"/>
+          </a:p>
+        </p:txBody>
+      </p:sp>
+      <p:sp>
+        <p:nvSpPr>
+          <p:cNvPr id="13" name="Shape 11"/>
           <p:cNvSpPr/>
           <p:nvPr/>
         </p:nvSpPr>
         <p:spPr>
           <a:xfrm>
-            <a:off x="475488" y="1755648"/>
-            <a:ext cx="8193024" cy="777240"/>
+            <a:off x="320040" y="3794760"/>
+            <a:ext cx="8503920" cy="777240"/>
           </a:xfrm>
           <a:prstGeom prst="roundRect">
             <a:avLst>
@@ -6921,14 +7436,14 @@
       </p:sp>
       <p:sp>
         <p:nvSpPr>
-          <p:cNvPr id="5" name="Text 3"/>
-          <p:cNvSpPr txBox="1"/>
-          <p:nvPr/>
-        </p:nvSpPr>
-        <p:spPr>
-          <a:xfrm>
-            <a:off x="731520" y="1755648"/>
-            <a:ext cx="7680960" cy="777240"/>
+          <p:cNvPr id="14" name="Text 12"/>
+          <p:cNvSpPr txBox="1"/>
+          <p:nvPr/>
+        </p:nvSpPr>
+        <p:spPr>
+          <a:xfrm>
+            <a:off x="576072" y="3794760"/>
+            <a:ext cx="7991856" cy="777240"/>
           </a:xfrm>
           <a:prstGeom prst="rect">
             <a:avLst/>
@@ -6944,7 +7459,21 @@
               <a:buNone/>
             </a:pPr>
             <a:r>
-              <a:rPr lang="en-US" sz="2300" b="1" dirty="0">
+              <a:rPr lang="en-US" sz="1700" b="1" dirty="0">
+                <a:solidFill>
+                  <a:srgbClr val="595959"/>
+                </a:solidFill>
+                <a:latin typeface="メイリオ" pitchFamily="34" charset="0"/>
+                <a:ea typeface="メイリオ" pitchFamily="34" charset="-122"/>
+                <a:cs typeface="メイリオ" pitchFamily="34" charset="-120"/>
+              </a:rPr>
+              <a:t>教師が管理する学習から　</a:t>
+            </a:r>
+            <a:pPr algn="l" indent="0" marL="0">
+              <a:buNone/>
+            </a:pPr>
+            <a:r>
+              <a:rPr lang="en-US" sz="1700" b="1" dirty="0">
                 <a:solidFill>
                   <a:srgbClr val="EE7B08"/>
                 </a:solidFill>
@@ -6952,107 +7481,13 @@
                 <a:ea typeface="メイリオ" pitchFamily="34" charset="-122"/>
                 <a:cs typeface="メイリオ" pitchFamily="34" charset="-120"/>
               </a:rPr>
-              <a:t>「学びを自分事として捉える子ども」である。</a:t>
-            </a:r>
-            <a:endParaRPr lang="en-US" sz="2300" dirty="0"/>
-          </a:p>
-        </p:txBody>
-      </p:sp>
-      <p:sp>
-        <p:nvSpPr>
-          <p:cNvPr id="6" name="Text 4"/>
-          <p:cNvSpPr txBox="1"/>
-          <p:nvPr/>
-        </p:nvSpPr>
-        <p:spPr>
-          <a:xfrm>
-            <a:off x="475488" y="2670048"/>
-            <a:ext cx="8193024" cy="320040"/>
-          </a:xfrm>
-          <a:prstGeom prst="rect">
-            <a:avLst/>
-          </a:prstGeom>
-          <a:noFill/>
-          <a:ln/>
-        </p:spPr>
-        <p:txBody>
-          <a:bodyPr wrap="square" lIns="0" tIns="0" rIns="0" bIns="0" rtlCol="0" anchor="ctr"/>
-          <a:lstStyle/>
-          <a:p>
-            <a:pPr algn="l" indent="0" marL="0">
-              <a:buNone/>
-            </a:pPr>
-            <a:r>
-              <a:rPr lang="en-US" sz="1500" b="1" dirty="0">
-                <a:solidFill>
-                  <a:srgbClr val="808080"/>
-                </a:solidFill>
-                <a:latin typeface="メイリオ" pitchFamily="34" charset="0"/>
-                <a:ea typeface="メイリオ" pitchFamily="34" charset="-122"/>
-                <a:cs typeface="メイリオ" pitchFamily="34" charset="-120"/>
-              </a:rPr>
-              <a:t>そのためには</a:t>
-            </a:r>
-            <a:endParaRPr lang="en-US" sz="1500" dirty="0"/>
-          </a:p>
-        </p:txBody>
-      </p:sp>
-      <p:sp>
-        <p:nvSpPr>
-          <p:cNvPr id="7" name="Shape 5"/>
-          <p:cNvSpPr/>
-          <p:nvPr/>
-        </p:nvSpPr>
-        <p:spPr>
-          <a:xfrm>
-            <a:off x="475488" y="3054096"/>
-            <a:ext cx="2468880" cy="585216"/>
-          </a:xfrm>
-          <a:prstGeom prst="roundRect">
-            <a:avLst>
-              <a:gd name="adj" fmla="val 10938"/>
-            </a:avLst>
-          </a:prstGeom>
-          <a:solidFill>
-            <a:srgbClr val="E9F7F3"/>
-          </a:solidFill>
-          <a:ln w="12700">
-            <a:solidFill>
-              <a:srgbClr val="B9E5DA"/>
-            </a:solidFill>
-            <a:prstDash val="solid"/>
-          </a:ln>
-        </p:spPr>
-      </p:sp>
-      <p:sp>
-        <p:nvSpPr>
-          <p:cNvPr id="8" name="Text 6"/>
-          <p:cNvSpPr txBox="1"/>
-          <p:nvPr/>
-        </p:nvSpPr>
-        <p:spPr>
-          <a:xfrm>
-            <a:off x="475488" y="3054096"/>
-            <a:ext cx="2468880" cy="585216"/>
-          </a:xfrm>
-          <a:prstGeom prst="rect">
-            <a:avLst/>
-          </a:prstGeom>
-          <a:noFill/>
-          <a:ln/>
-        </p:spPr>
-        <p:txBody>
-          <a:bodyPr wrap="square" lIns="0" tIns="0" rIns="0" bIns="0" rtlCol="0" anchor="ctr"/>
-          <a:lstStyle/>
-          <a:p>
-            <a:pPr algn="ctr" indent="0" marL="0">
-              <a:lnSpc>
-                <a:spcPct val="115000"/>
-              </a:lnSpc>
-              <a:buNone/>
-            </a:pPr>
-            <a:r>
-              <a:rPr lang="en-US" sz="1600" b="1" dirty="0">
+              <a:t>子どもが管理する学習へ</a:t>
+            </a:r>
+            <a:pPr algn="l" indent="0" marL="0">
+              <a:buNone/>
+            </a:pPr>
+            <a:r>
+              <a:rPr lang="en-US" sz="1700" b="1" dirty="0">
                 <a:solidFill>
                   <a:srgbClr val="595959"/>
                 </a:solidFill>
@@ -7060,214 +7495,9 @@
                 <a:ea typeface="メイリオ" pitchFamily="34" charset="-122"/>
                 <a:cs typeface="メイリオ" pitchFamily="34" charset="-120"/>
               </a:rPr>
-              <a:t>自己肯定感</a:t>
-            </a:r>
-            <a:endParaRPr lang="en-US" sz="1600" dirty="0"/>
-          </a:p>
-        </p:txBody>
-      </p:sp>
-      <p:sp>
-        <p:nvSpPr>
-          <p:cNvPr id="9" name="Shape 7"/>
-          <p:cNvSpPr/>
-          <p:nvPr/>
-        </p:nvSpPr>
-        <p:spPr>
-          <a:xfrm>
-            <a:off x="3218688" y="3054096"/>
-            <a:ext cx="2468880" cy="585216"/>
-          </a:xfrm>
-          <a:prstGeom prst="roundRect">
-            <a:avLst>
-              <a:gd name="adj" fmla="val 10938"/>
-            </a:avLst>
-          </a:prstGeom>
-          <a:solidFill>
-            <a:srgbClr val="E9F7F3"/>
-          </a:solidFill>
-          <a:ln w="12700">
-            <a:solidFill>
-              <a:srgbClr val="B9E5DA"/>
-            </a:solidFill>
-            <a:prstDash val="solid"/>
-          </a:ln>
-        </p:spPr>
-      </p:sp>
-      <p:sp>
-        <p:nvSpPr>
-          <p:cNvPr id="10" name="Text 8"/>
-          <p:cNvSpPr txBox="1"/>
-          <p:nvPr/>
-        </p:nvSpPr>
-        <p:spPr>
-          <a:xfrm>
-            <a:off x="3218688" y="3054096"/>
-            <a:ext cx="2468880" cy="585216"/>
-          </a:xfrm>
-          <a:prstGeom prst="rect">
-            <a:avLst/>
-          </a:prstGeom>
-          <a:noFill/>
-          <a:ln/>
-        </p:spPr>
-        <p:txBody>
-          <a:bodyPr wrap="square" lIns="0" tIns="0" rIns="0" bIns="0" rtlCol="0" anchor="ctr"/>
-          <a:lstStyle/>
-          <a:p>
-            <a:pPr algn="ctr" indent="0" marL="0">
-              <a:lnSpc>
-                <a:spcPct val="115000"/>
-              </a:lnSpc>
-              <a:buNone/>
-            </a:pPr>
-            <a:r>
-              <a:rPr lang="en-US" sz="1600" b="1" dirty="0">
-                <a:solidFill>
-                  <a:srgbClr val="595959"/>
-                </a:solidFill>
-                <a:latin typeface="メイリオ" pitchFamily="34" charset="0"/>
-                <a:ea typeface="メイリオ" pitchFamily="34" charset="-122"/>
-                <a:cs typeface="メイリオ" pitchFamily="34" charset="-120"/>
-              </a:rPr>
-              <a:t>対話・協働</a:t>
-            </a:r>
-            <a:endParaRPr lang="en-US" sz="1600" dirty="0"/>
-          </a:p>
-        </p:txBody>
-      </p:sp>
-      <p:sp>
-        <p:nvSpPr>
-          <p:cNvPr id="11" name="Shape 9"/>
-          <p:cNvSpPr/>
-          <p:nvPr/>
-        </p:nvSpPr>
-        <p:spPr>
-          <a:xfrm>
-            <a:off x="5961888" y="3054096"/>
-            <a:ext cx="2468880" cy="585216"/>
-          </a:xfrm>
-          <a:prstGeom prst="roundRect">
-            <a:avLst>
-              <a:gd name="adj" fmla="val 10938"/>
-            </a:avLst>
-          </a:prstGeom>
-          <a:solidFill>
-            <a:srgbClr val="E9F7F3"/>
-          </a:solidFill>
-          <a:ln w="12700">
-            <a:solidFill>
-              <a:srgbClr val="B9E5DA"/>
-            </a:solidFill>
-            <a:prstDash val="solid"/>
-          </a:ln>
-        </p:spPr>
-      </p:sp>
-      <p:sp>
-        <p:nvSpPr>
-          <p:cNvPr id="12" name="Text 10"/>
-          <p:cNvSpPr txBox="1"/>
-          <p:nvPr/>
-        </p:nvSpPr>
-        <p:spPr>
-          <a:xfrm>
-            <a:off x="5961888" y="3054096"/>
-            <a:ext cx="2468880" cy="585216"/>
-          </a:xfrm>
-          <a:prstGeom prst="rect">
-            <a:avLst/>
-          </a:prstGeom>
-          <a:noFill/>
-          <a:ln/>
-        </p:spPr>
-        <p:txBody>
-          <a:bodyPr wrap="square" lIns="0" tIns="0" rIns="0" bIns="0" rtlCol="0" anchor="ctr"/>
-          <a:lstStyle/>
-          <a:p>
-            <a:pPr algn="ctr" indent="0" marL="0">
-              <a:lnSpc>
-                <a:spcPct val="115000"/>
-              </a:lnSpc>
-              <a:buNone/>
-            </a:pPr>
-            <a:r>
-              <a:rPr lang="en-US" sz="1600" b="1" dirty="0">
-                <a:solidFill>
-                  <a:srgbClr val="595959"/>
-                </a:solidFill>
-                <a:latin typeface="メイリオ" pitchFamily="34" charset="0"/>
-                <a:ea typeface="メイリオ" pitchFamily="34" charset="-122"/>
-                <a:cs typeface="メイリオ" pitchFamily="34" charset="-120"/>
-              </a:rPr>
-              <a:t>学習の自己調整</a:t>
-            </a:r>
-            <a:endParaRPr lang="en-US" sz="1600" dirty="0"/>
-          </a:p>
-        </p:txBody>
-      </p:sp>
-      <p:sp>
-        <p:nvSpPr>
-          <p:cNvPr id="13" name="Text 11"/>
-          <p:cNvSpPr txBox="1"/>
-          <p:nvPr/>
-        </p:nvSpPr>
-        <p:spPr>
-          <a:xfrm>
-            <a:off x="475488" y="3840480"/>
-            <a:ext cx="8193024" cy="502920"/>
-          </a:xfrm>
-          <a:prstGeom prst="rect">
-            <a:avLst/>
-          </a:prstGeom>
-          <a:noFill/>
-          <a:ln/>
-        </p:spPr>
-        <p:txBody>
-          <a:bodyPr wrap="square" lIns="0" tIns="0" rIns="0" bIns="0" rtlCol="0" anchor="ctr"/>
-          <a:lstStyle/>
-          <a:p>
-            <a:pPr algn="l" indent="0" marL="0">
-              <a:buNone/>
-            </a:pPr>
-            <a:r>
-              <a:rPr lang="en-US" sz="1800" b="1" dirty="0">
-                <a:solidFill>
-                  <a:srgbClr val="595959"/>
-                </a:solidFill>
-                <a:latin typeface="メイリオ" pitchFamily="34" charset="0"/>
-                <a:ea typeface="メイリオ" pitchFamily="34" charset="-122"/>
-                <a:cs typeface="メイリオ" pitchFamily="34" charset="-120"/>
-              </a:rPr>
-              <a:t>を　</a:t>
-            </a:r>
-            <a:pPr algn="l" indent="0" marL="0">
-              <a:buNone/>
-            </a:pPr>
-            <a:r>
-              <a:rPr lang="en-US" sz="1800" b="1" dirty="0">
-                <a:solidFill>
-                  <a:srgbClr val="EE7B08"/>
-                </a:solidFill>
-                <a:latin typeface="メイリオ" pitchFamily="34" charset="0"/>
-                <a:ea typeface="メイリオ" pitchFamily="34" charset="-122"/>
-                <a:cs typeface="メイリオ" pitchFamily="34" charset="-120"/>
-              </a:rPr>
-              <a:t>９年間で系統的に</a:t>
-            </a:r>
-            <a:pPr algn="l" indent="0" marL="0">
-              <a:buNone/>
-            </a:pPr>
-            <a:r>
-              <a:rPr lang="en-US" sz="1800" b="1" dirty="0">
-                <a:solidFill>
-                  <a:srgbClr val="595959"/>
-                </a:solidFill>
-                <a:latin typeface="メイリオ" pitchFamily="34" charset="0"/>
-                <a:ea typeface="メイリオ" pitchFamily="34" charset="-122"/>
-                <a:cs typeface="メイリオ" pitchFamily="34" charset="-120"/>
-              </a:rPr>
-              <a:t>　育てていくことが重要である。</a:t>
-            </a:r>
-            <a:endParaRPr lang="en-US" sz="1800" dirty="0"/>
+              <a:t>　着実に転換が進んでいる。</a:t>
+            </a:r>
+            <a:endParaRPr lang="en-US" sz="1700" dirty="0"/>
           </a:p>
         </p:txBody>
       </p:sp>
@@ -7282,6 +7512,567 @@
 <file path=ppt/slides/slide18.xml><?xml version="1.0" encoding="utf-8"?>
 <p:sld xmlns:a="http://schemas.openxmlformats.org/drawingml/2006/main" xmlns:r="http://schemas.openxmlformats.org/officeDocument/2006/relationships" xmlns:p="http://schemas.openxmlformats.org/presentationml/2006/main">
   <p:cSld name="Slide 18">
+    <p:spTree>
+      <p:nvGrpSpPr>
+        <p:cNvPr id="1" name=""/>
+        <p:cNvGrpSpPr/>
+        <p:nvPr/>
+      </p:nvGrpSpPr>
+      <p:grpSpPr>
+        <a:xfrm>
+          <a:off x="0" y="0"/>
+          <a:ext cx="0" cy="0"/>
+          <a:chOff x="0" y="0"/>
+          <a:chExt cx="0" cy="0"/>
+        </a:xfrm>
+      </p:grpSpPr>
+      <p:sp>
+        <p:nvSpPr>
+          <p:cNvPr id="2" name="Text 0"/>
+          <p:cNvSpPr txBox="1"/>
+          <p:nvPr/>
+        </p:nvSpPr>
+        <p:spPr>
+          <a:xfrm>
+            <a:off x="0" y="-9144"/>
+            <a:ext cx="9144000" cy="612648"/>
+          </a:xfrm>
+          <a:prstGeom prst="rect">
+            <a:avLst/>
+          </a:prstGeom>
+          <a:solidFill>
+            <a:srgbClr val="44C1A3"/>
+          </a:solidFill>
+          <a:ln/>
+        </p:spPr>
+        <p:txBody>
+          <a:bodyPr wrap="square" lIns="0" tIns="0" rIns="0" bIns="0" rtlCol="0" anchor="ctr"/>
+          <a:lstStyle/>
+          <a:p>
+            <a:pPr algn="l" indent="0" marL="0">
+              <a:lnSpc>
+                <a:spcPct val="120000"/>
+              </a:lnSpc>
+              <a:buNone/>
+            </a:pPr>
+            <a:r>
+              <a:rPr lang="en-US" sz="3000" b="1" dirty="0">
+                <a:solidFill>
+                  <a:srgbClr val="FFFFFF"/>
+                </a:solidFill>
+                <a:latin typeface="メイリオ" pitchFamily="34" charset="0"/>
+                <a:ea typeface="メイリオ" pitchFamily="34" charset="-122"/>
+                <a:cs typeface="メイリオ" pitchFamily="34" charset="-120"/>
+              </a:rPr>
+              <a:t>　今後に向けて</a:t>
+            </a:r>
+            <a:endParaRPr lang="en-US" sz="3000" dirty="0"/>
+          </a:p>
+        </p:txBody>
+      </p:sp>
+      <p:sp>
+        <p:nvSpPr>
+          <p:cNvPr id="3" name="Text 1"/>
+          <p:cNvSpPr txBox="1"/>
+          <p:nvPr/>
+        </p:nvSpPr>
+        <p:spPr>
+          <a:xfrm>
+            <a:off x="475488" y="896112"/>
+            <a:ext cx="8193024" cy="777240"/>
+          </a:xfrm>
+          <a:prstGeom prst="rect">
+            <a:avLst/>
+          </a:prstGeom>
+          <a:noFill/>
+          <a:ln/>
+        </p:spPr>
+        <p:txBody>
+          <a:bodyPr wrap="square" lIns="0" tIns="0" rIns="0" bIns="0" rtlCol="0" anchor="t"/>
+          <a:lstStyle/>
+          <a:p>
+            <a:pPr algn="l" indent="0" marL="0">
+              <a:lnSpc>
+                <a:spcPct val="120000"/>
+              </a:lnSpc>
+              <a:buNone/>
+            </a:pPr>
+            <a:r>
+              <a:rPr lang="en-US" sz="1800" b="1" dirty="0">
+                <a:solidFill>
+                  <a:srgbClr val="EE7B08"/>
+                </a:solidFill>
+                <a:latin typeface="メイリオ" pitchFamily="34" charset="0"/>
+                <a:ea typeface="メイリオ" pitchFamily="34" charset="-122"/>
+                <a:cs typeface="メイリオ" pitchFamily="34" charset="-120"/>
+              </a:rPr>
+              <a:t>学力調査結果</a:t>
+            </a:r>
+            <a:pPr algn="l" indent="0" marL="0">
+              <a:lnSpc>
+                <a:spcPct val="120000"/>
+              </a:lnSpc>
+              <a:buNone/>
+            </a:pPr>
+            <a:r>
+              <a:rPr lang="en-US" sz="1800" b="1" dirty="0">
+                <a:solidFill>
+                  <a:srgbClr val="595959"/>
+                </a:solidFill>
+                <a:latin typeface="メイリオ" pitchFamily="34" charset="0"/>
+                <a:ea typeface="メイリオ" pitchFamily="34" charset="-122"/>
+                <a:cs typeface="メイリオ" pitchFamily="34" charset="-120"/>
+              </a:rPr>
+              <a:t>　と　</a:t>
+            </a:r>
+            <a:pPr algn="l" indent="0" marL="0">
+              <a:lnSpc>
+                <a:spcPct val="120000"/>
+              </a:lnSpc>
+              <a:buNone/>
+            </a:pPr>
+            <a:r>
+              <a:rPr lang="en-US" sz="1800" b="1" dirty="0">
+                <a:solidFill>
+                  <a:srgbClr val="EE7B08"/>
+                </a:solidFill>
+                <a:latin typeface="メイリオ" pitchFamily="34" charset="0"/>
+                <a:ea typeface="メイリオ" pitchFamily="34" charset="-122"/>
+                <a:cs typeface="メイリオ" pitchFamily="34" charset="-120"/>
+              </a:rPr>
+              <a:t>今日の授業</a:t>
+            </a:r>
+            <a:pPr algn="l" indent="0" marL="0">
+              <a:lnSpc>
+                <a:spcPct val="120000"/>
+              </a:lnSpc>
+              <a:buNone/>
+            </a:pPr>
+            <a:r>
+              <a:rPr lang="en-US" sz="1800" b="1" dirty="0">
+                <a:solidFill>
+                  <a:srgbClr val="595959"/>
+                </a:solidFill>
+                <a:latin typeface="メイリオ" pitchFamily="34" charset="0"/>
+                <a:ea typeface="メイリオ" pitchFamily="34" charset="-122"/>
+                <a:cs typeface="メイリオ" pitchFamily="34" charset="-120"/>
+              </a:rPr>
+              <a:t>　をつなげて考えると、</a:t>
+            </a:r>
+            <a:endParaRPr lang="en-US" sz="1800" dirty="0"/>
+          </a:p>
+          <a:p>
+            <a:pPr algn="l" indent="0" marL="0">
+              <a:lnSpc>
+                <a:spcPct val="120000"/>
+              </a:lnSpc>
+              <a:buNone/>
+            </a:pPr>
+            <a:r>
+              <a:rPr lang="en-US" sz="1800" b="1" dirty="0">
+                <a:solidFill>
+                  <a:srgbClr val="595959"/>
+                </a:solidFill>
+                <a:latin typeface="メイリオ" pitchFamily="34" charset="0"/>
+                <a:ea typeface="メイリオ" pitchFamily="34" charset="-122"/>
+                <a:cs typeface="メイリオ" pitchFamily="34" charset="-120"/>
+              </a:rPr>
+              <a:t>今後さらに伸ばしたいのは</a:t>
+            </a:r>
+            <a:endParaRPr lang="en-US" sz="1800" dirty="0"/>
+          </a:p>
+        </p:txBody>
+      </p:sp>
+      <p:sp>
+        <p:nvSpPr>
+          <p:cNvPr id="4" name="Shape 2"/>
+          <p:cNvSpPr/>
+          <p:nvPr/>
+        </p:nvSpPr>
+        <p:spPr>
+          <a:xfrm>
+            <a:off x="475488" y="1755648"/>
+            <a:ext cx="8193024" cy="777240"/>
+          </a:xfrm>
+          <a:prstGeom prst="roundRect">
+            <a:avLst>
+              <a:gd name="adj" fmla="val 7059"/>
+            </a:avLst>
+          </a:prstGeom>
+          <a:solidFill>
+            <a:srgbClr val="E9F7F3"/>
+          </a:solidFill>
+          <a:ln w="12700">
+            <a:solidFill>
+              <a:srgbClr val="B9E5DA"/>
+            </a:solidFill>
+            <a:prstDash val="solid"/>
+          </a:ln>
+        </p:spPr>
+      </p:sp>
+      <p:sp>
+        <p:nvSpPr>
+          <p:cNvPr id="5" name="Text 3"/>
+          <p:cNvSpPr txBox="1"/>
+          <p:nvPr/>
+        </p:nvSpPr>
+        <p:spPr>
+          <a:xfrm>
+            <a:off x="731520" y="1755648"/>
+            <a:ext cx="7680960" cy="777240"/>
+          </a:xfrm>
+          <a:prstGeom prst="rect">
+            <a:avLst/>
+          </a:prstGeom>
+          <a:noFill/>
+          <a:ln/>
+        </p:spPr>
+        <p:txBody>
+          <a:bodyPr wrap="square" lIns="0" tIns="0" rIns="0" bIns="0" rtlCol="0" anchor="ctr"/>
+          <a:lstStyle/>
+          <a:p>
+            <a:pPr algn="l" indent="0" marL="0">
+              <a:buNone/>
+            </a:pPr>
+            <a:r>
+              <a:rPr lang="en-US" sz="2300" b="1" dirty="0">
+                <a:solidFill>
+                  <a:srgbClr val="EE7B08"/>
+                </a:solidFill>
+                <a:latin typeface="メイリオ" pitchFamily="34" charset="0"/>
+                <a:ea typeface="メイリオ" pitchFamily="34" charset="-122"/>
+                <a:cs typeface="メイリオ" pitchFamily="34" charset="-120"/>
+              </a:rPr>
+              <a:t>「学びを自分事として捉える子ども」である。</a:t>
+            </a:r>
+            <a:endParaRPr lang="en-US" sz="2300" dirty="0"/>
+          </a:p>
+        </p:txBody>
+      </p:sp>
+      <p:sp>
+        <p:nvSpPr>
+          <p:cNvPr id="6" name="Text 4"/>
+          <p:cNvSpPr txBox="1"/>
+          <p:nvPr/>
+        </p:nvSpPr>
+        <p:spPr>
+          <a:xfrm>
+            <a:off x="475488" y="2670048"/>
+            <a:ext cx="8193024" cy="320040"/>
+          </a:xfrm>
+          <a:prstGeom prst="rect">
+            <a:avLst/>
+          </a:prstGeom>
+          <a:noFill/>
+          <a:ln/>
+        </p:spPr>
+        <p:txBody>
+          <a:bodyPr wrap="square" lIns="0" tIns="0" rIns="0" bIns="0" rtlCol="0" anchor="ctr"/>
+          <a:lstStyle/>
+          <a:p>
+            <a:pPr algn="l" indent="0" marL="0">
+              <a:buNone/>
+            </a:pPr>
+            <a:r>
+              <a:rPr lang="en-US" sz="1500" b="1" dirty="0">
+                <a:solidFill>
+                  <a:srgbClr val="808080"/>
+                </a:solidFill>
+                <a:latin typeface="メイリオ" pitchFamily="34" charset="0"/>
+                <a:ea typeface="メイリオ" pitchFamily="34" charset="-122"/>
+                <a:cs typeface="メイリオ" pitchFamily="34" charset="-120"/>
+              </a:rPr>
+              <a:t>そのためには</a:t>
+            </a:r>
+            <a:endParaRPr lang="en-US" sz="1500" dirty="0"/>
+          </a:p>
+        </p:txBody>
+      </p:sp>
+      <p:sp>
+        <p:nvSpPr>
+          <p:cNvPr id="7" name="Shape 5"/>
+          <p:cNvSpPr/>
+          <p:nvPr/>
+        </p:nvSpPr>
+        <p:spPr>
+          <a:xfrm>
+            <a:off x="475488" y="3054096"/>
+            <a:ext cx="2468880" cy="585216"/>
+          </a:xfrm>
+          <a:prstGeom prst="roundRect">
+            <a:avLst>
+              <a:gd name="adj" fmla="val 10938"/>
+            </a:avLst>
+          </a:prstGeom>
+          <a:solidFill>
+            <a:srgbClr val="E9F7F3"/>
+          </a:solidFill>
+          <a:ln w="12700">
+            <a:solidFill>
+              <a:srgbClr val="B9E5DA"/>
+            </a:solidFill>
+            <a:prstDash val="solid"/>
+          </a:ln>
+        </p:spPr>
+      </p:sp>
+      <p:sp>
+        <p:nvSpPr>
+          <p:cNvPr id="8" name="Text 6"/>
+          <p:cNvSpPr txBox="1"/>
+          <p:nvPr/>
+        </p:nvSpPr>
+        <p:spPr>
+          <a:xfrm>
+            <a:off x="475488" y="3054096"/>
+            <a:ext cx="2468880" cy="585216"/>
+          </a:xfrm>
+          <a:prstGeom prst="rect">
+            <a:avLst/>
+          </a:prstGeom>
+          <a:noFill/>
+          <a:ln/>
+        </p:spPr>
+        <p:txBody>
+          <a:bodyPr wrap="square" lIns="0" tIns="0" rIns="0" bIns="0" rtlCol="0" anchor="ctr"/>
+          <a:lstStyle/>
+          <a:p>
+            <a:pPr algn="ctr" indent="0" marL="0">
+              <a:lnSpc>
+                <a:spcPct val="115000"/>
+              </a:lnSpc>
+              <a:buNone/>
+            </a:pPr>
+            <a:r>
+              <a:rPr lang="en-US" sz="1600" b="1" dirty="0">
+                <a:solidFill>
+                  <a:srgbClr val="595959"/>
+                </a:solidFill>
+                <a:latin typeface="メイリオ" pitchFamily="34" charset="0"/>
+                <a:ea typeface="メイリオ" pitchFamily="34" charset="-122"/>
+                <a:cs typeface="メイリオ" pitchFamily="34" charset="-120"/>
+              </a:rPr>
+              <a:t>自己肯定感</a:t>
+            </a:r>
+            <a:endParaRPr lang="en-US" sz="1600" dirty="0"/>
+          </a:p>
+        </p:txBody>
+      </p:sp>
+      <p:sp>
+        <p:nvSpPr>
+          <p:cNvPr id="9" name="Shape 7"/>
+          <p:cNvSpPr/>
+          <p:nvPr/>
+        </p:nvSpPr>
+        <p:spPr>
+          <a:xfrm>
+            <a:off x="3218688" y="3054096"/>
+            <a:ext cx="2468880" cy="585216"/>
+          </a:xfrm>
+          <a:prstGeom prst="roundRect">
+            <a:avLst>
+              <a:gd name="adj" fmla="val 10938"/>
+            </a:avLst>
+          </a:prstGeom>
+          <a:solidFill>
+            <a:srgbClr val="E9F7F3"/>
+          </a:solidFill>
+          <a:ln w="12700">
+            <a:solidFill>
+              <a:srgbClr val="B9E5DA"/>
+            </a:solidFill>
+            <a:prstDash val="solid"/>
+          </a:ln>
+        </p:spPr>
+      </p:sp>
+      <p:sp>
+        <p:nvSpPr>
+          <p:cNvPr id="10" name="Text 8"/>
+          <p:cNvSpPr txBox="1"/>
+          <p:nvPr/>
+        </p:nvSpPr>
+        <p:spPr>
+          <a:xfrm>
+            <a:off x="3218688" y="3054096"/>
+            <a:ext cx="2468880" cy="585216"/>
+          </a:xfrm>
+          <a:prstGeom prst="rect">
+            <a:avLst/>
+          </a:prstGeom>
+          <a:noFill/>
+          <a:ln/>
+        </p:spPr>
+        <p:txBody>
+          <a:bodyPr wrap="square" lIns="0" tIns="0" rIns="0" bIns="0" rtlCol="0" anchor="ctr"/>
+          <a:lstStyle/>
+          <a:p>
+            <a:pPr algn="ctr" indent="0" marL="0">
+              <a:lnSpc>
+                <a:spcPct val="115000"/>
+              </a:lnSpc>
+              <a:buNone/>
+            </a:pPr>
+            <a:r>
+              <a:rPr lang="en-US" sz="1600" b="1" dirty="0">
+                <a:solidFill>
+                  <a:srgbClr val="595959"/>
+                </a:solidFill>
+                <a:latin typeface="メイリオ" pitchFamily="34" charset="0"/>
+                <a:ea typeface="メイリオ" pitchFamily="34" charset="-122"/>
+                <a:cs typeface="メイリオ" pitchFamily="34" charset="-120"/>
+              </a:rPr>
+              <a:t>対話・協働</a:t>
+            </a:r>
+            <a:endParaRPr lang="en-US" sz="1600" dirty="0"/>
+          </a:p>
+        </p:txBody>
+      </p:sp>
+      <p:sp>
+        <p:nvSpPr>
+          <p:cNvPr id="11" name="Shape 9"/>
+          <p:cNvSpPr/>
+          <p:nvPr/>
+        </p:nvSpPr>
+        <p:spPr>
+          <a:xfrm>
+            <a:off x="5961888" y="3054096"/>
+            <a:ext cx="2468880" cy="585216"/>
+          </a:xfrm>
+          <a:prstGeom prst="roundRect">
+            <a:avLst>
+              <a:gd name="adj" fmla="val 10938"/>
+            </a:avLst>
+          </a:prstGeom>
+          <a:solidFill>
+            <a:srgbClr val="E9F7F3"/>
+          </a:solidFill>
+          <a:ln w="12700">
+            <a:solidFill>
+              <a:srgbClr val="B9E5DA"/>
+            </a:solidFill>
+            <a:prstDash val="solid"/>
+          </a:ln>
+        </p:spPr>
+      </p:sp>
+      <p:sp>
+        <p:nvSpPr>
+          <p:cNvPr id="12" name="Text 10"/>
+          <p:cNvSpPr txBox="1"/>
+          <p:nvPr/>
+        </p:nvSpPr>
+        <p:spPr>
+          <a:xfrm>
+            <a:off x="5961888" y="3054096"/>
+            <a:ext cx="2468880" cy="585216"/>
+          </a:xfrm>
+          <a:prstGeom prst="rect">
+            <a:avLst/>
+          </a:prstGeom>
+          <a:noFill/>
+          <a:ln/>
+        </p:spPr>
+        <p:txBody>
+          <a:bodyPr wrap="square" lIns="0" tIns="0" rIns="0" bIns="0" rtlCol="0" anchor="ctr"/>
+          <a:lstStyle/>
+          <a:p>
+            <a:pPr algn="ctr" indent="0" marL="0">
+              <a:lnSpc>
+                <a:spcPct val="115000"/>
+              </a:lnSpc>
+              <a:buNone/>
+            </a:pPr>
+            <a:r>
+              <a:rPr lang="en-US" sz="1600" b="1" dirty="0">
+                <a:solidFill>
+                  <a:srgbClr val="595959"/>
+                </a:solidFill>
+                <a:latin typeface="メイリオ" pitchFamily="34" charset="0"/>
+                <a:ea typeface="メイリオ" pitchFamily="34" charset="-122"/>
+                <a:cs typeface="メイリオ" pitchFamily="34" charset="-120"/>
+              </a:rPr>
+              <a:t>学習の自己調整</a:t>
+            </a:r>
+            <a:endParaRPr lang="en-US" sz="1600" dirty="0"/>
+          </a:p>
+        </p:txBody>
+      </p:sp>
+      <p:sp>
+        <p:nvSpPr>
+          <p:cNvPr id="13" name="Text 11"/>
+          <p:cNvSpPr txBox="1"/>
+          <p:nvPr/>
+        </p:nvSpPr>
+        <p:spPr>
+          <a:xfrm>
+            <a:off x="475488" y="3840480"/>
+            <a:ext cx="8193024" cy="502920"/>
+          </a:xfrm>
+          <a:prstGeom prst="rect">
+            <a:avLst/>
+          </a:prstGeom>
+          <a:noFill/>
+          <a:ln/>
+        </p:spPr>
+        <p:txBody>
+          <a:bodyPr wrap="square" lIns="0" tIns="0" rIns="0" bIns="0" rtlCol="0" anchor="ctr"/>
+          <a:lstStyle/>
+          <a:p>
+            <a:pPr algn="l" indent="0" marL="0">
+              <a:buNone/>
+            </a:pPr>
+            <a:r>
+              <a:rPr lang="en-US" sz="1800" b="1" dirty="0">
+                <a:solidFill>
+                  <a:srgbClr val="595959"/>
+                </a:solidFill>
+                <a:latin typeface="メイリオ" pitchFamily="34" charset="0"/>
+                <a:ea typeface="メイリオ" pitchFamily="34" charset="-122"/>
+                <a:cs typeface="メイリオ" pitchFamily="34" charset="-120"/>
+              </a:rPr>
+              <a:t>を　</a:t>
+            </a:r>
+            <a:pPr algn="l" indent="0" marL="0">
+              <a:buNone/>
+            </a:pPr>
+            <a:r>
+              <a:rPr lang="en-US" sz="1800" b="1" dirty="0">
+                <a:solidFill>
+                  <a:srgbClr val="EE7B08"/>
+                </a:solidFill>
+                <a:latin typeface="メイリオ" pitchFamily="34" charset="0"/>
+                <a:ea typeface="メイリオ" pitchFamily="34" charset="-122"/>
+                <a:cs typeface="メイリオ" pitchFamily="34" charset="-120"/>
+              </a:rPr>
+              <a:t>９年間で系統的に</a:t>
+            </a:r>
+            <a:pPr algn="l" indent="0" marL="0">
+              <a:buNone/>
+            </a:pPr>
+            <a:r>
+              <a:rPr lang="en-US" sz="1800" b="1" dirty="0">
+                <a:solidFill>
+                  <a:srgbClr val="595959"/>
+                </a:solidFill>
+                <a:latin typeface="メイリオ" pitchFamily="34" charset="0"/>
+                <a:ea typeface="メイリオ" pitchFamily="34" charset="-122"/>
+                <a:cs typeface="メイリオ" pitchFamily="34" charset="-120"/>
+              </a:rPr>
+              <a:t>　育てていくことが重要である。</a:t>
+            </a:r>
+            <a:endParaRPr lang="en-US" sz="1800" dirty="0"/>
+          </a:p>
+        </p:txBody>
+      </p:sp>
+    </p:spTree>
+  </p:cSld>
+  <p:clrMapOvr>
+    <a:masterClrMapping/>
+  </p:clrMapOvr>
+</p:sld>
+</file>
+
+<file path=ppt/slides/slide19.xml><?xml version="1.0" encoding="utf-8"?>
+<p:sld xmlns:a="http://schemas.openxmlformats.org/drawingml/2006/main" xmlns:r="http://schemas.openxmlformats.org/officeDocument/2006/relationships" xmlns:p="http://schemas.openxmlformats.org/presentationml/2006/main">
+  <p:cSld name="Slide 19">
     <p:spTree>
       <p:nvGrpSpPr>
         <p:cNvPr id="1" name=""/>
